--- a/plugins/gradient-cio/assets/examples/gradient-portfolio-construction-global-public-equity.pptx
+++ b/plugins/gradient-cio/assets/examples/gradient-portfolio-construction-global-public-equity.pptx
@@ -1071,6 +1071,81 @@
               </a:solidFill>
             </c:spPr>
           </c:dPt>
+          <c:dLbls>
+            <c:dLbl>
+              <c:idx val="0"/>
+              <c:tx>
+                <c:rich>
+                  <a:bodyPr/>
+                  <a:lstStyle/>
+                  <a:p>
+                    <a:r>
+                      <a:rPr lang="en-US" sz="800"/>
+                      <a:t>59.0%</a:t>
+                    </a:r>
+                  </a:p>
+                </c:rich>
+              </c:tx>
+              <c:dLblPos val="outEnd"/>
+              <c:showLegendKey val="0"/>
+              <c:showVal val="0"/>
+              <c:showCatName val="0"/>
+              <c:showSerName val="0"/>
+              <c:showPercent val="0"/>
+              <c:showBubbleSize val="0"/>
+            </c:dLbl>
+            <c:dLbl>
+              <c:idx val="1"/>
+              <c:tx>
+                <c:rich>
+                  <a:bodyPr/>
+                  <a:lstStyle/>
+                  <a:p>
+                    <a:r>
+                      <a:rPr lang="en-US" sz="800"/>
+                      <a:t>23.0%</a:t>
+                    </a:r>
+                  </a:p>
+                </c:rich>
+              </c:tx>
+              <c:dLblPos val="outEnd"/>
+              <c:showLegendKey val="0"/>
+              <c:showVal val="0"/>
+              <c:showCatName val="0"/>
+              <c:showSerName val="0"/>
+              <c:showPercent val="0"/>
+              <c:showBubbleSize val="0"/>
+            </c:dLbl>
+            <c:dLbl>
+              <c:idx val="2"/>
+              <c:tx>
+                <c:rich>
+                  <a:bodyPr/>
+                  <a:lstStyle/>
+                  <a:p>
+                    <a:r>
+                      <a:rPr lang="en-US" sz="800"/>
+                      <a:t>18.0%</a:t>
+                    </a:r>
+                  </a:p>
+                </c:rich>
+              </c:tx>
+              <c:dLblPos val="outEnd"/>
+              <c:showLegendKey val="0"/>
+              <c:showVal val="0"/>
+              <c:showCatName val="0"/>
+              <c:showSerName val="0"/>
+              <c:showPercent val="0"/>
+              <c:showBubbleSize val="0"/>
+            </c:dLbl>
+            <c:dLblPos val="outEnd"/>
+            <c:showLegendKey val="0"/>
+            <c:showVal val="0"/>
+            <c:showCatName val="0"/>
+            <c:showSerName val="0"/>
+            <c:showPercent val="0"/>
+            <c:showBubbleSize val="0"/>
+          </c:dLbls>
           <c:cat>
             <c:strRef>
               <c:f>Sheet1!$A$2:$A$4</c:f>
@@ -1431,6 +1506,59 @@
               </a:solidFill>
             </c:spPr>
           </c:dPt>
+          <c:dLbls>
+            <c:dLbl>
+              <c:idx val="0"/>
+              <c:tx>
+                <c:rich>
+                  <a:bodyPr/>
+                  <a:lstStyle/>
+                  <a:p>
+                    <a:r>
+                      <a:rPr lang="en-US" sz="800"/>
+                      <a:t>7.2%</a:t>
+                    </a:r>
+                  </a:p>
+                </c:rich>
+              </c:tx>
+              <c:dLblPos val="outEnd"/>
+              <c:showLegendKey val="0"/>
+              <c:showVal val="0"/>
+              <c:showCatName val="0"/>
+              <c:showSerName val="0"/>
+              <c:showPercent val="0"/>
+              <c:showBubbleSize val="0"/>
+            </c:dLbl>
+            <c:dLbl>
+              <c:idx val="1"/>
+              <c:tx>
+                <c:rich>
+                  <a:bodyPr/>
+                  <a:lstStyle/>
+                  <a:p>
+                    <a:r>
+                      <a:rPr lang="en-US" sz="800"/>
+                      <a:t>7.1%</a:t>
+                    </a:r>
+                  </a:p>
+                </c:rich>
+              </c:tx>
+              <c:dLblPos val="outEnd"/>
+              <c:showLegendKey val="0"/>
+              <c:showVal val="0"/>
+              <c:showCatName val="0"/>
+              <c:showSerName val="0"/>
+              <c:showPercent val="0"/>
+              <c:showBubbleSize val="0"/>
+            </c:dLbl>
+            <c:dLblPos val="outEnd"/>
+            <c:showLegendKey val="0"/>
+            <c:showVal val="0"/>
+            <c:showCatName val="0"/>
+            <c:showSerName val="0"/>
+            <c:showPercent val="0"/>
+            <c:showBubbleSize val="0"/>
+          </c:dLbls>
           <c:cat>
             <c:strRef>
               <c:f>Sheet1!$A$2:$A$3</c:f>
@@ -1610,6 +1738,103 @@
               </a:solidFill>
             </c:spPr>
           </c:dPt>
+          <c:dLbls>
+            <c:dLbl>
+              <c:idx val="0"/>
+              <c:tx>
+                <c:rich>
+                  <a:bodyPr/>
+                  <a:lstStyle/>
+                  <a:p>
+                    <a:r>
+                      <a:rPr lang="en-US" sz="800"/>
+                      <a:t>13.0% NAV</a:t>
+                    </a:r>
+                  </a:p>
+                </c:rich>
+              </c:tx>
+              <c:dLblPos val="outEnd"/>
+              <c:showLegendKey val="0"/>
+              <c:showVal val="0"/>
+              <c:showCatName val="0"/>
+              <c:showSerName val="0"/>
+              <c:showPercent val="0"/>
+              <c:showBubbleSize val="0"/>
+            </c:dLbl>
+            <c:dLbl>
+              <c:idx val="1"/>
+              <c:tx>
+                <c:rich>
+                  <a:bodyPr/>
+                  <a:lstStyle/>
+                  <a:p>
+                    <a:r>
+                      <a:rPr lang="en-US" sz="800"/>
+                      <a:t>15.0% NAV</a:t>
+                    </a:r>
+                  </a:p>
+                </c:rich>
+              </c:tx>
+              <c:dLblPos val="outEnd"/>
+              <c:showLegendKey val="0"/>
+              <c:showVal val="0"/>
+              <c:showCatName val="0"/>
+              <c:showSerName val="0"/>
+              <c:showPercent val="0"/>
+              <c:showBubbleSize val="0"/>
+            </c:dLbl>
+            <c:dLbl>
+              <c:idx val="2"/>
+              <c:tx>
+                <c:rich>
+                  <a:bodyPr/>
+                  <a:lstStyle/>
+                  <a:p>
+                    <a:r>
+                      <a:rPr lang="en-US" sz="800"/>
+                      <a:t>2.3% NAV</a:t>
+                    </a:r>
+                  </a:p>
+                </c:rich>
+              </c:tx>
+              <c:dLblPos val="outEnd"/>
+              <c:showLegendKey val="0"/>
+              <c:showVal val="0"/>
+              <c:showCatName val="0"/>
+              <c:showSerName val="0"/>
+              <c:showPercent val="0"/>
+              <c:showBubbleSize val="0"/>
+            </c:dLbl>
+            <c:dLbl>
+              <c:idx val="3"/>
+              <c:tx>
+                <c:rich>
+                  <a:bodyPr/>
+                  <a:lstStyle/>
+                  <a:p>
+                    <a:r>
+                      <a:rPr lang="en-US" sz="800"/>
+                      <a:t>3.0% NAV</a:t>
+                    </a:r>
+                  </a:p>
+                </c:rich>
+              </c:tx>
+              <c:dLblPos val="outEnd"/>
+              <c:showLegendKey val="0"/>
+              <c:showVal val="0"/>
+              <c:showCatName val="0"/>
+              <c:showSerName val="0"/>
+              <c:showPercent val="0"/>
+              <c:showBubbleSize val="0"/>
+            </c:dLbl>
+            <c:dLblPos val="outEnd"/>
+            <c:showLegendKey val="0"/>
+            <c:showVal val="0"/>
+            <c:showCatName val="0"/>
+            <c:showSerName val="0"/>
+            <c:showPercent val="0"/>
+            <c:showBubbleSize val="0"/>
+          </c:dLbls>
           <c:cat>
             <c:strRef>
               <c:f>Sheet1!$A$2:$A$5</c:f>
@@ -1777,6 +2002,37 @@
               </a:solidFill>
             </c:spPr>
           </c:dPt>
+          <c:dLbls>
+            <c:dLbl>
+              <c:idx val="0"/>
+              <c:tx>
+                <c:rich>
+                  <a:bodyPr/>
+                  <a:lstStyle/>
+                  <a:p>
+                    <a:r>
+                      <a:rPr lang="en-US" sz="800"/>
+                      <a:t>+7.1%</a:t>
+                    </a:r>
+                  </a:p>
+                </c:rich>
+              </c:tx>
+              <c:dLblPos val="outEnd"/>
+              <c:showLegendKey val="0"/>
+              <c:showVal val="0"/>
+              <c:showCatName val="0"/>
+              <c:showSerName val="0"/>
+              <c:showPercent val="0"/>
+              <c:showBubbleSize val="0"/>
+            </c:dLbl>
+            <c:dLblPos val="outEnd"/>
+            <c:showLegendKey val="0"/>
+            <c:showVal val="0"/>
+            <c:showCatName val="0"/>
+            <c:showSerName val="0"/>
+            <c:showPercent val="0"/>
+            <c:showBubbleSize val="0"/>
+          </c:dLbls>
           <c:cat>
             <c:strRef>
               <c:f>Sheet1!$A$2:$A$2</c:f>
@@ -4785,7 +5041,7 @@
         </p:nvSpPr>
         <p:spPr>
           <a:xfrm>
-            <a:off x="685800" y="1828800"/>
+            <a:off x="685800" y="1664208"/>
             <a:ext cx="9966960" cy="274320"/>
           </a:xfrm>
           <a:prstGeom prst="rect">
@@ -4803,7 +5059,7 @@
               <a:spcAft>
                 <a:spcPts val="0"/>
               </a:spcAft>
-              <a:defRPr sz="900" b="1">
+              <a:defRPr sz="850" b="1">
                 <a:solidFill>
                   <a:srgbClr val="C6F432"/>
                 </a:solidFill>
@@ -4827,7 +5083,7 @@
         </p:nvSpPr>
         <p:spPr>
           <a:xfrm>
-            <a:off x="685800" y="2176272"/>
+            <a:off x="685800" y="2011680"/>
             <a:ext cx="9966960" cy="1234440"/>
           </a:xfrm>
           <a:prstGeom prst="rect">
@@ -4845,7 +5101,7 @@
               <a:spcAft>
                 <a:spcPts val="0"/>
               </a:spcAft>
-              <a:defRPr sz="3400" b="1">
+              <a:defRPr sz="3300" b="1">
                 <a:solidFill>
                   <a:srgbClr val="FFFFFF"/>
                 </a:solidFill>
@@ -4856,7 +5112,7 @@
               <a:rPr>
                 <a:latin typeface="Inter"/>
               </a:rPr>
-              <a:t>Northstar Global Public Equity Portfolio (TEST)</a:t>
+              <a:t>Northstar Global Public Equity Portfolio</a:t>
             </a:r>
           </a:p>
         </p:txBody>
@@ -4869,8 +5125,8 @@
         </p:nvSpPr>
         <p:spPr>
           <a:xfrm>
-            <a:off x="685800" y="3456432"/>
-            <a:ext cx="9692640" cy="640080"/>
+            <a:off x="685800" y="3273552"/>
+            <a:ext cx="9692640" cy="594360"/>
           </a:xfrm>
           <a:prstGeom prst="rect">
             <a:avLst/>
@@ -4887,7 +5143,7 @@
               <a:spcAft>
                 <a:spcPts val="0"/>
               </a:spcAft>
-              <a:defRPr sz="1500" b="0">
+              <a:defRPr sz="1400" b="0">
                 <a:solidFill>
                   <a:srgbClr val="9AA5B1"/>
                 </a:solidFill>
@@ -4898,7 +5154,7 @@
               <a:rPr>
                 <a:latin typeface="Inter"/>
               </a:rPr>
-              <a:t>Decision pack · prepared for the Investment Committee (TEST)</a:t>
+              <a:t>Portfolio construction review · prepared for the Investment Committee</a:t>
             </a:r>
           </a:p>
         </p:txBody>
@@ -4911,8 +5167,8 @@
         </p:nvSpPr>
         <p:spPr>
           <a:xfrm>
-            <a:off x="685800" y="4251960"/>
-            <a:ext cx="1005840" cy="54864"/>
+            <a:off x="685800" y="4005072"/>
+            <a:ext cx="822960" cy="45720"/>
           </a:xfrm>
           <a:prstGeom prst="rect">
             <a:avLst/>
@@ -4960,8 +5216,8 @@
         </p:nvSpPr>
         <p:spPr>
           <a:xfrm>
-            <a:off x="685800" y="4572000"/>
-            <a:ext cx="3063240" cy="182880"/>
+            <a:off x="685800" y="4315968"/>
+            <a:ext cx="4709160" cy="182880"/>
           </a:xfrm>
           <a:prstGeom prst="rect">
             <a:avLst/>
@@ -5002,8 +5258,8 @@
         </p:nvSpPr>
         <p:spPr>
           <a:xfrm>
-            <a:off x="685800" y="4773168"/>
-            <a:ext cx="3063240" cy="320040"/>
+            <a:off x="685800" y="4507992"/>
+            <a:ext cx="4709160" cy="310896"/>
           </a:xfrm>
           <a:prstGeom prst="rect">
             <a:avLst/>
@@ -5044,8 +5300,8 @@
         </p:nvSpPr>
         <p:spPr>
           <a:xfrm>
-            <a:off x="4160520" y="4572000"/>
-            <a:ext cx="3063240" cy="182880"/>
+            <a:off x="5852160" y="4315968"/>
+            <a:ext cx="4709160" cy="182880"/>
           </a:xfrm>
           <a:prstGeom prst="rect">
             <a:avLst/>
@@ -5073,7 +5329,7 @@
               <a:rPr>
                 <a:latin typeface="Inter"/>
               </a:rPr>
-              <a:t>BASE CURRENCY</a:t>
+              <a:t>TOTAL NAV</a:t>
             </a:r>
           </a:p>
         </p:txBody>
@@ -5086,8 +5342,8 @@
         </p:nvSpPr>
         <p:spPr>
           <a:xfrm>
-            <a:off x="4160520" y="4773168"/>
-            <a:ext cx="3063240" cy="320040"/>
+            <a:off x="5852160" y="4507992"/>
+            <a:ext cx="4709160" cy="310896"/>
           </a:xfrm>
           <a:prstGeom prst="rect">
             <a:avLst/>
@@ -5115,7 +5371,7 @@
               <a:rPr>
                 <a:latin typeface="Inter"/>
               </a:rPr>
-              <a:t>USD</a:t>
+              <a:t>$1,000.0M</a:t>
             </a:r>
           </a:p>
         </p:txBody>
@@ -5128,8 +5384,8 @@
         </p:nvSpPr>
         <p:spPr>
           <a:xfrm>
-            <a:off x="7635240" y="4572000"/>
-            <a:ext cx="3063240" cy="182880"/>
+            <a:off x="685800" y="4937759"/>
+            <a:ext cx="4709160" cy="182880"/>
           </a:xfrm>
           <a:prstGeom prst="rect">
             <a:avLst/>
@@ -5157,7 +5413,7 @@
               <a:rPr>
                 <a:latin typeface="Inter"/>
               </a:rPr>
-              <a:t>TOTAL NAV</a:t>
+              <a:t>PUBLIC-EQUITY WEIGHT</a:t>
             </a:r>
           </a:p>
         </p:txBody>
@@ -5170,8 +5426,8 @@
         </p:nvSpPr>
         <p:spPr>
           <a:xfrm>
-            <a:off x="7635240" y="4773168"/>
-            <a:ext cx="3063240" cy="320040"/>
+            <a:off x="685800" y="5129783"/>
+            <a:ext cx="4709160" cy="310896"/>
           </a:xfrm>
           <a:prstGeom prst="rect">
             <a:avLst/>
@@ -5199,7 +5455,7 @@
               <a:rPr>
                 <a:latin typeface="Inter"/>
               </a:rPr>
-              <a:t>$1,000.0M</a:t>
+              <a:t>42.0%</a:t>
             </a:r>
           </a:p>
         </p:txBody>
@@ -5212,8 +5468,8 @@
         </p:nvSpPr>
         <p:spPr>
           <a:xfrm>
-            <a:off x="685800" y="5230368"/>
-            <a:ext cx="3063240" cy="182880"/>
+            <a:off x="5852160" y="4937759"/>
+            <a:ext cx="4709160" cy="182880"/>
           </a:xfrm>
           <a:prstGeom prst="rect">
             <a:avLst/>
@@ -5241,7 +5497,7 @@
               <a:rPr>
                 <a:latin typeface="Inter"/>
               </a:rPr>
-              <a:t>PUBLIC-EQUITY WEIGHT</a:t>
+              <a:t>POLICY BENCHMARK</a:t>
             </a:r>
           </a:p>
         </p:txBody>
@@ -5254,8 +5510,8 @@
         </p:nvSpPr>
         <p:spPr>
           <a:xfrm>
-            <a:off x="685800" y="5431536"/>
-            <a:ext cx="3063240" cy="320040"/>
+            <a:off x="5852160" y="5129783"/>
+            <a:ext cx="4709160" cy="310896"/>
           </a:xfrm>
           <a:prstGeom prst="rect">
             <a:avLst/>
@@ -5283,189 +5539,21 @@
               <a:rPr>
                 <a:latin typeface="Inter"/>
               </a:rPr>
-              <a:t>42.0%</a:t>
+              <a:t>Northstar Global Equity Index</a:t>
             </a:r>
           </a:p>
         </p:txBody>
       </p:sp>
       <p:sp>
         <p:nvSpPr>
-          <p:cNvPr id="17" name="TextBox 16"/>
-          <p:cNvSpPr txBox="1"/>
-          <p:nvPr/>
-        </p:nvSpPr>
-        <p:spPr>
-          <a:xfrm>
-            <a:off x="4160520" y="5230368"/>
-            <a:ext cx="3063240" cy="182880"/>
-          </a:xfrm>
-          <a:prstGeom prst="rect">
-            <a:avLst/>
-          </a:prstGeom>
-          <a:noFill/>
-        </p:spPr>
-        <p:txBody>
-          <a:bodyPr wrap="none" lIns="9144" rIns="9144" tIns="9144" bIns="9144" anchor="t">
-            <a:spAutoFit/>
-          </a:bodyPr>
-          <a:lstStyle/>
-          <a:p>
-            <a:pPr algn="l">
-              <a:spcAft>
-                <a:spcPts val="0"/>
-              </a:spcAft>
-              <a:defRPr sz="700" b="1">
-                <a:solidFill>
-                  <a:srgbClr val="8A94A1"/>
-                </a:solidFill>
-                <a:latin typeface="Inter"/>
-              </a:defRPr>
-            </a:pPr>
-            <a:r>
-              <a:rPr>
-                <a:latin typeface="Inter"/>
-              </a:rPr>
-              <a:t>POLICY BENCHMARK</a:t>
-            </a:r>
-          </a:p>
-        </p:txBody>
-      </p:sp>
-      <p:sp>
-        <p:nvSpPr>
-          <p:cNvPr id="18" name="TextBox 17"/>
-          <p:cNvSpPr txBox="1"/>
-          <p:nvPr/>
-        </p:nvSpPr>
-        <p:spPr>
-          <a:xfrm>
-            <a:off x="4160520" y="5431536"/>
-            <a:ext cx="3063240" cy="320040"/>
-          </a:xfrm>
-          <a:prstGeom prst="rect">
-            <a:avLst/>
-          </a:prstGeom>
-          <a:noFill/>
-        </p:spPr>
-        <p:txBody>
-          <a:bodyPr wrap="none" lIns="9144" rIns="9144" tIns="9144" bIns="9144" anchor="t">
-            <a:spAutoFit/>
-          </a:bodyPr>
-          <a:lstStyle/>
-          <a:p>
-            <a:pPr algn="l">
-              <a:spcAft>
-                <a:spcPts val="0"/>
-              </a:spcAft>
-              <a:defRPr sz="1000" b="1">
-                <a:solidFill>
-                  <a:srgbClr val="FFFFFF"/>
-                </a:solidFill>
-                <a:latin typeface="Inter"/>
-              </a:defRPr>
-            </a:pPr>
-            <a:r>
-              <a:rPr>
-                <a:latin typeface="Inter"/>
-              </a:rPr>
-              <a:t>Example Global Equity Index (TEST)</a:t>
-            </a:r>
-          </a:p>
-        </p:txBody>
-      </p:sp>
-      <p:sp>
-        <p:nvSpPr>
-          <p:cNvPr id="19" name="TextBox 18"/>
-          <p:cNvSpPr txBox="1"/>
-          <p:nvPr/>
-        </p:nvSpPr>
-        <p:spPr>
-          <a:xfrm>
-            <a:off x="7635240" y="5230368"/>
-            <a:ext cx="3063240" cy="182880"/>
-          </a:xfrm>
-          <a:prstGeom prst="rect">
-            <a:avLst/>
-          </a:prstGeom>
-          <a:noFill/>
-        </p:spPr>
-        <p:txBody>
-          <a:bodyPr wrap="none" lIns="9144" rIns="9144" tIns="9144" bIns="9144" anchor="t">
-            <a:spAutoFit/>
-          </a:bodyPr>
-          <a:lstStyle/>
-          <a:p>
-            <a:pPr algn="l">
-              <a:spcAft>
-                <a:spcPts val="0"/>
-              </a:spcAft>
-              <a:defRPr sz="700" b="1">
-                <a:solidFill>
-                  <a:srgbClr val="8A94A1"/>
-                </a:solidFill>
-                <a:latin typeface="Inter"/>
-              </a:defRPr>
-            </a:pPr>
-            <a:r>
-              <a:rPr>
-                <a:latin typeface="Inter"/>
-              </a:rPr>
-              <a:t>DATA SCOPE</a:t>
-            </a:r>
-          </a:p>
-        </p:txBody>
-      </p:sp>
-      <p:sp>
-        <p:nvSpPr>
-          <p:cNvPr id="20" name="TextBox 19"/>
-          <p:cNvSpPr txBox="1"/>
-          <p:nvPr/>
-        </p:nvSpPr>
-        <p:spPr>
-          <a:xfrm>
-            <a:off x="7635240" y="5431536"/>
-            <a:ext cx="3063240" cy="320040"/>
-          </a:xfrm>
-          <a:prstGeom prst="rect">
-            <a:avLst/>
-          </a:prstGeom>
-          <a:noFill/>
-        </p:spPr>
-        <p:txBody>
-          <a:bodyPr wrap="none" lIns="9144" rIns="9144" tIns="9144" bIns="9144" anchor="t">
-            <a:spAutoFit/>
-          </a:bodyPr>
-          <a:lstStyle/>
-          <a:p>
-            <a:pPr algn="l">
-              <a:spcAft>
-                <a:spcPts val="0"/>
-              </a:spcAft>
-              <a:defRPr sz="1000" b="1">
-                <a:solidFill>
-                  <a:srgbClr val="FFFFFF"/>
-                </a:solidFill>
-                <a:latin typeface="Inter"/>
-              </a:defRPr>
-            </a:pPr>
-            <a:r>
-              <a:rPr>
-                <a:latin typeface="Inter"/>
-              </a:rPr>
-              <a:t>Fictional TEST data</a:t>
-            </a:r>
-          </a:p>
-        </p:txBody>
-      </p:sp>
-      <p:sp>
-        <p:nvSpPr>
-          <p:cNvPr id="21" name="Rectangle 20"/>
+          <p:cNvPr id="17" name="Rectangle 16"/>
           <p:cNvSpPr/>
           <p:nvPr/>
         </p:nvSpPr>
         <p:spPr>
           <a:xfrm>
-            <a:off x="685800" y="5833872"/>
-            <a:ext cx="3063240" cy="384048"/>
+            <a:off x="685800" y="5687568"/>
+            <a:ext cx="3337560" cy="530352"/>
           </a:xfrm>
           <a:prstGeom prst="rect">
             <a:avLst/>
@@ -5507,14 +5595,14 @@
       </p:sp>
       <p:sp>
         <p:nvSpPr>
-          <p:cNvPr id="22" name="TextBox 21"/>
+          <p:cNvPr id="18" name="TextBox 17"/>
           <p:cNvSpPr txBox="1"/>
           <p:nvPr/>
         </p:nvSpPr>
         <p:spPr>
           <a:xfrm>
-            <a:off x="822960" y="5934456"/>
-            <a:ext cx="2788920" cy="164592"/>
+            <a:off x="822960" y="5760720"/>
+            <a:ext cx="3063240" cy="128016"/>
           </a:xfrm>
           <a:prstGeom prst="rect">
             <a:avLst/>
@@ -5531,7 +5619,7 @@
               <a:spcAft>
                 <a:spcPts val="0"/>
               </a:spcAft>
-              <a:defRPr sz="800" b="1">
+              <a:defRPr sz="620" b="1">
                 <a:solidFill>
                   <a:srgbClr val="0D1117"/>
                 </a:solidFill>
@@ -5542,6 +5630,48 @@
               <a:rPr>
                 <a:latin typeface="Inter"/>
               </a:rPr>
+              <a:t>OVERALL VIEW</a:t>
+            </a:r>
+          </a:p>
+        </p:txBody>
+      </p:sp>
+      <p:sp>
+        <p:nvSpPr>
+          <p:cNvPr id="19" name="TextBox 18"/>
+          <p:cNvSpPr txBox="1"/>
+          <p:nvPr/>
+        </p:nvSpPr>
+        <p:spPr>
+          <a:xfrm>
+            <a:off x="822960" y="5916168"/>
+            <a:ext cx="3063240" cy="182880"/>
+          </a:xfrm>
+          <a:prstGeom prst="rect">
+            <a:avLst/>
+          </a:prstGeom>
+          <a:noFill/>
+        </p:spPr>
+        <p:txBody>
+          <a:bodyPr wrap="none" lIns="9144" rIns="9144" tIns="9144" bIns="9144" anchor="t">
+            <a:spAutoFit/>
+          </a:bodyPr>
+          <a:lstStyle/>
+          <a:p>
+            <a:pPr algn="l">
+              <a:spcAft>
+                <a:spcPts val="0"/>
+              </a:spcAft>
+              <a:defRPr sz="900" b="1">
+                <a:solidFill>
+                  <a:srgbClr val="0D1117"/>
+                </a:solidFill>
+                <a:latin typeface="Inter"/>
+              </a:defRPr>
+            </a:pPr>
+            <a:r>
+              <a:rPr>
+                <a:latin typeface="Inter"/>
+              </a:rPr>
               <a:t>Manager and issuer concentration on watch</a:t>
             </a:r>
           </a:p>
@@ -5549,13 +5679,13 @@
       </p:sp>
       <p:sp>
         <p:nvSpPr>
-          <p:cNvPr id="23" name="TextBox 22"/>
+          <p:cNvPr id="20" name="TextBox 19"/>
           <p:cNvSpPr txBox="1"/>
           <p:nvPr/>
         </p:nvSpPr>
         <p:spPr>
           <a:xfrm>
-            <a:off x="3977639" y="5824728"/>
+            <a:off x="4297680" y="5733288"/>
             <a:ext cx="3108960" cy="164592"/>
           </a:xfrm>
           <a:prstGeom prst="rect">
@@ -5584,20 +5714,20 @@
               <a:rPr>
                 <a:latin typeface="Inter"/>
               </a:rPr>
-              <a:t>EVIDENCE COMPLETENESS</a:t>
+              <a:t>SCOPE REVIEWED</a:t>
             </a:r>
           </a:p>
         </p:txBody>
       </p:sp>
       <p:sp>
         <p:nvSpPr>
-          <p:cNvPr id="24" name="TextBox 23"/>
+          <p:cNvPr id="21" name="TextBox 20"/>
           <p:cNvSpPr txBox="1"/>
           <p:nvPr/>
         </p:nvSpPr>
         <p:spPr>
           <a:xfrm>
-            <a:off x="3977639" y="5998464"/>
+            <a:off x="4297680" y="5934456"/>
             <a:ext cx="3108960" cy="201168"/>
           </a:xfrm>
           <a:prstGeom prst="rect">
@@ -5633,14 +5763,14 @@
       </p:sp>
       <p:sp>
         <p:nvSpPr>
-          <p:cNvPr id="25" name="TextBox 24"/>
+          <p:cNvPr id="22" name="TextBox 21"/>
           <p:cNvSpPr txBox="1"/>
           <p:nvPr/>
         </p:nvSpPr>
         <p:spPr>
           <a:xfrm>
-            <a:off x="685800" y="6473952"/>
-            <a:ext cx="8046720" cy="182880"/>
+            <a:off x="685800" y="6400800"/>
+            <a:ext cx="8046720" cy="146304"/>
           </a:xfrm>
           <a:prstGeom prst="rect">
             <a:avLst/>
@@ -5668,14 +5798,56 @@
               <a:rPr>
                 <a:latin typeface="Inter"/>
               </a:rPr>
-              <a:t>TEST DATA — fictional portfolio for rendering tests only</a:t>
+              <a:t>Confidential — Investment Committee</a:t>
             </a:r>
           </a:p>
         </p:txBody>
       </p:sp>
       <p:sp>
         <p:nvSpPr>
-          <p:cNvPr id="26" name="TextBox 25"/>
+          <p:cNvPr id="23" name="TextBox 22"/>
+          <p:cNvSpPr txBox="1"/>
+          <p:nvPr/>
+        </p:nvSpPr>
+        <p:spPr>
+          <a:xfrm>
+            <a:off x="685800" y="6556248"/>
+            <a:ext cx="8046720" cy="128016"/>
+          </a:xfrm>
+          <a:prstGeom prst="rect">
+            <a:avLst/>
+          </a:prstGeom>
+          <a:noFill/>
+        </p:spPr>
+        <p:txBody>
+          <a:bodyPr wrap="none" lIns="9144" rIns="9144" tIns="9144" bIns="9144" anchor="t">
+            <a:spAutoFit/>
+          </a:bodyPr>
+          <a:lstStyle/>
+          <a:p>
+            <a:pPr algn="l">
+              <a:spcAft>
+                <a:spcPts val="0"/>
+              </a:spcAft>
+              <a:defRPr sz="650" b="0">
+                <a:solidFill>
+                  <a:srgbClr val="8A94A1"/>
+                </a:solidFill>
+                <a:latin typeface="Inter"/>
+              </a:defRPr>
+            </a:pPr>
+            <a:r>
+              <a:rPr>
+                <a:latin typeface="Inter"/>
+              </a:rPr>
+              <a:t>Illustrative sample · not client data</a:t>
+            </a:r>
+          </a:p>
+        </p:txBody>
+      </p:sp>
+      <p:sp>
+        <p:nvSpPr>
+          <p:cNvPr id="24" name="TextBox 23"/>
           <p:cNvSpPr txBox="1"/>
           <p:nvPr/>
         </p:nvSpPr>
@@ -5791,7 +5963,7 @@
         <p:spPr>
           <a:xfrm>
             <a:off x="640080" y="329184"/>
-            <a:ext cx="9875520" cy="182880"/>
+            <a:ext cx="5303520" cy="182880"/>
           </a:xfrm>
           <a:prstGeom prst="rect">
             <a:avLst/>
@@ -5832,6 +6004,48 @@
         </p:nvSpPr>
         <p:spPr>
           <a:xfrm>
+            <a:off x="5897880" y="310896"/>
+            <a:ext cx="4800600" cy="256032"/>
+          </a:xfrm>
+          <a:prstGeom prst="rect">
+            <a:avLst/>
+          </a:prstGeom>
+          <a:noFill/>
+        </p:spPr>
+        <p:txBody>
+          <a:bodyPr wrap="none" lIns="9144" rIns="9144" tIns="9144" bIns="9144" anchor="t">
+            <a:spAutoFit/>
+          </a:bodyPr>
+          <a:lstStyle/>
+          <a:p>
+            <a:pPr algn="r">
+              <a:spcAft>
+                <a:spcPts val="0"/>
+              </a:spcAft>
+              <a:defRPr sz="680" b="1">
+                <a:solidFill>
+                  <a:srgbClr val="4F6B00"/>
+                </a:solidFill>
+                <a:latin typeface="Inter"/>
+              </a:defRPr>
+            </a:pPr>
+            <a:r>
+              <a:rPr>
+                <a:latin typeface="Inter"/>
+              </a:rPr>
+              <a:t>Illustrative, Gradient Maintained — demo data, not the client's holdings or managers</a:t>
+            </a:r>
+          </a:p>
+        </p:txBody>
+      </p:sp>
+      <p:sp>
+        <p:nvSpPr>
+          <p:cNvPr id="5" name="TextBox 4"/>
+          <p:cNvSpPr txBox="1"/>
+          <p:nvPr/>
+        </p:nvSpPr>
+        <p:spPr>
+          <a:xfrm>
             <a:off x="640080" y="566928"/>
             <a:ext cx="10058400" cy="530352"/>
           </a:xfrm>
@@ -5868,7 +6082,7 @@
       </p:sp>
       <p:sp>
         <p:nvSpPr>
-          <p:cNvPr id="5" name="Rectangle 4"/>
+          <p:cNvPr id="6" name="Rectangle 5"/>
           <p:cNvSpPr/>
           <p:nvPr/>
         </p:nvSpPr>
@@ -5917,7 +6131,7 @@
       </p:sp>
       <p:sp>
         <p:nvSpPr>
-          <p:cNvPr id="6" name="Rectangle 5"/>
+          <p:cNvPr id="7" name="Rectangle 6"/>
           <p:cNvSpPr/>
           <p:nvPr/>
         </p:nvSpPr>
@@ -5966,7 +6180,7 @@
       </p:sp>
       <p:sp>
         <p:nvSpPr>
-          <p:cNvPr id="7" name="TextBox 6"/>
+          <p:cNvPr id="8" name="TextBox 7"/>
           <p:cNvSpPr txBox="1"/>
           <p:nvPr/>
         </p:nvSpPr>
@@ -6008,7 +6222,7 @@
       </p:sp>
       <p:sp>
         <p:nvSpPr>
-          <p:cNvPr id="8" name="TextBox 7"/>
+          <p:cNvPr id="9" name="TextBox 8"/>
           <p:cNvSpPr txBox="1"/>
           <p:nvPr/>
         </p:nvSpPr>
@@ -6050,7 +6264,7 @@
       </p:sp>
       <p:graphicFrame>
         <p:nvGraphicFramePr>
-          <p:cNvPr id="9" name="Chart 8"/>
+          <p:cNvPr id="10" name="Chart 9"/>
           <p:cNvGraphicFramePr>
             <a:graphicFrameLocks noGrp="1"/>
           </p:cNvGraphicFramePr>
@@ -6068,7 +6282,7 @@
       </p:graphicFrame>
       <p:sp>
         <p:nvSpPr>
-          <p:cNvPr id="10" name="Rectangle 9"/>
+          <p:cNvPr id="11" name="Rectangle 10"/>
           <p:cNvSpPr/>
           <p:nvPr/>
         </p:nvSpPr>
@@ -6117,7 +6331,7 @@
       </p:sp>
       <p:sp>
         <p:nvSpPr>
-          <p:cNvPr id="11" name="TextBox 10"/>
+          <p:cNvPr id="12" name="TextBox 11"/>
           <p:cNvSpPr txBox="1"/>
           <p:nvPr/>
         </p:nvSpPr>
@@ -6152,14 +6366,14 @@
               <a:rPr>
                 <a:latin typeface="Inter"/>
               </a:rPr>
-              <a:t>Sources: none cited</a:t>
+              <a:t>Sources: S1</a:t>
             </a:r>
           </a:p>
         </p:txBody>
       </p:sp>
       <p:sp>
         <p:nvSpPr>
-          <p:cNvPr id="12" name="TextBox 11"/>
+          <p:cNvPr id="13" name="TextBox 12"/>
           <p:cNvSpPr txBox="1"/>
           <p:nvPr/>
         </p:nvSpPr>
@@ -6194,14 +6408,14 @@
               <a:rPr>
                 <a:latin typeface="Inter"/>
               </a:rPr>
-              <a:t>TEST DATA — fictional portfolio for rendering tests only · Data as of 2026-06-30</a:t>
+              <a:t>Confidential — Investment Committee · Data as of 2026-06-30</a:t>
             </a:r>
           </a:p>
         </p:txBody>
       </p:sp>
       <p:sp>
         <p:nvSpPr>
-          <p:cNvPr id="13" name="TextBox 12"/>
+          <p:cNvPr id="14" name="TextBox 13"/>
           <p:cNvSpPr txBox="1"/>
           <p:nvPr/>
         </p:nvSpPr>
@@ -6317,7 +6531,7 @@
         <p:spPr>
           <a:xfrm>
             <a:off x="640080" y="329184"/>
-            <a:ext cx="9875520" cy="182880"/>
+            <a:ext cx="5303520" cy="182880"/>
           </a:xfrm>
           <a:prstGeom prst="rect">
             <a:avLst/>
@@ -6358,6 +6572,48 @@
         </p:nvSpPr>
         <p:spPr>
           <a:xfrm>
+            <a:off x="5897880" y="310896"/>
+            <a:ext cx="4800600" cy="256032"/>
+          </a:xfrm>
+          <a:prstGeom prst="rect">
+            <a:avLst/>
+          </a:prstGeom>
+          <a:noFill/>
+        </p:spPr>
+        <p:txBody>
+          <a:bodyPr wrap="none" lIns="9144" rIns="9144" tIns="9144" bIns="9144" anchor="t">
+            <a:spAutoFit/>
+          </a:bodyPr>
+          <a:lstStyle/>
+          <a:p>
+            <a:pPr algn="r">
+              <a:spcAft>
+                <a:spcPts val="0"/>
+              </a:spcAft>
+              <a:defRPr sz="680" b="1">
+                <a:solidFill>
+                  <a:srgbClr val="4F6B00"/>
+                </a:solidFill>
+                <a:latin typeface="Inter"/>
+              </a:defRPr>
+            </a:pPr>
+            <a:r>
+              <a:rPr>
+                <a:latin typeface="Inter"/>
+              </a:rPr>
+              <a:t>Illustrative, Gradient Maintained — demo data, not the client's holdings or managers</a:t>
+            </a:r>
+          </a:p>
+        </p:txBody>
+      </p:sp>
+      <p:sp>
+        <p:nvSpPr>
+          <p:cNvPr id="5" name="TextBox 4"/>
+          <p:cNvSpPr txBox="1"/>
+          <p:nvPr/>
+        </p:nvSpPr>
+        <p:spPr>
+          <a:xfrm>
             <a:off x="640080" y="566928"/>
             <a:ext cx="10058400" cy="530352"/>
           </a:xfrm>
@@ -6394,7 +6650,7 @@
       </p:sp>
       <p:sp>
         <p:nvSpPr>
-          <p:cNvPr id="5" name="Rectangle 4"/>
+          <p:cNvPr id="6" name="Rectangle 5"/>
           <p:cNvSpPr/>
           <p:nvPr/>
         </p:nvSpPr>
@@ -6443,7 +6699,7 @@
       </p:sp>
       <p:sp>
         <p:nvSpPr>
-          <p:cNvPr id="6" name="Rectangle 5"/>
+          <p:cNvPr id="7" name="Rectangle 6"/>
           <p:cNvSpPr/>
           <p:nvPr/>
         </p:nvSpPr>
@@ -6492,7 +6748,7 @@
       </p:sp>
       <p:sp>
         <p:nvSpPr>
-          <p:cNvPr id="7" name="TextBox 6"/>
+          <p:cNvPr id="8" name="TextBox 7"/>
           <p:cNvSpPr txBox="1"/>
           <p:nvPr/>
         </p:nvSpPr>
@@ -6534,7 +6790,7 @@
       </p:sp>
       <p:sp>
         <p:nvSpPr>
-          <p:cNvPr id="8" name="TextBox 7"/>
+          <p:cNvPr id="9" name="TextBox 8"/>
           <p:cNvSpPr txBox="1"/>
           <p:nvPr/>
         </p:nvSpPr>
@@ -6576,7 +6832,7 @@
       </p:sp>
       <p:graphicFrame>
         <p:nvGraphicFramePr>
-          <p:cNvPr id="9" name="Table 8"/>
+          <p:cNvPr id="10" name="Table 9"/>
           <p:cNvGraphicFramePr>
             <a:graphicFrameLocks noGrp="1"/>
           </p:cNvGraphicFramePr>
@@ -7262,7 +7518,7 @@
       </p:graphicFrame>
       <p:sp>
         <p:nvSpPr>
-          <p:cNvPr id="10" name="Rectangle 9"/>
+          <p:cNvPr id="11" name="Rectangle 10"/>
           <p:cNvSpPr/>
           <p:nvPr/>
         </p:nvSpPr>
@@ -7311,7 +7567,7 @@
       </p:sp>
       <p:sp>
         <p:nvSpPr>
-          <p:cNvPr id="11" name="Rectangle 10"/>
+          <p:cNvPr id="12" name="Rectangle 11"/>
           <p:cNvSpPr/>
           <p:nvPr/>
         </p:nvSpPr>
@@ -7360,7 +7616,7 @@
       </p:sp>
       <p:sp>
         <p:nvSpPr>
-          <p:cNvPr id="12" name="TextBox 11"/>
+          <p:cNvPr id="13" name="TextBox 12"/>
           <p:cNvSpPr txBox="1"/>
           <p:nvPr/>
         </p:nvSpPr>
@@ -7402,7 +7658,7 @@
       </p:sp>
       <p:sp>
         <p:nvSpPr>
-          <p:cNvPr id="13" name="TextBox 12"/>
+          <p:cNvPr id="14" name="TextBox 13"/>
           <p:cNvSpPr txBox="1"/>
           <p:nvPr/>
         </p:nvSpPr>
@@ -7444,7 +7700,7 @@
       </p:sp>
       <p:sp>
         <p:nvSpPr>
-          <p:cNvPr id="14" name="TextBox 13"/>
+          <p:cNvPr id="15" name="TextBox 14"/>
           <p:cNvSpPr txBox="1"/>
           <p:nvPr/>
         </p:nvSpPr>
@@ -7486,7 +7742,7 @@
       </p:sp>
       <p:sp>
         <p:nvSpPr>
-          <p:cNvPr id="15" name="Rectangle 14"/>
+          <p:cNvPr id="16" name="Rectangle 15"/>
           <p:cNvSpPr/>
           <p:nvPr/>
         </p:nvSpPr>
@@ -7535,7 +7791,7 @@
       </p:sp>
       <p:sp>
         <p:nvSpPr>
-          <p:cNvPr id="16" name="TextBox 15"/>
+          <p:cNvPr id="17" name="TextBox 16"/>
           <p:cNvSpPr txBox="1"/>
           <p:nvPr/>
         </p:nvSpPr>
@@ -7577,7 +7833,7 @@
       </p:sp>
       <p:sp>
         <p:nvSpPr>
-          <p:cNvPr id="17" name="TextBox 16"/>
+          <p:cNvPr id="18" name="TextBox 17"/>
           <p:cNvSpPr txBox="1"/>
           <p:nvPr/>
         </p:nvSpPr>
@@ -7612,14 +7868,14 @@
               <a:rPr>
                 <a:latin typeface="Inter"/>
               </a:rPr>
-              <a:t>TEST DATA — fictional portfolio for rendering tests only · Data as of 2026-06-30</a:t>
+              <a:t>Confidential — Investment Committee · Data as of 2026-06-30</a:t>
             </a:r>
           </a:p>
         </p:txBody>
       </p:sp>
       <p:sp>
         <p:nvSpPr>
-          <p:cNvPr id="18" name="TextBox 17"/>
+          <p:cNvPr id="19" name="TextBox 18"/>
           <p:cNvSpPr txBox="1"/>
           <p:nvPr/>
         </p:nvSpPr>
@@ -7734,6 +7990,48 @@
         </p:nvSpPr>
         <p:spPr>
           <a:xfrm>
+            <a:off x="5897880" y="310896"/>
+            <a:ext cx="4800600" cy="256032"/>
+          </a:xfrm>
+          <a:prstGeom prst="rect">
+            <a:avLst/>
+          </a:prstGeom>
+          <a:noFill/>
+        </p:spPr>
+        <p:txBody>
+          <a:bodyPr wrap="none" lIns="9144" rIns="9144" tIns="9144" bIns="9144" anchor="t">
+            <a:spAutoFit/>
+          </a:bodyPr>
+          <a:lstStyle/>
+          <a:p>
+            <a:pPr algn="r">
+              <a:spcAft>
+                <a:spcPts val="0"/>
+              </a:spcAft>
+              <a:defRPr sz="680" b="1">
+                <a:solidFill>
+                  <a:srgbClr val="4F6B00"/>
+                </a:solidFill>
+                <a:latin typeface="Inter"/>
+              </a:defRPr>
+            </a:pPr>
+            <a:r>
+              <a:rPr>
+                <a:latin typeface="Inter"/>
+              </a:rPr>
+              <a:t>Illustrative, Gradient Maintained — demo data, not the client's holdings or managers</a:t>
+            </a:r>
+          </a:p>
+        </p:txBody>
+      </p:sp>
+      <p:sp>
+        <p:nvSpPr>
+          <p:cNvPr id="4" name="TextBox 3"/>
+          <p:cNvSpPr txBox="1"/>
+          <p:nvPr/>
+        </p:nvSpPr>
+        <p:spPr>
+          <a:xfrm>
             <a:off x="640080" y="566928"/>
             <a:ext cx="10058400" cy="530352"/>
           </a:xfrm>
@@ -7770,7 +8068,7 @@
       </p:sp>
       <p:sp>
         <p:nvSpPr>
-          <p:cNvPr id="4" name="Rectangle 3"/>
+          <p:cNvPr id="5" name="Rectangle 4"/>
           <p:cNvSpPr/>
           <p:nvPr/>
         </p:nvSpPr>
@@ -7819,7 +8117,7 @@
       </p:sp>
       <p:sp>
         <p:nvSpPr>
-          <p:cNvPr id="5" name="Rectangle 4"/>
+          <p:cNvPr id="6" name="Rectangle 5"/>
           <p:cNvSpPr/>
           <p:nvPr/>
         </p:nvSpPr>
@@ -7868,7 +8166,7 @@
       </p:sp>
       <p:sp>
         <p:nvSpPr>
-          <p:cNvPr id="6" name="TextBox 5"/>
+          <p:cNvPr id="7" name="TextBox 6"/>
           <p:cNvSpPr txBox="1"/>
           <p:nvPr/>
         </p:nvSpPr>
@@ -7910,7 +8208,7 @@
       </p:sp>
       <p:sp>
         <p:nvSpPr>
-          <p:cNvPr id="7" name="TextBox 6"/>
+          <p:cNvPr id="8" name="TextBox 7"/>
           <p:cNvSpPr txBox="1"/>
           <p:nvPr/>
         </p:nvSpPr>
@@ -7952,7 +8250,7 @@
       </p:sp>
       <p:graphicFrame>
         <p:nvGraphicFramePr>
-          <p:cNvPr id="8" name="Chart 7"/>
+          <p:cNvPr id="9" name="Chart 8"/>
           <p:cNvGraphicFramePr>
             <a:graphicFrameLocks noGrp="1"/>
           </p:cNvGraphicFramePr>
@@ -7970,7 +8268,7 @@
       </p:graphicFrame>
       <p:sp>
         <p:nvSpPr>
-          <p:cNvPr id="9" name="Rectangle 8"/>
+          <p:cNvPr id="10" name="Rectangle 9"/>
           <p:cNvSpPr/>
           <p:nvPr/>
         </p:nvSpPr>
@@ -8019,7 +8317,7 @@
       </p:sp>
       <p:sp>
         <p:nvSpPr>
-          <p:cNvPr id="10" name="TextBox 9"/>
+          <p:cNvPr id="11" name="TextBox 10"/>
           <p:cNvSpPr txBox="1"/>
           <p:nvPr/>
         </p:nvSpPr>
@@ -8061,7 +8359,7 @@
       </p:sp>
       <p:sp>
         <p:nvSpPr>
-          <p:cNvPr id="11" name="TextBox 10"/>
+          <p:cNvPr id="12" name="TextBox 11"/>
           <p:cNvSpPr txBox="1"/>
           <p:nvPr/>
         </p:nvSpPr>
@@ -8096,14 +8394,14 @@
               <a:rPr>
                 <a:latin typeface="Inter"/>
               </a:rPr>
-              <a:t>TEST DATA — fictional portfolio for rendering tests only · Data as of 2026-06-30</a:t>
+              <a:t>Confidential — Investment Committee · Data as of 2026-06-30</a:t>
             </a:r>
           </a:p>
         </p:txBody>
       </p:sp>
       <p:sp>
         <p:nvSpPr>
-          <p:cNvPr id="12" name="TextBox 11"/>
+          <p:cNvPr id="13" name="TextBox 12"/>
           <p:cNvSpPr txBox="1"/>
           <p:nvPr/>
         </p:nvSpPr>
@@ -8218,6 +8516,48 @@
         </p:nvSpPr>
         <p:spPr>
           <a:xfrm>
+            <a:off x="5897880" y="310896"/>
+            <a:ext cx="4800600" cy="256032"/>
+          </a:xfrm>
+          <a:prstGeom prst="rect">
+            <a:avLst/>
+          </a:prstGeom>
+          <a:noFill/>
+        </p:spPr>
+        <p:txBody>
+          <a:bodyPr wrap="none" lIns="9144" rIns="9144" tIns="9144" bIns="9144" anchor="t">
+            <a:spAutoFit/>
+          </a:bodyPr>
+          <a:lstStyle/>
+          <a:p>
+            <a:pPr algn="r">
+              <a:spcAft>
+                <a:spcPts val="0"/>
+              </a:spcAft>
+              <a:defRPr sz="680" b="1">
+                <a:solidFill>
+                  <a:srgbClr val="4F6B00"/>
+                </a:solidFill>
+                <a:latin typeface="Inter"/>
+              </a:defRPr>
+            </a:pPr>
+            <a:r>
+              <a:rPr>
+                <a:latin typeface="Inter"/>
+              </a:rPr>
+              <a:t>Illustrative, Gradient Maintained — demo data, not the client's holdings or managers</a:t>
+            </a:r>
+          </a:p>
+        </p:txBody>
+      </p:sp>
+      <p:sp>
+        <p:nvSpPr>
+          <p:cNvPr id="4" name="TextBox 3"/>
+          <p:cNvSpPr txBox="1"/>
+          <p:nvPr/>
+        </p:nvSpPr>
+        <p:spPr>
+          <a:xfrm>
             <a:off x="640080" y="566928"/>
             <a:ext cx="10058400" cy="530352"/>
           </a:xfrm>
@@ -8254,7 +8594,7 @@
       </p:sp>
       <p:sp>
         <p:nvSpPr>
-          <p:cNvPr id="4" name="Rectangle 3"/>
+          <p:cNvPr id="5" name="Rectangle 4"/>
           <p:cNvSpPr/>
           <p:nvPr/>
         </p:nvSpPr>
@@ -8303,7 +8643,7 @@
       </p:sp>
       <p:sp>
         <p:nvSpPr>
-          <p:cNvPr id="5" name="Rectangle 4"/>
+          <p:cNvPr id="6" name="Rectangle 5"/>
           <p:cNvSpPr/>
           <p:nvPr/>
         </p:nvSpPr>
@@ -8352,7 +8692,7 @@
       </p:sp>
       <p:sp>
         <p:nvSpPr>
-          <p:cNvPr id="6" name="TextBox 5"/>
+          <p:cNvPr id="7" name="TextBox 6"/>
           <p:cNvSpPr txBox="1"/>
           <p:nvPr/>
         </p:nvSpPr>
@@ -8394,7 +8734,7 @@
       </p:sp>
       <p:sp>
         <p:nvSpPr>
-          <p:cNvPr id="7" name="TextBox 6"/>
+          <p:cNvPr id="8" name="TextBox 7"/>
           <p:cNvSpPr txBox="1"/>
           <p:nvPr/>
         </p:nvSpPr>
@@ -8436,7 +8776,7 @@
       </p:sp>
       <p:graphicFrame>
         <p:nvGraphicFramePr>
-          <p:cNvPr id="8" name="Table 7"/>
+          <p:cNvPr id="9" name="Table 8"/>
           <p:cNvGraphicFramePr>
             <a:graphicFrameLocks noGrp="1"/>
           </p:cNvGraphicFramePr>
@@ -9013,7 +9353,7 @@
       </p:graphicFrame>
       <p:sp>
         <p:nvSpPr>
-          <p:cNvPr id="9" name="TextBox 8"/>
+          <p:cNvPr id="10" name="TextBox 9"/>
           <p:cNvSpPr txBox="1"/>
           <p:nvPr/>
         </p:nvSpPr>
@@ -9055,7 +9395,7 @@
       </p:sp>
       <p:graphicFrame>
         <p:nvGraphicFramePr>
-          <p:cNvPr id="10" name="Table 9"/>
+          <p:cNvPr id="11" name="Table 10"/>
           <p:cNvGraphicFramePr>
             <a:graphicFrameLocks noGrp="1"/>
           </p:cNvGraphicFramePr>
@@ -9497,7 +9837,7 @@
       </p:graphicFrame>
       <p:sp>
         <p:nvSpPr>
-          <p:cNvPr id="11" name="TextBox 10"/>
+          <p:cNvPr id="12" name="TextBox 11"/>
           <p:cNvSpPr txBox="1"/>
           <p:nvPr/>
         </p:nvSpPr>
@@ -9539,7 +9879,7 @@
       </p:sp>
       <p:sp>
         <p:nvSpPr>
-          <p:cNvPr id="12" name="Rectangle 11"/>
+          <p:cNvPr id="13" name="Rectangle 12"/>
           <p:cNvSpPr/>
           <p:nvPr/>
         </p:nvSpPr>
@@ -9588,7 +9928,7 @@
       </p:sp>
       <p:sp>
         <p:nvSpPr>
-          <p:cNvPr id="13" name="TextBox 12"/>
+          <p:cNvPr id="14" name="TextBox 13"/>
           <p:cNvSpPr txBox="1"/>
           <p:nvPr/>
         </p:nvSpPr>
@@ -9630,7 +9970,7 @@
       </p:sp>
       <p:sp>
         <p:nvSpPr>
-          <p:cNvPr id="14" name="TextBox 13"/>
+          <p:cNvPr id="15" name="TextBox 14"/>
           <p:cNvSpPr txBox="1"/>
           <p:nvPr/>
         </p:nvSpPr>
@@ -9665,14 +10005,14 @@
               <a:rPr>
                 <a:latin typeface="Inter"/>
               </a:rPr>
-              <a:t>TEST DATA — fictional portfolio for rendering tests only · Data as of 2026-06-30</a:t>
+              <a:t>Confidential — Investment Committee · Data as of 2026-06-30</a:t>
             </a:r>
           </a:p>
         </p:txBody>
       </p:sp>
       <p:sp>
         <p:nvSpPr>
-          <p:cNvPr id="15" name="TextBox 14"/>
+          <p:cNvPr id="16" name="TextBox 15"/>
           <p:cNvSpPr txBox="1"/>
           <p:nvPr/>
         </p:nvSpPr>
@@ -9787,6 +10127,48 @@
         </p:nvSpPr>
         <p:spPr>
           <a:xfrm>
+            <a:off x="5897880" y="310896"/>
+            <a:ext cx="4800600" cy="256032"/>
+          </a:xfrm>
+          <a:prstGeom prst="rect">
+            <a:avLst/>
+          </a:prstGeom>
+          <a:noFill/>
+        </p:spPr>
+        <p:txBody>
+          <a:bodyPr wrap="none" lIns="9144" rIns="9144" tIns="9144" bIns="9144" anchor="t">
+            <a:spAutoFit/>
+          </a:bodyPr>
+          <a:lstStyle/>
+          <a:p>
+            <a:pPr algn="r">
+              <a:spcAft>
+                <a:spcPts val="0"/>
+              </a:spcAft>
+              <a:defRPr sz="680" b="1">
+                <a:solidFill>
+                  <a:srgbClr val="4F6B00"/>
+                </a:solidFill>
+                <a:latin typeface="Inter"/>
+              </a:defRPr>
+            </a:pPr>
+            <a:r>
+              <a:rPr>
+                <a:latin typeface="Inter"/>
+              </a:rPr>
+              <a:t>Illustrative, Gradient Maintained — demo data, not the client's holdings or managers</a:t>
+            </a:r>
+          </a:p>
+        </p:txBody>
+      </p:sp>
+      <p:sp>
+        <p:nvSpPr>
+          <p:cNvPr id="4" name="TextBox 3"/>
+          <p:cNvSpPr txBox="1"/>
+          <p:nvPr/>
+        </p:nvSpPr>
+        <p:spPr>
+          <a:xfrm>
             <a:off x="640080" y="566928"/>
             <a:ext cx="10058400" cy="530352"/>
           </a:xfrm>
@@ -9823,7 +10205,7 @@
       </p:sp>
       <p:sp>
         <p:nvSpPr>
-          <p:cNvPr id="4" name="Rectangle 3"/>
+          <p:cNvPr id="5" name="Rectangle 4"/>
           <p:cNvSpPr/>
           <p:nvPr/>
         </p:nvSpPr>
@@ -9872,7 +10254,7 @@
       </p:sp>
       <p:sp>
         <p:nvSpPr>
-          <p:cNvPr id="5" name="Rectangle 4"/>
+          <p:cNvPr id="6" name="Rectangle 5"/>
           <p:cNvSpPr/>
           <p:nvPr/>
         </p:nvSpPr>
@@ -9921,7 +10303,7 @@
       </p:sp>
       <p:sp>
         <p:nvSpPr>
-          <p:cNvPr id="6" name="TextBox 5"/>
+          <p:cNvPr id="7" name="TextBox 6"/>
           <p:cNvSpPr txBox="1"/>
           <p:nvPr/>
         </p:nvSpPr>
@@ -9963,7 +10345,7 @@
       </p:sp>
       <p:graphicFrame>
         <p:nvGraphicFramePr>
-          <p:cNvPr id="7" name="Table 6"/>
+          <p:cNvPr id="8" name="Table 7"/>
           <p:cNvGraphicFramePr>
             <a:graphicFrameLocks noGrp="1"/>
           </p:cNvGraphicFramePr>
@@ -10213,7 +10595,7 @@
       </p:graphicFrame>
       <p:sp>
         <p:nvSpPr>
-          <p:cNvPr id="8" name="Rectangle 7"/>
+          <p:cNvPr id="9" name="Rectangle 8"/>
           <p:cNvSpPr/>
           <p:nvPr/>
         </p:nvSpPr>
@@ -10262,7 +10644,7 @@
       </p:sp>
       <p:sp>
         <p:nvSpPr>
-          <p:cNvPr id="9" name="TextBox 8"/>
+          <p:cNvPr id="10" name="TextBox 9"/>
           <p:cNvSpPr txBox="1"/>
           <p:nvPr/>
         </p:nvSpPr>
@@ -10304,7 +10686,7 @@
       </p:sp>
       <p:sp>
         <p:nvSpPr>
-          <p:cNvPr id="10" name="TextBox 9"/>
+          <p:cNvPr id="11" name="TextBox 10"/>
           <p:cNvSpPr txBox="1"/>
           <p:nvPr/>
         </p:nvSpPr>
@@ -10339,14 +10721,14 @@
               <a:rPr>
                 <a:latin typeface="Inter"/>
               </a:rPr>
-              <a:t>TEST DATA — fictional portfolio for rendering tests only · Data as of 2026-06-30</a:t>
+              <a:t>Confidential — Investment Committee · Data as of 2026-06-30</a:t>
             </a:r>
           </a:p>
         </p:txBody>
       </p:sp>
       <p:sp>
         <p:nvSpPr>
-          <p:cNvPr id="11" name="TextBox 10"/>
+          <p:cNvPr id="12" name="TextBox 11"/>
           <p:cNvSpPr txBox="1"/>
           <p:nvPr/>
         </p:nvSpPr>
@@ -10462,7 +10844,7 @@
         <p:spPr>
           <a:xfrm>
             <a:off x="640080" y="329184"/>
-            <a:ext cx="9875520" cy="182880"/>
+            <a:ext cx="5303520" cy="182880"/>
           </a:xfrm>
           <a:prstGeom prst="rect">
             <a:avLst/>
@@ -10503,6 +10885,48 @@
         </p:nvSpPr>
         <p:spPr>
           <a:xfrm>
+            <a:off x="5897880" y="310896"/>
+            <a:ext cx="4800600" cy="256032"/>
+          </a:xfrm>
+          <a:prstGeom prst="rect">
+            <a:avLst/>
+          </a:prstGeom>
+          <a:noFill/>
+        </p:spPr>
+        <p:txBody>
+          <a:bodyPr wrap="none" lIns="9144" rIns="9144" tIns="9144" bIns="9144" anchor="t">
+            <a:spAutoFit/>
+          </a:bodyPr>
+          <a:lstStyle/>
+          <a:p>
+            <a:pPr algn="r">
+              <a:spcAft>
+                <a:spcPts val="0"/>
+              </a:spcAft>
+              <a:defRPr sz="680" b="1">
+                <a:solidFill>
+                  <a:srgbClr val="4F6B00"/>
+                </a:solidFill>
+                <a:latin typeface="Inter"/>
+              </a:defRPr>
+            </a:pPr>
+            <a:r>
+              <a:rPr>
+                <a:latin typeface="Inter"/>
+              </a:rPr>
+              <a:t>Illustrative, Gradient Maintained — demo data, not the client's holdings or managers</a:t>
+            </a:r>
+          </a:p>
+        </p:txBody>
+      </p:sp>
+      <p:sp>
+        <p:nvSpPr>
+          <p:cNvPr id="5" name="TextBox 4"/>
+          <p:cNvSpPr txBox="1"/>
+          <p:nvPr/>
+        </p:nvSpPr>
+        <p:spPr>
+          <a:xfrm>
             <a:off x="640080" y="566928"/>
             <a:ext cx="10058400" cy="530352"/>
           </a:xfrm>
@@ -10539,7 +10963,7 @@
       </p:sp>
       <p:sp>
         <p:nvSpPr>
-          <p:cNvPr id="5" name="Rectangle 4"/>
+          <p:cNvPr id="6" name="Rectangle 5"/>
           <p:cNvSpPr/>
           <p:nvPr/>
         </p:nvSpPr>
@@ -10588,7 +11012,7 @@
       </p:sp>
       <p:sp>
         <p:nvSpPr>
-          <p:cNvPr id="6" name="Rectangle 5"/>
+          <p:cNvPr id="7" name="Rectangle 6"/>
           <p:cNvSpPr/>
           <p:nvPr/>
         </p:nvSpPr>
@@ -10637,7 +11061,7 @@
       </p:sp>
       <p:sp>
         <p:nvSpPr>
-          <p:cNvPr id="7" name="TextBox 6"/>
+          <p:cNvPr id="8" name="TextBox 7"/>
           <p:cNvSpPr txBox="1"/>
           <p:nvPr/>
         </p:nvSpPr>
@@ -10679,7 +11103,7 @@
       </p:sp>
       <p:sp>
         <p:nvSpPr>
-          <p:cNvPr id="8" name="TextBox 7"/>
+          <p:cNvPr id="9" name="TextBox 8"/>
           <p:cNvSpPr txBox="1"/>
           <p:nvPr/>
         </p:nvSpPr>
@@ -10721,7 +11145,7 @@
       </p:sp>
       <p:graphicFrame>
         <p:nvGraphicFramePr>
-          <p:cNvPr id="9" name="Chart 8"/>
+          <p:cNvPr id="10" name="Chart 9"/>
           <p:cNvGraphicFramePr>
             <a:graphicFrameLocks noGrp="1"/>
           </p:cNvGraphicFramePr>
@@ -10739,7 +11163,7 @@
       </p:graphicFrame>
       <p:sp>
         <p:nvSpPr>
-          <p:cNvPr id="10" name="Rectangle 9"/>
+          <p:cNvPr id="11" name="Rectangle 10"/>
           <p:cNvSpPr/>
           <p:nvPr/>
         </p:nvSpPr>
@@ -10788,7 +11212,7 @@
       </p:sp>
       <p:sp>
         <p:nvSpPr>
-          <p:cNvPr id="11" name="TextBox 10"/>
+          <p:cNvPr id="12" name="TextBox 11"/>
           <p:cNvSpPr txBox="1"/>
           <p:nvPr/>
         </p:nvSpPr>
@@ -10830,7 +11254,7 @@
       </p:sp>
       <p:sp>
         <p:nvSpPr>
-          <p:cNvPr id="12" name="TextBox 11"/>
+          <p:cNvPr id="13" name="TextBox 12"/>
           <p:cNvSpPr txBox="1"/>
           <p:nvPr/>
         </p:nvSpPr>
@@ -10865,14 +11289,14 @@
               <a:rPr>
                 <a:latin typeface="Inter"/>
               </a:rPr>
-              <a:t>TEST DATA — fictional portfolio for rendering tests only · Data as of 2026-06-30</a:t>
+              <a:t>Confidential — Investment Committee · Data as of 2026-06-30</a:t>
             </a:r>
           </a:p>
         </p:txBody>
       </p:sp>
       <p:sp>
         <p:nvSpPr>
-          <p:cNvPr id="13" name="TextBox 12"/>
+          <p:cNvPr id="14" name="TextBox 13"/>
           <p:cNvSpPr txBox="1"/>
           <p:nvPr/>
         </p:nvSpPr>
@@ -10988,7 +11412,7 @@
         <p:spPr>
           <a:xfrm>
             <a:off x="640080" y="329184"/>
-            <a:ext cx="9875520" cy="182880"/>
+            <a:ext cx="5303520" cy="182880"/>
           </a:xfrm>
           <a:prstGeom prst="rect">
             <a:avLst/>
@@ -11029,6 +11453,48 @@
         </p:nvSpPr>
         <p:spPr>
           <a:xfrm>
+            <a:off x="5897880" y="310896"/>
+            <a:ext cx="4800600" cy="256032"/>
+          </a:xfrm>
+          <a:prstGeom prst="rect">
+            <a:avLst/>
+          </a:prstGeom>
+          <a:noFill/>
+        </p:spPr>
+        <p:txBody>
+          <a:bodyPr wrap="none" lIns="9144" rIns="9144" tIns="9144" bIns="9144" anchor="t">
+            <a:spAutoFit/>
+          </a:bodyPr>
+          <a:lstStyle/>
+          <a:p>
+            <a:pPr algn="r">
+              <a:spcAft>
+                <a:spcPts val="0"/>
+              </a:spcAft>
+              <a:defRPr sz="680" b="1">
+                <a:solidFill>
+                  <a:srgbClr val="4F6B00"/>
+                </a:solidFill>
+                <a:latin typeface="Inter"/>
+              </a:defRPr>
+            </a:pPr>
+            <a:r>
+              <a:rPr>
+                <a:latin typeface="Inter"/>
+              </a:rPr>
+              <a:t>Illustrative, Gradient Maintained — demo data, not the client's holdings or managers</a:t>
+            </a:r>
+          </a:p>
+        </p:txBody>
+      </p:sp>
+      <p:sp>
+        <p:nvSpPr>
+          <p:cNvPr id="5" name="TextBox 4"/>
+          <p:cNvSpPr txBox="1"/>
+          <p:nvPr/>
+        </p:nvSpPr>
+        <p:spPr>
+          <a:xfrm>
             <a:off x="640080" y="566928"/>
             <a:ext cx="10058400" cy="530352"/>
           </a:xfrm>
@@ -11065,7 +11531,7 @@
       </p:sp>
       <p:sp>
         <p:nvSpPr>
-          <p:cNvPr id="5" name="Rectangle 4"/>
+          <p:cNvPr id="6" name="Rectangle 5"/>
           <p:cNvSpPr/>
           <p:nvPr/>
         </p:nvSpPr>
@@ -11114,7 +11580,7 @@
       </p:sp>
       <p:sp>
         <p:nvSpPr>
-          <p:cNvPr id="6" name="Rectangle 5"/>
+          <p:cNvPr id="7" name="Rectangle 6"/>
           <p:cNvSpPr/>
           <p:nvPr/>
         </p:nvSpPr>
@@ -11163,7 +11629,7 @@
       </p:sp>
       <p:sp>
         <p:nvSpPr>
-          <p:cNvPr id="7" name="TextBox 6"/>
+          <p:cNvPr id="8" name="TextBox 7"/>
           <p:cNvSpPr txBox="1"/>
           <p:nvPr/>
         </p:nvSpPr>
@@ -11205,7 +11671,7 @@
       </p:sp>
       <p:sp>
         <p:nvSpPr>
-          <p:cNvPr id="8" name="TextBox 7"/>
+          <p:cNvPr id="9" name="TextBox 8"/>
           <p:cNvSpPr txBox="1"/>
           <p:nvPr/>
         </p:nvSpPr>
@@ -11240,14 +11706,14 @@
               <a:rPr>
                 <a:latin typeface="Inter"/>
               </a:rPr>
-              <a:t>ACTIVE FACTOR EXPOSURE (TEST)</a:t>
+              <a:t>ACTIVE FACTOR EXPOSURE</a:t>
             </a:r>
           </a:p>
         </p:txBody>
       </p:sp>
       <p:graphicFrame>
         <p:nvGraphicFramePr>
-          <p:cNvPr id="9" name="Chart 8"/>
+          <p:cNvPr id="10" name="Chart 9"/>
           <p:cNvGraphicFramePr>
             <a:graphicFrameLocks noGrp="1"/>
           </p:cNvGraphicFramePr>
@@ -11265,7 +11731,7 @@
       </p:graphicFrame>
       <p:sp>
         <p:nvSpPr>
-          <p:cNvPr id="10" name="Rectangle 9"/>
+          <p:cNvPr id="11" name="Rectangle 10"/>
           <p:cNvSpPr/>
           <p:nvPr/>
         </p:nvSpPr>
@@ -11314,7 +11780,7 @@
       </p:sp>
       <p:sp>
         <p:nvSpPr>
-          <p:cNvPr id="11" name="TextBox 10"/>
+          <p:cNvPr id="12" name="TextBox 11"/>
           <p:cNvSpPr txBox="1"/>
           <p:nvPr/>
         </p:nvSpPr>
@@ -11349,14 +11815,14 @@
               <a:rPr>
                 <a:latin typeface="Inter"/>
               </a:rPr>
-              <a:t>Sources: none cited</a:t>
+              <a:t>Sources: S1</a:t>
             </a:r>
           </a:p>
         </p:txBody>
       </p:sp>
       <p:sp>
         <p:nvSpPr>
-          <p:cNvPr id="12" name="TextBox 11"/>
+          <p:cNvPr id="13" name="TextBox 12"/>
           <p:cNvSpPr txBox="1"/>
           <p:nvPr/>
         </p:nvSpPr>
@@ -11391,14 +11857,14 @@
               <a:rPr>
                 <a:latin typeface="Inter"/>
               </a:rPr>
-              <a:t>TEST DATA — fictional portfolio for rendering tests only · Data as of 2026-06-30</a:t>
+              <a:t>Confidential — Investment Committee · Data as of 2026-06-30</a:t>
             </a:r>
           </a:p>
         </p:txBody>
       </p:sp>
       <p:sp>
         <p:nvSpPr>
-          <p:cNvPr id="13" name="TextBox 12"/>
+          <p:cNvPr id="14" name="TextBox 13"/>
           <p:cNvSpPr txBox="1"/>
           <p:nvPr/>
         </p:nvSpPr>
@@ -11514,7 +11980,7 @@
         <p:spPr>
           <a:xfrm>
             <a:off x="640080" y="329184"/>
-            <a:ext cx="9875520" cy="182880"/>
+            <a:ext cx="5303520" cy="182880"/>
           </a:xfrm>
           <a:prstGeom prst="rect">
             <a:avLst/>
@@ -11555,6 +12021,48 @@
         </p:nvSpPr>
         <p:spPr>
           <a:xfrm>
+            <a:off x="5897880" y="310896"/>
+            <a:ext cx="4800600" cy="256032"/>
+          </a:xfrm>
+          <a:prstGeom prst="rect">
+            <a:avLst/>
+          </a:prstGeom>
+          <a:noFill/>
+        </p:spPr>
+        <p:txBody>
+          <a:bodyPr wrap="none" lIns="9144" rIns="9144" tIns="9144" bIns="9144" anchor="t">
+            <a:spAutoFit/>
+          </a:bodyPr>
+          <a:lstStyle/>
+          <a:p>
+            <a:pPr algn="r">
+              <a:spcAft>
+                <a:spcPts val="0"/>
+              </a:spcAft>
+              <a:defRPr sz="680" b="1">
+                <a:solidFill>
+                  <a:srgbClr val="4F6B00"/>
+                </a:solidFill>
+                <a:latin typeface="Inter"/>
+              </a:defRPr>
+            </a:pPr>
+            <a:r>
+              <a:rPr>
+                <a:latin typeface="Inter"/>
+              </a:rPr>
+              <a:t>Illustrative, Gradient Maintained — demo data, not the client's holdings or managers</a:t>
+            </a:r>
+          </a:p>
+        </p:txBody>
+      </p:sp>
+      <p:sp>
+        <p:nvSpPr>
+          <p:cNvPr id="5" name="TextBox 4"/>
+          <p:cNvSpPr txBox="1"/>
+          <p:nvPr/>
+        </p:nvSpPr>
+        <p:spPr>
+          <a:xfrm>
             <a:off x="640080" y="566928"/>
             <a:ext cx="10058400" cy="530352"/>
           </a:xfrm>
@@ -11591,7 +12099,7 @@
       </p:sp>
       <p:sp>
         <p:nvSpPr>
-          <p:cNvPr id="5" name="Rectangle 4"/>
+          <p:cNvPr id="6" name="Rectangle 5"/>
           <p:cNvSpPr/>
           <p:nvPr/>
         </p:nvSpPr>
@@ -11640,7 +12148,7 @@
       </p:sp>
       <p:sp>
         <p:nvSpPr>
-          <p:cNvPr id="6" name="Rectangle 5"/>
+          <p:cNvPr id="7" name="Rectangle 6"/>
           <p:cNvSpPr/>
           <p:nvPr/>
         </p:nvSpPr>
@@ -11689,7 +12197,7 @@
       </p:sp>
       <p:sp>
         <p:nvSpPr>
-          <p:cNvPr id="7" name="TextBox 6"/>
+          <p:cNvPr id="8" name="TextBox 7"/>
           <p:cNvSpPr txBox="1"/>
           <p:nvPr/>
         </p:nvSpPr>
@@ -11731,7 +12239,7 @@
       </p:sp>
       <p:sp>
         <p:nvSpPr>
-          <p:cNvPr id="8" name="TextBox 7"/>
+          <p:cNvPr id="9" name="TextBox 8"/>
           <p:cNvSpPr txBox="1"/>
           <p:nvPr/>
         </p:nvSpPr>
@@ -11773,7 +12281,7 @@
       </p:sp>
       <p:graphicFrame>
         <p:nvGraphicFramePr>
-          <p:cNvPr id="9" name="Table 8"/>
+          <p:cNvPr id="10" name="Table 9"/>
           <p:cNvGraphicFramePr>
             <a:graphicFrameLocks noGrp="1"/>
           </p:cNvGraphicFramePr>
@@ -12306,7 +12814,7 @@
                         <a:rPr>
                           <a:latin typeface="Inter"/>
                         </a:rPr>
-                        <a:t>● Not assessed</a:t>
+                        <a:t>● not assessed</a:t>
                       </a:r>
                     </a:p>
                   </a:txBody>
@@ -12350,7 +12858,7 @@
       </p:graphicFrame>
       <p:sp>
         <p:nvSpPr>
-          <p:cNvPr id="10" name="Rectangle 9"/>
+          <p:cNvPr id="11" name="Rectangle 10"/>
           <p:cNvSpPr/>
           <p:nvPr/>
         </p:nvSpPr>
@@ -12399,7 +12907,7 @@
       </p:sp>
       <p:sp>
         <p:nvSpPr>
-          <p:cNvPr id="11" name="Rectangle 10"/>
+          <p:cNvPr id="12" name="Rectangle 11"/>
           <p:cNvSpPr/>
           <p:nvPr/>
         </p:nvSpPr>
@@ -12448,7 +12956,7 @@
       </p:sp>
       <p:sp>
         <p:nvSpPr>
-          <p:cNvPr id="12" name="TextBox 11"/>
+          <p:cNvPr id="13" name="TextBox 12"/>
           <p:cNvSpPr txBox="1"/>
           <p:nvPr/>
         </p:nvSpPr>
@@ -12490,7 +12998,7 @@
       </p:sp>
       <p:sp>
         <p:nvSpPr>
-          <p:cNvPr id="13" name="TextBox 12"/>
+          <p:cNvPr id="14" name="TextBox 13"/>
           <p:cNvSpPr txBox="1"/>
           <p:nvPr/>
         </p:nvSpPr>
@@ -12532,7 +13040,7 @@
       </p:sp>
       <p:sp>
         <p:nvSpPr>
-          <p:cNvPr id="14" name="Rectangle 13"/>
+          <p:cNvPr id="15" name="Rectangle 14"/>
           <p:cNvSpPr/>
           <p:nvPr/>
         </p:nvSpPr>
@@ -12581,7 +13089,7 @@
       </p:sp>
       <p:sp>
         <p:nvSpPr>
-          <p:cNvPr id="15" name="Rectangle 14"/>
+          <p:cNvPr id="16" name="Rectangle 15"/>
           <p:cNvSpPr/>
           <p:nvPr/>
         </p:nvSpPr>
@@ -12630,7 +13138,7 @@
       </p:sp>
       <p:sp>
         <p:nvSpPr>
-          <p:cNvPr id="16" name="TextBox 15"/>
+          <p:cNvPr id="17" name="TextBox 16"/>
           <p:cNvSpPr txBox="1"/>
           <p:nvPr/>
         </p:nvSpPr>
@@ -12672,7 +13180,7 @@
       </p:sp>
       <p:sp>
         <p:nvSpPr>
-          <p:cNvPr id="17" name="TextBox 16"/>
+          <p:cNvPr id="18" name="TextBox 17"/>
           <p:cNvSpPr txBox="1"/>
           <p:nvPr/>
         </p:nvSpPr>
@@ -12714,7 +13222,7 @@
       </p:sp>
       <p:sp>
         <p:nvSpPr>
-          <p:cNvPr id="18" name="Rectangle 17"/>
+          <p:cNvPr id="19" name="Rectangle 18"/>
           <p:cNvSpPr/>
           <p:nvPr/>
         </p:nvSpPr>
@@ -12763,7 +13271,7 @@
       </p:sp>
       <p:sp>
         <p:nvSpPr>
-          <p:cNvPr id="19" name="TextBox 18"/>
+          <p:cNvPr id="20" name="TextBox 19"/>
           <p:cNvSpPr txBox="1"/>
           <p:nvPr/>
         </p:nvSpPr>
@@ -12805,7 +13313,7 @@
       </p:sp>
       <p:sp>
         <p:nvSpPr>
-          <p:cNvPr id="20" name="TextBox 19"/>
+          <p:cNvPr id="21" name="TextBox 20"/>
           <p:cNvSpPr txBox="1"/>
           <p:nvPr/>
         </p:nvSpPr>
@@ -12840,14 +13348,14 @@
               <a:rPr>
                 <a:latin typeface="Inter"/>
               </a:rPr>
-              <a:t>TEST DATA — fictional portfolio for rendering tests only · Data as of 2026-06-30</a:t>
+              <a:t>Confidential — Investment Committee · Data as of 2026-06-30</a:t>
             </a:r>
           </a:p>
         </p:txBody>
       </p:sp>
       <p:sp>
         <p:nvSpPr>
-          <p:cNvPr id="21" name="TextBox 20"/>
+          <p:cNvPr id="22" name="TextBox 21"/>
           <p:cNvSpPr txBox="1"/>
           <p:nvPr/>
         </p:nvSpPr>
@@ -12963,7 +13471,7 @@
         <p:spPr>
           <a:xfrm>
             <a:off x="640080" y="329184"/>
-            <a:ext cx="9875520" cy="182880"/>
+            <a:ext cx="5303520" cy="182880"/>
           </a:xfrm>
           <a:prstGeom prst="rect">
             <a:avLst/>
@@ -13004,6 +13512,48 @@
         </p:nvSpPr>
         <p:spPr>
           <a:xfrm>
+            <a:off x="5897880" y="310896"/>
+            <a:ext cx="4800600" cy="256032"/>
+          </a:xfrm>
+          <a:prstGeom prst="rect">
+            <a:avLst/>
+          </a:prstGeom>
+          <a:noFill/>
+        </p:spPr>
+        <p:txBody>
+          <a:bodyPr wrap="none" lIns="9144" rIns="9144" tIns="9144" bIns="9144" anchor="t">
+            <a:spAutoFit/>
+          </a:bodyPr>
+          <a:lstStyle/>
+          <a:p>
+            <a:pPr algn="r">
+              <a:spcAft>
+                <a:spcPts val="0"/>
+              </a:spcAft>
+              <a:defRPr sz="680" b="1">
+                <a:solidFill>
+                  <a:srgbClr val="4F6B00"/>
+                </a:solidFill>
+                <a:latin typeface="Inter"/>
+              </a:defRPr>
+            </a:pPr>
+            <a:r>
+              <a:rPr>
+                <a:latin typeface="Inter"/>
+              </a:rPr>
+              <a:t>Illustrative, Gradient Maintained — demo data, not the client's holdings or managers</a:t>
+            </a:r>
+          </a:p>
+        </p:txBody>
+      </p:sp>
+      <p:sp>
+        <p:nvSpPr>
+          <p:cNvPr id="5" name="TextBox 4"/>
+          <p:cNvSpPr txBox="1"/>
+          <p:nvPr/>
+        </p:nvSpPr>
+        <p:spPr>
+          <a:xfrm>
             <a:off x="640080" y="566928"/>
             <a:ext cx="10058400" cy="530352"/>
           </a:xfrm>
@@ -13040,7 +13590,7 @@
       </p:sp>
       <p:sp>
         <p:nvSpPr>
-          <p:cNvPr id="5" name="Rectangle 4"/>
+          <p:cNvPr id="6" name="Rectangle 5"/>
           <p:cNvSpPr/>
           <p:nvPr/>
         </p:nvSpPr>
@@ -13089,7 +13639,7 @@
       </p:sp>
       <p:sp>
         <p:nvSpPr>
-          <p:cNvPr id="6" name="Rectangle 5"/>
+          <p:cNvPr id="7" name="Rectangle 6"/>
           <p:cNvSpPr/>
           <p:nvPr/>
         </p:nvSpPr>
@@ -13138,7 +13688,7 @@
       </p:sp>
       <p:sp>
         <p:nvSpPr>
-          <p:cNvPr id="7" name="TextBox 6"/>
+          <p:cNvPr id="8" name="TextBox 7"/>
           <p:cNvSpPr txBox="1"/>
           <p:nvPr/>
         </p:nvSpPr>
@@ -13180,7 +13730,7 @@
       </p:sp>
       <p:sp>
         <p:nvSpPr>
-          <p:cNvPr id="8" name="TextBox 7"/>
+          <p:cNvPr id="9" name="TextBox 8"/>
           <p:cNvSpPr txBox="1"/>
           <p:nvPr/>
         </p:nvSpPr>
@@ -13222,7 +13772,7 @@
       </p:sp>
       <p:graphicFrame>
         <p:nvGraphicFramePr>
-          <p:cNvPr id="9" name="Chart 8"/>
+          <p:cNvPr id="10" name="Chart 9"/>
           <p:cNvGraphicFramePr>
             <a:graphicFrameLocks noGrp="1"/>
           </p:cNvGraphicFramePr>
@@ -13240,7 +13790,7 @@
       </p:graphicFrame>
       <p:sp>
         <p:nvSpPr>
-          <p:cNvPr id="10" name="Rectangle 9"/>
+          <p:cNvPr id="11" name="Rectangle 10"/>
           <p:cNvSpPr/>
           <p:nvPr/>
         </p:nvSpPr>
@@ -13289,7 +13839,7 @@
       </p:sp>
       <p:sp>
         <p:nvSpPr>
-          <p:cNvPr id="11" name="TextBox 10"/>
+          <p:cNvPr id="12" name="TextBox 11"/>
           <p:cNvSpPr txBox="1"/>
           <p:nvPr/>
         </p:nvSpPr>
@@ -13331,7 +13881,7 @@
       </p:sp>
       <p:sp>
         <p:nvSpPr>
-          <p:cNvPr id="12" name="TextBox 11"/>
+          <p:cNvPr id="13" name="TextBox 12"/>
           <p:cNvSpPr txBox="1"/>
           <p:nvPr/>
         </p:nvSpPr>
@@ -13366,14 +13916,14 @@
               <a:rPr>
                 <a:latin typeface="Inter"/>
               </a:rPr>
-              <a:t>TEST DATA — fictional portfolio for rendering tests only · Data as of 2026-06-30</a:t>
+              <a:t>Confidential — Investment Committee · Data as of 2026-06-30</a:t>
             </a:r>
           </a:p>
         </p:txBody>
       </p:sp>
       <p:sp>
         <p:nvSpPr>
-          <p:cNvPr id="13" name="TextBox 12"/>
+          <p:cNvPr id="14" name="TextBox 13"/>
           <p:cNvSpPr txBox="1"/>
           <p:nvPr/>
         </p:nvSpPr>
@@ -13489,7 +14039,7 @@
         <p:spPr>
           <a:xfrm>
             <a:off x="640080" y="329184"/>
-            <a:ext cx="9875520" cy="182880"/>
+            <a:ext cx="5303520" cy="182880"/>
           </a:xfrm>
           <a:prstGeom prst="rect">
             <a:avLst/>
@@ -13530,6 +14080,48 @@
         </p:nvSpPr>
         <p:spPr>
           <a:xfrm>
+            <a:off x="5897880" y="310896"/>
+            <a:ext cx="4800600" cy="256032"/>
+          </a:xfrm>
+          <a:prstGeom prst="rect">
+            <a:avLst/>
+          </a:prstGeom>
+          <a:noFill/>
+        </p:spPr>
+        <p:txBody>
+          <a:bodyPr wrap="none" lIns="9144" rIns="9144" tIns="9144" bIns="9144" anchor="t">
+            <a:spAutoFit/>
+          </a:bodyPr>
+          <a:lstStyle/>
+          <a:p>
+            <a:pPr algn="r">
+              <a:spcAft>
+                <a:spcPts val="0"/>
+              </a:spcAft>
+              <a:defRPr sz="680" b="1">
+                <a:solidFill>
+                  <a:srgbClr val="4F6B00"/>
+                </a:solidFill>
+                <a:latin typeface="Inter"/>
+              </a:defRPr>
+            </a:pPr>
+            <a:r>
+              <a:rPr>
+                <a:latin typeface="Inter"/>
+              </a:rPr>
+              <a:t>Illustrative, Gradient Maintained — demo data, not the client's holdings or managers</a:t>
+            </a:r>
+          </a:p>
+        </p:txBody>
+      </p:sp>
+      <p:sp>
+        <p:nvSpPr>
+          <p:cNvPr id="5" name="TextBox 4"/>
+          <p:cNvSpPr txBox="1"/>
+          <p:nvPr/>
+        </p:nvSpPr>
+        <p:spPr>
+          <a:xfrm>
             <a:off x="640080" y="566928"/>
             <a:ext cx="10058400" cy="530352"/>
           </a:xfrm>
@@ -13566,7 +14158,7 @@
       </p:sp>
       <p:sp>
         <p:nvSpPr>
-          <p:cNvPr id="5" name="Rectangle 4"/>
+          <p:cNvPr id="6" name="Rectangle 5"/>
           <p:cNvSpPr/>
           <p:nvPr/>
         </p:nvSpPr>
@@ -13615,7 +14207,7 @@
       </p:sp>
       <p:sp>
         <p:nvSpPr>
-          <p:cNvPr id="6" name="Rectangle 5"/>
+          <p:cNvPr id="7" name="Rectangle 6"/>
           <p:cNvSpPr/>
           <p:nvPr/>
         </p:nvSpPr>
@@ -13664,7 +14256,7 @@
       </p:sp>
       <p:sp>
         <p:nvSpPr>
-          <p:cNvPr id="7" name="TextBox 6"/>
+          <p:cNvPr id="8" name="TextBox 7"/>
           <p:cNvSpPr txBox="1"/>
           <p:nvPr/>
         </p:nvSpPr>
@@ -13706,7 +14298,7 @@
       </p:sp>
       <p:graphicFrame>
         <p:nvGraphicFramePr>
-          <p:cNvPr id="8" name="Table 7"/>
+          <p:cNvPr id="9" name="Table 8"/>
           <p:cNvGraphicFramePr>
             <a:graphicFrameLocks noGrp="1"/>
           </p:cNvGraphicFramePr>
@@ -13771,7 +14363,7 @@
                         <a:rPr>
                           <a:latin typeface="Inter"/>
                         </a:rPr>
-                        <a:t>2026 Strategic CMA (TEST) [S6]</a:t>
+                        <a:t>2026 Strategic CMA [S6]</a:t>
                       </a:r>
                     </a:p>
                   </a:txBody>
@@ -14012,7 +14604,7 @@
       </p:graphicFrame>
       <p:sp>
         <p:nvSpPr>
-          <p:cNvPr id="9" name="Rectangle 8"/>
+          <p:cNvPr id="10" name="Rectangle 9"/>
           <p:cNvSpPr/>
           <p:nvPr/>
         </p:nvSpPr>
@@ -14061,7 +14653,7 @@
       </p:sp>
       <p:sp>
         <p:nvSpPr>
-          <p:cNvPr id="10" name="TextBox 9"/>
+          <p:cNvPr id="11" name="TextBox 10"/>
           <p:cNvSpPr txBox="1"/>
           <p:nvPr/>
         </p:nvSpPr>
@@ -14103,7 +14695,7 @@
       </p:sp>
       <p:sp>
         <p:nvSpPr>
-          <p:cNvPr id="11" name="TextBox 10"/>
+          <p:cNvPr id="12" name="TextBox 11"/>
           <p:cNvSpPr txBox="1"/>
           <p:nvPr/>
         </p:nvSpPr>
@@ -14138,14 +14730,14 @@
               <a:rPr>
                 <a:latin typeface="Inter"/>
               </a:rPr>
-              <a:t>TEST DATA — fictional portfolio for rendering tests only · Data as of 2026-06-30</a:t>
+              <a:t>Confidential — Investment Committee · Data as of 2026-06-30</a:t>
             </a:r>
           </a:p>
         </p:txBody>
       </p:sp>
       <p:sp>
         <p:nvSpPr>
-          <p:cNvPr id="12" name="TextBox 11"/>
+          <p:cNvPr id="13" name="TextBox 12"/>
           <p:cNvSpPr txBox="1"/>
           <p:nvPr/>
         </p:nvSpPr>
@@ -14260,6 +14852,48 @@
         </p:nvSpPr>
         <p:spPr>
           <a:xfrm>
+            <a:off x="5897880" y="310896"/>
+            <a:ext cx="4800600" cy="256032"/>
+          </a:xfrm>
+          <a:prstGeom prst="rect">
+            <a:avLst/>
+          </a:prstGeom>
+          <a:noFill/>
+        </p:spPr>
+        <p:txBody>
+          <a:bodyPr wrap="none" lIns="9144" rIns="9144" tIns="9144" bIns="9144" anchor="t">
+            <a:spAutoFit/>
+          </a:bodyPr>
+          <a:lstStyle/>
+          <a:p>
+            <a:pPr algn="r">
+              <a:spcAft>
+                <a:spcPts val="0"/>
+              </a:spcAft>
+              <a:defRPr sz="680" b="1">
+                <a:solidFill>
+                  <a:srgbClr val="4F6B00"/>
+                </a:solidFill>
+                <a:latin typeface="Inter"/>
+              </a:defRPr>
+            </a:pPr>
+            <a:r>
+              <a:rPr>
+                <a:latin typeface="Inter"/>
+              </a:rPr>
+              <a:t>Illustrative, Gradient Maintained — demo data, not the client's holdings or managers</a:t>
+            </a:r>
+          </a:p>
+        </p:txBody>
+      </p:sp>
+      <p:sp>
+        <p:nvSpPr>
+          <p:cNvPr id="4" name="TextBox 3"/>
+          <p:cNvSpPr txBox="1"/>
+          <p:nvPr/>
+        </p:nvSpPr>
+        <p:spPr>
+          <a:xfrm>
             <a:off x="640080" y="566928"/>
             <a:ext cx="10058400" cy="530352"/>
           </a:xfrm>
@@ -14296,7 +14930,7 @@
       </p:sp>
       <p:sp>
         <p:nvSpPr>
-          <p:cNvPr id="4" name="Rectangle 3"/>
+          <p:cNvPr id="5" name="Rectangle 4"/>
           <p:cNvSpPr/>
           <p:nvPr/>
         </p:nvSpPr>
@@ -14345,7 +14979,7 @@
       </p:sp>
       <p:sp>
         <p:nvSpPr>
-          <p:cNvPr id="5" name="Rectangle 4"/>
+          <p:cNvPr id="6" name="Rectangle 5"/>
           <p:cNvSpPr/>
           <p:nvPr/>
         </p:nvSpPr>
@@ -14394,7 +15028,7 @@
       </p:sp>
       <p:sp>
         <p:nvSpPr>
-          <p:cNvPr id="6" name="TextBox 5"/>
+          <p:cNvPr id="7" name="TextBox 6"/>
           <p:cNvSpPr txBox="1"/>
           <p:nvPr/>
         </p:nvSpPr>
@@ -14436,7 +15070,7 @@
       </p:sp>
       <p:sp>
         <p:nvSpPr>
-          <p:cNvPr id="7" name="Rectangle 6"/>
+          <p:cNvPr id="8" name="Rectangle 7"/>
           <p:cNvSpPr/>
           <p:nvPr/>
         </p:nvSpPr>
@@ -14485,7 +15119,7 @@
       </p:sp>
       <p:sp>
         <p:nvSpPr>
-          <p:cNvPr id="8" name="Rectangle 7"/>
+          <p:cNvPr id="9" name="Rectangle 8"/>
           <p:cNvSpPr/>
           <p:nvPr/>
         </p:nvSpPr>
@@ -14534,7 +15168,7 @@
       </p:sp>
       <p:sp>
         <p:nvSpPr>
-          <p:cNvPr id="9" name="TextBox 8"/>
+          <p:cNvPr id="10" name="TextBox 9"/>
           <p:cNvSpPr txBox="1"/>
           <p:nvPr/>
         </p:nvSpPr>
@@ -14576,7 +15210,7 @@
       </p:sp>
       <p:sp>
         <p:nvSpPr>
-          <p:cNvPr id="10" name="TextBox 9"/>
+          <p:cNvPr id="11" name="TextBox 10"/>
           <p:cNvSpPr txBox="1"/>
           <p:nvPr/>
         </p:nvSpPr>
@@ -14618,7 +15252,7 @@
       </p:sp>
       <p:sp>
         <p:nvSpPr>
-          <p:cNvPr id="11" name="Rectangle 10"/>
+          <p:cNvPr id="12" name="Rectangle 11"/>
           <p:cNvSpPr/>
           <p:nvPr/>
         </p:nvSpPr>
@@ -14667,7 +15301,7 @@
       </p:sp>
       <p:sp>
         <p:nvSpPr>
-          <p:cNvPr id="12" name="Rectangle 11"/>
+          <p:cNvPr id="13" name="Rectangle 12"/>
           <p:cNvSpPr/>
           <p:nvPr/>
         </p:nvSpPr>
@@ -14716,7 +15350,7 @@
       </p:sp>
       <p:sp>
         <p:nvSpPr>
-          <p:cNvPr id="13" name="TextBox 12"/>
+          <p:cNvPr id="14" name="TextBox 13"/>
           <p:cNvSpPr txBox="1"/>
           <p:nvPr/>
         </p:nvSpPr>
@@ -14758,7 +15392,7 @@
       </p:sp>
       <p:sp>
         <p:nvSpPr>
-          <p:cNvPr id="14" name="TextBox 13"/>
+          <p:cNvPr id="15" name="TextBox 14"/>
           <p:cNvSpPr txBox="1"/>
           <p:nvPr/>
         </p:nvSpPr>
@@ -14800,7 +15434,7 @@
       </p:sp>
       <p:sp>
         <p:nvSpPr>
-          <p:cNvPr id="15" name="TextBox 14"/>
+          <p:cNvPr id="16" name="TextBox 15"/>
           <p:cNvSpPr txBox="1"/>
           <p:nvPr/>
         </p:nvSpPr>
@@ -14842,7 +15476,7 @@
       </p:sp>
       <p:sp>
         <p:nvSpPr>
-          <p:cNvPr id="16" name="Rectangle 15"/>
+          <p:cNvPr id="17" name="Rectangle 16"/>
           <p:cNvSpPr/>
           <p:nvPr/>
         </p:nvSpPr>
@@ -14891,7 +15525,7 @@
       </p:sp>
       <p:sp>
         <p:nvSpPr>
-          <p:cNvPr id="17" name="Rectangle 16"/>
+          <p:cNvPr id="18" name="Rectangle 17"/>
           <p:cNvSpPr/>
           <p:nvPr/>
         </p:nvSpPr>
@@ -14940,7 +15574,7 @@
       </p:sp>
       <p:sp>
         <p:nvSpPr>
-          <p:cNvPr id="18" name="TextBox 17"/>
+          <p:cNvPr id="19" name="TextBox 18"/>
           <p:cNvSpPr txBox="1"/>
           <p:nvPr/>
         </p:nvSpPr>
@@ -14982,7 +15616,7 @@
       </p:sp>
       <p:sp>
         <p:nvSpPr>
-          <p:cNvPr id="19" name="TextBox 18"/>
+          <p:cNvPr id="20" name="TextBox 19"/>
           <p:cNvSpPr txBox="1"/>
           <p:nvPr/>
         </p:nvSpPr>
@@ -15024,7 +15658,7 @@
       </p:sp>
       <p:sp>
         <p:nvSpPr>
-          <p:cNvPr id="20" name="TextBox 19"/>
+          <p:cNvPr id="21" name="TextBox 20"/>
           <p:cNvSpPr txBox="1"/>
           <p:nvPr/>
         </p:nvSpPr>
@@ -15066,7 +15700,7 @@
       </p:sp>
       <p:sp>
         <p:nvSpPr>
-          <p:cNvPr id="21" name="Rectangle 20"/>
+          <p:cNvPr id="22" name="Rectangle 21"/>
           <p:cNvSpPr/>
           <p:nvPr/>
         </p:nvSpPr>
@@ -15115,7 +15749,7 @@
       </p:sp>
       <p:sp>
         <p:nvSpPr>
-          <p:cNvPr id="22" name="Rectangle 21"/>
+          <p:cNvPr id="23" name="Rectangle 22"/>
           <p:cNvSpPr/>
           <p:nvPr/>
         </p:nvSpPr>
@@ -15164,7 +15798,7 @@
       </p:sp>
       <p:sp>
         <p:nvSpPr>
-          <p:cNvPr id="23" name="TextBox 22"/>
+          <p:cNvPr id="24" name="TextBox 23"/>
           <p:cNvSpPr txBox="1"/>
           <p:nvPr/>
         </p:nvSpPr>
@@ -15206,7 +15840,7 @@
       </p:sp>
       <p:sp>
         <p:nvSpPr>
-          <p:cNvPr id="24" name="TextBox 23"/>
+          <p:cNvPr id="25" name="TextBox 24"/>
           <p:cNvSpPr txBox="1"/>
           <p:nvPr/>
         </p:nvSpPr>
@@ -15248,7 +15882,7 @@
       </p:sp>
       <p:sp>
         <p:nvSpPr>
-          <p:cNvPr id="25" name="TextBox 24"/>
+          <p:cNvPr id="26" name="TextBox 25"/>
           <p:cNvSpPr txBox="1"/>
           <p:nvPr/>
         </p:nvSpPr>
@@ -15290,7 +15924,7 @@
       </p:sp>
       <p:sp>
         <p:nvSpPr>
-          <p:cNvPr id="26" name="Rectangle 25"/>
+          <p:cNvPr id="27" name="Rectangle 26"/>
           <p:cNvSpPr/>
           <p:nvPr/>
         </p:nvSpPr>
@@ -15339,7 +15973,7 @@
       </p:sp>
       <p:sp>
         <p:nvSpPr>
-          <p:cNvPr id="27" name="Rectangle 26"/>
+          <p:cNvPr id="28" name="Rectangle 27"/>
           <p:cNvSpPr/>
           <p:nvPr/>
         </p:nvSpPr>
@@ -15388,7 +16022,7 @@
       </p:sp>
       <p:sp>
         <p:nvSpPr>
-          <p:cNvPr id="28" name="TextBox 27"/>
+          <p:cNvPr id="29" name="TextBox 28"/>
           <p:cNvSpPr txBox="1"/>
           <p:nvPr/>
         </p:nvSpPr>
@@ -15430,7 +16064,7 @@
       </p:sp>
       <p:sp>
         <p:nvSpPr>
-          <p:cNvPr id="29" name="TextBox 28"/>
+          <p:cNvPr id="30" name="TextBox 29"/>
           <p:cNvSpPr txBox="1"/>
           <p:nvPr/>
         </p:nvSpPr>
@@ -15472,7 +16106,7 @@
       </p:sp>
       <p:sp>
         <p:nvSpPr>
-          <p:cNvPr id="30" name="TextBox 29"/>
+          <p:cNvPr id="31" name="TextBox 30"/>
           <p:cNvSpPr txBox="1"/>
           <p:nvPr/>
         </p:nvSpPr>
@@ -15514,7 +16148,7 @@
       </p:sp>
       <p:sp>
         <p:nvSpPr>
-          <p:cNvPr id="31" name="Rectangle 30"/>
+          <p:cNvPr id="32" name="Rectangle 31"/>
           <p:cNvSpPr/>
           <p:nvPr/>
         </p:nvSpPr>
@@ -15563,7 +16197,7 @@
       </p:sp>
       <p:sp>
         <p:nvSpPr>
-          <p:cNvPr id="32" name="TextBox 31"/>
+          <p:cNvPr id="33" name="TextBox 32"/>
           <p:cNvSpPr txBox="1"/>
           <p:nvPr/>
         </p:nvSpPr>
@@ -15605,7 +16239,7 @@
       </p:sp>
       <p:sp>
         <p:nvSpPr>
-          <p:cNvPr id="33" name="TextBox 32"/>
+          <p:cNvPr id="34" name="TextBox 33"/>
           <p:cNvSpPr txBox="1"/>
           <p:nvPr/>
         </p:nvSpPr>
@@ -15640,14 +16274,14 @@
               <a:rPr>
                 <a:latin typeface="Inter"/>
               </a:rPr>
-              <a:t>TEST DATA — fictional portfolio for rendering tests only · Data as of 2026-06-30</a:t>
+              <a:t>Confidential — Investment Committee · Data as of 2026-06-30</a:t>
             </a:r>
           </a:p>
         </p:txBody>
       </p:sp>
       <p:sp>
         <p:nvSpPr>
-          <p:cNvPr id="34" name="TextBox 33"/>
+          <p:cNvPr id="35" name="TextBox 34"/>
           <p:cNvSpPr txBox="1"/>
           <p:nvPr/>
         </p:nvSpPr>
@@ -15763,7 +16397,7 @@
         <p:spPr>
           <a:xfrm>
             <a:off x="640080" y="329184"/>
-            <a:ext cx="9875520" cy="182880"/>
+            <a:ext cx="5303520" cy="182880"/>
           </a:xfrm>
           <a:prstGeom prst="rect">
             <a:avLst/>
@@ -15804,6 +16438,48 @@
         </p:nvSpPr>
         <p:spPr>
           <a:xfrm>
+            <a:off x="5897880" y="310896"/>
+            <a:ext cx="4800600" cy="256032"/>
+          </a:xfrm>
+          <a:prstGeom prst="rect">
+            <a:avLst/>
+          </a:prstGeom>
+          <a:noFill/>
+        </p:spPr>
+        <p:txBody>
+          <a:bodyPr wrap="none" lIns="9144" rIns="9144" tIns="9144" bIns="9144" anchor="t">
+            <a:spAutoFit/>
+          </a:bodyPr>
+          <a:lstStyle/>
+          <a:p>
+            <a:pPr algn="r">
+              <a:spcAft>
+                <a:spcPts val="0"/>
+              </a:spcAft>
+              <a:defRPr sz="680" b="1">
+                <a:solidFill>
+                  <a:srgbClr val="4F6B00"/>
+                </a:solidFill>
+                <a:latin typeface="Inter"/>
+              </a:defRPr>
+            </a:pPr>
+            <a:r>
+              <a:rPr>
+                <a:latin typeface="Inter"/>
+              </a:rPr>
+              <a:t>Illustrative, Gradient Maintained — demo data, not the client's holdings or managers</a:t>
+            </a:r>
+          </a:p>
+        </p:txBody>
+      </p:sp>
+      <p:sp>
+        <p:nvSpPr>
+          <p:cNvPr id="5" name="TextBox 4"/>
+          <p:cNvSpPr txBox="1"/>
+          <p:nvPr/>
+        </p:nvSpPr>
+        <p:spPr>
+          <a:xfrm>
             <a:off x="640080" y="566928"/>
             <a:ext cx="10058400" cy="530352"/>
           </a:xfrm>
@@ -15840,7 +16516,7 @@
       </p:sp>
       <p:sp>
         <p:nvSpPr>
-          <p:cNvPr id="5" name="Rectangle 4"/>
+          <p:cNvPr id="6" name="Rectangle 5"/>
           <p:cNvSpPr/>
           <p:nvPr/>
         </p:nvSpPr>
@@ -15889,7 +16565,7 @@
       </p:sp>
       <p:sp>
         <p:nvSpPr>
-          <p:cNvPr id="6" name="Rectangle 5"/>
+          <p:cNvPr id="7" name="Rectangle 6"/>
           <p:cNvSpPr/>
           <p:nvPr/>
         </p:nvSpPr>
@@ -15938,7 +16614,7 @@
       </p:sp>
       <p:sp>
         <p:nvSpPr>
-          <p:cNvPr id="7" name="TextBox 6"/>
+          <p:cNvPr id="8" name="TextBox 7"/>
           <p:cNvSpPr txBox="1"/>
           <p:nvPr/>
         </p:nvSpPr>
@@ -15980,7 +16656,7 @@
       </p:sp>
       <p:sp>
         <p:nvSpPr>
-          <p:cNvPr id="8" name="TextBox 7"/>
+          <p:cNvPr id="9" name="TextBox 8"/>
           <p:cNvSpPr txBox="1"/>
           <p:nvPr/>
         </p:nvSpPr>
@@ -16015,14 +16691,14 @@
               <a:rPr>
                 <a:latin typeface="Inter"/>
               </a:rPr>
-              <a:t>GLOBAL EQUITY FORWARD ASSUMPTIONS (TEST)</a:t>
+              <a:t>GLOBAL EQUITY FORWARD ASSUMPTIONS</a:t>
             </a:r>
           </a:p>
         </p:txBody>
       </p:sp>
       <p:graphicFrame>
         <p:nvGraphicFramePr>
-          <p:cNvPr id="9" name="Table 8"/>
+          <p:cNvPr id="10" name="Table 9"/>
           <p:cNvGraphicFramePr>
             <a:graphicFrameLocks noGrp="1"/>
           </p:cNvGraphicFramePr>
@@ -16381,7 +17057,7 @@
       </p:graphicFrame>
       <p:sp>
         <p:nvSpPr>
-          <p:cNvPr id="10" name="Rectangle 9"/>
+          <p:cNvPr id="11" name="Rectangle 10"/>
           <p:cNvSpPr/>
           <p:nvPr/>
         </p:nvSpPr>
@@ -16430,7 +17106,7 @@
       </p:sp>
       <p:sp>
         <p:nvSpPr>
-          <p:cNvPr id="11" name="TextBox 10"/>
+          <p:cNvPr id="12" name="TextBox 11"/>
           <p:cNvSpPr txBox="1"/>
           <p:nvPr/>
         </p:nvSpPr>
@@ -16465,14 +17141,14 @@
               <a:rPr>
                 <a:latin typeface="Inter"/>
               </a:rPr>
-              <a:t>Sources: none cited</a:t>
+              <a:t>Sources: S1</a:t>
             </a:r>
           </a:p>
         </p:txBody>
       </p:sp>
       <p:sp>
         <p:nvSpPr>
-          <p:cNvPr id="12" name="TextBox 11"/>
+          <p:cNvPr id="13" name="TextBox 12"/>
           <p:cNvSpPr txBox="1"/>
           <p:nvPr/>
         </p:nvSpPr>
@@ -16507,14 +17183,14 @@
               <a:rPr>
                 <a:latin typeface="Inter"/>
               </a:rPr>
-              <a:t>TEST DATA — fictional portfolio for rendering tests only · Data as of 2026-06-30</a:t>
+              <a:t>Confidential — Investment Committee · Data as of 2026-06-30</a:t>
             </a:r>
           </a:p>
         </p:txBody>
       </p:sp>
       <p:sp>
         <p:nvSpPr>
-          <p:cNvPr id="13" name="TextBox 12"/>
+          <p:cNvPr id="14" name="TextBox 13"/>
           <p:cNvSpPr txBox="1"/>
           <p:nvPr/>
         </p:nvSpPr>
@@ -16630,7 +17306,7 @@
         <p:spPr>
           <a:xfrm>
             <a:off x="640080" y="329184"/>
-            <a:ext cx="9875520" cy="182880"/>
+            <a:ext cx="5303520" cy="182880"/>
           </a:xfrm>
           <a:prstGeom prst="rect">
             <a:avLst/>
@@ -16671,6 +17347,48 @@
         </p:nvSpPr>
         <p:spPr>
           <a:xfrm>
+            <a:off x="5897880" y="310896"/>
+            <a:ext cx="4800600" cy="256032"/>
+          </a:xfrm>
+          <a:prstGeom prst="rect">
+            <a:avLst/>
+          </a:prstGeom>
+          <a:noFill/>
+        </p:spPr>
+        <p:txBody>
+          <a:bodyPr wrap="none" lIns="9144" rIns="9144" tIns="9144" bIns="9144" anchor="t">
+            <a:spAutoFit/>
+          </a:bodyPr>
+          <a:lstStyle/>
+          <a:p>
+            <a:pPr algn="r">
+              <a:spcAft>
+                <a:spcPts val="0"/>
+              </a:spcAft>
+              <a:defRPr sz="680" b="1">
+                <a:solidFill>
+                  <a:srgbClr val="4F6B00"/>
+                </a:solidFill>
+                <a:latin typeface="Inter"/>
+              </a:defRPr>
+            </a:pPr>
+            <a:r>
+              <a:rPr>
+                <a:latin typeface="Inter"/>
+              </a:rPr>
+              <a:t>Illustrative, Gradient Maintained — demo data, not the client's holdings or managers</a:t>
+            </a:r>
+          </a:p>
+        </p:txBody>
+      </p:sp>
+      <p:sp>
+        <p:nvSpPr>
+          <p:cNvPr id="5" name="TextBox 4"/>
+          <p:cNvSpPr txBox="1"/>
+          <p:nvPr/>
+        </p:nvSpPr>
+        <p:spPr>
+          <a:xfrm>
             <a:off x="640080" y="566928"/>
             <a:ext cx="10058400" cy="530352"/>
           </a:xfrm>
@@ -16707,7 +17425,7 @@
       </p:sp>
       <p:sp>
         <p:nvSpPr>
-          <p:cNvPr id="5" name="Rectangle 4"/>
+          <p:cNvPr id="6" name="Rectangle 5"/>
           <p:cNvSpPr/>
           <p:nvPr/>
         </p:nvSpPr>
@@ -16756,7 +17474,7 @@
       </p:sp>
       <p:sp>
         <p:nvSpPr>
-          <p:cNvPr id="6" name="Rectangle 5"/>
+          <p:cNvPr id="7" name="Rectangle 6"/>
           <p:cNvSpPr/>
           <p:nvPr/>
         </p:nvSpPr>
@@ -16805,7 +17523,7 @@
       </p:sp>
       <p:sp>
         <p:nvSpPr>
-          <p:cNvPr id="7" name="TextBox 6"/>
+          <p:cNvPr id="8" name="TextBox 7"/>
           <p:cNvSpPr txBox="1"/>
           <p:nvPr/>
         </p:nvSpPr>
@@ -16847,7 +17565,7 @@
       </p:sp>
       <p:sp>
         <p:nvSpPr>
-          <p:cNvPr id="8" name="Rectangle 7"/>
+          <p:cNvPr id="9" name="Rectangle 8"/>
           <p:cNvSpPr/>
           <p:nvPr/>
         </p:nvSpPr>
@@ -16896,7 +17614,7 @@
       </p:sp>
       <p:sp>
         <p:nvSpPr>
-          <p:cNvPr id="9" name="Rectangle 8"/>
+          <p:cNvPr id="10" name="Rectangle 9"/>
           <p:cNvSpPr/>
           <p:nvPr/>
         </p:nvSpPr>
@@ -16945,7 +17663,7 @@
       </p:sp>
       <p:sp>
         <p:nvSpPr>
-          <p:cNvPr id="10" name="TextBox 9"/>
+          <p:cNvPr id="11" name="TextBox 10"/>
           <p:cNvSpPr txBox="1"/>
           <p:nvPr/>
         </p:nvSpPr>
@@ -16987,7 +17705,7 @@
       </p:sp>
       <p:sp>
         <p:nvSpPr>
-          <p:cNvPr id="11" name="TextBox 10"/>
+          <p:cNvPr id="12" name="TextBox 11"/>
           <p:cNvSpPr txBox="1"/>
           <p:nvPr/>
         </p:nvSpPr>
@@ -17029,7 +17747,7 @@
       </p:sp>
       <p:sp>
         <p:nvSpPr>
-          <p:cNvPr id="12" name="TextBox 11"/>
+          <p:cNvPr id="13" name="TextBox 12"/>
           <p:cNvSpPr txBox="1"/>
           <p:nvPr/>
         </p:nvSpPr>
@@ -17071,7 +17789,7 @@
       </p:sp>
       <p:sp>
         <p:nvSpPr>
-          <p:cNvPr id="13" name="Rectangle 12"/>
+          <p:cNvPr id="14" name="Rectangle 13"/>
           <p:cNvSpPr/>
           <p:nvPr/>
         </p:nvSpPr>
@@ -17120,7 +17838,7 @@
       </p:sp>
       <p:sp>
         <p:nvSpPr>
-          <p:cNvPr id="14" name="TextBox 13"/>
+          <p:cNvPr id="15" name="TextBox 14"/>
           <p:cNvSpPr txBox="1"/>
           <p:nvPr/>
         </p:nvSpPr>
@@ -17162,7 +17880,7 @@
       </p:sp>
       <p:sp>
         <p:nvSpPr>
-          <p:cNvPr id="15" name="TextBox 14"/>
+          <p:cNvPr id="16" name="TextBox 15"/>
           <p:cNvSpPr txBox="1"/>
           <p:nvPr/>
         </p:nvSpPr>
@@ -17197,14 +17915,14 @@
               <a:rPr>
                 <a:latin typeface="Inter"/>
               </a:rPr>
-              <a:t>TEST DATA — fictional portfolio for rendering tests only · Data as of 2026-06-30</a:t>
+              <a:t>Confidential — Investment Committee · Data as of 2026-06-30</a:t>
             </a:r>
           </a:p>
         </p:txBody>
       </p:sp>
       <p:sp>
         <p:nvSpPr>
-          <p:cNvPr id="16" name="TextBox 15"/>
+          <p:cNvPr id="17" name="TextBox 16"/>
           <p:cNvSpPr txBox="1"/>
           <p:nvPr/>
         </p:nvSpPr>
@@ -17320,7 +18038,7 @@
         <p:spPr>
           <a:xfrm>
             <a:off x="640080" y="329184"/>
-            <a:ext cx="9875520" cy="182880"/>
+            <a:ext cx="5303520" cy="182880"/>
           </a:xfrm>
           <a:prstGeom prst="rect">
             <a:avLst/>
@@ -17361,6 +18079,48 @@
         </p:nvSpPr>
         <p:spPr>
           <a:xfrm>
+            <a:off x="5897880" y="310896"/>
+            <a:ext cx="4800600" cy="256032"/>
+          </a:xfrm>
+          <a:prstGeom prst="rect">
+            <a:avLst/>
+          </a:prstGeom>
+          <a:noFill/>
+        </p:spPr>
+        <p:txBody>
+          <a:bodyPr wrap="none" lIns="9144" rIns="9144" tIns="9144" bIns="9144" anchor="t">
+            <a:spAutoFit/>
+          </a:bodyPr>
+          <a:lstStyle/>
+          <a:p>
+            <a:pPr algn="r">
+              <a:spcAft>
+                <a:spcPts val="0"/>
+              </a:spcAft>
+              <a:defRPr sz="680" b="1">
+                <a:solidFill>
+                  <a:srgbClr val="4F6B00"/>
+                </a:solidFill>
+                <a:latin typeface="Inter"/>
+              </a:defRPr>
+            </a:pPr>
+            <a:r>
+              <a:rPr>
+                <a:latin typeface="Inter"/>
+              </a:rPr>
+              <a:t>Illustrative, Gradient Maintained — demo data, not the client's holdings or managers</a:t>
+            </a:r>
+          </a:p>
+        </p:txBody>
+      </p:sp>
+      <p:sp>
+        <p:nvSpPr>
+          <p:cNvPr id="5" name="TextBox 4"/>
+          <p:cNvSpPr txBox="1"/>
+          <p:nvPr/>
+        </p:nvSpPr>
+        <p:spPr>
+          <a:xfrm>
             <a:off x="640080" y="566928"/>
             <a:ext cx="10058400" cy="530352"/>
           </a:xfrm>
@@ -17397,7 +18157,7 @@
       </p:sp>
       <p:sp>
         <p:nvSpPr>
-          <p:cNvPr id="5" name="Rectangle 4"/>
+          <p:cNvPr id="6" name="Rectangle 5"/>
           <p:cNvSpPr/>
           <p:nvPr/>
         </p:nvSpPr>
@@ -17446,7 +18206,7 @@
       </p:sp>
       <p:sp>
         <p:nvSpPr>
-          <p:cNvPr id="6" name="Rectangle 5"/>
+          <p:cNvPr id="7" name="Rectangle 6"/>
           <p:cNvSpPr/>
           <p:nvPr/>
         </p:nvSpPr>
@@ -17495,7 +18255,7 @@
       </p:sp>
       <p:sp>
         <p:nvSpPr>
-          <p:cNvPr id="7" name="TextBox 6"/>
+          <p:cNvPr id="8" name="TextBox 7"/>
           <p:cNvSpPr txBox="1"/>
           <p:nvPr/>
         </p:nvSpPr>
@@ -17537,7 +18297,7 @@
       </p:sp>
       <p:sp>
         <p:nvSpPr>
-          <p:cNvPr id="8" name="TextBox 7"/>
+          <p:cNvPr id="9" name="TextBox 8"/>
           <p:cNvSpPr txBox="1"/>
           <p:nvPr/>
         </p:nvSpPr>
@@ -17579,7 +18339,7 @@
       </p:sp>
       <p:graphicFrame>
         <p:nvGraphicFramePr>
-          <p:cNvPr id="9" name="Chart 8"/>
+          <p:cNvPr id="10" name="Chart 9"/>
           <p:cNvGraphicFramePr>
             <a:graphicFrameLocks noGrp="1"/>
           </p:cNvGraphicFramePr>
@@ -17597,7 +18357,7 @@
       </p:graphicFrame>
       <p:sp>
         <p:nvSpPr>
-          <p:cNvPr id="10" name="Rectangle 9"/>
+          <p:cNvPr id="11" name="Rectangle 10"/>
           <p:cNvSpPr/>
           <p:nvPr/>
         </p:nvSpPr>
@@ -17646,7 +18406,7 @@
       </p:sp>
       <p:sp>
         <p:nvSpPr>
-          <p:cNvPr id="11" name="TextBox 10"/>
+          <p:cNvPr id="12" name="TextBox 11"/>
           <p:cNvSpPr txBox="1"/>
           <p:nvPr/>
         </p:nvSpPr>
@@ -17688,7 +18448,7 @@
       </p:sp>
       <p:sp>
         <p:nvSpPr>
-          <p:cNvPr id="12" name="TextBox 11"/>
+          <p:cNvPr id="13" name="TextBox 12"/>
           <p:cNvSpPr txBox="1"/>
           <p:nvPr/>
         </p:nvSpPr>
@@ -17723,14 +18483,14 @@
               <a:rPr>
                 <a:latin typeface="Inter"/>
               </a:rPr>
-              <a:t>TEST DATA — fictional portfolio for rendering tests only · Data as of 2026-06-30</a:t>
+              <a:t>Confidential — Investment Committee · Data as of 2026-06-30</a:t>
             </a:r>
           </a:p>
         </p:txBody>
       </p:sp>
       <p:sp>
         <p:nvSpPr>
-          <p:cNvPr id="13" name="TextBox 12"/>
+          <p:cNvPr id="14" name="TextBox 13"/>
           <p:cNvSpPr txBox="1"/>
           <p:nvPr/>
         </p:nvSpPr>
@@ -17846,7 +18606,7 @@
         <p:spPr>
           <a:xfrm>
             <a:off x="640080" y="329184"/>
-            <a:ext cx="9875520" cy="182880"/>
+            <a:ext cx="5303520" cy="182880"/>
           </a:xfrm>
           <a:prstGeom prst="rect">
             <a:avLst/>
@@ -17887,6 +18647,48 @@
         </p:nvSpPr>
         <p:spPr>
           <a:xfrm>
+            <a:off x="5897880" y="310896"/>
+            <a:ext cx="4800600" cy="256032"/>
+          </a:xfrm>
+          <a:prstGeom prst="rect">
+            <a:avLst/>
+          </a:prstGeom>
+          <a:noFill/>
+        </p:spPr>
+        <p:txBody>
+          <a:bodyPr wrap="none" lIns="9144" rIns="9144" tIns="9144" bIns="9144" anchor="t">
+            <a:spAutoFit/>
+          </a:bodyPr>
+          <a:lstStyle/>
+          <a:p>
+            <a:pPr algn="r">
+              <a:spcAft>
+                <a:spcPts val="0"/>
+              </a:spcAft>
+              <a:defRPr sz="680" b="1">
+                <a:solidFill>
+                  <a:srgbClr val="4F6B00"/>
+                </a:solidFill>
+                <a:latin typeface="Inter"/>
+              </a:defRPr>
+            </a:pPr>
+            <a:r>
+              <a:rPr>
+                <a:latin typeface="Inter"/>
+              </a:rPr>
+              <a:t>Illustrative, Gradient Maintained — demo data, not the client's holdings or managers</a:t>
+            </a:r>
+          </a:p>
+        </p:txBody>
+      </p:sp>
+      <p:sp>
+        <p:nvSpPr>
+          <p:cNvPr id="5" name="TextBox 4"/>
+          <p:cNvSpPr txBox="1"/>
+          <p:nvPr/>
+        </p:nvSpPr>
+        <p:spPr>
+          <a:xfrm>
             <a:off x="640080" y="566928"/>
             <a:ext cx="10058400" cy="530352"/>
           </a:xfrm>
@@ -17923,7 +18725,7 @@
       </p:sp>
       <p:sp>
         <p:nvSpPr>
-          <p:cNvPr id="5" name="Rectangle 4"/>
+          <p:cNvPr id="6" name="Rectangle 5"/>
           <p:cNvSpPr/>
           <p:nvPr/>
         </p:nvSpPr>
@@ -17972,7 +18774,7 @@
       </p:sp>
       <p:sp>
         <p:nvSpPr>
-          <p:cNvPr id="6" name="Rectangle 5"/>
+          <p:cNvPr id="7" name="Rectangle 6"/>
           <p:cNvSpPr/>
           <p:nvPr/>
         </p:nvSpPr>
@@ -18021,7 +18823,7 @@
       </p:sp>
       <p:sp>
         <p:nvSpPr>
-          <p:cNvPr id="7" name="TextBox 6"/>
+          <p:cNvPr id="8" name="TextBox 7"/>
           <p:cNvSpPr txBox="1"/>
           <p:nvPr/>
         </p:nvSpPr>
@@ -18063,7 +18865,7 @@
       </p:sp>
       <p:sp>
         <p:nvSpPr>
-          <p:cNvPr id="8" name="TextBox 7"/>
+          <p:cNvPr id="9" name="TextBox 8"/>
           <p:cNvSpPr txBox="1"/>
           <p:nvPr/>
         </p:nvSpPr>
@@ -18105,7 +18907,7 @@
       </p:sp>
       <p:graphicFrame>
         <p:nvGraphicFramePr>
-          <p:cNvPr id="9" name="Table 8"/>
+          <p:cNvPr id="10" name="Table 9"/>
           <p:cNvGraphicFramePr>
             <a:graphicFrameLocks noGrp="1"/>
           </p:cNvGraphicFramePr>
@@ -18311,7 +19113,7 @@
                         <a:rPr>
                           <a:latin typeface="Inter"/>
                         </a:rPr>
-                        <a:t>Example Active Global Manager A (TEST)</a:t>
+                        <a:t>Example Active Global Manager A</a:t>
                       </a:r>
                     </a:p>
                   </a:txBody>
@@ -18475,7 +19277,7 @@
                         <a:rPr>
                           <a:latin typeface="Inter"/>
                         </a:rPr>
-                        <a:t>Example Active Global Manager B (TEST)</a:t>
+                        <a:t>Example Active Global Manager B</a:t>
                       </a:r>
                     </a:p>
                   </a:txBody>
@@ -18639,7 +19441,7 @@
                         <a:rPr>
                           <a:latin typeface="Inter"/>
                         </a:rPr>
-                        <a:t>Example Global Index Fund (TEST)</a:t>
+                        <a:t>Example Global Index Fund</a:t>
                       </a:r>
                     </a:p>
                   </a:txBody>
@@ -18791,7 +19593,7 @@
       </p:graphicFrame>
       <p:sp>
         <p:nvSpPr>
-          <p:cNvPr id="10" name="TextBox 9"/>
+          <p:cNvPr id="11" name="TextBox 10"/>
           <p:cNvSpPr txBox="1"/>
           <p:nvPr/>
         </p:nvSpPr>
@@ -18833,7 +19635,7 @@
       </p:sp>
       <p:graphicFrame>
         <p:nvGraphicFramePr>
-          <p:cNvPr id="11" name="Table 10"/>
+          <p:cNvPr id="12" name="Table 11"/>
           <p:cNvGraphicFramePr>
             <a:graphicFrameLocks noGrp="1"/>
           </p:cNvGraphicFramePr>
@@ -19039,7 +19841,7 @@
                         <a:rPr>
                           <a:latin typeface="Inter"/>
                         </a:rPr>
-                        <a:t>Example Technology Issuer A (TEST)</a:t>
+                        <a:t>Example Technology Issuer A</a:t>
                       </a:r>
                     </a:p>
                   </a:txBody>
@@ -19203,7 +20005,7 @@
                         <a:rPr>
                           <a:latin typeface="Inter"/>
                         </a:rPr>
-                        <a:t>Example Consumer Issuer B (TEST)</a:t>
+                        <a:t>Example Consumer Issuer B</a:t>
                       </a:r>
                     </a:p>
                   </a:txBody>
@@ -19355,7 +20157,7 @@
       </p:graphicFrame>
       <p:sp>
         <p:nvSpPr>
-          <p:cNvPr id="12" name="Rectangle 11"/>
+          <p:cNvPr id="13" name="Rectangle 12"/>
           <p:cNvSpPr/>
           <p:nvPr/>
         </p:nvSpPr>
@@ -19404,7 +20206,7 @@
       </p:sp>
       <p:sp>
         <p:nvSpPr>
-          <p:cNvPr id="13" name="Rectangle 12"/>
+          <p:cNvPr id="14" name="Rectangle 13"/>
           <p:cNvSpPr/>
           <p:nvPr/>
         </p:nvSpPr>
@@ -19453,7 +20255,7 @@
       </p:sp>
       <p:sp>
         <p:nvSpPr>
-          <p:cNvPr id="14" name="TextBox 13"/>
+          <p:cNvPr id="15" name="TextBox 14"/>
           <p:cNvSpPr txBox="1"/>
           <p:nvPr/>
         </p:nvSpPr>
@@ -19495,7 +20297,7 @@
       </p:sp>
       <p:sp>
         <p:nvSpPr>
-          <p:cNvPr id="15" name="TextBox 14"/>
+          <p:cNvPr id="16" name="TextBox 15"/>
           <p:cNvSpPr txBox="1"/>
           <p:nvPr/>
         </p:nvSpPr>
@@ -19537,7 +20339,7 @@
       </p:sp>
       <p:sp>
         <p:nvSpPr>
-          <p:cNvPr id="16" name="Rectangle 15"/>
+          <p:cNvPr id="17" name="Rectangle 16"/>
           <p:cNvSpPr/>
           <p:nvPr/>
         </p:nvSpPr>
@@ -19586,7 +20388,7 @@
       </p:sp>
       <p:sp>
         <p:nvSpPr>
-          <p:cNvPr id="17" name="Rectangle 16"/>
+          <p:cNvPr id="18" name="Rectangle 17"/>
           <p:cNvSpPr/>
           <p:nvPr/>
         </p:nvSpPr>
@@ -19635,7 +20437,7 @@
       </p:sp>
       <p:sp>
         <p:nvSpPr>
-          <p:cNvPr id="18" name="TextBox 17"/>
+          <p:cNvPr id="19" name="TextBox 18"/>
           <p:cNvSpPr txBox="1"/>
           <p:nvPr/>
         </p:nvSpPr>
@@ -19677,7 +20479,7 @@
       </p:sp>
       <p:sp>
         <p:nvSpPr>
-          <p:cNvPr id="19" name="TextBox 18"/>
+          <p:cNvPr id="20" name="TextBox 19"/>
           <p:cNvSpPr txBox="1"/>
           <p:nvPr/>
         </p:nvSpPr>
@@ -19719,7 +20521,7 @@
       </p:sp>
       <p:sp>
         <p:nvSpPr>
-          <p:cNvPr id="20" name="Rectangle 19"/>
+          <p:cNvPr id="21" name="Rectangle 20"/>
           <p:cNvSpPr/>
           <p:nvPr/>
         </p:nvSpPr>
@@ -19768,7 +20570,7 @@
       </p:sp>
       <p:sp>
         <p:nvSpPr>
-          <p:cNvPr id="21" name="TextBox 20"/>
+          <p:cNvPr id="22" name="TextBox 21"/>
           <p:cNvSpPr txBox="1"/>
           <p:nvPr/>
         </p:nvSpPr>
@@ -19810,7 +20612,7 @@
       </p:sp>
       <p:sp>
         <p:nvSpPr>
-          <p:cNvPr id="22" name="TextBox 21"/>
+          <p:cNvPr id="23" name="TextBox 22"/>
           <p:cNvSpPr txBox="1"/>
           <p:nvPr/>
         </p:nvSpPr>
@@ -19845,14 +20647,14 @@
               <a:rPr>
                 <a:latin typeface="Inter"/>
               </a:rPr>
-              <a:t>TEST DATA — fictional portfolio for rendering tests only · Data as of 2026-06-30</a:t>
+              <a:t>Confidential — Investment Committee · Data as of 2026-06-30</a:t>
             </a:r>
           </a:p>
         </p:txBody>
       </p:sp>
       <p:sp>
         <p:nvSpPr>
-          <p:cNvPr id="23" name="TextBox 22"/>
+          <p:cNvPr id="24" name="TextBox 23"/>
           <p:cNvSpPr txBox="1"/>
           <p:nvPr/>
         </p:nvSpPr>
@@ -19967,6 +20769,48 @@
         </p:nvSpPr>
         <p:spPr>
           <a:xfrm>
+            <a:off x="5897880" y="310896"/>
+            <a:ext cx="4800600" cy="256032"/>
+          </a:xfrm>
+          <a:prstGeom prst="rect">
+            <a:avLst/>
+          </a:prstGeom>
+          <a:noFill/>
+        </p:spPr>
+        <p:txBody>
+          <a:bodyPr wrap="none" lIns="9144" rIns="9144" tIns="9144" bIns="9144" anchor="t">
+            <a:spAutoFit/>
+          </a:bodyPr>
+          <a:lstStyle/>
+          <a:p>
+            <a:pPr algn="r">
+              <a:spcAft>
+                <a:spcPts val="0"/>
+              </a:spcAft>
+              <a:defRPr sz="680" b="1">
+                <a:solidFill>
+                  <a:srgbClr val="4F6B00"/>
+                </a:solidFill>
+                <a:latin typeface="Inter"/>
+              </a:defRPr>
+            </a:pPr>
+            <a:r>
+              <a:rPr>
+                <a:latin typeface="Inter"/>
+              </a:rPr>
+              <a:t>Illustrative, Gradient Maintained — demo data, not the client's holdings or managers</a:t>
+            </a:r>
+          </a:p>
+        </p:txBody>
+      </p:sp>
+      <p:sp>
+        <p:nvSpPr>
+          <p:cNvPr id="4" name="TextBox 3"/>
+          <p:cNvSpPr txBox="1"/>
+          <p:nvPr/>
+        </p:nvSpPr>
+        <p:spPr>
+          <a:xfrm>
             <a:off x="640080" y="566928"/>
             <a:ext cx="10058400" cy="530352"/>
           </a:xfrm>
@@ -20003,7 +20847,7 @@
       </p:sp>
       <p:sp>
         <p:nvSpPr>
-          <p:cNvPr id="4" name="Rectangle 3"/>
+          <p:cNvPr id="5" name="Rectangle 4"/>
           <p:cNvSpPr/>
           <p:nvPr/>
         </p:nvSpPr>
@@ -20052,7 +20896,7 @@
       </p:sp>
       <p:sp>
         <p:nvSpPr>
-          <p:cNvPr id="5" name="Rectangle 4"/>
+          <p:cNvPr id="6" name="Rectangle 5"/>
           <p:cNvSpPr/>
           <p:nvPr/>
         </p:nvSpPr>
@@ -20101,7 +20945,7 @@
       </p:sp>
       <p:sp>
         <p:nvSpPr>
-          <p:cNvPr id="6" name="TextBox 5"/>
+          <p:cNvPr id="7" name="TextBox 6"/>
           <p:cNvSpPr txBox="1"/>
           <p:nvPr/>
         </p:nvSpPr>
@@ -20143,7 +20987,7 @@
       </p:sp>
       <p:sp>
         <p:nvSpPr>
-          <p:cNvPr id="7" name="TextBox 6"/>
+          <p:cNvPr id="8" name="TextBox 7"/>
           <p:cNvSpPr txBox="1"/>
           <p:nvPr/>
         </p:nvSpPr>
@@ -20185,7 +21029,7 @@
       </p:sp>
       <p:graphicFrame>
         <p:nvGraphicFramePr>
-          <p:cNvPr id="8" name="Chart 7"/>
+          <p:cNvPr id="9" name="Chart 8"/>
           <p:cNvGraphicFramePr>
             <a:graphicFrameLocks noGrp="1"/>
           </p:cNvGraphicFramePr>
@@ -20203,7 +21047,7 @@
       </p:graphicFrame>
       <p:sp>
         <p:nvSpPr>
-          <p:cNvPr id="9" name="Rectangle 8"/>
+          <p:cNvPr id="10" name="Rectangle 9"/>
           <p:cNvSpPr/>
           <p:nvPr/>
         </p:nvSpPr>
@@ -20252,7 +21096,7 @@
       </p:sp>
       <p:sp>
         <p:nvSpPr>
-          <p:cNvPr id="10" name="TextBox 9"/>
+          <p:cNvPr id="11" name="TextBox 10"/>
           <p:cNvSpPr txBox="1"/>
           <p:nvPr/>
         </p:nvSpPr>
@@ -20294,7 +21138,7 @@
       </p:sp>
       <p:sp>
         <p:nvSpPr>
-          <p:cNvPr id="11" name="TextBox 10"/>
+          <p:cNvPr id="12" name="TextBox 11"/>
           <p:cNvSpPr txBox="1"/>
           <p:nvPr/>
         </p:nvSpPr>
@@ -20329,14 +21173,14 @@
               <a:rPr>
                 <a:latin typeface="Inter"/>
               </a:rPr>
-              <a:t>TEST DATA — fictional portfolio for rendering tests only · Data as of 2026-06-30</a:t>
+              <a:t>Confidential — Investment Committee · Data as of 2026-06-30</a:t>
             </a:r>
           </a:p>
         </p:txBody>
       </p:sp>
       <p:sp>
         <p:nvSpPr>
-          <p:cNvPr id="12" name="TextBox 11"/>
+          <p:cNvPr id="13" name="TextBox 12"/>
           <p:cNvSpPr txBox="1"/>
           <p:nvPr/>
         </p:nvSpPr>
@@ -20451,6 +21295,48 @@
         </p:nvSpPr>
         <p:spPr>
           <a:xfrm>
+            <a:off x="5897880" y="310896"/>
+            <a:ext cx="4800600" cy="256032"/>
+          </a:xfrm>
+          <a:prstGeom prst="rect">
+            <a:avLst/>
+          </a:prstGeom>
+          <a:noFill/>
+        </p:spPr>
+        <p:txBody>
+          <a:bodyPr wrap="none" lIns="9144" rIns="9144" tIns="9144" bIns="9144" anchor="t">
+            <a:spAutoFit/>
+          </a:bodyPr>
+          <a:lstStyle/>
+          <a:p>
+            <a:pPr algn="r">
+              <a:spcAft>
+                <a:spcPts val="0"/>
+              </a:spcAft>
+              <a:defRPr sz="680" b="1">
+                <a:solidFill>
+                  <a:srgbClr val="4F6B00"/>
+                </a:solidFill>
+                <a:latin typeface="Inter"/>
+              </a:defRPr>
+            </a:pPr>
+            <a:r>
+              <a:rPr>
+                <a:latin typeface="Inter"/>
+              </a:rPr>
+              <a:t>Illustrative, Gradient Maintained — demo data, not the client's holdings or managers</a:t>
+            </a:r>
+          </a:p>
+        </p:txBody>
+      </p:sp>
+      <p:sp>
+        <p:nvSpPr>
+          <p:cNvPr id="4" name="TextBox 3"/>
+          <p:cNvSpPr txBox="1"/>
+          <p:nvPr/>
+        </p:nvSpPr>
+        <p:spPr>
+          <a:xfrm>
             <a:off x="640080" y="566928"/>
             <a:ext cx="10058400" cy="530352"/>
           </a:xfrm>
@@ -20487,7 +21373,7 @@
       </p:sp>
       <p:sp>
         <p:nvSpPr>
-          <p:cNvPr id="4" name="Rectangle 3"/>
+          <p:cNvPr id="5" name="Rectangle 4"/>
           <p:cNvSpPr/>
           <p:nvPr/>
         </p:nvSpPr>
@@ -20536,7 +21422,7 @@
       </p:sp>
       <p:sp>
         <p:nvSpPr>
-          <p:cNvPr id="5" name="Rectangle 4"/>
+          <p:cNvPr id="6" name="Rectangle 5"/>
           <p:cNvSpPr/>
           <p:nvPr/>
         </p:nvSpPr>
@@ -20585,7 +21471,7 @@
       </p:sp>
       <p:sp>
         <p:nvSpPr>
-          <p:cNvPr id="6" name="TextBox 5"/>
+          <p:cNvPr id="7" name="TextBox 6"/>
           <p:cNvSpPr txBox="1"/>
           <p:nvPr/>
         </p:nvSpPr>
@@ -20627,7 +21513,7 @@
       </p:sp>
       <p:sp>
         <p:nvSpPr>
-          <p:cNvPr id="7" name="TextBox 6"/>
+          <p:cNvPr id="8" name="TextBox 7"/>
           <p:cNvSpPr txBox="1"/>
           <p:nvPr/>
         </p:nvSpPr>
@@ -20669,7 +21555,7 @@
       </p:sp>
       <p:graphicFrame>
         <p:nvGraphicFramePr>
-          <p:cNvPr id="8" name="Table 7"/>
+          <p:cNvPr id="9" name="Table 8"/>
           <p:cNvGraphicFramePr>
             <a:graphicFrameLocks noGrp="1"/>
           </p:cNvGraphicFramePr>
@@ -21246,7 +22132,7 @@
       </p:graphicFrame>
       <p:sp>
         <p:nvSpPr>
-          <p:cNvPr id="9" name="Rectangle 8"/>
+          <p:cNvPr id="10" name="Rectangle 9"/>
           <p:cNvSpPr/>
           <p:nvPr/>
         </p:nvSpPr>
@@ -21295,7 +22181,7 @@
       </p:sp>
       <p:sp>
         <p:nvSpPr>
-          <p:cNvPr id="10" name="Rectangle 9"/>
+          <p:cNvPr id="11" name="Rectangle 10"/>
           <p:cNvSpPr/>
           <p:nvPr/>
         </p:nvSpPr>
@@ -21344,7 +22230,7 @@
       </p:sp>
       <p:sp>
         <p:nvSpPr>
-          <p:cNvPr id="11" name="TextBox 10"/>
+          <p:cNvPr id="12" name="TextBox 11"/>
           <p:cNvSpPr txBox="1"/>
           <p:nvPr/>
         </p:nvSpPr>
@@ -21386,7 +22272,7 @@
       </p:sp>
       <p:sp>
         <p:nvSpPr>
-          <p:cNvPr id="12" name="TextBox 11"/>
+          <p:cNvPr id="13" name="TextBox 12"/>
           <p:cNvSpPr txBox="1"/>
           <p:nvPr/>
         </p:nvSpPr>
@@ -21428,7 +22314,7 @@
       </p:sp>
       <p:sp>
         <p:nvSpPr>
-          <p:cNvPr id="13" name="Rectangle 12"/>
+          <p:cNvPr id="14" name="Rectangle 13"/>
           <p:cNvSpPr/>
           <p:nvPr/>
         </p:nvSpPr>
@@ -21477,7 +22363,7 @@
       </p:sp>
       <p:sp>
         <p:nvSpPr>
-          <p:cNvPr id="14" name="TextBox 13"/>
+          <p:cNvPr id="15" name="TextBox 14"/>
           <p:cNvSpPr txBox="1"/>
           <p:nvPr/>
         </p:nvSpPr>
@@ -21519,7 +22405,7 @@
       </p:sp>
       <p:sp>
         <p:nvSpPr>
-          <p:cNvPr id="15" name="TextBox 14"/>
+          <p:cNvPr id="16" name="TextBox 15"/>
           <p:cNvSpPr txBox="1"/>
           <p:nvPr/>
         </p:nvSpPr>
@@ -21554,14 +22440,14 @@
               <a:rPr>
                 <a:latin typeface="Inter"/>
               </a:rPr>
-              <a:t>TEST DATA — fictional portfolio for rendering tests only · Data as of 2026-06-30</a:t>
+              <a:t>Confidential — Investment Committee · Data as of 2026-06-30</a:t>
             </a:r>
           </a:p>
         </p:txBody>
       </p:sp>
       <p:sp>
         <p:nvSpPr>
-          <p:cNvPr id="16" name="TextBox 15"/>
+          <p:cNvPr id="17" name="TextBox 16"/>
           <p:cNvSpPr txBox="1"/>
           <p:nvPr/>
         </p:nvSpPr>
@@ -21676,6 +22562,48 @@
         </p:nvSpPr>
         <p:spPr>
           <a:xfrm>
+            <a:off x="5897880" y="310896"/>
+            <a:ext cx="4800600" cy="256032"/>
+          </a:xfrm>
+          <a:prstGeom prst="rect">
+            <a:avLst/>
+          </a:prstGeom>
+          <a:noFill/>
+        </p:spPr>
+        <p:txBody>
+          <a:bodyPr wrap="none" lIns="9144" rIns="9144" tIns="9144" bIns="9144" anchor="t">
+            <a:spAutoFit/>
+          </a:bodyPr>
+          <a:lstStyle/>
+          <a:p>
+            <a:pPr algn="r">
+              <a:spcAft>
+                <a:spcPts val="0"/>
+              </a:spcAft>
+              <a:defRPr sz="680" b="1">
+                <a:solidFill>
+                  <a:srgbClr val="4F6B00"/>
+                </a:solidFill>
+                <a:latin typeface="Inter"/>
+              </a:defRPr>
+            </a:pPr>
+            <a:r>
+              <a:rPr>
+                <a:latin typeface="Inter"/>
+              </a:rPr>
+              <a:t>Illustrative, Gradient Maintained — demo data, not the client's holdings or managers</a:t>
+            </a:r>
+          </a:p>
+        </p:txBody>
+      </p:sp>
+      <p:sp>
+        <p:nvSpPr>
+          <p:cNvPr id="4" name="TextBox 3"/>
+          <p:cNvSpPr txBox="1"/>
+          <p:nvPr/>
+        </p:nvSpPr>
+        <p:spPr>
+          <a:xfrm>
             <a:off x="640080" y="566928"/>
             <a:ext cx="10058400" cy="530352"/>
           </a:xfrm>
@@ -21712,7 +22640,7 @@
       </p:sp>
       <p:sp>
         <p:nvSpPr>
-          <p:cNvPr id="4" name="Rectangle 3"/>
+          <p:cNvPr id="5" name="Rectangle 4"/>
           <p:cNvSpPr/>
           <p:nvPr/>
         </p:nvSpPr>
@@ -21761,7 +22689,7 @@
       </p:sp>
       <p:sp>
         <p:nvSpPr>
-          <p:cNvPr id="5" name="Rectangle 4"/>
+          <p:cNvPr id="6" name="Rectangle 5"/>
           <p:cNvSpPr/>
           <p:nvPr/>
         </p:nvSpPr>
@@ -21810,7 +22738,7 @@
       </p:sp>
       <p:sp>
         <p:nvSpPr>
-          <p:cNvPr id="6" name="TextBox 5"/>
+          <p:cNvPr id="7" name="TextBox 6"/>
           <p:cNvSpPr txBox="1"/>
           <p:nvPr/>
         </p:nvSpPr>
@@ -21852,7 +22780,7 @@
       </p:sp>
       <p:sp>
         <p:nvSpPr>
-          <p:cNvPr id="7" name="TextBox 6"/>
+          <p:cNvPr id="8" name="TextBox 7"/>
           <p:cNvSpPr txBox="1"/>
           <p:nvPr/>
         </p:nvSpPr>
@@ -21894,7 +22822,7 @@
       </p:sp>
       <p:graphicFrame>
         <p:nvGraphicFramePr>
-          <p:cNvPr id="8" name="Table 7"/>
+          <p:cNvPr id="9" name="Table 8"/>
           <p:cNvGraphicFramePr>
             <a:graphicFrameLocks noGrp="1"/>
           </p:cNvGraphicFramePr>
@@ -22416,7 +23344,7 @@
       </p:graphicFrame>
       <p:sp>
         <p:nvSpPr>
-          <p:cNvPr id="9" name="TextBox 8"/>
+          <p:cNvPr id="10" name="TextBox 9"/>
           <p:cNvSpPr txBox="1"/>
           <p:nvPr/>
         </p:nvSpPr>
@@ -22458,7 +23386,7 @@
       </p:sp>
       <p:graphicFrame>
         <p:nvGraphicFramePr>
-          <p:cNvPr id="10" name="Table 9"/>
+          <p:cNvPr id="11" name="Table 10"/>
           <p:cNvGraphicFramePr>
             <a:graphicFrameLocks noGrp="1"/>
           </p:cNvGraphicFramePr>
@@ -22816,7 +23744,7 @@
       </p:graphicFrame>
       <p:sp>
         <p:nvSpPr>
-          <p:cNvPr id="11" name="TextBox 10"/>
+          <p:cNvPr id="12" name="TextBox 11"/>
           <p:cNvSpPr txBox="1"/>
           <p:nvPr/>
         </p:nvSpPr>
@@ -22896,7 +23824,7 @@
       </p:sp>
       <p:sp>
         <p:nvSpPr>
-          <p:cNvPr id="12" name="Rectangle 11"/>
+          <p:cNvPr id="13" name="Rectangle 12"/>
           <p:cNvSpPr/>
           <p:nvPr/>
         </p:nvSpPr>
@@ -22945,7 +23873,7 @@
       </p:sp>
       <p:sp>
         <p:nvSpPr>
-          <p:cNvPr id="13" name="TextBox 12"/>
+          <p:cNvPr id="14" name="TextBox 13"/>
           <p:cNvSpPr txBox="1"/>
           <p:nvPr/>
         </p:nvSpPr>
@@ -22987,7 +23915,7 @@
       </p:sp>
       <p:sp>
         <p:nvSpPr>
-          <p:cNvPr id="14" name="TextBox 13"/>
+          <p:cNvPr id="15" name="TextBox 14"/>
           <p:cNvSpPr txBox="1"/>
           <p:nvPr/>
         </p:nvSpPr>
@@ -23022,14 +23950,14 @@
               <a:rPr>
                 <a:latin typeface="Inter"/>
               </a:rPr>
-              <a:t>TEST DATA — fictional portfolio for rendering tests only · Data as of 2026-06-30</a:t>
+              <a:t>Confidential — Investment Committee · Data as of 2026-06-30</a:t>
             </a:r>
           </a:p>
         </p:txBody>
       </p:sp>
       <p:sp>
         <p:nvSpPr>
-          <p:cNvPr id="15" name="TextBox 14"/>
+          <p:cNvPr id="16" name="TextBox 15"/>
           <p:cNvSpPr txBox="1"/>
           <p:nvPr/>
         </p:nvSpPr>
@@ -23144,6 +24072,48 @@
         </p:nvSpPr>
         <p:spPr>
           <a:xfrm>
+            <a:off x="5897880" y="310896"/>
+            <a:ext cx="4800600" cy="256032"/>
+          </a:xfrm>
+          <a:prstGeom prst="rect">
+            <a:avLst/>
+          </a:prstGeom>
+          <a:noFill/>
+        </p:spPr>
+        <p:txBody>
+          <a:bodyPr wrap="none" lIns="9144" rIns="9144" tIns="9144" bIns="9144" anchor="t">
+            <a:spAutoFit/>
+          </a:bodyPr>
+          <a:lstStyle/>
+          <a:p>
+            <a:pPr algn="r">
+              <a:spcAft>
+                <a:spcPts val="0"/>
+              </a:spcAft>
+              <a:defRPr sz="680" b="1">
+                <a:solidFill>
+                  <a:srgbClr val="4F6B00"/>
+                </a:solidFill>
+                <a:latin typeface="Inter"/>
+              </a:defRPr>
+            </a:pPr>
+            <a:r>
+              <a:rPr>
+                <a:latin typeface="Inter"/>
+              </a:rPr>
+              <a:t>Illustrative, Gradient Maintained — demo data, not the client's holdings or managers</a:t>
+            </a:r>
+          </a:p>
+        </p:txBody>
+      </p:sp>
+      <p:sp>
+        <p:nvSpPr>
+          <p:cNvPr id="4" name="TextBox 3"/>
+          <p:cNvSpPr txBox="1"/>
+          <p:nvPr/>
+        </p:nvSpPr>
+        <p:spPr>
+          <a:xfrm>
             <a:off x="640080" y="566928"/>
             <a:ext cx="10058400" cy="530352"/>
           </a:xfrm>
@@ -23180,7 +24150,7 @@
       </p:sp>
       <p:sp>
         <p:nvSpPr>
-          <p:cNvPr id="4" name="Rectangle 3"/>
+          <p:cNvPr id="5" name="Rectangle 4"/>
           <p:cNvSpPr/>
           <p:nvPr/>
         </p:nvSpPr>
@@ -23229,7 +24199,7 @@
       </p:sp>
       <p:sp>
         <p:nvSpPr>
-          <p:cNvPr id="5" name="Rectangle 4"/>
+          <p:cNvPr id="6" name="Rectangle 5"/>
           <p:cNvSpPr/>
           <p:nvPr/>
         </p:nvSpPr>
@@ -23278,7 +24248,7 @@
       </p:sp>
       <p:sp>
         <p:nvSpPr>
-          <p:cNvPr id="6" name="TextBox 5"/>
+          <p:cNvPr id="7" name="TextBox 6"/>
           <p:cNvSpPr txBox="1"/>
           <p:nvPr/>
         </p:nvSpPr>
@@ -23320,7 +24290,7 @@
       </p:sp>
       <p:sp>
         <p:nvSpPr>
-          <p:cNvPr id="7" name="TextBox 6"/>
+          <p:cNvPr id="8" name="TextBox 7"/>
           <p:cNvSpPr txBox="1"/>
           <p:nvPr/>
         </p:nvSpPr>
@@ -23362,7 +24332,7 @@
       </p:sp>
       <p:graphicFrame>
         <p:nvGraphicFramePr>
-          <p:cNvPr id="8" name="Table 7"/>
+          <p:cNvPr id="9" name="Table 8"/>
           <p:cNvGraphicFramePr>
             <a:graphicFrameLocks noGrp="1"/>
           </p:cNvGraphicFramePr>
@@ -23939,7 +24909,7 @@
       </p:graphicFrame>
       <p:sp>
         <p:nvSpPr>
-          <p:cNvPr id="9" name="TextBox 8"/>
+          <p:cNvPr id="10" name="TextBox 9"/>
           <p:cNvSpPr txBox="1"/>
           <p:nvPr/>
         </p:nvSpPr>
@@ -23981,7 +24951,7 @@
       </p:sp>
       <p:graphicFrame>
         <p:nvGraphicFramePr>
-          <p:cNvPr id="10" name="Table 9"/>
+          <p:cNvPr id="11" name="Table 10"/>
           <p:cNvGraphicFramePr>
             <a:graphicFrameLocks noGrp="1"/>
           </p:cNvGraphicFramePr>
@@ -24558,7 +25528,7 @@
       </p:graphicFrame>
       <p:sp>
         <p:nvSpPr>
-          <p:cNvPr id="11" name="Rectangle 10"/>
+          <p:cNvPr id="12" name="Rectangle 11"/>
           <p:cNvSpPr/>
           <p:nvPr/>
         </p:nvSpPr>
@@ -24607,7 +25577,7 @@
       </p:sp>
       <p:sp>
         <p:nvSpPr>
-          <p:cNvPr id="12" name="TextBox 11"/>
+          <p:cNvPr id="13" name="TextBox 12"/>
           <p:cNvSpPr txBox="1"/>
           <p:nvPr/>
         </p:nvSpPr>
@@ -24649,7 +25619,7 @@
       </p:sp>
       <p:sp>
         <p:nvSpPr>
-          <p:cNvPr id="13" name="TextBox 12"/>
+          <p:cNvPr id="14" name="TextBox 13"/>
           <p:cNvSpPr txBox="1"/>
           <p:nvPr/>
         </p:nvSpPr>
@@ -24684,14 +25654,14 @@
               <a:rPr>
                 <a:latin typeface="Inter"/>
               </a:rPr>
-              <a:t>TEST DATA — fictional portfolio for rendering tests only · Data as of 2026-06-30</a:t>
+              <a:t>Confidential — Investment Committee · Data as of 2026-06-30</a:t>
             </a:r>
           </a:p>
         </p:txBody>
       </p:sp>
       <p:sp>
         <p:nvSpPr>
-          <p:cNvPr id="14" name="TextBox 13"/>
+          <p:cNvPr id="15" name="TextBox 14"/>
           <p:cNvSpPr txBox="1"/>
           <p:nvPr/>
         </p:nvSpPr>
@@ -24806,6 +25776,48 @@
         </p:nvSpPr>
         <p:spPr>
           <a:xfrm>
+            <a:off x="5897880" y="310896"/>
+            <a:ext cx="4800600" cy="256032"/>
+          </a:xfrm>
+          <a:prstGeom prst="rect">
+            <a:avLst/>
+          </a:prstGeom>
+          <a:noFill/>
+        </p:spPr>
+        <p:txBody>
+          <a:bodyPr wrap="none" lIns="9144" rIns="9144" tIns="9144" bIns="9144" anchor="t">
+            <a:spAutoFit/>
+          </a:bodyPr>
+          <a:lstStyle/>
+          <a:p>
+            <a:pPr algn="r">
+              <a:spcAft>
+                <a:spcPts val="0"/>
+              </a:spcAft>
+              <a:defRPr sz="680" b="1">
+                <a:solidFill>
+                  <a:srgbClr val="4F6B00"/>
+                </a:solidFill>
+                <a:latin typeface="Inter"/>
+              </a:defRPr>
+            </a:pPr>
+            <a:r>
+              <a:rPr>
+                <a:latin typeface="Inter"/>
+              </a:rPr>
+              <a:t>Illustrative, Gradient Maintained — demo data, not the client's holdings or managers</a:t>
+            </a:r>
+          </a:p>
+        </p:txBody>
+      </p:sp>
+      <p:sp>
+        <p:nvSpPr>
+          <p:cNvPr id="4" name="TextBox 3"/>
+          <p:cNvSpPr txBox="1"/>
+          <p:nvPr/>
+        </p:nvSpPr>
+        <p:spPr>
+          <a:xfrm>
             <a:off x="640080" y="566928"/>
             <a:ext cx="10058400" cy="530352"/>
           </a:xfrm>
@@ -24842,7 +25854,7 @@
       </p:sp>
       <p:sp>
         <p:nvSpPr>
-          <p:cNvPr id="4" name="Rectangle 3"/>
+          <p:cNvPr id="5" name="Rectangle 4"/>
           <p:cNvSpPr/>
           <p:nvPr/>
         </p:nvSpPr>
@@ -24891,7 +25903,7 @@
       </p:sp>
       <p:sp>
         <p:nvSpPr>
-          <p:cNvPr id="5" name="Rectangle 4"/>
+          <p:cNvPr id="6" name="Rectangle 5"/>
           <p:cNvSpPr/>
           <p:nvPr/>
         </p:nvSpPr>
@@ -24940,7 +25952,7 @@
       </p:sp>
       <p:sp>
         <p:nvSpPr>
-          <p:cNvPr id="6" name="TextBox 5"/>
+          <p:cNvPr id="7" name="TextBox 6"/>
           <p:cNvSpPr txBox="1"/>
           <p:nvPr/>
         </p:nvSpPr>
@@ -24982,7 +25994,7 @@
       </p:sp>
       <p:graphicFrame>
         <p:nvGraphicFramePr>
-          <p:cNvPr id="7" name="Table 6"/>
+          <p:cNvPr id="8" name="Table 7"/>
           <p:cNvGraphicFramePr>
             <a:graphicFrameLocks noGrp="1"/>
           </p:cNvGraphicFramePr>
@@ -25158,7 +26170,7 @@
                         <a:rPr>
                           <a:latin typeface="Inter"/>
                         </a:rPr>
-                        <a:t>Fictional TEST data [S2]</a:t>
+                        <a:t>Illustrative sample data [S2]</a:t>
                       </a:r>
                     </a:p>
                   </a:txBody>
@@ -25656,7 +26668,7 @@
                         <a:rPr>
                           <a:latin typeface="Inter"/>
                         </a:rPr>
-                        <a:t>Fictional mandate [S8]</a:t>
+                        <a:t>illustrative mandate [S8]</a:t>
                       </a:r>
                     </a:p>
                   </a:txBody>
@@ -26088,7 +27100,7 @@
       </p:graphicFrame>
       <p:sp>
         <p:nvSpPr>
-          <p:cNvPr id="8" name="Rectangle 7"/>
+          <p:cNvPr id="9" name="Rectangle 8"/>
           <p:cNvSpPr/>
           <p:nvPr/>
         </p:nvSpPr>
@@ -26137,7 +27149,7 @@
       </p:sp>
       <p:sp>
         <p:nvSpPr>
-          <p:cNvPr id="9" name="TextBox 8"/>
+          <p:cNvPr id="10" name="TextBox 9"/>
           <p:cNvSpPr txBox="1"/>
           <p:nvPr/>
         </p:nvSpPr>
@@ -26179,7 +27191,7 @@
       </p:sp>
       <p:sp>
         <p:nvSpPr>
-          <p:cNvPr id="10" name="TextBox 9"/>
+          <p:cNvPr id="11" name="TextBox 10"/>
           <p:cNvSpPr txBox="1"/>
           <p:nvPr/>
         </p:nvSpPr>
@@ -26214,14 +27226,14 @@
               <a:rPr>
                 <a:latin typeface="Inter"/>
               </a:rPr>
-              <a:t>TEST DATA — fictional portfolio for rendering tests only · Data as of 2026-06-30</a:t>
+              <a:t>Confidential — Investment Committee · Data as of 2026-06-30</a:t>
             </a:r>
           </a:p>
         </p:txBody>
       </p:sp>
       <p:sp>
         <p:nvSpPr>
-          <p:cNvPr id="11" name="TextBox 10"/>
+          <p:cNvPr id="12" name="TextBox 11"/>
           <p:cNvSpPr txBox="1"/>
           <p:nvPr/>
         </p:nvSpPr>
@@ -26336,6 +27348,48 @@
         </p:nvSpPr>
         <p:spPr>
           <a:xfrm>
+            <a:off x="5897880" y="310896"/>
+            <a:ext cx="4800600" cy="256032"/>
+          </a:xfrm>
+          <a:prstGeom prst="rect">
+            <a:avLst/>
+          </a:prstGeom>
+          <a:noFill/>
+        </p:spPr>
+        <p:txBody>
+          <a:bodyPr wrap="none" lIns="9144" rIns="9144" tIns="9144" bIns="9144" anchor="t">
+            <a:spAutoFit/>
+          </a:bodyPr>
+          <a:lstStyle/>
+          <a:p>
+            <a:pPr algn="r">
+              <a:spcAft>
+                <a:spcPts val="0"/>
+              </a:spcAft>
+              <a:defRPr sz="680" b="1">
+                <a:solidFill>
+                  <a:srgbClr val="4F6B00"/>
+                </a:solidFill>
+                <a:latin typeface="Inter"/>
+              </a:defRPr>
+            </a:pPr>
+            <a:r>
+              <a:rPr>
+                <a:latin typeface="Inter"/>
+              </a:rPr>
+              <a:t>Illustrative, Gradient Maintained — demo data, not the client's holdings or managers</a:t>
+            </a:r>
+          </a:p>
+        </p:txBody>
+      </p:sp>
+      <p:sp>
+        <p:nvSpPr>
+          <p:cNvPr id="4" name="TextBox 3"/>
+          <p:cNvSpPr txBox="1"/>
+          <p:nvPr/>
+        </p:nvSpPr>
+        <p:spPr>
+          <a:xfrm>
             <a:off x="640080" y="566928"/>
             <a:ext cx="10058400" cy="530352"/>
           </a:xfrm>
@@ -26365,14 +27419,14 @@
               <a:rPr>
                 <a:latin typeface="Inter"/>
               </a:rPr>
-              <a:t>Appendix A — Sources</a:t>
+              <a:t>Appendix — Sources and methods</a:t>
             </a:r>
           </a:p>
         </p:txBody>
       </p:sp>
       <p:sp>
         <p:nvSpPr>
-          <p:cNvPr id="4" name="Rectangle 3"/>
+          <p:cNvPr id="5" name="Rectangle 4"/>
           <p:cNvSpPr/>
           <p:nvPr/>
         </p:nvSpPr>
@@ -26421,7 +27475,7 @@
       </p:sp>
       <p:sp>
         <p:nvSpPr>
-          <p:cNvPr id="5" name="Rectangle 4"/>
+          <p:cNvPr id="6" name="Rectangle 5"/>
           <p:cNvSpPr/>
           <p:nvPr/>
         </p:nvSpPr>
@@ -26470,7 +27524,7 @@
       </p:sp>
       <p:sp>
         <p:nvSpPr>
-          <p:cNvPr id="6" name="TextBox 5"/>
+          <p:cNvPr id="7" name="TextBox 6"/>
           <p:cNvSpPr txBox="1"/>
           <p:nvPr/>
         </p:nvSpPr>
@@ -26512,7 +27566,7 @@
       </p:sp>
       <p:graphicFrame>
         <p:nvGraphicFramePr>
-          <p:cNvPr id="7" name="Table 6"/>
+          <p:cNvPr id="8" name="Table 7"/>
           <p:cNvGraphicFramePr>
             <a:graphicFrameLocks noGrp="1"/>
           </p:cNvGraphicFramePr>
@@ -26520,7 +27574,7 @@
         </p:nvGraphicFramePr>
         <p:xfrm>
           <a:off x="640080" y="1325880"/>
-          <a:ext cx="10908792" cy="4892040"/>
+          <a:ext cx="10908792" cy="4690872"/>
         </p:xfrm>
         <a:graphic>
           <a:graphicData uri="http://schemas.openxmlformats.org/drawingml/2006/table">
@@ -26530,15 +27584,16 @@
               </a:tblPr>
               <a:tblGrid>
                 <a:gridCol w="2011680"/>
-                <a:gridCol w="1271016"/>
-                <a:gridCol w="1271016"/>
-                <a:gridCol w="1271016"/>
-                <a:gridCol w="1271016"/>
-                <a:gridCol w="1271016"/>
-                <a:gridCol w="1271016"/>
-                <a:gridCol w="1271016"/>
+                <a:gridCol w="1112139"/>
+                <a:gridCol w="1112139"/>
+                <a:gridCol w="1112139"/>
+                <a:gridCol w="1112139"/>
+                <a:gridCol w="1112139"/>
+                <a:gridCol w="1112139"/>
+                <a:gridCol w="1112139"/>
+                <a:gridCol w="1112139"/>
               </a:tblGrid>
-              <a:tr h="489204">
+              <a:tr h="469087">
                 <a:tc>
                   <a:txBody>
                     <a:bodyPr/>
@@ -26610,6 +27665,33 @@
                         <a:rPr>
                           <a:latin typeface="Inter"/>
                         </a:rPr>
+                        <a:t>Basis</a:t>
+                      </a:r>
+                    </a:p>
+                  </a:txBody>
+                  <a:tcPr marL="54864" marR="54864" marT="27432" marB="27432" anchor="ctr">
+                    <a:solidFill>
+                      <a:srgbClr val="0D1117"/>
+                    </a:solidFill>
+                  </a:tcPr>
+                </a:tc>
+                <a:tc>
+                  <a:txBody>
+                    <a:bodyPr/>
+                    <a:lstStyle/>
+                    <a:p>
+                      <a:pPr>
+                        <a:defRPr sz="750" b="1">
+                          <a:solidFill>
+                            <a:srgbClr val="FFFFFF"/>
+                          </a:solidFill>
+                          <a:latin typeface="Inter"/>
+                        </a:defRPr>
+                      </a:pPr>
+                      <a:r>
+                        <a:rPr>
+                          <a:latin typeface="Inter"/>
+                        </a:rPr>
                         <a:t>Tool / view</a:t>
                       </a:r>
                     </a:p>
@@ -26756,7 +27838,7 @@
                   </a:tcPr>
                 </a:tc>
               </a:tr>
-              <a:tr h="489204">
+              <a:tr h="469087">
                 <a:tc>
                   <a:txBody>
                     <a:bodyPr/>
@@ -26828,6 +27910,33 @@
                         <a:rPr>
                           <a:latin typeface="Inter"/>
                         </a:rPr>
+                        <a:t>gradient_tool</a:t>
+                      </a:r>
+                    </a:p>
+                  </a:txBody>
+                  <a:tcPr marL="54864" marR="54864" marT="27432" marB="27432" anchor="ctr">
+                    <a:solidFill>
+                      <a:srgbClr val="FFFFFF"/>
+                    </a:solidFill>
+                  </a:tcPr>
+                </a:tc>
+                <a:tc>
+                  <a:txBody>
+                    <a:bodyPr/>
+                    <a:lstStyle/>
+                    <a:p>
+                      <a:pPr>
+                        <a:defRPr sz="650" b="0">
+                          <a:solidFill>
+                            <a:srgbClr val="0D1117"/>
+                          </a:solidFill>
+                          <a:latin typeface="Inter"/>
+                        </a:defRPr>
+                      </a:pPr>
+                      <a:r>
+                        <a:rPr>
+                          <a:latin typeface="Inter"/>
+                        </a:rPr>
                         <a:t>list_organizations; get_gradient_capabilities</a:t>
                       </a:r>
                     </a:p>
@@ -26909,7 +28018,7 @@
                         <a:rPr>
                           <a:latin typeface="Inter"/>
                         </a:rPr>
-                        <a:t>Fictional TEST data</a:t>
+                        <a:t>Illustrative sample data</a:t>
                       </a:r>
                     </a:p>
                   </a:txBody>
@@ -26963,7 +28072,7 @@
                         <a:rPr>
                           <a:latin typeface="Inter"/>
                         </a:rPr>
-                        <a:t>eq-s1</a:t>
+                        <a:t>sha256:aaaaaaaaaaaaaaaaaaaaaaaaaaaaaaaaaaaaaaaaaaaaaaaaaaaaaaaaaaaaaaaa</a:t>
                       </a:r>
                     </a:p>
                   </a:txBody>
@@ -26974,7 +28083,7 @@
                   </a:tcPr>
                 </a:tc>
               </a:tr>
-              <a:tr h="489204">
+              <a:tr h="469087">
                 <a:tc>
                   <a:txBody>
                     <a:bodyPr/>
@@ -27046,6 +28155,33 @@
                         <a:rPr>
                           <a:latin typeface="Inter"/>
                         </a:rPr>
+                        <a:t>gradient_tool</a:t>
+                      </a:r>
+                    </a:p>
+                  </a:txBody>
+                  <a:tcPr marL="54864" marR="54864" marT="27432" marB="27432" anchor="ctr">
+                    <a:solidFill>
+                      <a:srgbClr val="F5F7F9"/>
+                    </a:solidFill>
+                  </a:tcPr>
+                </a:tc>
+                <a:tc>
+                  <a:txBody>
+                    <a:bodyPr/>
+                    <a:lstStyle/>
+                    <a:p>
+                      <a:pPr>
+                        <a:defRPr sz="650" b="0">
+                          <a:solidFill>
+                            <a:srgbClr val="0D1117"/>
+                          </a:solidFill>
+                          <a:latin typeface="Inter"/>
+                        </a:defRPr>
+                      </a:pPr>
+                      <a:r>
+                        <a:rPr>
+                          <a:latin typeface="Inter"/>
+                        </a:rPr>
                         <a:t>list_portfolios; get_portfolio_structure</a:t>
                       </a:r>
                     </a:p>
@@ -27127,7 +28263,7 @@
                         <a:rPr>
                           <a:latin typeface="Inter"/>
                         </a:rPr>
-                        <a:t>Fictional TEST data</a:t>
+                        <a:t>Illustrative sample data</a:t>
                       </a:r>
                     </a:p>
                   </a:txBody>
@@ -27181,7 +28317,7 @@
                         <a:rPr>
                           <a:latin typeface="Inter"/>
                         </a:rPr>
-                        <a:t>eq-s2</a:t>
+                        <a:t>sha256:aaaaaaaaaaaaaaaaaaaaaaaaaaaaaaaaaaaaaaaaaaaaaaaaaaaaaaaaaaaaaaaa</a:t>
                       </a:r>
                     </a:p>
                   </a:txBody>
@@ -27192,7 +28328,7 @@
                   </a:tcPr>
                 </a:tc>
               </a:tr>
-              <a:tr h="489204">
+              <a:tr h="469087">
                 <a:tc>
                   <a:txBody>
                     <a:bodyPr/>
@@ -27264,6 +28400,33 @@
                         <a:rPr>
                           <a:latin typeface="Inter"/>
                         </a:rPr>
+                        <a:t>gradient_tool</a:t>
+                      </a:r>
+                    </a:p>
+                  </a:txBody>
+                  <a:tcPr marL="54864" marR="54864" marT="27432" marB="27432" anchor="ctr">
+                    <a:solidFill>
+                      <a:srgbClr val="FFFFFF"/>
+                    </a:solidFill>
+                  </a:tcPr>
+                </a:tc>
+                <a:tc>
+                  <a:txBody>
+                    <a:bodyPr/>
+                    <a:lstStyle/>
+                    <a:p>
+                      <a:pPr>
+                        <a:defRPr sz="650" b="0">
+                          <a:solidFill>
+                            <a:srgbClr val="0D1117"/>
+                          </a:solidFill>
+                          <a:latin typeface="Inter"/>
+                        </a:defRPr>
+                      </a:pPr>
+                      <a:r>
+                        <a:rPr>
+                          <a:latin typeface="Inter"/>
+                        </a:rPr>
                         <a:t>check_portfolio_policy</a:t>
                       </a:r>
                     </a:p>
@@ -27345,7 +28508,7 @@
                         <a:rPr>
                           <a:latin typeface="Inter"/>
                         </a:rPr>
-                        <a:t>Fictional TEST data</a:t>
+                        <a:t>Illustrative sample data</a:t>
                       </a:r>
                     </a:p>
                   </a:txBody>
@@ -27399,7 +28562,7 @@
                         <a:rPr>
                           <a:latin typeface="Inter"/>
                         </a:rPr>
-                        <a:t>eq-s3</a:t>
+                        <a:t>sha256:aaaaaaaaaaaaaaaaaaaaaaaaaaaaaaaaaaaaaaaaaaaaaaaaaaaaaaaaaaaaaaaa</a:t>
                       </a:r>
                     </a:p>
                   </a:txBody>
@@ -27410,7 +28573,7 @@
                   </a:tcPr>
                 </a:tc>
               </a:tr>
-              <a:tr h="489204">
+              <a:tr h="469087">
                 <a:tc>
                   <a:txBody>
                     <a:bodyPr/>
@@ -27482,6 +28645,33 @@
                         <a:rPr>
                           <a:latin typeface="Inter"/>
                         </a:rPr>
+                        <a:t>gradient_tool</a:t>
+                      </a:r>
+                    </a:p>
+                  </a:txBody>
+                  <a:tcPr marL="54864" marR="54864" marT="27432" marB="27432" anchor="ctr">
+                    <a:solidFill>
+                      <a:srgbClr val="F5F7F9"/>
+                    </a:solidFill>
+                  </a:tcPr>
+                </a:tc>
+                <a:tc>
+                  <a:txBody>
+                    <a:bodyPr/>
+                    <a:lstStyle/>
+                    <a:p>
+                      <a:pPr>
+                        <a:defRPr sz="650" b="0">
+                          <a:solidFill>
+                            <a:srgbClr val="0D1117"/>
+                          </a:solidFill>
+                          <a:latin typeface="Inter"/>
+                        </a:defRPr>
+                      </a:pPr>
+                      <a:r>
+                        <a:rPr>
+                          <a:latin typeface="Inter"/>
+                        </a:rPr>
                         <a:t>get_portfolio_exposure; get_chart_data</a:t>
                       </a:r>
                     </a:p>
@@ -27563,7 +28753,7 @@
                         <a:rPr>
                           <a:latin typeface="Inter"/>
                         </a:rPr>
-                        <a:t>Fictional TEST data</a:t>
+                        <a:t>Illustrative sample data</a:t>
                       </a:r>
                     </a:p>
                   </a:txBody>
@@ -27617,7 +28807,7 @@
                         <a:rPr>
                           <a:latin typeface="Inter"/>
                         </a:rPr>
-                        <a:t>eq-s4</a:t>
+                        <a:t>sha256:aaaaaaaaaaaaaaaaaaaaaaaaaaaaaaaaaaaaaaaaaaaaaaaaaaaaaaaaaaaaaaaa</a:t>
                       </a:r>
                     </a:p>
                   </a:txBody>
@@ -27628,7 +28818,7 @@
                   </a:tcPr>
                 </a:tc>
               </a:tr>
-              <a:tr h="489204">
+              <a:tr h="469087">
                 <a:tc>
                   <a:txBody>
                     <a:bodyPr/>
@@ -27700,6 +28890,33 @@
                         <a:rPr>
                           <a:latin typeface="Inter"/>
                         </a:rPr>
+                        <a:t>gradient_tool</a:t>
+                      </a:r>
+                    </a:p>
+                  </a:txBody>
+                  <a:tcPr marL="54864" marR="54864" marT="27432" marB="27432" anchor="ctr">
+                    <a:solidFill>
+                      <a:srgbClr val="FFFFFF"/>
+                    </a:solidFill>
+                  </a:tcPr>
+                </a:tc>
+                <a:tc>
+                  <a:txBody>
+                    <a:bodyPr/>
+                    <a:lstStyle/>
+                    <a:p>
+                      <a:pPr>
+                        <a:defRPr sz="650" b="0">
+                          <a:solidFill>
+                            <a:srgbClr val="0D1117"/>
+                          </a:solidFill>
+                          <a:latin typeface="Inter"/>
+                        </a:defRPr>
+                      </a:pPr>
+                      <a:r>
+                        <a:rPr>
+                          <a:latin typeface="Inter"/>
+                        </a:rPr>
                         <a:t>get_portfolio_historical_returns; get_portfolio_attribution</a:t>
                       </a:r>
                     </a:p>
@@ -27781,7 +28998,7 @@
                         <a:rPr>
                           <a:latin typeface="Inter"/>
                         </a:rPr>
-                        <a:t>Fictional TEST data</a:t>
+                        <a:t>Illustrative sample data</a:t>
                       </a:r>
                     </a:p>
                   </a:txBody>
@@ -27835,7 +29052,7 @@
                         <a:rPr>
                           <a:latin typeface="Inter"/>
                         </a:rPr>
-                        <a:t>eq-s5</a:t>
+                        <a:t>sha256:aaaaaaaaaaaaaaaaaaaaaaaaaaaaaaaaaaaaaaaaaaaaaaaaaaaaaaaaaaaaaaaa</a:t>
                       </a:r>
                     </a:p>
                   </a:txBody>
@@ -27846,7 +29063,7 @@
                   </a:tcPr>
                 </a:tc>
               </a:tr>
-              <a:tr h="489204">
+              <a:tr h="469087">
                 <a:tc>
                   <a:txBody>
                     <a:bodyPr/>
@@ -27918,6 +29135,33 @@
                         <a:rPr>
                           <a:latin typeface="Inter"/>
                         </a:rPr>
+                        <a:t>gradient_tool</a:t>
+                      </a:r>
+                    </a:p>
+                  </a:txBody>
+                  <a:tcPr marL="54864" marR="54864" marT="27432" marB="27432" anchor="ctr">
+                    <a:solidFill>
+                      <a:srgbClr val="F5F7F9"/>
+                    </a:solidFill>
+                  </a:tcPr>
+                </a:tc>
+                <a:tc>
+                  <a:txBody>
+                    <a:bodyPr/>
+                    <a:lstStyle/>
+                    <a:p>
+                      <a:pPr>
+                        <a:defRPr sz="650" b="0">
+                          <a:solidFill>
+                            <a:srgbClr val="0D1117"/>
+                          </a:solidFill>
+                          <a:latin typeface="Inter"/>
+                        </a:defRPr>
+                      </a:pPr>
+                      <a:r>
+                        <a:rPr>
+                          <a:latin typeface="Inter"/>
+                        </a:rPr>
                         <a:t>get_capital_market_assumptions</a:t>
                       </a:r>
                     </a:p>
@@ -27999,7 +29243,7 @@
                         <a:rPr>
                           <a:latin typeface="Inter"/>
                         </a:rPr>
-                        <a:t>Fictional TEST data</a:t>
+                        <a:t>Illustrative sample data</a:t>
                       </a:r>
                     </a:p>
                   </a:txBody>
@@ -28053,7 +29297,7 @@
                         <a:rPr>
                           <a:latin typeface="Inter"/>
                         </a:rPr>
-                        <a:t>eq-s6</a:t>
+                        <a:t>sha256:aaaaaaaaaaaaaaaaaaaaaaaaaaaaaaaaaaaaaaaaaaaaaaaaaaaaaaaaaaaaaaaa</a:t>
                       </a:r>
                     </a:p>
                   </a:txBody>
@@ -28064,7 +29308,7 @@
                   </a:tcPr>
                 </a:tc>
               </a:tr>
-              <a:tr h="489204">
+              <a:tr h="469087">
                 <a:tc>
                   <a:txBody>
                     <a:bodyPr/>
@@ -28136,6 +29380,33 @@
                         <a:rPr>
                           <a:latin typeface="Inter"/>
                         </a:rPr>
+                        <a:t>gradient_tool</a:t>
+                      </a:r>
+                    </a:p>
+                  </a:txBody>
+                  <a:tcPr marL="54864" marR="54864" marT="27432" marB="27432" anchor="ctr">
+                    <a:solidFill>
+                      <a:srgbClr val="FFFFFF"/>
+                    </a:solidFill>
+                  </a:tcPr>
+                </a:tc>
+                <a:tc>
+                  <a:txBody>
+                    <a:bodyPr/>
+                    <a:lstStyle/>
+                    <a:p>
+                      <a:pPr>
+                        <a:defRPr sz="650" b="0">
+                          <a:solidFill>
+                            <a:srgbClr val="0D1117"/>
+                          </a:solidFill>
+                          <a:latin typeface="Inter"/>
+                        </a:defRPr>
+                      </a:pPr>
+                      <a:r>
+                        <a:rPr>
+                          <a:latin typeface="Inter"/>
+                        </a:rPr>
                         <a:t>get_cross_domain_research</a:t>
                       </a:r>
                     </a:p>
@@ -28217,7 +29488,7 @@
                         <a:rPr>
                           <a:latin typeface="Inter"/>
                         </a:rPr>
-                        <a:t>Fictional TEST data</a:t>
+                        <a:t>Illustrative sample data</a:t>
                       </a:r>
                     </a:p>
                   </a:txBody>
@@ -28271,7 +29542,7 @@
                         <a:rPr>
                           <a:latin typeface="Inter"/>
                         </a:rPr>
-                        <a:t>eq-s7</a:t>
+                        <a:t>sha256:aaaaaaaaaaaaaaaaaaaaaaaaaaaaaaaaaaaaaaaaaaaaaaaaaaaaaaaaaaaaaaaa</a:t>
                       </a:r>
                     </a:p>
                   </a:txBody>
@@ -28282,7 +29553,7 @@
                   </a:tcPr>
                 </a:tc>
               </a:tr>
-              <a:tr h="489204">
+              <a:tr h="469087">
                 <a:tc>
                   <a:txBody>
                     <a:bodyPr/>
@@ -28354,7 +29625,7 @@
                         <a:rPr>
                           <a:latin typeface="Inter"/>
                         </a:rPr>
-                        <a:t>User document</a:t>
+                        <a:t>gradient_tool</a:t>
                       </a:r>
                     </a:p>
                   </a:txBody>
@@ -28381,7 +29652,7 @@
                         <a:rPr>
                           <a:latin typeface="Inter"/>
                         </a:rPr>
-                        <a:t>fictional</a:t>
+                        <a:t>get_gradient_capabilities</a:t>
                       </a:r>
                     </a:p>
                   </a:txBody>
@@ -28408,6 +29679,33 @@
                         <a:rPr>
                           <a:latin typeface="Inter"/>
                         </a:rPr>
+                        <a:t>illustrative</a:t>
+                      </a:r>
+                    </a:p>
+                  </a:txBody>
+                  <a:tcPr marL="54864" marR="54864" marT="27432" marB="27432" anchor="ctr">
+                    <a:solidFill>
+                      <a:srgbClr val="F5F7F9"/>
+                    </a:solidFill>
+                  </a:tcPr>
+                </a:tc>
+                <a:tc>
+                  <a:txBody>
+                    <a:bodyPr/>
+                    <a:lstStyle/>
+                    <a:p>
+                      <a:pPr>
+                        <a:defRPr sz="650" b="0">
+                          <a:solidFill>
+                            <a:srgbClr val="0D1117"/>
+                          </a:solidFill>
+                          <a:latin typeface="Inter"/>
+                        </a:defRPr>
+                      </a:pPr>
+                      <a:r>
+                        <a:rPr>
+                          <a:latin typeface="Inter"/>
+                        </a:rPr>
                         <a:t>2026-06-30</a:t>
                       </a:r>
                     </a:p>
@@ -28435,7 +29733,7 @@
                         <a:rPr>
                           <a:latin typeface="Inter"/>
                         </a:rPr>
-                        <a:t>Fictional TEST data</a:t>
+                        <a:t>Illustrative sample data</a:t>
                       </a:r>
                     </a:p>
                   </a:txBody>
@@ -28489,7 +29787,7 @@
                         <a:rPr>
                           <a:latin typeface="Inter"/>
                         </a:rPr>
-                        <a:t>eq-s8</a:t>
+                        <a:t>sha256:aaaaaaaaaaaaaaaaaaaaaaaaaaaaaaaaaaaaaaaaaaaaaaaaaaaaaaaaaaaaaaaa</a:t>
                       </a:r>
                     </a:p>
                   </a:txBody>
@@ -28500,7 +29798,7 @@
                   </a:tcPr>
                 </a:tc>
               </a:tr>
-              <a:tr h="489204">
+              <a:tr h="469089">
                 <a:tc>
                   <a:txBody>
                     <a:bodyPr/>
@@ -28572,7 +29870,7 @@
                         <a:rPr>
                           <a:latin typeface="Inter"/>
                         </a:rPr>
-                        <a:t>Coverage record</a:t>
+                        <a:t>gradient_tool</a:t>
                       </a:r>
                     </a:p>
                   </a:txBody>
@@ -28599,7 +29897,7 @@
                         <a:rPr>
                           <a:latin typeface="Inter"/>
                         </a:rPr>
-                        <a:t>fictional</a:t>
+                        <a:t>get_gradient_capabilities</a:t>
                       </a:r>
                     </a:p>
                   </a:txBody>
@@ -28626,6 +29924,33 @@
                         <a:rPr>
                           <a:latin typeface="Inter"/>
                         </a:rPr>
+                        <a:t>illustrative</a:t>
+                      </a:r>
+                    </a:p>
+                  </a:txBody>
+                  <a:tcPr marL="54864" marR="54864" marT="27432" marB="27432" anchor="ctr">
+                    <a:solidFill>
+                      <a:srgbClr val="FFFFFF"/>
+                    </a:solidFill>
+                  </a:tcPr>
+                </a:tc>
+                <a:tc>
+                  <a:txBody>
+                    <a:bodyPr/>
+                    <a:lstStyle/>
+                    <a:p>
+                      <a:pPr>
+                        <a:defRPr sz="650" b="0">
+                          <a:solidFill>
+                            <a:srgbClr val="0D1117"/>
+                          </a:solidFill>
+                          <a:latin typeface="Inter"/>
+                        </a:defRPr>
+                      </a:pPr>
+                      <a:r>
+                        <a:rPr>
+                          <a:latin typeface="Inter"/>
+                        </a:rPr>
                         <a:t>2026-06-30</a:t>
                       </a:r>
                     </a:p>
@@ -28653,7 +29978,7 @@
                         <a:rPr>
                           <a:latin typeface="Inter"/>
                         </a:rPr>
-                        <a:t>Fictional TEST data</a:t>
+                        <a:t>Illustrative sample data</a:t>
                       </a:r>
                     </a:p>
                   </a:txBody>
@@ -28707,7 +30032,7 @@
                         <a:rPr>
                           <a:latin typeface="Inter"/>
                         </a:rPr>
-                        <a:t>eq-s9</a:t>
+                        <a:t>sha256:aaaaaaaaaaaaaaaaaaaaaaaaaaaaaaaaaaaaaaaaaaaaaaaaaaaaaaaaaaaaaaaa</a:t>
                       </a:r>
                     </a:p>
                   </a:txBody>
@@ -28724,7 +30049,49 @@
       </p:graphicFrame>
       <p:sp>
         <p:nvSpPr>
-          <p:cNvPr id="8" name="Rectangle 7"/>
+          <p:cNvPr id="9" name="TextBox 8"/>
+          <p:cNvSpPr txBox="1"/>
+          <p:nvPr/>
+        </p:nvSpPr>
+        <p:spPr>
+          <a:xfrm>
+            <a:off x="640080" y="6035040"/>
+            <a:ext cx="10908792" cy="164592"/>
+          </a:xfrm>
+          <a:prstGeom prst="rect">
+            <a:avLst/>
+          </a:prstGeom>
+          <a:noFill/>
+        </p:spPr>
+        <p:txBody>
+          <a:bodyPr wrap="none" lIns="9144" rIns="9144" tIns="9144" bIns="9144" anchor="t">
+            <a:spAutoFit/>
+          </a:bodyPr>
+          <a:lstStyle/>
+          <a:p>
+            <a:pPr algn="l">
+              <a:spcAft>
+                <a:spcPts val="0"/>
+              </a:spcAft>
+              <a:defRPr sz="680" b="0">
+                <a:solidFill>
+                  <a:srgbClr val="8A94A1"/>
+                </a:solidFill>
+                <a:latin typeface="Inter"/>
+              </a:defRPr>
+            </a:pPr>
+            <a:r>
+              <a:rPr>
+                <a:latin typeface="Inter"/>
+              </a:rPr>
+              <a:t>Illustrative, Gradient Maintained — demo data, not the client's holdings or managers. All organizations, portfolios, managers and results in this public example are illustrative.</a:t>
+            </a:r>
+          </a:p>
+        </p:txBody>
+      </p:sp>
+      <p:sp>
+        <p:nvSpPr>
+          <p:cNvPr id="10" name="Rectangle 9"/>
           <p:cNvSpPr/>
           <p:nvPr/>
         </p:nvSpPr>
@@ -28773,7 +30140,7 @@
       </p:sp>
       <p:sp>
         <p:nvSpPr>
-          <p:cNvPr id="9" name="TextBox 8"/>
+          <p:cNvPr id="11" name="TextBox 10"/>
           <p:cNvSpPr txBox="1"/>
           <p:nvPr/>
         </p:nvSpPr>
@@ -28815,7 +30182,7 @@
       </p:sp>
       <p:sp>
         <p:nvSpPr>
-          <p:cNvPr id="10" name="TextBox 9"/>
+          <p:cNvPr id="12" name="TextBox 11"/>
           <p:cNvSpPr txBox="1"/>
           <p:nvPr/>
         </p:nvSpPr>
@@ -28850,14 +30217,14 @@
               <a:rPr>
                 <a:latin typeface="Inter"/>
               </a:rPr>
-              <a:t>TEST DATA — fictional portfolio for rendering tests only · Data as of 2026-06-30</a:t>
+              <a:t>Confidential — Investment Committee · Data as of 2026-06-30</a:t>
             </a:r>
           </a:p>
         </p:txBody>
       </p:sp>
       <p:sp>
         <p:nvSpPr>
-          <p:cNvPr id="11" name="TextBox 10"/>
+          <p:cNvPr id="13" name="TextBox 12"/>
           <p:cNvSpPr txBox="1"/>
           <p:nvPr/>
         </p:nvSpPr>
@@ -28972,6 +30339,48 @@
         </p:nvSpPr>
         <p:spPr>
           <a:xfrm>
+            <a:off x="5897880" y="310896"/>
+            <a:ext cx="4800600" cy="256032"/>
+          </a:xfrm>
+          <a:prstGeom prst="rect">
+            <a:avLst/>
+          </a:prstGeom>
+          <a:noFill/>
+        </p:spPr>
+        <p:txBody>
+          <a:bodyPr wrap="none" lIns="9144" rIns="9144" tIns="9144" bIns="9144" anchor="t">
+            <a:spAutoFit/>
+          </a:bodyPr>
+          <a:lstStyle/>
+          <a:p>
+            <a:pPr algn="r">
+              <a:spcAft>
+                <a:spcPts val="0"/>
+              </a:spcAft>
+              <a:defRPr sz="680" b="1">
+                <a:solidFill>
+                  <a:srgbClr val="4F6B00"/>
+                </a:solidFill>
+                <a:latin typeface="Inter"/>
+              </a:defRPr>
+            </a:pPr>
+            <a:r>
+              <a:rPr>
+                <a:latin typeface="Inter"/>
+              </a:rPr>
+              <a:t>Illustrative, Gradient Maintained — demo data, not the client's holdings or managers</a:t>
+            </a:r>
+          </a:p>
+        </p:txBody>
+      </p:sp>
+      <p:sp>
+        <p:nvSpPr>
+          <p:cNvPr id="4" name="TextBox 3"/>
+          <p:cNvSpPr txBox="1"/>
+          <p:nvPr/>
+        </p:nvSpPr>
+        <p:spPr>
+          <a:xfrm>
             <a:off x="640080" y="566928"/>
             <a:ext cx="10058400" cy="530352"/>
           </a:xfrm>
@@ -29008,7 +30417,7 @@
       </p:sp>
       <p:sp>
         <p:nvSpPr>
-          <p:cNvPr id="4" name="Rectangle 3"/>
+          <p:cNvPr id="5" name="Rectangle 4"/>
           <p:cNvSpPr/>
           <p:nvPr/>
         </p:nvSpPr>
@@ -29057,7 +30466,7 @@
       </p:sp>
       <p:sp>
         <p:nvSpPr>
-          <p:cNvPr id="5" name="Rectangle 4"/>
+          <p:cNvPr id="6" name="Rectangle 5"/>
           <p:cNvSpPr/>
           <p:nvPr/>
         </p:nvSpPr>
@@ -29106,7 +30515,7 @@
       </p:sp>
       <p:sp>
         <p:nvSpPr>
-          <p:cNvPr id="6" name="TextBox 5"/>
+          <p:cNvPr id="7" name="TextBox 6"/>
           <p:cNvSpPr txBox="1"/>
           <p:nvPr/>
         </p:nvSpPr>
@@ -29148,14 +30557,14 @@
       </p:sp>
       <p:sp>
         <p:nvSpPr>
-          <p:cNvPr id="7" name="Rectangle 6"/>
+          <p:cNvPr id="8" name="Rectangle 7"/>
           <p:cNvSpPr/>
           <p:nvPr/>
         </p:nvSpPr>
         <p:spPr>
           <a:xfrm>
             <a:off x="640080" y="1325880"/>
-            <a:ext cx="10908792" cy="825772"/>
+            <a:ext cx="10908792" cy="831168"/>
           </a:xfrm>
           <a:prstGeom prst="rect">
             <a:avLst/>
@@ -29197,14 +30606,14 @@
       </p:sp>
       <p:sp>
         <p:nvSpPr>
-          <p:cNvPr id="8" name="Rectangle 7"/>
+          <p:cNvPr id="9" name="Rectangle 8"/>
           <p:cNvSpPr/>
           <p:nvPr/>
         </p:nvSpPr>
         <p:spPr>
           <a:xfrm>
             <a:off x="640080" y="1325880"/>
-            <a:ext cx="54864" cy="825772"/>
+            <a:ext cx="54864" cy="831168"/>
           </a:xfrm>
           <a:prstGeom prst="rect">
             <a:avLst/>
@@ -29246,7 +30655,7 @@
       </p:sp>
       <p:sp>
         <p:nvSpPr>
-          <p:cNvPr id="9" name="TextBox 8"/>
+          <p:cNvPr id="10" name="TextBox 9"/>
           <p:cNvSpPr txBox="1"/>
           <p:nvPr/>
         </p:nvSpPr>
@@ -29288,14 +30697,14 @@
       </p:sp>
       <p:sp>
         <p:nvSpPr>
-          <p:cNvPr id="10" name="TextBox 9"/>
+          <p:cNvPr id="11" name="TextBox 10"/>
           <p:cNvSpPr txBox="1"/>
           <p:nvPr/>
         </p:nvSpPr>
         <p:spPr>
           <a:xfrm>
             <a:off x="804671" y="1719072"/>
-            <a:ext cx="10616184" cy="341140"/>
+            <a:ext cx="10616184" cy="346536"/>
           </a:xfrm>
           <a:prstGeom prst="rect">
             <a:avLst/>
@@ -29330,13 +30739,13 @@
       </p:sp>
       <p:sp>
         <p:nvSpPr>
-          <p:cNvPr id="11" name="TextBox 10"/>
+          <p:cNvPr id="12" name="TextBox 11"/>
           <p:cNvSpPr txBox="1"/>
           <p:nvPr/>
         </p:nvSpPr>
         <p:spPr>
           <a:xfrm>
-            <a:off x="640080" y="2261380"/>
+            <a:off x="640080" y="2266776"/>
             <a:ext cx="10908792" cy="201168"/>
           </a:xfrm>
           <a:prstGeom prst="rect">
@@ -29372,15 +30781,15 @@
       </p:sp>
       <p:graphicFrame>
         <p:nvGraphicFramePr>
-          <p:cNvPr id="12" name="Table 11"/>
+          <p:cNvPr id="13" name="Table 12"/>
           <p:cNvGraphicFramePr>
             <a:graphicFrameLocks noGrp="1"/>
           </p:cNvGraphicFramePr>
           <p:nvPr/>
         </p:nvGraphicFramePr>
         <p:xfrm>
-          <a:off x="640080" y="2535700"/>
-          <a:ext cx="10908792" cy="1237251"/>
+          <a:off x="640080" y="2541096"/>
+          <a:ext cx="10908792" cy="1247128"/>
         </p:xfrm>
         <a:graphic>
           <a:graphicData uri="http://schemas.openxmlformats.org/drawingml/2006/table">
@@ -29394,7 +30803,7 @@
                 <a:gridCol w="2965704"/>
                 <a:gridCol w="2965704"/>
               </a:tblGrid>
-              <a:tr h="309312">
+              <a:tr h="311782">
                 <a:tc>
                   <a:txBody>
                     <a:bodyPr/>
@@ -29504,7 +30913,7 @@
                   </a:tcPr>
                 </a:tc>
               </a:tr>
-              <a:tr h="309312">
+              <a:tr h="311782">
                 <a:tc>
                   <a:txBody>
                     <a:bodyPr/>
@@ -29614,7 +31023,7 @@
                   </a:tcPr>
                 </a:tc>
               </a:tr>
-              <a:tr h="309312">
+              <a:tr h="311782">
                 <a:tc>
                   <a:txBody>
                     <a:bodyPr/>
@@ -29724,7 +31133,7 @@
                   </a:tcPr>
                 </a:tc>
               </a:tr>
-              <a:tr h="309315">
+              <a:tr h="311782">
                 <a:tc>
                   <a:txBody>
                     <a:bodyPr/>
@@ -29840,14 +31249,14 @@
       </p:graphicFrame>
       <p:sp>
         <p:nvSpPr>
-          <p:cNvPr id="13" name="Rectangle 12"/>
+          <p:cNvPr id="14" name="Rectangle 13"/>
           <p:cNvSpPr/>
           <p:nvPr/>
         </p:nvSpPr>
         <p:spPr>
           <a:xfrm>
-            <a:off x="640080" y="3882679"/>
-            <a:ext cx="10908792" cy="770227"/>
+            <a:off x="640080" y="3897953"/>
+            <a:ext cx="10908792" cy="775260"/>
           </a:xfrm>
           <a:prstGeom prst="rect">
             <a:avLst/>
@@ -29889,14 +31298,14 @@
       </p:sp>
       <p:sp>
         <p:nvSpPr>
-          <p:cNvPr id="14" name="Rectangle 13"/>
+          <p:cNvPr id="15" name="Rectangle 14"/>
           <p:cNvSpPr/>
           <p:nvPr/>
         </p:nvSpPr>
         <p:spPr>
           <a:xfrm>
-            <a:off x="640080" y="3882679"/>
-            <a:ext cx="54864" cy="770227"/>
+            <a:off x="640080" y="3897953"/>
+            <a:ext cx="54864" cy="775260"/>
           </a:xfrm>
           <a:prstGeom prst="rect">
             <a:avLst/>
@@ -29938,13 +31347,13 @@
       </p:sp>
       <p:sp>
         <p:nvSpPr>
-          <p:cNvPr id="15" name="TextBox 14"/>
+          <p:cNvPr id="16" name="TextBox 15"/>
           <p:cNvSpPr txBox="1"/>
           <p:nvPr/>
         </p:nvSpPr>
         <p:spPr>
           <a:xfrm>
-            <a:off x="804671" y="3992407"/>
+            <a:off x="804671" y="4007681"/>
             <a:ext cx="10616184" cy="228600"/>
           </a:xfrm>
           <a:prstGeom prst="rect">
@@ -29980,14 +31389,14 @@
       </p:sp>
       <p:sp>
         <p:nvSpPr>
-          <p:cNvPr id="16" name="TextBox 15"/>
+          <p:cNvPr id="17" name="TextBox 16"/>
           <p:cNvSpPr txBox="1"/>
           <p:nvPr/>
         </p:nvSpPr>
         <p:spPr>
           <a:xfrm>
-            <a:off x="804671" y="4275871"/>
-            <a:ext cx="10616184" cy="285595"/>
+            <a:off x="804671" y="4291145"/>
+            <a:ext cx="10616184" cy="290628"/>
           </a:xfrm>
           <a:prstGeom prst="rect">
             <a:avLst/>
@@ -30022,14 +31431,14 @@
       </p:sp>
       <p:sp>
         <p:nvSpPr>
-          <p:cNvPr id="17" name="Rectangle 16"/>
+          <p:cNvPr id="18" name="Rectangle 17"/>
           <p:cNvSpPr/>
           <p:nvPr/>
         </p:nvSpPr>
         <p:spPr>
           <a:xfrm>
-            <a:off x="640080" y="4762634"/>
-            <a:ext cx="10908792" cy="1455285"/>
+            <a:off x="640080" y="4782942"/>
+            <a:ext cx="10908792" cy="1434977"/>
           </a:xfrm>
           <a:prstGeom prst="rect">
             <a:avLst/>
@@ -30071,14 +31480,14 @@
       </p:sp>
       <p:sp>
         <p:nvSpPr>
-          <p:cNvPr id="18" name="Rectangle 17"/>
+          <p:cNvPr id="19" name="Rectangle 18"/>
           <p:cNvSpPr/>
           <p:nvPr/>
         </p:nvSpPr>
         <p:spPr>
           <a:xfrm>
-            <a:off x="640080" y="4762634"/>
-            <a:ext cx="54864" cy="1455285"/>
+            <a:off x="640080" y="4782942"/>
+            <a:ext cx="54864" cy="1434977"/>
           </a:xfrm>
           <a:prstGeom prst="rect">
             <a:avLst/>
@@ -30120,13 +31529,13 @@
       </p:sp>
       <p:sp>
         <p:nvSpPr>
-          <p:cNvPr id="19" name="TextBox 18"/>
+          <p:cNvPr id="20" name="TextBox 19"/>
           <p:cNvSpPr txBox="1"/>
           <p:nvPr/>
         </p:nvSpPr>
         <p:spPr>
           <a:xfrm>
-            <a:off x="804671" y="4872362"/>
+            <a:off x="804671" y="4892670"/>
             <a:ext cx="10616184" cy="228600"/>
           </a:xfrm>
           <a:prstGeom prst="rect">
@@ -30162,14 +31571,14 @@
       </p:sp>
       <p:sp>
         <p:nvSpPr>
-          <p:cNvPr id="20" name="TextBox 19"/>
+          <p:cNvPr id="21" name="TextBox 20"/>
           <p:cNvSpPr txBox="1"/>
           <p:nvPr/>
         </p:nvSpPr>
         <p:spPr>
           <a:xfrm>
-            <a:off x="804671" y="5155826"/>
-            <a:ext cx="10616184" cy="970653"/>
+            <a:off x="804671" y="5176134"/>
+            <a:ext cx="10616184" cy="950345"/>
           </a:xfrm>
           <a:prstGeom prst="rect">
             <a:avLst/>
@@ -30197,14 +31606,14 @@
               <a:rPr>
                 <a:latin typeface="Inter"/>
               </a:rPr>
-              <a:t>Observation: The fictional TEST report carries a manager-and-issuer concentration signal above the clear threshold [S1]. Why it matters: This signal focuses oversight on the report's most decision-relevant condition. Uncertainty: Evidence coverage may exclude newer or more detailed observations. What would change the view: A governed refresh showing a different signal or breached threshold.</a:t>
+              <a:t>Observation: The sample report carries a manager-and-issuer concentration signal above the clear threshold [S1]. Why it matters: This signal focuses oversight on the report's most decision-relevant condition. Uncertainty: Evidence coverage may exclude newer or more detailed observations. What would change the view: A governed refresh showing a different signal or breached threshold.</a:t>
             </a:r>
           </a:p>
         </p:txBody>
       </p:sp>
       <p:sp>
         <p:nvSpPr>
-          <p:cNvPr id="21" name="Rectangle 20"/>
+          <p:cNvPr id="22" name="Rectangle 21"/>
           <p:cNvSpPr/>
           <p:nvPr/>
         </p:nvSpPr>
@@ -30253,7 +31662,7 @@
       </p:sp>
       <p:sp>
         <p:nvSpPr>
-          <p:cNvPr id="22" name="TextBox 21"/>
+          <p:cNvPr id="23" name="TextBox 22"/>
           <p:cNvSpPr txBox="1"/>
           <p:nvPr/>
         </p:nvSpPr>
@@ -30295,7 +31704,7 @@
       </p:sp>
       <p:sp>
         <p:nvSpPr>
-          <p:cNvPr id="23" name="TextBox 22"/>
+          <p:cNvPr id="24" name="TextBox 23"/>
           <p:cNvSpPr txBox="1"/>
           <p:nvPr/>
         </p:nvSpPr>
@@ -30330,14 +31739,14 @@
               <a:rPr>
                 <a:latin typeface="Inter"/>
               </a:rPr>
-              <a:t>TEST DATA — fictional portfolio for rendering tests only · Data as of 2026-06-30</a:t>
+              <a:t>Confidential — Investment Committee · Data as of 2026-06-30</a:t>
             </a:r>
           </a:p>
         </p:txBody>
       </p:sp>
       <p:sp>
         <p:nvSpPr>
-          <p:cNvPr id="24" name="TextBox 23"/>
+          <p:cNvPr id="25" name="TextBox 24"/>
           <p:cNvSpPr txBox="1"/>
           <p:nvPr/>
         </p:nvSpPr>
@@ -30452,6 +31861,48 @@
         </p:nvSpPr>
         <p:spPr>
           <a:xfrm>
+            <a:off x="5897880" y="310896"/>
+            <a:ext cx="4800600" cy="256032"/>
+          </a:xfrm>
+          <a:prstGeom prst="rect">
+            <a:avLst/>
+          </a:prstGeom>
+          <a:noFill/>
+        </p:spPr>
+        <p:txBody>
+          <a:bodyPr wrap="none" lIns="9144" rIns="9144" tIns="9144" bIns="9144" anchor="t">
+            <a:spAutoFit/>
+          </a:bodyPr>
+          <a:lstStyle/>
+          <a:p>
+            <a:pPr algn="r">
+              <a:spcAft>
+                <a:spcPts val="0"/>
+              </a:spcAft>
+              <a:defRPr sz="680" b="1">
+                <a:solidFill>
+                  <a:srgbClr val="4F6B00"/>
+                </a:solidFill>
+                <a:latin typeface="Inter"/>
+              </a:defRPr>
+            </a:pPr>
+            <a:r>
+              <a:rPr>
+                <a:latin typeface="Inter"/>
+              </a:rPr>
+              <a:t>Illustrative, Gradient Maintained — demo data, not the client's holdings or managers</a:t>
+            </a:r>
+          </a:p>
+        </p:txBody>
+      </p:sp>
+      <p:sp>
+        <p:nvSpPr>
+          <p:cNvPr id="4" name="TextBox 3"/>
+          <p:cNvSpPr txBox="1"/>
+          <p:nvPr/>
+        </p:nvSpPr>
+        <p:spPr>
+          <a:xfrm>
             <a:off x="640080" y="566928"/>
             <a:ext cx="10058400" cy="530352"/>
           </a:xfrm>
@@ -30481,14 +31932,14 @@
               <a:rPr>
                 <a:latin typeface="Inter"/>
               </a:rPr>
-              <a:t>Appendix B — Server Metric Methods and Disclosures</a:t>
+              <a:t>Appendix — Server Metric Methods and Disclosures</a:t>
             </a:r>
           </a:p>
         </p:txBody>
       </p:sp>
       <p:sp>
         <p:nvSpPr>
-          <p:cNvPr id="4" name="Rectangle 3"/>
+          <p:cNvPr id="5" name="Rectangle 4"/>
           <p:cNvSpPr/>
           <p:nvPr/>
         </p:nvSpPr>
@@ -30537,7 +31988,7 @@
       </p:sp>
       <p:sp>
         <p:nvSpPr>
-          <p:cNvPr id="5" name="Rectangle 4"/>
+          <p:cNvPr id="6" name="Rectangle 5"/>
           <p:cNvSpPr/>
           <p:nvPr/>
         </p:nvSpPr>
@@ -30586,7 +32037,7 @@
       </p:sp>
       <p:sp>
         <p:nvSpPr>
-          <p:cNvPr id="6" name="TextBox 5"/>
+          <p:cNvPr id="7" name="TextBox 6"/>
           <p:cNvSpPr txBox="1"/>
           <p:nvPr/>
         </p:nvSpPr>
@@ -30628,7 +32079,7 @@
       </p:sp>
       <p:sp>
         <p:nvSpPr>
-          <p:cNvPr id="7" name="TextBox 6"/>
+          <p:cNvPr id="8" name="TextBox 7"/>
           <p:cNvSpPr txBox="1"/>
           <p:nvPr/>
         </p:nvSpPr>
@@ -30670,7 +32121,7 @@
       </p:sp>
       <p:graphicFrame>
         <p:nvGraphicFramePr>
-          <p:cNvPr id="8" name="Table 7"/>
+          <p:cNvPr id="9" name="Table 8"/>
           <p:cNvGraphicFramePr>
             <a:graphicFrameLocks noGrp="1"/>
           </p:cNvGraphicFramePr>
@@ -31110,7 +32561,7 @@
       </p:graphicFrame>
       <p:sp>
         <p:nvSpPr>
-          <p:cNvPr id="9" name="TextBox 8"/>
+          <p:cNvPr id="10" name="TextBox 9"/>
           <p:cNvSpPr txBox="1"/>
           <p:nvPr/>
         </p:nvSpPr>
@@ -31209,7 +32660,7 @@
       </p:sp>
       <p:sp>
         <p:nvSpPr>
-          <p:cNvPr id="10" name="Rectangle 9"/>
+          <p:cNvPr id="11" name="Rectangle 10"/>
           <p:cNvSpPr/>
           <p:nvPr/>
         </p:nvSpPr>
@@ -31258,7 +32709,7 @@
       </p:sp>
       <p:sp>
         <p:nvSpPr>
-          <p:cNvPr id="11" name="TextBox 10"/>
+          <p:cNvPr id="12" name="TextBox 11"/>
           <p:cNvSpPr txBox="1"/>
           <p:nvPr/>
         </p:nvSpPr>
@@ -31300,7 +32751,7 @@
       </p:sp>
       <p:sp>
         <p:nvSpPr>
-          <p:cNvPr id="12" name="TextBox 11"/>
+          <p:cNvPr id="13" name="TextBox 12"/>
           <p:cNvSpPr txBox="1"/>
           <p:nvPr/>
         </p:nvSpPr>
@@ -31335,14 +32786,14 @@
               <a:rPr>
                 <a:latin typeface="Inter"/>
               </a:rPr>
-              <a:t>TEST DATA — fictional portfolio for rendering tests only · Data as of 2026-06-30</a:t>
+              <a:t>Confidential — Investment Committee · Data as of 2026-06-30</a:t>
             </a:r>
           </a:p>
         </p:txBody>
       </p:sp>
       <p:sp>
         <p:nvSpPr>
-          <p:cNvPr id="13" name="TextBox 12"/>
+          <p:cNvPr id="14" name="TextBox 13"/>
           <p:cNvSpPr txBox="1"/>
           <p:nvPr/>
         </p:nvSpPr>
@@ -31457,6 +32908,48 @@
         </p:nvSpPr>
         <p:spPr>
           <a:xfrm>
+            <a:off x="5897880" y="310896"/>
+            <a:ext cx="4800600" cy="256032"/>
+          </a:xfrm>
+          <a:prstGeom prst="rect">
+            <a:avLst/>
+          </a:prstGeom>
+          <a:noFill/>
+        </p:spPr>
+        <p:txBody>
+          <a:bodyPr wrap="none" lIns="9144" rIns="9144" tIns="9144" bIns="9144" anchor="t">
+            <a:spAutoFit/>
+          </a:bodyPr>
+          <a:lstStyle/>
+          <a:p>
+            <a:pPr algn="r">
+              <a:spcAft>
+                <a:spcPts val="0"/>
+              </a:spcAft>
+              <a:defRPr sz="680" b="1">
+                <a:solidFill>
+                  <a:srgbClr val="4F6B00"/>
+                </a:solidFill>
+                <a:latin typeface="Inter"/>
+              </a:defRPr>
+            </a:pPr>
+            <a:r>
+              <a:rPr>
+                <a:latin typeface="Inter"/>
+              </a:rPr>
+              <a:t>Illustrative, Gradient Maintained — demo data, not the client's holdings or managers</a:t>
+            </a:r>
+          </a:p>
+        </p:txBody>
+      </p:sp>
+      <p:sp>
+        <p:nvSpPr>
+          <p:cNvPr id="4" name="TextBox 3"/>
+          <p:cNvSpPr txBox="1"/>
+          <p:nvPr/>
+        </p:nvSpPr>
+        <p:spPr>
+          <a:xfrm>
             <a:off x="640080" y="566928"/>
             <a:ext cx="10058400" cy="530352"/>
           </a:xfrm>
@@ -31493,7 +32986,7 @@
       </p:sp>
       <p:sp>
         <p:nvSpPr>
-          <p:cNvPr id="4" name="Rectangle 3"/>
+          <p:cNvPr id="5" name="Rectangle 4"/>
           <p:cNvSpPr/>
           <p:nvPr/>
         </p:nvSpPr>
@@ -31542,7 +33035,7 @@
       </p:sp>
       <p:sp>
         <p:nvSpPr>
-          <p:cNvPr id="5" name="Rectangle 4"/>
+          <p:cNvPr id="6" name="Rectangle 5"/>
           <p:cNvSpPr/>
           <p:nvPr/>
         </p:nvSpPr>
@@ -31591,7 +33084,7 @@
       </p:sp>
       <p:sp>
         <p:nvSpPr>
-          <p:cNvPr id="6" name="TextBox 5"/>
+          <p:cNvPr id="7" name="TextBox 6"/>
           <p:cNvSpPr txBox="1"/>
           <p:nvPr/>
         </p:nvSpPr>
@@ -31633,14 +33126,14 @@
       </p:sp>
       <p:sp>
         <p:nvSpPr>
-          <p:cNvPr id="7" name="Rectangle 6"/>
+          <p:cNvPr id="8" name="Rectangle 7"/>
           <p:cNvSpPr/>
           <p:nvPr/>
         </p:nvSpPr>
         <p:spPr>
           <a:xfrm>
             <a:off x="640080" y="1325880"/>
-            <a:ext cx="10908792" cy="2301800"/>
+            <a:ext cx="10908792" cy="2335058"/>
           </a:xfrm>
           <a:prstGeom prst="rect">
             <a:avLst/>
@@ -31682,14 +33175,14 @@
       </p:sp>
       <p:sp>
         <p:nvSpPr>
-          <p:cNvPr id="8" name="Rectangle 7"/>
+          <p:cNvPr id="9" name="Rectangle 8"/>
           <p:cNvSpPr/>
           <p:nvPr/>
         </p:nvSpPr>
         <p:spPr>
           <a:xfrm>
             <a:off x="640080" y="1325880"/>
-            <a:ext cx="54864" cy="2301800"/>
+            <a:ext cx="54864" cy="2335058"/>
           </a:xfrm>
           <a:prstGeom prst="rect">
             <a:avLst/>
@@ -31731,7 +33224,7 @@
       </p:sp>
       <p:sp>
         <p:nvSpPr>
-          <p:cNvPr id="9" name="TextBox 8"/>
+          <p:cNvPr id="10" name="TextBox 9"/>
           <p:cNvSpPr txBox="1"/>
           <p:nvPr/>
         </p:nvSpPr>
@@ -31773,14 +33266,14 @@
       </p:sp>
       <p:sp>
         <p:nvSpPr>
-          <p:cNvPr id="10" name="TextBox 9"/>
+          <p:cNvPr id="11" name="TextBox 10"/>
           <p:cNvSpPr txBox="1"/>
           <p:nvPr/>
         </p:nvSpPr>
         <p:spPr>
           <a:xfrm>
             <a:off x="804671" y="1719072"/>
-            <a:ext cx="10616184" cy="1817168"/>
+            <a:ext cx="10616184" cy="1850426"/>
           </a:xfrm>
           <a:prstGeom prst="rect">
             <a:avLst/>
@@ -31808,21 +33301,21 @@
               <a:rPr>
                 <a:latin typeface="Inter"/>
               </a:rPr>
-              <a:t>Observation: Public-equity weight is 42.0% in the TEST evidence [S2]. Why it matters: This measure establishes the baseline for comparing later governed results. Uncertainty: The source basis may omit newer observations outside this fixture. What would change the view: A refreshed source report showing a change above 1%.</a:t>
+              <a:t>Observation: Public-equity weight is 42.0% in the review evidence [S2]. Why it matters: This measure establishes the baseline for comparing later governed results. Uncertainty: The source basis may omit newer observations outside the reviewed evidence. What would change the view: A refreshed source report showing a change above 1%.</a:t>
             </a:r>
           </a:p>
         </p:txBody>
       </p:sp>
       <p:sp>
         <p:nvSpPr>
-          <p:cNvPr id="11" name="Rectangle 10"/>
+          <p:cNvPr id="12" name="Rectangle 11"/>
           <p:cNvSpPr/>
           <p:nvPr/>
         </p:nvSpPr>
         <p:spPr>
           <a:xfrm>
-            <a:off x="640080" y="3737408"/>
-            <a:ext cx="10908792" cy="2480511"/>
+            <a:off x="640080" y="3770666"/>
+            <a:ext cx="10908792" cy="2447253"/>
           </a:xfrm>
           <a:prstGeom prst="rect">
             <a:avLst/>
@@ -31864,14 +33357,14 @@
       </p:sp>
       <p:sp>
         <p:nvSpPr>
-          <p:cNvPr id="12" name="Rectangle 11"/>
+          <p:cNvPr id="13" name="Rectangle 12"/>
           <p:cNvSpPr/>
           <p:nvPr/>
         </p:nvSpPr>
         <p:spPr>
           <a:xfrm>
-            <a:off x="640080" y="3737408"/>
-            <a:ext cx="54864" cy="2480511"/>
+            <a:off x="640080" y="3770666"/>
+            <a:ext cx="54864" cy="2447253"/>
           </a:xfrm>
           <a:prstGeom prst="rect">
             <a:avLst/>
@@ -31913,13 +33406,13 @@
       </p:sp>
       <p:sp>
         <p:nvSpPr>
-          <p:cNvPr id="13" name="TextBox 12"/>
+          <p:cNvPr id="14" name="TextBox 13"/>
           <p:cNvSpPr txBox="1"/>
           <p:nvPr/>
         </p:nvSpPr>
         <p:spPr>
           <a:xfrm>
-            <a:off x="804671" y="3847136"/>
+            <a:off x="804671" y="3880394"/>
             <a:ext cx="10616184" cy="228600"/>
           </a:xfrm>
           <a:prstGeom prst="rect">
@@ -31955,14 +33448,14 @@
       </p:sp>
       <p:sp>
         <p:nvSpPr>
-          <p:cNvPr id="14" name="TextBox 13"/>
+          <p:cNvPr id="15" name="TextBox 14"/>
           <p:cNvSpPr txBox="1"/>
           <p:nvPr/>
         </p:nvSpPr>
         <p:spPr>
           <a:xfrm>
-            <a:off x="804671" y="4130600"/>
-            <a:ext cx="10616184" cy="1995879"/>
+            <a:off x="804671" y="4163858"/>
+            <a:ext cx="10616184" cy="1962621"/>
           </a:xfrm>
           <a:prstGeom prst="rect">
             <a:avLst/>
@@ -31990,14 +33483,14 @@
               <a:rPr>
                 <a:latin typeface="Inter"/>
               </a:rPr>
-              <a:t>Observation: Largest concentration is 2.3% NAV in the TEST evidence [S3]. Why it matters: This result determines which item receives priority in the next monitoring cycle. Uncertainty: Supporting coverage may omit later filings or corroborating detail. What would change the view: A new filing or report that resolves the item or changes it by 1%.</a:t>
+              <a:t>Observation: Largest concentration is 2.3% NAV in the review evidence [S3]. Why it matters: This result determines which item receives priority in the next monitoring cycle. Uncertainty: Supporting coverage may omit later filings or corroborating detail. What would change the view: A new filing or report that resolves the item or changes it by 1%.</a:t>
             </a:r>
           </a:p>
         </p:txBody>
       </p:sp>
       <p:sp>
         <p:nvSpPr>
-          <p:cNvPr id="15" name="Rectangle 14"/>
+          <p:cNvPr id="16" name="Rectangle 15"/>
           <p:cNvSpPr/>
           <p:nvPr/>
         </p:nvSpPr>
@@ -32046,7 +33539,7 @@
       </p:sp>
       <p:sp>
         <p:nvSpPr>
-          <p:cNvPr id="16" name="TextBox 15"/>
+          <p:cNvPr id="17" name="TextBox 16"/>
           <p:cNvSpPr txBox="1"/>
           <p:nvPr/>
         </p:nvSpPr>
@@ -32088,7 +33581,7 @@
       </p:sp>
       <p:sp>
         <p:nvSpPr>
-          <p:cNvPr id="17" name="TextBox 16"/>
+          <p:cNvPr id="18" name="TextBox 17"/>
           <p:cNvSpPr txBox="1"/>
           <p:nvPr/>
         </p:nvSpPr>
@@ -32123,14 +33616,14 @@
               <a:rPr>
                 <a:latin typeface="Inter"/>
               </a:rPr>
-              <a:t>TEST DATA — fictional portfolio for rendering tests only · Data as of 2026-06-30</a:t>
+              <a:t>Confidential — Investment Committee · Data as of 2026-06-30</a:t>
             </a:r>
           </a:p>
         </p:txBody>
       </p:sp>
       <p:sp>
         <p:nvSpPr>
-          <p:cNvPr id="18" name="TextBox 17"/>
+          <p:cNvPr id="19" name="TextBox 18"/>
           <p:cNvSpPr txBox="1"/>
           <p:nvPr/>
         </p:nvSpPr>
@@ -32245,6 +33738,48 @@
         </p:nvSpPr>
         <p:spPr>
           <a:xfrm>
+            <a:off x="5897880" y="310896"/>
+            <a:ext cx="4800600" cy="256032"/>
+          </a:xfrm>
+          <a:prstGeom prst="rect">
+            <a:avLst/>
+          </a:prstGeom>
+          <a:noFill/>
+        </p:spPr>
+        <p:txBody>
+          <a:bodyPr wrap="none" lIns="9144" rIns="9144" tIns="9144" bIns="9144" anchor="t">
+            <a:spAutoFit/>
+          </a:bodyPr>
+          <a:lstStyle/>
+          <a:p>
+            <a:pPr algn="r">
+              <a:spcAft>
+                <a:spcPts val="0"/>
+              </a:spcAft>
+              <a:defRPr sz="680" b="1">
+                <a:solidFill>
+                  <a:srgbClr val="4F6B00"/>
+                </a:solidFill>
+                <a:latin typeface="Inter"/>
+              </a:defRPr>
+            </a:pPr>
+            <a:r>
+              <a:rPr>
+                <a:latin typeface="Inter"/>
+              </a:rPr>
+              <a:t>Illustrative, Gradient Maintained — demo data, not the client's holdings or managers</a:t>
+            </a:r>
+          </a:p>
+        </p:txBody>
+      </p:sp>
+      <p:sp>
+        <p:nvSpPr>
+          <p:cNvPr id="4" name="TextBox 3"/>
+          <p:cNvSpPr txBox="1"/>
+          <p:nvPr/>
+        </p:nvSpPr>
+        <p:spPr>
+          <a:xfrm>
             <a:off x="640080" y="566928"/>
             <a:ext cx="10058400" cy="530352"/>
           </a:xfrm>
@@ -32281,7 +33816,7 @@
       </p:sp>
       <p:sp>
         <p:nvSpPr>
-          <p:cNvPr id="4" name="Rectangle 3"/>
+          <p:cNvPr id="5" name="Rectangle 4"/>
           <p:cNvSpPr/>
           <p:nvPr/>
         </p:nvSpPr>
@@ -32330,7 +33865,7 @@
       </p:sp>
       <p:sp>
         <p:nvSpPr>
-          <p:cNvPr id="5" name="Rectangle 4"/>
+          <p:cNvPr id="6" name="Rectangle 5"/>
           <p:cNvSpPr/>
           <p:nvPr/>
         </p:nvSpPr>
@@ -32379,7 +33914,7 @@
       </p:sp>
       <p:sp>
         <p:nvSpPr>
-          <p:cNvPr id="6" name="TextBox 5"/>
+          <p:cNvPr id="7" name="TextBox 6"/>
           <p:cNvSpPr txBox="1"/>
           <p:nvPr/>
         </p:nvSpPr>
@@ -32421,7 +33956,7 @@
       </p:sp>
       <p:graphicFrame>
         <p:nvGraphicFramePr>
-          <p:cNvPr id="7" name="Table 6"/>
+          <p:cNvPr id="8" name="Table 7"/>
           <p:cNvGraphicFramePr>
             <a:graphicFrameLocks noGrp="1"/>
           </p:cNvGraphicFramePr>
@@ -32486,7 +34021,7 @@
                         <a:rPr>
                           <a:latin typeface="Inter"/>
                         </a:rPr>
-                        <a:t>Northstar Total Fund (TEST) [S2]</a:t>
+                        <a:t>Northstar Total Fund [S2]</a:t>
                       </a:r>
                     </a:p>
                   </a:txBody>
@@ -32598,7 +34133,7 @@
                         <a:rPr>
                           <a:latin typeface="Inter"/>
                         </a:rPr>
-                        <a:t>Example Global Equity Index (TEST) [S5]</a:t>
+                        <a:t>Northstar Global Equity Index [S5]</a:t>
                       </a:r>
                     </a:p>
                   </a:txBody>
@@ -32766,7 +34301,7 @@
                         <a:rPr>
                           <a:latin typeface="Inter"/>
                         </a:rPr>
-                        <a:t>Fictional TEST data [S1] [S1]</a:t>
+                        <a:t>Illustrative sample data [S1] [S1]</a:t>
                       </a:r>
                     </a:p>
                   </a:txBody>
@@ -32783,7 +34318,7 @@
       </p:graphicFrame>
       <p:sp>
         <p:nvSpPr>
-          <p:cNvPr id="8" name="TextBox 7"/>
+          <p:cNvPr id="9" name="TextBox 8"/>
           <p:cNvSpPr txBox="1"/>
           <p:nvPr/>
         </p:nvSpPr>
@@ -32825,7 +34360,7 @@
       </p:sp>
       <p:graphicFrame>
         <p:nvGraphicFramePr>
-          <p:cNvPr id="9" name="Table 8"/>
+          <p:cNvPr id="10" name="Table 9"/>
           <p:cNvGraphicFramePr>
             <a:graphicFrameLocks noGrp="1"/>
           </p:cNvGraphicFramePr>
@@ -33402,7 +34937,7 @@
       </p:graphicFrame>
       <p:sp>
         <p:nvSpPr>
-          <p:cNvPr id="10" name="Rectangle 9"/>
+          <p:cNvPr id="11" name="Rectangle 10"/>
           <p:cNvSpPr/>
           <p:nvPr/>
         </p:nvSpPr>
@@ -33451,7 +34986,7 @@
       </p:sp>
       <p:sp>
         <p:nvSpPr>
-          <p:cNvPr id="11" name="TextBox 10"/>
+          <p:cNvPr id="12" name="TextBox 11"/>
           <p:cNvSpPr txBox="1"/>
           <p:nvPr/>
         </p:nvSpPr>
@@ -33493,7 +35028,7 @@
       </p:sp>
       <p:sp>
         <p:nvSpPr>
-          <p:cNvPr id="12" name="TextBox 11"/>
+          <p:cNvPr id="13" name="TextBox 12"/>
           <p:cNvSpPr txBox="1"/>
           <p:nvPr/>
         </p:nvSpPr>
@@ -33528,14 +35063,14 @@
               <a:rPr>
                 <a:latin typeface="Inter"/>
               </a:rPr>
-              <a:t>TEST DATA — fictional portfolio for rendering tests only · Data as of 2026-06-30</a:t>
+              <a:t>Confidential — Investment Committee · Data as of 2026-06-30</a:t>
             </a:r>
           </a:p>
         </p:txBody>
       </p:sp>
       <p:sp>
         <p:nvSpPr>
-          <p:cNvPr id="13" name="TextBox 12"/>
+          <p:cNvPr id="14" name="TextBox 13"/>
           <p:cNvSpPr txBox="1"/>
           <p:nvPr/>
         </p:nvSpPr>
@@ -33650,6 +35185,48 @@
         </p:nvSpPr>
         <p:spPr>
           <a:xfrm>
+            <a:off x="5897880" y="310896"/>
+            <a:ext cx="4800600" cy="256032"/>
+          </a:xfrm>
+          <a:prstGeom prst="rect">
+            <a:avLst/>
+          </a:prstGeom>
+          <a:noFill/>
+        </p:spPr>
+        <p:txBody>
+          <a:bodyPr wrap="none" lIns="9144" rIns="9144" tIns="9144" bIns="9144" anchor="t">
+            <a:spAutoFit/>
+          </a:bodyPr>
+          <a:lstStyle/>
+          <a:p>
+            <a:pPr algn="r">
+              <a:spcAft>
+                <a:spcPts val="0"/>
+              </a:spcAft>
+              <a:defRPr sz="680" b="1">
+                <a:solidFill>
+                  <a:srgbClr val="4F6B00"/>
+                </a:solidFill>
+                <a:latin typeface="Inter"/>
+              </a:defRPr>
+            </a:pPr>
+            <a:r>
+              <a:rPr>
+                <a:latin typeface="Inter"/>
+              </a:rPr>
+              <a:t>Illustrative, Gradient Maintained — demo data, not the client's holdings or managers</a:t>
+            </a:r>
+          </a:p>
+        </p:txBody>
+      </p:sp>
+      <p:sp>
+        <p:nvSpPr>
+          <p:cNvPr id="4" name="TextBox 3"/>
+          <p:cNvSpPr txBox="1"/>
+          <p:nvPr/>
+        </p:nvSpPr>
+        <p:spPr>
+          <a:xfrm>
             <a:off x="640080" y="566928"/>
             <a:ext cx="10058400" cy="530352"/>
           </a:xfrm>
@@ -33686,7 +35263,7 @@
       </p:sp>
       <p:sp>
         <p:nvSpPr>
-          <p:cNvPr id="4" name="Rectangle 3"/>
+          <p:cNvPr id="5" name="Rectangle 4"/>
           <p:cNvSpPr/>
           <p:nvPr/>
         </p:nvSpPr>
@@ -33735,7 +35312,7 @@
       </p:sp>
       <p:sp>
         <p:nvSpPr>
-          <p:cNvPr id="5" name="Rectangle 4"/>
+          <p:cNvPr id="6" name="Rectangle 5"/>
           <p:cNvSpPr/>
           <p:nvPr/>
         </p:nvSpPr>
@@ -33784,7 +35361,7 @@
       </p:sp>
       <p:sp>
         <p:nvSpPr>
-          <p:cNvPr id="6" name="TextBox 5"/>
+          <p:cNvPr id="7" name="TextBox 6"/>
           <p:cNvSpPr txBox="1"/>
           <p:nvPr/>
         </p:nvSpPr>
@@ -33826,7 +35403,7 @@
       </p:sp>
       <p:sp>
         <p:nvSpPr>
-          <p:cNvPr id="7" name="TextBox 6"/>
+          <p:cNvPr id="8" name="TextBox 7"/>
           <p:cNvSpPr txBox="1"/>
           <p:nvPr/>
         </p:nvSpPr>
@@ -33861,14 +35438,14 @@
               <a:rPr>
                 <a:latin typeface="Inter"/>
               </a:rPr>
-              <a:t>PUBLIC-EQUITY REGIONAL EXPOSURE (TEST)</a:t>
+              <a:t>PUBLIC-EQUITY REGIONAL EXPOSURE</a:t>
             </a:r>
           </a:p>
         </p:txBody>
       </p:sp>
       <p:graphicFrame>
         <p:nvGraphicFramePr>
-          <p:cNvPr id="8" name="Chart 7"/>
+          <p:cNvPr id="9" name="Chart 8"/>
           <p:cNvGraphicFramePr>
             <a:graphicFrameLocks noGrp="1"/>
           </p:cNvGraphicFramePr>
@@ -33886,7 +35463,7 @@
       </p:graphicFrame>
       <p:sp>
         <p:nvSpPr>
-          <p:cNvPr id="9" name="Rectangle 8"/>
+          <p:cNvPr id="10" name="Rectangle 9"/>
           <p:cNvSpPr/>
           <p:nvPr/>
         </p:nvSpPr>
@@ -33935,7 +35512,7 @@
       </p:sp>
       <p:sp>
         <p:nvSpPr>
-          <p:cNvPr id="10" name="TextBox 9"/>
+          <p:cNvPr id="11" name="TextBox 10"/>
           <p:cNvSpPr txBox="1"/>
           <p:nvPr/>
         </p:nvSpPr>
@@ -33970,14 +35547,14 @@
               <a:rPr>
                 <a:latin typeface="Inter"/>
               </a:rPr>
-              <a:t>Sources: none cited</a:t>
+              <a:t>Sources: S1</a:t>
             </a:r>
           </a:p>
         </p:txBody>
       </p:sp>
       <p:sp>
         <p:nvSpPr>
-          <p:cNvPr id="11" name="TextBox 10"/>
+          <p:cNvPr id="12" name="TextBox 11"/>
           <p:cNvSpPr txBox="1"/>
           <p:nvPr/>
         </p:nvSpPr>
@@ -34012,14 +35589,14 @@
               <a:rPr>
                 <a:latin typeface="Inter"/>
               </a:rPr>
-              <a:t>TEST DATA — fictional portfolio for rendering tests only · Data as of 2026-06-30</a:t>
+              <a:t>Confidential — Investment Committee · Data as of 2026-06-30</a:t>
             </a:r>
           </a:p>
         </p:txBody>
       </p:sp>
       <p:sp>
         <p:nvSpPr>
-          <p:cNvPr id="12" name="TextBox 11"/>
+          <p:cNvPr id="13" name="TextBox 12"/>
           <p:cNvSpPr txBox="1"/>
           <p:nvPr/>
         </p:nvSpPr>
@@ -34134,6 +35711,48 @@
         </p:nvSpPr>
         <p:spPr>
           <a:xfrm>
+            <a:off x="5897880" y="310896"/>
+            <a:ext cx="4800600" cy="256032"/>
+          </a:xfrm>
+          <a:prstGeom prst="rect">
+            <a:avLst/>
+          </a:prstGeom>
+          <a:noFill/>
+        </p:spPr>
+        <p:txBody>
+          <a:bodyPr wrap="none" lIns="9144" rIns="9144" tIns="9144" bIns="9144" anchor="t">
+            <a:spAutoFit/>
+          </a:bodyPr>
+          <a:lstStyle/>
+          <a:p>
+            <a:pPr algn="r">
+              <a:spcAft>
+                <a:spcPts val="0"/>
+              </a:spcAft>
+              <a:defRPr sz="680" b="1">
+                <a:solidFill>
+                  <a:srgbClr val="4F6B00"/>
+                </a:solidFill>
+                <a:latin typeface="Inter"/>
+              </a:defRPr>
+            </a:pPr>
+            <a:r>
+              <a:rPr>
+                <a:latin typeface="Inter"/>
+              </a:rPr>
+              <a:t>Illustrative, Gradient Maintained — demo data, not the client's holdings or managers</a:t>
+            </a:r>
+          </a:p>
+        </p:txBody>
+      </p:sp>
+      <p:sp>
+        <p:nvSpPr>
+          <p:cNvPr id="4" name="TextBox 3"/>
+          <p:cNvSpPr txBox="1"/>
+          <p:nvPr/>
+        </p:nvSpPr>
+        <p:spPr>
+          <a:xfrm>
             <a:off x="640080" y="566928"/>
             <a:ext cx="10058400" cy="530352"/>
           </a:xfrm>
@@ -34170,7 +35789,7 @@
       </p:sp>
       <p:sp>
         <p:nvSpPr>
-          <p:cNvPr id="4" name="Rectangle 3"/>
+          <p:cNvPr id="5" name="Rectangle 4"/>
           <p:cNvSpPr/>
           <p:nvPr/>
         </p:nvSpPr>
@@ -34219,7 +35838,7 @@
       </p:sp>
       <p:sp>
         <p:nvSpPr>
-          <p:cNvPr id="5" name="Rectangle 4"/>
+          <p:cNvPr id="6" name="Rectangle 5"/>
           <p:cNvSpPr/>
           <p:nvPr/>
         </p:nvSpPr>
@@ -34268,7 +35887,7 @@
       </p:sp>
       <p:sp>
         <p:nvSpPr>
-          <p:cNvPr id="6" name="TextBox 5"/>
+          <p:cNvPr id="7" name="TextBox 6"/>
           <p:cNvSpPr txBox="1"/>
           <p:nvPr/>
         </p:nvSpPr>
@@ -34310,7 +35929,7 @@
       </p:sp>
       <p:sp>
         <p:nvSpPr>
-          <p:cNvPr id="7" name="TextBox 6"/>
+          <p:cNvPr id="8" name="TextBox 7"/>
           <p:cNvSpPr txBox="1"/>
           <p:nvPr/>
         </p:nvSpPr>
@@ -34352,7 +35971,7 @@
       </p:sp>
       <p:graphicFrame>
         <p:nvGraphicFramePr>
-          <p:cNvPr id="8" name="Table 7"/>
+          <p:cNvPr id="9" name="Table 8"/>
           <p:cNvGraphicFramePr>
             <a:graphicFrameLocks noGrp="1"/>
           </p:cNvGraphicFramePr>
@@ -34558,7 +36177,7 @@
                         <a:rPr>
                           <a:latin typeface="Inter"/>
                         </a:rPr>
-                        <a:t>Example Active Global Manager A (TEST)</a:t>
+                        <a:t>Example Active Global Manager A</a:t>
                       </a:r>
                     </a:p>
                   </a:txBody>
@@ -34722,7 +36341,7 @@
                         <a:rPr>
                           <a:latin typeface="Inter"/>
                         </a:rPr>
-                        <a:t>Example Active Global Manager B (TEST)</a:t>
+                        <a:t>Example Active Global Manager B</a:t>
                       </a:r>
                     </a:p>
                   </a:txBody>
@@ -34886,7 +36505,7 @@
                         <a:rPr>
                           <a:latin typeface="Inter"/>
                         </a:rPr>
-                        <a:t>Example Global Index Fund (TEST)</a:t>
+                        <a:t>Example Global Index Fund</a:t>
                       </a:r>
                     </a:p>
                   </a:txBody>
@@ -35050,7 +36669,7 @@
                         <a:rPr>
                           <a:latin typeface="Inter"/>
                         </a:rPr>
-                        <a:t>Example Emerging Manager (TEST)</a:t>
+                        <a:t>Example Emerging Manager</a:t>
                       </a:r>
                     </a:p>
                   </a:txBody>
@@ -35202,7 +36821,7 @@
       </p:graphicFrame>
       <p:sp>
         <p:nvSpPr>
-          <p:cNvPr id="9" name="TextBox 8"/>
+          <p:cNvPr id="10" name="TextBox 9"/>
           <p:cNvSpPr txBox="1"/>
           <p:nvPr/>
         </p:nvSpPr>
@@ -35237,14 +36856,14 @@
               <a:rPr>
                 <a:latin typeface="Inter"/>
               </a:rPr>
-              <a:t>Manager roles are from the fictional mandate; regional weights are returned portfolio analytics and retain their stated basis [S4][S8].</a:t>
+              <a:t>Manager roles are from the illustrative mandate; regional weights are returned portfolio analytics and retain their stated basis [S4][S8].</a:t>
             </a:r>
           </a:p>
         </p:txBody>
       </p:sp>
       <p:sp>
         <p:nvSpPr>
-          <p:cNvPr id="10" name="Rectangle 9"/>
+          <p:cNvPr id="11" name="Rectangle 10"/>
           <p:cNvSpPr/>
           <p:nvPr/>
         </p:nvSpPr>
@@ -35293,7 +36912,7 @@
       </p:sp>
       <p:sp>
         <p:nvSpPr>
-          <p:cNvPr id="11" name="TextBox 10"/>
+          <p:cNvPr id="12" name="TextBox 11"/>
           <p:cNvSpPr txBox="1"/>
           <p:nvPr/>
         </p:nvSpPr>
@@ -35335,7 +36954,7 @@
       </p:sp>
       <p:sp>
         <p:nvSpPr>
-          <p:cNvPr id="12" name="TextBox 11"/>
+          <p:cNvPr id="13" name="TextBox 12"/>
           <p:cNvSpPr txBox="1"/>
           <p:nvPr/>
         </p:nvSpPr>
@@ -35370,14 +36989,14 @@
               <a:rPr>
                 <a:latin typeface="Inter"/>
               </a:rPr>
-              <a:t>TEST DATA — fictional portfolio for rendering tests only · Data as of 2026-06-30</a:t>
+              <a:t>Confidential — Investment Committee · Data as of 2026-06-30</a:t>
             </a:r>
           </a:p>
         </p:txBody>
       </p:sp>
       <p:sp>
         <p:nvSpPr>
-          <p:cNvPr id="13" name="TextBox 12"/>
+          <p:cNvPr id="14" name="TextBox 13"/>
           <p:cNvSpPr txBox="1"/>
           <p:nvPr/>
         </p:nvSpPr>
@@ -35493,7 +37112,7 @@
         <p:spPr>
           <a:xfrm>
             <a:off x="640080" y="329184"/>
-            <a:ext cx="9875520" cy="182880"/>
+            <a:ext cx="5303520" cy="182880"/>
           </a:xfrm>
           <a:prstGeom prst="rect">
             <a:avLst/>
@@ -35534,6 +37153,48 @@
         </p:nvSpPr>
         <p:spPr>
           <a:xfrm>
+            <a:off x="5897880" y="310896"/>
+            <a:ext cx="4800600" cy="256032"/>
+          </a:xfrm>
+          <a:prstGeom prst="rect">
+            <a:avLst/>
+          </a:prstGeom>
+          <a:noFill/>
+        </p:spPr>
+        <p:txBody>
+          <a:bodyPr wrap="none" lIns="9144" rIns="9144" tIns="9144" bIns="9144" anchor="t">
+            <a:spAutoFit/>
+          </a:bodyPr>
+          <a:lstStyle/>
+          <a:p>
+            <a:pPr algn="r">
+              <a:spcAft>
+                <a:spcPts val="0"/>
+              </a:spcAft>
+              <a:defRPr sz="680" b="1">
+                <a:solidFill>
+                  <a:srgbClr val="4F6B00"/>
+                </a:solidFill>
+                <a:latin typeface="Inter"/>
+              </a:defRPr>
+            </a:pPr>
+            <a:r>
+              <a:rPr>
+                <a:latin typeface="Inter"/>
+              </a:rPr>
+              <a:t>Illustrative, Gradient Maintained — demo data, not the client's holdings or managers</a:t>
+            </a:r>
+          </a:p>
+        </p:txBody>
+      </p:sp>
+      <p:sp>
+        <p:nvSpPr>
+          <p:cNvPr id="5" name="TextBox 4"/>
+          <p:cNvSpPr txBox="1"/>
+          <p:nvPr/>
+        </p:nvSpPr>
+        <p:spPr>
+          <a:xfrm>
             <a:off x="640080" y="566928"/>
             <a:ext cx="10058400" cy="530352"/>
           </a:xfrm>
@@ -35570,7 +37231,7 @@
       </p:sp>
       <p:sp>
         <p:nvSpPr>
-          <p:cNvPr id="5" name="Rectangle 4"/>
+          <p:cNvPr id="6" name="Rectangle 5"/>
           <p:cNvSpPr/>
           <p:nvPr/>
         </p:nvSpPr>
@@ -35619,7 +37280,7 @@
       </p:sp>
       <p:sp>
         <p:nvSpPr>
-          <p:cNvPr id="6" name="Rectangle 5"/>
+          <p:cNvPr id="7" name="Rectangle 6"/>
           <p:cNvSpPr/>
           <p:nvPr/>
         </p:nvSpPr>
@@ -35668,7 +37329,7 @@
       </p:sp>
       <p:sp>
         <p:nvSpPr>
-          <p:cNvPr id="7" name="TextBox 6"/>
+          <p:cNvPr id="8" name="TextBox 7"/>
           <p:cNvSpPr txBox="1"/>
           <p:nvPr/>
         </p:nvSpPr>
@@ -35710,7 +37371,7 @@
       </p:sp>
       <p:sp>
         <p:nvSpPr>
-          <p:cNvPr id="8" name="TextBox 7"/>
+          <p:cNvPr id="9" name="TextBox 8"/>
           <p:cNvSpPr txBox="1"/>
           <p:nvPr/>
         </p:nvSpPr>
@@ -35752,7 +37413,7 @@
       </p:sp>
       <p:sp>
         <p:nvSpPr>
-          <p:cNvPr id="9" name="TextBox 8"/>
+          <p:cNvPr id="10" name="TextBox 9"/>
           <p:cNvSpPr txBox="1"/>
           <p:nvPr/>
         </p:nvSpPr>
@@ -35794,7 +37455,7 @@
       </p:sp>
       <p:sp>
         <p:nvSpPr>
-          <p:cNvPr id="10" name="Rectangle 9"/>
+          <p:cNvPr id="11" name="Rectangle 10"/>
           <p:cNvSpPr/>
           <p:nvPr/>
         </p:nvSpPr>
@@ -35843,7 +37504,7 @@
       </p:sp>
       <p:sp>
         <p:nvSpPr>
-          <p:cNvPr id="11" name="Oval 10"/>
+          <p:cNvPr id="12" name="Oval 11"/>
           <p:cNvSpPr/>
           <p:nvPr/>
         </p:nvSpPr>
@@ -35892,7 +37553,7 @@
       </p:sp>
       <p:sp>
         <p:nvSpPr>
-          <p:cNvPr id="12" name="Rectangle 11"/>
+          <p:cNvPr id="13" name="Rectangle 12"/>
           <p:cNvSpPr/>
           <p:nvPr/>
         </p:nvSpPr>
@@ -35941,7 +37602,7 @@
       </p:sp>
       <p:sp>
         <p:nvSpPr>
-          <p:cNvPr id="13" name="TextBox 12"/>
+          <p:cNvPr id="14" name="TextBox 13"/>
           <p:cNvSpPr txBox="1"/>
           <p:nvPr/>
         </p:nvSpPr>
@@ -35983,7 +37644,7 @@
       </p:sp>
       <p:sp>
         <p:nvSpPr>
-          <p:cNvPr id="14" name="Rectangle 13"/>
+          <p:cNvPr id="15" name="Rectangle 14"/>
           <p:cNvSpPr/>
           <p:nvPr/>
         </p:nvSpPr>
@@ -36032,7 +37693,7 @@
       </p:sp>
       <p:sp>
         <p:nvSpPr>
-          <p:cNvPr id="15" name="Oval 14"/>
+          <p:cNvPr id="16" name="Oval 15"/>
           <p:cNvSpPr/>
           <p:nvPr/>
         </p:nvSpPr>
@@ -36081,7 +37742,7 @@
       </p:sp>
       <p:sp>
         <p:nvSpPr>
-          <p:cNvPr id="16" name="Rectangle 15"/>
+          <p:cNvPr id="17" name="Rectangle 16"/>
           <p:cNvSpPr/>
           <p:nvPr/>
         </p:nvSpPr>
@@ -36130,7 +37791,7 @@
       </p:sp>
       <p:sp>
         <p:nvSpPr>
-          <p:cNvPr id="17" name="TextBox 16"/>
+          <p:cNvPr id="18" name="TextBox 17"/>
           <p:cNvSpPr txBox="1"/>
           <p:nvPr/>
         </p:nvSpPr>
@@ -36172,7 +37833,7 @@
       </p:sp>
       <p:sp>
         <p:nvSpPr>
-          <p:cNvPr id="18" name="Rectangle 17"/>
+          <p:cNvPr id="19" name="Rectangle 18"/>
           <p:cNvSpPr/>
           <p:nvPr/>
         </p:nvSpPr>
@@ -36221,7 +37882,7 @@
       </p:sp>
       <p:sp>
         <p:nvSpPr>
-          <p:cNvPr id="19" name="Oval 18"/>
+          <p:cNvPr id="20" name="Oval 19"/>
           <p:cNvSpPr/>
           <p:nvPr/>
         </p:nvSpPr>
@@ -36270,7 +37931,7 @@
       </p:sp>
       <p:sp>
         <p:nvSpPr>
-          <p:cNvPr id="20" name="Rectangle 19"/>
+          <p:cNvPr id="21" name="Rectangle 20"/>
           <p:cNvSpPr/>
           <p:nvPr/>
         </p:nvSpPr>
@@ -36319,7 +37980,7 @@
       </p:sp>
       <p:sp>
         <p:nvSpPr>
-          <p:cNvPr id="21" name="Rectangle 20"/>
+          <p:cNvPr id="22" name="Rectangle 21"/>
           <p:cNvSpPr/>
           <p:nvPr/>
         </p:nvSpPr>
@@ -36368,7 +38029,7 @@
       </p:sp>
       <p:sp>
         <p:nvSpPr>
-          <p:cNvPr id="22" name="TextBox 21"/>
+          <p:cNvPr id="23" name="TextBox 22"/>
           <p:cNvSpPr txBox="1"/>
           <p:nvPr/>
         </p:nvSpPr>
@@ -36403,14 +38064,14 @@
               <a:rPr>
                 <a:latin typeface="Inter"/>
               </a:rPr>
-              <a:t>Sources: none cited</a:t>
+              <a:t>Sources: S1</a:t>
             </a:r>
           </a:p>
         </p:txBody>
       </p:sp>
       <p:sp>
         <p:nvSpPr>
-          <p:cNvPr id="23" name="TextBox 22"/>
+          <p:cNvPr id="24" name="TextBox 23"/>
           <p:cNvSpPr txBox="1"/>
           <p:nvPr/>
         </p:nvSpPr>
@@ -36445,14 +38106,14 @@
               <a:rPr>
                 <a:latin typeface="Inter"/>
               </a:rPr>
-              <a:t>TEST DATA — fictional portfolio for rendering tests only · Data as of 2026-06-30</a:t>
+              <a:t>Confidential — Investment Committee · Data as of 2026-06-30</a:t>
             </a:r>
           </a:p>
         </p:txBody>
       </p:sp>
       <p:sp>
         <p:nvSpPr>
-          <p:cNvPr id="24" name="TextBox 23"/>
+          <p:cNvPr id="25" name="TextBox 24"/>
           <p:cNvSpPr txBox="1"/>
           <p:nvPr/>
         </p:nvSpPr>
@@ -36568,7 +38229,7 @@
         <p:spPr>
           <a:xfrm>
             <a:off x="640080" y="329184"/>
-            <a:ext cx="9875520" cy="182880"/>
+            <a:ext cx="5303520" cy="182880"/>
           </a:xfrm>
           <a:prstGeom prst="rect">
             <a:avLst/>
@@ -36609,6 +38270,48 @@
         </p:nvSpPr>
         <p:spPr>
           <a:xfrm>
+            <a:off x="5897880" y="310896"/>
+            <a:ext cx="4800600" cy="256032"/>
+          </a:xfrm>
+          <a:prstGeom prst="rect">
+            <a:avLst/>
+          </a:prstGeom>
+          <a:noFill/>
+        </p:spPr>
+        <p:txBody>
+          <a:bodyPr wrap="none" lIns="9144" rIns="9144" tIns="9144" bIns="9144" anchor="t">
+            <a:spAutoFit/>
+          </a:bodyPr>
+          <a:lstStyle/>
+          <a:p>
+            <a:pPr algn="r">
+              <a:spcAft>
+                <a:spcPts val="0"/>
+              </a:spcAft>
+              <a:defRPr sz="680" b="1">
+                <a:solidFill>
+                  <a:srgbClr val="4F6B00"/>
+                </a:solidFill>
+                <a:latin typeface="Inter"/>
+              </a:defRPr>
+            </a:pPr>
+            <a:r>
+              <a:rPr>
+                <a:latin typeface="Inter"/>
+              </a:rPr>
+              <a:t>Illustrative, Gradient Maintained — demo data, not the client's holdings or managers</a:t>
+            </a:r>
+          </a:p>
+        </p:txBody>
+      </p:sp>
+      <p:sp>
+        <p:nvSpPr>
+          <p:cNvPr id="5" name="TextBox 4"/>
+          <p:cNvSpPr txBox="1"/>
+          <p:nvPr/>
+        </p:nvSpPr>
+        <p:spPr>
+          <a:xfrm>
             <a:off x="640080" y="566928"/>
             <a:ext cx="10058400" cy="530352"/>
           </a:xfrm>
@@ -36645,7 +38348,7 @@
       </p:sp>
       <p:sp>
         <p:nvSpPr>
-          <p:cNvPr id="5" name="Rectangle 4"/>
+          <p:cNvPr id="6" name="Rectangle 5"/>
           <p:cNvSpPr/>
           <p:nvPr/>
         </p:nvSpPr>
@@ -36694,7 +38397,7 @@
       </p:sp>
       <p:sp>
         <p:nvSpPr>
-          <p:cNvPr id="6" name="Rectangle 5"/>
+          <p:cNvPr id="7" name="Rectangle 6"/>
           <p:cNvSpPr/>
           <p:nvPr/>
         </p:nvSpPr>
@@ -36743,7 +38446,7 @@
       </p:sp>
       <p:sp>
         <p:nvSpPr>
-          <p:cNvPr id="7" name="TextBox 6"/>
+          <p:cNvPr id="8" name="TextBox 7"/>
           <p:cNvSpPr txBox="1"/>
           <p:nvPr/>
         </p:nvSpPr>
@@ -36785,7 +38488,7 @@
       </p:sp>
       <p:sp>
         <p:nvSpPr>
-          <p:cNvPr id="8" name="TextBox 7"/>
+          <p:cNvPr id="9" name="TextBox 8"/>
           <p:cNvSpPr txBox="1"/>
           <p:nvPr/>
         </p:nvSpPr>
@@ -36827,7 +38530,7 @@
       </p:sp>
       <p:graphicFrame>
         <p:nvGraphicFramePr>
-          <p:cNvPr id="9" name="Chart 8"/>
+          <p:cNvPr id="10" name="Chart 9"/>
           <p:cNvGraphicFramePr>
             <a:graphicFrameLocks noGrp="1"/>
           </p:cNvGraphicFramePr>
@@ -36845,7 +38548,7 @@
       </p:graphicFrame>
       <p:sp>
         <p:nvSpPr>
-          <p:cNvPr id="10" name="Rectangle 9"/>
+          <p:cNvPr id="11" name="Rectangle 10"/>
           <p:cNvSpPr/>
           <p:nvPr/>
         </p:nvSpPr>
@@ -36894,7 +38597,7 @@
       </p:sp>
       <p:sp>
         <p:nvSpPr>
-          <p:cNvPr id="11" name="TextBox 10"/>
+          <p:cNvPr id="12" name="TextBox 11"/>
           <p:cNvSpPr txBox="1"/>
           <p:nvPr/>
         </p:nvSpPr>
@@ -36929,14 +38632,14 @@
               <a:rPr>
                 <a:latin typeface="Inter"/>
               </a:rPr>
-              <a:t>Sources: none cited</a:t>
+              <a:t>Sources: S1</a:t>
             </a:r>
           </a:p>
         </p:txBody>
       </p:sp>
       <p:sp>
         <p:nvSpPr>
-          <p:cNvPr id="12" name="TextBox 11"/>
+          <p:cNvPr id="13" name="TextBox 12"/>
           <p:cNvSpPr txBox="1"/>
           <p:nvPr/>
         </p:nvSpPr>
@@ -36971,14 +38674,14 @@
               <a:rPr>
                 <a:latin typeface="Inter"/>
               </a:rPr>
-              <a:t>TEST DATA — fictional portfolio for rendering tests only · Data as of 2026-06-30</a:t>
+              <a:t>Confidential — Investment Committee · Data as of 2026-06-30</a:t>
             </a:r>
           </a:p>
         </p:txBody>
       </p:sp>
       <p:sp>
         <p:nvSpPr>
-          <p:cNvPr id="13" name="TextBox 12"/>
+          <p:cNvPr id="14" name="TextBox 13"/>
           <p:cNvSpPr txBox="1"/>
           <p:nvPr/>
         </p:nvSpPr>

--- a/plugins/gradient-cio/assets/examples/gradient-portfolio-construction-global-public-equity.pptx
+++ b/plugins/gradient-cio/assets/examples/gradient-portfolio-construction-global-public-equity.pptx
@@ -35,6 +35,7 @@
     <ns0:sldId id="283" ns1:id="rId34"/>
     <ns0:sldId id="284" ns1:id="rId35"/>
     <ns0:sldId id="285" ns1:id="rId36"/>
+    <ns0:sldId id="286" ns1:id="rId37"/>
   </ns0:sldIdLst>
   <ns0:sldSz cx="12191695" cy="6858000" type="screen16x9"/>
   <ns0:notesSz cx="6858000" cy="9144000"/>
@@ -5546,224 +5547,7 @@
       </p:sp>
       <p:sp>
         <p:nvSpPr>
-          <p:cNvPr id="17" name="Rectangle 16"/>
-          <p:cNvSpPr/>
-          <p:nvPr/>
-        </p:nvSpPr>
-        <p:spPr>
-          <a:xfrm>
-            <a:off x="685800" y="5687568"/>
-            <a:ext cx="3337560" cy="530352"/>
-          </a:xfrm>
-          <a:prstGeom prst="rect">
-            <a:avLst/>
-          </a:prstGeom>
-          <a:solidFill>
-            <a:srgbClr val="F2A93B"/>
-          </a:solidFill>
-          <a:ln>
-            <a:solidFill>
-              <a:srgbClr val="F2A93B"/>
-            </a:solidFill>
-          </a:ln>
-        </p:spPr>
-        <p:style>
-          <a:lnRef idx="1">
-            <a:schemeClr val="accent1"/>
-          </a:lnRef>
-          <a:fillRef idx="3">
-            <a:schemeClr val="accent1"/>
-          </a:fillRef>
-          <a:effectRef idx="2">
-            <a:schemeClr val="accent1"/>
-          </a:effectRef>
-          <a:fontRef idx="minor">
-            <a:schemeClr val="lt1"/>
-          </a:fontRef>
-        </p:style>
-        <p:txBody>
-          <a:bodyPr rtlCol="0" anchor="ctr"/>
-          <a:lstStyle/>
-          <a:p>
-            <a:pPr algn="ctr">
-              <a:defRPr>
-                <a:latin typeface="Inter"/>
-              </a:defRPr>
-            </a:pPr>
-          </a:p>
-        </p:txBody>
-      </p:sp>
-      <p:sp>
-        <p:nvSpPr>
-          <p:cNvPr id="18" name="TextBox 17"/>
-          <p:cNvSpPr txBox="1"/>
-          <p:nvPr/>
-        </p:nvSpPr>
-        <p:spPr>
-          <a:xfrm>
-            <a:off x="822960" y="5760720"/>
-            <a:ext cx="3063240" cy="128016"/>
-          </a:xfrm>
-          <a:prstGeom prst="rect">
-            <a:avLst/>
-          </a:prstGeom>
-          <a:noFill/>
-        </p:spPr>
-        <p:txBody>
-          <a:bodyPr wrap="none" lIns="9144" rIns="9144" tIns="9144" bIns="9144" anchor="t">
-            <a:spAutoFit/>
-          </a:bodyPr>
-          <a:lstStyle/>
-          <a:p>
-            <a:pPr algn="l">
-              <a:spcAft>
-                <a:spcPts val="0"/>
-              </a:spcAft>
-              <a:defRPr sz="620" b="1">
-                <a:solidFill>
-                  <a:srgbClr val="0D1117"/>
-                </a:solidFill>
-                <a:latin typeface="Inter"/>
-              </a:defRPr>
-            </a:pPr>
-            <a:r>
-              <a:rPr>
-                <a:latin typeface="Inter"/>
-              </a:rPr>
-              <a:t>OVERALL VIEW</a:t>
-            </a:r>
-          </a:p>
-        </p:txBody>
-      </p:sp>
-      <p:sp>
-        <p:nvSpPr>
-          <p:cNvPr id="19" name="TextBox 18"/>
-          <p:cNvSpPr txBox="1"/>
-          <p:nvPr/>
-        </p:nvSpPr>
-        <p:spPr>
-          <a:xfrm>
-            <a:off x="822960" y="5916168"/>
-            <a:ext cx="3063240" cy="182880"/>
-          </a:xfrm>
-          <a:prstGeom prst="rect">
-            <a:avLst/>
-          </a:prstGeom>
-          <a:noFill/>
-        </p:spPr>
-        <p:txBody>
-          <a:bodyPr wrap="none" lIns="9144" rIns="9144" tIns="9144" bIns="9144" anchor="t">
-            <a:spAutoFit/>
-          </a:bodyPr>
-          <a:lstStyle/>
-          <a:p>
-            <a:pPr algn="l">
-              <a:spcAft>
-                <a:spcPts val="0"/>
-              </a:spcAft>
-              <a:defRPr sz="900" b="1">
-                <a:solidFill>
-                  <a:srgbClr val="0D1117"/>
-                </a:solidFill>
-                <a:latin typeface="Inter"/>
-              </a:defRPr>
-            </a:pPr>
-            <a:r>
-              <a:rPr>
-                <a:latin typeface="Inter"/>
-              </a:rPr>
-              <a:t>Manager and issuer concentration on watch</a:t>
-            </a:r>
-          </a:p>
-        </p:txBody>
-      </p:sp>
-      <p:sp>
-        <p:nvSpPr>
-          <p:cNvPr id="20" name="TextBox 19"/>
-          <p:cNvSpPr txBox="1"/>
-          <p:nvPr/>
-        </p:nvSpPr>
-        <p:spPr>
-          <a:xfrm>
-            <a:off x="4297680" y="5733288"/>
-            <a:ext cx="3108960" cy="164592"/>
-          </a:xfrm>
-          <a:prstGeom prst="rect">
-            <a:avLst/>
-          </a:prstGeom>
-          <a:noFill/>
-        </p:spPr>
-        <p:txBody>
-          <a:bodyPr wrap="none" lIns="9144" rIns="9144" tIns="9144" bIns="9144" anchor="t">
-            <a:spAutoFit/>
-          </a:bodyPr>
-          <a:lstStyle/>
-          <a:p>
-            <a:pPr algn="l">
-              <a:spcAft>
-                <a:spcPts val="0"/>
-              </a:spcAft>
-              <a:defRPr sz="650" b="1">
-                <a:solidFill>
-                  <a:srgbClr val="8A94A1"/>
-                </a:solidFill>
-                <a:latin typeface="Inter"/>
-              </a:defRPr>
-            </a:pPr>
-            <a:r>
-              <a:rPr>
-                <a:latin typeface="Inter"/>
-              </a:rPr>
-              <a:t>SCOPE REVIEWED</a:t>
-            </a:r>
-          </a:p>
-        </p:txBody>
-      </p:sp>
-      <p:sp>
-        <p:nvSpPr>
-          <p:cNvPr id="21" name="TextBox 20"/>
-          <p:cNvSpPr txBox="1"/>
-          <p:nvPr/>
-        </p:nvSpPr>
-        <p:spPr>
-          <a:xfrm>
-            <a:off x="4297680" y="5934456"/>
-            <a:ext cx="3108960" cy="201168"/>
-          </a:xfrm>
-          <a:prstGeom prst="rect">
-            <a:avLst/>
-          </a:prstGeom>
-          <a:noFill/>
-        </p:spPr>
-        <p:txBody>
-          <a:bodyPr wrap="none" lIns="9144" rIns="9144" tIns="9144" bIns="9144" anchor="t">
-            <a:spAutoFit/>
-          </a:bodyPr>
-          <a:lstStyle/>
-          <a:p>
-            <a:pPr algn="l">
-              <a:spcAft>
-                <a:spcPts val="0"/>
-              </a:spcAft>
-              <a:defRPr sz="800" b="1">
-                <a:solidFill>
-                  <a:srgbClr val="FFFFFF"/>
-                </a:solidFill>
-                <a:latin typeface="Inter"/>
-              </a:defRPr>
-            </a:pPr>
-            <a:r>
-              <a:rPr>
-                <a:latin typeface="Inter"/>
-              </a:rPr>
-              <a:t>9 of 10 · Partial</a:t>
-            </a:r>
-          </a:p>
-        </p:txBody>
-      </p:sp>
-      <p:sp>
-        <p:nvSpPr>
-          <p:cNvPr id="22" name="TextBox 21"/>
+          <p:cNvPr id="17" name="TextBox 16"/>
           <p:cNvSpPr txBox="1"/>
           <p:nvPr/>
         </p:nvSpPr>
@@ -5805,7 +5589,7 @@
       </p:sp>
       <p:sp>
         <p:nvSpPr>
-          <p:cNvPr id="23" name="TextBox 22"/>
+          <p:cNvPr id="18" name="TextBox 17"/>
           <p:cNvSpPr txBox="1"/>
           <p:nvPr/>
         </p:nvSpPr>
@@ -5847,7 +5631,7 @@
       </p:sp>
       <p:sp>
         <p:nvSpPr>
-          <p:cNvPr id="24" name="TextBox 23"/>
+          <p:cNvPr id="19" name="TextBox 18"/>
           <p:cNvSpPr txBox="1"/>
           <p:nvPr/>
         </p:nvSpPr>
@@ -5963,7 +5747,7 @@
         <p:spPr>
           <a:xfrm>
             <a:off x="640080" y="329184"/>
-            <a:ext cx="5303520" cy="182880"/>
+            <a:ext cx="9875520" cy="182880"/>
           </a:xfrm>
           <a:prstGeom prst="rect">
             <a:avLst/>
@@ -6004,48 +5788,6 @@
         </p:nvSpPr>
         <p:spPr>
           <a:xfrm>
-            <a:off x="5897880" y="310896"/>
-            <a:ext cx="4800600" cy="256032"/>
-          </a:xfrm>
-          <a:prstGeom prst="rect">
-            <a:avLst/>
-          </a:prstGeom>
-          <a:noFill/>
-        </p:spPr>
-        <p:txBody>
-          <a:bodyPr wrap="none" lIns="9144" rIns="9144" tIns="9144" bIns="9144" anchor="t">
-            <a:spAutoFit/>
-          </a:bodyPr>
-          <a:lstStyle/>
-          <a:p>
-            <a:pPr algn="r">
-              <a:spcAft>
-                <a:spcPts val="0"/>
-              </a:spcAft>
-              <a:defRPr sz="680" b="1">
-                <a:solidFill>
-                  <a:srgbClr val="4F6B00"/>
-                </a:solidFill>
-                <a:latin typeface="Inter"/>
-              </a:defRPr>
-            </a:pPr>
-            <a:r>
-              <a:rPr>
-                <a:latin typeface="Inter"/>
-              </a:rPr>
-              <a:t>Illustrative, Gradient Maintained — demo data, not the client's holdings or managers</a:t>
-            </a:r>
-          </a:p>
-        </p:txBody>
-      </p:sp>
-      <p:sp>
-        <p:nvSpPr>
-          <p:cNvPr id="5" name="TextBox 4"/>
-          <p:cNvSpPr txBox="1"/>
-          <p:nvPr/>
-        </p:nvSpPr>
-        <p:spPr>
-          <a:xfrm>
             <a:off x="640080" y="566928"/>
             <a:ext cx="10058400" cy="530352"/>
           </a:xfrm>
@@ -6082,7 +5824,7 @@
       </p:sp>
       <p:sp>
         <p:nvSpPr>
-          <p:cNvPr id="6" name="Rectangle 5"/>
+          <p:cNvPr id="5" name="Rectangle 4"/>
           <p:cNvSpPr/>
           <p:nvPr/>
         </p:nvSpPr>
@@ -6131,7 +5873,7 @@
       </p:sp>
       <p:sp>
         <p:nvSpPr>
-          <p:cNvPr id="7" name="Rectangle 6"/>
+          <p:cNvPr id="6" name="Rectangle 5"/>
           <p:cNvSpPr/>
           <p:nvPr/>
         </p:nvSpPr>
@@ -6180,7 +5922,7 @@
       </p:sp>
       <p:sp>
         <p:nvSpPr>
-          <p:cNvPr id="8" name="TextBox 7"/>
+          <p:cNvPr id="7" name="TextBox 6"/>
           <p:cNvSpPr txBox="1"/>
           <p:nvPr/>
         </p:nvSpPr>
@@ -6222,7 +5964,7 @@
       </p:sp>
       <p:sp>
         <p:nvSpPr>
-          <p:cNvPr id="9" name="TextBox 8"/>
+          <p:cNvPr id="8" name="TextBox 7"/>
           <p:cNvSpPr txBox="1"/>
           <p:nvPr/>
         </p:nvSpPr>
@@ -6264,7 +6006,7 @@
       </p:sp>
       <p:graphicFrame>
         <p:nvGraphicFramePr>
-          <p:cNvPr id="10" name="Chart 9"/>
+          <p:cNvPr id="9" name="Chart 8"/>
           <p:cNvGraphicFramePr>
             <a:graphicFrameLocks noGrp="1"/>
           </p:cNvGraphicFramePr>
@@ -6282,7 +6024,7 @@
       </p:graphicFrame>
       <p:sp>
         <p:nvSpPr>
-          <p:cNvPr id="11" name="Rectangle 10"/>
+          <p:cNvPr id="10" name="Rectangle 9"/>
           <p:cNvSpPr/>
           <p:nvPr/>
         </p:nvSpPr>
@@ -6331,7 +6073,7 @@
       </p:sp>
       <p:sp>
         <p:nvSpPr>
-          <p:cNvPr id="12" name="TextBox 11"/>
+          <p:cNvPr id="11" name="TextBox 10"/>
           <p:cNvSpPr txBox="1"/>
           <p:nvPr/>
         </p:nvSpPr>
@@ -6373,7 +6115,7 @@
       </p:sp>
       <p:sp>
         <p:nvSpPr>
-          <p:cNvPr id="13" name="TextBox 12"/>
+          <p:cNvPr id="12" name="TextBox 11"/>
           <p:cNvSpPr txBox="1"/>
           <p:nvPr/>
         </p:nvSpPr>
@@ -6415,7 +6157,7 @@
       </p:sp>
       <p:sp>
         <p:nvSpPr>
-          <p:cNvPr id="14" name="TextBox 13"/>
+          <p:cNvPr id="13" name="TextBox 12"/>
           <p:cNvSpPr txBox="1"/>
           <p:nvPr/>
         </p:nvSpPr>
@@ -6531,7 +6273,7 @@
         <p:spPr>
           <a:xfrm>
             <a:off x="640080" y="329184"/>
-            <a:ext cx="5303520" cy="182880"/>
+            <a:ext cx="9875520" cy="182880"/>
           </a:xfrm>
           <a:prstGeom prst="rect">
             <a:avLst/>
@@ -6572,48 +6314,6 @@
         </p:nvSpPr>
         <p:spPr>
           <a:xfrm>
-            <a:off x="5897880" y="310896"/>
-            <a:ext cx="4800600" cy="256032"/>
-          </a:xfrm>
-          <a:prstGeom prst="rect">
-            <a:avLst/>
-          </a:prstGeom>
-          <a:noFill/>
-        </p:spPr>
-        <p:txBody>
-          <a:bodyPr wrap="none" lIns="9144" rIns="9144" tIns="9144" bIns="9144" anchor="t">
-            <a:spAutoFit/>
-          </a:bodyPr>
-          <a:lstStyle/>
-          <a:p>
-            <a:pPr algn="r">
-              <a:spcAft>
-                <a:spcPts val="0"/>
-              </a:spcAft>
-              <a:defRPr sz="680" b="1">
-                <a:solidFill>
-                  <a:srgbClr val="4F6B00"/>
-                </a:solidFill>
-                <a:latin typeface="Inter"/>
-              </a:defRPr>
-            </a:pPr>
-            <a:r>
-              <a:rPr>
-                <a:latin typeface="Inter"/>
-              </a:rPr>
-              <a:t>Illustrative, Gradient Maintained — demo data, not the client's holdings or managers</a:t>
-            </a:r>
-          </a:p>
-        </p:txBody>
-      </p:sp>
-      <p:sp>
-        <p:nvSpPr>
-          <p:cNvPr id="5" name="TextBox 4"/>
-          <p:cNvSpPr txBox="1"/>
-          <p:nvPr/>
-        </p:nvSpPr>
-        <p:spPr>
-          <a:xfrm>
             <a:off x="640080" y="566928"/>
             <a:ext cx="10058400" cy="530352"/>
           </a:xfrm>
@@ -6650,7 +6350,7 @@
       </p:sp>
       <p:sp>
         <p:nvSpPr>
-          <p:cNvPr id="6" name="Rectangle 5"/>
+          <p:cNvPr id="5" name="Rectangle 4"/>
           <p:cNvSpPr/>
           <p:nvPr/>
         </p:nvSpPr>
@@ -6699,7 +6399,7 @@
       </p:sp>
       <p:sp>
         <p:nvSpPr>
-          <p:cNvPr id="7" name="Rectangle 6"/>
+          <p:cNvPr id="6" name="Rectangle 5"/>
           <p:cNvSpPr/>
           <p:nvPr/>
         </p:nvSpPr>
@@ -6748,7 +6448,7 @@
       </p:sp>
       <p:sp>
         <p:nvSpPr>
-          <p:cNvPr id="8" name="TextBox 7"/>
+          <p:cNvPr id="7" name="TextBox 6"/>
           <p:cNvSpPr txBox="1"/>
           <p:nvPr/>
         </p:nvSpPr>
@@ -6790,7 +6490,7 @@
       </p:sp>
       <p:sp>
         <p:nvSpPr>
-          <p:cNvPr id="9" name="TextBox 8"/>
+          <p:cNvPr id="8" name="TextBox 7"/>
           <p:cNvSpPr txBox="1"/>
           <p:nvPr/>
         </p:nvSpPr>
@@ -6832,7 +6532,7 @@
       </p:sp>
       <p:graphicFrame>
         <p:nvGraphicFramePr>
-          <p:cNvPr id="10" name="Table 9"/>
+          <p:cNvPr id="9" name="Table 8"/>
           <p:cNvGraphicFramePr>
             <a:graphicFrameLocks noGrp="1"/>
           </p:cNvGraphicFramePr>
@@ -7518,7 +7218,7 @@
       </p:graphicFrame>
       <p:sp>
         <p:nvSpPr>
-          <p:cNvPr id="11" name="Rectangle 10"/>
+          <p:cNvPr id="10" name="Rectangle 9"/>
           <p:cNvSpPr/>
           <p:nvPr/>
         </p:nvSpPr>
@@ -7567,7 +7267,7 @@
       </p:sp>
       <p:sp>
         <p:nvSpPr>
-          <p:cNvPr id="12" name="Rectangle 11"/>
+          <p:cNvPr id="11" name="Rectangle 10"/>
           <p:cNvSpPr/>
           <p:nvPr/>
         </p:nvSpPr>
@@ -7616,7 +7316,7 @@
       </p:sp>
       <p:sp>
         <p:nvSpPr>
-          <p:cNvPr id="13" name="TextBox 12"/>
+          <p:cNvPr id="12" name="TextBox 11"/>
           <p:cNvSpPr txBox="1"/>
           <p:nvPr/>
         </p:nvSpPr>
@@ -7658,7 +7358,7 @@
       </p:sp>
       <p:sp>
         <p:nvSpPr>
-          <p:cNvPr id="14" name="TextBox 13"/>
+          <p:cNvPr id="13" name="TextBox 12"/>
           <p:cNvSpPr txBox="1"/>
           <p:nvPr/>
         </p:nvSpPr>
@@ -7700,7 +7400,7 @@
       </p:sp>
       <p:sp>
         <p:nvSpPr>
-          <p:cNvPr id="15" name="TextBox 14"/>
+          <p:cNvPr id="14" name="TextBox 13"/>
           <p:cNvSpPr txBox="1"/>
           <p:nvPr/>
         </p:nvSpPr>
@@ -7742,7 +7442,7 @@
       </p:sp>
       <p:sp>
         <p:nvSpPr>
-          <p:cNvPr id="16" name="Rectangle 15"/>
+          <p:cNvPr id="15" name="Rectangle 14"/>
           <p:cNvSpPr/>
           <p:nvPr/>
         </p:nvSpPr>
@@ -7791,7 +7491,7 @@
       </p:sp>
       <p:sp>
         <p:nvSpPr>
-          <p:cNvPr id="17" name="TextBox 16"/>
+          <p:cNvPr id="16" name="TextBox 15"/>
           <p:cNvSpPr txBox="1"/>
           <p:nvPr/>
         </p:nvSpPr>
@@ -7833,7 +7533,7 @@
       </p:sp>
       <p:sp>
         <p:nvSpPr>
-          <p:cNvPr id="18" name="TextBox 17"/>
+          <p:cNvPr id="17" name="TextBox 16"/>
           <p:cNvSpPr txBox="1"/>
           <p:nvPr/>
         </p:nvSpPr>
@@ -7875,7 +7575,7 @@
       </p:sp>
       <p:sp>
         <p:nvSpPr>
-          <p:cNvPr id="19" name="TextBox 18"/>
+          <p:cNvPr id="18" name="TextBox 17"/>
           <p:cNvSpPr txBox="1"/>
           <p:nvPr/>
         </p:nvSpPr>
@@ -7990,48 +7690,6 @@
         </p:nvSpPr>
         <p:spPr>
           <a:xfrm>
-            <a:off x="5897880" y="310896"/>
-            <a:ext cx="4800600" cy="256032"/>
-          </a:xfrm>
-          <a:prstGeom prst="rect">
-            <a:avLst/>
-          </a:prstGeom>
-          <a:noFill/>
-        </p:spPr>
-        <p:txBody>
-          <a:bodyPr wrap="none" lIns="9144" rIns="9144" tIns="9144" bIns="9144" anchor="t">
-            <a:spAutoFit/>
-          </a:bodyPr>
-          <a:lstStyle/>
-          <a:p>
-            <a:pPr algn="r">
-              <a:spcAft>
-                <a:spcPts val="0"/>
-              </a:spcAft>
-              <a:defRPr sz="680" b="1">
-                <a:solidFill>
-                  <a:srgbClr val="4F6B00"/>
-                </a:solidFill>
-                <a:latin typeface="Inter"/>
-              </a:defRPr>
-            </a:pPr>
-            <a:r>
-              <a:rPr>
-                <a:latin typeface="Inter"/>
-              </a:rPr>
-              <a:t>Illustrative, Gradient Maintained — demo data, not the client's holdings or managers</a:t>
-            </a:r>
-          </a:p>
-        </p:txBody>
-      </p:sp>
-      <p:sp>
-        <p:nvSpPr>
-          <p:cNvPr id="4" name="TextBox 3"/>
-          <p:cNvSpPr txBox="1"/>
-          <p:nvPr/>
-        </p:nvSpPr>
-        <p:spPr>
-          <a:xfrm>
             <a:off x="640080" y="566928"/>
             <a:ext cx="10058400" cy="530352"/>
           </a:xfrm>
@@ -8068,7 +7726,7 @@
       </p:sp>
       <p:sp>
         <p:nvSpPr>
-          <p:cNvPr id="5" name="Rectangle 4"/>
+          <p:cNvPr id="4" name="Rectangle 3"/>
           <p:cNvSpPr/>
           <p:nvPr/>
         </p:nvSpPr>
@@ -8117,7 +7775,7 @@
       </p:sp>
       <p:sp>
         <p:nvSpPr>
-          <p:cNvPr id="6" name="Rectangle 5"/>
+          <p:cNvPr id="5" name="Rectangle 4"/>
           <p:cNvSpPr/>
           <p:nvPr/>
         </p:nvSpPr>
@@ -8166,7 +7824,7 @@
       </p:sp>
       <p:sp>
         <p:nvSpPr>
-          <p:cNvPr id="7" name="TextBox 6"/>
+          <p:cNvPr id="6" name="TextBox 5"/>
           <p:cNvSpPr txBox="1"/>
           <p:nvPr/>
         </p:nvSpPr>
@@ -8208,7 +7866,7 @@
       </p:sp>
       <p:sp>
         <p:nvSpPr>
-          <p:cNvPr id="8" name="TextBox 7"/>
+          <p:cNvPr id="7" name="TextBox 6"/>
           <p:cNvSpPr txBox="1"/>
           <p:nvPr/>
         </p:nvSpPr>
@@ -8250,7 +7908,7 @@
       </p:sp>
       <p:graphicFrame>
         <p:nvGraphicFramePr>
-          <p:cNvPr id="9" name="Chart 8"/>
+          <p:cNvPr id="8" name="Chart 7"/>
           <p:cNvGraphicFramePr>
             <a:graphicFrameLocks noGrp="1"/>
           </p:cNvGraphicFramePr>
@@ -8268,7 +7926,7 @@
       </p:graphicFrame>
       <p:sp>
         <p:nvSpPr>
-          <p:cNvPr id="10" name="Rectangle 9"/>
+          <p:cNvPr id="9" name="Rectangle 8"/>
           <p:cNvSpPr/>
           <p:nvPr/>
         </p:nvSpPr>
@@ -8317,7 +7975,7 @@
       </p:sp>
       <p:sp>
         <p:nvSpPr>
-          <p:cNvPr id="11" name="TextBox 10"/>
+          <p:cNvPr id="10" name="TextBox 9"/>
           <p:cNvSpPr txBox="1"/>
           <p:nvPr/>
         </p:nvSpPr>
@@ -8359,7 +8017,7 @@
       </p:sp>
       <p:sp>
         <p:nvSpPr>
-          <p:cNvPr id="12" name="TextBox 11"/>
+          <p:cNvPr id="11" name="TextBox 10"/>
           <p:cNvSpPr txBox="1"/>
           <p:nvPr/>
         </p:nvSpPr>
@@ -8401,7 +8059,7 @@
       </p:sp>
       <p:sp>
         <p:nvSpPr>
-          <p:cNvPr id="13" name="TextBox 12"/>
+          <p:cNvPr id="12" name="TextBox 11"/>
           <p:cNvSpPr txBox="1"/>
           <p:nvPr/>
         </p:nvSpPr>
@@ -8516,48 +8174,6 @@
         </p:nvSpPr>
         <p:spPr>
           <a:xfrm>
-            <a:off x="5897880" y="310896"/>
-            <a:ext cx="4800600" cy="256032"/>
-          </a:xfrm>
-          <a:prstGeom prst="rect">
-            <a:avLst/>
-          </a:prstGeom>
-          <a:noFill/>
-        </p:spPr>
-        <p:txBody>
-          <a:bodyPr wrap="none" lIns="9144" rIns="9144" tIns="9144" bIns="9144" anchor="t">
-            <a:spAutoFit/>
-          </a:bodyPr>
-          <a:lstStyle/>
-          <a:p>
-            <a:pPr algn="r">
-              <a:spcAft>
-                <a:spcPts val="0"/>
-              </a:spcAft>
-              <a:defRPr sz="680" b="1">
-                <a:solidFill>
-                  <a:srgbClr val="4F6B00"/>
-                </a:solidFill>
-                <a:latin typeface="Inter"/>
-              </a:defRPr>
-            </a:pPr>
-            <a:r>
-              <a:rPr>
-                <a:latin typeface="Inter"/>
-              </a:rPr>
-              <a:t>Illustrative, Gradient Maintained — demo data, not the client's holdings or managers</a:t>
-            </a:r>
-          </a:p>
-        </p:txBody>
-      </p:sp>
-      <p:sp>
-        <p:nvSpPr>
-          <p:cNvPr id="4" name="TextBox 3"/>
-          <p:cNvSpPr txBox="1"/>
-          <p:nvPr/>
-        </p:nvSpPr>
-        <p:spPr>
-          <a:xfrm>
             <a:off x="640080" y="566928"/>
             <a:ext cx="10058400" cy="530352"/>
           </a:xfrm>
@@ -8594,7 +8210,7 @@
       </p:sp>
       <p:sp>
         <p:nvSpPr>
-          <p:cNvPr id="5" name="Rectangle 4"/>
+          <p:cNvPr id="4" name="Rectangle 3"/>
           <p:cNvSpPr/>
           <p:nvPr/>
         </p:nvSpPr>
@@ -8643,7 +8259,7 @@
       </p:sp>
       <p:sp>
         <p:nvSpPr>
-          <p:cNvPr id="6" name="Rectangle 5"/>
+          <p:cNvPr id="5" name="Rectangle 4"/>
           <p:cNvSpPr/>
           <p:nvPr/>
         </p:nvSpPr>
@@ -8692,7 +8308,7 @@
       </p:sp>
       <p:sp>
         <p:nvSpPr>
-          <p:cNvPr id="7" name="TextBox 6"/>
+          <p:cNvPr id="6" name="TextBox 5"/>
           <p:cNvSpPr txBox="1"/>
           <p:nvPr/>
         </p:nvSpPr>
@@ -8734,7 +8350,7 @@
       </p:sp>
       <p:sp>
         <p:nvSpPr>
-          <p:cNvPr id="8" name="TextBox 7"/>
+          <p:cNvPr id="7" name="TextBox 6"/>
           <p:cNvSpPr txBox="1"/>
           <p:nvPr/>
         </p:nvSpPr>
@@ -8776,7 +8392,7 @@
       </p:sp>
       <p:graphicFrame>
         <p:nvGraphicFramePr>
-          <p:cNvPr id="9" name="Table 8"/>
+          <p:cNvPr id="8" name="Table 7"/>
           <p:cNvGraphicFramePr>
             <a:graphicFrameLocks noGrp="1"/>
           </p:cNvGraphicFramePr>
@@ -9353,7 +8969,7 @@
       </p:graphicFrame>
       <p:sp>
         <p:nvSpPr>
-          <p:cNvPr id="10" name="TextBox 9"/>
+          <p:cNvPr id="9" name="TextBox 8"/>
           <p:cNvSpPr txBox="1"/>
           <p:nvPr/>
         </p:nvSpPr>
@@ -9395,7 +9011,7 @@
       </p:sp>
       <p:graphicFrame>
         <p:nvGraphicFramePr>
-          <p:cNvPr id="11" name="Table 10"/>
+          <p:cNvPr id="10" name="Table 9"/>
           <p:cNvGraphicFramePr>
             <a:graphicFrameLocks noGrp="1"/>
           </p:cNvGraphicFramePr>
@@ -9837,7 +9453,7 @@
       </p:graphicFrame>
       <p:sp>
         <p:nvSpPr>
-          <p:cNvPr id="12" name="TextBox 11"/>
+          <p:cNvPr id="11" name="TextBox 10"/>
           <p:cNvSpPr txBox="1"/>
           <p:nvPr/>
         </p:nvSpPr>
@@ -9879,7 +9495,7 @@
       </p:sp>
       <p:sp>
         <p:nvSpPr>
-          <p:cNvPr id="13" name="Rectangle 12"/>
+          <p:cNvPr id="12" name="Rectangle 11"/>
           <p:cNvSpPr/>
           <p:nvPr/>
         </p:nvSpPr>
@@ -9928,7 +9544,7 @@
       </p:sp>
       <p:sp>
         <p:nvSpPr>
-          <p:cNvPr id="14" name="TextBox 13"/>
+          <p:cNvPr id="13" name="TextBox 12"/>
           <p:cNvSpPr txBox="1"/>
           <p:nvPr/>
         </p:nvSpPr>
@@ -9970,7 +9586,7 @@
       </p:sp>
       <p:sp>
         <p:nvSpPr>
-          <p:cNvPr id="15" name="TextBox 14"/>
+          <p:cNvPr id="14" name="TextBox 13"/>
           <p:cNvSpPr txBox="1"/>
           <p:nvPr/>
         </p:nvSpPr>
@@ -10012,7 +9628,7 @@
       </p:sp>
       <p:sp>
         <p:nvSpPr>
-          <p:cNvPr id="16" name="TextBox 15"/>
+          <p:cNvPr id="15" name="TextBox 14"/>
           <p:cNvSpPr txBox="1"/>
           <p:nvPr/>
         </p:nvSpPr>
@@ -10127,48 +9743,6 @@
         </p:nvSpPr>
         <p:spPr>
           <a:xfrm>
-            <a:off x="5897880" y="310896"/>
-            <a:ext cx="4800600" cy="256032"/>
-          </a:xfrm>
-          <a:prstGeom prst="rect">
-            <a:avLst/>
-          </a:prstGeom>
-          <a:noFill/>
-        </p:spPr>
-        <p:txBody>
-          <a:bodyPr wrap="none" lIns="9144" rIns="9144" tIns="9144" bIns="9144" anchor="t">
-            <a:spAutoFit/>
-          </a:bodyPr>
-          <a:lstStyle/>
-          <a:p>
-            <a:pPr algn="r">
-              <a:spcAft>
-                <a:spcPts val="0"/>
-              </a:spcAft>
-              <a:defRPr sz="680" b="1">
-                <a:solidFill>
-                  <a:srgbClr val="4F6B00"/>
-                </a:solidFill>
-                <a:latin typeface="Inter"/>
-              </a:defRPr>
-            </a:pPr>
-            <a:r>
-              <a:rPr>
-                <a:latin typeface="Inter"/>
-              </a:rPr>
-              <a:t>Illustrative, Gradient Maintained — demo data, not the client's holdings or managers</a:t>
-            </a:r>
-          </a:p>
-        </p:txBody>
-      </p:sp>
-      <p:sp>
-        <p:nvSpPr>
-          <p:cNvPr id="4" name="TextBox 3"/>
-          <p:cNvSpPr txBox="1"/>
-          <p:nvPr/>
-        </p:nvSpPr>
-        <p:spPr>
-          <a:xfrm>
             <a:off x="640080" y="566928"/>
             <a:ext cx="10058400" cy="530352"/>
           </a:xfrm>
@@ -10205,7 +9779,7 @@
       </p:sp>
       <p:sp>
         <p:nvSpPr>
-          <p:cNvPr id="5" name="Rectangle 4"/>
+          <p:cNvPr id="4" name="Rectangle 3"/>
           <p:cNvSpPr/>
           <p:nvPr/>
         </p:nvSpPr>
@@ -10254,7 +9828,7 @@
       </p:sp>
       <p:sp>
         <p:nvSpPr>
-          <p:cNvPr id="6" name="Rectangle 5"/>
+          <p:cNvPr id="5" name="Rectangle 4"/>
           <p:cNvSpPr/>
           <p:nvPr/>
         </p:nvSpPr>
@@ -10303,7 +9877,7 @@
       </p:sp>
       <p:sp>
         <p:nvSpPr>
-          <p:cNvPr id="7" name="TextBox 6"/>
+          <p:cNvPr id="6" name="TextBox 5"/>
           <p:cNvSpPr txBox="1"/>
           <p:nvPr/>
         </p:nvSpPr>
@@ -10345,7 +9919,7 @@
       </p:sp>
       <p:graphicFrame>
         <p:nvGraphicFramePr>
-          <p:cNvPr id="8" name="Table 7"/>
+          <p:cNvPr id="7" name="Table 6"/>
           <p:cNvGraphicFramePr>
             <a:graphicFrameLocks noGrp="1"/>
           </p:cNvGraphicFramePr>
@@ -10595,7 +10169,7 @@
       </p:graphicFrame>
       <p:sp>
         <p:nvSpPr>
-          <p:cNvPr id="9" name="Rectangle 8"/>
+          <p:cNvPr id="8" name="Rectangle 7"/>
           <p:cNvSpPr/>
           <p:nvPr/>
         </p:nvSpPr>
@@ -10644,7 +10218,7 @@
       </p:sp>
       <p:sp>
         <p:nvSpPr>
-          <p:cNvPr id="10" name="TextBox 9"/>
+          <p:cNvPr id="9" name="TextBox 8"/>
           <p:cNvSpPr txBox="1"/>
           <p:nvPr/>
         </p:nvSpPr>
@@ -10686,7 +10260,7 @@
       </p:sp>
       <p:sp>
         <p:nvSpPr>
-          <p:cNvPr id="11" name="TextBox 10"/>
+          <p:cNvPr id="10" name="TextBox 9"/>
           <p:cNvSpPr txBox="1"/>
           <p:nvPr/>
         </p:nvSpPr>
@@ -10728,7 +10302,7 @@
       </p:sp>
       <p:sp>
         <p:nvSpPr>
-          <p:cNvPr id="12" name="TextBox 11"/>
+          <p:cNvPr id="11" name="TextBox 10"/>
           <p:cNvSpPr txBox="1"/>
           <p:nvPr/>
         </p:nvSpPr>
@@ -10844,7 +10418,7 @@
         <p:spPr>
           <a:xfrm>
             <a:off x="640080" y="329184"/>
-            <a:ext cx="5303520" cy="182880"/>
+            <a:ext cx="9875520" cy="182880"/>
           </a:xfrm>
           <a:prstGeom prst="rect">
             <a:avLst/>
@@ -10885,48 +10459,6 @@
         </p:nvSpPr>
         <p:spPr>
           <a:xfrm>
-            <a:off x="5897880" y="310896"/>
-            <a:ext cx="4800600" cy="256032"/>
-          </a:xfrm>
-          <a:prstGeom prst="rect">
-            <a:avLst/>
-          </a:prstGeom>
-          <a:noFill/>
-        </p:spPr>
-        <p:txBody>
-          <a:bodyPr wrap="none" lIns="9144" rIns="9144" tIns="9144" bIns="9144" anchor="t">
-            <a:spAutoFit/>
-          </a:bodyPr>
-          <a:lstStyle/>
-          <a:p>
-            <a:pPr algn="r">
-              <a:spcAft>
-                <a:spcPts val="0"/>
-              </a:spcAft>
-              <a:defRPr sz="680" b="1">
-                <a:solidFill>
-                  <a:srgbClr val="4F6B00"/>
-                </a:solidFill>
-                <a:latin typeface="Inter"/>
-              </a:defRPr>
-            </a:pPr>
-            <a:r>
-              <a:rPr>
-                <a:latin typeface="Inter"/>
-              </a:rPr>
-              <a:t>Illustrative, Gradient Maintained — demo data, not the client's holdings or managers</a:t>
-            </a:r>
-          </a:p>
-        </p:txBody>
-      </p:sp>
-      <p:sp>
-        <p:nvSpPr>
-          <p:cNvPr id="5" name="TextBox 4"/>
-          <p:cNvSpPr txBox="1"/>
-          <p:nvPr/>
-        </p:nvSpPr>
-        <p:spPr>
-          <a:xfrm>
             <a:off x="640080" y="566928"/>
             <a:ext cx="10058400" cy="530352"/>
           </a:xfrm>
@@ -10963,7 +10495,7 @@
       </p:sp>
       <p:sp>
         <p:nvSpPr>
-          <p:cNvPr id="6" name="Rectangle 5"/>
+          <p:cNvPr id="5" name="Rectangle 4"/>
           <p:cNvSpPr/>
           <p:nvPr/>
         </p:nvSpPr>
@@ -11012,7 +10544,7 @@
       </p:sp>
       <p:sp>
         <p:nvSpPr>
-          <p:cNvPr id="7" name="Rectangle 6"/>
+          <p:cNvPr id="6" name="Rectangle 5"/>
           <p:cNvSpPr/>
           <p:nvPr/>
         </p:nvSpPr>
@@ -11061,7 +10593,7 @@
       </p:sp>
       <p:sp>
         <p:nvSpPr>
-          <p:cNvPr id="8" name="TextBox 7"/>
+          <p:cNvPr id="7" name="TextBox 6"/>
           <p:cNvSpPr txBox="1"/>
           <p:nvPr/>
         </p:nvSpPr>
@@ -11103,7 +10635,7 @@
       </p:sp>
       <p:sp>
         <p:nvSpPr>
-          <p:cNvPr id="9" name="TextBox 8"/>
+          <p:cNvPr id="8" name="TextBox 7"/>
           <p:cNvSpPr txBox="1"/>
           <p:nvPr/>
         </p:nvSpPr>
@@ -11145,7 +10677,7 @@
       </p:sp>
       <p:graphicFrame>
         <p:nvGraphicFramePr>
-          <p:cNvPr id="10" name="Chart 9"/>
+          <p:cNvPr id="9" name="Chart 8"/>
           <p:cNvGraphicFramePr>
             <a:graphicFrameLocks noGrp="1"/>
           </p:cNvGraphicFramePr>
@@ -11163,7 +10695,7 @@
       </p:graphicFrame>
       <p:sp>
         <p:nvSpPr>
-          <p:cNvPr id="11" name="Rectangle 10"/>
+          <p:cNvPr id="10" name="Rectangle 9"/>
           <p:cNvSpPr/>
           <p:nvPr/>
         </p:nvSpPr>
@@ -11212,7 +10744,7 @@
       </p:sp>
       <p:sp>
         <p:nvSpPr>
-          <p:cNvPr id="12" name="TextBox 11"/>
+          <p:cNvPr id="11" name="TextBox 10"/>
           <p:cNvSpPr txBox="1"/>
           <p:nvPr/>
         </p:nvSpPr>
@@ -11254,7 +10786,7 @@
       </p:sp>
       <p:sp>
         <p:nvSpPr>
-          <p:cNvPr id="13" name="TextBox 12"/>
+          <p:cNvPr id="12" name="TextBox 11"/>
           <p:cNvSpPr txBox="1"/>
           <p:nvPr/>
         </p:nvSpPr>
@@ -11296,7 +10828,7 @@
       </p:sp>
       <p:sp>
         <p:nvSpPr>
-          <p:cNvPr id="14" name="TextBox 13"/>
+          <p:cNvPr id="13" name="TextBox 12"/>
           <p:cNvSpPr txBox="1"/>
           <p:nvPr/>
         </p:nvSpPr>
@@ -11412,7 +10944,7 @@
         <p:spPr>
           <a:xfrm>
             <a:off x="640080" y="329184"/>
-            <a:ext cx="5303520" cy="182880"/>
+            <a:ext cx="9875520" cy="182880"/>
           </a:xfrm>
           <a:prstGeom prst="rect">
             <a:avLst/>
@@ -11453,48 +10985,6 @@
         </p:nvSpPr>
         <p:spPr>
           <a:xfrm>
-            <a:off x="5897880" y="310896"/>
-            <a:ext cx="4800600" cy="256032"/>
-          </a:xfrm>
-          <a:prstGeom prst="rect">
-            <a:avLst/>
-          </a:prstGeom>
-          <a:noFill/>
-        </p:spPr>
-        <p:txBody>
-          <a:bodyPr wrap="none" lIns="9144" rIns="9144" tIns="9144" bIns="9144" anchor="t">
-            <a:spAutoFit/>
-          </a:bodyPr>
-          <a:lstStyle/>
-          <a:p>
-            <a:pPr algn="r">
-              <a:spcAft>
-                <a:spcPts val="0"/>
-              </a:spcAft>
-              <a:defRPr sz="680" b="1">
-                <a:solidFill>
-                  <a:srgbClr val="4F6B00"/>
-                </a:solidFill>
-                <a:latin typeface="Inter"/>
-              </a:defRPr>
-            </a:pPr>
-            <a:r>
-              <a:rPr>
-                <a:latin typeface="Inter"/>
-              </a:rPr>
-              <a:t>Illustrative, Gradient Maintained — demo data, not the client's holdings or managers</a:t>
-            </a:r>
-          </a:p>
-        </p:txBody>
-      </p:sp>
-      <p:sp>
-        <p:nvSpPr>
-          <p:cNvPr id="5" name="TextBox 4"/>
-          <p:cNvSpPr txBox="1"/>
-          <p:nvPr/>
-        </p:nvSpPr>
-        <p:spPr>
-          <a:xfrm>
             <a:off x="640080" y="566928"/>
             <a:ext cx="10058400" cy="530352"/>
           </a:xfrm>
@@ -11531,7 +11021,7 @@
       </p:sp>
       <p:sp>
         <p:nvSpPr>
-          <p:cNvPr id="6" name="Rectangle 5"/>
+          <p:cNvPr id="5" name="Rectangle 4"/>
           <p:cNvSpPr/>
           <p:nvPr/>
         </p:nvSpPr>
@@ -11580,7 +11070,7 @@
       </p:sp>
       <p:sp>
         <p:nvSpPr>
-          <p:cNvPr id="7" name="Rectangle 6"/>
+          <p:cNvPr id="6" name="Rectangle 5"/>
           <p:cNvSpPr/>
           <p:nvPr/>
         </p:nvSpPr>
@@ -11629,7 +11119,7 @@
       </p:sp>
       <p:sp>
         <p:nvSpPr>
-          <p:cNvPr id="8" name="TextBox 7"/>
+          <p:cNvPr id="7" name="TextBox 6"/>
           <p:cNvSpPr txBox="1"/>
           <p:nvPr/>
         </p:nvSpPr>
@@ -11671,7 +11161,7 @@
       </p:sp>
       <p:sp>
         <p:nvSpPr>
-          <p:cNvPr id="9" name="TextBox 8"/>
+          <p:cNvPr id="8" name="TextBox 7"/>
           <p:cNvSpPr txBox="1"/>
           <p:nvPr/>
         </p:nvSpPr>
@@ -11713,7 +11203,7 @@
       </p:sp>
       <p:graphicFrame>
         <p:nvGraphicFramePr>
-          <p:cNvPr id="10" name="Chart 9"/>
+          <p:cNvPr id="9" name="Chart 8"/>
           <p:cNvGraphicFramePr>
             <a:graphicFrameLocks noGrp="1"/>
           </p:cNvGraphicFramePr>
@@ -11731,7 +11221,7 @@
       </p:graphicFrame>
       <p:sp>
         <p:nvSpPr>
-          <p:cNvPr id="11" name="Rectangle 10"/>
+          <p:cNvPr id="10" name="Rectangle 9"/>
           <p:cNvSpPr/>
           <p:nvPr/>
         </p:nvSpPr>
@@ -11780,7 +11270,7 @@
       </p:sp>
       <p:sp>
         <p:nvSpPr>
-          <p:cNvPr id="12" name="TextBox 11"/>
+          <p:cNvPr id="11" name="TextBox 10"/>
           <p:cNvSpPr txBox="1"/>
           <p:nvPr/>
         </p:nvSpPr>
@@ -11822,7 +11312,7 @@
       </p:sp>
       <p:sp>
         <p:nvSpPr>
-          <p:cNvPr id="13" name="TextBox 12"/>
+          <p:cNvPr id="12" name="TextBox 11"/>
           <p:cNvSpPr txBox="1"/>
           <p:nvPr/>
         </p:nvSpPr>
@@ -11864,7 +11354,7 @@
       </p:sp>
       <p:sp>
         <p:nvSpPr>
-          <p:cNvPr id="14" name="TextBox 13"/>
+          <p:cNvPr id="13" name="TextBox 12"/>
           <p:cNvSpPr txBox="1"/>
           <p:nvPr/>
         </p:nvSpPr>
@@ -11980,7 +11470,7 @@
         <p:spPr>
           <a:xfrm>
             <a:off x="640080" y="329184"/>
-            <a:ext cx="5303520" cy="182880"/>
+            <a:ext cx="9875520" cy="182880"/>
           </a:xfrm>
           <a:prstGeom prst="rect">
             <a:avLst/>
@@ -12021,48 +11511,6 @@
         </p:nvSpPr>
         <p:spPr>
           <a:xfrm>
-            <a:off x="5897880" y="310896"/>
-            <a:ext cx="4800600" cy="256032"/>
-          </a:xfrm>
-          <a:prstGeom prst="rect">
-            <a:avLst/>
-          </a:prstGeom>
-          <a:noFill/>
-        </p:spPr>
-        <p:txBody>
-          <a:bodyPr wrap="none" lIns="9144" rIns="9144" tIns="9144" bIns="9144" anchor="t">
-            <a:spAutoFit/>
-          </a:bodyPr>
-          <a:lstStyle/>
-          <a:p>
-            <a:pPr algn="r">
-              <a:spcAft>
-                <a:spcPts val="0"/>
-              </a:spcAft>
-              <a:defRPr sz="680" b="1">
-                <a:solidFill>
-                  <a:srgbClr val="4F6B00"/>
-                </a:solidFill>
-                <a:latin typeface="Inter"/>
-              </a:defRPr>
-            </a:pPr>
-            <a:r>
-              <a:rPr>
-                <a:latin typeface="Inter"/>
-              </a:rPr>
-              <a:t>Illustrative, Gradient Maintained — demo data, not the client's holdings or managers</a:t>
-            </a:r>
-          </a:p>
-        </p:txBody>
-      </p:sp>
-      <p:sp>
-        <p:nvSpPr>
-          <p:cNvPr id="5" name="TextBox 4"/>
-          <p:cNvSpPr txBox="1"/>
-          <p:nvPr/>
-        </p:nvSpPr>
-        <p:spPr>
-          <a:xfrm>
             <a:off x="640080" y="566928"/>
             <a:ext cx="10058400" cy="530352"/>
           </a:xfrm>
@@ -12099,7 +11547,7 @@
       </p:sp>
       <p:sp>
         <p:nvSpPr>
-          <p:cNvPr id="6" name="Rectangle 5"/>
+          <p:cNvPr id="5" name="Rectangle 4"/>
           <p:cNvSpPr/>
           <p:nvPr/>
         </p:nvSpPr>
@@ -12148,7 +11596,7 @@
       </p:sp>
       <p:sp>
         <p:nvSpPr>
-          <p:cNvPr id="7" name="Rectangle 6"/>
+          <p:cNvPr id="6" name="Rectangle 5"/>
           <p:cNvSpPr/>
           <p:nvPr/>
         </p:nvSpPr>
@@ -12197,7 +11645,7 @@
       </p:sp>
       <p:sp>
         <p:nvSpPr>
-          <p:cNvPr id="8" name="TextBox 7"/>
+          <p:cNvPr id="7" name="TextBox 6"/>
           <p:cNvSpPr txBox="1"/>
           <p:nvPr/>
         </p:nvSpPr>
@@ -12239,7 +11687,7 @@
       </p:sp>
       <p:sp>
         <p:nvSpPr>
-          <p:cNvPr id="9" name="TextBox 8"/>
+          <p:cNvPr id="8" name="TextBox 7"/>
           <p:cNvSpPr txBox="1"/>
           <p:nvPr/>
         </p:nvSpPr>
@@ -12281,7 +11729,7 @@
       </p:sp>
       <p:graphicFrame>
         <p:nvGraphicFramePr>
-          <p:cNvPr id="10" name="Table 9"/>
+          <p:cNvPr id="9" name="Table 8"/>
           <p:cNvGraphicFramePr>
             <a:graphicFrameLocks noGrp="1"/>
           </p:cNvGraphicFramePr>
@@ -12540,7 +11988,7 @@
                         <a:rPr>
                           <a:latin typeface="Inter"/>
                         </a:rPr>
-                        <a:t>● Watch</a:t>
+                        <a:t>● Near limit</a:t>
                       </a:r>
                     </a:p>
                   </a:txBody>
@@ -12677,7 +12125,7 @@
                         <a:rPr>
                           <a:latin typeface="Inter"/>
                         </a:rPr>
-                        <a:t>● Watch</a:t>
+                        <a:t>● Near limit</a:t>
                       </a:r>
                     </a:p>
                   </a:txBody>
@@ -12814,7 +12262,7 @@
                         <a:rPr>
                           <a:latin typeface="Inter"/>
                         </a:rPr>
-                        <a:t>● not assessed</a:t>
+                        <a:t>● Not assessed</a:t>
                       </a:r>
                     </a:p>
                   </a:txBody>
@@ -12858,7 +12306,7 @@
       </p:graphicFrame>
       <p:sp>
         <p:nvSpPr>
-          <p:cNvPr id="11" name="Rectangle 10"/>
+          <p:cNvPr id="10" name="Rectangle 9"/>
           <p:cNvSpPr/>
           <p:nvPr/>
         </p:nvSpPr>
@@ -12907,7 +12355,7 @@
       </p:sp>
       <p:sp>
         <p:nvSpPr>
-          <p:cNvPr id="12" name="Rectangle 11"/>
+          <p:cNvPr id="11" name="Rectangle 10"/>
           <p:cNvSpPr/>
           <p:nvPr/>
         </p:nvSpPr>
@@ -12956,7 +12404,7 @@
       </p:sp>
       <p:sp>
         <p:nvSpPr>
-          <p:cNvPr id="13" name="TextBox 12"/>
+          <p:cNvPr id="12" name="TextBox 11"/>
           <p:cNvSpPr txBox="1"/>
           <p:nvPr/>
         </p:nvSpPr>
@@ -12998,7 +12446,7 @@
       </p:sp>
       <p:sp>
         <p:nvSpPr>
-          <p:cNvPr id="14" name="TextBox 13"/>
+          <p:cNvPr id="13" name="TextBox 12"/>
           <p:cNvSpPr txBox="1"/>
           <p:nvPr/>
         </p:nvSpPr>
@@ -13040,7 +12488,7 @@
       </p:sp>
       <p:sp>
         <p:nvSpPr>
-          <p:cNvPr id="15" name="Rectangle 14"/>
+          <p:cNvPr id="14" name="Rectangle 13"/>
           <p:cNvSpPr/>
           <p:nvPr/>
         </p:nvSpPr>
@@ -13089,7 +12537,7 @@
       </p:sp>
       <p:sp>
         <p:nvSpPr>
-          <p:cNvPr id="16" name="Rectangle 15"/>
+          <p:cNvPr id="15" name="Rectangle 14"/>
           <p:cNvSpPr/>
           <p:nvPr/>
         </p:nvSpPr>
@@ -13138,7 +12586,7 @@
       </p:sp>
       <p:sp>
         <p:nvSpPr>
-          <p:cNvPr id="17" name="TextBox 16"/>
+          <p:cNvPr id="16" name="TextBox 15"/>
           <p:cNvSpPr txBox="1"/>
           <p:nvPr/>
         </p:nvSpPr>
@@ -13180,7 +12628,7 @@
       </p:sp>
       <p:sp>
         <p:nvSpPr>
-          <p:cNvPr id="18" name="TextBox 17"/>
+          <p:cNvPr id="17" name="TextBox 16"/>
           <p:cNvSpPr txBox="1"/>
           <p:nvPr/>
         </p:nvSpPr>
@@ -13222,7 +12670,7 @@
       </p:sp>
       <p:sp>
         <p:nvSpPr>
-          <p:cNvPr id="19" name="Rectangle 18"/>
+          <p:cNvPr id="18" name="Rectangle 17"/>
           <p:cNvSpPr/>
           <p:nvPr/>
         </p:nvSpPr>
@@ -13271,7 +12719,7 @@
       </p:sp>
       <p:sp>
         <p:nvSpPr>
-          <p:cNvPr id="20" name="TextBox 19"/>
+          <p:cNvPr id="19" name="TextBox 18"/>
           <p:cNvSpPr txBox="1"/>
           <p:nvPr/>
         </p:nvSpPr>
@@ -13313,7 +12761,7 @@
       </p:sp>
       <p:sp>
         <p:nvSpPr>
-          <p:cNvPr id="21" name="TextBox 20"/>
+          <p:cNvPr id="20" name="TextBox 19"/>
           <p:cNvSpPr txBox="1"/>
           <p:nvPr/>
         </p:nvSpPr>
@@ -13355,7 +12803,7 @@
       </p:sp>
       <p:sp>
         <p:nvSpPr>
-          <p:cNvPr id="22" name="TextBox 21"/>
+          <p:cNvPr id="21" name="TextBox 20"/>
           <p:cNvSpPr txBox="1"/>
           <p:nvPr/>
         </p:nvSpPr>
@@ -13471,7 +12919,7 @@
         <p:spPr>
           <a:xfrm>
             <a:off x="640080" y="329184"/>
-            <a:ext cx="5303520" cy="182880"/>
+            <a:ext cx="9875520" cy="182880"/>
           </a:xfrm>
           <a:prstGeom prst="rect">
             <a:avLst/>
@@ -13512,48 +12960,6 @@
         </p:nvSpPr>
         <p:spPr>
           <a:xfrm>
-            <a:off x="5897880" y="310896"/>
-            <a:ext cx="4800600" cy="256032"/>
-          </a:xfrm>
-          <a:prstGeom prst="rect">
-            <a:avLst/>
-          </a:prstGeom>
-          <a:noFill/>
-        </p:spPr>
-        <p:txBody>
-          <a:bodyPr wrap="none" lIns="9144" rIns="9144" tIns="9144" bIns="9144" anchor="t">
-            <a:spAutoFit/>
-          </a:bodyPr>
-          <a:lstStyle/>
-          <a:p>
-            <a:pPr algn="r">
-              <a:spcAft>
-                <a:spcPts val="0"/>
-              </a:spcAft>
-              <a:defRPr sz="680" b="1">
-                <a:solidFill>
-                  <a:srgbClr val="4F6B00"/>
-                </a:solidFill>
-                <a:latin typeface="Inter"/>
-              </a:defRPr>
-            </a:pPr>
-            <a:r>
-              <a:rPr>
-                <a:latin typeface="Inter"/>
-              </a:rPr>
-              <a:t>Illustrative, Gradient Maintained — demo data, not the client's holdings or managers</a:t>
-            </a:r>
-          </a:p>
-        </p:txBody>
-      </p:sp>
-      <p:sp>
-        <p:nvSpPr>
-          <p:cNvPr id="5" name="TextBox 4"/>
-          <p:cNvSpPr txBox="1"/>
-          <p:nvPr/>
-        </p:nvSpPr>
-        <p:spPr>
-          <a:xfrm>
             <a:off x="640080" y="566928"/>
             <a:ext cx="10058400" cy="530352"/>
           </a:xfrm>
@@ -13590,7 +12996,7 @@
       </p:sp>
       <p:sp>
         <p:nvSpPr>
-          <p:cNvPr id="6" name="Rectangle 5"/>
+          <p:cNvPr id="5" name="Rectangle 4"/>
           <p:cNvSpPr/>
           <p:nvPr/>
         </p:nvSpPr>
@@ -13639,7 +13045,7 @@
       </p:sp>
       <p:sp>
         <p:nvSpPr>
-          <p:cNvPr id="7" name="Rectangle 6"/>
+          <p:cNvPr id="6" name="Rectangle 5"/>
           <p:cNvSpPr/>
           <p:nvPr/>
         </p:nvSpPr>
@@ -13688,7 +13094,7 @@
       </p:sp>
       <p:sp>
         <p:nvSpPr>
-          <p:cNvPr id="8" name="TextBox 7"/>
+          <p:cNvPr id="7" name="TextBox 6"/>
           <p:cNvSpPr txBox="1"/>
           <p:nvPr/>
         </p:nvSpPr>
@@ -13730,7 +13136,7 @@
       </p:sp>
       <p:sp>
         <p:nvSpPr>
-          <p:cNvPr id="9" name="TextBox 8"/>
+          <p:cNvPr id="8" name="TextBox 7"/>
           <p:cNvSpPr txBox="1"/>
           <p:nvPr/>
         </p:nvSpPr>
@@ -13772,7 +13178,7 @@
       </p:sp>
       <p:graphicFrame>
         <p:nvGraphicFramePr>
-          <p:cNvPr id="10" name="Chart 9"/>
+          <p:cNvPr id="9" name="Chart 8"/>
           <p:cNvGraphicFramePr>
             <a:graphicFrameLocks noGrp="1"/>
           </p:cNvGraphicFramePr>
@@ -13790,7 +13196,7 @@
       </p:graphicFrame>
       <p:sp>
         <p:nvSpPr>
-          <p:cNvPr id="11" name="Rectangle 10"/>
+          <p:cNvPr id="10" name="Rectangle 9"/>
           <p:cNvSpPr/>
           <p:nvPr/>
         </p:nvSpPr>
@@ -13839,7 +13245,7 @@
       </p:sp>
       <p:sp>
         <p:nvSpPr>
-          <p:cNvPr id="12" name="TextBox 11"/>
+          <p:cNvPr id="11" name="TextBox 10"/>
           <p:cNvSpPr txBox="1"/>
           <p:nvPr/>
         </p:nvSpPr>
@@ -13881,7 +13287,7 @@
       </p:sp>
       <p:sp>
         <p:nvSpPr>
-          <p:cNvPr id="13" name="TextBox 12"/>
+          <p:cNvPr id="12" name="TextBox 11"/>
           <p:cNvSpPr txBox="1"/>
           <p:nvPr/>
         </p:nvSpPr>
@@ -13923,7 +13329,7 @@
       </p:sp>
       <p:sp>
         <p:nvSpPr>
-          <p:cNvPr id="14" name="TextBox 13"/>
+          <p:cNvPr id="13" name="TextBox 12"/>
           <p:cNvSpPr txBox="1"/>
           <p:nvPr/>
         </p:nvSpPr>
@@ -14039,7 +13445,7 @@
         <p:spPr>
           <a:xfrm>
             <a:off x="640080" y="329184"/>
-            <a:ext cx="5303520" cy="182880"/>
+            <a:ext cx="9875520" cy="182880"/>
           </a:xfrm>
           <a:prstGeom prst="rect">
             <a:avLst/>
@@ -14080,48 +13486,6 @@
         </p:nvSpPr>
         <p:spPr>
           <a:xfrm>
-            <a:off x="5897880" y="310896"/>
-            <a:ext cx="4800600" cy="256032"/>
-          </a:xfrm>
-          <a:prstGeom prst="rect">
-            <a:avLst/>
-          </a:prstGeom>
-          <a:noFill/>
-        </p:spPr>
-        <p:txBody>
-          <a:bodyPr wrap="none" lIns="9144" rIns="9144" tIns="9144" bIns="9144" anchor="t">
-            <a:spAutoFit/>
-          </a:bodyPr>
-          <a:lstStyle/>
-          <a:p>
-            <a:pPr algn="r">
-              <a:spcAft>
-                <a:spcPts val="0"/>
-              </a:spcAft>
-              <a:defRPr sz="680" b="1">
-                <a:solidFill>
-                  <a:srgbClr val="4F6B00"/>
-                </a:solidFill>
-                <a:latin typeface="Inter"/>
-              </a:defRPr>
-            </a:pPr>
-            <a:r>
-              <a:rPr>
-                <a:latin typeface="Inter"/>
-              </a:rPr>
-              <a:t>Illustrative, Gradient Maintained — demo data, not the client's holdings or managers</a:t>
-            </a:r>
-          </a:p>
-        </p:txBody>
-      </p:sp>
-      <p:sp>
-        <p:nvSpPr>
-          <p:cNvPr id="5" name="TextBox 4"/>
-          <p:cNvSpPr txBox="1"/>
-          <p:nvPr/>
-        </p:nvSpPr>
-        <p:spPr>
-          <a:xfrm>
             <a:off x="640080" y="566928"/>
             <a:ext cx="10058400" cy="530352"/>
           </a:xfrm>
@@ -14158,7 +13522,7 @@
       </p:sp>
       <p:sp>
         <p:nvSpPr>
-          <p:cNvPr id="6" name="Rectangle 5"/>
+          <p:cNvPr id="5" name="Rectangle 4"/>
           <p:cNvSpPr/>
           <p:nvPr/>
         </p:nvSpPr>
@@ -14207,7 +13571,7 @@
       </p:sp>
       <p:sp>
         <p:nvSpPr>
-          <p:cNvPr id="7" name="Rectangle 6"/>
+          <p:cNvPr id="6" name="Rectangle 5"/>
           <p:cNvSpPr/>
           <p:nvPr/>
         </p:nvSpPr>
@@ -14256,7 +13620,7 @@
       </p:sp>
       <p:sp>
         <p:nvSpPr>
-          <p:cNvPr id="8" name="TextBox 7"/>
+          <p:cNvPr id="7" name="TextBox 6"/>
           <p:cNvSpPr txBox="1"/>
           <p:nvPr/>
         </p:nvSpPr>
@@ -14298,7 +13662,7 @@
       </p:sp>
       <p:graphicFrame>
         <p:nvGraphicFramePr>
-          <p:cNvPr id="9" name="Table 8"/>
+          <p:cNvPr id="8" name="Table 7"/>
           <p:cNvGraphicFramePr>
             <a:graphicFrameLocks noGrp="1"/>
           </p:cNvGraphicFramePr>
@@ -14604,7 +13968,7 @@
       </p:graphicFrame>
       <p:sp>
         <p:nvSpPr>
-          <p:cNvPr id="10" name="Rectangle 9"/>
+          <p:cNvPr id="9" name="Rectangle 8"/>
           <p:cNvSpPr/>
           <p:nvPr/>
         </p:nvSpPr>
@@ -14653,7 +14017,7 @@
       </p:sp>
       <p:sp>
         <p:nvSpPr>
-          <p:cNvPr id="11" name="TextBox 10"/>
+          <p:cNvPr id="10" name="TextBox 9"/>
           <p:cNvSpPr txBox="1"/>
           <p:nvPr/>
         </p:nvSpPr>
@@ -14695,7 +14059,7 @@
       </p:sp>
       <p:sp>
         <p:nvSpPr>
-          <p:cNvPr id="12" name="TextBox 11"/>
+          <p:cNvPr id="11" name="TextBox 10"/>
           <p:cNvSpPr txBox="1"/>
           <p:nvPr/>
         </p:nvSpPr>
@@ -14737,7 +14101,7 @@
       </p:sp>
       <p:sp>
         <p:nvSpPr>
-          <p:cNvPr id="13" name="TextBox 12"/>
+          <p:cNvPr id="12" name="TextBox 11"/>
           <p:cNvSpPr txBox="1"/>
           <p:nvPr/>
         </p:nvSpPr>
@@ -14852,48 +14216,6 @@
         </p:nvSpPr>
         <p:spPr>
           <a:xfrm>
-            <a:off x="5897880" y="310896"/>
-            <a:ext cx="4800600" cy="256032"/>
-          </a:xfrm>
-          <a:prstGeom prst="rect">
-            <a:avLst/>
-          </a:prstGeom>
-          <a:noFill/>
-        </p:spPr>
-        <p:txBody>
-          <a:bodyPr wrap="none" lIns="9144" rIns="9144" tIns="9144" bIns="9144" anchor="t">
-            <a:spAutoFit/>
-          </a:bodyPr>
-          <a:lstStyle/>
-          <a:p>
-            <a:pPr algn="r">
-              <a:spcAft>
-                <a:spcPts val="0"/>
-              </a:spcAft>
-              <a:defRPr sz="680" b="1">
-                <a:solidFill>
-                  <a:srgbClr val="4F6B00"/>
-                </a:solidFill>
-                <a:latin typeface="Inter"/>
-              </a:defRPr>
-            </a:pPr>
-            <a:r>
-              <a:rPr>
-                <a:latin typeface="Inter"/>
-              </a:rPr>
-              <a:t>Illustrative, Gradient Maintained — demo data, not the client's holdings or managers</a:t>
-            </a:r>
-          </a:p>
-        </p:txBody>
-      </p:sp>
-      <p:sp>
-        <p:nvSpPr>
-          <p:cNvPr id="4" name="TextBox 3"/>
-          <p:cNvSpPr txBox="1"/>
-          <p:nvPr/>
-        </p:nvSpPr>
-        <p:spPr>
-          <a:xfrm>
             <a:off x="640080" y="566928"/>
             <a:ext cx="10058400" cy="530352"/>
           </a:xfrm>
@@ -14930,7 +14252,7 @@
       </p:sp>
       <p:sp>
         <p:nvSpPr>
-          <p:cNvPr id="5" name="Rectangle 4"/>
+          <p:cNvPr id="4" name="Rectangle 3"/>
           <p:cNvSpPr/>
           <p:nvPr/>
         </p:nvSpPr>
@@ -14979,7 +14301,7 @@
       </p:sp>
       <p:sp>
         <p:nvSpPr>
-          <p:cNvPr id="6" name="Rectangle 5"/>
+          <p:cNvPr id="5" name="Rectangle 4"/>
           <p:cNvSpPr/>
           <p:nvPr/>
         </p:nvSpPr>
@@ -15028,7 +14350,7 @@
       </p:sp>
       <p:sp>
         <p:nvSpPr>
-          <p:cNvPr id="7" name="TextBox 6"/>
+          <p:cNvPr id="6" name="TextBox 5"/>
           <p:cNvSpPr txBox="1"/>
           <p:nvPr/>
         </p:nvSpPr>
@@ -15070,14 +14392,105 @@
       </p:sp>
       <p:sp>
         <p:nvSpPr>
-          <p:cNvPr id="8" name="Rectangle 7"/>
+          <p:cNvPr id="7" name="Rectangle 6"/>
           <p:cNvSpPr/>
           <p:nvPr/>
         </p:nvSpPr>
         <p:spPr>
           <a:xfrm>
-            <a:off x="640080" y="1325880"/>
-            <a:ext cx="10908792" cy="2489905"/>
+            <a:off x="640080" y="1399032"/>
+            <a:ext cx="73152" cy="950645"/>
+          </a:xfrm>
+          <a:prstGeom prst="rect">
+            <a:avLst/>
+          </a:prstGeom>
+          <a:solidFill>
+            <a:srgbClr val="F2A93B"/>
+          </a:solidFill>
+          <a:ln>
+            <a:solidFill>
+              <a:srgbClr val="F2A93B"/>
+            </a:solidFill>
+          </a:ln>
+        </p:spPr>
+        <p:style>
+          <a:lnRef idx="1">
+            <a:schemeClr val="accent1"/>
+          </a:lnRef>
+          <a:fillRef idx="3">
+            <a:schemeClr val="accent1"/>
+          </a:fillRef>
+          <a:effectRef idx="2">
+            <a:schemeClr val="accent1"/>
+          </a:effectRef>
+          <a:fontRef idx="minor">
+            <a:schemeClr val="lt1"/>
+          </a:fontRef>
+        </p:style>
+        <p:txBody>
+          <a:bodyPr rtlCol="0" anchor="ctr"/>
+          <a:lstStyle/>
+          <a:p>
+            <a:pPr algn="ctr">
+              <a:defRPr>
+                <a:latin typeface="Inter"/>
+              </a:defRPr>
+            </a:pPr>
+          </a:p>
+        </p:txBody>
+      </p:sp>
+      <p:sp>
+        <p:nvSpPr>
+          <p:cNvPr id="8" name="TextBox 7"/>
+          <p:cNvSpPr txBox="1"/>
+          <p:nvPr/>
+        </p:nvSpPr>
+        <p:spPr>
+          <a:xfrm>
+            <a:off x="896112" y="1371600"/>
+            <a:ext cx="10588752" cy="636230"/>
+          </a:xfrm>
+          <a:prstGeom prst="rect">
+            <a:avLst/>
+          </a:prstGeom>
+          <a:noFill/>
+        </p:spPr>
+        <p:txBody>
+          <a:bodyPr wrap="none" lIns="9144" rIns="9144" tIns="9144" bIns="9144" anchor="t">
+            <a:spAutoFit/>
+          </a:bodyPr>
+          <a:lstStyle/>
+          <a:p>
+            <a:pPr algn="l">
+              <a:spcAft>
+                <a:spcPts val="0"/>
+              </a:spcAft>
+              <a:defRPr sz="1800" b="1">
+                <a:solidFill>
+                  <a:srgbClr val="0D1117"/>
+                </a:solidFill>
+                <a:latin typeface="Inter"/>
+              </a:defRPr>
+            </a:pPr>
+            <a:r>
+              <a:rPr>
+                <a:latin typeface="Inter"/>
+              </a:rPr>
+              <a:t>Manager and issuer concentration near limits</a:t>
+            </a:r>
+          </a:p>
+        </p:txBody>
+      </p:sp>
+      <p:sp>
+        <p:nvSpPr>
+          <p:cNvPr id="9" name="Rectangle 8"/>
+          <p:cNvSpPr/>
+          <p:nvPr/>
+        </p:nvSpPr>
+        <p:spPr>
+          <a:xfrm>
+            <a:off x="640080" y="2532557"/>
+            <a:ext cx="10908792" cy="1861650"/>
           </a:xfrm>
           <a:prstGeom prst="rect">
             <a:avLst/>
@@ -15119,14 +14532,14 @@
       </p:sp>
       <p:sp>
         <p:nvSpPr>
-          <p:cNvPr id="9" name="Rectangle 8"/>
+          <p:cNvPr id="10" name="Rectangle 9"/>
           <p:cNvSpPr/>
           <p:nvPr/>
         </p:nvSpPr>
         <p:spPr>
           <a:xfrm>
-            <a:off x="640080" y="1325880"/>
-            <a:ext cx="54864" cy="2489905"/>
+            <a:off x="640080" y="2532557"/>
+            <a:ext cx="54864" cy="1861650"/>
           </a:xfrm>
           <a:prstGeom prst="rect">
             <a:avLst/>
@@ -15168,13 +14581,13 @@
       </p:sp>
       <p:sp>
         <p:nvSpPr>
-          <p:cNvPr id="10" name="TextBox 9"/>
+          <p:cNvPr id="11" name="TextBox 10"/>
           <p:cNvSpPr txBox="1"/>
           <p:nvPr/>
         </p:nvSpPr>
         <p:spPr>
           <a:xfrm>
-            <a:off x="804671" y="1435607"/>
+            <a:off x="804671" y="2642285"/>
             <a:ext cx="10616184" cy="228600"/>
           </a:xfrm>
           <a:prstGeom prst="rect">
@@ -15210,14 +14623,14 @@
       </p:sp>
       <p:sp>
         <p:nvSpPr>
-          <p:cNvPr id="11" name="TextBox 10"/>
+          <p:cNvPr id="12" name="TextBox 11"/>
           <p:cNvSpPr txBox="1"/>
           <p:nvPr/>
         </p:nvSpPr>
         <p:spPr>
           <a:xfrm>
-            <a:off x="804671" y="1719072"/>
-            <a:ext cx="10616184" cy="2005273"/>
+            <a:off x="804671" y="2925749"/>
+            <a:ext cx="10616184" cy="1377018"/>
           </a:xfrm>
           <a:prstGeom prst="rect">
             <a:avLst/>
@@ -15252,14 +14665,14 @@
       </p:sp>
       <p:sp>
         <p:nvSpPr>
-          <p:cNvPr id="12" name="Rectangle 11"/>
+          <p:cNvPr id="13" name="Rectangle 12"/>
           <p:cNvSpPr/>
           <p:nvPr/>
         </p:nvSpPr>
         <p:spPr>
           <a:xfrm>
-            <a:off x="640080" y="3925513"/>
-            <a:ext cx="2644902" cy="2292406"/>
+            <a:off x="640080" y="4503936"/>
+            <a:ext cx="2644902" cy="1713983"/>
           </a:xfrm>
           <a:prstGeom prst="rect">
             <a:avLst/>
@@ -15301,13 +14714,13 @@
       </p:sp>
       <p:sp>
         <p:nvSpPr>
-          <p:cNvPr id="13" name="Rectangle 12"/>
+          <p:cNvPr id="14" name="Rectangle 13"/>
           <p:cNvSpPr/>
           <p:nvPr/>
         </p:nvSpPr>
         <p:spPr>
           <a:xfrm>
-            <a:off x="640080" y="3925513"/>
+            <a:off x="640080" y="4503936"/>
             <a:ext cx="2644902" cy="45720"/>
           </a:xfrm>
           <a:prstGeom prst="rect">
@@ -15350,13 +14763,13 @@
       </p:sp>
       <p:sp>
         <p:nvSpPr>
-          <p:cNvPr id="14" name="TextBox 13"/>
+          <p:cNvPr id="15" name="TextBox 14"/>
           <p:cNvSpPr txBox="1"/>
           <p:nvPr/>
         </p:nvSpPr>
         <p:spPr>
           <a:xfrm>
-            <a:off x="749808" y="4053529"/>
+            <a:off x="749808" y="4631952"/>
             <a:ext cx="2425446" cy="201168"/>
           </a:xfrm>
           <a:prstGeom prst="rect">
@@ -15392,13 +14805,13 @@
       </p:sp>
       <p:sp>
         <p:nvSpPr>
-          <p:cNvPr id="15" name="TextBox 14"/>
+          <p:cNvPr id="16" name="TextBox 15"/>
           <p:cNvSpPr txBox="1"/>
           <p:nvPr/>
         </p:nvSpPr>
         <p:spPr>
           <a:xfrm>
-            <a:off x="749808" y="4309561"/>
+            <a:off x="749808" y="4887984"/>
             <a:ext cx="2425446" cy="475488"/>
           </a:xfrm>
           <a:prstGeom prst="rect">
@@ -15434,7 +14847,7 @@
       </p:sp>
       <p:sp>
         <p:nvSpPr>
-          <p:cNvPr id="16" name="TextBox 15"/>
+          <p:cNvPr id="17" name="TextBox 16"/>
           <p:cNvSpPr txBox="1"/>
           <p:nvPr/>
         </p:nvSpPr>
@@ -15476,14 +14889,14 @@
       </p:sp>
       <p:sp>
         <p:nvSpPr>
-          <p:cNvPr id="17" name="Rectangle 16"/>
+          <p:cNvPr id="18" name="Rectangle 17"/>
           <p:cNvSpPr/>
           <p:nvPr/>
         </p:nvSpPr>
         <p:spPr>
           <a:xfrm>
-            <a:off x="3394710" y="3925513"/>
-            <a:ext cx="2644902" cy="2292406"/>
+            <a:off x="3394710" y="4503936"/>
+            <a:ext cx="2644902" cy="1713983"/>
           </a:xfrm>
           <a:prstGeom prst="rect">
             <a:avLst/>
@@ -15525,13 +14938,13 @@
       </p:sp>
       <p:sp>
         <p:nvSpPr>
-          <p:cNvPr id="18" name="Rectangle 17"/>
+          <p:cNvPr id="19" name="Rectangle 18"/>
           <p:cNvSpPr/>
           <p:nvPr/>
         </p:nvSpPr>
         <p:spPr>
           <a:xfrm>
-            <a:off x="3394710" y="3925513"/>
+            <a:off x="3394710" y="4503936"/>
             <a:ext cx="2644902" cy="45720"/>
           </a:xfrm>
           <a:prstGeom prst="rect">
@@ -15574,13 +14987,13 @@
       </p:sp>
       <p:sp>
         <p:nvSpPr>
-          <p:cNvPr id="19" name="TextBox 18"/>
+          <p:cNvPr id="20" name="TextBox 19"/>
           <p:cNvSpPr txBox="1"/>
           <p:nvPr/>
         </p:nvSpPr>
         <p:spPr>
           <a:xfrm>
-            <a:off x="3504438" y="4053529"/>
+            <a:off x="3504438" y="4631952"/>
             <a:ext cx="2425446" cy="201168"/>
           </a:xfrm>
           <a:prstGeom prst="rect">
@@ -15616,13 +15029,13 @@
       </p:sp>
       <p:sp>
         <p:nvSpPr>
-          <p:cNvPr id="20" name="TextBox 19"/>
+          <p:cNvPr id="21" name="TextBox 20"/>
           <p:cNvSpPr txBox="1"/>
           <p:nvPr/>
         </p:nvSpPr>
         <p:spPr>
           <a:xfrm>
-            <a:off x="3504438" y="4309561"/>
+            <a:off x="3504438" y="4887984"/>
             <a:ext cx="2425446" cy="475488"/>
           </a:xfrm>
           <a:prstGeom prst="rect">
@@ -15658,7 +15071,7 @@
       </p:sp>
       <p:sp>
         <p:nvSpPr>
-          <p:cNvPr id="21" name="TextBox 20"/>
+          <p:cNvPr id="22" name="TextBox 21"/>
           <p:cNvSpPr txBox="1"/>
           <p:nvPr/>
         </p:nvSpPr>
@@ -15700,14 +15113,14 @@
       </p:sp>
       <p:sp>
         <p:nvSpPr>
-          <p:cNvPr id="22" name="Rectangle 21"/>
+          <p:cNvPr id="23" name="Rectangle 22"/>
           <p:cNvSpPr/>
           <p:nvPr/>
         </p:nvSpPr>
         <p:spPr>
           <a:xfrm>
-            <a:off x="6149340" y="3925513"/>
-            <a:ext cx="2644902" cy="2292406"/>
+            <a:off x="6149340" y="4503936"/>
+            <a:ext cx="2644902" cy="1713983"/>
           </a:xfrm>
           <a:prstGeom prst="rect">
             <a:avLst/>
@@ -15749,13 +15162,13 @@
       </p:sp>
       <p:sp>
         <p:nvSpPr>
-          <p:cNvPr id="23" name="Rectangle 22"/>
+          <p:cNvPr id="24" name="Rectangle 23"/>
           <p:cNvSpPr/>
           <p:nvPr/>
         </p:nvSpPr>
         <p:spPr>
           <a:xfrm>
-            <a:off x="6149340" y="3925513"/>
+            <a:off x="6149340" y="4503936"/>
             <a:ext cx="2644902" cy="45720"/>
           </a:xfrm>
           <a:prstGeom prst="rect">
@@ -15798,13 +15211,13 @@
       </p:sp>
       <p:sp>
         <p:nvSpPr>
-          <p:cNvPr id="24" name="TextBox 23"/>
+          <p:cNvPr id="25" name="TextBox 24"/>
           <p:cNvSpPr txBox="1"/>
           <p:nvPr/>
         </p:nvSpPr>
         <p:spPr>
           <a:xfrm>
-            <a:off x="6259068" y="4053529"/>
+            <a:off x="6259068" y="4631952"/>
             <a:ext cx="2425446" cy="201168"/>
           </a:xfrm>
           <a:prstGeom prst="rect">
@@ -15840,13 +15253,13 @@
       </p:sp>
       <p:sp>
         <p:nvSpPr>
-          <p:cNvPr id="25" name="TextBox 24"/>
+          <p:cNvPr id="26" name="TextBox 25"/>
           <p:cNvSpPr txBox="1"/>
           <p:nvPr/>
         </p:nvSpPr>
         <p:spPr>
           <a:xfrm>
-            <a:off x="6259068" y="4309561"/>
+            <a:off x="6259068" y="4887984"/>
             <a:ext cx="2425446" cy="475488"/>
           </a:xfrm>
           <a:prstGeom prst="rect">
@@ -15882,7 +15295,7 @@
       </p:sp>
       <p:sp>
         <p:nvSpPr>
-          <p:cNvPr id="26" name="TextBox 25"/>
+          <p:cNvPr id="27" name="TextBox 26"/>
           <p:cNvSpPr txBox="1"/>
           <p:nvPr/>
         </p:nvSpPr>
@@ -15924,14 +15337,14 @@
       </p:sp>
       <p:sp>
         <p:nvSpPr>
-          <p:cNvPr id="27" name="Rectangle 26"/>
+          <p:cNvPr id="28" name="Rectangle 27"/>
           <p:cNvSpPr/>
           <p:nvPr/>
         </p:nvSpPr>
         <p:spPr>
           <a:xfrm>
-            <a:off x="8903970" y="3925513"/>
-            <a:ext cx="2644902" cy="2292406"/>
+            <a:off x="8903970" y="4503936"/>
+            <a:ext cx="2644902" cy="1713983"/>
           </a:xfrm>
           <a:prstGeom prst="rect">
             <a:avLst/>
@@ -15973,13 +15386,13 @@
       </p:sp>
       <p:sp>
         <p:nvSpPr>
-          <p:cNvPr id="28" name="Rectangle 27"/>
+          <p:cNvPr id="29" name="Rectangle 28"/>
           <p:cNvSpPr/>
           <p:nvPr/>
         </p:nvSpPr>
         <p:spPr>
           <a:xfrm>
-            <a:off x="8903970" y="3925513"/>
+            <a:off x="8903970" y="4503936"/>
             <a:ext cx="2644902" cy="45720"/>
           </a:xfrm>
           <a:prstGeom prst="rect">
@@ -16022,13 +15435,13 @@
       </p:sp>
       <p:sp>
         <p:nvSpPr>
-          <p:cNvPr id="29" name="TextBox 28"/>
+          <p:cNvPr id="30" name="TextBox 29"/>
           <p:cNvSpPr txBox="1"/>
           <p:nvPr/>
         </p:nvSpPr>
         <p:spPr>
           <a:xfrm>
-            <a:off x="9013698" y="4053529"/>
+            <a:off x="9013698" y="4631952"/>
             <a:ext cx="2425446" cy="201168"/>
           </a:xfrm>
           <a:prstGeom prst="rect">
@@ -16064,13 +15477,13 @@
       </p:sp>
       <p:sp>
         <p:nvSpPr>
-          <p:cNvPr id="30" name="TextBox 29"/>
+          <p:cNvPr id="31" name="TextBox 30"/>
           <p:cNvSpPr txBox="1"/>
           <p:nvPr/>
         </p:nvSpPr>
         <p:spPr>
           <a:xfrm>
-            <a:off x="9013698" y="4309561"/>
+            <a:off x="9013698" y="4887984"/>
             <a:ext cx="2425446" cy="475488"/>
           </a:xfrm>
           <a:prstGeom prst="rect">
@@ -16106,7 +15519,7 @@
       </p:sp>
       <p:sp>
         <p:nvSpPr>
-          <p:cNvPr id="31" name="TextBox 30"/>
+          <p:cNvPr id="32" name="TextBox 31"/>
           <p:cNvSpPr txBox="1"/>
           <p:nvPr/>
         </p:nvSpPr>
@@ -16148,7 +15561,7 @@
       </p:sp>
       <p:sp>
         <p:nvSpPr>
-          <p:cNvPr id="32" name="Rectangle 31"/>
+          <p:cNvPr id="33" name="Rectangle 32"/>
           <p:cNvSpPr/>
           <p:nvPr/>
         </p:nvSpPr>
@@ -16197,7 +15610,7 @@
       </p:sp>
       <p:sp>
         <p:nvSpPr>
-          <p:cNvPr id="33" name="TextBox 32"/>
+          <p:cNvPr id="34" name="TextBox 33"/>
           <p:cNvSpPr txBox="1"/>
           <p:nvPr/>
         </p:nvSpPr>
@@ -16239,7 +15652,7 @@
       </p:sp>
       <p:sp>
         <p:nvSpPr>
-          <p:cNvPr id="34" name="TextBox 33"/>
+          <p:cNvPr id="35" name="TextBox 34"/>
           <p:cNvSpPr txBox="1"/>
           <p:nvPr/>
         </p:nvSpPr>
@@ -16281,7 +15694,7 @@
       </p:sp>
       <p:sp>
         <p:nvSpPr>
-          <p:cNvPr id="35" name="TextBox 34"/>
+          <p:cNvPr id="36" name="TextBox 35"/>
           <p:cNvSpPr txBox="1"/>
           <p:nvPr/>
         </p:nvSpPr>
@@ -16397,7 +15810,7 @@
         <p:spPr>
           <a:xfrm>
             <a:off x="640080" y="329184"/>
-            <a:ext cx="5303520" cy="182880"/>
+            <a:ext cx="9875520" cy="182880"/>
           </a:xfrm>
           <a:prstGeom prst="rect">
             <a:avLst/>
@@ -16438,48 +15851,6 @@
         </p:nvSpPr>
         <p:spPr>
           <a:xfrm>
-            <a:off x="5897880" y="310896"/>
-            <a:ext cx="4800600" cy="256032"/>
-          </a:xfrm>
-          <a:prstGeom prst="rect">
-            <a:avLst/>
-          </a:prstGeom>
-          <a:noFill/>
-        </p:spPr>
-        <p:txBody>
-          <a:bodyPr wrap="none" lIns="9144" rIns="9144" tIns="9144" bIns="9144" anchor="t">
-            <a:spAutoFit/>
-          </a:bodyPr>
-          <a:lstStyle/>
-          <a:p>
-            <a:pPr algn="r">
-              <a:spcAft>
-                <a:spcPts val="0"/>
-              </a:spcAft>
-              <a:defRPr sz="680" b="1">
-                <a:solidFill>
-                  <a:srgbClr val="4F6B00"/>
-                </a:solidFill>
-                <a:latin typeface="Inter"/>
-              </a:defRPr>
-            </a:pPr>
-            <a:r>
-              <a:rPr>
-                <a:latin typeface="Inter"/>
-              </a:rPr>
-              <a:t>Illustrative, Gradient Maintained — demo data, not the client's holdings or managers</a:t>
-            </a:r>
-          </a:p>
-        </p:txBody>
-      </p:sp>
-      <p:sp>
-        <p:nvSpPr>
-          <p:cNvPr id="5" name="TextBox 4"/>
-          <p:cNvSpPr txBox="1"/>
-          <p:nvPr/>
-        </p:nvSpPr>
-        <p:spPr>
-          <a:xfrm>
             <a:off x="640080" y="566928"/>
             <a:ext cx="10058400" cy="530352"/>
           </a:xfrm>
@@ -16516,7 +15887,7 @@
       </p:sp>
       <p:sp>
         <p:nvSpPr>
-          <p:cNvPr id="6" name="Rectangle 5"/>
+          <p:cNvPr id="5" name="Rectangle 4"/>
           <p:cNvSpPr/>
           <p:nvPr/>
         </p:nvSpPr>
@@ -16565,7 +15936,7 @@
       </p:sp>
       <p:sp>
         <p:nvSpPr>
-          <p:cNvPr id="7" name="Rectangle 6"/>
+          <p:cNvPr id="6" name="Rectangle 5"/>
           <p:cNvSpPr/>
           <p:nvPr/>
         </p:nvSpPr>
@@ -16614,7 +15985,7 @@
       </p:sp>
       <p:sp>
         <p:nvSpPr>
-          <p:cNvPr id="8" name="TextBox 7"/>
+          <p:cNvPr id="7" name="TextBox 6"/>
           <p:cNvSpPr txBox="1"/>
           <p:nvPr/>
         </p:nvSpPr>
@@ -16656,7 +16027,7 @@
       </p:sp>
       <p:sp>
         <p:nvSpPr>
-          <p:cNvPr id="9" name="TextBox 8"/>
+          <p:cNvPr id="8" name="TextBox 7"/>
           <p:cNvSpPr txBox="1"/>
           <p:nvPr/>
         </p:nvSpPr>
@@ -16698,7 +16069,7 @@
       </p:sp>
       <p:graphicFrame>
         <p:nvGraphicFramePr>
-          <p:cNvPr id="10" name="Table 9"/>
+          <p:cNvPr id="9" name="Table 8"/>
           <p:cNvGraphicFramePr>
             <a:graphicFrameLocks noGrp="1"/>
           </p:cNvGraphicFramePr>
@@ -17057,7 +16428,7 @@
       </p:graphicFrame>
       <p:sp>
         <p:nvSpPr>
-          <p:cNvPr id="11" name="Rectangle 10"/>
+          <p:cNvPr id="10" name="Rectangle 9"/>
           <p:cNvSpPr/>
           <p:nvPr/>
         </p:nvSpPr>
@@ -17106,7 +16477,7 @@
       </p:sp>
       <p:sp>
         <p:nvSpPr>
-          <p:cNvPr id="12" name="TextBox 11"/>
+          <p:cNvPr id="11" name="TextBox 10"/>
           <p:cNvSpPr txBox="1"/>
           <p:nvPr/>
         </p:nvSpPr>
@@ -17148,7 +16519,7 @@
       </p:sp>
       <p:sp>
         <p:nvSpPr>
-          <p:cNvPr id="13" name="TextBox 12"/>
+          <p:cNvPr id="12" name="TextBox 11"/>
           <p:cNvSpPr txBox="1"/>
           <p:nvPr/>
         </p:nvSpPr>
@@ -17190,7 +16561,7 @@
       </p:sp>
       <p:sp>
         <p:nvSpPr>
-          <p:cNvPr id="14" name="TextBox 13"/>
+          <p:cNvPr id="13" name="TextBox 12"/>
           <p:cNvSpPr txBox="1"/>
           <p:nvPr/>
         </p:nvSpPr>
@@ -17306,7 +16677,7 @@
         <p:spPr>
           <a:xfrm>
             <a:off x="640080" y="329184"/>
-            <a:ext cx="5303520" cy="182880"/>
+            <a:ext cx="9875520" cy="182880"/>
           </a:xfrm>
           <a:prstGeom prst="rect">
             <a:avLst/>
@@ -17347,48 +16718,6 @@
         </p:nvSpPr>
         <p:spPr>
           <a:xfrm>
-            <a:off x="5897880" y="310896"/>
-            <a:ext cx="4800600" cy="256032"/>
-          </a:xfrm>
-          <a:prstGeom prst="rect">
-            <a:avLst/>
-          </a:prstGeom>
-          <a:noFill/>
-        </p:spPr>
-        <p:txBody>
-          <a:bodyPr wrap="none" lIns="9144" rIns="9144" tIns="9144" bIns="9144" anchor="t">
-            <a:spAutoFit/>
-          </a:bodyPr>
-          <a:lstStyle/>
-          <a:p>
-            <a:pPr algn="r">
-              <a:spcAft>
-                <a:spcPts val="0"/>
-              </a:spcAft>
-              <a:defRPr sz="680" b="1">
-                <a:solidFill>
-                  <a:srgbClr val="4F6B00"/>
-                </a:solidFill>
-                <a:latin typeface="Inter"/>
-              </a:defRPr>
-            </a:pPr>
-            <a:r>
-              <a:rPr>
-                <a:latin typeface="Inter"/>
-              </a:rPr>
-              <a:t>Illustrative, Gradient Maintained — demo data, not the client's holdings or managers</a:t>
-            </a:r>
-          </a:p>
-        </p:txBody>
-      </p:sp>
-      <p:sp>
-        <p:nvSpPr>
-          <p:cNvPr id="5" name="TextBox 4"/>
-          <p:cNvSpPr txBox="1"/>
-          <p:nvPr/>
-        </p:nvSpPr>
-        <p:spPr>
-          <a:xfrm>
             <a:off x="640080" y="566928"/>
             <a:ext cx="10058400" cy="530352"/>
           </a:xfrm>
@@ -17425,7 +16754,7 @@
       </p:sp>
       <p:sp>
         <p:nvSpPr>
-          <p:cNvPr id="6" name="Rectangle 5"/>
+          <p:cNvPr id="5" name="Rectangle 4"/>
           <p:cNvSpPr/>
           <p:nvPr/>
         </p:nvSpPr>
@@ -17474,7 +16803,7 @@
       </p:sp>
       <p:sp>
         <p:nvSpPr>
-          <p:cNvPr id="7" name="Rectangle 6"/>
+          <p:cNvPr id="6" name="Rectangle 5"/>
           <p:cNvSpPr/>
           <p:nvPr/>
         </p:nvSpPr>
@@ -17523,7 +16852,7 @@
       </p:sp>
       <p:sp>
         <p:nvSpPr>
-          <p:cNvPr id="8" name="TextBox 7"/>
+          <p:cNvPr id="7" name="TextBox 6"/>
           <p:cNvSpPr txBox="1"/>
           <p:nvPr/>
         </p:nvSpPr>
@@ -17565,7 +16894,7 @@
       </p:sp>
       <p:sp>
         <p:nvSpPr>
-          <p:cNvPr id="9" name="Rectangle 8"/>
+          <p:cNvPr id="8" name="Rectangle 7"/>
           <p:cNvSpPr/>
           <p:nvPr/>
         </p:nvSpPr>
@@ -17614,7 +16943,7 @@
       </p:sp>
       <p:sp>
         <p:nvSpPr>
-          <p:cNvPr id="10" name="Rectangle 9"/>
+          <p:cNvPr id="9" name="Rectangle 8"/>
           <p:cNvSpPr/>
           <p:nvPr/>
         </p:nvSpPr>
@@ -17663,7 +16992,7 @@
       </p:sp>
       <p:sp>
         <p:nvSpPr>
-          <p:cNvPr id="11" name="TextBox 10"/>
+          <p:cNvPr id="10" name="TextBox 9"/>
           <p:cNvSpPr txBox="1"/>
           <p:nvPr/>
         </p:nvSpPr>
@@ -17705,7 +17034,7 @@
       </p:sp>
       <p:sp>
         <p:nvSpPr>
-          <p:cNvPr id="12" name="TextBox 11"/>
+          <p:cNvPr id="11" name="TextBox 10"/>
           <p:cNvSpPr txBox="1"/>
           <p:nvPr/>
         </p:nvSpPr>
@@ -17747,7 +17076,7 @@
       </p:sp>
       <p:sp>
         <p:nvSpPr>
-          <p:cNvPr id="13" name="TextBox 12"/>
+          <p:cNvPr id="12" name="TextBox 11"/>
           <p:cNvSpPr txBox="1"/>
           <p:nvPr/>
         </p:nvSpPr>
@@ -17789,7 +17118,7 @@
       </p:sp>
       <p:sp>
         <p:nvSpPr>
-          <p:cNvPr id="14" name="Rectangle 13"/>
+          <p:cNvPr id="13" name="Rectangle 12"/>
           <p:cNvSpPr/>
           <p:nvPr/>
         </p:nvSpPr>
@@ -17838,7 +17167,7 @@
       </p:sp>
       <p:sp>
         <p:nvSpPr>
-          <p:cNvPr id="15" name="TextBox 14"/>
+          <p:cNvPr id="14" name="TextBox 13"/>
           <p:cNvSpPr txBox="1"/>
           <p:nvPr/>
         </p:nvSpPr>
@@ -17880,7 +17209,7 @@
       </p:sp>
       <p:sp>
         <p:nvSpPr>
-          <p:cNvPr id="16" name="TextBox 15"/>
+          <p:cNvPr id="15" name="TextBox 14"/>
           <p:cNvSpPr txBox="1"/>
           <p:nvPr/>
         </p:nvSpPr>
@@ -17922,7 +17251,7 @@
       </p:sp>
       <p:sp>
         <p:nvSpPr>
-          <p:cNvPr id="17" name="TextBox 16"/>
+          <p:cNvPr id="16" name="TextBox 15"/>
           <p:cNvSpPr txBox="1"/>
           <p:nvPr/>
         </p:nvSpPr>
@@ -18038,7 +17367,7 @@
         <p:spPr>
           <a:xfrm>
             <a:off x="640080" y="329184"/>
-            <a:ext cx="5303520" cy="182880"/>
+            <a:ext cx="9875520" cy="182880"/>
           </a:xfrm>
           <a:prstGeom prst="rect">
             <a:avLst/>
@@ -18079,48 +17408,6 @@
         </p:nvSpPr>
         <p:spPr>
           <a:xfrm>
-            <a:off x="5897880" y="310896"/>
-            <a:ext cx="4800600" cy="256032"/>
-          </a:xfrm>
-          <a:prstGeom prst="rect">
-            <a:avLst/>
-          </a:prstGeom>
-          <a:noFill/>
-        </p:spPr>
-        <p:txBody>
-          <a:bodyPr wrap="none" lIns="9144" rIns="9144" tIns="9144" bIns="9144" anchor="t">
-            <a:spAutoFit/>
-          </a:bodyPr>
-          <a:lstStyle/>
-          <a:p>
-            <a:pPr algn="r">
-              <a:spcAft>
-                <a:spcPts val="0"/>
-              </a:spcAft>
-              <a:defRPr sz="680" b="1">
-                <a:solidFill>
-                  <a:srgbClr val="4F6B00"/>
-                </a:solidFill>
-                <a:latin typeface="Inter"/>
-              </a:defRPr>
-            </a:pPr>
-            <a:r>
-              <a:rPr>
-                <a:latin typeface="Inter"/>
-              </a:rPr>
-              <a:t>Illustrative, Gradient Maintained — demo data, not the client's holdings or managers</a:t>
-            </a:r>
-          </a:p>
-        </p:txBody>
-      </p:sp>
-      <p:sp>
-        <p:nvSpPr>
-          <p:cNvPr id="5" name="TextBox 4"/>
-          <p:cNvSpPr txBox="1"/>
-          <p:nvPr/>
-        </p:nvSpPr>
-        <p:spPr>
-          <a:xfrm>
             <a:off x="640080" y="566928"/>
             <a:ext cx="10058400" cy="530352"/>
           </a:xfrm>
@@ -18157,7 +17444,7 @@
       </p:sp>
       <p:sp>
         <p:nvSpPr>
-          <p:cNvPr id="6" name="Rectangle 5"/>
+          <p:cNvPr id="5" name="Rectangle 4"/>
           <p:cNvSpPr/>
           <p:nvPr/>
         </p:nvSpPr>
@@ -18206,7 +17493,7 @@
       </p:sp>
       <p:sp>
         <p:nvSpPr>
-          <p:cNvPr id="7" name="Rectangle 6"/>
+          <p:cNvPr id="6" name="Rectangle 5"/>
           <p:cNvSpPr/>
           <p:nvPr/>
         </p:nvSpPr>
@@ -18255,7 +17542,7 @@
       </p:sp>
       <p:sp>
         <p:nvSpPr>
-          <p:cNvPr id="8" name="TextBox 7"/>
+          <p:cNvPr id="7" name="TextBox 6"/>
           <p:cNvSpPr txBox="1"/>
           <p:nvPr/>
         </p:nvSpPr>
@@ -18297,7 +17584,7 @@
       </p:sp>
       <p:sp>
         <p:nvSpPr>
-          <p:cNvPr id="9" name="TextBox 8"/>
+          <p:cNvPr id="8" name="TextBox 7"/>
           <p:cNvSpPr txBox="1"/>
           <p:nvPr/>
         </p:nvSpPr>
@@ -18339,7 +17626,7 @@
       </p:sp>
       <p:graphicFrame>
         <p:nvGraphicFramePr>
-          <p:cNvPr id="10" name="Chart 9"/>
+          <p:cNvPr id="9" name="Chart 8"/>
           <p:cNvGraphicFramePr>
             <a:graphicFrameLocks noGrp="1"/>
           </p:cNvGraphicFramePr>
@@ -18357,7 +17644,7 @@
       </p:graphicFrame>
       <p:sp>
         <p:nvSpPr>
-          <p:cNvPr id="11" name="Rectangle 10"/>
+          <p:cNvPr id="10" name="Rectangle 9"/>
           <p:cNvSpPr/>
           <p:nvPr/>
         </p:nvSpPr>
@@ -18406,7 +17693,7 @@
       </p:sp>
       <p:sp>
         <p:nvSpPr>
-          <p:cNvPr id="12" name="TextBox 11"/>
+          <p:cNvPr id="11" name="TextBox 10"/>
           <p:cNvSpPr txBox="1"/>
           <p:nvPr/>
         </p:nvSpPr>
@@ -18448,7 +17735,7 @@
       </p:sp>
       <p:sp>
         <p:nvSpPr>
-          <p:cNvPr id="13" name="TextBox 12"/>
+          <p:cNvPr id="12" name="TextBox 11"/>
           <p:cNvSpPr txBox="1"/>
           <p:nvPr/>
         </p:nvSpPr>
@@ -18490,7 +17777,7 @@
       </p:sp>
       <p:sp>
         <p:nvSpPr>
-          <p:cNvPr id="14" name="TextBox 13"/>
+          <p:cNvPr id="13" name="TextBox 12"/>
           <p:cNvSpPr txBox="1"/>
           <p:nvPr/>
         </p:nvSpPr>
@@ -18606,7 +17893,7 @@
         <p:spPr>
           <a:xfrm>
             <a:off x="640080" y="329184"/>
-            <a:ext cx="5303520" cy="182880"/>
+            <a:ext cx="9875520" cy="182880"/>
           </a:xfrm>
           <a:prstGeom prst="rect">
             <a:avLst/>
@@ -18647,48 +17934,6 @@
         </p:nvSpPr>
         <p:spPr>
           <a:xfrm>
-            <a:off x="5897880" y="310896"/>
-            <a:ext cx="4800600" cy="256032"/>
-          </a:xfrm>
-          <a:prstGeom prst="rect">
-            <a:avLst/>
-          </a:prstGeom>
-          <a:noFill/>
-        </p:spPr>
-        <p:txBody>
-          <a:bodyPr wrap="none" lIns="9144" rIns="9144" tIns="9144" bIns="9144" anchor="t">
-            <a:spAutoFit/>
-          </a:bodyPr>
-          <a:lstStyle/>
-          <a:p>
-            <a:pPr algn="r">
-              <a:spcAft>
-                <a:spcPts val="0"/>
-              </a:spcAft>
-              <a:defRPr sz="680" b="1">
-                <a:solidFill>
-                  <a:srgbClr val="4F6B00"/>
-                </a:solidFill>
-                <a:latin typeface="Inter"/>
-              </a:defRPr>
-            </a:pPr>
-            <a:r>
-              <a:rPr>
-                <a:latin typeface="Inter"/>
-              </a:rPr>
-              <a:t>Illustrative, Gradient Maintained — demo data, not the client's holdings or managers</a:t>
-            </a:r>
-          </a:p>
-        </p:txBody>
-      </p:sp>
-      <p:sp>
-        <p:nvSpPr>
-          <p:cNvPr id="5" name="TextBox 4"/>
-          <p:cNvSpPr txBox="1"/>
-          <p:nvPr/>
-        </p:nvSpPr>
-        <p:spPr>
-          <a:xfrm>
             <a:off x="640080" y="566928"/>
             <a:ext cx="10058400" cy="530352"/>
           </a:xfrm>
@@ -18725,7 +17970,7 @@
       </p:sp>
       <p:sp>
         <p:nvSpPr>
-          <p:cNvPr id="6" name="Rectangle 5"/>
+          <p:cNvPr id="5" name="Rectangle 4"/>
           <p:cNvSpPr/>
           <p:nvPr/>
         </p:nvSpPr>
@@ -18774,7 +18019,7 @@
       </p:sp>
       <p:sp>
         <p:nvSpPr>
-          <p:cNvPr id="7" name="Rectangle 6"/>
+          <p:cNvPr id="6" name="Rectangle 5"/>
           <p:cNvSpPr/>
           <p:nvPr/>
         </p:nvSpPr>
@@ -18823,7 +18068,7 @@
       </p:sp>
       <p:sp>
         <p:nvSpPr>
-          <p:cNvPr id="8" name="TextBox 7"/>
+          <p:cNvPr id="7" name="TextBox 6"/>
           <p:cNvSpPr txBox="1"/>
           <p:nvPr/>
         </p:nvSpPr>
@@ -18865,7 +18110,7 @@
       </p:sp>
       <p:sp>
         <p:nvSpPr>
-          <p:cNvPr id="9" name="TextBox 8"/>
+          <p:cNvPr id="8" name="TextBox 7"/>
           <p:cNvSpPr txBox="1"/>
           <p:nvPr/>
         </p:nvSpPr>
@@ -18907,7 +18152,7 @@
       </p:sp>
       <p:graphicFrame>
         <p:nvGraphicFramePr>
-          <p:cNvPr id="10" name="Table 9"/>
+          <p:cNvPr id="9" name="Table 8"/>
           <p:cNvGraphicFramePr>
             <a:graphicFrameLocks noGrp="1"/>
           </p:cNvGraphicFramePr>
@@ -19593,7 +18838,7 @@
       </p:graphicFrame>
       <p:sp>
         <p:nvSpPr>
-          <p:cNvPr id="11" name="TextBox 10"/>
+          <p:cNvPr id="10" name="TextBox 9"/>
           <p:cNvSpPr txBox="1"/>
           <p:nvPr/>
         </p:nvSpPr>
@@ -19635,7 +18880,7 @@
       </p:sp>
       <p:graphicFrame>
         <p:nvGraphicFramePr>
-          <p:cNvPr id="12" name="Table 11"/>
+          <p:cNvPr id="11" name="Table 10"/>
           <p:cNvGraphicFramePr>
             <a:graphicFrameLocks noGrp="1"/>
           </p:cNvGraphicFramePr>
@@ -20157,7 +19402,7 @@
       </p:graphicFrame>
       <p:sp>
         <p:nvSpPr>
-          <p:cNvPr id="13" name="Rectangle 12"/>
+          <p:cNvPr id="12" name="Rectangle 11"/>
           <p:cNvSpPr/>
           <p:nvPr/>
         </p:nvSpPr>
@@ -20206,7 +19451,7 @@
       </p:sp>
       <p:sp>
         <p:nvSpPr>
-          <p:cNvPr id="14" name="Rectangle 13"/>
+          <p:cNvPr id="13" name="Rectangle 12"/>
           <p:cNvSpPr/>
           <p:nvPr/>
         </p:nvSpPr>
@@ -20255,7 +19500,7 @@
       </p:sp>
       <p:sp>
         <p:nvSpPr>
-          <p:cNvPr id="15" name="TextBox 14"/>
+          <p:cNvPr id="14" name="TextBox 13"/>
           <p:cNvSpPr txBox="1"/>
           <p:nvPr/>
         </p:nvSpPr>
@@ -20297,7 +19542,7 @@
       </p:sp>
       <p:sp>
         <p:nvSpPr>
-          <p:cNvPr id="16" name="TextBox 15"/>
+          <p:cNvPr id="15" name="TextBox 14"/>
           <p:cNvSpPr txBox="1"/>
           <p:nvPr/>
         </p:nvSpPr>
@@ -20339,7 +19584,7 @@
       </p:sp>
       <p:sp>
         <p:nvSpPr>
-          <p:cNvPr id="17" name="Rectangle 16"/>
+          <p:cNvPr id="16" name="Rectangle 15"/>
           <p:cNvSpPr/>
           <p:nvPr/>
         </p:nvSpPr>
@@ -20388,7 +19633,7 @@
       </p:sp>
       <p:sp>
         <p:nvSpPr>
-          <p:cNvPr id="18" name="Rectangle 17"/>
+          <p:cNvPr id="17" name="Rectangle 16"/>
           <p:cNvSpPr/>
           <p:nvPr/>
         </p:nvSpPr>
@@ -20437,7 +19682,7 @@
       </p:sp>
       <p:sp>
         <p:nvSpPr>
-          <p:cNvPr id="19" name="TextBox 18"/>
+          <p:cNvPr id="18" name="TextBox 17"/>
           <p:cNvSpPr txBox="1"/>
           <p:nvPr/>
         </p:nvSpPr>
@@ -20479,7 +19724,7 @@
       </p:sp>
       <p:sp>
         <p:nvSpPr>
-          <p:cNvPr id="20" name="TextBox 19"/>
+          <p:cNvPr id="19" name="TextBox 18"/>
           <p:cNvSpPr txBox="1"/>
           <p:nvPr/>
         </p:nvSpPr>
@@ -20521,7 +19766,7 @@
       </p:sp>
       <p:sp>
         <p:nvSpPr>
-          <p:cNvPr id="21" name="Rectangle 20"/>
+          <p:cNvPr id="20" name="Rectangle 19"/>
           <p:cNvSpPr/>
           <p:nvPr/>
         </p:nvSpPr>
@@ -20570,7 +19815,7 @@
       </p:sp>
       <p:sp>
         <p:nvSpPr>
-          <p:cNvPr id="22" name="TextBox 21"/>
+          <p:cNvPr id="21" name="TextBox 20"/>
           <p:cNvSpPr txBox="1"/>
           <p:nvPr/>
         </p:nvSpPr>
@@ -20612,7 +19857,7 @@
       </p:sp>
       <p:sp>
         <p:nvSpPr>
-          <p:cNvPr id="23" name="TextBox 22"/>
+          <p:cNvPr id="22" name="TextBox 21"/>
           <p:cNvSpPr txBox="1"/>
           <p:nvPr/>
         </p:nvSpPr>
@@ -20654,7 +19899,7 @@
       </p:sp>
       <p:sp>
         <p:nvSpPr>
-          <p:cNvPr id="24" name="TextBox 23"/>
+          <p:cNvPr id="23" name="TextBox 22"/>
           <p:cNvSpPr txBox="1"/>
           <p:nvPr/>
         </p:nvSpPr>
@@ -20769,48 +20014,6 @@
         </p:nvSpPr>
         <p:spPr>
           <a:xfrm>
-            <a:off x="5897880" y="310896"/>
-            <a:ext cx="4800600" cy="256032"/>
-          </a:xfrm>
-          <a:prstGeom prst="rect">
-            <a:avLst/>
-          </a:prstGeom>
-          <a:noFill/>
-        </p:spPr>
-        <p:txBody>
-          <a:bodyPr wrap="none" lIns="9144" rIns="9144" tIns="9144" bIns="9144" anchor="t">
-            <a:spAutoFit/>
-          </a:bodyPr>
-          <a:lstStyle/>
-          <a:p>
-            <a:pPr algn="r">
-              <a:spcAft>
-                <a:spcPts val="0"/>
-              </a:spcAft>
-              <a:defRPr sz="680" b="1">
-                <a:solidFill>
-                  <a:srgbClr val="4F6B00"/>
-                </a:solidFill>
-                <a:latin typeface="Inter"/>
-              </a:defRPr>
-            </a:pPr>
-            <a:r>
-              <a:rPr>
-                <a:latin typeface="Inter"/>
-              </a:rPr>
-              <a:t>Illustrative, Gradient Maintained — demo data, not the client's holdings or managers</a:t>
-            </a:r>
-          </a:p>
-        </p:txBody>
-      </p:sp>
-      <p:sp>
-        <p:nvSpPr>
-          <p:cNvPr id="4" name="TextBox 3"/>
-          <p:cNvSpPr txBox="1"/>
-          <p:nvPr/>
-        </p:nvSpPr>
-        <p:spPr>
-          <a:xfrm>
             <a:off x="640080" y="566928"/>
             <a:ext cx="10058400" cy="530352"/>
           </a:xfrm>
@@ -20847,7 +20050,7 @@
       </p:sp>
       <p:sp>
         <p:nvSpPr>
-          <p:cNvPr id="5" name="Rectangle 4"/>
+          <p:cNvPr id="4" name="Rectangle 3"/>
           <p:cNvSpPr/>
           <p:nvPr/>
         </p:nvSpPr>
@@ -20896,7 +20099,7 @@
       </p:sp>
       <p:sp>
         <p:nvSpPr>
-          <p:cNvPr id="6" name="Rectangle 5"/>
+          <p:cNvPr id="5" name="Rectangle 4"/>
           <p:cNvSpPr/>
           <p:nvPr/>
         </p:nvSpPr>
@@ -20945,7 +20148,7 @@
       </p:sp>
       <p:sp>
         <p:nvSpPr>
-          <p:cNvPr id="7" name="TextBox 6"/>
+          <p:cNvPr id="6" name="TextBox 5"/>
           <p:cNvSpPr txBox="1"/>
           <p:nvPr/>
         </p:nvSpPr>
@@ -20987,7 +20190,7 @@
       </p:sp>
       <p:sp>
         <p:nvSpPr>
-          <p:cNvPr id="8" name="TextBox 7"/>
+          <p:cNvPr id="7" name="TextBox 6"/>
           <p:cNvSpPr txBox="1"/>
           <p:nvPr/>
         </p:nvSpPr>
@@ -21029,7 +20232,7 @@
       </p:sp>
       <p:graphicFrame>
         <p:nvGraphicFramePr>
-          <p:cNvPr id="9" name="Chart 8"/>
+          <p:cNvPr id="8" name="Chart 7"/>
           <p:cNvGraphicFramePr>
             <a:graphicFrameLocks noGrp="1"/>
           </p:cNvGraphicFramePr>
@@ -21047,7 +20250,7 @@
       </p:graphicFrame>
       <p:sp>
         <p:nvSpPr>
-          <p:cNvPr id="10" name="Rectangle 9"/>
+          <p:cNvPr id="9" name="Rectangle 8"/>
           <p:cNvSpPr/>
           <p:nvPr/>
         </p:nvSpPr>
@@ -21096,7 +20299,7 @@
       </p:sp>
       <p:sp>
         <p:nvSpPr>
-          <p:cNvPr id="11" name="TextBox 10"/>
+          <p:cNvPr id="10" name="TextBox 9"/>
           <p:cNvSpPr txBox="1"/>
           <p:nvPr/>
         </p:nvSpPr>
@@ -21138,7 +20341,7 @@
       </p:sp>
       <p:sp>
         <p:nvSpPr>
-          <p:cNvPr id="12" name="TextBox 11"/>
+          <p:cNvPr id="11" name="TextBox 10"/>
           <p:cNvSpPr txBox="1"/>
           <p:nvPr/>
         </p:nvSpPr>
@@ -21180,7 +20383,7 @@
       </p:sp>
       <p:sp>
         <p:nvSpPr>
-          <p:cNvPr id="13" name="TextBox 12"/>
+          <p:cNvPr id="12" name="TextBox 11"/>
           <p:cNvSpPr txBox="1"/>
           <p:nvPr/>
         </p:nvSpPr>
@@ -21295,48 +20498,6 @@
         </p:nvSpPr>
         <p:spPr>
           <a:xfrm>
-            <a:off x="5897880" y="310896"/>
-            <a:ext cx="4800600" cy="256032"/>
-          </a:xfrm>
-          <a:prstGeom prst="rect">
-            <a:avLst/>
-          </a:prstGeom>
-          <a:noFill/>
-        </p:spPr>
-        <p:txBody>
-          <a:bodyPr wrap="none" lIns="9144" rIns="9144" tIns="9144" bIns="9144" anchor="t">
-            <a:spAutoFit/>
-          </a:bodyPr>
-          <a:lstStyle/>
-          <a:p>
-            <a:pPr algn="r">
-              <a:spcAft>
-                <a:spcPts val="0"/>
-              </a:spcAft>
-              <a:defRPr sz="680" b="1">
-                <a:solidFill>
-                  <a:srgbClr val="4F6B00"/>
-                </a:solidFill>
-                <a:latin typeface="Inter"/>
-              </a:defRPr>
-            </a:pPr>
-            <a:r>
-              <a:rPr>
-                <a:latin typeface="Inter"/>
-              </a:rPr>
-              <a:t>Illustrative, Gradient Maintained — demo data, not the client's holdings or managers</a:t>
-            </a:r>
-          </a:p>
-        </p:txBody>
-      </p:sp>
-      <p:sp>
-        <p:nvSpPr>
-          <p:cNvPr id="4" name="TextBox 3"/>
-          <p:cNvSpPr txBox="1"/>
-          <p:nvPr/>
-        </p:nvSpPr>
-        <p:spPr>
-          <a:xfrm>
             <a:off x="640080" y="566928"/>
             <a:ext cx="10058400" cy="530352"/>
           </a:xfrm>
@@ -21373,7 +20534,7 @@
       </p:sp>
       <p:sp>
         <p:nvSpPr>
-          <p:cNvPr id="5" name="Rectangle 4"/>
+          <p:cNvPr id="4" name="Rectangle 3"/>
           <p:cNvSpPr/>
           <p:nvPr/>
         </p:nvSpPr>
@@ -21422,7 +20583,7 @@
       </p:sp>
       <p:sp>
         <p:nvSpPr>
-          <p:cNvPr id="6" name="Rectangle 5"/>
+          <p:cNvPr id="5" name="Rectangle 4"/>
           <p:cNvSpPr/>
           <p:nvPr/>
         </p:nvSpPr>
@@ -21471,7 +20632,7 @@
       </p:sp>
       <p:sp>
         <p:nvSpPr>
-          <p:cNvPr id="7" name="TextBox 6"/>
+          <p:cNvPr id="6" name="TextBox 5"/>
           <p:cNvSpPr txBox="1"/>
           <p:nvPr/>
         </p:nvSpPr>
@@ -21513,7 +20674,7 @@
       </p:sp>
       <p:sp>
         <p:nvSpPr>
-          <p:cNvPr id="8" name="TextBox 7"/>
+          <p:cNvPr id="7" name="TextBox 6"/>
           <p:cNvSpPr txBox="1"/>
           <p:nvPr/>
         </p:nvSpPr>
@@ -21555,7 +20716,7 @@
       </p:sp>
       <p:graphicFrame>
         <p:nvGraphicFramePr>
-          <p:cNvPr id="9" name="Table 8"/>
+          <p:cNvPr id="8" name="Table 7"/>
           <p:cNvGraphicFramePr>
             <a:graphicFrameLocks noGrp="1"/>
           </p:cNvGraphicFramePr>
@@ -22132,7 +21293,7 @@
       </p:graphicFrame>
       <p:sp>
         <p:nvSpPr>
-          <p:cNvPr id="10" name="Rectangle 9"/>
+          <p:cNvPr id="9" name="Rectangle 8"/>
           <p:cNvSpPr/>
           <p:nvPr/>
         </p:nvSpPr>
@@ -22181,7 +21342,7 @@
       </p:sp>
       <p:sp>
         <p:nvSpPr>
-          <p:cNvPr id="11" name="Rectangle 10"/>
+          <p:cNvPr id="10" name="Rectangle 9"/>
           <p:cNvSpPr/>
           <p:nvPr/>
         </p:nvSpPr>
@@ -22230,7 +21391,7 @@
       </p:sp>
       <p:sp>
         <p:nvSpPr>
-          <p:cNvPr id="12" name="TextBox 11"/>
+          <p:cNvPr id="11" name="TextBox 10"/>
           <p:cNvSpPr txBox="1"/>
           <p:nvPr/>
         </p:nvSpPr>
@@ -22272,7 +21433,7 @@
       </p:sp>
       <p:sp>
         <p:nvSpPr>
-          <p:cNvPr id="13" name="TextBox 12"/>
+          <p:cNvPr id="12" name="TextBox 11"/>
           <p:cNvSpPr txBox="1"/>
           <p:nvPr/>
         </p:nvSpPr>
@@ -22314,7 +21475,7 @@
       </p:sp>
       <p:sp>
         <p:nvSpPr>
-          <p:cNvPr id="14" name="Rectangle 13"/>
+          <p:cNvPr id="13" name="Rectangle 12"/>
           <p:cNvSpPr/>
           <p:nvPr/>
         </p:nvSpPr>
@@ -22363,7 +21524,7 @@
       </p:sp>
       <p:sp>
         <p:nvSpPr>
-          <p:cNvPr id="15" name="TextBox 14"/>
+          <p:cNvPr id="14" name="TextBox 13"/>
           <p:cNvSpPr txBox="1"/>
           <p:nvPr/>
         </p:nvSpPr>
@@ -22405,7 +21566,7 @@
       </p:sp>
       <p:sp>
         <p:nvSpPr>
-          <p:cNvPr id="16" name="TextBox 15"/>
+          <p:cNvPr id="15" name="TextBox 14"/>
           <p:cNvSpPr txBox="1"/>
           <p:nvPr/>
         </p:nvSpPr>
@@ -22447,7 +21608,7 @@
       </p:sp>
       <p:sp>
         <p:nvSpPr>
-          <p:cNvPr id="17" name="TextBox 16"/>
+          <p:cNvPr id="16" name="TextBox 15"/>
           <p:cNvSpPr txBox="1"/>
           <p:nvPr/>
         </p:nvSpPr>
@@ -22562,48 +21723,6 @@
         </p:nvSpPr>
         <p:spPr>
           <a:xfrm>
-            <a:off x="5897880" y="310896"/>
-            <a:ext cx="4800600" cy="256032"/>
-          </a:xfrm>
-          <a:prstGeom prst="rect">
-            <a:avLst/>
-          </a:prstGeom>
-          <a:noFill/>
-        </p:spPr>
-        <p:txBody>
-          <a:bodyPr wrap="none" lIns="9144" rIns="9144" tIns="9144" bIns="9144" anchor="t">
-            <a:spAutoFit/>
-          </a:bodyPr>
-          <a:lstStyle/>
-          <a:p>
-            <a:pPr algn="r">
-              <a:spcAft>
-                <a:spcPts val="0"/>
-              </a:spcAft>
-              <a:defRPr sz="680" b="1">
-                <a:solidFill>
-                  <a:srgbClr val="4F6B00"/>
-                </a:solidFill>
-                <a:latin typeface="Inter"/>
-              </a:defRPr>
-            </a:pPr>
-            <a:r>
-              <a:rPr>
-                <a:latin typeface="Inter"/>
-              </a:rPr>
-              <a:t>Illustrative, Gradient Maintained — demo data, not the client's holdings or managers</a:t>
-            </a:r>
-          </a:p>
-        </p:txBody>
-      </p:sp>
-      <p:sp>
-        <p:nvSpPr>
-          <p:cNvPr id="4" name="TextBox 3"/>
-          <p:cNvSpPr txBox="1"/>
-          <p:nvPr/>
-        </p:nvSpPr>
-        <p:spPr>
-          <a:xfrm>
             <a:off x="640080" y="566928"/>
             <a:ext cx="10058400" cy="530352"/>
           </a:xfrm>
@@ -22640,7 +21759,7 @@
       </p:sp>
       <p:sp>
         <p:nvSpPr>
-          <p:cNvPr id="5" name="Rectangle 4"/>
+          <p:cNvPr id="4" name="Rectangle 3"/>
           <p:cNvSpPr/>
           <p:nvPr/>
         </p:nvSpPr>
@@ -22689,7 +21808,7 @@
       </p:sp>
       <p:sp>
         <p:nvSpPr>
-          <p:cNvPr id="6" name="Rectangle 5"/>
+          <p:cNvPr id="5" name="Rectangle 4"/>
           <p:cNvSpPr/>
           <p:nvPr/>
         </p:nvSpPr>
@@ -22738,7 +21857,7 @@
       </p:sp>
       <p:sp>
         <p:nvSpPr>
-          <p:cNvPr id="7" name="TextBox 6"/>
+          <p:cNvPr id="6" name="TextBox 5"/>
           <p:cNvSpPr txBox="1"/>
           <p:nvPr/>
         </p:nvSpPr>
@@ -22780,7 +21899,7 @@
       </p:sp>
       <p:sp>
         <p:nvSpPr>
-          <p:cNvPr id="8" name="TextBox 7"/>
+          <p:cNvPr id="7" name="TextBox 6"/>
           <p:cNvSpPr txBox="1"/>
           <p:nvPr/>
         </p:nvSpPr>
@@ -22822,7 +21941,7 @@
       </p:sp>
       <p:graphicFrame>
         <p:nvGraphicFramePr>
-          <p:cNvPr id="9" name="Table 8"/>
+          <p:cNvPr id="8" name="Table 7"/>
           <p:cNvGraphicFramePr>
             <a:graphicFrameLocks noGrp="1"/>
           </p:cNvGraphicFramePr>
@@ -23344,7 +22463,7 @@
       </p:graphicFrame>
       <p:sp>
         <p:nvSpPr>
-          <p:cNvPr id="10" name="TextBox 9"/>
+          <p:cNvPr id="9" name="TextBox 8"/>
           <p:cNvSpPr txBox="1"/>
           <p:nvPr/>
         </p:nvSpPr>
@@ -23386,7 +22505,7 @@
       </p:sp>
       <p:graphicFrame>
         <p:nvGraphicFramePr>
-          <p:cNvPr id="11" name="Table 10"/>
+          <p:cNvPr id="10" name="Table 9"/>
           <p:cNvGraphicFramePr>
             <a:graphicFrameLocks noGrp="1"/>
           </p:cNvGraphicFramePr>
@@ -23744,7 +22863,7 @@
       </p:graphicFrame>
       <p:sp>
         <p:nvSpPr>
-          <p:cNvPr id="12" name="TextBox 11"/>
+          <p:cNvPr id="11" name="TextBox 10"/>
           <p:cNvSpPr txBox="1"/>
           <p:nvPr/>
         </p:nvSpPr>
@@ -23824,7 +22943,7 @@
       </p:sp>
       <p:sp>
         <p:nvSpPr>
-          <p:cNvPr id="13" name="Rectangle 12"/>
+          <p:cNvPr id="12" name="Rectangle 11"/>
           <p:cNvSpPr/>
           <p:nvPr/>
         </p:nvSpPr>
@@ -23873,7 +22992,7 @@
       </p:sp>
       <p:sp>
         <p:nvSpPr>
-          <p:cNvPr id="14" name="TextBox 13"/>
+          <p:cNvPr id="13" name="TextBox 12"/>
           <p:cNvSpPr txBox="1"/>
           <p:nvPr/>
         </p:nvSpPr>
@@ -23915,7 +23034,7 @@
       </p:sp>
       <p:sp>
         <p:nvSpPr>
-          <p:cNvPr id="15" name="TextBox 14"/>
+          <p:cNvPr id="14" name="TextBox 13"/>
           <p:cNvSpPr txBox="1"/>
           <p:nvPr/>
         </p:nvSpPr>
@@ -23957,7 +23076,7 @@
       </p:sp>
       <p:sp>
         <p:nvSpPr>
-          <p:cNvPr id="16" name="TextBox 15"/>
+          <p:cNvPr id="15" name="TextBox 14"/>
           <p:cNvSpPr txBox="1"/>
           <p:nvPr/>
         </p:nvSpPr>
@@ -24072,48 +23191,6 @@
         </p:nvSpPr>
         <p:spPr>
           <a:xfrm>
-            <a:off x="5897880" y="310896"/>
-            <a:ext cx="4800600" cy="256032"/>
-          </a:xfrm>
-          <a:prstGeom prst="rect">
-            <a:avLst/>
-          </a:prstGeom>
-          <a:noFill/>
-        </p:spPr>
-        <p:txBody>
-          <a:bodyPr wrap="none" lIns="9144" rIns="9144" tIns="9144" bIns="9144" anchor="t">
-            <a:spAutoFit/>
-          </a:bodyPr>
-          <a:lstStyle/>
-          <a:p>
-            <a:pPr algn="r">
-              <a:spcAft>
-                <a:spcPts val="0"/>
-              </a:spcAft>
-              <a:defRPr sz="680" b="1">
-                <a:solidFill>
-                  <a:srgbClr val="4F6B00"/>
-                </a:solidFill>
-                <a:latin typeface="Inter"/>
-              </a:defRPr>
-            </a:pPr>
-            <a:r>
-              <a:rPr>
-                <a:latin typeface="Inter"/>
-              </a:rPr>
-              <a:t>Illustrative, Gradient Maintained — demo data, not the client's holdings or managers</a:t>
-            </a:r>
-          </a:p>
-        </p:txBody>
-      </p:sp>
-      <p:sp>
-        <p:nvSpPr>
-          <p:cNvPr id="4" name="TextBox 3"/>
-          <p:cNvSpPr txBox="1"/>
-          <p:nvPr/>
-        </p:nvSpPr>
-        <p:spPr>
-          <a:xfrm>
             <a:off x="640080" y="566928"/>
             <a:ext cx="10058400" cy="530352"/>
           </a:xfrm>
@@ -24150,7 +23227,7 @@
       </p:sp>
       <p:sp>
         <p:nvSpPr>
-          <p:cNvPr id="5" name="Rectangle 4"/>
+          <p:cNvPr id="4" name="Rectangle 3"/>
           <p:cNvSpPr/>
           <p:nvPr/>
         </p:nvSpPr>
@@ -24199,7 +23276,7 @@
       </p:sp>
       <p:sp>
         <p:nvSpPr>
-          <p:cNvPr id="6" name="Rectangle 5"/>
+          <p:cNvPr id="5" name="Rectangle 4"/>
           <p:cNvSpPr/>
           <p:nvPr/>
         </p:nvSpPr>
@@ -24248,7 +23325,7 @@
       </p:sp>
       <p:sp>
         <p:nvSpPr>
-          <p:cNvPr id="7" name="TextBox 6"/>
+          <p:cNvPr id="6" name="TextBox 5"/>
           <p:cNvSpPr txBox="1"/>
           <p:nvPr/>
         </p:nvSpPr>
@@ -24290,7 +23367,7 @@
       </p:sp>
       <p:sp>
         <p:nvSpPr>
-          <p:cNvPr id="8" name="TextBox 7"/>
+          <p:cNvPr id="7" name="TextBox 6"/>
           <p:cNvSpPr txBox="1"/>
           <p:nvPr/>
         </p:nvSpPr>
@@ -24332,7 +23409,7 @@
       </p:sp>
       <p:graphicFrame>
         <p:nvGraphicFramePr>
-          <p:cNvPr id="9" name="Table 8"/>
+          <p:cNvPr id="8" name="Table 7"/>
           <p:cNvGraphicFramePr>
             <a:graphicFrameLocks noGrp="1"/>
           </p:cNvGraphicFramePr>
@@ -24909,7 +23986,7 @@
       </p:graphicFrame>
       <p:sp>
         <p:nvSpPr>
-          <p:cNvPr id="10" name="TextBox 9"/>
+          <p:cNvPr id="9" name="TextBox 8"/>
           <p:cNvSpPr txBox="1"/>
           <p:nvPr/>
         </p:nvSpPr>
@@ -24951,7 +24028,7 @@
       </p:sp>
       <p:graphicFrame>
         <p:nvGraphicFramePr>
-          <p:cNvPr id="11" name="Table 10"/>
+          <p:cNvPr id="10" name="Table 9"/>
           <p:cNvGraphicFramePr>
             <a:graphicFrameLocks noGrp="1"/>
           </p:cNvGraphicFramePr>
@@ -25528,7 +24605,7 @@
       </p:graphicFrame>
       <p:sp>
         <p:nvSpPr>
-          <p:cNvPr id="12" name="Rectangle 11"/>
+          <p:cNvPr id="11" name="Rectangle 10"/>
           <p:cNvSpPr/>
           <p:nvPr/>
         </p:nvSpPr>
@@ -25577,7 +24654,7 @@
       </p:sp>
       <p:sp>
         <p:nvSpPr>
-          <p:cNvPr id="13" name="TextBox 12"/>
+          <p:cNvPr id="12" name="TextBox 11"/>
           <p:cNvSpPr txBox="1"/>
           <p:nvPr/>
         </p:nvSpPr>
@@ -25619,7 +24696,7 @@
       </p:sp>
       <p:sp>
         <p:nvSpPr>
-          <p:cNvPr id="14" name="TextBox 13"/>
+          <p:cNvPr id="13" name="TextBox 12"/>
           <p:cNvSpPr txBox="1"/>
           <p:nvPr/>
         </p:nvSpPr>
@@ -25661,7 +24738,7 @@
       </p:sp>
       <p:sp>
         <p:nvSpPr>
-          <p:cNvPr id="15" name="TextBox 14"/>
+          <p:cNvPr id="14" name="TextBox 13"/>
           <p:cNvSpPr txBox="1"/>
           <p:nvPr/>
         </p:nvSpPr>
@@ -25776,48 +24853,6 @@
         </p:nvSpPr>
         <p:spPr>
           <a:xfrm>
-            <a:off x="5897880" y="310896"/>
-            <a:ext cx="4800600" cy="256032"/>
-          </a:xfrm>
-          <a:prstGeom prst="rect">
-            <a:avLst/>
-          </a:prstGeom>
-          <a:noFill/>
-        </p:spPr>
-        <p:txBody>
-          <a:bodyPr wrap="none" lIns="9144" rIns="9144" tIns="9144" bIns="9144" anchor="t">
-            <a:spAutoFit/>
-          </a:bodyPr>
-          <a:lstStyle/>
-          <a:p>
-            <a:pPr algn="r">
-              <a:spcAft>
-                <a:spcPts val="0"/>
-              </a:spcAft>
-              <a:defRPr sz="680" b="1">
-                <a:solidFill>
-                  <a:srgbClr val="4F6B00"/>
-                </a:solidFill>
-                <a:latin typeface="Inter"/>
-              </a:defRPr>
-            </a:pPr>
-            <a:r>
-              <a:rPr>
-                <a:latin typeface="Inter"/>
-              </a:rPr>
-              <a:t>Illustrative, Gradient Maintained — demo data, not the client's holdings or managers</a:t>
-            </a:r>
-          </a:p>
-        </p:txBody>
-      </p:sp>
-      <p:sp>
-        <p:nvSpPr>
-          <p:cNvPr id="4" name="TextBox 3"/>
-          <p:cNvSpPr txBox="1"/>
-          <p:nvPr/>
-        </p:nvSpPr>
-        <p:spPr>
-          <a:xfrm>
             <a:off x="640080" y="566928"/>
             <a:ext cx="10058400" cy="530352"/>
           </a:xfrm>
@@ -25854,7 +24889,7 @@
       </p:sp>
       <p:sp>
         <p:nvSpPr>
-          <p:cNvPr id="5" name="Rectangle 4"/>
+          <p:cNvPr id="4" name="Rectangle 3"/>
           <p:cNvSpPr/>
           <p:nvPr/>
         </p:nvSpPr>
@@ -25903,7 +24938,7 @@
       </p:sp>
       <p:sp>
         <p:nvSpPr>
-          <p:cNvPr id="6" name="Rectangle 5"/>
+          <p:cNvPr id="5" name="Rectangle 4"/>
           <p:cNvSpPr/>
           <p:nvPr/>
         </p:nvSpPr>
@@ -25952,7 +24987,7 @@
       </p:sp>
       <p:sp>
         <p:nvSpPr>
-          <p:cNvPr id="7" name="TextBox 6"/>
+          <p:cNvPr id="6" name="TextBox 5"/>
           <p:cNvSpPr txBox="1"/>
           <p:nvPr/>
         </p:nvSpPr>
@@ -25994,7 +25029,7 @@
       </p:sp>
       <p:graphicFrame>
         <p:nvGraphicFramePr>
-          <p:cNvPr id="8" name="Table 7"/>
+          <p:cNvPr id="7" name="Table 6"/>
           <p:cNvGraphicFramePr>
             <a:graphicFrameLocks noGrp="1"/>
           </p:cNvGraphicFramePr>
@@ -26143,7 +25178,7 @@
                         <a:rPr>
                           <a:latin typeface="Inter"/>
                         </a:rPr>
-                        <a:t>● available</a:t>
+                        <a:t>● Available</a:t>
                       </a:r>
                     </a:p>
                   </a:txBody>
@@ -26226,7 +25261,7 @@
                         <a:rPr>
                           <a:latin typeface="Inter"/>
                         </a:rPr>
-                        <a:t>● available</a:t>
+                        <a:t>● Available</a:t>
                       </a:r>
                     </a:p>
                   </a:txBody>
@@ -26309,7 +25344,7 @@
                         <a:rPr>
                           <a:latin typeface="Inter"/>
                         </a:rPr>
-                        <a:t>● available</a:t>
+                        <a:t>● Available</a:t>
                       </a:r>
                     </a:p>
                   </a:txBody>
@@ -26392,7 +25427,7 @@
                         <a:rPr>
                           <a:latin typeface="Inter"/>
                         </a:rPr>
-                        <a:t>● degraded</a:t>
+                        <a:t>● Incomplete</a:t>
                       </a:r>
                     </a:p>
                   </a:txBody>
@@ -26475,7 +25510,7 @@
                         <a:rPr>
                           <a:latin typeface="Inter"/>
                         </a:rPr>
-                        <a:t>● available</a:t>
+                        <a:t>● Available</a:t>
                       </a:r>
                     </a:p>
                   </a:txBody>
@@ -26558,7 +25593,7 @@
                         <a:rPr>
                           <a:latin typeface="Inter"/>
                         </a:rPr>
-                        <a:t>● degraded</a:t>
+                        <a:t>● Incomplete</a:t>
                       </a:r>
                     </a:p>
                   </a:txBody>
@@ -26641,7 +25676,7 @@
                         <a:rPr>
                           <a:latin typeface="Inter"/>
                         </a:rPr>
-                        <a:t>● available</a:t>
+                        <a:t>● Available</a:t>
                       </a:r>
                     </a:p>
                   </a:txBody>
@@ -26724,7 +25759,7 @@
                         <a:rPr>
                           <a:latin typeface="Inter"/>
                         </a:rPr>
-                        <a:t>● unavailable</a:t>
+                        <a:t>● Not available</a:t>
                       </a:r>
                     </a:p>
                   </a:txBody>
@@ -26807,7 +25842,7 @@
                         <a:rPr>
                           <a:latin typeface="Inter"/>
                         </a:rPr>
-                        <a:t>● unavailable</a:t>
+                        <a:t>● Not available</a:t>
                       </a:r>
                     </a:p>
                   </a:txBody>
@@ -26890,7 +25925,7 @@
                         <a:rPr>
                           <a:latin typeface="Inter"/>
                         </a:rPr>
-                        <a:t>● unavailable</a:t>
+                        <a:t>● Not available</a:t>
                       </a:r>
                     </a:p>
                   </a:txBody>
@@ -26973,7 +26008,7 @@
                         <a:rPr>
                           <a:latin typeface="Inter"/>
                         </a:rPr>
-                        <a:t>● unavailable</a:t>
+                        <a:t>● Not available</a:t>
                       </a:r>
                     </a:p>
                   </a:txBody>
@@ -27056,7 +26091,7 @@
                         <a:rPr>
                           <a:latin typeface="Inter"/>
                         </a:rPr>
-                        <a:t>● unavailable</a:t>
+                        <a:t>● Not available</a:t>
                       </a:r>
                     </a:p>
                   </a:txBody>
@@ -27100,7 +26135,7 @@
       </p:graphicFrame>
       <p:sp>
         <p:nvSpPr>
-          <p:cNvPr id="9" name="Rectangle 8"/>
+          <p:cNvPr id="8" name="Rectangle 7"/>
           <p:cNvSpPr/>
           <p:nvPr/>
         </p:nvSpPr>
@@ -27149,7 +26184,7 @@
       </p:sp>
       <p:sp>
         <p:nvSpPr>
-          <p:cNvPr id="10" name="TextBox 9"/>
+          <p:cNvPr id="9" name="TextBox 8"/>
           <p:cNvSpPr txBox="1"/>
           <p:nvPr/>
         </p:nvSpPr>
@@ -27191,7 +26226,7 @@
       </p:sp>
       <p:sp>
         <p:nvSpPr>
-          <p:cNvPr id="11" name="TextBox 10"/>
+          <p:cNvPr id="10" name="TextBox 9"/>
           <p:cNvSpPr txBox="1"/>
           <p:nvPr/>
         </p:nvSpPr>
@@ -27233,7 +26268,7 @@
       </p:sp>
       <p:sp>
         <p:nvSpPr>
-          <p:cNvPr id="12" name="TextBox 11"/>
+          <p:cNvPr id="11" name="TextBox 10"/>
           <p:cNvSpPr txBox="1"/>
           <p:nvPr/>
         </p:nvSpPr>
@@ -27348,48 +26383,6 @@
         </p:nvSpPr>
         <p:spPr>
           <a:xfrm>
-            <a:off x="5897880" y="310896"/>
-            <a:ext cx="4800600" cy="256032"/>
-          </a:xfrm>
-          <a:prstGeom prst="rect">
-            <a:avLst/>
-          </a:prstGeom>
-          <a:noFill/>
-        </p:spPr>
-        <p:txBody>
-          <a:bodyPr wrap="none" lIns="9144" rIns="9144" tIns="9144" bIns="9144" anchor="t">
-            <a:spAutoFit/>
-          </a:bodyPr>
-          <a:lstStyle/>
-          <a:p>
-            <a:pPr algn="r">
-              <a:spcAft>
-                <a:spcPts val="0"/>
-              </a:spcAft>
-              <a:defRPr sz="680" b="1">
-                <a:solidFill>
-                  <a:srgbClr val="4F6B00"/>
-                </a:solidFill>
-                <a:latin typeface="Inter"/>
-              </a:defRPr>
-            </a:pPr>
-            <a:r>
-              <a:rPr>
-                <a:latin typeface="Inter"/>
-              </a:rPr>
-              <a:t>Illustrative, Gradient Maintained — demo data, not the client's holdings or managers</a:t>
-            </a:r>
-          </a:p>
-        </p:txBody>
-      </p:sp>
-      <p:sp>
-        <p:nvSpPr>
-          <p:cNvPr id="4" name="TextBox 3"/>
-          <p:cNvSpPr txBox="1"/>
-          <p:nvPr/>
-        </p:nvSpPr>
-        <p:spPr>
-          <a:xfrm>
             <a:off x="640080" y="566928"/>
             <a:ext cx="10058400" cy="530352"/>
           </a:xfrm>
@@ -27426,7 +26419,7 @@
       </p:sp>
       <p:sp>
         <p:nvSpPr>
-          <p:cNvPr id="5" name="Rectangle 4"/>
+          <p:cNvPr id="4" name="Rectangle 3"/>
           <p:cNvSpPr/>
           <p:nvPr/>
         </p:nvSpPr>
@@ -27475,7 +26468,7 @@
       </p:sp>
       <p:sp>
         <p:nvSpPr>
-          <p:cNvPr id="6" name="Rectangle 5"/>
+          <p:cNvPr id="5" name="Rectangle 4"/>
           <p:cNvSpPr/>
           <p:nvPr/>
         </p:nvSpPr>
@@ -27524,7 +26517,7 @@
       </p:sp>
       <p:sp>
         <p:nvSpPr>
-          <p:cNvPr id="7" name="TextBox 6"/>
+          <p:cNvPr id="6" name="TextBox 5"/>
           <p:cNvSpPr txBox="1"/>
           <p:nvPr/>
         </p:nvSpPr>
@@ -27566,7 +26559,7 @@
       </p:sp>
       <p:graphicFrame>
         <p:nvGraphicFramePr>
-          <p:cNvPr id="8" name="Table 7"/>
+          <p:cNvPr id="7" name="Table 6"/>
           <p:cNvGraphicFramePr>
             <a:graphicFrameLocks noGrp="1"/>
           </p:cNvGraphicFramePr>
@@ -27584,14 +26577,10 @@
               </a:tblPr>
               <a:tblGrid>
                 <a:gridCol w="2011680"/>
-                <a:gridCol w="1112139"/>
-                <a:gridCol w="1112139"/>
-                <a:gridCol w="1112139"/>
-                <a:gridCol w="1112139"/>
-                <a:gridCol w="1112139"/>
-                <a:gridCol w="1112139"/>
-                <a:gridCol w="1112139"/>
-                <a:gridCol w="1112139"/>
+                <a:gridCol w="2224278"/>
+                <a:gridCol w="2224278"/>
+                <a:gridCol w="2224278"/>
+                <a:gridCol w="2224278"/>
               </a:tblGrid>
               <a:tr h="469087">
                 <a:tc>
@@ -27665,7 +26654,7 @@
                         <a:rPr>
                           <a:latin typeface="Inter"/>
                         </a:rPr>
-                        <a:t>Basis</a:t>
+                        <a:t>Source</a:t>
                       </a:r>
                     </a:p>
                   </a:txBody>
@@ -27692,7 +26681,7 @@
                         <a:rPr>
                           <a:latin typeface="Inter"/>
                         </a:rPr>
-                        <a:t>Tool / view</a:t>
+                        <a:t>As of</a:t>
                       </a:r>
                     </a:p>
                   </a:txBody>
@@ -27719,115 +26708,7 @@
                         <a:rPr>
                           <a:latin typeface="Inter"/>
                         </a:rPr>
-                        <a:t>Key parameters</a:t>
-                      </a:r>
-                    </a:p>
-                  </a:txBody>
-                  <a:tcPr marL="54864" marR="54864" marT="27432" marB="27432" anchor="ctr">
-                    <a:solidFill>
-                      <a:srgbClr val="0D1117"/>
-                    </a:solidFill>
-                  </a:tcPr>
-                </a:tc>
-                <a:tc>
-                  <a:txBody>
-                    <a:bodyPr/>
-                    <a:lstStyle/>
-                    <a:p>
-                      <a:pPr>
-                        <a:defRPr sz="750" b="1">
-                          <a:solidFill>
-                            <a:srgbClr val="FFFFFF"/>
-                          </a:solidFill>
-                          <a:latin typeface="Inter"/>
-                        </a:defRPr>
-                      </a:pPr>
-                      <a:r>
-                        <a:rPr>
-                          <a:latin typeface="Inter"/>
-                        </a:rPr>
-                        <a:t>As of</a:t>
-                      </a:r>
-                    </a:p>
-                  </a:txBody>
-                  <a:tcPr marL="54864" marR="54864" marT="27432" marB="27432" anchor="ctr">
-                    <a:solidFill>
-                      <a:srgbClr val="0D1117"/>
-                    </a:solidFill>
-                  </a:tcPr>
-                </a:tc>
-                <a:tc>
-                  <a:txBody>
-                    <a:bodyPr/>
-                    <a:lstStyle/>
-                    <a:p>
-                      <a:pPr>
-                        <a:defRPr sz="750" b="1">
-                          <a:solidFill>
-                            <a:srgbClr val="FFFFFF"/>
-                          </a:solidFill>
-                          <a:latin typeface="Inter"/>
-                        </a:defRPr>
-                      </a:pPr>
-                      <a:r>
-                        <a:rPr>
-                          <a:latin typeface="Inter"/>
-                        </a:rPr>
-                        <a:t>Data scope</a:t>
-                      </a:r>
-                    </a:p>
-                  </a:txBody>
-                  <a:tcPr marL="54864" marR="54864" marT="27432" marB="27432" anchor="ctr">
-                    <a:solidFill>
-                      <a:srgbClr val="0D1117"/>
-                    </a:solidFill>
-                  </a:tcPr>
-                </a:tc>
-                <a:tc>
-                  <a:txBody>
-                    <a:bodyPr/>
-                    <a:lstStyle/>
-                    <a:p>
-                      <a:pPr>
-                        <a:defRPr sz="750" b="1">
-                          <a:solidFill>
-                            <a:srgbClr val="FFFFFF"/>
-                          </a:solidFill>
-                          <a:latin typeface="Inter"/>
-                        </a:defRPr>
-                      </a:pPr>
-                      <a:r>
-                        <a:rPr>
-                          <a:latin typeface="Inter"/>
-                        </a:rPr>
-                        <a:t>Validation</a:t>
-                      </a:r>
-                    </a:p>
-                  </a:txBody>
-                  <a:tcPr marL="54864" marR="54864" marT="27432" marB="27432" anchor="ctr">
-                    <a:solidFill>
-                      <a:srgbClr val="0D1117"/>
-                    </a:solidFill>
-                  </a:tcPr>
-                </a:tc>
-                <a:tc>
-                  <a:txBody>
-                    <a:bodyPr/>
-                    <a:lstStyle/>
-                    <a:p>
-                      <a:pPr>
-                        <a:defRPr sz="750" b="1">
-                          <a:solidFill>
-                            <a:srgbClr val="FFFFFF"/>
-                          </a:solidFill>
-                          <a:latin typeface="Inter"/>
-                        </a:defRPr>
-                      </a:pPr>
-                      <a:r>
-                        <a:rPr>
-                          <a:latin typeface="Inter"/>
-                        </a:rPr>
-                        <a:t>Digest</a:t>
+                        <a:t>Check</a:t>
                       </a:r>
                     </a:p>
                   </a:txBody>
@@ -27845,7 +26726,7 @@
                     <a:lstStyle/>
                     <a:p>
                       <a:pPr>
-                        <a:defRPr sz="650" b="1">
+                        <a:defRPr sz="720" b="1">
                           <a:solidFill>
                             <a:srgbClr val="0D1117"/>
                           </a:solidFill>
@@ -27872,7 +26753,7 @@
                     <a:lstStyle/>
                     <a:p>
                       <a:pPr>
-                        <a:defRPr sz="650" b="0">
+                        <a:defRPr sz="720" b="0">
                           <a:solidFill>
                             <a:srgbClr val="0D1117"/>
                           </a:solidFill>
@@ -27899,7 +26780,7 @@
                     <a:lstStyle/>
                     <a:p>
                       <a:pPr>
-                        <a:defRPr sz="650" b="0">
+                        <a:defRPr sz="720" b="0">
                           <a:solidFill>
                             <a:srgbClr val="0D1117"/>
                           </a:solidFill>
@@ -27910,7 +26791,7 @@
                         <a:rPr>
                           <a:latin typeface="Inter"/>
                         </a:rPr>
-                        <a:t>gradient_tool</a:t>
+                        <a:t>list_organizations; get_gradient_capabilities</a:t>
                       </a:r>
                     </a:p>
                   </a:txBody>
@@ -27926,7 +26807,7 @@
                     <a:lstStyle/>
                     <a:p>
                       <a:pPr>
-                        <a:defRPr sz="650" b="0">
+                        <a:defRPr sz="720" b="0">
                           <a:solidFill>
                             <a:srgbClr val="0D1117"/>
                           </a:solidFill>
@@ -27937,7 +26818,7 @@
                         <a:rPr>
                           <a:latin typeface="Inter"/>
                         </a:rPr>
-                        <a:t>list_organizations; get_gradient_capabilities</a:t>
+                        <a:t>2026-06-30</a:t>
                       </a:r>
                     </a:p>
                   </a:txBody>
@@ -27953,132 +26834,24 @@
                     <a:lstStyle/>
                     <a:p>
                       <a:pPr>
-                        <a:defRPr sz="650" b="0">
-                          <a:solidFill>
-                            <a:srgbClr val="0D1117"/>
-                          </a:solidFill>
-                          <a:latin typeface="Inter"/>
-                        </a:defRPr>
-                      </a:pPr>
-                      <a:r>
-                        <a:rPr>
-                          <a:latin typeface="Inter"/>
-                        </a:rPr>
-                        <a:t>organization=test</a:t>
-                      </a:r>
-                    </a:p>
-                  </a:txBody>
-                  <a:tcPr marL="54864" marR="54864" marT="27432" marB="27432" anchor="ctr">
-                    <a:solidFill>
-                      <a:srgbClr val="FFFFFF"/>
-                    </a:solidFill>
-                  </a:tcPr>
-                </a:tc>
-                <a:tc>
-                  <a:txBody>
-                    <a:bodyPr/>
-                    <a:lstStyle/>
-                    <a:p>
-                      <a:pPr>
-                        <a:defRPr sz="650" b="0">
-                          <a:solidFill>
-                            <a:srgbClr val="0D1117"/>
-                          </a:solidFill>
-                          <a:latin typeface="Inter"/>
-                        </a:defRPr>
-                      </a:pPr>
-                      <a:r>
-                        <a:rPr>
-                          <a:latin typeface="Inter"/>
-                        </a:rPr>
-                        <a:t>2026-06-30</a:t>
-                      </a:r>
-                    </a:p>
-                  </a:txBody>
-                  <a:tcPr marL="54864" marR="54864" marT="27432" marB="27432" anchor="ctr">
-                    <a:solidFill>
-                      <a:srgbClr val="FFFFFF"/>
-                    </a:solidFill>
-                  </a:tcPr>
-                </a:tc>
-                <a:tc>
-                  <a:txBody>
-                    <a:bodyPr/>
-                    <a:lstStyle/>
-                    <a:p>
-                      <a:pPr>
-                        <a:defRPr sz="650" b="0">
-                          <a:solidFill>
-                            <a:srgbClr val="0D1117"/>
-                          </a:solidFill>
-                          <a:latin typeface="Inter"/>
-                        </a:defRPr>
-                      </a:pPr>
-                      <a:r>
-                        <a:rPr>
-                          <a:latin typeface="Inter"/>
-                        </a:rPr>
-                        <a:t>Illustrative sample data</a:t>
-                      </a:r>
-                    </a:p>
-                  </a:txBody>
-                  <a:tcPr marL="54864" marR="54864" marT="27432" marB="27432" anchor="ctr">
-                    <a:solidFill>
-                      <a:srgbClr val="FFFFFF"/>
-                    </a:solidFill>
-                  </a:tcPr>
-                </a:tc>
-                <a:tc>
-                  <a:txBody>
-                    <a:bodyPr/>
-                    <a:lstStyle/>
-                    <a:p>
-                      <a:pPr>
-                        <a:defRPr sz="650" b="0">
-                          <a:solidFill>
-                            <a:srgbClr val="0D1117"/>
-                          </a:solidFill>
-                          <a:latin typeface="Inter"/>
-                        </a:defRPr>
-                      </a:pPr>
-                      <a:r>
-                        <a:rPr>
-                          <a:latin typeface="Inter"/>
-                        </a:rPr>
-                        <a:t>passed</a:t>
-                      </a:r>
-                    </a:p>
-                  </a:txBody>
-                  <a:tcPr marL="54864" marR="54864" marT="27432" marB="27432" anchor="ctr">
-                    <a:solidFill>
-                      <a:srgbClr val="FFFFFF"/>
-                    </a:solidFill>
-                  </a:tcPr>
-                </a:tc>
-                <a:tc>
-                  <a:txBody>
-                    <a:bodyPr/>
-                    <a:lstStyle/>
-                    <a:p>
-                      <a:pPr>
-                        <a:defRPr sz="650" b="0">
-                          <a:solidFill>
-                            <a:srgbClr val="0D1117"/>
-                          </a:solidFill>
-                          <a:latin typeface="Inter"/>
-                        </a:defRPr>
-                      </a:pPr>
-                      <a:r>
-                        <a:rPr>
-                          <a:latin typeface="Inter"/>
-                        </a:rPr>
-                        <a:t>sha256:aaaaaaaaaaaaaaaaaaaaaaaaaaaaaaaaaaaaaaaaaaaaaaaaaaaaaaaaaaaaaaaa</a:t>
-                      </a:r>
-                    </a:p>
-                  </a:txBody>
-                  <a:tcPr marL="54864" marR="54864" marT="27432" marB="27432" anchor="ctr">
-                    <a:solidFill>
-                      <a:srgbClr val="FFFFFF"/>
+                        <a:defRPr sz="720" b="1">
+                          <a:solidFill>
+                            <a:srgbClr val="C6F432"/>
+                          </a:solidFill>
+                          <a:latin typeface="Inter"/>
+                        </a:defRPr>
+                      </a:pPr>
+                      <a:r>
+                        <a:rPr>
+                          <a:latin typeface="Inter"/>
+                        </a:rPr>
+                        <a:t>● Passed</a:t>
+                      </a:r>
+                    </a:p>
+                  </a:txBody>
+                  <a:tcPr marL="54864" marR="54864" marT="27432" marB="27432" anchor="ctr">
+                    <a:solidFill>
+                      <a:srgbClr val="F5F7F9"/>
                     </a:solidFill>
                   </a:tcPr>
                 </a:tc>
@@ -28090,7 +26863,7 @@
                     <a:lstStyle/>
                     <a:p>
                       <a:pPr>
-                        <a:defRPr sz="650" b="1">
+                        <a:defRPr sz="720" b="1">
                           <a:solidFill>
                             <a:srgbClr val="0D1117"/>
                           </a:solidFill>
@@ -28117,7 +26890,7 @@
                     <a:lstStyle/>
                     <a:p>
                       <a:pPr>
-                        <a:defRPr sz="650" b="0">
+                        <a:defRPr sz="720" b="0">
                           <a:solidFill>
                             <a:srgbClr val="0D1117"/>
                           </a:solidFill>
@@ -28144,7 +26917,7 @@
                     <a:lstStyle/>
                     <a:p>
                       <a:pPr>
-                        <a:defRPr sz="650" b="0">
+                        <a:defRPr sz="720" b="0">
                           <a:solidFill>
                             <a:srgbClr val="0D1117"/>
                           </a:solidFill>
@@ -28155,7 +26928,7 @@
                         <a:rPr>
                           <a:latin typeface="Inter"/>
                         </a:rPr>
-                        <a:t>gradient_tool</a:t>
+                        <a:t>list_portfolios; get_portfolio_structure</a:t>
                       </a:r>
                     </a:p>
                   </a:txBody>
@@ -28171,7 +26944,7 @@
                     <a:lstStyle/>
                     <a:p>
                       <a:pPr>
-                        <a:defRPr sz="650" b="0">
+                        <a:defRPr sz="720" b="0">
                           <a:solidFill>
                             <a:srgbClr val="0D1117"/>
                           </a:solidFill>
@@ -28182,7 +26955,7 @@
                         <a:rPr>
                           <a:latin typeface="Inter"/>
                         </a:rPr>
-                        <a:t>list_portfolios; get_portfolio_structure</a:t>
+                        <a:t>2026-06-30</a:t>
                       </a:r>
                     </a:p>
                   </a:txBody>
@@ -28198,126 +26971,18 @@
                     <a:lstStyle/>
                     <a:p>
                       <a:pPr>
-                        <a:defRPr sz="650" b="0">
-                          <a:solidFill>
-                            <a:srgbClr val="0D1117"/>
-                          </a:solidFill>
-                          <a:latin typeface="Inter"/>
-                        </a:defRPr>
-                      </a:pPr>
-                      <a:r>
-                        <a:rPr>
-                          <a:latin typeface="Inter"/>
-                        </a:rPr>
-                        <a:t>allocation_tree</a:t>
-                      </a:r>
-                    </a:p>
-                  </a:txBody>
-                  <a:tcPr marL="54864" marR="54864" marT="27432" marB="27432" anchor="ctr">
-                    <a:solidFill>
-                      <a:srgbClr val="F5F7F9"/>
-                    </a:solidFill>
-                  </a:tcPr>
-                </a:tc>
-                <a:tc>
-                  <a:txBody>
-                    <a:bodyPr/>
-                    <a:lstStyle/>
-                    <a:p>
-                      <a:pPr>
-                        <a:defRPr sz="650" b="0">
-                          <a:solidFill>
-                            <a:srgbClr val="0D1117"/>
-                          </a:solidFill>
-                          <a:latin typeface="Inter"/>
-                        </a:defRPr>
-                      </a:pPr>
-                      <a:r>
-                        <a:rPr>
-                          <a:latin typeface="Inter"/>
-                        </a:rPr>
-                        <a:t>2026-06-30</a:t>
-                      </a:r>
-                    </a:p>
-                  </a:txBody>
-                  <a:tcPr marL="54864" marR="54864" marT="27432" marB="27432" anchor="ctr">
-                    <a:solidFill>
-                      <a:srgbClr val="F5F7F9"/>
-                    </a:solidFill>
-                  </a:tcPr>
-                </a:tc>
-                <a:tc>
-                  <a:txBody>
-                    <a:bodyPr/>
-                    <a:lstStyle/>
-                    <a:p>
-                      <a:pPr>
-                        <a:defRPr sz="650" b="0">
-                          <a:solidFill>
-                            <a:srgbClr val="0D1117"/>
-                          </a:solidFill>
-                          <a:latin typeface="Inter"/>
-                        </a:defRPr>
-                      </a:pPr>
-                      <a:r>
-                        <a:rPr>
-                          <a:latin typeface="Inter"/>
-                        </a:rPr>
-                        <a:t>Illustrative sample data</a:t>
-                      </a:r>
-                    </a:p>
-                  </a:txBody>
-                  <a:tcPr marL="54864" marR="54864" marT="27432" marB="27432" anchor="ctr">
-                    <a:solidFill>
-                      <a:srgbClr val="F5F7F9"/>
-                    </a:solidFill>
-                  </a:tcPr>
-                </a:tc>
-                <a:tc>
-                  <a:txBody>
-                    <a:bodyPr/>
-                    <a:lstStyle/>
-                    <a:p>
-                      <a:pPr>
-                        <a:defRPr sz="650" b="0">
-                          <a:solidFill>
-                            <a:srgbClr val="0D1117"/>
-                          </a:solidFill>
-                          <a:latin typeface="Inter"/>
-                        </a:defRPr>
-                      </a:pPr>
-                      <a:r>
-                        <a:rPr>
-                          <a:latin typeface="Inter"/>
-                        </a:rPr>
-                        <a:t>passed</a:t>
-                      </a:r>
-                    </a:p>
-                  </a:txBody>
-                  <a:tcPr marL="54864" marR="54864" marT="27432" marB="27432" anchor="ctr">
-                    <a:solidFill>
-                      <a:srgbClr val="F5F7F9"/>
-                    </a:solidFill>
-                  </a:tcPr>
-                </a:tc>
-                <a:tc>
-                  <a:txBody>
-                    <a:bodyPr/>
-                    <a:lstStyle/>
-                    <a:p>
-                      <a:pPr>
-                        <a:defRPr sz="650" b="0">
-                          <a:solidFill>
-                            <a:srgbClr val="0D1117"/>
-                          </a:solidFill>
-                          <a:latin typeface="Inter"/>
-                        </a:defRPr>
-                      </a:pPr>
-                      <a:r>
-                        <a:rPr>
-                          <a:latin typeface="Inter"/>
-                        </a:rPr>
-                        <a:t>sha256:aaaaaaaaaaaaaaaaaaaaaaaaaaaaaaaaaaaaaaaaaaaaaaaaaaaaaaaaaaaaaaaa</a:t>
+                        <a:defRPr sz="720" b="1">
+                          <a:solidFill>
+                            <a:srgbClr val="C6F432"/>
+                          </a:solidFill>
+                          <a:latin typeface="Inter"/>
+                        </a:defRPr>
+                      </a:pPr>
+                      <a:r>
+                        <a:rPr>
+                          <a:latin typeface="Inter"/>
+                        </a:rPr>
+                        <a:t>● Passed</a:t>
                       </a:r>
                     </a:p>
                   </a:txBody>
@@ -28335,7 +27000,7 @@
                     <a:lstStyle/>
                     <a:p>
                       <a:pPr>
-                        <a:defRPr sz="650" b="1">
+                        <a:defRPr sz="720" b="1">
                           <a:solidFill>
                             <a:srgbClr val="0D1117"/>
                           </a:solidFill>
@@ -28362,7 +27027,7 @@
                     <a:lstStyle/>
                     <a:p>
                       <a:pPr>
-                        <a:defRPr sz="650" b="0">
+                        <a:defRPr sz="720" b="0">
                           <a:solidFill>
                             <a:srgbClr val="0D1117"/>
                           </a:solidFill>
@@ -28389,7 +27054,7 @@
                     <a:lstStyle/>
                     <a:p>
                       <a:pPr>
-                        <a:defRPr sz="650" b="0">
+                        <a:defRPr sz="720" b="0">
                           <a:solidFill>
                             <a:srgbClr val="0D1117"/>
                           </a:solidFill>
@@ -28400,7 +27065,7 @@
                         <a:rPr>
                           <a:latin typeface="Inter"/>
                         </a:rPr>
-                        <a:t>gradient_tool</a:t>
+                        <a:t>check_portfolio_policy</a:t>
                       </a:r>
                     </a:p>
                   </a:txBody>
@@ -28416,7 +27081,7 @@
                     <a:lstStyle/>
                     <a:p>
                       <a:pPr>
-                        <a:defRPr sz="650" b="0">
+                        <a:defRPr sz="720" b="0">
                           <a:solidFill>
                             <a:srgbClr val="0D1117"/>
                           </a:solidFill>
@@ -28427,7 +27092,7 @@
                         <a:rPr>
                           <a:latin typeface="Inter"/>
                         </a:rPr>
-                        <a:t>check_portfolio_policy</a:t>
+                        <a:t>2026-06-30</a:t>
                       </a:r>
                     </a:p>
                   </a:txBody>
@@ -28443,132 +27108,24 @@
                     <a:lstStyle/>
                     <a:p>
                       <a:pPr>
-                        <a:defRPr sz="650" b="0">
-                          <a:solidFill>
-                            <a:srgbClr val="0D1117"/>
-                          </a:solidFill>
-                          <a:latin typeface="Inter"/>
-                        </a:defRPr>
-                      </a:pPr>
-                      <a:r>
-                        <a:rPr>
-                          <a:latin typeface="Inter"/>
-                        </a:rPr>
-                        <a:t>portfolio=test</a:t>
-                      </a:r>
-                    </a:p>
-                  </a:txBody>
-                  <a:tcPr marL="54864" marR="54864" marT="27432" marB="27432" anchor="ctr">
-                    <a:solidFill>
-                      <a:srgbClr val="FFFFFF"/>
-                    </a:solidFill>
-                  </a:tcPr>
-                </a:tc>
-                <a:tc>
-                  <a:txBody>
-                    <a:bodyPr/>
-                    <a:lstStyle/>
-                    <a:p>
-                      <a:pPr>
-                        <a:defRPr sz="650" b="0">
-                          <a:solidFill>
-                            <a:srgbClr val="0D1117"/>
-                          </a:solidFill>
-                          <a:latin typeface="Inter"/>
-                        </a:defRPr>
-                      </a:pPr>
-                      <a:r>
-                        <a:rPr>
-                          <a:latin typeface="Inter"/>
-                        </a:rPr>
-                        <a:t>2026-06-30</a:t>
-                      </a:r>
-                    </a:p>
-                  </a:txBody>
-                  <a:tcPr marL="54864" marR="54864" marT="27432" marB="27432" anchor="ctr">
-                    <a:solidFill>
-                      <a:srgbClr val="FFFFFF"/>
-                    </a:solidFill>
-                  </a:tcPr>
-                </a:tc>
-                <a:tc>
-                  <a:txBody>
-                    <a:bodyPr/>
-                    <a:lstStyle/>
-                    <a:p>
-                      <a:pPr>
-                        <a:defRPr sz="650" b="0">
-                          <a:solidFill>
-                            <a:srgbClr val="0D1117"/>
-                          </a:solidFill>
-                          <a:latin typeface="Inter"/>
-                        </a:defRPr>
-                      </a:pPr>
-                      <a:r>
-                        <a:rPr>
-                          <a:latin typeface="Inter"/>
-                        </a:rPr>
-                        <a:t>Illustrative sample data</a:t>
-                      </a:r>
-                    </a:p>
-                  </a:txBody>
-                  <a:tcPr marL="54864" marR="54864" marT="27432" marB="27432" anchor="ctr">
-                    <a:solidFill>
-                      <a:srgbClr val="FFFFFF"/>
-                    </a:solidFill>
-                  </a:tcPr>
-                </a:tc>
-                <a:tc>
-                  <a:txBody>
-                    <a:bodyPr/>
-                    <a:lstStyle/>
-                    <a:p>
-                      <a:pPr>
-                        <a:defRPr sz="650" b="0">
-                          <a:solidFill>
-                            <a:srgbClr val="0D1117"/>
-                          </a:solidFill>
-                          <a:latin typeface="Inter"/>
-                        </a:defRPr>
-                      </a:pPr>
-                      <a:r>
-                        <a:rPr>
-                          <a:latin typeface="Inter"/>
-                        </a:rPr>
-                        <a:t>passed</a:t>
-                      </a:r>
-                    </a:p>
-                  </a:txBody>
-                  <a:tcPr marL="54864" marR="54864" marT="27432" marB="27432" anchor="ctr">
-                    <a:solidFill>
-                      <a:srgbClr val="FFFFFF"/>
-                    </a:solidFill>
-                  </a:tcPr>
-                </a:tc>
-                <a:tc>
-                  <a:txBody>
-                    <a:bodyPr/>
-                    <a:lstStyle/>
-                    <a:p>
-                      <a:pPr>
-                        <a:defRPr sz="650" b="0">
-                          <a:solidFill>
-                            <a:srgbClr val="0D1117"/>
-                          </a:solidFill>
-                          <a:latin typeface="Inter"/>
-                        </a:defRPr>
-                      </a:pPr>
-                      <a:r>
-                        <a:rPr>
-                          <a:latin typeface="Inter"/>
-                        </a:rPr>
-                        <a:t>sha256:aaaaaaaaaaaaaaaaaaaaaaaaaaaaaaaaaaaaaaaaaaaaaaaaaaaaaaaaaaaaaaaa</a:t>
-                      </a:r>
-                    </a:p>
-                  </a:txBody>
-                  <a:tcPr marL="54864" marR="54864" marT="27432" marB="27432" anchor="ctr">
-                    <a:solidFill>
-                      <a:srgbClr val="FFFFFF"/>
+                        <a:defRPr sz="720" b="1">
+                          <a:solidFill>
+                            <a:srgbClr val="C6F432"/>
+                          </a:solidFill>
+                          <a:latin typeface="Inter"/>
+                        </a:defRPr>
+                      </a:pPr>
+                      <a:r>
+                        <a:rPr>
+                          <a:latin typeface="Inter"/>
+                        </a:rPr>
+                        <a:t>● Passed</a:t>
+                      </a:r>
+                    </a:p>
+                  </a:txBody>
+                  <a:tcPr marL="54864" marR="54864" marT="27432" marB="27432" anchor="ctr">
+                    <a:solidFill>
+                      <a:srgbClr val="F5F7F9"/>
                     </a:solidFill>
                   </a:tcPr>
                 </a:tc>
@@ -28580,7 +27137,7 @@
                     <a:lstStyle/>
                     <a:p>
                       <a:pPr>
-                        <a:defRPr sz="650" b="1">
+                        <a:defRPr sz="720" b="1">
                           <a:solidFill>
                             <a:srgbClr val="0D1117"/>
                           </a:solidFill>
@@ -28607,7 +27164,7 @@
                     <a:lstStyle/>
                     <a:p>
                       <a:pPr>
-                        <a:defRPr sz="650" b="0">
+                        <a:defRPr sz="720" b="0">
                           <a:solidFill>
                             <a:srgbClr val="0D1117"/>
                           </a:solidFill>
@@ -28634,7 +27191,7 @@
                     <a:lstStyle/>
                     <a:p>
                       <a:pPr>
-                        <a:defRPr sz="650" b="0">
+                        <a:defRPr sz="720" b="0">
                           <a:solidFill>
                             <a:srgbClr val="0D1117"/>
                           </a:solidFill>
@@ -28645,7 +27202,7 @@
                         <a:rPr>
                           <a:latin typeface="Inter"/>
                         </a:rPr>
-                        <a:t>gradient_tool</a:t>
+                        <a:t>get_portfolio_exposure</a:t>
                       </a:r>
                     </a:p>
                   </a:txBody>
@@ -28661,7 +27218,7 @@
                     <a:lstStyle/>
                     <a:p>
                       <a:pPr>
-                        <a:defRPr sz="650" b="0">
+                        <a:defRPr sz="720" b="0">
                           <a:solidFill>
                             <a:srgbClr val="0D1117"/>
                           </a:solidFill>
@@ -28672,7 +27229,7 @@
                         <a:rPr>
                           <a:latin typeface="Inter"/>
                         </a:rPr>
-                        <a:t>get_portfolio_exposure; get_chart_data</a:t>
+                        <a:t>2026-06-30</a:t>
                       </a:r>
                     </a:p>
                   </a:txBody>
@@ -28688,126 +27245,18 @@
                     <a:lstStyle/>
                     <a:p>
                       <a:pPr>
-                        <a:defRPr sz="650" b="0">
-                          <a:solidFill>
-                            <a:srgbClr val="0D1117"/>
-                          </a:solidFill>
-                          <a:latin typeface="Inter"/>
-                        </a:defRPr>
-                      </a:pPr>
-                      <a:r>
-                        <a:rPr>
-                          <a:latin typeface="Inter"/>
-                        </a:rPr>
-                        <a:t>public_equity; allocations</a:t>
-                      </a:r>
-                    </a:p>
-                  </a:txBody>
-                  <a:tcPr marL="54864" marR="54864" marT="27432" marB="27432" anchor="ctr">
-                    <a:solidFill>
-                      <a:srgbClr val="F5F7F9"/>
-                    </a:solidFill>
-                  </a:tcPr>
-                </a:tc>
-                <a:tc>
-                  <a:txBody>
-                    <a:bodyPr/>
-                    <a:lstStyle/>
-                    <a:p>
-                      <a:pPr>
-                        <a:defRPr sz="650" b="0">
-                          <a:solidFill>
-                            <a:srgbClr val="0D1117"/>
-                          </a:solidFill>
-                          <a:latin typeface="Inter"/>
-                        </a:defRPr>
-                      </a:pPr>
-                      <a:r>
-                        <a:rPr>
-                          <a:latin typeface="Inter"/>
-                        </a:rPr>
-                        <a:t>2026-06-30</a:t>
-                      </a:r>
-                    </a:p>
-                  </a:txBody>
-                  <a:tcPr marL="54864" marR="54864" marT="27432" marB="27432" anchor="ctr">
-                    <a:solidFill>
-                      <a:srgbClr val="F5F7F9"/>
-                    </a:solidFill>
-                  </a:tcPr>
-                </a:tc>
-                <a:tc>
-                  <a:txBody>
-                    <a:bodyPr/>
-                    <a:lstStyle/>
-                    <a:p>
-                      <a:pPr>
-                        <a:defRPr sz="650" b="0">
-                          <a:solidFill>
-                            <a:srgbClr val="0D1117"/>
-                          </a:solidFill>
-                          <a:latin typeface="Inter"/>
-                        </a:defRPr>
-                      </a:pPr>
-                      <a:r>
-                        <a:rPr>
-                          <a:latin typeface="Inter"/>
-                        </a:rPr>
-                        <a:t>Illustrative sample data</a:t>
-                      </a:r>
-                    </a:p>
-                  </a:txBody>
-                  <a:tcPr marL="54864" marR="54864" marT="27432" marB="27432" anchor="ctr">
-                    <a:solidFill>
-                      <a:srgbClr val="F5F7F9"/>
-                    </a:solidFill>
-                  </a:tcPr>
-                </a:tc>
-                <a:tc>
-                  <a:txBody>
-                    <a:bodyPr/>
-                    <a:lstStyle/>
-                    <a:p>
-                      <a:pPr>
-                        <a:defRPr sz="650" b="0">
-                          <a:solidFill>
-                            <a:srgbClr val="0D1117"/>
-                          </a:solidFill>
-                          <a:latin typeface="Inter"/>
-                        </a:defRPr>
-                      </a:pPr>
-                      <a:r>
-                        <a:rPr>
-                          <a:latin typeface="Inter"/>
-                        </a:rPr>
-                        <a:t>passed</a:t>
-                      </a:r>
-                    </a:p>
-                  </a:txBody>
-                  <a:tcPr marL="54864" marR="54864" marT="27432" marB="27432" anchor="ctr">
-                    <a:solidFill>
-                      <a:srgbClr val="F5F7F9"/>
-                    </a:solidFill>
-                  </a:tcPr>
-                </a:tc>
-                <a:tc>
-                  <a:txBody>
-                    <a:bodyPr/>
-                    <a:lstStyle/>
-                    <a:p>
-                      <a:pPr>
-                        <a:defRPr sz="650" b="0">
-                          <a:solidFill>
-                            <a:srgbClr val="0D1117"/>
-                          </a:solidFill>
-                          <a:latin typeface="Inter"/>
-                        </a:defRPr>
-                      </a:pPr>
-                      <a:r>
-                        <a:rPr>
-                          <a:latin typeface="Inter"/>
-                        </a:rPr>
-                        <a:t>sha256:aaaaaaaaaaaaaaaaaaaaaaaaaaaaaaaaaaaaaaaaaaaaaaaaaaaaaaaaaaaaaaaa</a:t>
+                        <a:defRPr sz="720" b="1">
+                          <a:solidFill>
+                            <a:srgbClr val="C6F432"/>
+                          </a:solidFill>
+                          <a:latin typeface="Inter"/>
+                        </a:defRPr>
+                      </a:pPr>
+                      <a:r>
+                        <a:rPr>
+                          <a:latin typeface="Inter"/>
+                        </a:rPr>
+                        <a:t>● Passed</a:t>
                       </a:r>
                     </a:p>
                   </a:txBody>
@@ -28825,7 +27274,7 @@
                     <a:lstStyle/>
                     <a:p>
                       <a:pPr>
-                        <a:defRPr sz="650" b="1">
+                        <a:defRPr sz="720" b="1">
                           <a:solidFill>
                             <a:srgbClr val="0D1117"/>
                           </a:solidFill>
@@ -28852,7 +27301,7 @@
                     <a:lstStyle/>
                     <a:p>
                       <a:pPr>
-                        <a:defRPr sz="650" b="0">
+                        <a:defRPr sz="720" b="0">
                           <a:solidFill>
                             <a:srgbClr val="0D1117"/>
                           </a:solidFill>
@@ -28879,7 +27328,7 @@
                     <a:lstStyle/>
                     <a:p>
                       <a:pPr>
-                        <a:defRPr sz="650" b="0">
+                        <a:defRPr sz="720" b="0">
                           <a:solidFill>
                             <a:srgbClr val="0D1117"/>
                           </a:solidFill>
@@ -28890,7 +27339,7 @@
                         <a:rPr>
                           <a:latin typeface="Inter"/>
                         </a:rPr>
-                        <a:t>gradient_tool</a:t>
+                        <a:t>get_portfolio_historical_returns; get_portfolio_attribution</a:t>
                       </a:r>
                     </a:p>
                   </a:txBody>
@@ -28906,7 +27355,7 @@
                     <a:lstStyle/>
                     <a:p>
                       <a:pPr>
-                        <a:defRPr sz="650" b="0">
+                        <a:defRPr sz="720" b="0">
                           <a:solidFill>
                             <a:srgbClr val="0D1117"/>
                           </a:solidFill>
@@ -28917,7 +27366,7 @@
                         <a:rPr>
                           <a:latin typeface="Inter"/>
                         </a:rPr>
-                        <a:t>get_portfolio_historical_returns; get_portfolio_attribution</a:t>
+                        <a:t>2026-06-30</a:t>
                       </a:r>
                     </a:p>
                   </a:txBody>
@@ -28933,132 +27382,24 @@
                     <a:lstStyle/>
                     <a:p>
                       <a:pPr>
-                        <a:defRPr sz="650" b="0">
-                          <a:solidFill>
-                            <a:srgbClr val="0D1117"/>
-                          </a:solidFill>
-                          <a:latin typeface="Inter"/>
-                        </a:defRPr>
-                      </a:pPr>
-                      <a:r>
-                        <a:rPr>
-                          <a:latin typeface="Inter"/>
-                        </a:rPr>
-                        <a:t>all sections</a:t>
-                      </a:r>
-                    </a:p>
-                  </a:txBody>
-                  <a:tcPr marL="54864" marR="54864" marT="27432" marB="27432" anchor="ctr">
-                    <a:solidFill>
-                      <a:srgbClr val="FFFFFF"/>
-                    </a:solidFill>
-                  </a:tcPr>
-                </a:tc>
-                <a:tc>
-                  <a:txBody>
-                    <a:bodyPr/>
-                    <a:lstStyle/>
-                    <a:p>
-                      <a:pPr>
-                        <a:defRPr sz="650" b="0">
-                          <a:solidFill>
-                            <a:srgbClr val="0D1117"/>
-                          </a:solidFill>
-                          <a:latin typeface="Inter"/>
-                        </a:defRPr>
-                      </a:pPr>
-                      <a:r>
-                        <a:rPr>
-                          <a:latin typeface="Inter"/>
-                        </a:rPr>
-                        <a:t>2026-06-30</a:t>
-                      </a:r>
-                    </a:p>
-                  </a:txBody>
-                  <a:tcPr marL="54864" marR="54864" marT="27432" marB="27432" anchor="ctr">
-                    <a:solidFill>
-                      <a:srgbClr val="FFFFFF"/>
-                    </a:solidFill>
-                  </a:tcPr>
-                </a:tc>
-                <a:tc>
-                  <a:txBody>
-                    <a:bodyPr/>
-                    <a:lstStyle/>
-                    <a:p>
-                      <a:pPr>
-                        <a:defRPr sz="650" b="0">
-                          <a:solidFill>
-                            <a:srgbClr val="0D1117"/>
-                          </a:solidFill>
-                          <a:latin typeface="Inter"/>
-                        </a:defRPr>
-                      </a:pPr>
-                      <a:r>
-                        <a:rPr>
-                          <a:latin typeface="Inter"/>
-                        </a:rPr>
-                        <a:t>Illustrative sample data</a:t>
-                      </a:r>
-                    </a:p>
-                  </a:txBody>
-                  <a:tcPr marL="54864" marR="54864" marT="27432" marB="27432" anchor="ctr">
-                    <a:solidFill>
-                      <a:srgbClr val="FFFFFF"/>
-                    </a:solidFill>
-                  </a:tcPr>
-                </a:tc>
-                <a:tc>
-                  <a:txBody>
-                    <a:bodyPr/>
-                    <a:lstStyle/>
-                    <a:p>
-                      <a:pPr>
-                        <a:defRPr sz="650" b="0">
-                          <a:solidFill>
-                            <a:srgbClr val="0D1117"/>
-                          </a:solidFill>
-                          <a:latin typeface="Inter"/>
-                        </a:defRPr>
-                      </a:pPr>
-                      <a:r>
-                        <a:rPr>
-                          <a:latin typeface="Inter"/>
-                        </a:rPr>
-                        <a:t>degraded</a:t>
-                      </a:r>
-                    </a:p>
-                  </a:txBody>
-                  <a:tcPr marL="54864" marR="54864" marT="27432" marB="27432" anchor="ctr">
-                    <a:solidFill>
-                      <a:srgbClr val="FFFFFF"/>
-                    </a:solidFill>
-                  </a:tcPr>
-                </a:tc>
-                <a:tc>
-                  <a:txBody>
-                    <a:bodyPr/>
-                    <a:lstStyle/>
-                    <a:p>
-                      <a:pPr>
-                        <a:defRPr sz="650" b="0">
-                          <a:solidFill>
-                            <a:srgbClr val="0D1117"/>
-                          </a:solidFill>
-                          <a:latin typeface="Inter"/>
-                        </a:defRPr>
-                      </a:pPr>
-                      <a:r>
-                        <a:rPr>
-                          <a:latin typeface="Inter"/>
-                        </a:rPr>
-                        <a:t>sha256:aaaaaaaaaaaaaaaaaaaaaaaaaaaaaaaaaaaaaaaaaaaaaaaaaaaaaaaaaaaaaaaa</a:t>
-                      </a:r>
-                    </a:p>
-                  </a:txBody>
-                  <a:tcPr marL="54864" marR="54864" marT="27432" marB="27432" anchor="ctr">
-                    <a:solidFill>
-                      <a:srgbClr val="FFFFFF"/>
+                        <a:defRPr sz="720" b="1">
+                          <a:solidFill>
+                            <a:srgbClr val="F2A93B"/>
+                          </a:solidFill>
+                          <a:latin typeface="Inter"/>
+                        </a:defRPr>
+                      </a:pPr>
+                      <a:r>
+                        <a:rPr>
+                          <a:latin typeface="Inter"/>
+                        </a:rPr>
+                        <a:t>● Incomplete</a:t>
+                      </a:r>
+                    </a:p>
+                  </a:txBody>
+                  <a:tcPr marL="54864" marR="54864" marT="27432" marB="27432" anchor="ctr">
+                    <a:solidFill>
+                      <a:srgbClr val="F5F7F9"/>
                     </a:solidFill>
                   </a:tcPr>
                 </a:tc>
@@ -29070,7 +27411,7 @@
                     <a:lstStyle/>
                     <a:p>
                       <a:pPr>
-                        <a:defRPr sz="650" b="1">
+                        <a:defRPr sz="720" b="1">
                           <a:solidFill>
                             <a:srgbClr val="0D1117"/>
                           </a:solidFill>
@@ -29097,7 +27438,7 @@
                     <a:lstStyle/>
                     <a:p>
                       <a:pPr>
-                        <a:defRPr sz="650" b="0">
+                        <a:defRPr sz="720" b="0">
                           <a:solidFill>
                             <a:srgbClr val="0D1117"/>
                           </a:solidFill>
@@ -29124,7 +27465,7 @@
                     <a:lstStyle/>
                     <a:p>
                       <a:pPr>
-                        <a:defRPr sz="650" b="0">
+                        <a:defRPr sz="720" b="0">
                           <a:solidFill>
                             <a:srgbClr val="0D1117"/>
                           </a:solidFill>
@@ -29135,7 +27476,7 @@
                         <a:rPr>
                           <a:latin typeface="Inter"/>
                         </a:rPr>
-                        <a:t>gradient_tool</a:t>
+                        <a:t>get_capital_market_assumptions</a:t>
                       </a:r>
                     </a:p>
                   </a:txBody>
@@ -29151,7 +27492,7 @@
                     <a:lstStyle/>
                     <a:p>
                       <a:pPr>
-                        <a:defRPr sz="650" b="0">
+                        <a:defRPr sz="720" b="0">
                           <a:solidFill>
                             <a:srgbClr val="0D1117"/>
                           </a:solidFill>
@@ -29162,7 +27503,7 @@
                         <a:rPr>
                           <a:latin typeface="Inter"/>
                         </a:rPr>
-                        <a:t>get_capital_market_assumptions</a:t>
+                        <a:t>2026-06-15</a:t>
                       </a:r>
                     </a:p>
                   </a:txBody>
@@ -29178,126 +27519,18 @@
                     <a:lstStyle/>
                     <a:p>
                       <a:pPr>
-                        <a:defRPr sz="650" b="0">
-                          <a:solidFill>
-                            <a:srgbClr val="0D1117"/>
-                          </a:solidFill>
-                          <a:latin typeface="Inter"/>
-                        </a:defRPr>
-                      </a:pPr>
-                      <a:r>
-                        <a:rPr>
-                          <a:latin typeface="Inter"/>
-                        </a:rPr>
-                        <a:t>baseline</a:t>
-                      </a:r>
-                    </a:p>
-                  </a:txBody>
-                  <a:tcPr marL="54864" marR="54864" marT="27432" marB="27432" anchor="ctr">
-                    <a:solidFill>
-                      <a:srgbClr val="F5F7F9"/>
-                    </a:solidFill>
-                  </a:tcPr>
-                </a:tc>
-                <a:tc>
-                  <a:txBody>
-                    <a:bodyPr/>
-                    <a:lstStyle/>
-                    <a:p>
-                      <a:pPr>
-                        <a:defRPr sz="650" b="0">
-                          <a:solidFill>
-                            <a:srgbClr val="0D1117"/>
-                          </a:solidFill>
-                          <a:latin typeface="Inter"/>
-                        </a:defRPr>
-                      </a:pPr>
-                      <a:r>
-                        <a:rPr>
-                          <a:latin typeface="Inter"/>
-                        </a:rPr>
-                        <a:t>2026-06-15</a:t>
-                      </a:r>
-                    </a:p>
-                  </a:txBody>
-                  <a:tcPr marL="54864" marR="54864" marT="27432" marB="27432" anchor="ctr">
-                    <a:solidFill>
-                      <a:srgbClr val="F5F7F9"/>
-                    </a:solidFill>
-                  </a:tcPr>
-                </a:tc>
-                <a:tc>
-                  <a:txBody>
-                    <a:bodyPr/>
-                    <a:lstStyle/>
-                    <a:p>
-                      <a:pPr>
-                        <a:defRPr sz="650" b="0">
-                          <a:solidFill>
-                            <a:srgbClr val="0D1117"/>
-                          </a:solidFill>
-                          <a:latin typeface="Inter"/>
-                        </a:defRPr>
-                      </a:pPr>
-                      <a:r>
-                        <a:rPr>
-                          <a:latin typeface="Inter"/>
-                        </a:rPr>
-                        <a:t>Illustrative sample data</a:t>
-                      </a:r>
-                    </a:p>
-                  </a:txBody>
-                  <a:tcPr marL="54864" marR="54864" marT="27432" marB="27432" anchor="ctr">
-                    <a:solidFill>
-                      <a:srgbClr val="F5F7F9"/>
-                    </a:solidFill>
-                  </a:tcPr>
-                </a:tc>
-                <a:tc>
-                  <a:txBody>
-                    <a:bodyPr/>
-                    <a:lstStyle/>
-                    <a:p>
-                      <a:pPr>
-                        <a:defRPr sz="650" b="0">
-                          <a:solidFill>
-                            <a:srgbClr val="0D1117"/>
-                          </a:solidFill>
-                          <a:latin typeface="Inter"/>
-                        </a:defRPr>
-                      </a:pPr>
-                      <a:r>
-                        <a:rPr>
-                          <a:latin typeface="Inter"/>
-                        </a:rPr>
-                        <a:t>passed</a:t>
-                      </a:r>
-                    </a:p>
-                  </a:txBody>
-                  <a:tcPr marL="54864" marR="54864" marT="27432" marB="27432" anchor="ctr">
-                    <a:solidFill>
-                      <a:srgbClr val="F5F7F9"/>
-                    </a:solidFill>
-                  </a:tcPr>
-                </a:tc>
-                <a:tc>
-                  <a:txBody>
-                    <a:bodyPr/>
-                    <a:lstStyle/>
-                    <a:p>
-                      <a:pPr>
-                        <a:defRPr sz="650" b="0">
-                          <a:solidFill>
-                            <a:srgbClr val="0D1117"/>
-                          </a:solidFill>
-                          <a:latin typeface="Inter"/>
-                        </a:defRPr>
-                      </a:pPr>
-                      <a:r>
-                        <a:rPr>
-                          <a:latin typeface="Inter"/>
-                        </a:rPr>
-                        <a:t>sha256:aaaaaaaaaaaaaaaaaaaaaaaaaaaaaaaaaaaaaaaaaaaaaaaaaaaaaaaaaaaaaaaa</a:t>
+                        <a:defRPr sz="720" b="1">
+                          <a:solidFill>
+                            <a:srgbClr val="C6F432"/>
+                          </a:solidFill>
+                          <a:latin typeface="Inter"/>
+                        </a:defRPr>
+                      </a:pPr>
+                      <a:r>
+                        <a:rPr>
+                          <a:latin typeface="Inter"/>
+                        </a:rPr>
+                        <a:t>● Passed</a:t>
                       </a:r>
                     </a:p>
                   </a:txBody>
@@ -29315,7 +27548,7 @@
                     <a:lstStyle/>
                     <a:p>
                       <a:pPr>
-                        <a:defRPr sz="650" b="1">
+                        <a:defRPr sz="720" b="1">
                           <a:solidFill>
                             <a:srgbClr val="0D1117"/>
                           </a:solidFill>
@@ -29342,7 +27575,7 @@
                     <a:lstStyle/>
                     <a:p>
                       <a:pPr>
-                        <a:defRPr sz="650" b="0">
+                        <a:defRPr sz="720" b="0">
                           <a:solidFill>
                             <a:srgbClr val="0D1117"/>
                           </a:solidFill>
@@ -29369,7 +27602,7 @@
                     <a:lstStyle/>
                     <a:p>
                       <a:pPr>
-                        <a:defRPr sz="650" b="0">
+                        <a:defRPr sz="720" b="0">
                           <a:solidFill>
                             <a:srgbClr val="0D1117"/>
                           </a:solidFill>
@@ -29380,7 +27613,7 @@
                         <a:rPr>
                           <a:latin typeface="Inter"/>
                         </a:rPr>
-                        <a:t>gradient_tool</a:t>
+                        <a:t>get_portfolio_exposure</a:t>
                       </a:r>
                     </a:p>
                   </a:txBody>
@@ -29396,7 +27629,7 @@
                     <a:lstStyle/>
                     <a:p>
                       <a:pPr>
-                        <a:defRPr sz="650" b="0">
+                        <a:defRPr sz="720" b="0">
                           <a:solidFill>
                             <a:srgbClr val="0D1117"/>
                           </a:solidFill>
@@ -29407,7 +27640,7 @@
                         <a:rPr>
                           <a:latin typeface="Inter"/>
                         </a:rPr>
-                        <a:t>get_cross_domain_research</a:t>
+                        <a:t>2026-05-15</a:t>
                       </a:r>
                     </a:p>
                   </a:txBody>
@@ -29423,132 +27656,24 @@
                     <a:lstStyle/>
                     <a:p>
                       <a:pPr>
-                        <a:defRPr sz="650" b="0">
-                          <a:solidFill>
-                            <a:srgbClr val="0D1117"/>
-                          </a:solidFill>
-                          <a:latin typeface="Inter"/>
-                        </a:defRPr>
-                      </a:pPr>
-                      <a:r>
-                        <a:rPr>
-                          <a:latin typeface="Inter"/>
-                        </a:rPr>
-                        <a:t>portfolio_13f_lookthrough</a:t>
-                      </a:r>
-                    </a:p>
-                  </a:txBody>
-                  <a:tcPr marL="54864" marR="54864" marT="27432" marB="27432" anchor="ctr">
-                    <a:solidFill>
-                      <a:srgbClr val="FFFFFF"/>
-                    </a:solidFill>
-                  </a:tcPr>
-                </a:tc>
-                <a:tc>
-                  <a:txBody>
-                    <a:bodyPr/>
-                    <a:lstStyle/>
-                    <a:p>
-                      <a:pPr>
-                        <a:defRPr sz="650" b="0">
-                          <a:solidFill>
-                            <a:srgbClr val="0D1117"/>
-                          </a:solidFill>
-                          <a:latin typeface="Inter"/>
-                        </a:defRPr>
-                      </a:pPr>
-                      <a:r>
-                        <a:rPr>
-                          <a:latin typeface="Inter"/>
-                        </a:rPr>
-                        <a:t>2026-05-15</a:t>
-                      </a:r>
-                    </a:p>
-                  </a:txBody>
-                  <a:tcPr marL="54864" marR="54864" marT="27432" marB="27432" anchor="ctr">
-                    <a:solidFill>
-                      <a:srgbClr val="FFFFFF"/>
-                    </a:solidFill>
-                  </a:tcPr>
-                </a:tc>
-                <a:tc>
-                  <a:txBody>
-                    <a:bodyPr/>
-                    <a:lstStyle/>
-                    <a:p>
-                      <a:pPr>
-                        <a:defRPr sz="650" b="0">
-                          <a:solidFill>
-                            <a:srgbClr val="0D1117"/>
-                          </a:solidFill>
-                          <a:latin typeface="Inter"/>
-                        </a:defRPr>
-                      </a:pPr>
-                      <a:r>
-                        <a:rPr>
-                          <a:latin typeface="Inter"/>
-                        </a:rPr>
-                        <a:t>Illustrative sample data</a:t>
-                      </a:r>
-                    </a:p>
-                  </a:txBody>
-                  <a:tcPr marL="54864" marR="54864" marT="27432" marB="27432" anchor="ctr">
-                    <a:solidFill>
-                      <a:srgbClr val="FFFFFF"/>
-                    </a:solidFill>
-                  </a:tcPr>
-                </a:tc>
-                <a:tc>
-                  <a:txBody>
-                    <a:bodyPr/>
-                    <a:lstStyle/>
-                    <a:p>
-                      <a:pPr>
-                        <a:defRPr sz="650" b="0">
-                          <a:solidFill>
-                            <a:srgbClr val="0D1117"/>
-                          </a:solidFill>
-                          <a:latin typeface="Inter"/>
-                        </a:defRPr>
-                      </a:pPr>
-                      <a:r>
-                        <a:rPr>
-                          <a:latin typeface="Inter"/>
-                        </a:rPr>
-                        <a:t>advisory</a:t>
-                      </a:r>
-                    </a:p>
-                  </a:txBody>
-                  <a:tcPr marL="54864" marR="54864" marT="27432" marB="27432" anchor="ctr">
-                    <a:solidFill>
-                      <a:srgbClr val="FFFFFF"/>
-                    </a:solidFill>
-                  </a:tcPr>
-                </a:tc>
-                <a:tc>
-                  <a:txBody>
-                    <a:bodyPr/>
-                    <a:lstStyle/>
-                    <a:p>
-                      <a:pPr>
-                        <a:defRPr sz="650" b="0">
-                          <a:solidFill>
-                            <a:srgbClr val="0D1117"/>
-                          </a:solidFill>
-                          <a:latin typeface="Inter"/>
-                        </a:defRPr>
-                      </a:pPr>
-                      <a:r>
-                        <a:rPr>
-                          <a:latin typeface="Inter"/>
-                        </a:rPr>
-                        <a:t>sha256:aaaaaaaaaaaaaaaaaaaaaaaaaaaaaaaaaaaaaaaaaaaaaaaaaaaaaaaaaaaaaaaa</a:t>
-                      </a:r>
-                    </a:p>
-                  </a:txBody>
-                  <a:tcPr marL="54864" marR="54864" marT="27432" marB="27432" anchor="ctr">
-                    <a:solidFill>
-                      <a:srgbClr val="FFFFFF"/>
+                        <a:defRPr sz="720" b="1">
+                          <a:solidFill>
+                            <a:srgbClr val="F2A93B"/>
+                          </a:solidFill>
+                          <a:latin typeface="Inter"/>
+                        </a:defRPr>
+                      </a:pPr>
+                      <a:r>
+                        <a:rPr>
+                          <a:latin typeface="Inter"/>
+                        </a:rPr>
+                        <a:t>● Advisory</a:t>
+                      </a:r>
+                    </a:p>
+                  </a:txBody>
+                  <a:tcPr marL="54864" marR="54864" marT="27432" marB="27432" anchor="ctr">
+                    <a:solidFill>
+                      <a:srgbClr val="F5F7F9"/>
                     </a:solidFill>
                   </a:tcPr>
                 </a:tc>
@@ -29560,7 +27685,7 @@
                     <a:lstStyle/>
                     <a:p>
                       <a:pPr>
-                        <a:defRPr sz="650" b="1">
+                        <a:defRPr sz="720" b="1">
                           <a:solidFill>
                             <a:srgbClr val="0D1117"/>
                           </a:solidFill>
@@ -29587,7 +27712,7 @@
                     <a:lstStyle/>
                     <a:p>
                       <a:pPr>
-                        <a:defRPr sz="650" b="0">
+                        <a:defRPr sz="720" b="0">
                           <a:solidFill>
                             <a:srgbClr val="0D1117"/>
                           </a:solidFill>
@@ -29614,7 +27739,7 @@
                     <a:lstStyle/>
                     <a:p>
                       <a:pPr>
-                        <a:defRPr sz="650" b="0">
+                        <a:defRPr sz="720" b="0">
                           <a:solidFill>
                             <a:srgbClr val="0D1117"/>
                           </a:solidFill>
@@ -29625,7 +27750,7 @@
                         <a:rPr>
                           <a:latin typeface="Inter"/>
                         </a:rPr>
-                        <a:t>gradient_tool</a:t>
+                        <a:t>get_gradient_capabilities</a:t>
                       </a:r>
                     </a:p>
                   </a:txBody>
@@ -29641,7 +27766,7 @@
                     <a:lstStyle/>
                     <a:p>
                       <a:pPr>
-                        <a:defRPr sz="650" b="0">
+                        <a:defRPr sz="720" b="0">
                           <a:solidFill>
                             <a:srgbClr val="0D1117"/>
                           </a:solidFill>
@@ -29652,7 +27777,7 @@
                         <a:rPr>
                           <a:latin typeface="Inter"/>
                         </a:rPr>
-                        <a:t>get_gradient_capabilities</a:t>
+                        <a:t>2026-06-30</a:t>
                       </a:r>
                     </a:p>
                   </a:txBody>
@@ -29668,126 +27793,18 @@
                     <a:lstStyle/>
                     <a:p>
                       <a:pPr>
-                        <a:defRPr sz="650" b="0">
-                          <a:solidFill>
-                            <a:srgbClr val="0D1117"/>
-                          </a:solidFill>
-                          <a:latin typeface="Inter"/>
-                        </a:defRPr>
-                      </a:pPr>
-                      <a:r>
-                        <a:rPr>
-                          <a:latin typeface="Inter"/>
-                        </a:rPr>
-                        <a:t>illustrative</a:t>
-                      </a:r>
-                    </a:p>
-                  </a:txBody>
-                  <a:tcPr marL="54864" marR="54864" marT="27432" marB="27432" anchor="ctr">
-                    <a:solidFill>
-                      <a:srgbClr val="F5F7F9"/>
-                    </a:solidFill>
-                  </a:tcPr>
-                </a:tc>
-                <a:tc>
-                  <a:txBody>
-                    <a:bodyPr/>
-                    <a:lstStyle/>
-                    <a:p>
-                      <a:pPr>
-                        <a:defRPr sz="650" b="0">
-                          <a:solidFill>
-                            <a:srgbClr val="0D1117"/>
-                          </a:solidFill>
-                          <a:latin typeface="Inter"/>
-                        </a:defRPr>
-                      </a:pPr>
-                      <a:r>
-                        <a:rPr>
-                          <a:latin typeface="Inter"/>
-                        </a:rPr>
-                        <a:t>2026-06-30</a:t>
-                      </a:r>
-                    </a:p>
-                  </a:txBody>
-                  <a:tcPr marL="54864" marR="54864" marT="27432" marB="27432" anchor="ctr">
-                    <a:solidFill>
-                      <a:srgbClr val="F5F7F9"/>
-                    </a:solidFill>
-                  </a:tcPr>
-                </a:tc>
-                <a:tc>
-                  <a:txBody>
-                    <a:bodyPr/>
-                    <a:lstStyle/>
-                    <a:p>
-                      <a:pPr>
-                        <a:defRPr sz="650" b="0">
-                          <a:solidFill>
-                            <a:srgbClr val="0D1117"/>
-                          </a:solidFill>
-                          <a:latin typeface="Inter"/>
-                        </a:defRPr>
-                      </a:pPr>
-                      <a:r>
-                        <a:rPr>
-                          <a:latin typeface="Inter"/>
-                        </a:rPr>
-                        <a:t>Illustrative sample data</a:t>
-                      </a:r>
-                    </a:p>
-                  </a:txBody>
-                  <a:tcPr marL="54864" marR="54864" marT="27432" marB="27432" anchor="ctr">
-                    <a:solidFill>
-                      <a:srgbClr val="F5F7F9"/>
-                    </a:solidFill>
-                  </a:tcPr>
-                </a:tc>
-                <a:tc>
-                  <a:txBody>
-                    <a:bodyPr/>
-                    <a:lstStyle/>
-                    <a:p>
-                      <a:pPr>
-                        <a:defRPr sz="650" b="0">
-                          <a:solidFill>
-                            <a:srgbClr val="0D1117"/>
-                          </a:solidFill>
-                          <a:latin typeface="Inter"/>
-                        </a:defRPr>
-                      </a:pPr>
-                      <a:r>
-                        <a:rPr>
-                          <a:latin typeface="Inter"/>
-                        </a:rPr>
-                        <a:t>passed</a:t>
-                      </a:r>
-                    </a:p>
-                  </a:txBody>
-                  <a:tcPr marL="54864" marR="54864" marT="27432" marB="27432" anchor="ctr">
-                    <a:solidFill>
-                      <a:srgbClr val="F5F7F9"/>
-                    </a:solidFill>
-                  </a:tcPr>
-                </a:tc>
-                <a:tc>
-                  <a:txBody>
-                    <a:bodyPr/>
-                    <a:lstStyle/>
-                    <a:p>
-                      <a:pPr>
-                        <a:defRPr sz="650" b="0">
-                          <a:solidFill>
-                            <a:srgbClr val="0D1117"/>
-                          </a:solidFill>
-                          <a:latin typeface="Inter"/>
-                        </a:defRPr>
-                      </a:pPr>
-                      <a:r>
-                        <a:rPr>
-                          <a:latin typeface="Inter"/>
-                        </a:rPr>
-                        <a:t>sha256:aaaaaaaaaaaaaaaaaaaaaaaaaaaaaaaaaaaaaaaaaaaaaaaaaaaaaaaaaaaaaaaa</a:t>
+                        <a:defRPr sz="720" b="1">
+                          <a:solidFill>
+                            <a:srgbClr val="C6F432"/>
+                          </a:solidFill>
+                          <a:latin typeface="Inter"/>
+                        </a:defRPr>
+                      </a:pPr>
+                      <a:r>
+                        <a:rPr>
+                          <a:latin typeface="Inter"/>
+                        </a:rPr>
+                        <a:t>● Passed</a:t>
                       </a:r>
                     </a:p>
                   </a:txBody>
@@ -29805,7 +27822,7 @@
                     <a:lstStyle/>
                     <a:p>
                       <a:pPr>
-                        <a:defRPr sz="650" b="1">
+                        <a:defRPr sz="720" b="1">
                           <a:solidFill>
                             <a:srgbClr val="0D1117"/>
                           </a:solidFill>
@@ -29832,7 +27849,7 @@
                     <a:lstStyle/>
                     <a:p>
                       <a:pPr>
-                        <a:defRPr sz="650" b="0">
+                        <a:defRPr sz="720" b="0">
                           <a:solidFill>
                             <a:srgbClr val="0D1117"/>
                           </a:solidFill>
@@ -29859,7 +27876,7 @@
                     <a:lstStyle/>
                     <a:p>
                       <a:pPr>
-                        <a:defRPr sz="650" b="0">
+                        <a:defRPr sz="720" b="0">
                           <a:solidFill>
                             <a:srgbClr val="0D1117"/>
                           </a:solidFill>
@@ -29870,7 +27887,7 @@
                         <a:rPr>
                           <a:latin typeface="Inter"/>
                         </a:rPr>
-                        <a:t>gradient_tool</a:t>
+                        <a:t>get_gradient_capabilities</a:t>
                       </a:r>
                     </a:p>
                   </a:txBody>
@@ -29886,7 +27903,7 @@
                     <a:lstStyle/>
                     <a:p>
                       <a:pPr>
-                        <a:defRPr sz="650" b="0">
+                        <a:defRPr sz="720" b="0">
                           <a:solidFill>
                             <a:srgbClr val="0D1117"/>
                           </a:solidFill>
@@ -29897,7 +27914,7 @@
                         <a:rPr>
                           <a:latin typeface="Inter"/>
                         </a:rPr>
-                        <a:t>get_gradient_capabilities</a:t>
+                        <a:t>2026-06-30</a:t>
                       </a:r>
                     </a:p>
                   </a:txBody>
@@ -29913,132 +27930,24 @@
                     <a:lstStyle/>
                     <a:p>
                       <a:pPr>
-                        <a:defRPr sz="650" b="0">
-                          <a:solidFill>
-                            <a:srgbClr val="0D1117"/>
-                          </a:solidFill>
-                          <a:latin typeface="Inter"/>
-                        </a:defRPr>
-                      </a:pPr>
-                      <a:r>
-                        <a:rPr>
-                          <a:latin typeface="Inter"/>
-                        </a:rPr>
-                        <a:t>illustrative</a:t>
-                      </a:r>
-                    </a:p>
-                  </a:txBody>
-                  <a:tcPr marL="54864" marR="54864" marT="27432" marB="27432" anchor="ctr">
-                    <a:solidFill>
-                      <a:srgbClr val="FFFFFF"/>
-                    </a:solidFill>
-                  </a:tcPr>
-                </a:tc>
-                <a:tc>
-                  <a:txBody>
-                    <a:bodyPr/>
-                    <a:lstStyle/>
-                    <a:p>
-                      <a:pPr>
-                        <a:defRPr sz="650" b="0">
-                          <a:solidFill>
-                            <a:srgbClr val="0D1117"/>
-                          </a:solidFill>
-                          <a:latin typeface="Inter"/>
-                        </a:defRPr>
-                      </a:pPr>
-                      <a:r>
-                        <a:rPr>
-                          <a:latin typeface="Inter"/>
-                        </a:rPr>
-                        <a:t>2026-06-30</a:t>
-                      </a:r>
-                    </a:p>
-                  </a:txBody>
-                  <a:tcPr marL="54864" marR="54864" marT="27432" marB="27432" anchor="ctr">
-                    <a:solidFill>
-                      <a:srgbClr val="FFFFFF"/>
-                    </a:solidFill>
-                  </a:tcPr>
-                </a:tc>
-                <a:tc>
-                  <a:txBody>
-                    <a:bodyPr/>
-                    <a:lstStyle/>
-                    <a:p>
-                      <a:pPr>
-                        <a:defRPr sz="650" b="0">
-                          <a:solidFill>
-                            <a:srgbClr val="0D1117"/>
-                          </a:solidFill>
-                          <a:latin typeface="Inter"/>
-                        </a:defRPr>
-                      </a:pPr>
-                      <a:r>
-                        <a:rPr>
-                          <a:latin typeface="Inter"/>
-                        </a:rPr>
-                        <a:t>Illustrative sample data</a:t>
-                      </a:r>
-                    </a:p>
-                  </a:txBody>
-                  <a:tcPr marL="54864" marR="54864" marT="27432" marB="27432" anchor="ctr">
-                    <a:solidFill>
-                      <a:srgbClr val="FFFFFF"/>
-                    </a:solidFill>
-                  </a:tcPr>
-                </a:tc>
-                <a:tc>
-                  <a:txBody>
-                    <a:bodyPr/>
-                    <a:lstStyle/>
-                    <a:p>
-                      <a:pPr>
-                        <a:defRPr sz="650" b="0">
-                          <a:solidFill>
-                            <a:srgbClr val="0D1117"/>
-                          </a:solidFill>
-                          <a:latin typeface="Inter"/>
-                        </a:defRPr>
-                      </a:pPr>
-                      <a:r>
-                        <a:rPr>
-                          <a:latin typeface="Inter"/>
-                        </a:rPr>
-                        <a:t>advisory</a:t>
-                      </a:r>
-                    </a:p>
-                  </a:txBody>
-                  <a:tcPr marL="54864" marR="54864" marT="27432" marB="27432" anchor="ctr">
-                    <a:solidFill>
-                      <a:srgbClr val="FFFFFF"/>
-                    </a:solidFill>
-                  </a:tcPr>
-                </a:tc>
-                <a:tc>
-                  <a:txBody>
-                    <a:bodyPr/>
-                    <a:lstStyle/>
-                    <a:p>
-                      <a:pPr>
-                        <a:defRPr sz="650" b="0">
-                          <a:solidFill>
-                            <a:srgbClr val="0D1117"/>
-                          </a:solidFill>
-                          <a:latin typeface="Inter"/>
-                        </a:defRPr>
-                      </a:pPr>
-                      <a:r>
-                        <a:rPr>
-                          <a:latin typeface="Inter"/>
-                        </a:rPr>
-                        <a:t>sha256:aaaaaaaaaaaaaaaaaaaaaaaaaaaaaaaaaaaaaaaaaaaaaaaaaaaaaaaaaaaaaaaa</a:t>
-                      </a:r>
-                    </a:p>
-                  </a:txBody>
-                  <a:tcPr marL="54864" marR="54864" marT="27432" marB="27432" anchor="ctr">
-                    <a:solidFill>
-                      <a:srgbClr val="FFFFFF"/>
+                        <a:defRPr sz="720" b="1">
+                          <a:solidFill>
+                            <a:srgbClr val="F2A93B"/>
+                          </a:solidFill>
+                          <a:latin typeface="Inter"/>
+                        </a:defRPr>
+                      </a:pPr>
+                      <a:r>
+                        <a:rPr>
+                          <a:latin typeface="Inter"/>
+                        </a:rPr>
+                        <a:t>● Advisory</a:t>
+                      </a:r>
+                    </a:p>
+                  </a:txBody>
+                  <a:tcPr marL="54864" marR="54864" marT="27432" marB="27432" anchor="ctr">
+                    <a:solidFill>
+                      <a:srgbClr val="F5F7F9"/>
                     </a:solidFill>
                   </a:tcPr>
                 </a:tc>
@@ -30049,7 +27958,7 @@
       </p:graphicFrame>
       <p:sp>
         <p:nvSpPr>
-          <p:cNvPr id="9" name="TextBox 8"/>
+          <p:cNvPr id="8" name="TextBox 7"/>
           <p:cNvSpPr txBox="1"/>
           <p:nvPr/>
         </p:nvSpPr>
@@ -30091,7 +28000,7 @@
       </p:sp>
       <p:sp>
         <p:nvSpPr>
-          <p:cNvPr id="10" name="Rectangle 9"/>
+          <p:cNvPr id="9" name="Rectangle 8"/>
           <p:cNvSpPr/>
           <p:nvPr/>
         </p:nvSpPr>
@@ -30140,7 +28049,7 @@
       </p:sp>
       <p:sp>
         <p:nvSpPr>
-          <p:cNvPr id="11" name="TextBox 10"/>
+          <p:cNvPr id="10" name="TextBox 9"/>
           <p:cNvSpPr txBox="1"/>
           <p:nvPr/>
         </p:nvSpPr>
@@ -30182,7 +28091,7 @@
       </p:sp>
       <p:sp>
         <p:nvSpPr>
-          <p:cNvPr id="12" name="TextBox 11"/>
+          <p:cNvPr id="11" name="TextBox 10"/>
           <p:cNvSpPr txBox="1"/>
           <p:nvPr/>
         </p:nvSpPr>
@@ -30224,7 +28133,7 @@
       </p:sp>
       <p:sp>
         <p:nvSpPr>
-          <p:cNvPr id="13" name="TextBox 12"/>
+          <p:cNvPr id="12" name="TextBox 11"/>
           <p:cNvSpPr txBox="1"/>
           <p:nvPr/>
         </p:nvSpPr>
@@ -30339,48 +28248,6 @@
         </p:nvSpPr>
         <p:spPr>
           <a:xfrm>
-            <a:off x="5897880" y="310896"/>
-            <a:ext cx="4800600" cy="256032"/>
-          </a:xfrm>
-          <a:prstGeom prst="rect">
-            <a:avLst/>
-          </a:prstGeom>
-          <a:noFill/>
-        </p:spPr>
-        <p:txBody>
-          <a:bodyPr wrap="none" lIns="9144" rIns="9144" tIns="9144" bIns="9144" anchor="t">
-            <a:spAutoFit/>
-          </a:bodyPr>
-          <a:lstStyle/>
-          <a:p>
-            <a:pPr algn="r">
-              <a:spcAft>
-                <a:spcPts val="0"/>
-              </a:spcAft>
-              <a:defRPr sz="680" b="1">
-                <a:solidFill>
-                  <a:srgbClr val="4F6B00"/>
-                </a:solidFill>
-                <a:latin typeface="Inter"/>
-              </a:defRPr>
-            </a:pPr>
-            <a:r>
-              <a:rPr>
-                <a:latin typeface="Inter"/>
-              </a:rPr>
-              <a:t>Illustrative, Gradient Maintained — demo data, not the client's holdings or managers</a:t>
-            </a:r>
-          </a:p>
-        </p:txBody>
-      </p:sp>
-      <p:sp>
-        <p:nvSpPr>
-          <p:cNvPr id="4" name="TextBox 3"/>
-          <p:cNvSpPr txBox="1"/>
-          <p:nvPr/>
-        </p:nvSpPr>
-        <p:spPr>
-          <a:xfrm>
             <a:off x="640080" y="566928"/>
             <a:ext cx="10058400" cy="530352"/>
           </a:xfrm>
@@ -30417,7 +28284,7 @@
       </p:sp>
       <p:sp>
         <p:nvSpPr>
-          <p:cNvPr id="5" name="Rectangle 4"/>
+          <p:cNvPr id="4" name="Rectangle 3"/>
           <p:cNvSpPr/>
           <p:nvPr/>
         </p:nvSpPr>
@@ -30466,7 +28333,7 @@
       </p:sp>
       <p:sp>
         <p:nvSpPr>
-          <p:cNvPr id="6" name="Rectangle 5"/>
+          <p:cNvPr id="5" name="Rectangle 4"/>
           <p:cNvSpPr/>
           <p:nvPr/>
         </p:nvSpPr>
@@ -30515,7 +28382,7 @@
       </p:sp>
       <p:sp>
         <p:nvSpPr>
-          <p:cNvPr id="7" name="TextBox 6"/>
+          <p:cNvPr id="6" name="TextBox 5"/>
           <p:cNvSpPr txBox="1"/>
           <p:nvPr/>
         </p:nvSpPr>
@@ -30557,14 +28424,14 @@
       </p:sp>
       <p:sp>
         <p:nvSpPr>
-          <p:cNvPr id="8" name="Rectangle 7"/>
+          <p:cNvPr id="7" name="Rectangle 6"/>
           <p:cNvSpPr/>
           <p:nvPr/>
         </p:nvSpPr>
         <p:spPr>
           <a:xfrm>
             <a:off x="640080" y="1325880"/>
-            <a:ext cx="10908792" cy="831168"/>
+            <a:ext cx="10908792" cy="912407"/>
           </a:xfrm>
           <a:prstGeom prst="rect">
             <a:avLst/>
@@ -30606,14 +28473,14 @@
       </p:sp>
       <p:sp>
         <p:nvSpPr>
-          <p:cNvPr id="9" name="Rectangle 8"/>
+          <p:cNvPr id="8" name="Rectangle 7"/>
           <p:cNvSpPr/>
           <p:nvPr/>
         </p:nvSpPr>
         <p:spPr>
           <a:xfrm>
             <a:off x="640080" y="1325880"/>
-            <a:ext cx="54864" cy="831168"/>
+            <a:ext cx="54864" cy="912407"/>
           </a:xfrm>
           <a:prstGeom prst="rect">
             <a:avLst/>
@@ -30655,7 +28522,7 @@
       </p:sp>
       <p:sp>
         <p:nvSpPr>
-          <p:cNvPr id="10" name="TextBox 9"/>
+          <p:cNvPr id="9" name="TextBox 8"/>
           <p:cNvSpPr txBox="1"/>
           <p:nvPr/>
         </p:nvSpPr>
@@ -30697,14 +28564,14 @@
       </p:sp>
       <p:sp>
         <p:nvSpPr>
-          <p:cNvPr id="11" name="TextBox 10"/>
+          <p:cNvPr id="10" name="TextBox 9"/>
           <p:cNvSpPr txBox="1"/>
           <p:nvPr/>
         </p:nvSpPr>
         <p:spPr>
           <a:xfrm>
             <a:off x="804671" y="1719072"/>
-            <a:ext cx="10616184" cy="346536"/>
+            <a:ext cx="10616184" cy="427775"/>
           </a:xfrm>
           <a:prstGeom prst="rect">
             <a:avLst/>
@@ -30739,13 +28606,13 @@
       </p:sp>
       <p:sp>
         <p:nvSpPr>
-          <p:cNvPr id="12" name="TextBox 11"/>
+          <p:cNvPr id="11" name="TextBox 10"/>
           <p:cNvSpPr txBox="1"/>
           <p:nvPr/>
         </p:nvSpPr>
         <p:spPr>
           <a:xfrm>
-            <a:off x="640080" y="2266776"/>
+            <a:off x="640080" y="2348015"/>
             <a:ext cx="10908792" cy="201168"/>
           </a:xfrm>
           <a:prstGeom prst="rect">
@@ -30781,15 +28648,15 @@
       </p:sp>
       <p:graphicFrame>
         <p:nvGraphicFramePr>
-          <p:cNvPr id="13" name="Table 12"/>
+          <p:cNvPr id="12" name="Table 11"/>
           <p:cNvGraphicFramePr>
             <a:graphicFrameLocks noGrp="1"/>
           </p:cNvGraphicFramePr>
           <p:nvPr/>
         </p:nvGraphicFramePr>
         <p:xfrm>
-          <a:off x="640080" y="2541096"/>
-          <a:ext cx="10908792" cy="1247128"/>
+          <a:off x="640080" y="2622335"/>
+          <a:ext cx="10908792" cy="1395835"/>
         </p:xfrm>
         <a:graphic>
           <a:graphicData uri="http://schemas.openxmlformats.org/drawingml/2006/table">
@@ -30803,7 +28670,7 @@
                 <a:gridCol w="2965704"/>
                 <a:gridCol w="2965704"/>
               </a:tblGrid>
-              <a:tr h="311782">
+              <a:tr h="348958">
                 <a:tc>
                   <a:txBody>
                     <a:bodyPr/>
@@ -30913,7 +28780,7 @@
                   </a:tcPr>
                 </a:tc>
               </a:tr>
-              <a:tr h="311782">
+              <a:tr h="348958">
                 <a:tc>
                   <a:txBody>
                     <a:bodyPr/>
@@ -31023,7 +28890,7 @@
                   </a:tcPr>
                 </a:tc>
               </a:tr>
-              <a:tr h="311782">
+              <a:tr h="348958">
                 <a:tc>
                   <a:txBody>
                     <a:bodyPr/>
@@ -31133,7 +29000,7 @@
                   </a:tcPr>
                 </a:tc>
               </a:tr>
-              <a:tr h="311782">
+              <a:tr h="348961">
                 <a:tc>
                   <a:txBody>
                     <a:bodyPr/>
@@ -31249,14 +29116,14 @@
       </p:graphicFrame>
       <p:sp>
         <p:nvSpPr>
-          <p:cNvPr id="14" name="Rectangle 13"/>
+          <p:cNvPr id="13" name="Rectangle 12"/>
           <p:cNvSpPr/>
           <p:nvPr/>
         </p:nvSpPr>
         <p:spPr>
           <a:xfrm>
-            <a:off x="640080" y="3897953"/>
-            <a:ext cx="10908792" cy="775260"/>
+            <a:off x="640080" y="4127899"/>
+            <a:ext cx="10908792" cy="851034"/>
           </a:xfrm>
           <a:prstGeom prst="rect">
             <a:avLst/>
@@ -31298,14 +29165,14 @@
       </p:sp>
       <p:sp>
         <p:nvSpPr>
-          <p:cNvPr id="15" name="Rectangle 14"/>
+          <p:cNvPr id="14" name="Rectangle 13"/>
           <p:cNvSpPr/>
           <p:nvPr/>
         </p:nvSpPr>
         <p:spPr>
           <a:xfrm>
-            <a:off x="640080" y="3897953"/>
-            <a:ext cx="54864" cy="775260"/>
+            <a:off x="640080" y="4127899"/>
+            <a:ext cx="54864" cy="851034"/>
           </a:xfrm>
           <a:prstGeom prst="rect">
             <a:avLst/>
@@ -31347,13 +29214,13 @@
       </p:sp>
       <p:sp>
         <p:nvSpPr>
-          <p:cNvPr id="16" name="TextBox 15"/>
+          <p:cNvPr id="15" name="TextBox 14"/>
           <p:cNvSpPr txBox="1"/>
           <p:nvPr/>
         </p:nvSpPr>
         <p:spPr>
           <a:xfrm>
-            <a:off x="804671" y="4007681"/>
+            <a:off x="804671" y="4237627"/>
             <a:ext cx="10616184" cy="228600"/>
           </a:xfrm>
           <a:prstGeom prst="rect">
@@ -31389,14 +29256,14 @@
       </p:sp>
       <p:sp>
         <p:nvSpPr>
-          <p:cNvPr id="17" name="TextBox 16"/>
+          <p:cNvPr id="16" name="TextBox 15"/>
           <p:cNvSpPr txBox="1"/>
           <p:nvPr/>
         </p:nvSpPr>
         <p:spPr>
           <a:xfrm>
-            <a:off x="804671" y="4291145"/>
-            <a:ext cx="10616184" cy="290628"/>
+            <a:off x="804671" y="4521091"/>
+            <a:ext cx="10616184" cy="366402"/>
           </a:xfrm>
           <a:prstGeom prst="rect">
             <a:avLst/>
@@ -31431,14 +29298,14 @@
       </p:sp>
       <p:sp>
         <p:nvSpPr>
-          <p:cNvPr id="18" name="Rectangle 17"/>
+          <p:cNvPr id="17" name="Rectangle 16"/>
           <p:cNvSpPr/>
           <p:nvPr/>
         </p:nvSpPr>
         <p:spPr>
           <a:xfrm>
-            <a:off x="640080" y="4782942"/>
-            <a:ext cx="10908792" cy="1434977"/>
+            <a:off x="640080" y="5088662"/>
+            <a:ext cx="10908792" cy="1129257"/>
           </a:xfrm>
           <a:prstGeom prst="rect">
             <a:avLst/>
@@ -31480,14 +29347,14 @@
       </p:sp>
       <p:sp>
         <p:nvSpPr>
-          <p:cNvPr id="19" name="Rectangle 18"/>
+          <p:cNvPr id="18" name="Rectangle 17"/>
           <p:cNvSpPr/>
           <p:nvPr/>
         </p:nvSpPr>
         <p:spPr>
           <a:xfrm>
-            <a:off x="640080" y="4782942"/>
-            <a:ext cx="54864" cy="1434977"/>
+            <a:off x="640080" y="5088662"/>
+            <a:ext cx="54864" cy="1129257"/>
           </a:xfrm>
           <a:prstGeom prst="rect">
             <a:avLst/>
@@ -31529,13 +29396,13 @@
       </p:sp>
       <p:sp>
         <p:nvSpPr>
-          <p:cNvPr id="20" name="TextBox 19"/>
+          <p:cNvPr id="19" name="TextBox 18"/>
           <p:cNvSpPr txBox="1"/>
           <p:nvPr/>
         </p:nvSpPr>
         <p:spPr>
           <a:xfrm>
-            <a:off x="804671" y="4892670"/>
+            <a:off x="804671" y="5198390"/>
             <a:ext cx="10616184" cy="228600"/>
           </a:xfrm>
           <a:prstGeom prst="rect">
@@ -31564,21 +29431,21 @@
               <a:rPr>
                 <a:latin typeface="Inter"/>
               </a:rPr>
-              <a:t>Key judgment — headline signal</a:t>
+              <a:t>Key judgment — Concentration</a:t>
             </a:r>
           </a:p>
         </p:txBody>
       </p:sp>
       <p:sp>
         <p:nvSpPr>
-          <p:cNvPr id="21" name="TextBox 20"/>
+          <p:cNvPr id="20" name="TextBox 19"/>
           <p:cNvSpPr txBox="1"/>
           <p:nvPr/>
         </p:nvSpPr>
         <p:spPr>
           <a:xfrm>
-            <a:off x="804671" y="5176134"/>
-            <a:ext cx="10616184" cy="950345"/>
+            <a:off x="804671" y="5481854"/>
+            <a:ext cx="10616184" cy="644625"/>
           </a:xfrm>
           <a:prstGeom prst="rect">
             <a:avLst/>
@@ -31606,14 +29473,14 @@
               <a:rPr>
                 <a:latin typeface="Inter"/>
               </a:rPr>
-              <a:t>Observation: The sample report carries a manager-and-issuer concentration signal above the clear threshold [S1]. Why it matters: This signal focuses oversight on the report's most decision-relevant condition. Uncertainty: Evidence coverage may exclude newer or more detailed observations. What would change the view: A governed refresh showing a different signal or breached threshold.</a:t>
+              <a:t>Observation: Manager and issuer concentration sit near their limits [S1]. Why it matters: Moving 4.0pp to a passive completion mandate reduces both. Uncertainty: Transition costs are not yet confirmed. What would change the view: Costs that outweigh the concentration benefit.</a:t>
             </a:r>
           </a:p>
         </p:txBody>
       </p:sp>
       <p:sp>
         <p:nvSpPr>
-          <p:cNvPr id="22" name="Rectangle 21"/>
+          <p:cNvPr id="21" name="Rectangle 20"/>
           <p:cNvSpPr/>
           <p:nvPr/>
         </p:nvSpPr>
@@ -31662,7 +29529,7 @@
       </p:sp>
       <p:sp>
         <p:nvSpPr>
-          <p:cNvPr id="23" name="TextBox 22"/>
+          <p:cNvPr id="22" name="TextBox 21"/>
           <p:cNvSpPr txBox="1"/>
           <p:nvPr/>
         </p:nvSpPr>
@@ -31704,7 +29571,7 @@
       </p:sp>
       <p:sp>
         <p:nvSpPr>
-          <p:cNvPr id="24" name="TextBox 23"/>
+          <p:cNvPr id="23" name="TextBox 22"/>
           <p:cNvSpPr txBox="1"/>
           <p:nvPr/>
         </p:nvSpPr>
@@ -31746,7 +29613,7 @@
       </p:sp>
       <p:sp>
         <p:nvSpPr>
-          <p:cNvPr id="25" name="TextBox 24"/>
+          <p:cNvPr id="24" name="TextBox 23"/>
           <p:cNvSpPr txBox="1"/>
           <p:nvPr/>
         </p:nvSpPr>
@@ -31861,48 +29728,6 @@
         </p:nvSpPr>
         <p:spPr>
           <a:xfrm>
-            <a:off x="5897880" y="310896"/>
-            <a:ext cx="4800600" cy="256032"/>
-          </a:xfrm>
-          <a:prstGeom prst="rect">
-            <a:avLst/>
-          </a:prstGeom>
-          <a:noFill/>
-        </p:spPr>
-        <p:txBody>
-          <a:bodyPr wrap="none" lIns="9144" rIns="9144" tIns="9144" bIns="9144" anchor="t">
-            <a:spAutoFit/>
-          </a:bodyPr>
-          <a:lstStyle/>
-          <a:p>
-            <a:pPr algn="r">
-              <a:spcAft>
-                <a:spcPts val="0"/>
-              </a:spcAft>
-              <a:defRPr sz="680" b="1">
-                <a:solidFill>
-                  <a:srgbClr val="4F6B00"/>
-                </a:solidFill>
-                <a:latin typeface="Inter"/>
-              </a:defRPr>
-            </a:pPr>
-            <a:r>
-              <a:rPr>
-                <a:latin typeface="Inter"/>
-              </a:rPr>
-              <a:t>Illustrative, Gradient Maintained — demo data, not the client's holdings or managers</a:t>
-            </a:r>
-          </a:p>
-        </p:txBody>
-      </p:sp>
-      <p:sp>
-        <p:nvSpPr>
-          <p:cNvPr id="4" name="TextBox 3"/>
-          <p:cNvSpPr txBox="1"/>
-          <p:nvPr/>
-        </p:nvSpPr>
-        <p:spPr>
-          <a:xfrm>
             <a:off x="640080" y="566928"/>
             <a:ext cx="10058400" cy="530352"/>
           </a:xfrm>
@@ -31932,14 +29757,14 @@
               <a:rPr>
                 <a:latin typeface="Inter"/>
               </a:rPr>
-              <a:t>Appendix — Server Metric Methods and Disclosures</a:t>
+              <a:t>Appendix — Sources and methods — continued</a:t>
             </a:r>
           </a:p>
         </p:txBody>
       </p:sp>
       <p:sp>
         <p:nvSpPr>
-          <p:cNvPr id="5" name="Rectangle 4"/>
+          <p:cNvPr id="4" name="Rectangle 3"/>
           <p:cNvSpPr/>
           <p:nvPr/>
         </p:nvSpPr>
@@ -31988,7 +29813,7 @@
       </p:sp>
       <p:sp>
         <p:nvSpPr>
-          <p:cNvPr id="6" name="Rectangle 5"/>
+          <p:cNvPr id="5" name="Rectangle 4"/>
           <p:cNvSpPr/>
           <p:nvPr/>
         </p:nvSpPr>
@@ -32037,7 +29862,7 @@
       </p:sp>
       <p:sp>
         <p:nvSpPr>
-          <p:cNvPr id="7" name="TextBox 6"/>
+          <p:cNvPr id="6" name="TextBox 5"/>
           <p:cNvSpPr txBox="1"/>
           <p:nvPr/>
         </p:nvSpPr>
@@ -32072,14 +29897,14 @@
               <a:rPr>
                 <a:latin typeface="Inter"/>
               </a:rPr>
-              <a:t>B</a:t>
+              <a:t>A</a:t>
             </a:r>
           </a:p>
         </p:txBody>
       </p:sp>
       <p:sp>
         <p:nvSpPr>
-          <p:cNvPr id="8" name="TextBox 7"/>
+          <p:cNvPr id="7" name="TextBox 6"/>
           <p:cNvSpPr txBox="1"/>
           <p:nvPr/>
         </p:nvSpPr>
@@ -32114,14 +29939,14 @@
               <a:rPr>
                 <a:latin typeface="Inter"/>
               </a:rPr>
-              <a:t>SERVER METRIC METHODS</a:t>
+              <a:t>SOURCE AUDIT TRAIL</a:t>
             </a:r>
           </a:p>
         </p:txBody>
       </p:sp>
       <p:graphicFrame>
         <p:nvGraphicFramePr>
-          <p:cNvPr id="9" name="Table 8"/>
+          <p:cNvPr id="8" name="Table 7"/>
           <p:cNvGraphicFramePr>
             <a:graphicFrameLocks noGrp="1"/>
           </p:cNvGraphicFramePr>
@@ -32129,7 +29954,1372 @@
         </p:nvGraphicFramePr>
         <p:xfrm>
           <a:off x="640080" y="1600200"/>
-          <a:ext cx="10908792" cy="1486830"/>
+          <a:ext cx="10908792" cy="4416552"/>
+        </p:xfrm>
+        <a:graphic>
+          <a:graphicData uri="http://schemas.openxmlformats.org/drawingml/2006/table">
+            <a:tbl>
+              <a:tblPr firstRow="1" bandRow="1">
+                <a:tableStyleId>{5C22544A-7EE6-4342-B048-85BDC9FD1C3A}</a:tableStyleId>
+              </a:tblPr>
+              <a:tblGrid>
+                <a:gridCol w="2011680"/>
+                <a:gridCol w="4448556"/>
+                <a:gridCol w="4448556"/>
+              </a:tblGrid>
+              <a:tr h="441655">
+                <a:tc>
+                  <a:txBody>
+                    <a:bodyPr/>
+                    <a:lstStyle/>
+                    <a:p>
+                      <a:pPr>
+                        <a:defRPr sz="750" b="1">
+                          <a:solidFill>
+                            <a:srgbClr val="FFFFFF"/>
+                          </a:solidFill>
+                          <a:latin typeface="Inter"/>
+                        </a:defRPr>
+                      </a:pPr>
+                      <a:r>
+                        <a:rPr>
+                          <a:latin typeface="Inter"/>
+                        </a:rPr>
+                        <a:t>Tag</a:t>
+                      </a:r>
+                    </a:p>
+                  </a:txBody>
+                  <a:tcPr marL="54864" marR="54864" marT="27432" marB="27432" anchor="ctr">
+                    <a:solidFill>
+                      <a:srgbClr val="0D1117"/>
+                    </a:solidFill>
+                  </a:tcPr>
+                </a:tc>
+                <a:tc>
+                  <a:txBody>
+                    <a:bodyPr/>
+                    <a:lstStyle/>
+                    <a:p>
+                      <a:pPr>
+                        <a:defRPr sz="750" b="1">
+                          <a:solidFill>
+                            <a:srgbClr val="FFFFFF"/>
+                          </a:solidFill>
+                          <a:latin typeface="Inter"/>
+                        </a:defRPr>
+                      </a:pPr>
+                      <a:r>
+                        <a:rPr>
+                          <a:latin typeface="Inter"/>
+                        </a:rPr>
+                        <a:t>Key parameters</a:t>
+                      </a:r>
+                    </a:p>
+                  </a:txBody>
+                  <a:tcPr marL="54864" marR="54864" marT="27432" marB="27432" anchor="ctr">
+                    <a:solidFill>
+                      <a:srgbClr val="0D1117"/>
+                    </a:solidFill>
+                  </a:tcPr>
+                </a:tc>
+                <a:tc>
+                  <a:txBody>
+                    <a:bodyPr/>
+                    <a:lstStyle/>
+                    <a:p>
+                      <a:pPr>
+                        <a:defRPr sz="750" b="1">
+                          <a:solidFill>
+                            <a:srgbClr val="FFFFFF"/>
+                          </a:solidFill>
+                          <a:latin typeface="Inter"/>
+                        </a:defRPr>
+                      </a:pPr>
+                      <a:r>
+                        <a:rPr>
+                          <a:latin typeface="Inter"/>
+                        </a:rPr>
+                        <a:t>Digest</a:t>
+                      </a:r>
+                    </a:p>
+                  </a:txBody>
+                  <a:tcPr marL="54864" marR="54864" marT="27432" marB="27432" anchor="ctr">
+                    <a:solidFill>
+                      <a:srgbClr val="0D1117"/>
+                    </a:solidFill>
+                  </a:tcPr>
+                </a:tc>
+              </a:tr>
+              <a:tr h="441655">
+                <a:tc>
+                  <a:txBody>
+                    <a:bodyPr/>
+                    <a:lstStyle/>
+                    <a:p>
+                      <a:pPr>
+                        <a:defRPr sz="800" b="1">
+                          <a:solidFill>
+                            <a:srgbClr val="0D1117"/>
+                          </a:solidFill>
+                          <a:latin typeface="Inter"/>
+                        </a:defRPr>
+                      </a:pPr>
+                      <a:r>
+                        <a:rPr>
+                          <a:latin typeface="Inter"/>
+                        </a:rPr>
+                        <a:t>S1</a:t>
+                      </a:r>
+                    </a:p>
+                  </a:txBody>
+                  <a:tcPr marL="54864" marR="54864" marT="27432" marB="27432" anchor="ctr">
+                    <a:solidFill>
+                      <a:srgbClr val="FFFFFF"/>
+                    </a:solidFill>
+                  </a:tcPr>
+                </a:tc>
+                <a:tc>
+                  <a:txBody>
+                    <a:bodyPr/>
+                    <a:lstStyle/>
+                    <a:p>
+                      <a:pPr>
+                        <a:defRPr sz="800" b="0">
+                          <a:solidFill>
+                            <a:srgbClr val="0D1117"/>
+                          </a:solidFill>
+                          <a:latin typeface="Inter"/>
+                        </a:defRPr>
+                      </a:pPr>
+                      <a:r>
+                        <a:rPr>
+                          <a:latin typeface="Inter"/>
+                        </a:rPr>
+                        <a:t>organization=test</a:t>
+                      </a:r>
+                    </a:p>
+                  </a:txBody>
+                  <a:tcPr marL="54864" marR="54864" marT="27432" marB="27432" anchor="ctr">
+                    <a:solidFill>
+                      <a:srgbClr val="FFFFFF"/>
+                    </a:solidFill>
+                  </a:tcPr>
+                </a:tc>
+                <a:tc>
+                  <a:txBody>
+                    <a:bodyPr/>
+                    <a:lstStyle/>
+                    <a:p>
+                      <a:pPr>
+                        <a:defRPr sz="800" b="0">
+                          <a:solidFill>
+                            <a:srgbClr val="0D1117"/>
+                          </a:solidFill>
+                          <a:latin typeface="Inter"/>
+                        </a:defRPr>
+                      </a:pPr>
+                      <a:r>
+                        <a:rPr>
+                          <a:latin typeface="Inter"/>
+                        </a:rPr>
+                        <a:t>sha256:aaaaaaaaaaaaaaaaaaaaaaaaaaaaaaaaaaaaaaaaaaaaaaaaaaaaaaaaaaaaaaaa</a:t>
+                      </a:r>
+                    </a:p>
+                  </a:txBody>
+                  <a:tcPr marL="54864" marR="54864" marT="27432" marB="27432" anchor="ctr">
+                    <a:solidFill>
+                      <a:srgbClr val="FFFFFF"/>
+                    </a:solidFill>
+                  </a:tcPr>
+                </a:tc>
+              </a:tr>
+              <a:tr h="441655">
+                <a:tc>
+                  <a:txBody>
+                    <a:bodyPr/>
+                    <a:lstStyle/>
+                    <a:p>
+                      <a:pPr>
+                        <a:defRPr sz="800" b="1">
+                          <a:solidFill>
+                            <a:srgbClr val="0D1117"/>
+                          </a:solidFill>
+                          <a:latin typeface="Inter"/>
+                        </a:defRPr>
+                      </a:pPr>
+                      <a:r>
+                        <a:rPr>
+                          <a:latin typeface="Inter"/>
+                        </a:rPr>
+                        <a:t>S2</a:t>
+                      </a:r>
+                    </a:p>
+                  </a:txBody>
+                  <a:tcPr marL="54864" marR="54864" marT="27432" marB="27432" anchor="ctr">
+                    <a:solidFill>
+                      <a:srgbClr val="F5F7F9"/>
+                    </a:solidFill>
+                  </a:tcPr>
+                </a:tc>
+                <a:tc>
+                  <a:txBody>
+                    <a:bodyPr/>
+                    <a:lstStyle/>
+                    <a:p>
+                      <a:pPr>
+                        <a:defRPr sz="800" b="0">
+                          <a:solidFill>
+                            <a:srgbClr val="0D1117"/>
+                          </a:solidFill>
+                          <a:latin typeface="Inter"/>
+                        </a:defRPr>
+                      </a:pPr>
+                      <a:r>
+                        <a:rPr>
+                          <a:latin typeface="Inter"/>
+                        </a:rPr>
+                        <a:t>allocation_tree</a:t>
+                      </a:r>
+                    </a:p>
+                  </a:txBody>
+                  <a:tcPr marL="54864" marR="54864" marT="27432" marB="27432" anchor="ctr">
+                    <a:solidFill>
+                      <a:srgbClr val="F5F7F9"/>
+                    </a:solidFill>
+                  </a:tcPr>
+                </a:tc>
+                <a:tc>
+                  <a:txBody>
+                    <a:bodyPr/>
+                    <a:lstStyle/>
+                    <a:p>
+                      <a:pPr>
+                        <a:defRPr sz="800" b="0">
+                          <a:solidFill>
+                            <a:srgbClr val="0D1117"/>
+                          </a:solidFill>
+                          <a:latin typeface="Inter"/>
+                        </a:defRPr>
+                      </a:pPr>
+                      <a:r>
+                        <a:rPr>
+                          <a:latin typeface="Inter"/>
+                        </a:rPr>
+                        <a:t>sha256:aaaaaaaaaaaaaaaaaaaaaaaaaaaaaaaaaaaaaaaaaaaaaaaaaaaaaaaaaaaaaaaa</a:t>
+                      </a:r>
+                    </a:p>
+                  </a:txBody>
+                  <a:tcPr marL="54864" marR="54864" marT="27432" marB="27432" anchor="ctr">
+                    <a:solidFill>
+                      <a:srgbClr val="F5F7F9"/>
+                    </a:solidFill>
+                  </a:tcPr>
+                </a:tc>
+              </a:tr>
+              <a:tr h="441655">
+                <a:tc>
+                  <a:txBody>
+                    <a:bodyPr/>
+                    <a:lstStyle/>
+                    <a:p>
+                      <a:pPr>
+                        <a:defRPr sz="800" b="1">
+                          <a:solidFill>
+                            <a:srgbClr val="0D1117"/>
+                          </a:solidFill>
+                          <a:latin typeface="Inter"/>
+                        </a:defRPr>
+                      </a:pPr>
+                      <a:r>
+                        <a:rPr>
+                          <a:latin typeface="Inter"/>
+                        </a:rPr>
+                        <a:t>S3</a:t>
+                      </a:r>
+                    </a:p>
+                  </a:txBody>
+                  <a:tcPr marL="54864" marR="54864" marT="27432" marB="27432" anchor="ctr">
+                    <a:solidFill>
+                      <a:srgbClr val="FFFFFF"/>
+                    </a:solidFill>
+                  </a:tcPr>
+                </a:tc>
+                <a:tc>
+                  <a:txBody>
+                    <a:bodyPr/>
+                    <a:lstStyle/>
+                    <a:p>
+                      <a:pPr>
+                        <a:defRPr sz="800" b="0">
+                          <a:solidFill>
+                            <a:srgbClr val="0D1117"/>
+                          </a:solidFill>
+                          <a:latin typeface="Inter"/>
+                        </a:defRPr>
+                      </a:pPr>
+                      <a:r>
+                        <a:rPr>
+                          <a:latin typeface="Inter"/>
+                        </a:rPr>
+                        <a:t>portfolio=test</a:t>
+                      </a:r>
+                    </a:p>
+                  </a:txBody>
+                  <a:tcPr marL="54864" marR="54864" marT="27432" marB="27432" anchor="ctr">
+                    <a:solidFill>
+                      <a:srgbClr val="FFFFFF"/>
+                    </a:solidFill>
+                  </a:tcPr>
+                </a:tc>
+                <a:tc>
+                  <a:txBody>
+                    <a:bodyPr/>
+                    <a:lstStyle/>
+                    <a:p>
+                      <a:pPr>
+                        <a:defRPr sz="800" b="0">
+                          <a:solidFill>
+                            <a:srgbClr val="0D1117"/>
+                          </a:solidFill>
+                          <a:latin typeface="Inter"/>
+                        </a:defRPr>
+                      </a:pPr>
+                      <a:r>
+                        <a:rPr>
+                          <a:latin typeface="Inter"/>
+                        </a:rPr>
+                        <a:t>sha256:aaaaaaaaaaaaaaaaaaaaaaaaaaaaaaaaaaaaaaaaaaaaaaaaaaaaaaaaaaaaaaaa</a:t>
+                      </a:r>
+                    </a:p>
+                  </a:txBody>
+                  <a:tcPr marL="54864" marR="54864" marT="27432" marB="27432" anchor="ctr">
+                    <a:solidFill>
+                      <a:srgbClr val="FFFFFF"/>
+                    </a:solidFill>
+                  </a:tcPr>
+                </a:tc>
+              </a:tr>
+              <a:tr h="441655">
+                <a:tc>
+                  <a:txBody>
+                    <a:bodyPr/>
+                    <a:lstStyle/>
+                    <a:p>
+                      <a:pPr>
+                        <a:defRPr sz="800" b="1">
+                          <a:solidFill>
+                            <a:srgbClr val="0D1117"/>
+                          </a:solidFill>
+                          <a:latin typeface="Inter"/>
+                        </a:defRPr>
+                      </a:pPr>
+                      <a:r>
+                        <a:rPr>
+                          <a:latin typeface="Inter"/>
+                        </a:rPr>
+                        <a:t>S4</a:t>
+                      </a:r>
+                    </a:p>
+                  </a:txBody>
+                  <a:tcPr marL="54864" marR="54864" marT="27432" marB="27432" anchor="ctr">
+                    <a:solidFill>
+                      <a:srgbClr val="F5F7F9"/>
+                    </a:solidFill>
+                  </a:tcPr>
+                </a:tc>
+                <a:tc>
+                  <a:txBody>
+                    <a:bodyPr/>
+                    <a:lstStyle/>
+                    <a:p>
+                      <a:pPr>
+                        <a:defRPr sz="800" b="0">
+                          <a:solidFill>
+                            <a:srgbClr val="0D1117"/>
+                          </a:solidFill>
+                          <a:latin typeface="Inter"/>
+                        </a:defRPr>
+                      </a:pPr>
+                      <a:r>
+                        <a:rPr>
+                          <a:latin typeface="Inter"/>
+                        </a:rPr>
+                        <a:t>public_equity; allocations</a:t>
+                      </a:r>
+                    </a:p>
+                  </a:txBody>
+                  <a:tcPr marL="54864" marR="54864" marT="27432" marB="27432" anchor="ctr">
+                    <a:solidFill>
+                      <a:srgbClr val="F5F7F9"/>
+                    </a:solidFill>
+                  </a:tcPr>
+                </a:tc>
+                <a:tc>
+                  <a:txBody>
+                    <a:bodyPr/>
+                    <a:lstStyle/>
+                    <a:p>
+                      <a:pPr>
+                        <a:defRPr sz="800" b="0">
+                          <a:solidFill>
+                            <a:srgbClr val="0D1117"/>
+                          </a:solidFill>
+                          <a:latin typeface="Inter"/>
+                        </a:defRPr>
+                      </a:pPr>
+                      <a:r>
+                        <a:rPr>
+                          <a:latin typeface="Inter"/>
+                        </a:rPr>
+                        <a:t>sha256:aaaaaaaaaaaaaaaaaaaaaaaaaaaaaaaaaaaaaaaaaaaaaaaaaaaaaaaaaaaaaaaa</a:t>
+                      </a:r>
+                    </a:p>
+                  </a:txBody>
+                  <a:tcPr marL="54864" marR="54864" marT="27432" marB="27432" anchor="ctr">
+                    <a:solidFill>
+                      <a:srgbClr val="F5F7F9"/>
+                    </a:solidFill>
+                  </a:tcPr>
+                </a:tc>
+              </a:tr>
+              <a:tr h="441655">
+                <a:tc>
+                  <a:txBody>
+                    <a:bodyPr/>
+                    <a:lstStyle/>
+                    <a:p>
+                      <a:pPr>
+                        <a:defRPr sz="800" b="1">
+                          <a:solidFill>
+                            <a:srgbClr val="0D1117"/>
+                          </a:solidFill>
+                          <a:latin typeface="Inter"/>
+                        </a:defRPr>
+                      </a:pPr>
+                      <a:r>
+                        <a:rPr>
+                          <a:latin typeface="Inter"/>
+                        </a:rPr>
+                        <a:t>S5</a:t>
+                      </a:r>
+                    </a:p>
+                  </a:txBody>
+                  <a:tcPr marL="54864" marR="54864" marT="27432" marB="27432" anchor="ctr">
+                    <a:solidFill>
+                      <a:srgbClr val="FFFFFF"/>
+                    </a:solidFill>
+                  </a:tcPr>
+                </a:tc>
+                <a:tc>
+                  <a:txBody>
+                    <a:bodyPr/>
+                    <a:lstStyle/>
+                    <a:p>
+                      <a:pPr>
+                        <a:defRPr sz="800" b="0">
+                          <a:solidFill>
+                            <a:srgbClr val="0D1117"/>
+                          </a:solidFill>
+                          <a:latin typeface="Inter"/>
+                        </a:defRPr>
+                      </a:pPr>
+                      <a:r>
+                        <a:rPr>
+                          <a:latin typeface="Inter"/>
+                        </a:rPr>
+                        <a:t>all sections</a:t>
+                      </a:r>
+                    </a:p>
+                  </a:txBody>
+                  <a:tcPr marL="54864" marR="54864" marT="27432" marB="27432" anchor="ctr">
+                    <a:solidFill>
+                      <a:srgbClr val="FFFFFF"/>
+                    </a:solidFill>
+                  </a:tcPr>
+                </a:tc>
+                <a:tc>
+                  <a:txBody>
+                    <a:bodyPr/>
+                    <a:lstStyle/>
+                    <a:p>
+                      <a:pPr>
+                        <a:defRPr sz="800" b="0">
+                          <a:solidFill>
+                            <a:srgbClr val="0D1117"/>
+                          </a:solidFill>
+                          <a:latin typeface="Inter"/>
+                        </a:defRPr>
+                      </a:pPr>
+                      <a:r>
+                        <a:rPr>
+                          <a:latin typeface="Inter"/>
+                        </a:rPr>
+                        <a:t>sha256:aaaaaaaaaaaaaaaaaaaaaaaaaaaaaaaaaaaaaaaaaaaaaaaaaaaaaaaaaaaaaaaa</a:t>
+                      </a:r>
+                    </a:p>
+                  </a:txBody>
+                  <a:tcPr marL="54864" marR="54864" marT="27432" marB="27432" anchor="ctr">
+                    <a:solidFill>
+                      <a:srgbClr val="FFFFFF"/>
+                    </a:solidFill>
+                  </a:tcPr>
+                </a:tc>
+              </a:tr>
+              <a:tr h="441655">
+                <a:tc>
+                  <a:txBody>
+                    <a:bodyPr/>
+                    <a:lstStyle/>
+                    <a:p>
+                      <a:pPr>
+                        <a:defRPr sz="800" b="1">
+                          <a:solidFill>
+                            <a:srgbClr val="0D1117"/>
+                          </a:solidFill>
+                          <a:latin typeface="Inter"/>
+                        </a:defRPr>
+                      </a:pPr>
+                      <a:r>
+                        <a:rPr>
+                          <a:latin typeface="Inter"/>
+                        </a:rPr>
+                        <a:t>S6</a:t>
+                      </a:r>
+                    </a:p>
+                  </a:txBody>
+                  <a:tcPr marL="54864" marR="54864" marT="27432" marB="27432" anchor="ctr">
+                    <a:solidFill>
+                      <a:srgbClr val="F5F7F9"/>
+                    </a:solidFill>
+                  </a:tcPr>
+                </a:tc>
+                <a:tc>
+                  <a:txBody>
+                    <a:bodyPr/>
+                    <a:lstStyle/>
+                    <a:p>
+                      <a:pPr>
+                        <a:defRPr sz="800" b="0">
+                          <a:solidFill>
+                            <a:srgbClr val="0D1117"/>
+                          </a:solidFill>
+                          <a:latin typeface="Inter"/>
+                        </a:defRPr>
+                      </a:pPr>
+                      <a:r>
+                        <a:rPr>
+                          <a:latin typeface="Inter"/>
+                        </a:rPr>
+                        <a:t>baseline</a:t>
+                      </a:r>
+                    </a:p>
+                  </a:txBody>
+                  <a:tcPr marL="54864" marR="54864" marT="27432" marB="27432" anchor="ctr">
+                    <a:solidFill>
+                      <a:srgbClr val="F5F7F9"/>
+                    </a:solidFill>
+                  </a:tcPr>
+                </a:tc>
+                <a:tc>
+                  <a:txBody>
+                    <a:bodyPr/>
+                    <a:lstStyle/>
+                    <a:p>
+                      <a:pPr>
+                        <a:defRPr sz="800" b="0">
+                          <a:solidFill>
+                            <a:srgbClr val="0D1117"/>
+                          </a:solidFill>
+                          <a:latin typeface="Inter"/>
+                        </a:defRPr>
+                      </a:pPr>
+                      <a:r>
+                        <a:rPr>
+                          <a:latin typeface="Inter"/>
+                        </a:rPr>
+                        <a:t>sha256:aaaaaaaaaaaaaaaaaaaaaaaaaaaaaaaaaaaaaaaaaaaaaaaaaaaaaaaaaaaaaaaa</a:t>
+                      </a:r>
+                    </a:p>
+                  </a:txBody>
+                  <a:tcPr marL="54864" marR="54864" marT="27432" marB="27432" anchor="ctr">
+                    <a:solidFill>
+                      <a:srgbClr val="F5F7F9"/>
+                    </a:solidFill>
+                  </a:tcPr>
+                </a:tc>
+              </a:tr>
+              <a:tr h="441655">
+                <a:tc>
+                  <a:txBody>
+                    <a:bodyPr/>
+                    <a:lstStyle/>
+                    <a:p>
+                      <a:pPr>
+                        <a:defRPr sz="800" b="1">
+                          <a:solidFill>
+                            <a:srgbClr val="0D1117"/>
+                          </a:solidFill>
+                          <a:latin typeface="Inter"/>
+                        </a:defRPr>
+                      </a:pPr>
+                      <a:r>
+                        <a:rPr>
+                          <a:latin typeface="Inter"/>
+                        </a:rPr>
+                        <a:t>S7</a:t>
+                      </a:r>
+                    </a:p>
+                  </a:txBody>
+                  <a:tcPr marL="54864" marR="54864" marT="27432" marB="27432" anchor="ctr">
+                    <a:solidFill>
+                      <a:srgbClr val="FFFFFF"/>
+                    </a:solidFill>
+                  </a:tcPr>
+                </a:tc>
+                <a:tc>
+                  <a:txBody>
+                    <a:bodyPr/>
+                    <a:lstStyle/>
+                    <a:p>
+                      <a:pPr>
+                        <a:defRPr sz="800" b="0">
+                          <a:solidFill>
+                            <a:srgbClr val="0D1117"/>
+                          </a:solidFill>
+                          <a:latin typeface="Inter"/>
+                        </a:defRPr>
+                      </a:pPr>
+                      <a:r>
+                        <a:rPr>
+                          <a:latin typeface="Inter"/>
+                        </a:rPr>
+                        <a:t>include=lookthrough_13f</a:t>
+                      </a:r>
+                    </a:p>
+                  </a:txBody>
+                  <a:tcPr marL="54864" marR="54864" marT="27432" marB="27432" anchor="ctr">
+                    <a:solidFill>
+                      <a:srgbClr val="FFFFFF"/>
+                    </a:solidFill>
+                  </a:tcPr>
+                </a:tc>
+                <a:tc>
+                  <a:txBody>
+                    <a:bodyPr/>
+                    <a:lstStyle/>
+                    <a:p>
+                      <a:pPr>
+                        <a:defRPr sz="800" b="0">
+                          <a:solidFill>
+                            <a:srgbClr val="0D1117"/>
+                          </a:solidFill>
+                          <a:latin typeface="Inter"/>
+                        </a:defRPr>
+                      </a:pPr>
+                      <a:r>
+                        <a:rPr>
+                          <a:latin typeface="Inter"/>
+                        </a:rPr>
+                        <a:t>sha256:aaaaaaaaaaaaaaaaaaaaaaaaaaaaaaaaaaaaaaaaaaaaaaaaaaaaaaaaaaaaaaaa</a:t>
+                      </a:r>
+                    </a:p>
+                  </a:txBody>
+                  <a:tcPr marL="54864" marR="54864" marT="27432" marB="27432" anchor="ctr">
+                    <a:solidFill>
+                      <a:srgbClr val="FFFFFF"/>
+                    </a:solidFill>
+                  </a:tcPr>
+                </a:tc>
+              </a:tr>
+              <a:tr h="441655">
+                <a:tc>
+                  <a:txBody>
+                    <a:bodyPr/>
+                    <a:lstStyle/>
+                    <a:p>
+                      <a:pPr>
+                        <a:defRPr sz="800" b="1">
+                          <a:solidFill>
+                            <a:srgbClr val="0D1117"/>
+                          </a:solidFill>
+                          <a:latin typeface="Inter"/>
+                        </a:defRPr>
+                      </a:pPr>
+                      <a:r>
+                        <a:rPr>
+                          <a:latin typeface="Inter"/>
+                        </a:rPr>
+                        <a:t>S8</a:t>
+                      </a:r>
+                    </a:p>
+                  </a:txBody>
+                  <a:tcPr marL="54864" marR="54864" marT="27432" marB="27432" anchor="ctr">
+                    <a:solidFill>
+                      <a:srgbClr val="F5F7F9"/>
+                    </a:solidFill>
+                  </a:tcPr>
+                </a:tc>
+                <a:tc>
+                  <a:txBody>
+                    <a:bodyPr/>
+                    <a:lstStyle/>
+                    <a:p>
+                      <a:pPr>
+                        <a:defRPr sz="800" b="0">
+                          <a:solidFill>
+                            <a:srgbClr val="0D1117"/>
+                          </a:solidFill>
+                          <a:latin typeface="Inter"/>
+                        </a:defRPr>
+                      </a:pPr>
+                      <a:r>
+                        <a:rPr>
+                          <a:latin typeface="Inter"/>
+                        </a:rPr>
+                        <a:t>illustrative</a:t>
+                      </a:r>
+                    </a:p>
+                  </a:txBody>
+                  <a:tcPr marL="54864" marR="54864" marT="27432" marB="27432" anchor="ctr">
+                    <a:solidFill>
+                      <a:srgbClr val="F5F7F9"/>
+                    </a:solidFill>
+                  </a:tcPr>
+                </a:tc>
+                <a:tc>
+                  <a:txBody>
+                    <a:bodyPr/>
+                    <a:lstStyle/>
+                    <a:p>
+                      <a:pPr>
+                        <a:defRPr sz="800" b="0">
+                          <a:solidFill>
+                            <a:srgbClr val="0D1117"/>
+                          </a:solidFill>
+                          <a:latin typeface="Inter"/>
+                        </a:defRPr>
+                      </a:pPr>
+                      <a:r>
+                        <a:rPr>
+                          <a:latin typeface="Inter"/>
+                        </a:rPr>
+                        <a:t>sha256:aaaaaaaaaaaaaaaaaaaaaaaaaaaaaaaaaaaaaaaaaaaaaaaaaaaaaaaaaaaaaaaa</a:t>
+                      </a:r>
+                    </a:p>
+                  </a:txBody>
+                  <a:tcPr marL="54864" marR="54864" marT="27432" marB="27432" anchor="ctr">
+                    <a:solidFill>
+                      <a:srgbClr val="F5F7F9"/>
+                    </a:solidFill>
+                  </a:tcPr>
+                </a:tc>
+              </a:tr>
+              <a:tr h="441657">
+                <a:tc>
+                  <a:txBody>
+                    <a:bodyPr/>
+                    <a:lstStyle/>
+                    <a:p>
+                      <a:pPr>
+                        <a:defRPr sz="800" b="1">
+                          <a:solidFill>
+                            <a:srgbClr val="0D1117"/>
+                          </a:solidFill>
+                          <a:latin typeface="Inter"/>
+                        </a:defRPr>
+                      </a:pPr>
+                      <a:r>
+                        <a:rPr>
+                          <a:latin typeface="Inter"/>
+                        </a:rPr>
+                        <a:t>S9</a:t>
+                      </a:r>
+                    </a:p>
+                  </a:txBody>
+                  <a:tcPr marL="54864" marR="54864" marT="27432" marB="27432" anchor="ctr">
+                    <a:solidFill>
+                      <a:srgbClr val="FFFFFF"/>
+                    </a:solidFill>
+                  </a:tcPr>
+                </a:tc>
+                <a:tc>
+                  <a:txBody>
+                    <a:bodyPr/>
+                    <a:lstStyle/>
+                    <a:p>
+                      <a:pPr>
+                        <a:defRPr sz="800" b="0">
+                          <a:solidFill>
+                            <a:srgbClr val="0D1117"/>
+                          </a:solidFill>
+                          <a:latin typeface="Inter"/>
+                        </a:defRPr>
+                      </a:pPr>
+                      <a:r>
+                        <a:rPr>
+                          <a:latin typeface="Inter"/>
+                        </a:rPr>
+                        <a:t>illustrative</a:t>
+                      </a:r>
+                    </a:p>
+                  </a:txBody>
+                  <a:tcPr marL="54864" marR="54864" marT="27432" marB="27432" anchor="ctr">
+                    <a:solidFill>
+                      <a:srgbClr val="FFFFFF"/>
+                    </a:solidFill>
+                  </a:tcPr>
+                </a:tc>
+                <a:tc>
+                  <a:txBody>
+                    <a:bodyPr/>
+                    <a:lstStyle/>
+                    <a:p>
+                      <a:pPr>
+                        <a:defRPr sz="800" b="0">
+                          <a:solidFill>
+                            <a:srgbClr val="0D1117"/>
+                          </a:solidFill>
+                          <a:latin typeface="Inter"/>
+                        </a:defRPr>
+                      </a:pPr>
+                      <a:r>
+                        <a:rPr>
+                          <a:latin typeface="Inter"/>
+                        </a:rPr>
+                        <a:t>sha256:aaaaaaaaaaaaaaaaaaaaaaaaaaaaaaaaaaaaaaaaaaaaaaaaaaaaaaaaaaaaaaaa</a:t>
+                      </a:r>
+                    </a:p>
+                  </a:txBody>
+                  <a:tcPr marL="54864" marR="54864" marT="27432" marB="27432" anchor="ctr">
+                    <a:solidFill>
+                      <a:srgbClr val="FFFFFF"/>
+                    </a:solidFill>
+                  </a:tcPr>
+                </a:tc>
+              </a:tr>
+            </a:tbl>
+          </a:graphicData>
+        </a:graphic>
+      </p:graphicFrame>
+      <p:sp>
+        <p:nvSpPr>
+          <p:cNvPr id="9" name="TextBox 8"/>
+          <p:cNvSpPr txBox="1"/>
+          <p:nvPr/>
+        </p:nvSpPr>
+        <p:spPr>
+          <a:xfrm>
+            <a:off x="640080" y="6035040"/>
+            <a:ext cx="10908792" cy="164592"/>
+          </a:xfrm>
+          <a:prstGeom prst="rect">
+            <a:avLst/>
+          </a:prstGeom>
+          <a:noFill/>
+        </p:spPr>
+        <p:txBody>
+          <a:bodyPr wrap="none" lIns="9144" rIns="9144" tIns="9144" bIns="9144" anchor="t">
+            <a:spAutoFit/>
+          </a:bodyPr>
+          <a:lstStyle/>
+          <a:p>
+            <a:pPr algn="l">
+              <a:spcAft>
+                <a:spcPts val="0"/>
+              </a:spcAft>
+              <a:defRPr sz="680" b="0">
+                <a:solidFill>
+                  <a:srgbClr val="8A94A1"/>
+                </a:solidFill>
+                <a:latin typeface="Inter"/>
+              </a:defRPr>
+            </a:pPr>
+            <a:r>
+              <a:rPr>
+                <a:latin typeface="Inter"/>
+              </a:rPr>
+              <a:t>Data scope for every source: Illustrative sample data. Each digest is the SHA-256 fingerprint of the exact data the report used.</a:t>
+            </a:r>
+          </a:p>
+        </p:txBody>
+      </p:sp>
+      <p:sp>
+        <p:nvSpPr>
+          <p:cNvPr id="10" name="Rectangle 9"/>
+          <p:cNvSpPr/>
+          <p:nvPr/>
+        </p:nvSpPr>
+        <p:spPr>
+          <a:xfrm>
+            <a:off x="640080" y="6446520"/>
+            <a:ext cx="10908792" cy="9144"/>
+          </a:xfrm>
+          <a:prstGeom prst="rect">
+            <a:avLst/>
+          </a:prstGeom>
+          <a:solidFill>
+            <a:srgbClr val="E3E7EC"/>
+          </a:solidFill>
+          <a:ln>
+            <a:solidFill>
+              <a:srgbClr val="E3E7EC"/>
+            </a:solidFill>
+          </a:ln>
+        </p:spPr>
+        <p:style>
+          <a:lnRef idx="1">
+            <a:schemeClr val="accent1"/>
+          </a:lnRef>
+          <a:fillRef idx="3">
+            <a:schemeClr val="accent1"/>
+          </a:fillRef>
+          <a:effectRef idx="2">
+            <a:schemeClr val="accent1"/>
+          </a:effectRef>
+          <a:fontRef idx="minor">
+            <a:schemeClr val="lt1"/>
+          </a:fontRef>
+        </p:style>
+        <p:txBody>
+          <a:bodyPr rtlCol="0" anchor="ctr"/>
+          <a:lstStyle/>
+          <a:p>
+            <a:pPr algn="ctr">
+              <a:defRPr>
+                <a:latin typeface="Inter"/>
+              </a:defRPr>
+            </a:pPr>
+          </a:p>
+        </p:txBody>
+      </p:sp>
+      <p:sp>
+        <p:nvSpPr>
+          <p:cNvPr id="11" name="TextBox 10"/>
+          <p:cNvSpPr txBox="1"/>
+          <p:nvPr/>
+        </p:nvSpPr>
+        <p:spPr>
+          <a:xfrm>
+            <a:off x="640080" y="6501384"/>
+            <a:ext cx="4297680" cy="146304"/>
+          </a:xfrm>
+          <a:prstGeom prst="rect">
+            <a:avLst/>
+          </a:prstGeom>
+          <a:noFill/>
+        </p:spPr>
+        <p:txBody>
+          <a:bodyPr wrap="none" lIns="9144" rIns="9144" tIns="9144" bIns="9144" anchor="t">
+            <a:spAutoFit/>
+          </a:bodyPr>
+          <a:lstStyle/>
+          <a:p>
+            <a:pPr algn="l">
+              <a:spcAft>
+                <a:spcPts val="0"/>
+              </a:spcAft>
+              <a:defRPr sz="650" b="0">
+                <a:solidFill>
+                  <a:srgbClr val="8A94A1"/>
+                </a:solidFill>
+                <a:latin typeface="Inter"/>
+              </a:defRPr>
+            </a:pPr>
+            <a:r>
+              <a:rPr>
+                <a:latin typeface="Inter"/>
+              </a:rPr>
+              <a:t>Sources: S1 · S2 · S3 · S4 · S5 · S6 · S7 · S8 · S9</a:t>
+            </a:r>
+          </a:p>
+        </p:txBody>
+      </p:sp>
+      <p:sp>
+        <p:nvSpPr>
+          <p:cNvPr id="12" name="TextBox 11"/>
+          <p:cNvSpPr txBox="1"/>
+          <p:nvPr/>
+        </p:nvSpPr>
+        <p:spPr>
+          <a:xfrm>
+            <a:off x="4480560" y="6501384"/>
+            <a:ext cx="5303520" cy="146304"/>
+          </a:xfrm>
+          <a:prstGeom prst="rect">
+            <a:avLst/>
+          </a:prstGeom>
+          <a:noFill/>
+        </p:spPr>
+        <p:txBody>
+          <a:bodyPr wrap="none" lIns="9144" rIns="9144" tIns="9144" bIns="9144" anchor="t">
+            <a:spAutoFit/>
+          </a:bodyPr>
+          <a:lstStyle/>
+          <a:p>
+            <a:pPr algn="ctr">
+              <a:spcAft>
+                <a:spcPts val="0"/>
+              </a:spcAft>
+              <a:defRPr sz="650" b="0">
+                <a:solidFill>
+                  <a:srgbClr val="8A94A1"/>
+                </a:solidFill>
+                <a:latin typeface="Inter"/>
+              </a:defRPr>
+            </a:pPr>
+            <a:r>
+              <a:rPr>
+                <a:latin typeface="Inter"/>
+              </a:rPr>
+              <a:t>Confidential — Investment Committee · Data as of 2026-06-30</a:t>
+            </a:r>
+          </a:p>
+        </p:txBody>
+      </p:sp>
+      <p:sp>
+        <p:nvSpPr>
+          <p:cNvPr id="13" name="TextBox 12"/>
+          <p:cNvSpPr txBox="1"/>
+          <p:nvPr/>
+        </p:nvSpPr>
+        <p:spPr>
+          <a:xfrm>
+            <a:off x="10287000" y="6501384"/>
+            <a:ext cx="1261872" cy="146304"/>
+          </a:xfrm>
+          <a:prstGeom prst="rect">
+            <a:avLst/>
+          </a:prstGeom>
+          <a:noFill/>
+        </p:spPr>
+        <p:txBody>
+          <a:bodyPr wrap="none" lIns="9144" rIns="9144" tIns="9144" bIns="9144" anchor="t">
+            <a:spAutoFit/>
+          </a:bodyPr>
+          <a:lstStyle/>
+          <a:p>
+            <a:pPr algn="r">
+              <a:spcAft>
+                <a:spcPts val="0"/>
+              </a:spcAft>
+              <a:defRPr sz="650" b="0">
+                <a:solidFill>
+                  <a:srgbClr val="8A94A1"/>
+                </a:solidFill>
+                <a:latin typeface="Inter"/>
+              </a:defRPr>
+            </a:pPr>
+            <a:r>
+              <a:rPr>
+                <a:latin typeface="Inter"/>
+              </a:rPr>
+              <a:t>30</a:t>
+            </a:r>
+          </a:p>
+        </p:txBody>
+      </p:sp>
+    </p:spTree>
+  </p:cSld>
+  <p:clrMapOvr>
+    <a:masterClrMapping/>
+  </p:clrMapOvr>
+</p:sld>
+</file>
+
+<file path=ppt/slides/slide31.xml><?xml version="1.0" encoding="utf-8"?>
+<p:sld xmlns:a="http://schemas.openxmlformats.org/drawingml/2006/main" xmlns:p="http://schemas.openxmlformats.org/presentationml/2006/main" xmlns:r="http://schemas.openxmlformats.org/officeDocument/2006/relationships">
+  <p:cSld>
+    <p:spTree>
+      <p:nvGrpSpPr>
+        <p:cNvPr id="1" name=""/>
+        <p:cNvGrpSpPr/>
+        <p:nvPr/>
+      </p:nvGrpSpPr>
+      <p:grpSpPr/>
+      <p:sp>
+        <p:nvSpPr>
+          <p:cNvPr id="2" name="Rectangle 1"/>
+          <p:cNvSpPr/>
+          <p:nvPr/>
+        </p:nvSpPr>
+        <p:spPr>
+          <a:xfrm>
+            <a:off x="0" y="0"/>
+            <a:ext cx="12191695" cy="6858000"/>
+          </a:xfrm>
+          <a:prstGeom prst="rect">
+            <a:avLst/>
+          </a:prstGeom>
+          <a:solidFill>
+            <a:srgbClr val="FFFFFF"/>
+          </a:solidFill>
+          <a:ln>
+            <a:solidFill>
+              <a:srgbClr val="FFFFFF"/>
+            </a:solidFill>
+          </a:ln>
+        </p:spPr>
+        <p:style>
+          <a:lnRef idx="1">
+            <a:schemeClr val="accent1"/>
+          </a:lnRef>
+          <a:fillRef idx="3">
+            <a:schemeClr val="accent1"/>
+          </a:fillRef>
+          <a:effectRef idx="2">
+            <a:schemeClr val="accent1"/>
+          </a:effectRef>
+          <a:fontRef idx="minor">
+            <a:schemeClr val="lt1"/>
+          </a:fontRef>
+        </p:style>
+        <p:txBody>
+          <a:bodyPr rtlCol="0" anchor="ctr"/>
+          <a:lstStyle/>
+          <a:p>
+            <a:pPr algn="ctr">
+              <a:defRPr>
+                <a:latin typeface="Inter"/>
+              </a:defRPr>
+            </a:pPr>
+          </a:p>
+        </p:txBody>
+      </p:sp>
+      <p:sp>
+        <p:nvSpPr>
+          <p:cNvPr id="3" name="TextBox 2"/>
+          <p:cNvSpPr txBox="1"/>
+          <p:nvPr/>
+        </p:nvSpPr>
+        <p:spPr>
+          <a:xfrm>
+            <a:off x="640080" y="566928"/>
+            <a:ext cx="10058400" cy="530352"/>
+          </a:xfrm>
+          <a:prstGeom prst="rect">
+            <a:avLst/>
+          </a:prstGeom>
+          <a:noFill/>
+        </p:spPr>
+        <p:txBody>
+          <a:bodyPr wrap="none" lIns="9144" rIns="9144" tIns="9144" bIns="9144" anchor="t">
+            <a:spAutoFit/>
+          </a:bodyPr>
+          <a:lstStyle/>
+          <a:p>
+            <a:pPr algn="l">
+              <a:spcAft>
+                <a:spcPts val="0"/>
+              </a:spcAft>
+              <a:defRPr sz="2300" b="1">
+                <a:solidFill>
+                  <a:srgbClr val="0D1117"/>
+                </a:solidFill>
+                <a:latin typeface="Inter"/>
+              </a:defRPr>
+            </a:pPr>
+            <a:r>
+              <a:rPr>
+                <a:latin typeface="Inter"/>
+              </a:rPr>
+              <a:t>Appendix — Server Metric Methods and Disclosures</a:t>
+            </a:r>
+          </a:p>
+        </p:txBody>
+      </p:sp>
+      <p:sp>
+        <p:nvSpPr>
+          <p:cNvPr id="4" name="Rectangle 3"/>
+          <p:cNvSpPr/>
+          <p:nvPr/>
+        </p:nvSpPr>
+        <p:spPr>
+          <a:xfrm>
+            <a:off x="640080" y="1115568"/>
+            <a:ext cx="10908792" cy="18288"/>
+          </a:xfrm>
+          <a:prstGeom prst="rect">
+            <a:avLst/>
+          </a:prstGeom>
+          <a:solidFill>
+            <a:srgbClr val="0D1117"/>
+          </a:solidFill>
+          <a:ln>
+            <a:solidFill>
+              <a:srgbClr val="0D1117"/>
+            </a:solidFill>
+          </a:ln>
+        </p:spPr>
+        <p:style>
+          <a:lnRef idx="1">
+            <a:schemeClr val="accent1"/>
+          </a:lnRef>
+          <a:fillRef idx="3">
+            <a:schemeClr val="accent1"/>
+          </a:fillRef>
+          <a:effectRef idx="2">
+            <a:schemeClr val="accent1"/>
+          </a:effectRef>
+          <a:fontRef idx="minor">
+            <a:schemeClr val="lt1"/>
+          </a:fontRef>
+        </p:style>
+        <p:txBody>
+          <a:bodyPr rtlCol="0" anchor="ctr"/>
+          <a:lstStyle/>
+          <a:p>
+            <a:pPr algn="ctr">
+              <a:defRPr>
+                <a:latin typeface="Inter"/>
+              </a:defRPr>
+            </a:pPr>
+          </a:p>
+        </p:txBody>
+      </p:sp>
+      <p:sp>
+        <p:nvSpPr>
+          <p:cNvPr id="5" name="Rectangle 4"/>
+          <p:cNvSpPr/>
+          <p:nvPr/>
+        </p:nvSpPr>
+        <p:spPr>
+          <a:xfrm>
+            <a:off x="11018520" y="502920"/>
+            <a:ext cx="530352" cy="393192"/>
+          </a:xfrm>
+          <a:prstGeom prst="rect">
+            <a:avLst/>
+          </a:prstGeom>
+          <a:solidFill>
+            <a:srgbClr val="9AA5B1"/>
+          </a:solidFill>
+          <a:ln>
+            <a:solidFill>
+              <a:srgbClr val="9AA5B1"/>
+            </a:solidFill>
+          </a:ln>
+        </p:spPr>
+        <p:style>
+          <a:lnRef idx="1">
+            <a:schemeClr val="accent1"/>
+          </a:lnRef>
+          <a:fillRef idx="3">
+            <a:schemeClr val="accent1"/>
+          </a:fillRef>
+          <a:effectRef idx="2">
+            <a:schemeClr val="accent1"/>
+          </a:effectRef>
+          <a:fontRef idx="minor">
+            <a:schemeClr val="lt1"/>
+          </a:fontRef>
+        </p:style>
+        <p:txBody>
+          <a:bodyPr rtlCol="0" anchor="ctr"/>
+          <a:lstStyle/>
+          <a:p>
+            <a:pPr algn="ctr">
+              <a:defRPr>
+                <a:latin typeface="Inter"/>
+              </a:defRPr>
+            </a:pPr>
+          </a:p>
+        </p:txBody>
+      </p:sp>
+      <p:sp>
+        <p:nvSpPr>
+          <p:cNvPr id="6" name="TextBox 5"/>
+          <p:cNvSpPr txBox="1"/>
+          <p:nvPr/>
+        </p:nvSpPr>
+        <p:spPr>
+          <a:xfrm>
+            <a:off x="11045952" y="557784"/>
+            <a:ext cx="475488" cy="182880"/>
+          </a:xfrm>
+          <a:prstGeom prst="rect">
+            <a:avLst/>
+          </a:prstGeom>
+          <a:noFill/>
+        </p:spPr>
+        <p:txBody>
+          <a:bodyPr wrap="none" lIns="9144" rIns="9144" tIns="9144" bIns="9144" anchor="t">
+            <a:spAutoFit/>
+          </a:bodyPr>
+          <a:lstStyle/>
+          <a:p>
+            <a:pPr algn="ctr">
+              <a:spcAft>
+                <a:spcPts val="0"/>
+              </a:spcAft>
+              <a:defRPr sz="1000" b="1">
+                <a:solidFill>
+                  <a:srgbClr val="0D1117"/>
+                </a:solidFill>
+                <a:latin typeface="Inter"/>
+              </a:defRPr>
+            </a:pPr>
+            <a:r>
+              <a:rPr>
+                <a:latin typeface="Inter"/>
+              </a:rPr>
+              <a:t>B</a:t>
+            </a:r>
+          </a:p>
+        </p:txBody>
+      </p:sp>
+      <p:sp>
+        <p:nvSpPr>
+          <p:cNvPr id="7" name="TextBox 6"/>
+          <p:cNvSpPr txBox="1"/>
+          <p:nvPr/>
+        </p:nvSpPr>
+        <p:spPr>
+          <a:xfrm>
+            <a:off x="640080" y="1325880"/>
+            <a:ext cx="10908792" cy="201168"/>
+          </a:xfrm>
+          <a:prstGeom prst="rect">
+            <a:avLst/>
+          </a:prstGeom>
+          <a:noFill/>
+        </p:spPr>
+        <p:txBody>
+          <a:bodyPr wrap="none" lIns="9144" rIns="9144" tIns="9144" bIns="9144" anchor="t">
+            <a:spAutoFit/>
+          </a:bodyPr>
+          <a:lstStyle/>
+          <a:p>
+            <a:pPr algn="l">
+              <a:spcAft>
+                <a:spcPts val="0"/>
+              </a:spcAft>
+              <a:defRPr sz="720" b="1">
+                <a:solidFill>
+                  <a:srgbClr val="4A5563"/>
+                </a:solidFill>
+                <a:latin typeface="Inter"/>
+              </a:defRPr>
+            </a:pPr>
+            <a:r>
+              <a:rPr>
+                <a:latin typeface="Inter"/>
+              </a:rPr>
+              <a:t>SERVER METRIC METHODS</a:t>
+            </a:r>
+          </a:p>
+        </p:txBody>
+      </p:sp>
+      <p:graphicFrame>
+        <p:nvGraphicFramePr>
+          <p:cNvPr id="8" name="Table 7"/>
+          <p:cNvGraphicFramePr>
+            <a:graphicFrameLocks noGrp="1"/>
+          </p:cNvGraphicFramePr>
+          <p:nvPr/>
+        </p:nvGraphicFramePr>
+        <p:xfrm>
+          <a:off x="640080" y="1600200"/>
+          <a:ext cx="10908792" cy="2116836"/>
         </p:xfrm>
         <a:graphic>
           <a:graphicData uri="http://schemas.openxmlformats.org/drawingml/2006/table">
@@ -32144,7 +31334,7 @@
                 <a:gridCol w="2224278"/>
                 <a:gridCol w="2224278"/>
               </a:tblGrid>
-              <a:tr h="495610">
+              <a:tr h="705612">
                 <a:tc>
                   <a:txBody>
                     <a:bodyPr/>
@@ -32281,7 +31471,7 @@
                   </a:tcPr>
                 </a:tc>
               </a:tr>
-              <a:tr h="495610">
+              <a:tr h="705612">
                 <a:tc>
                   <a:txBody>
                     <a:bodyPr/>
@@ -32418,7 +31608,7 @@
                   </a:tcPr>
                 </a:tc>
               </a:tr>
-              <a:tr h="495610">
+              <a:tr h="705612">
                 <a:tc>
                   <a:txBody>
                     <a:bodyPr/>
@@ -32561,14 +31751,14 @@
       </p:graphicFrame>
       <p:sp>
         <p:nvSpPr>
-          <p:cNvPr id="10" name="TextBox 9"/>
+          <p:cNvPr id="9" name="TextBox 8"/>
           <p:cNvSpPr txBox="1"/>
           <p:nvPr/>
         </p:nvSpPr>
         <p:spPr>
           <a:xfrm>
-            <a:off x="640080" y="3196758"/>
-            <a:ext cx="10908792" cy="3021161"/>
+            <a:off x="640080" y="3826763"/>
+            <a:ext cx="10908792" cy="2391156"/>
           </a:xfrm>
           <a:prstGeom prst="rect">
             <a:avLst/>
@@ -32596,7 +31786,7 @@
               <a:rPr>
                 <a:latin typeface="Inter"/>
               </a:rPr>
-              <a:t>•  Forward values are assumptions, not forecasts or guarantees [S6].</a:t>
+              <a:t>•  Forward values are assumptions, not forecasts [S6]; Form 13F limits are set out in the caveat above [S7].</a:t>
             </a:r>
           </a:p>
           <a:p>
@@ -32615,52 +31805,14 @@
               <a:rPr>
                 <a:latin typeface="Inter"/>
               </a:rPr>
-              <a:t>•  Form 13F evidence has the stated lag, coverage and FX limitations [S7].</a:t>
+              <a:t>•  Strategy Lab results are calculated separately. AI-assisted; not investment, legal or compliance advice.</a:t>
             </a:r>
           </a:p>
-          <a:p>
-            <a:pPr algn="l">
-              <a:spcAft>
-                <a:spcPts val="500"/>
-              </a:spcAft>
-              <a:defRPr sz="1050" b="0">
-                <a:solidFill>
-                  <a:srgbClr val="0D1117"/>
-                </a:solidFill>
-                <a:latin typeface="Inter"/>
-              </a:defRPr>
-            </a:pPr>
-            <a:r>
-              <a:rPr>
-                <a:latin typeface="Inter"/>
-              </a:rPr>
-              <a:t>•  Portfolio Analytics and Strategy Lab are separate analytical scopes.</a:t>
-            </a:r>
-          </a:p>
-          <a:p>
-            <a:pPr algn="l">
-              <a:spcAft>
-                <a:spcPts val="500"/>
-              </a:spcAft>
-              <a:defRPr sz="1050" b="0">
-                <a:solidFill>
-                  <a:srgbClr val="0D1117"/>
-                </a:solidFill>
-                <a:latin typeface="Inter"/>
-              </a:defRPr>
-            </a:pPr>
-            <a:r>
-              <a:rPr>
-                <a:latin typeface="Inter"/>
-              </a:rPr>
-              <a:t>•  This AI-assisted construction analysis is not investment, legal or compliance advice.</a:t>
-            </a:r>
-          </a:p>
-        </p:txBody>
-      </p:sp>
-      <p:sp>
-        <p:nvSpPr>
-          <p:cNvPr id="11" name="Rectangle 10"/>
+        </p:txBody>
+      </p:sp>
+      <p:sp>
+        <p:nvSpPr>
+          <p:cNvPr id="10" name="Rectangle 9"/>
           <p:cNvSpPr/>
           <p:nvPr/>
         </p:nvSpPr>
@@ -32709,7 +31861,7 @@
       </p:sp>
       <p:sp>
         <p:nvSpPr>
-          <p:cNvPr id="12" name="TextBox 11"/>
+          <p:cNvPr id="11" name="TextBox 10"/>
           <p:cNvSpPr txBox="1"/>
           <p:nvPr/>
         </p:nvSpPr>
@@ -32751,7 +31903,7 @@
       </p:sp>
       <p:sp>
         <p:nvSpPr>
-          <p:cNvPr id="13" name="TextBox 12"/>
+          <p:cNvPr id="12" name="TextBox 11"/>
           <p:cNvSpPr txBox="1"/>
           <p:nvPr/>
         </p:nvSpPr>
@@ -32793,7 +31945,7 @@
       </p:sp>
       <p:sp>
         <p:nvSpPr>
-          <p:cNvPr id="14" name="TextBox 13"/>
+          <p:cNvPr id="13" name="TextBox 12"/>
           <p:cNvSpPr txBox="1"/>
           <p:nvPr/>
         </p:nvSpPr>
@@ -32828,7 +31980,7 @@
               <a:rPr>
                 <a:latin typeface="Inter"/>
               </a:rPr>
-              <a:t>30</a:t>
+              <a:t>31</a:t>
             </a:r>
           </a:p>
         </p:txBody>
@@ -32908,48 +32060,6 @@
         </p:nvSpPr>
         <p:spPr>
           <a:xfrm>
-            <a:off x="5897880" y="310896"/>
-            <a:ext cx="4800600" cy="256032"/>
-          </a:xfrm>
-          <a:prstGeom prst="rect">
-            <a:avLst/>
-          </a:prstGeom>
-          <a:noFill/>
-        </p:spPr>
-        <p:txBody>
-          <a:bodyPr wrap="none" lIns="9144" rIns="9144" tIns="9144" bIns="9144" anchor="t">
-            <a:spAutoFit/>
-          </a:bodyPr>
-          <a:lstStyle/>
-          <a:p>
-            <a:pPr algn="r">
-              <a:spcAft>
-                <a:spcPts val="0"/>
-              </a:spcAft>
-              <a:defRPr sz="680" b="1">
-                <a:solidFill>
-                  <a:srgbClr val="4F6B00"/>
-                </a:solidFill>
-                <a:latin typeface="Inter"/>
-              </a:defRPr>
-            </a:pPr>
-            <a:r>
-              <a:rPr>
-                <a:latin typeface="Inter"/>
-              </a:rPr>
-              <a:t>Illustrative, Gradient Maintained — demo data, not the client's holdings or managers</a:t>
-            </a:r>
-          </a:p>
-        </p:txBody>
-      </p:sp>
-      <p:sp>
-        <p:nvSpPr>
-          <p:cNvPr id="4" name="TextBox 3"/>
-          <p:cNvSpPr txBox="1"/>
-          <p:nvPr/>
-        </p:nvSpPr>
-        <p:spPr>
-          <a:xfrm>
             <a:off x="640080" y="566928"/>
             <a:ext cx="10058400" cy="530352"/>
           </a:xfrm>
@@ -32986,7 +32096,7 @@
       </p:sp>
       <p:sp>
         <p:nvSpPr>
-          <p:cNvPr id="5" name="Rectangle 4"/>
+          <p:cNvPr id="4" name="Rectangle 3"/>
           <p:cNvSpPr/>
           <p:nvPr/>
         </p:nvSpPr>
@@ -33035,7 +32145,7 @@
       </p:sp>
       <p:sp>
         <p:nvSpPr>
-          <p:cNvPr id="6" name="Rectangle 5"/>
+          <p:cNvPr id="5" name="Rectangle 4"/>
           <p:cNvSpPr/>
           <p:nvPr/>
         </p:nvSpPr>
@@ -33084,7 +32194,7 @@
       </p:sp>
       <p:sp>
         <p:nvSpPr>
-          <p:cNvPr id="7" name="TextBox 6"/>
+          <p:cNvPr id="6" name="TextBox 5"/>
           <p:cNvSpPr txBox="1"/>
           <p:nvPr/>
         </p:nvSpPr>
@@ -33126,14 +32236,14 @@
       </p:sp>
       <p:sp>
         <p:nvSpPr>
-          <p:cNvPr id="8" name="Rectangle 7"/>
+          <p:cNvPr id="7" name="Rectangle 6"/>
           <p:cNvSpPr/>
           <p:nvPr/>
         </p:nvSpPr>
         <p:spPr>
           <a:xfrm>
             <a:off x="640080" y="1325880"/>
-            <a:ext cx="10908792" cy="2335058"/>
+            <a:ext cx="10908792" cy="2441496"/>
           </a:xfrm>
           <a:prstGeom prst="rect">
             <a:avLst/>
@@ -33175,14 +32285,14 @@
       </p:sp>
       <p:sp>
         <p:nvSpPr>
-          <p:cNvPr id="9" name="Rectangle 8"/>
+          <p:cNvPr id="8" name="Rectangle 7"/>
           <p:cNvSpPr/>
           <p:nvPr/>
         </p:nvSpPr>
         <p:spPr>
           <a:xfrm>
             <a:off x="640080" y="1325880"/>
-            <a:ext cx="54864" cy="2335058"/>
+            <a:ext cx="54864" cy="2441496"/>
           </a:xfrm>
           <a:prstGeom prst="rect">
             <a:avLst/>
@@ -33224,7 +32334,7 @@
       </p:sp>
       <p:sp>
         <p:nvSpPr>
-          <p:cNvPr id="10" name="TextBox 9"/>
+          <p:cNvPr id="9" name="TextBox 8"/>
           <p:cNvSpPr txBox="1"/>
           <p:nvPr/>
         </p:nvSpPr>
@@ -33259,21 +32369,21 @@
               <a:rPr>
                 <a:latin typeface="Inter"/>
               </a:rPr>
-              <a:t>Key judgment — primary measure</a:t>
+              <a:t>Key judgment — Sleeve size</a:t>
             </a:r>
           </a:p>
         </p:txBody>
       </p:sp>
       <p:sp>
         <p:nvSpPr>
-          <p:cNvPr id="11" name="TextBox 10"/>
+          <p:cNvPr id="10" name="TextBox 9"/>
           <p:cNvSpPr txBox="1"/>
           <p:nvPr/>
         </p:nvSpPr>
         <p:spPr>
           <a:xfrm>
             <a:off x="804671" y="1719072"/>
-            <a:ext cx="10616184" cy="1850426"/>
+            <a:ext cx="10616184" cy="1956864"/>
           </a:xfrm>
           <a:prstGeom prst="rect">
             <a:avLst/>
@@ -33301,21 +32411,21 @@
               <a:rPr>
                 <a:latin typeface="Inter"/>
               </a:rPr>
-              <a:t>Observation: Public-equity weight is 42.0% in the review evidence [S2]. Why it matters: This measure establishes the baseline for comparing later governed results. Uncertainty: The source basis may omit newer observations outside the reviewed evidence. What would change the view: A refreshed source report showing a change above 1%.</a:t>
+              <a:t>Observation: Public equity is 42.0% of total NAV [S2]. Why it matters: The 4.0pp shift stays inside the sleeve and leaves the total weight unchanged. Uncertainty: The weight moves with equity markets before funding. What would change the view: A drift of more than 2pp before implementation.</a:t>
             </a:r>
           </a:p>
         </p:txBody>
       </p:sp>
       <p:sp>
         <p:nvSpPr>
-          <p:cNvPr id="12" name="Rectangle 11"/>
+          <p:cNvPr id="11" name="Rectangle 10"/>
           <p:cNvSpPr/>
           <p:nvPr/>
         </p:nvSpPr>
         <p:spPr>
           <a:xfrm>
-            <a:off x="640080" y="3770666"/>
-            <a:ext cx="10908792" cy="2447253"/>
+            <a:off x="640080" y="3877104"/>
+            <a:ext cx="10908792" cy="2340815"/>
           </a:xfrm>
           <a:prstGeom prst="rect">
             <a:avLst/>
@@ -33357,14 +32467,14 @@
       </p:sp>
       <p:sp>
         <p:nvSpPr>
-          <p:cNvPr id="13" name="Rectangle 12"/>
+          <p:cNvPr id="12" name="Rectangle 11"/>
           <p:cNvSpPr/>
           <p:nvPr/>
         </p:nvSpPr>
         <p:spPr>
           <a:xfrm>
-            <a:off x="640080" y="3770666"/>
-            <a:ext cx="54864" cy="2447253"/>
+            <a:off x="640080" y="3877104"/>
+            <a:ext cx="54864" cy="2340815"/>
           </a:xfrm>
           <a:prstGeom prst="rect">
             <a:avLst/>
@@ -33406,13 +32516,13 @@
       </p:sp>
       <p:sp>
         <p:nvSpPr>
-          <p:cNvPr id="14" name="TextBox 13"/>
+          <p:cNvPr id="13" name="TextBox 12"/>
           <p:cNvSpPr txBox="1"/>
           <p:nvPr/>
         </p:nvSpPr>
         <p:spPr>
           <a:xfrm>
-            <a:off x="804671" y="3880394"/>
+            <a:off x="804671" y="3986832"/>
             <a:ext cx="10616184" cy="228600"/>
           </a:xfrm>
           <a:prstGeom prst="rect">
@@ -33441,21 +32551,21 @@
               <a:rPr>
                 <a:latin typeface="Inter"/>
               </a:rPr>
-              <a:t>Key judgment — monitoring priority</a:t>
+              <a:t>Key judgment — Largest issuer</a:t>
             </a:r>
           </a:p>
         </p:txBody>
       </p:sp>
       <p:sp>
         <p:nvSpPr>
-          <p:cNvPr id="15" name="TextBox 14"/>
+          <p:cNvPr id="14" name="TextBox 13"/>
           <p:cNvSpPr txBox="1"/>
           <p:nvPr/>
         </p:nvSpPr>
         <p:spPr>
           <a:xfrm>
-            <a:off x="804671" y="4163858"/>
-            <a:ext cx="10616184" cy="1962621"/>
+            <a:off x="804671" y="4270296"/>
+            <a:ext cx="10616184" cy="1856183"/>
           </a:xfrm>
           <a:prstGeom prst="rect">
             <a:avLst/>
@@ -33483,14 +32593,14 @@
               <a:rPr>
                 <a:latin typeface="Inter"/>
               </a:rPr>
-              <a:t>Observation: Largest concentration is 2.3% NAV in the review evidence [S3]. Why it matters: This result determines which item receives priority in the next monitoring cycle. Uncertainty: Supporting coverage may omit later filings or corroborating detail. What would change the view: A new filing or report that resolves the item or changes it by 1%.</a:t>
+              <a:t>Observation: The largest single-issuer exposure is 2.3% of NAV [S3]. Why it matters: It is the position closest to the concentration limit. Uncertainty: Look-through holdings are as of the last 13F filing. What would change the view: A newer filing that changes the top position.</a:t>
             </a:r>
           </a:p>
         </p:txBody>
       </p:sp>
       <p:sp>
         <p:nvSpPr>
-          <p:cNvPr id="16" name="Rectangle 15"/>
+          <p:cNvPr id="15" name="Rectangle 14"/>
           <p:cNvSpPr/>
           <p:nvPr/>
         </p:nvSpPr>
@@ -33539,7 +32649,7 @@
       </p:sp>
       <p:sp>
         <p:nvSpPr>
-          <p:cNvPr id="17" name="TextBox 16"/>
+          <p:cNvPr id="16" name="TextBox 15"/>
           <p:cNvSpPr txBox="1"/>
           <p:nvPr/>
         </p:nvSpPr>
@@ -33581,7 +32691,7 @@
       </p:sp>
       <p:sp>
         <p:nvSpPr>
-          <p:cNvPr id="18" name="TextBox 17"/>
+          <p:cNvPr id="17" name="TextBox 16"/>
           <p:cNvSpPr txBox="1"/>
           <p:nvPr/>
         </p:nvSpPr>
@@ -33623,7 +32733,7 @@
       </p:sp>
       <p:sp>
         <p:nvSpPr>
-          <p:cNvPr id="19" name="TextBox 18"/>
+          <p:cNvPr id="18" name="TextBox 17"/>
           <p:cNvSpPr txBox="1"/>
           <p:nvPr/>
         </p:nvSpPr>
@@ -33738,48 +32848,6 @@
         </p:nvSpPr>
         <p:spPr>
           <a:xfrm>
-            <a:off x="5897880" y="310896"/>
-            <a:ext cx="4800600" cy="256032"/>
-          </a:xfrm>
-          <a:prstGeom prst="rect">
-            <a:avLst/>
-          </a:prstGeom>
-          <a:noFill/>
-        </p:spPr>
-        <p:txBody>
-          <a:bodyPr wrap="none" lIns="9144" rIns="9144" tIns="9144" bIns="9144" anchor="t">
-            <a:spAutoFit/>
-          </a:bodyPr>
-          <a:lstStyle/>
-          <a:p>
-            <a:pPr algn="r">
-              <a:spcAft>
-                <a:spcPts val="0"/>
-              </a:spcAft>
-              <a:defRPr sz="680" b="1">
-                <a:solidFill>
-                  <a:srgbClr val="4F6B00"/>
-                </a:solidFill>
-                <a:latin typeface="Inter"/>
-              </a:defRPr>
-            </a:pPr>
-            <a:r>
-              <a:rPr>
-                <a:latin typeface="Inter"/>
-              </a:rPr>
-              <a:t>Illustrative, Gradient Maintained — demo data, not the client's holdings or managers</a:t>
-            </a:r>
-          </a:p>
-        </p:txBody>
-      </p:sp>
-      <p:sp>
-        <p:nvSpPr>
-          <p:cNvPr id="4" name="TextBox 3"/>
-          <p:cNvSpPr txBox="1"/>
-          <p:nvPr/>
-        </p:nvSpPr>
-        <p:spPr>
-          <a:xfrm>
             <a:off x="640080" y="566928"/>
             <a:ext cx="10058400" cy="530352"/>
           </a:xfrm>
@@ -33816,7 +32884,7 @@
       </p:sp>
       <p:sp>
         <p:nvSpPr>
-          <p:cNvPr id="5" name="Rectangle 4"/>
+          <p:cNvPr id="4" name="Rectangle 3"/>
           <p:cNvSpPr/>
           <p:nvPr/>
         </p:nvSpPr>
@@ -33865,7 +32933,7 @@
       </p:sp>
       <p:sp>
         <p:nvSpPr>
-          <p:cNvPr id="6" name="Rectangle 5"/>
+          <p:cNvPr id="5" name="Rectangle 4"/>
           <p:cNvSpPr/>
           <p:nvPr/>
         </p:nvSpPr>
@@ -33914,7 +32982,7 @@
       </p:sp>
       <p:sp>
         <p:nvSpPr>
-          <p:cNvPr id="7" name="TextBox 6"/>
+          <p:cNvPr id="6" name="TextBox 5"/>
           <p:cNvSpPr txBox="1"/>
           <p:nvPr/>
         </p:nvSpPr>
@@ -33956,7 +33024,7 @@
       </p:sp>
       <p:graphicFrame>
         <p:nvGraphicFramePr>
-          <p:cNvPr id="8" name="Table 7"/>
+          <p:cNvPr id="7" name="Table 6"/>
           <p:cNvGraphicFramePr>
             <a:graphicFrameLocks noGrp="1"/>
           </p:cNvGraphicFramePr>
@@ -34318,7 +33386,7 @@
       </p:graphicFrame>
       <p:sp>
         <p:nvSpPr>
-          <p:cNvPr id="9" name="TextBox 8"/>
+          <p:cNvPr id="8" name="TextBox 7"/>
           <p:cNvSpPr txBox="1"/>
           <p:nvPr/>
         </p:nvSpPr>
@@ -34360,7 +33428,7 @@
       </p:sp>
       <p:graphicFrame>
         <p:nvGraphicFramePr>
-          <p:cNvPr id="10" name="Table 9"/>
+          <p:cNvPr id="9" name="Table 8"/>
           <p:cNvGraphicFramePr>
             <a:graphicFrameLocks noGrp="1"/>
           </p:cNvGraphicFramePr>
@@ -34756,7 +33824,7 @@
                         <a:rPr>
                           <a:latin typeface="Inter"/>
                         </a:rPr>
-                        <a:t>● Watch</a:t>
+                        <a:t>● Near limit</a:t>
                       </a:r>
                     </a:p>
                   </a:txBody>
@@ -34893,7 +33961,7 @@
                         <a:rPr>
                           <a:latin typeface="Inter"/>
                         </a:rPr>
-                        <a:t>● Watch</a:t>
+                        <a:t>● Near limit</a:t>
                       </a:r>
                     </a:p>
                   </a:txBody>
@@ -34937,7 +34005,7 @@
       </p:graphicFrame>
       <p:sp>
         <p:nvSpPr>
-          <p:cNvPr id="11" name="Rectangle 10"/>
+          <p:cNvPr id="10" name="Rectangle 9"/>
           <p:cNvSpPr/>
           <p:nvPr/>
         </p:nvSpPr>
@@ -34986,7 +34054,7 @@
       </p:sp>
       <p:sp>
         <p:nvSpPr>
-          <p:cNvPr id="12" name="TextBox 11"/>
+          <p:cNvPr id="11" name="TextBox 10"/>
           <p:cNvSpPr txBox="1"/>
           <p:nvPr/>
         </p:nvSpPr>
@@ -35028,7 +34096,7 @@
       </p:sp>
       <p:sp>
         <p:nvSpPr>
-          <p:cNvPr id="13" name="TextBox 12"/>
+          <p:cNvPr id="12" name="TextBox 11"/>
           <p:cNvSpPr txBox="1"/>
           <p:nvPr/>
         </p:nvSpPr>
@@ -35070,7 +34138,7 @@
       </p:sp>
       <p:sp>
         <p:nvSpPr>
-          <p:cNvPr id="14" name="TextBox 13"/>
+          <p:cNvPr id="13" name="TextBox 12"/>
           <p:cNvSpPr txBox="1"/>
           <p:nvPr/>
         </p:nvSpPr>
@@ -35185,48 +34253,6 @@
         </p:nvSpPr>
         <p:spPr>
           <a:xfrm>
-            <a:off x="5897880" y="310896"/>
-            <a:ext cx="4800600" cy="256032"/>
-          </a:xfrm>
-          <a:prstGeom prst="rect">
-            <a:avLst/>
-          </a:prstGeom>
-          <a:noFill/>
-        </p:spPr>
-        <p:txBody>
-          <a:bodyPr wrap="none" lIns="9144" rIns="9144" tIns="9144" bIns="9144" anchor="t">
-            <a:spAutoFit/>
-          </a:bodyPr>
-          <a:lstStyle/>
-          <a:p>
-            <a:pPr algn="r">
-              <a:spcAft>
-                <a:spcPts val="0"/>
-              </a:spcAft>
-              <a:defRPr sz="680" b="1">
-                <a:solidFill>
-                  <a:srgbClr val="4F6B00"/>
-                </a:solidFill>
-                <a:latin typeface="Inter"/>
-              </a:defRPr>
-            </a:pPr>
-            <a:r>
-              <a:rPr>
-                <a:latin typeface="Inter"/>
-              </a:rPr>
-              <a:t>Illustrative, Gradient Maintained — demo data, not the client's holdings or managers</a:t>
-            </a:r>
-          </a:p>
-        </p:txBody>
-      </p:sp>
-      <p:sp>
-        <p:nvSpPr>
-          <p:cNvPr id="4" name="TextBox 3"/>
-          <p:cNvSpPr txBox="1"/>
-          <p:nvPr/>
-        </p:nvSpPr>
-        <p:spPr>
-          <a:xfrm>
             <a:off x="640080" y="566928"/>
             <a:ext cx="10058400" cy="530352"/>
           </a:xfrm>
@@ -35263,7 +34289,7 @@
       </p:sp>
       <p:sp>
         <p:nvSpPr>
-          <p:cNvPr id="5" name="Rectangle 4"/>
+          <p:cNvPr id="4" name="Rectangle 3"/>
           <p:cNvSpPr/>
           <p:nvPr/>
         </p:nvSpPr>
@@ -35312,7 +34338,7 @@
       </p:sp>
       <p:sp>
         <p:nvSpPr>
-          <p:cNvPr id="6" name="Rectangle 5"/>
+          <p:cNvPr id="5" name="Rectangle 4"/>
           <p:cNvSpPr/>
           <p:nvPr/>
         </p:nvSpPr>
@@ -35361,7 +34387,7 @@
       </p:sp>
       <p:sp>
         <p:nvSpPr>
-          <p:cNvPr id="7" name="TextBox 6"/>
+          <p:cNvPr id="6" name="TextBox 5"/>
           <p:cNvSpPr txBox="1"/>
           <p:nvPr/>
         </p:nvSpPr>
@@ -35403,7 +34429,7 @@
       </p:sp>
       <p:sp>
         <p:nvSpPr>
-          <p:cNvPr id="8" name="TextBox 7"/>
+          <p:cNvPr id="7" name="TextBox 6"/>
           <p:cNvSpPr txBox="1"/>
           <p:nvPr/>
         </p:nvSpPr>
@@ -35445,7 +34471,7 @@
       </p:sp>
       <p:graphicFrame>
         <p:nvGraphicFramePr>
-          <p:cNvPr id="9" name="Chart 8"/>
+          <p:cNvPr id="8" name="Chart 7"/>
           <p:cNvGraphicFramePr>
             <a:graphicFrameLocks noGrp="1"/>
           </p:cNvGraphicFramePr>
@@ -35463,7 +34489,7 @@
       </p:graphicFrame>
       <p:sp>
         <p:nvSpPr>
-          <p:cNvPr id="10" name="Rectangle 9"/>
+          <p:cNvPr id="9" name="Rectangle 8"/>
           <p:cNvSpPr/>
           <p:nvPr/>
         </p:nvSpPr>
@@ -35512,7 +34538,7 @@
       </p:sp>
       <p:sp>
         <p:nvSpPr>
-          <p:cNvPr id="11" name="TextBox 10"/>
+          <p:cNvPr id="10" name="TextBox 9"/>
           <p:cNvSpPr txBox="1"/>
           <p:nvPr/>
         </p:nvSpPr>
@@ -35554,7 +34580,7 @@
       </p:sp>
       <p:sp>
         <p:nvSpPr>
-          <p:cNvPr id="12" name="TextBox 11"/>
+          <p:cNvPr id="11" name="TextBox 10"/>
           <p:cNvSpPr txBox="1"/>
           <p:nvPr/>
         </p:nvSpPr>
@@ -35596,7 +34622,7 @@
       </p:sp>
       <p:sp>
         <p:nvSpPr>
-          <p:cNvPr id="13" name="TextBox 12"/>
+          <p:cNvPr id="12" name="TextBox 11"/>
           <p:cNvSpPr txBox="1"/>
           <p:nvPr/>
         </p:nvSpPr>
@@ -35711,48 +34737,6 @@
         </p:nvSpPr>
         <p:spPr>
           <a:xfrm>
-            <a:off x="5897880" y="310896"/>
-            <a:ext cx="4800600" cy="256032"/>
-          </a:xfrm>
-          <a:prstGeom prst="rect">
-            <a:avLst/>
-          </a:prstGeom>
-          <a:noFill/>
-        </p:spPr>
-        <p:txBody>
-          <a:bodyPr wrap="none" lIns="9144" rIns="9144" tIns="9144" bIns="9144" anchor="t">
-            <a:spAutoFit/>
-          </a:bodyPr>
-          <a:lstStyle/>
-          <a:p>
-            <a:pPr algn="r">
-              <a:spcAft>
-                <a:spcPts val="0"/>
-              </a:spcAft>
-              <a:defRPr sz="680" b="1">
-                <a:solidFill>
-                  <a:srgbClr val="4F6B00"/>
-                </a:solidFill>
-                <a:latin typeface="Inter"/>
-              </a:defRPr>
-            </a:pPr>
-            <a:r>
-              <a:rPr>
-                <a:latin typeface="Inter"/>
-              </a:rPr>
-              <a:t>Illustrative, Gradient Maintained — demo data, not the client's holdings or managers</a:t>
-            </a:r>
-          </a:p>
-        </p:txBody>
-      </p:sp>
-      <p:sp>
-        <p:nvSpPr>
-          <p:cNvPr id="4" name="TextBox 3"/>
-          <p:cNvSpPr txBox="1"/>
-          <p:nvPr/>
-        </p:nvSpPr>
-        <p:spPr>
-          <a:xfrm>
             <a:off x="640080" y="566928"/>
             <a:ext cx="10058400" cy="530352"/>
           </a:xfrm>
@@ -35789,7 +34773,7 @@
       </p:sp>
       <p:sp>
         <p:nvSpPr>
-          <p:cNvPr id="5" name="Rectangle 4"/>
+          <p:cNvPr id="4" name="Rectangle 3"/>
           <p:cNvSpPr/>
           <p:nvPr/>
         </p:nvSpPr>
@@ -35838,7 +34822,7 @@
       </p:sp>
       <p:sp>
         <p:nvSpPr>
-          <p:cNvPr id="6" name="Rectangle 5"/>
+          <p:cNvPr id="5" name="Rectangle 4"/>
           <p:cNvSpPr/>
           <p:nvPr/>
         </p:nvSpPr>
@@ -35887,7 +34871,7 @@
       </p:sp>
       <p:sp>
         <p:nvSpPr>
-          <p:cNvPr id="7" name="TextBox 6"/>
+          <p:cNvPr id="6" name="TextBox 5"/>
           <p:cNvSpPr txBox="1"/>
           <p:nvPr/>
         </p:nvSpPr>
@@ -35929,7 +34913,7 @@
       </p:sp>
       <p:sp>
         <p:nvSpPr>
-          <p:cNvPr id="8" name="TextBox 7"/>
+          <p:cNvPr id="7" name="TextBox 6"/>
           <p:cNvSpPr txBox="1"/>
           <p:nvPr/>
         </p:nvSpPr>
@@ -35971,7 +34955,7 @@
       </p:sp>
       <p:graphicFrame>
         <p:nvGraphicFramePr>
-          <p:cNvPr id="9" name="Table 8"/>
+          <p:cNvPr id="8" name="Table 7"/>
           <p:cNvGraphicFramePr>
             <a:graphicFrameLocks noGrp="1"/>
           </p:cNvGraphicFramePr>
@@ -36821,7 +35805,7 @@
       </p:graphicFrame>
       <p:sp>
         <p:nvSpPr>
-          <p:cNvPr id="10" name="TextBox 9"/>
+          <p:cNvPr id="9" name="TextBox 8"/>
           <p:cNvSpPr txBox="1"/>
           <p:nvPr/>
         </p:nvSpPr>
@@ -36863,7 +35847,7 @@
       </p:sp>
       <p:sp>
         <p:nvSpPr>
-          <p:cNvPr id="11" name="Rectangle 10"/>
+          <p:cNvPr id="10" name="Rectangle 9"/>
           <p:cNvSpPr/>
           <p:nvPr/>
         </p:nvSpPr>
@@ -36912,7 +35896,7 @@
       </p:sp>
       <p:sp>
         <p:nvSpPr>
-          <p:cNvPr id="12" name="TextBox 11"/>
+          <p:cNvPr id="11" name="TextBox 10"/>
           <p:cNvSpPr txBox="1"/>
           <p:nvPr/>
         </p:nvSpPr>
@@ -36954,7 +35938,7 @@
       </p:sp>
       <p:sp>
         <p:nvSpPr>
-          <p:cNvPr id="13" name="TextBox 12"/>
+          <p:cNvPr id="12" name="TextBox 11"/>
           <p:cNvSpPr txBox="1"/>
           <p:nvPr/>
         </p:nvSpPr>
@@ -36996,7 +35980,7 @@
       </p:sp>
       <p:sp>
         <p:nvSpPr>
-          <p:cNvPr id="14" name="TextBox 13"/>
+          <p:cNvPr id="13" name="TextBox 12"/>
           <p:cNvSpPr txBox="1"/>
           <p:nvPr/>
         </p:nvSpPr>
@@ -37112,7 +36096,7 @@
         <p:spPr>
           <a:xfrm>
             <a:off x="640080" y="329184"/>
-            <a:ext cx="5303520" cy="182880"/>
+            <a:ext cx="9875520" cy="182880"/>
           </a:xfrm>
           <a:prstGeom prst="rect">
             <a:avLst/>
@@ -37153,48 +36137,6 @@
         </p:nvSpPr>
         <p:spPr>
           <a:xfrm>
-            <a:off x="5897880" y="310896"/>
-            <a:ext cx="4800600" cy="256032"/>
-          </a:xfrm>
-          <a:prstGeom prst="rect">
-            <a:avLst/>
-          </a:prstGeom>
-          <a:noFill/>
-        </p:spPr>
-        <p:txBody>
-          <a:bodyPr wrap="none" lIns="9144" rIns="9144" tIns="9144" bIns="9144" anchor="t">
-            <a:spAutoFit/>
-          </a:bodyPr>
-          <a:lstStyle/>
-          <a:p>
-            <a:pPr algn="r">
-              <a:spcAft>
-                <a:spcPts val="0"/>
-              </a:spcAft>
-              <a:defRPr sz="680" b="1">
-                <a:solidFill>
-                  <a:srgbClr val="4F6B00"/>
-                </a:solidFill>
-                <a:latin typeface="Inter"/>
-              </a:defRPr>
-            </a:pPr>
-            <a:r>
-              <a:rPr>
-                <a:latin typeface="Inter"/>
-              </a:rPr>
-              <a:t>Illustrative, Gradient Maintained — demo data, not the client's holdings or managers</a:t>
-            </a:r>
-          </a:p>
-        </p:txBody>
-      </p:sp>
-      <p:sp>
-        <p:nvSpPr>
-          <p:cNvPr id="5" name="TextBox 4"/>
-          <p:cNvSpPr txBox="1"/>
-          <p:nvPr/>
-        </p:nvSpPr>
-        <p:spPr>
-          <a:xfrm>
             <a:off x="640080" y="566928"/>
             <a:ext cx="10058400" cy="530352"/>
           </a:xfrm>
@@ -37231,7 +36173,7 @@
       </p:sp>
       <p:sp>
         <p:nvSpPr>
-          <p:cNvPr id="6" name="Rectangle 5"/>
+          <p:cNvPr id="5" name="Rectangle 4"/>
           <p:cNvSpPr/>
           <p:nvPr/>
         </p:nvSpPr>
@@ -37280,7 +36222,7 @@
       </p:sp>
       <p:sp>
         <p:nvSpPr>
-          <p:cNvPr id="7" name="Rectangle 6"/>
+          <p:cNvPr id="6" name="Rectangle 5"/>
           <p:cNvSpPr/>
           <p:nvPr/>
         </p:nvSpPr>
@@ -37329,7 +36271,7 @@
       </p:sp>
       <p:sp>
         <p:nvSpPr>
-          <p:cNvPr id="8" name="TextBox 7"/>
+          <p:cNvPr id="7" name="TextBox 6"/>
           <p:cNvSpPr txBox="1"/>
           <p:nvPr/>
         </p:nvSpPr>
@@ -37371,7 +36313,7 @@
       </p:sp>
       <p:sp>
         <p:nvSpPr>
-          <p:cNvPr id="9" name="TextBox 8"/>
+          <p:cNvPr id="8" name="TextBox 7"/>
           <p:cNvSpPr txBox="1"/>
           <p:nvPr/>
         </p:nvSpPr>
@@ -37413,7 +36355,7 @@
       </p:sp>
       <p:sp>
         <p:nvSpPr>
-          <p:cNvPr id="10" name="TextBox 9"/>
+          <p:cNvPr id="9" name="TextBox 8"/>
           <p:cNvSpPr txBox="1"/>
           <p:nvPr/>
         </p:nvSpPr>
@@ -37455,7 +36397,7 @@
       </p:sp>
       <p:sp>
         <p:nvSpPr>
-          <p:cNvPr id="11" name="Rectangle 10"/>
+          <p:cNvPr id="10" name="Rectangle 9"/>
           <p:cNvSpPr/>
           <p:nvPr/>
         </p:nvSpPr>
@@ -37504,7 +36446,7 @@
       </p:sp>
       <p:sp>
         <p:nvSpPr>
-          <p:cNvPr id="12" name="Oval 11"/>
+          <p:cNvPr id="11" name="Oval 10"/>
           <p:cNvSpPr/>
           <p:nvPr/>
         </p:nvSpPr>
@@ -37553,7 +36495,7 @@
       </p:sp>
       <p:sp>
         <p:nvSpPr>
-          <p:cNvPr id="13" name="Rectangle 12"/>
+          <p:cNvPr id="12" name="Rectangle 11"/>
           <p:cNvSpPr/>
           <p:nvPr/>
         </p:nvSpPr>
@@ -37602,7 +36544,7 @@
       </p:sp>
       <p:sp>
         <p:nvSpPr>
-          <p:cNvPr id="14" name="TextBox 13"/>
+          <p:cNvPr id="13" name="TextBox 12"/>
           <p:cNvSpPr txBox="1"/>
           <p:nvPr/>
         </p:nvSpPr>
@@ -37644,7 +36586,7 @@
       </p:sp>
       <p:sp>
         <p:nvSpPr>
-          <p:cNvPr id="15" name="Rectangle 14"/>
+          <p:cNvPr id="14" name="Rectangle 13"/>
           <p:cNvSpPr/>
           <p:nvPr/>
         </p:nvSpPr>
@@ -37693,7 +36635,7 @@
       </p:sp>
       <p:sp>
         <p:nvSpPr>
-          <p:cNvPr id="16" name="Oval 15"/>
+          <p:cNvPr id="15" name="Oval 14"/>
           <p:cNvSpPr/>
           <p:nvPr/>
         </p:nvSpPr>
@@ -37742,7 +36684,7 @@
       </p:sp>
       <p:sp>
         <p:nvSpPr>
-          <p:cNvPr id="17" name="Rectangle 16"/>
+          <p:cNvPr id="16" name="Rectangle 15"/>
           <p:cNvSpPr/>
           <p:nvPr/>
         </p:nvSpPr>
@@ -37791,7 +36733,7 @@
       </p:sp>
       <p:sp>
         <p:nvSpPr>
-          <p:cNvPr id="18" name="TextBox 17"/>
+          <p:cNvPr id="17" name="TextBox 16"/>
           <p:cNvSpPr txBox="1"/>
           <p:nvPr/>
         </p:nvSpPr>
@@ -37833,7 +36775,7 @@
       </p:sp>
       <p:sp>
         <p:nvSpPr>
-          <p:cNvPr id="19" name="Rectangle 18"/>
+          <p:cNvPr id="18" name="Rectangle 17"/>
           <p:cNvSpPr/>
           <p:nvPr/>
         </p:nvSpPr>
@@ -37882,7 +36824,7 @@
       </p:sp>
       <p:sp>
         <p:nvSpPr>
-          <p:cNvPr id="20" name="Oval 19"/>
+          <p:cNvPr id="19" name="Oval 18"/>
           <p:cNvSpPr/>
           <p:nvPr/>
         </p:nvSpPr>
@@ -37931,7 +36873,7 @@
       </p:sp>
       <p:sp>
         <p:nvSpPr>
-          <p:cNvPr id="21" name="Rectangle 20"/>
+          <p:cNvPr id="20" name="Rectangle 19"/>
           <p:cNvSpPr/>
           <p:nvPr/>
         </p:nvSpPr>
@@ -37980,7 +36922,7 @@
       </p:sp>
       <p:sp>
         <p:nvSpPr>
-          <p:cNvPr id="22" name="Rectangle 21"/>
+          <p:cNvPr id="21" name="Rectangle 20"/>
           <p:cNvSpPr/>
           <p:nvPr/>
         </p:nvSpPr>
@@ -38029,7 +36971,7 @@
       </p:sp>
       <p:sp>
         <p:nvSpPr>
-          <p:cNvPr id="23" name="TextBox 22"/>
+          <p:cNvPr id="22" name="TextBox 21"/>
           <p:cNvSpPr txBox="1"/>
           <p:nvPr/>
         </p:nvSpPr>
@@ -38071,7 +37013,7 @@
       </p:sp>
       <p:sp>
         <p:nvSpPr>
-          <p:cNvPr id="24" name="TextBox 23"/>
+          <p:cNvPr id="23" name="TextBox 22"/>
           <p:cNvSpPr txBox="1"/>
           <p:nvPr/>
         </p:nvSpPr>
@@ -38113,7 +37055,7 @@
       </p:sp>
       <p:sp>
         <p:nvSpPr>
-          <p:cNvPr id="25" name="TextBox 24"/>
+          <p:cNvPr id="24" name="TextBox 23"/>
           <p:cNvSpPr txBox="1"/>
           <p:nvPr/>
         </p:nvSpPr>
@@ -38229,7 +37171,7 @@
         <p:spPr>
           <a:xfrm>
             <a:off x="640080" y="329184"/>
-            <a:ext cx="5303520" cy="182880"/>
+            <a:ext cx="9875520" cy="182880"/>
           </a:xfrm>
           <a:prstGeom prst="rect">
             <a:avLst/>
@@ -38270,48 +37212,6 @@
         </p:nvSpPr>
         <p:spPr>
           <a:xfrm>
-            <a:off x="5897880" y="310896"/>
-            <a:ext cx="4800600" cy="256032"/>
-          </a:xfrm>
-          <a:prstGeom prst="rect">
-            <a:avLst/>
-          </a:prstGeom>
-          <a:noFill/>
-        </p:spPr>
-        <p:txBody>
-          <a:bodyPr wrap="none" lIns="9144" rIns="9144" tIns="9144" bIns="9144" anchor="t">
-            <a:spAutoFit/>
-          </a:bodyPr>
-          <a:lstStyle/>
-          <a:p>
-            <a:pPr algn="r">
-              <a:spcAft>
-                <a:spcPts val="0"/>
-              </a:spcAft>
-              <a:defRPr sz="680" b="1">
-                <a:solidFill>
-                  <a:srgbClr val="4F6B00"/>
-                </a:solidFill>
-                <a:latin typeface="Inter"/>
-              </a:defRPr>
-            </a:pPr>
-            <a:r>
-              <a:rPr>
-                <a:latin typeface="Inter"/>
-              </a:rPr>
-              <a:t>Illustrative, Gradient Maintained — demo data, not the client's holdings or managers</a:t>
-            </a:r>
-          </a:p>
-        </p:txBody>
-      </p:sp>
-      <p:sp>
-        <p:nvSpPr>
-          <p:cNvPr id="5" name="TextBox 4"/>
-          <p:cNvSpPr txBox="1"/>
-          <p:nvPr/>
-        </p:nvSpPr>
-        <p:spPr>
-          <a:xfrm>
             <a:off x="640080" y="566928"/>
             <a:ext cx="10058400" cy="530352"/>
           </a:xfrm>
@@ -38348,7 +37248,7 @@
       </p:sp>
       <p:sp>
         <p:nvSpPr>
-          <p:cNvPr id="6" name="Rectangle 5"/>
+          <p:cNvPr id="5" name="Rectangle 4"/>
           <p:cNvSpPr/>
           <p:nvPr/>
         </p:nvSpPr>
@@ -38397,7 +37297,7 @@
       </p:sp>
       <p:sp>
         <p:nvSpPr>
-          <p:cNvPr id="7" name="Rectangle 6"/>
+          <p:cNvPr id="6" name="Rectangle 5"/>
           <p:cNvSpPr/>
           <p:nvPr/>
         </p:nvSpPr>
@@ -38446,7 +37346,7 @@
       </p:sp>
       <p:sp>
         <p:nvSpPr>
-          <p:cNvPr id="8" name="TextBox 7"/>
+          <p:cNvPr id="7" name="TextBox 6"/>
           <p:cNvSpPr txBox="1"/>
           <p:nvPr/>
         </p:nvSpPr>
@@ -38488,7 +37388,7 @@
       </p:sp>
       <p:sp>
         <p:nvSpPr>
-          <p:cNvPr id="9" name="TextBox 8"/>
+          <p:cNvPr id="8" name="TextBox 7"/>
           <p:cNvSpPr txBox="1"/>
           <p:nvPr/>
         </p:nvSpPr>
@@ -38530,7 +37430,7 @@
       </p:sp>
       <p:graphicFrame>
         <p:nvGraphicFramePr>
-          <p:cNvPr id="10" name="Chart 9"/>
+          <p:cNvPr id="9" name="Chart 8"/>
           <p:cNvGraphicFramePr>
             <a:graphicFrameLocks noGrp="1"/>
           </p:cNvGraphicFramePr>
@@ -38548,7 +37448,7 @@
       </p:graphicFrame>
       <p:sp>
         <p:nvSpPr>
-          <p:cNvPr id="11" name="Rectangle 10"/>
+          <p:cNvPr id="10" name="Rectangle 9"/>
           <p:cNvSpPr/>
           <p:nvPr/>
         </p:nvSpPr>
@@ -38597,7 +37497,7 @@
       </p:sp>
       <p:sp>
         <p:nvSpPr>
-          <p:cNvPr id="12" name="TextBox 11"/>
+          <p:cNvPr id="11" name="TextBox 10"/>
           <p:cNvSpPr txBox="1"/>
           <p:nvPr/>
         </p:nvSpPr>
@@ -38639,7 +37539,7 @@
       </p:sp>
       <p:sp>
         <p:nvSpPr>
-          <p:cNvPr id="13" name="TextBox 12"/>
+          <p:cNvPr id="12" name="TextBox 11"/>
           <p:cNvSpPr txBox="1"/>
           <p:nvPr/>
         </p:nvSpPr>
@@ -38681,7 +37581,7 @@
       </p:sp>
       <p:sp>
         <p:nvSpPr>
-          <p:cNvPr id="14" name="TextBox 13"/>
+          <p:cNvPr id="13" name="TextBox 12"/>
           <p:cNvSpPr txBox="1"/>
           <p:nvPr/>
         </p:nvSpPr>

--- a/plugins/gradient-cio/assets/examples/gradient-portfolio-construction-global-public-equity.pptx
+++ b/plugins/gradient-cio/assets/examples/gradient-portfolio-construction-global-public-equity.pptx
@@ -28672,7 +28672,7 @@
                         <a:rPr>
                           <a:latin typeface="Inter"/>
                         </a:rPr>
-                        <a:t>get_portfolio_exposure; get_chart_data</a:t>
+                        <a:t>get_portfolio_exposure; get_portfolio_exposure</a:t>
                       </a:r>
                     </a:p>
                   </a:txBody>
@@ -29407,7 +29407,7 @@
                         <a:rPr>
                           <a:latin typeface="Inter"/>
                         </a:rPr>
-                        <a:t>get_cross_domain_research</a:t>
+                        <a:t>get_portfolio_exposure</a:t>
                       </a:r>
                     </a:p>
                   </a:txBody>
@@ -29434,7 +29434,7 @@
                         <a:rPr>
                           <a:latin typeface="Inter"/>
                         </a:rPr>
-                        <a:t>portfolio_13f_lookthrough</a:t>
+                        <a:t>include=lookthrough_13f</a:t>
                       </a:r>
                     </a:p>
                   </a:txBody>

--- a/plugins/gradient-cio/assets/examples/gradient-portfolio-construction-global-public-equity.pptx
+++ b/plugins/gradient-cio/assets/examples/gradient-portfolio-construction-global-public-equity.pptx
@@ -33,6 +33,7 @@
     <ns0:sldId id="281" ns1:id="rId32"/>
     <ns0:sldId id="282" ns1:id="rId33"/>
     <ns0:sldId id="283" ns1:id="rId34"/>
+    <ns0:sldId id="284" ns1:id="rId35"/>
   </ns0:sldIdLst>
   <ns0:sldSz cx="12191695" cy="6858000" type="screen16x9"/>
   <ns0:notesSz cx="6858000" cy="9144000"/>
@@ -5544,224 +5545,7 @@
       </p:sp>
       <p:sp>
         <p:nvSpPr>
-          <p:cNvPr id="17" name="Rectangle 16"/>
-          <p:cNvSpPr/>
-          <p:nvPr/>
-        </p:nvSpPr>
-        <p:spPr>
-          <a:xfrm>
-            <a:off x="685800" y="5687568"/>
-            <a:ext cx="3337560" cy="530352"/>
-          </a:xfrm>
-          <a:prstGeom prst="rect">
-            <a:avLst/>
-          </a:prstGeom>
-          <a:solidFill>
-            <a:srgbClr val="F2A93B"/>
-          </a:solidFill>
-          <a:ln>
-            <a:solidFill>
-              <a:srgbClr val="F2A93B"/>
-            </a:solidFill>
-          </a:ln>
-        </p:spPr>
-        <p:style>
-          <a:lnRef idx="1">
-            <a:schemeClr val="accent1"/>
-          </a:lnRef>
-          <a:fillRef idx="3">
-            <a:schemeClr val="accent1"/>
-          </a:fillRef>
-          <a:effectRef idx="2">
-            <a:schemeClr val="accent1"/>
-          </a:effectRef>
-          <a:fontRef idx="minor">
-            <a:schemeClr val="lt1"/>
-          </a:fontRef>
-        </p:style>
-        <p:txBody>
-          <a:bodyPr rtlCol="0" anchor="ctr"/>
-          <a:lstStyle/>
-          <a:p>
-            <a:pPr algn="ctr">
-              <a:defRPr>
-                <a:latin typeface="Inter"/>
-              </a:defRPr>
-            </a:pPr>
-          </a:p>
-        </p:txBody>
-      </p:sp>
-      <p:sp>
-        <p:nvSpPr>
-          <p:cNvPr id="18" name="TextBox 17"/>
-          <p:cNvSpPr txBox="1"/>
-          <p:nvPr/>
-        </p:nvSpPr>
-        <p:spPr>
-          <a:xfrm>
-            <a:off x="822960" y="5760720"/>
-            <a:ext cx="3063240" cy="128016"/>
-          </a:xfrm>
-          <a:prstGeom prst="rect">
-            <a:avLst/>
-          </a:prstGeom>
-          <a:noFill/>
-        </p:spPr>
-        <p:txBody>
-          <a:bodyPr wrap="none" lIns="9144" rIns="9144" tIns="9144" bIns="9144" anchor="t">
-            <a:spAutoFit/>
-          </a:bodyPr>
-          <a:lstStyle/>
-          <a:p>
-            <a:pPr algn="l">
-              <a:spcAft>
-                <a:spcPts val="0"/>
-              </a:spcAft>
-              <a:defRPr sz="620" b="1">
-                <a:solidFill>
-                  <a:srgbClr val="0D1117"/>
-                </a:solidFill>
-                <a:latin typeface="Inter"/>
-              </a:defRPr>
-            </a:pPr>
-            <a:r>
-              <a:rPr>
-                <a:latin typeface="Inter"/>
-              </a:rPr>
-              <a:t>OVERALL VIEW</a:t>
-            </a:r>
-          </a:p>
-        </p:txBody>
-      </p:sp>
-      <p:sp>
-        <p:nvSpPr>
-          <p:cNvPr id="19" name="TextBox 18"/>
-          <p:cNvSpPr txBox="1"/>
-          <p:nvPr/>
-        </p:nvSpPr>
-        <p:spPr>
-          <a:xfrm>
-            <a:off x="822960" y="5916168"/>
-            <a:ext cx="3063240" cy="182880"/>
-          </a:xfrm>
-          <a:prstGeom prst="rect">
-            <a:avLst/>
-          </a:prstGeom>
-          <a:noFill/>
-        </p:spPr>
-        <p:txBody>
-          <a:bodyPr wrap="none" lIns="9144" rIns="9144" tIns="9144" bIns="9144" anchor="t">
-            <a:spAutoFit/>
-          </a:bodyPr>
-          <a:lstStyle/>
-          <a:p>
-            <a:pPr algn="l">
-              <a:spcAft>
-                <a:spcPts val="0"/>
-              </a:spcAft>
-              <a:defRPr sz="900" b="1">
-                <a:solidFill>
-                  <a:srgbClr val="0D1117"/>
-                </a:solidFill>
-                <a:latin typeface="Inter"/>
-              </a:defRPr>
-            </a:pPr>
-            <a:r>
-              <a:rPr>
-                <a:latin typeface="Inter"/>
-              </a:rPr>
-              <a:t>Manager and issuer concentration on watch</a:t>
-            </a:r>
-          </a:p>
-        </p:txBody>
-      </p:sp>
-      <p:sp>
-        <p:nvSpPr>
-          <p:cNvPr id="20" name="TextBox 19"/>
-          <p:cNvSpPr txBox="1"/>
-          <p:nvPr/>
-        </p:nvSpPr>
-        <p:spPr>
-          <a:xfrm>
-            <a:off x="4297680" y="5733288"/>
-            <a:ext cx="3108960" cy="164592"/>
-          </a:xfrm>
-          <a:prstGeom prst="rect">
-            <a:avLst/>
-          </a:prstGeom>
-          <a:noFill/>
-        </p:spPr>
-        <p:txBody>
-          <a:bodyPr wrap="none" lIns="9144" rIns="9144" tIns="9144" bIns="9144" anchor="t">
-            <a:spAutoFit/>
-          </a:bodyPr>
-          <a:lstStyle/>
-          <a:p>
-            <a:pPr algn="l">
-              <a:spcAft>
-                <a:spcPts val="0"/>
-              </a:spcAft>
-              <a:defRPr sz="650" b="1">
-                <a:solidFill>
-                  <a:srgbClr val="8A94A1"/>
-                </a:solidFill>
-                <a:latin typeface="Inter"/>
-              </a:defRPr>
-            </a:pPr>
-            <a:r>
-              <a:rPr>
-                <a:latin typeface="Inter"/>
-              </a:rPr>
-              <a:t>SCOPE REVIEWED</a:t>
-            </a:r>
-          </a:p>
-        </p:txBody>
-      </p:sp>
-      <p:sp>
-        <p:nvSpPr>
-          <p:cNvPr id="21" name="TextBox 20"/>
-          <p:cNvSpPr txBox="1"/>
-          <p:nvPr/>
-        </p:nvSpPr>
-        <p:spPr>
-          <a:xfrm>
-            <a:off x="4297680" y="5934456"/>
-            <a:ext cx="3108960" cy="201168"/>
-          </a:xfrm>
-          <a:prstGeom prst="rect">
-            <a:avLst/>
-          </a:prstGeom>
-          <a:noFill/>
-        </p:spPr>
-        <p:txBody>
-          <a:bodyPr wrap="none" lIns="9144" rIns="9144" tIns="9144" bIns="9144" anchor="t">
-            <a:spAutoFit/>
-          </a:bodyPr>
-          <a:lstStyle/>
-          <a:p>
-            <a:pPr algn="l">
-              <a:spcAft>
-                <a:spcPts val="0"/>
-              </a:spcAft>
-              <a:defRPr sz="800" b="1">
-                <a:solidFill>
-                  <a:srgbClr val="FFFFFF"/>
-                </a:solidFill>
-                <a:latin typeface="Inter"/>
-              </a:defRPr>
-            </a:pPr>
-            <a:r>
-              <a:rPr>
-                <a:latin typeface="Inter"/>
-              </a:rPr>
-              <a:t>9 of 10 · Partial</a:t>
-            </a:r>
-          </a:p>
-        </p:txBody>
-      </p:sp>
-      <p:sp>
-        <p:nvSpPr>
-          <p:cNvPr id="22" name="TextBox 21"/>
+          <p:cNvPr id="17" name="TextBox 16"/>
           <p:cNvSpPr txBox="1"/>
           <p:nvPr/>
         </p:nvSpPr>
@@ -5803,7 +5587,7 @@
       </p:sp>
       <p:sp>
         <p:nvSpPr>
-          <p:cNvPr id="23" name="TextBox 22"/>
+          <p:cNvPr id="18" name="TextBox 17"/>
           <p:cNvSpPr txBox="1"/>
           <p:nvPr/>
         </p:nvSpPr>
@@ -5845,7 +5629,7 @@
       </p:sp>
       <p:sp>
         <p:nvSpPr>
-          <p:cNvPr id="24" name="TextBox 23"/>
+          <p:cNvPr id="19" name="TextBox 18"/>
           <p:cNvSpPr txBox="1"/>
           <p:nvPr/>
         </p:nvSpPr>
@@ -5961,7 +5745,7 @@
         <p:spPr>
           <a:xfrm>
             <a:off x="640080" y="329184"/>
-            <a:ext cx="5303520" cy="182880"/>
+            <a:ext cx="9875520" cy="182880"/>
           </a:xfrm>
           <a:prstGeom prst="rect">
             <a:avLst/>
@@ -6002,48 +5786,6 @@
         </p:nvSpPr>
         <p:spPr>
           <a:xfrm>
-            <a:off x="5897880" y="310896"/>
-            <a:ext cx="4800600" cy="256032"/>
-          </a:xfrm>
-          <a:prstGeom prst="rect">
-            <a:avLst/>
-          </a:prstGeom>
-          <a:noFill/>
-        </p:spPr>
-        <p:txBody>
-          <a:bodyPr wrap="none" lIns="9144" rIns="9144" tIns="9144" bIns="9144" anchor="t">
-            <a:spAutoFit/>
-          </a:bodyPr>
-          <a:lstStyle/>
-          <a:p>
-            <a:pPr algn="r">
-              <a:spcAft>
-                <a:spcPts val="0"/>
-              </a:spcAft>
-              <a:defRPr sz="680" b="1">
-                <a:solidFill>
-                  <a:srgbClr val="4F6B00"/>
-                </a:solidFill>
-                <a:latin typeface="Inter"/>
-              </a:defRPr>
-            </a:pPr>
-            <a:r>
-              <a:rPr>
-                <a:latin typeface="Inter"/>
-              </a:rPr>
-              <a:t>Illustrative, Gradient Maintained — demo data, not the client's holdings or managers</a:t>
-            </a:r>
-          </a:p>
-        </p:txBody>
-      </p:sp>
-      <p:sp>
-        <p:nvSpPr>
-          <p:cNvPr id="5" name="TextBox 4"/>
-          <p:cNvSpPr txBox="1"/>
-          <p:nvPr/>
-        </p:nvSpPr>
-        <p:spPr>
-          <a:xfrm>
             <a:off x="640080" y="566928"/>
             <a:ext cx="10058400" cy="530352"/>
           </a:xfrm>
@@ -6080,7 +5822,7 @@
       </p:sp>
       <p:sp>
         <p:nvSpPr>
-          <p:cNvPr id="6" name="Rectangle 5"/>
+          <p:cNvPr id="5" name="Rectangle 4"/>
           <p:cNvSpPr/>
           <p:nvPr/>
         </p:nvSpPr>
@@ -6129,7 +5871,7 @@
       </p:sp>
       <p:sp>
         <p:nvSpPr>
-          <p:cNvPr id="7" name="Rectangle 6"/>
+          <p:cNvPr id="6" name="Rectangle 5"/>
           <p:cNvSpPr/>
           <p:nvPr/>
         </p:nvSpPr>
@@ -6178,7 +5920,7 @@
       </p:sp>
       <p:sp>
         <p:nvSpPr>
-          <p:cNvPr id="8" name="TextBox 7"/>
+          <p:cNvPr id="7" name="TextBox 6"/>
           <p:cNvSpPr txBox="1"/>
           <p:nvPr/>
         </p:nvSpPr>
@@ -6220,7 +5962,7 @@
       </p:sp>
       <p:sp>
         <p:nvSpPr>
-          <p:cNvPr id="9" name="TextBox 8"/>
+          <p:cNvPr id="8" name="TextBox 7"/>
           <p:cNvSpPr txBox="1"/>
           <p:nvPr/>
         </p:nvSpPr>
@@ -6262,7 +6004,7 @@
       </p:sp>
       <p:graphicFrame>
         <p:nvGraphicFramePr>
-          <p:cNvPr id="10" name="Table 9"/>
+          <p:cNvPr id="9" name="Table 8"/>
           <p:cNvGraphicFramePr>
             <a:graphicFrameLocks noGrp="1"/>
           </p:cNvGraphicFramePr>
@@ -6948,7 +6690,7 @@
       </p:graphicFrame>
       <p:sp>
         <p:nvSpPr>
-          <p:cNvPr id="11" name="Rectangle 10"/>
+          <p:cNvPr id="10" name="Rectangle 9"/>
           <p:cNvSpPr/>
           <p:nvPr/>
         </p:nvSpPr>
@@ -6997,7 +6739,7 @@
       </p:sp>
       <p:sp>
         <p:nvSpPr>
-          <p:cNvPr id="12" name="Rectangle 11"/>
+          <p:cNvPr id="11" name="Rectangle 10"/>
           <p:cNvSpPr/>
           <p:nvPr/>
         </p:nvSpPr>
@@ -7046,7 +6788,7 @@
       </p:sp>
       <p:sp>
         <p:nvSpPr>
-          <p:cNvPr id="13" name="TextBox 12"/>
+          <p:cNvPr id="12" name="TextBox 11"/>
           <p:cNvSpPr txBox="1"/>
           <p:nvPr/>
         </p:nvSpPr>
@@ -7088,7 +6830,7 @@
       </p:sp>
       <p:sp>
         <p:nvSpPr>
-          <p:cNvPr id="14" name="TextBox 13"/>
+          <p:cNvPr id="13" name="TextBox 12"/>
           <p:cNvSpPr txBox="1"/>
           <p:nvPr/>
         </p:nvSpPr>
@@ -7130,7 +6872,7 @@
       </p:sp>
       <p:sp>
         <p:nvSpPr>
-          <p:cNvPr id="15" name="TextBox 14"/>
+          <p:cNvPr id="14" name="TextBox 13"/>
           <p:cNvSpPr txBox="1"/>
           <p:nvPr/>
         </p:nvSpPr>
@@ -7172,7 +6914,7 @@
       </p:sp>
       <p:sp>
         <p:nvSpPr>
-          <p:cNvPr id="16" name="Rectangle 15"/>
+          <p:cNvPr id="15" name="Rectangle 14"/>
           <p:cNvSpPr/>
           <p:nvPr/>
         </p:nvSpPr>
@@ -7221,7 +6963,7 @@
       </p:sp>
       <p:sp>
         <p:nvSpPr>
-          <p:cNvPr id="17" name="TextBox 16"/>
+          <p:cNvPr id="16" name="TextBox 15"/>
           <p:cNvSpPr txBox="1"/>
           <p:nvPr/>
         </p:nvSpPr>
@@ -7263,7 +7005,7 @@
       </p:sp>
       <p:sp>
         <p:nvSpPr>
-          <p:cNvPr id="18" name="TextBox 17"/>
+          <p:cNvPr id="17" name="TextBox 16"/>
           <p:cNvSpPr txBox="1"/>
           <p:nvPr/>
         </p:nvSpPr>
@@ -7305,7 +7047,7 @@
       </p:sp>
       <p:sp>
         <p:nvSpPr>
-          <p:cNvPr id="19" name="TextBox 18"/>
+          <p:cNvPr id="18" name="TextBox 17"/>
           <p:cNvSpPr txBox="1"/>
           <p:nvPr/>
         </p:nvSpPr>
@@ -7420,48 +7162,6 @@
         </p:nvSpPr>
         <p:spPr>
           <a:xfrm>
-            <a:off x="5897880" y="310896"/>
-            <a:ext cx="4800600" cy="256032"/>
-          </a:xfrm>
-          <a:prstGeom prst="rect">
-            <a:avLst/>
-          </a:prstGeom>
-          <a:noFill/>
-        </p:spPr>
-        <p:txBody>
-          <a:bodyPr wrap="none" lIns="9144" rIns="9144" tIns="9144" bIns="9144" anchor="t">
-            <a:spAutoFit/>
-          </a:bodyPr>
-          <a:lstStyle/>
-          <a:p>
-            <a:pPr algn="r">
-              <a:spcAft>
-                <a:spcPts val="0"/>
-              </a:spcAft>
-              <a:defRPr sz="680" b="1">
-                <a:solidFill>
-                  <a:srgbClr val="4F6B00"/>
-                </a:solidFill>
-                <a:latin typeface="Inter"/>
-              </a:defRPr>
-            </a:pPr>
-            <a:r>
-              <a:rPr>
-                <a:latin typeface="Inter"/>
-              </a:rPr>
-              <a:t>Illustrative, Gradient Maintained — demo data, not the client's holdings or managers</a:t>
-            </a:r>
-          </a:p>
-        </p:txBody>
-      </p:sp>
-      <p:sp>
-        <p:nvSpPr>
-          <p:cNvPr id="4" name="TextBox 3"/>
-          <p:cNvSpPr txBox="1"/>
-          <p:nvPr/>
-        </p:nvSpPr>
-        <p:spPr>
-          <a:xfrm>
             <a:off x="640080" y="566928"/>
             <a:ext cx="10058400" cy="530352"/>
           </a:xfrm>
@@ -7498,7 +7198,7 @@
       </p:sp>
       <p:sp>
         <p:nvSpPr>
-          <p:cNvPr id="5" name="Rectangle 4"/>
+          <p:cNvPr id="4" name="Rectangle 3"/>
           <p:cNvSpPr/>
           <p:nvPr/>
         </p:nvSpPr>
@@ -7547,7 +7247,7 @@
       </p:sp>
       <p:sp>
         <p:nvSpPr>
-          <p:cNvPr id="6" name="Rectangle 5"/>
+          <p:cNvPr id="5" name="Rectangle 4"/>
           <p:cNvSpPr/>
           <p:nvPr/>
         </p:nvSpPr>
@@ -7596,7 +7296,7 @@
       </p:sp>
       <p:sp>
         <p:nvSpPr>
-          <p:cNvPr id="7" name="TextBox 6"/>
+          <p:cNvPr id="6" name="TextBox 5"/>
           <p:cNvSpPr txBox="1"/>
           <p:nvPr/>
         </p:nvSpPr>
@@ -7638,7 +7338,7 @@
       </p:sp>
       <p:sp>
         <p:nvSpPr>
-          <p:cNvPr id="8" name="TextBox 7"/>
+          <p:cNvPr id="7" name="TextBox 6"/>
           <p:cNvSpPr txBox="1"/>
           <p:nvPr/>
         </p:nvSpPr>
@@ -7680,7 +7380,7 @@
       </p:sp>
       <p:graphicFrame>
         <p:nvGraphicFramePr>
-          <p:cNvPr id="9" name="Chart 8"/>
+          <p:cNvPr id="8" name="Chart 7"/>
           <p:cNvGraphicFramePr>
             <a:graphicFrameLocks noGrp="1"/>
           </p:cNvGraphicFramePr>
@@ -7698,7 +7398,7 @@
       </p:graphicFrame>
       <p:sp>
         <p:nvSpPr>
-          <p:cNvPr id="10" name="Rectangle 9"/>
+          <p:cNvPr id="9" name="Rectangle 8"/>
           <p:cNvSpPr/>
           <p:nvPr/>
         </p:nvSpPr>
@@ -7747,7 +7447,7 @@
       </p:sp>
       <p:sp>
         <p:nvSpPr>
-          <p:cNvPr id="11" name="TextBox 10"/>
+          <p:cNvPr id="10" name="TextBox 9"/>
           <p:cNvSpPr txBox="1"/>
           <p:nvPr/>
         </p:nvSpPr>
@@ -7789,7 +7489,7 @@
       </p:sp>
       <p:sp>
         <p:nvSpPr>
-          <p:cNvPr id="12" name="TextBox 11"/>
+          <p:cNvPr id="11" name="TextBox 10"/>
           <p:cNvSpPr txBox="1"/>
           <p:nvPr/>
         </p:nvSpPr>
@@ -7831,7 +7531,7 @@
       </p:sp>
       <p:sp>
         <p:nvSpPr>
-          <p:cNvPr id="13" name="TextBox 12"/>
+          <p:cNvPr id="12" name="TextBox 11"/>
           <p:cNvSpPr txBox="1"/>
           <p:nvPr/>
         </p:nvSpPr>
@@ -7946,48 +7646,6 @@
         </p:nvSpPr>
         <p:spPr>
           <a:xfrm>
-            <a:off x="5897880" y="310896"/>
-            <a:ext cx="4800600" cy="256032"/>
-          </a:xfrm>
-          <a:prstGeom prst="rect">
-            <a:avLst/>
-          </a:prstGeom>
-          <a:noFill/>
-        </p:spPr>
-        <p:txBody>
-          <a:bodyPr wrap="none" lIns="9144" rIns="9144" tIns="9144" bIns="9144" anchor="t">
-            <a:spAutoFit/>
-          </a:bodyPr>
-          <a:lstStyle/>
-          <a:p>
-            <a:pPr algn="r">
-              <a:spcAft>
-                <a:spcPts val="0"/>
-              </a:spcAft>
-              <a:defRPr sz="680" b="1">
-                <a:solidFill>
-                  <a:srgbClr val="4F6B00"/>
-                </a:solidFill>
-                <a:latin typeface="Inter"/>
-              </a:defRPr>
-            </a:pPr>
-            <a:r>
-              <a:rPr>
-                <a:latin typeface="Inter"/>
-              </a:rPr>
-              <a:t>Illustrative, Gradient Maintained — demo data, not the client's holdings or managers</a:t>
-            </a:r>
-          </a:p>
-        </p:txBody>
-      </p:sp>
-      <p:sp>
-        <p:nvSpPr>
-          <p:cNvPr id="4" name="TextBox 3"/>
-          <p:cNvSpPr txBox="1"/>
-          <p:nvPr/>
-        </p:nvSpPr>
-        <p:spPr>
-          <a:xfrm>
             <a:off x="640080" y="566928"/>
             <a:ext cx="10058400" cy="530352"/>
           </a:xfrm>
@@ -8024,7 +7682,7 @@
       </p:sp>
       <p:sp>
         <p:nvSpPr>
-          <p:cNvPr id="5" name="Rectangle 4"/>
+          <p:cNvPr id="4" name="Rectangle 3"/>
           <p:cNvSpPr/>
           <p:nvPr/>
         </p:nvSpPr>
@@ -8073,7 +7731,7 @@
       </p:sp>
       <p:sp>
         <p:nvSpPr>
-          <p:cNvPr id="6" name="Rectangle 5"/>
+          <p:cNvPr id="5" name="Rectangle 4"/>
           <p:cNvSpPr/>
           <p:nvPr/>
         </p:nvSpPr>
@@ -8122,7 +7780,7 @@
       </p:sp>
       <p:sp>
         <p:nvSpPr>
-          <p:cNvPr id="7" name="TextBox 6"/>
+          <p:cNvPr id="6" name="TextBox 5"/>
           <p:cNvSpPr txBox="1"/>
           <p:nvPr/>
         </p:nvSpPr>
@@ -8164,7 +7822,7 @@
       </p:sp>
       <p:sp>
         <p:nvSpPr>
-          <p:cNvPr id="8" name="TextBox 7"/>
+          <p:cNvPr id="7" name="TextBox 6"/>
           <p:cNvSpPr txBox="1"/>
           <p:nvPr/>
         </p:nvSpPr>
@@ -8206,7 +7864,7 @@
       </p:sp>
       <p:graphicFrame>
         <p:nvGraphicFramePr>
-          <p:cNvPr id="9" name="Table 8"/>
+          <p:cNvPr id="8" name="Table 7"/>
           <p:cNvGraphicFramePr>
             <a:graphicFrameLocks noGrp="1"/>
           </p:cNvGraphicFramePr>
@@ -8783,7 +8441,7 @@
       </p:graphicFrame>
       <p:sp>
         <p:nvSpPr>
-          <p:cNvPr id="10" name="TextBox 9"/>
+          <p:cNvPr id="9" name="TextBox 8"/>
           <p:cNvSpPr txBox="1"/>
           <p:nvPr/>
         </p:nvSpPr>
@@ -8825,7 +8483,7 @@
       </p:sp>
       <p:graphicFrame>
         <p:nvGraphicFramePr>
-          <p:cNvPr id="11" name="Table 10"/>
+          <p:cNvPr id="10" name="Table 9"/>
           <p:cNvGraphicFramePr>
             <a:graphicFrameLocks noGrp="1"/>
           </p:cNvGraphicFramePr>
@@ -9267,7 +8925,7 @@
       </p:graphicFrame>
       <p:sp>
         <p:nvSpPr>
-          <p:cNvPr id="12" name="TextBox 11"/>
+          <p:cNvPr id="11" name="TextBox 10"/>
           <p:cNvSpPr txBox="1"/>
           <p:nvPr/>
         </p:nvSpPr>
@@ -9309,7 +8967,7 @@
       </p:sp>
       <p:sp>
         <p:nvSpPr>
-          <p:cNvPr id="13" name="Rectangle 12"/>
+          <p:cNvPr id="12" name="Rectangle 11"/>
           <p:cNvSpPr/>
           <p:nvPr/>
         </p:nvSpPr>
@@ -9358,7 +9016,7 @@
       </p:sp>
       <p:sp>
         <p:nvSpPr>
-          <p:cNvPr id="14" name="TextBox 13"/>
+          <p:cNvPr id="13" name="TextBox 12"/>
           <p:cNvSpPr txBox="1"/>
           <p:nvPr/>
         </p:nvSpPr>
@@ -9400,7 +9058,7 @@
       </p:sp>
       <p:sp>
         <p:nvSpPr>
-          <p:cNvPr id="15" name="TextBox 14"/>
+          <p:cNvPr id="14" name="TextBox 13"/>
           <p:cNvSpPr txBox="1"/>
           <p:nvPr/>
         </p:nvSpPr>
@@ -9442,7 +9100,7 @@
       </p:sp>
       <p:sp>
         <p:nvSpPr>
-          <p:cNvPr id="16" name="TextBox 15"/>
+          <p:cNvPr id="15" name="TextBox 14"/>
           <p:cNvSpPr txBox="1"/>
           <p:nvPr/>
         </p:nvSpPr>
@@ -9557,48 +9215,6 @@
         </p:nvSpPr>
         <p:spPr>
           <a:xfrm>
-            <a:off x="5897880" y="310896"/>
-            <a:ext cx="4800600" cy="256032"/>
-          </a:xfrm>
-          <a:prstGeom prst="rect">
-            <a:avLst/>
-          </a:prstGeom>
-          <a:noFill/>
-        </p:spPr>
-        <p:txBody>
-          <a:bodyPr wrap="none" lIns="9144" rIns="9144" tIns="9144" bIns="9144" anchor="t">
-            <a:spAutoFit/>
-          </a:bodyPr>
-          <a:lstStyle/>
-          <a:p>
-            <a:pPr algn="r">
-              <a:spcAft>
-                <a:spcPts val="0"/>
-              </a:spcAft>
-              <a:defRPr sz="680" b="1">
-                <a:solidFill>
-                  <a:srgbClr val="4F6B00"/>
-                </a:solidFill>
-                <a:latin typeface="Inter"/>
-              </a:defRPr>
-            </a:pPr>
-            <a:r>
-              <a:rPr>
-                <a:latin typeface="Inter"/>
-              </a:rPr>
-              <a:t>Illustrative, Gradient Maintained — demo data, not the client's holdings or managers</a:t>
-            </a:r>
-          </a:p>
-        </p:txBody>
-      </p:sp>
-      <p:sp>
-        <p:nvSpPr>
-          <p:cNvPr id="4" name="TextBox 3"/>
-          <p:cNvSpPr txBox="1"/>
-          <p:nvPr/>
-        </p:nvSpPr>
-        <p:spPr>
-          <a:xfrm>
             <a:off x="640080" y="566928"/>
             <a:ext cx="10058400" cy="530352"/>
           </a:xfrm>
@@ -9635,7 +9251,7 @@
       </p:sp>
       <p:sp>
         <p:nvSpPr>
-          <p:cNvPr id="5" name="Rectangle 4"/>
+          <p:cNvPr id="4" name="Rectangle 3"/>
           <p:cNvSpPr/>
           <p:nvPr/>
         </p:nvSpPr>
@@ -9684,7 +9300,7 @@
       </p:sp>
       <p:sp>
         <p:nvSpPr>
-          <p:cNvPr id="6" name="Rectangle 5"/>
+          <p:cNvPr id="5" name="Rectangle 4"/>
           <p:cNvSpPr/>
           <p:nvPr/>
         </p:nvSpPr>
@@ -9733,7 +9349,7 @@
       </p:sp>
       <p:sp>
         <p:nvSpPr>
-          <p:cNvPr id="7" name="TextBox 6"/>
+          <p:cNvPr id="6" name="TextBox 5"/>
           <p:cNvSpPr txBox="1"/>
           <p:nvPr/>
         </p:nvSpPr>
@@ -9775,7 +9391,7 @@
       </p:sp>
       <p:graphicFrame>
         <p:nvGraphicFramePr>
-          <p:cNvPr id="8" name="Table 7"/>
+          <p:cNvPr id="7" name="Table 6"/>
           <p:cNvGraphicFramePr>
             <a:graphicFrameLocks noGrp="1"/>
           </p:cNvGraphicFramePr>
@@ -10025,7 +9641,7 @@
       </p:graphicFrame>
       <p:sp>
         <p:nvSpPr>
-          <p:cNvPr id="9" name="Rectangle 8"/>
+          <p:cNvPr id="8" name="Rectangle 7"/>
           <p:cNvSpPr/>
           <p:nvPr/>
         </p:nvSpPr>
@@ -10074,7 +9690,7 @@
       </p:sp>
       <p:sp>
         <p:nvSpPr>
-          <p:cNvPr id="10" name="TextBox 9"/>
+          <p:cNvPr id="9" name="TextBox 8"/>
           <p:cNvSpPr txBox="1"/>
           <p:nvPr/>
         </p:nvSpPr>
@@ -10116,7 +9732,7 @@
       </p:sp>
       <p:sp>
         <p:nvSpPr>
-          <p:cNvPr id="11" name="TextBox 10"/>
+          <p:cNvPr id="10" name="TextBox 9"/>
           <p:cNvSpPr txBox="1"/>
           <p:nvPr/>
         </p:nvSpPr>
@@ -10158,7 +9774,7 @@
       </p:sp>
       <p:sp>
         <p:nvSpPr>
-          <p:cNvPr id="12" name="TextBox 11"/>
+          <p:cNvPr id="11" name="TextBox 10"/>
           <p:cNvSpPr txBox="1"/>
           <p:nvPr/>
         </p:nvSpPr>
@@ -10274,7 +9890,7 @@
         <p:spPr>
           <a:xfrm>
             <a:off x="640080" y="329184"/>
-            <a:ext cx="5303520" cy="182880"/>
+            <a:ext cx="9875520" cy="182880"/>
           </a:xfrm>
           <a:prstGeom prst="rect">
             <a:avLst/>
@@ -10315,48 +9931,6 @@
         </p:nvSpPr>
         <p:spPr>
           <a:xfrm>
-            <a:off x="5897880" y="310896"/>
-            <a:ext cx="4800600" cy="256032"/>
-          </a:xfrm>
-          <a:prstGeom prst="rect">
-            <a:avLst/>
-          </a:prstGeom>
-          <a:noFill/>
-        </p:spPr>
-        <p:txBody>
-          <a:bodyPr wrap="none" lIns="9144" rIns="9144" tIns="9144" bIns="9144" anchor="t">
-            <a:spAutoFit/>
-          </a:bodyPr>
-          <a:lstStyle/>
-          <a:p>
-            <a:pPr algn="r">
-              <a:spcAft>
-                <a:spcPts val="0"/>
-              </a:spcAft>
-              <a:defRPr sz="680" b="1">
-                <a:solidFill>
-                  <a:srgbClr val="4F6B00"/>
-                </a:solidFill>
-                <a:latin typeface="Inter"/>
-              </a:defRPr>
-            </a:pPr>
-            <a:r>
-              <a:rPr>
-                <a:latin typeface="Inter"/>
-              </a:rPr>
-              <a:t>Illustrative, Gradient Maintained — demo data, not the client's holdings or managers</a:t>
-            </a:r>
-          </a:p>
-        </p:txBody>
-      </p:sp>
-      <p:sp>
-        <p:nvSpPr>
-          <p:cNvPr id="5" name="TextBox 4"/>
-          <p:cNvSpPr txBox="1"/>
-          <p:nvPr/>
-        </p:nvSpPr>
-        <p:spPr>
-          <a:xfrm>
             <a:off x="640080" y="566928"/>
             <a:ext cx="10058400" cy="530352"/>
           </a:xfrm>
@@ -10393,7 +9967,7 @@
       </p:sp>
       <p:sp>
         <p:nvSpPr>
-          <p:cNvPr id="6" name="Rectangle 5"/>
+          <p:cNvPr id="5" name="Rectangle 4"/>
           <p:cNvSpPr/>
           <p:nvPr/>
         </p:nvSpPr>
@@ -10442,7 +10016,7 @@
       </p:sp>
       <p:sp>
         <p:nvSpPr>
-          <p:cNvPr id="7" name="Rectangle 6"/>
+          <p:cNvPr id="6" name="Rectangle 5"/>
           <p:cNvSpPr/>
           <p:nvPr/>
         </p:nvSpPr>
@@ -10491,7 +10065,7 @@
       </p:sp>
       <p:sp>
         <p:nvSpPr>
-          <p:cNvPr id="8" name="TextBox 7"/>
+          <p:cNvPr id="7" name="TextBox 6"/>
           <p:cNvSpPr txBox="1"/>
           <p:nvPr/>
         </p:nvSpPr>
@@ -10533,7 +10107,7 @@
       </p:sp>
       <p:sp>
         <p:nvSpPr>
-          <p:cNvPr id="9" name="TextBox 8"/>
+          <p:cNvPr id="8" name="TextBox 7"/>
           <p:cNvSpPr txBox="1"/>
           <p:nvPr/>
         </p:nvSpPr>
@@ -10575,7 +10149,7 @@
       </p:sp>
       <p:graphicFrame>
         <p:nvGraphicFramePr>
-          <p:cNvPr id="10" name="Chart 9"/>
+          <p:cNvPr id="9" name="Chart 8"/>
           <p:cNvGraphicFramePr>
             <a:graphicFrameLocks noGrp="1"/>
           </p:cNvGraphicFramePr>
@@ -10593,7 +10167,7 @@
       </p:graphicFrame>
       <p:sp>
         <p:nvSpPr>
-          <p:cNvPr id="11" name="Rectangle 10"/>
+          <p:cNvPr id="10" name="Rectangle 9"/>
           <p:cNvSpPr/>
           <p:nvPr/>
         </p:nvSpPr>
@@ -10642,7 +10216,7 @@
       </p:sp>
       <p:sp>
         <p:nvSpPr>
-          <p:cNvPr id="12" name="TextBox 11"/>
+          <p:cNvPr id="11" name="TextBox 10"/>
           <p:cNvSpPr txBox="1"/>
           <p:nvPr/>
         </p:nvSpPr>
@@ -10684,7 +10258,7 @@
       </p:sp>
       <p:sp>
         <p:nvSpPr>
-          <p:cNvPr id="13" name="TextBox 12"/>
+          <p:cNvPr id="12" name="TextBox 11"/>
           <p:cNvSpPr txBox="1"/>
           <p:nvPr/>
         </p:nvSpPr>
@@ -10726,7 +10300,7 @@
       </p:sp>
       <p:sp>
         <p:nvSpPr>
-          <p:cNvPr id="14" name="TextBox 13"/>
+          <p:cNvPr id="13" name="TextBox 12"/>
           <p:cNvSpPr txBox="1"/>
           <p:nvPr/>
         </p:nvSpPr>
@@ -10842,7 +10416,7 @@
         <p:spPr>
           <a:xfrm>
             <a:off x="640080" y="329184"/>
-            <a:ext cx="5303520" cy="182880"/>
+            <a:ext cx="9875520" cy="182880"/>
           </a:xfrm>
           <a:prstGeom prst="rect">
             <a:avLst/>
@@ -10883,48 +10457,6 @@
         </p:nvSpPr>
         <p:spPr>
           <a:xfrm>
-            <a:off x="5897880" y="310896"/>
-            <a:ext cx="4800600" cy="256032"/>
-          </a:xfrm>
-          <a:prstGeom prst="rect">
-            <a:avLst/>
-          </a:prstGeom>
-          <a:noFill/>
-        </p:spPr>
-        <p:txBody>
-          <a:bodyPr wrap="none" lIns="9144" rIns="9144" tIns="9144" bIns="9144" anchor="t">
-            <a:spAutoFit/>
-          </a:bodyPr>
-          <a:lstStyle/>
-          <a:p>
-            <a:pPr algn="r">
-              <a:spcAft>
-                <a:spcPts val="0"/>
-              </a:spcAft>
-              <a:defRPr sz="680" b="1">
-                <a:solidFill>
-                  <a:srgbClr val="4F6B00"/>
-                </a:solidFill>
-                <a:latin typeface="Inter"/>
-              </a:defRPr>
-            </a:pPr>
-            <a:r>
-              <a:rPr>
-                <a:latin typeface="Inter"/>
-              </a:rPr>
-              <a:t>Illustrative, Gradient Maintained — demo data, not the client's holdings or managers</a:t>
-            </a:r>
-          </a:p>
-        </p:txBody>
-      </p:sp>
-      <p:sp>
-        <p:nvSpPr>
-          <p:cNvPr id="5" name="TextBox 4"/>
-          <p:cNvSpPr txBox="1"/>
-          <p:nvPr/>
-        </p:nvSpPr>
-        <p:spPr>
-          <a:xfrm>
             <a:off x="640080" y="566928"/>
             <a:ext cx="10058400" cy="530352"/>
           </a:xfrm>
@@ -10961,7 +10493,7 @@
       </p:sp>
       <p:sp>
         <p:nvSpPr>
-          <p:cNvPr id="6" name="Rectangle 5"/>
+          <p:cNvPr id="5" name="Rectangle 4"/>
           <p:cNvSpPr/>
           <p:nvPr/>
         </p:nvSpPr>
@@ -11010,7 +10542,7 @@
       </p:sp>
       <p:sp>
         <p:nvSpPr>
-          <p:cNvPr id="7" name="Rectangle 6"/>
+          <p:cNvPr id="6" name="Rectangle 5"/>
           <p:cNvSpPr/>
           <p:nvPr/>
         </p:nvSpPr>
@@ -11059,7 +10591,7 @@
       </p:sp>
       <p:sp>
         <p:nvSpPr>
-          <p:cNvPr id="8" name="TextBox 7"/>
+          <p:cNvPr id="7" name="TextBox 6"/>
           <p:cNvSpPr txBox="1"/>
           <p:nvPr/>
         </p:nvSpPr>
@@ -11101,7 +10633,7 @@
       </p:sp>
       <p:sp>
         <p:nvSpPr>
-          <p:cNvPr id="9" name="TextBox 8"/>
+          <p:cNvPr id="8" name="TextBox 7"/>
           <p:cNvSpPr txBox="1"/>
           <p:nvPr/>
         </p:nvSpPr>
@@ -11143,7 +10675,7 @@
       </p:sp>
       <p:graphicFrame>
         <p:nvGraphicFramePr>
-          <p:cNvPr id="10" name="Chart 9"/>
+          <p:cNvPr id="9" name="Chart 8"/>
           <p:cNvGraphicFramePr>
             <a:graphicFrameLocks noGrp="1"/>
           </p:cNvGraphicFramePr>
@@ -11161,7 +10693,7 @@
       </p:graphicFrame>
       <p:sp>
         <p:nvSpPr>
-          <p:cNvPr id="11" name="Rectangle 10"/>
+          <p:cNvPr id="10" name="Rectangle 9"/>
           <p:cNvSpPr/>
           <p:nvPr/>
         </p:nvSpPr>
@@ -11210,7 +10742,7 @@
       </p:sp>
       <p:sp>
         <p:nvSpPr>
-          <p:cNvPr id="12" name="TextBox 11"/>
+          <p:cNvPr id="11" name="TextBox 10"/>
           <p:cNvSpPr txBox="1"/>
           <p:nvPr/>
         </p:nvSpPr>
@@ -11252,7 +10784,7 @@
       </p:sp>
       <p:sp>
         <p:nvSpPr>
-          <p:cNvPr id="13" name="TextBox 12"/>
+          <p:cNvPr id="12" name="TextBox 11"/>
           <p:cNvSpPr txBox="1"/>
           <p:nvPr/>
         </p:nvSpPr>
@@ -11294,7 +10826,7 @@
       </p:sp>
       <p:sp>
         <p:nvSpPr>
-          <p:cNvPr id="14" name="TextBox 13"/>
+          <p:cNvPr id="13" name="TextBox 12"/>
           <p:cNvSpPr txBox="1"/>
           <p:nvPr/>
         </p:nvSpPr>
@@ -11410,7 +10942,7 @@
         <p:spPr>
           <a:xfrm>
             <a:off x="640080" y="329184"/>
-            <a:ext cx="5303520" cy="182880"/>
+            <a:ext cx="9875520" cy="182880"/>
           </a:xfrm>
           <a:prstGeom prst="rect">
             <a:avLst/>
@@ -11451,48 +10983,6 @@
         </p:nvSpPr>
         <p:spPr>
           <a:xfrm>
-            <a:off x="5897880" y="310896"/>
-            <a:ext cx="4800600" cy="256032"/>
-          </a:xfrm>
-          <a:prstGeom prst="rect">
-            <a:avLst/>
-          </a:prstGeom>
-          <a:noFill/>
-        </p:spPr>
-        <p:txBody>
-          <a:bodyPr wrap="none" lIns="9144" rIns="9144" tIns="9144" bIns="9144" anchor="t">
-            <a:spAutoFit/>
-          </a:bodyPr>
-          <a:lstStyle/>
-          <a:p>
-            <a:pPr algn="r">
-              <a:spcAft>
-                <a:spcPts val="0"/>
-              </a:spcAft>
-              <a:defRPr sz="680" b="1">
-                <a:solidFill>
-                  <a:srgbClr val="4F6B00"/>
-                </a:solidFill>
-                <a:latin typeface="Inter"/>
-              </a:defRPr>
-            </a:pPr>
-            <a:r>
-              <a:rPr>
-                <a:latin typeface="Inter"/>
-              </a:rPr>
-              <a:t>Illustrative, Gradient Maintained — demo data, not the client's holdings or managers</a:t>
-            </a:r>
-          </a:p>
-        </p:txBody>
-      </p:sp>
-      <p:sp>
-        <p:nvSpPr>
-          <p:cNvPr id="5" name="TextBox 4"/>
-          <p:cNvSpPr txBox="1"/>
-          <p:nvPr/>
-        </p:nvSpPr>
-        <p:spPr>
-          <a:xfrm>
             <a:off x="640080" y="566928"/>
             <a:ext cx="10058400" cy="530352"/>
           </a:xfrm>
@@ -11529,7 +11019,7 @@
       </p:sp>
       <p:sp>
         <p:nvSpPr>
-          <p:cNvPr id="6" name="Rectangle 5"/>
+          <p:cNvPr id="5" name="Rectangle 4"/>
           <p:cNvSpPr/>
           <p:nvPr/>
         </p:nvSpPr>
@@ -11578,7 +11068,7 @@
       </p:sp>
       <p:sp>
         <p:nvSpPr>
-          <p:cNvPr id="7" name="Rectangle 6"/>
+          <p:cNvPr id="6" name="Rectangle 5"/>
           <p:cNvSpPr/>
           <p:nvPr/>
         </p:nvSpPr>
@@ -11627,7 +11117,7 @@
       </p:sp>
       <p:sp>
         <p:nvSpPr>
-          <p:cNvPr id="8" name="TextBox 7"/>
+          <p:cNvPr id="7" name="TextBox 6"/>
           <p:cNvSpPr txBox="1"/>
           <p:nvPr/>
         </p:nvSpPr>
@@ -11669,7 +11159,7 @@
       </p:sp>
       <p:sp>
         <p:nvSpPr>
-          <p:cNvPr id="9" name="TextBox 8"/>
+          <p:cNvPr id="8" name="TextBox 7"/>
           <p:cNvSpPr txBox="1"/>
           <p:nvPr/>
         </p:nvSpPr>
@@ -11711,7 +11201,7 @@
       </p:sp>
       <p:graphicFrame>
         <p:nvGraphicFramePr>
-          <p:cNvPr id="10" name="Table 9"/>
+          <p:cNvPr id="9" name="Table 8"/>
           <p:cNvGraphicFramePr>
             <a:graphicFrameLocks noGrp="1"/>
           </p:cNvGraphicFramePr>
@@ -11970,7 +11460,7 @@
                         <a:rPr>
                           <a:latin typeface="Inter"/>
                         </a:rPr>
-                        <a:t>● Watch</a:t>
+                        <a:t>● Near limit</a:t>
                       </a:r>
                     </a:p>
                   </a:txBody>
@@ -12107,7 +11597,7 @@
                         <a:rPr>
                           <a:latin typeface="Inter"/>
                         </a:rPr>
-                        <a:t>● Watch</a:t>
+                        <a:t>● Near limit</a:t>
                       </a:r>
                     </a:p>
                   </a:txBody>
@@ -12244,7 +11734,7 @@
                         <a:rPr>
                           <a:latin typeface="Inter"/>
                         </a:rPr>
-                        <a:t>● not assessed</a:t>
+                        <a:t>● Not assessed</a:t>
                       </a:r>
                     </a:p>
                   </a:txBody>
@@ -12288,7 +11778,7 @@
       </p:graphicFrame>
       <p:sp>
         <p:nvSpPr>
-          <p:cNvPr id="11" name="Rectangle 10"/>
+          <p:cNvPr id="10" name="Rectangle 9"/>
           <p:cNvSpPr/>
           <p:nvPr/>
         </p:nvSpPr>
@@ -12337,7 +11827,7 @@
       </p:sp>
       <p:sp>
         <p:nvSpPr>
-          <p:cNvPr id="12" name="Rectangle 11"/>
+          <p:cNvPr id="11" name="Rectangle 10"/>
           <p:cNvSpPr/>
           <p:nvPr/>
         </p:nvSpPr>
@@ -12386,7 +11876,7 @@
       </p:sp>
       <p:sp>
         <p:nvSpPr>
-          <p:cNvPr id="13" name="TextBox 12"/>
+          <p:cNvPr id="12" name="TextBox 11"/>
           <p:cNvSpPr txBox="1"/>
           <p:nvPr/>
         </p:nvSpPr>
@@ -12428,7 +11918,7 @@
       </p:sp>
       <p:sp>
         <p:nvSpPr>
-          <p:cNvPr id="14" name="TextBox 13"/>
+          <p:cNvPr id="13" name="TextBox 12"/>
           <p:cNvSpPr txBox="1"/>
           <p:nvPr/>
         </p:nvSpPr>
@@ -12470,7 +11960,7 @@
       </p:sp>
       <p:sp>
         <p:nvSpPr>
-          <p:cNvPr id="15" name="Rectangle 14"/>
+          <p:cNvPr id="14" name="Rectangle 13"/>
           <p:cNvSpPr/>
           <p:nvPr/>
         </p:nvSpPr>
@@ -12519,7 +12009,7 @@
       </p:sp>
       <p:sp>
         <p:nvSpPr>
-          <p:cNvPr id="16" name="Rectangle 15"/>
+          <p:cNvPr id="15" name="Rectangle 14"/>
           <p:cNvSpPr/>
           <p:nvPr/>
         </p:nvSpPr>
@@ -12568,7 +12058,7 @@
       </p:sp>
       <p:sp>
         <p:nvSpPr>
-          <p:cNvPr id="17" name="TextBox 16"/>
+          <p:cNvPr id="16" name="TextBox 15"/>
           <p:cNvSpPr txBox="1"/>
           <p:nvPr/>
         </p:nvSpPr>
@@ -12610,7 +12100,7 @@
       </p:sp>
       <p:sp>
         <p:nvSpPr>
-          <p:cNvPr id="18" name="TextBox 17"/>
+          <p:cNvPr id="17" name="TextBox 16"/>
           <p:cNvSpPr txBox="1"/>
           <p:nvPr/>
         </p:nvSpPr>
@@ -12652,7 +12142,7 @@
       </p:sp>
       <p:sp>
         <p:nvSpPr>
-          <p:cNvPr id="19" name="Rectangle 18"/>
+          <p:cNvPr id="18" name="Rectangle 17"/>
           <p:cNvSpPr/>
           <p:nvPr/>
         </p:nvSpPr>
@@ -12701,7 +12191,7 @@
       </p:sp>
       <p:sp>
         <p:nvSpPr>
-          <p:cNvPr id="20" name="TextBox 19"/>
+          <p:cNvPr id="19" name="TextBox 18"/>
           <p:cNvSpPr txBox="1"/>
           <p:nvPr/>
         </p:nvSpPr>
@@ -12743,7 +12233,7 @@
       </p:sp>
       <p:sp>
         <p:nvSpPr>
-          <p:cNvPr id="21" name="TextBox 20"/>
+          <p:cNvPr id="20" name="TextBox 19"/>
           <p:cNvSpPr txBox="1"/>
           <p:nvPr/>
         </p:nvSpPr>
@@ -12785,7 +12275,7 @@
       </p:sp>
       <p:sp>
         <p:nvSpPr>
-          <p:cNvPr id="22" name="TextBox 21"/>
+          <p:cNvPr id="21" name="TextBox 20"/>
           <p:cNvSpPr txBox="1"/>
           <p:nvPr/>
         </p:nvSpPr>
@@ -12901,7 +12391,7 @@
         <p:spPr>
           <a:xfrm>
             <a:off x="640080" y="329184"/>
-            <a:ext cx="5303520" cy="182880"/>
+            <a:ext cx="9875520" cy="182880"/>
           </a:xfrm>
           <a:prstGeom prst="rect">
             <a:avLst/>
@@ -12942,48 +12432,6 @@
         </p:nvSpPr>
         <p:spPr>
           <a:xfrm>
-            <a:off x="5897880" y="310896"/>
-            <a:ext cx="4800600" cy="256032"/>
-          </a:xfrm>
-          <a:prstGeom prst="rect">
-            <a:avLst/>
-          </a:prstGeom>
-          <a:noFill/>
-        </p:spPr>
-        <p:txBody>
-          <a:bodyPr wrap="none" lIns="9144" rIns="9144" tIns="9144" bIns="9144" anchor="t">
-            <a:spAutoFit/>
-          </a:bodyPr>
-          <a:lstStyle/>
-          <a:p>
-            <a:pPr algn="r">
-              <a:spcAft>
-                <a:spcPts val="0"/>
-              </a:spcAft>
-              <a:defRPr sz="680" b="1">
-                <a:solidFill>
-                  <a:srgbClr val="4F6B00"/>
-                </a:solidFill>
-                <a:latin typeface="Inter"/>
-              </a:defRPr>
-            </a:pPr>
-            <a:r>
-              <a:rPr>
-                <a:latin typeface="Inter"/>
-              </a:rPr>
-              <a:t>Illustrative, Gradient Maintained — demo data, not the client's holdings or managers</a:t>
-            </a:r>
-          </a:p>
-        </p:txBody>
-      </p:sp>
-      <p:sp>
-        <p:nvSpPr>
-          <p:cNvPr id="5" name="TextBox 4"/>
-          <p:cNvSpPr txBox="1"/>
-          <p:nvPr/>
-        </p:nvSpPr>
-        <p:spPr>
-          <a:xfrm>
             <a:off x="640080" y="566928"/>
             <a:ext cx="10058400" cy="530352"/>
           </a:xfrm>
@@ -13020,7 +12468,7 @@
       </p:sp>
       <p:sp>
         <p:nvSpPr>
-          <p:cNvPr id="6" name="Rectangle 5"/>
+          <p:cNvPr id="5" name="Rectangle 4"/>
           <p:cNvSpPr/>
           <p:nvPr/>
         </p:nvSpPr>
@@ -13069,7 +12517,7 @@
       </p:sp>
       <p:sp>
         <p:nvSpPr>
-          <p:cNvPr id="7" name="Rectangle 6"/>
+          <p:cNvPr id="6" name="Rectangle 5"/>
           <p:cNvSpPr/>
           <p:nvPr/>
         </p:nvSpPr>
@@ -13118,7 +12566,7 @@
       </p:sp>
       <p:sp>
         <p:nvSpPr>
-          <p:cNvPr id="8" name="TextBox 7"/>
+          <p:cNvPr id="7" name="TextBox 6"/>
           <p:cNvSpPr txBox="1"/>
           <p:nvPr/>
         </p:nvSpPr>
@@ -13160,7 +12608,7 @@
       </p:sp>
       <p:sp>
         <p:nvSpPr>
-          <p:cNvPr id="9" name="TextBox 8"/>
+          <p:cNvPr id="8" name="TextBox 7"/>
           <p:cNvSpPr txBox="1"/>
           <p:nvPr/>
         </p:nvSpPr>
@@ -13202,7 +12650,7 @@
       </p:sp>
       <p:graphicFrame>
         <p:nvGraphicFramePr>
-          <p:cNvPr id="10" name="Chart 9"/>
+          <p:cNvPr id="9" name="Chart 8"/>
           <p:cNvGraphicFramePr>
             <a:graphicFrameLocks noGrp="1"/>
           </p:cNvGraphicFramePr>
@@ -13220,7 +12668,7 @@
       </p:graphicFrame>
       <p:sp>
         <p:nvSpPr>
-          <p:cNvPr id="11" name="Rectangle 10"/>
+          <p:cNvPr id="10" name="Rectangle 9"/>
           <p:cNvSpPr/>
           <p:nvPr/>
         </p:nvSpPr>
@@ -13269,7 +12717,7 @@
       </p:sp>
       <p:sp>
         <p:nvSpPr>
-          <p:cNvPr id="12" name="TextBox 11"/>
+          <p:cNvPr id="11" name="TextBox 10"/>
           <p:cNvSpPr txBox="1"/>
           <p:nvPr/>
         </p:nvSpPr>
@@ -13311,7 +12759,7 @@
       </p:sp>
       <p:sp>
         <p:nvSpPr>
-          <p:cNvPr id="13" name="TextBox 12"/>
+          <p:cNvPr id="12" name="TextBox 11"/>
           <p:cNvSpPr txBox="1"/>
           <p:nvPr/>
         </p:nvSpPr>
@@ -13353,7 +12801,7 @@
       </p:sp>
       <p:sp>
         <p:nvSpPr>
-          <p:cNvPr id="14" name="TextBox 13"/>
+          <p:cNvPr id="13" name="TextBox 12"/>
           <p:cNvSpPr txBox="1"/>
           <p:nvPr/>
         </p:nvSpPr>
@@ -13469,7 +12917,7 @@
         <p:spPr>
           <a:xfrm>
             <a:off x="640080" y="329184"/>
-            <a:ext cx="5303520" cy="182880"/>
+            <a:ext cx="9875520" cy="182880"/>
           </a:xfrm>
           <a:prstGeom prst="rect">
             <a:avLst/>
@@ -13510,48 +12958,6 @@
         </p:nvSpPr>
         <p:spPr>
           <a:xfrm>
-            <a:off x="5897880" y="310896"/>
-            <a:ext cx="4800600" cy="256032"/>
-          </a:xfrm>
-          <a:prstGeom prst="rect">
-            <a:avLst/>
-          </a:prstGeom>
-          <a:noFill/>
-        </p:spPr>
-        <p:txBody>
-          <a:bodyPr wrap="none" lIns="9144" rIns="9144" tIns="9144" bIns="9144" anchor="t">
-            <a:spAutoFit/>
-          </a:bodyPr>
-          <a:lstStyle/>
-          <a:p>
-            <a:pPr algn="r">
-              <a:spcAft>
-                <a:spcPts val="0"/>
-              </a:spcAft>
-              <a:defRPr sz="680" b="1">
-                <a:solidFill>
-                  <a:srgbClr val="4F6B00"/>
-                </a:solidFill>
-                <a:latin typeface="Inter"/>
-              </a:defRPr>
-            </a:pPr>
-            <a:r>
-              <a:rPr>
-                <a:latin typeface="Inter"/>
-              </a:rPr>
-              <a:t>Illustrative, Gradient Maintained — demo data, not the client's holdings or managers</a:t>
-            </a:r>
-          </a:p>
-        </p:txBody>
-      </p:sp>
-      <p:sp>
-        <p:nvSpPr>
-          <p:cNvPr id="5" name="TextBox 4"/>
-          <p:cNvSpPr txBox="1"/>
-          <p:nvPr/>
-        </p:nvSpPr>
-        <p:spPr>
-          <a:xfrm>
             <a:off x="640080" y="566928"/>
             <a:ext cx="10058400" cy="530352"/>
           </a:xfrm>
@@ -13588,7 +12994,7 @@
       </p:sp>
       <p:sp>
         <p:nvSpPr>
-          <p:cNvPr id="6" name="Rectangle 5"/>
+          <p:cNvPr id="5" name="Rectangle 4"/>
           <p:cNvSpPr/>
           <p:nvPr/>
         </p:nvSpPr>
@@ -13637,7 +13043,7 @@
       </p:sp>
       <p:sp>
         <p:nvSpPr>
-          <p:cNvPr id="7" name="Rectangle 6"/>
+          <p:cNvPr id="6" name="Rectangle 5"/>
           <p:cNvSpPr/>
           <p:nvPr/>
         </p:nvSpPr>
@@ -13686,7 +13092,7 @@
       </p:sp>
       <p:sp>
         <p:nvSpPr>
-          <p:cNvPr id="8" name="TextBox 7"/>
+          <p:cNvPr id="7" name="TextBox 6"/>
           <p:cNvSpPr txBox="1"/>
           <p:nvPr/>
         </p:nvSpPr>
@@ -13728,7 +13134,7 @@
       </p:sp>
       <p:graphicFrame>
         <p:nvGraphicFramePr>
-          <p:cNvPr id="9" name="Table 8"/>
+          <p:cNvPr id="8" name="Table 7"/>
           <p:cNvGraphicFramePr>
             <a:graphicFrameLocks noGrp="1"/>
           </p:cNvGraphicFramePr>
@@ -14034,7 +13440,7 @@
       </p:graphicFrame>
       <p:sp>
         <p:nvSpPr>
-          <p:cNvPr id="10" name="Rectangle 9"/>
+          <p:cNvPr id="9" name="Rectangle 8"/>
           <p:cNvSpPr/>
           <p:nvPr/>
         </p:nvSpPr>
@@ -14083,7 +13489,7 @@
       </p:sp>
       <p:sp>
         <p:nvSpPr>
-          <p:cNvPr id="11" name="TextBox 10"/>
+          <p:cNvPr id="10" name="TextBox 9"/>
           <p:cNvSpPr txBox="1"/>
           <p:nvPr/>
         </p:nvSpPr>
@@ -14125,7 +13531,7 @@
       </p:sp>
       <p:sp>
         <p:nvSpPr>
-          <p:cNvPr id="12" name="TextBox 11"/>
+          <p:cNvPr id="11" name="TextBox 10"/>
           <p:cNvSpPr txBox="1"/>
           <p:nvPr/>
         </p:nvSpPr>
@@ -14167,7 +13573,7 @@
       </p:sp>
       <p:sp>
         <p:nvSpPr>
-          <p:cNvPr id="13" name="TextBox 12"/>
+          <p:cNvPr id="12" name="TextBox 11"/>
           <p:cNvSpPr txBox="1"/>
           <p:nvPr/>
         </p:nvSpPr>
@@ -14283,7 +13689,7 @@
         <p:spPr>
           <a:xfrm>
             <a:off x="640080" y="329184"/>
-            <a:ext cx="5303520" cy="182880"/>
+            <a:ext cx="9875520" cy="182880"/>
           </a:xfrm>
           <a:prstGeom prst="rect">
             <a:avLst/>
@@ -14324,48 +13730,6 @@
         </p:nvSpPr>
         <p:spPr>
           <a:xfrm>
-            <a:off x="5897880" y="310896"/>
-            <a:ext cx="4800600" cy="256032"/>
-          </a:xfrm>
-          <a:prstGeom prst="rect">
-            <a:avLst/>
-          </a:prstGeom>
-          <a:noFill/>
-        </p:spPr>
-        <p:txBody>
-          <a:bodyPr wrap="none" lIns="9144" rIns="9144" tIns="9144" bIns="9144" anchor="t">
-            <a:spAutoFit/>
-          </a:bodyPr>
-          <a:lstStyle/>
-          <a:p>
-            <a:pPr algn="r">
-              <a:spcAft>
-                <a:spcPts val="0"/>
-              </a:spcAft>
-              <a:defRPr sz="680" b="1">
-                <a:solidFill>
-                  <a:srgbClr val="4F6B00"/>
-                </a:solidFill>
-                <a:latin typeface="Inter"/>
-              </a:defRPr>
-            </a:pPr>
-            <a:r>
-              <a:rPr>
-                <a:latin typeface="Inter"/>
-              </a:rPr>
-              <a:t>Illustrative, Gradient Maintained — demo data, not the client's holdings or managers</a:t>
-            </a:r>
-          </a:p>
-        </p:txBody>
-      </p:sp>
-      <p:sp>
-        <p:nvSpPr>
-          <p:cNvPr id="5" name="TextBox 4"/>
-          <p:cNvSpPr txBox="1"/>
-          <p:nvPr/>
-        </p:nvSpPr>
-        <p:spPr>
-          <a:xfrm>
             <a:off x="640080" y="566928"/>
             <a:ext cx="10058400" cy="530352"/>
           </a:xfrm>
@@ -14402,7 +13766,7 @@
       </p:sp>
       <p:sp>
         <p:nvSpPr>
-          <p:cNvPr id="6" name="Rectangle 5"/>
+          <p:cNvPr id="5" name="Rectangle 4"/>
           <p:cNvSpPr/>
           <p:nvPr/>
         </p:nvSpPr>
@@ -14451,7 +13815,7 @@
       </p:sp>
       <p:sp>
         <p:nvSpPr>
-          <p:cNvPr id="7" name="Rectangle 6"/>
+          <p:cNvPr id="6" name="Rectangle 5"/>
           <p:cNvSpPr/>
           <p:nvPr/>
         </p:nvSpPr>
@@ -14500,7 +13864,7 @@
       </p:sp>
       <p:sp>
         <p:nvSpPr>
-          <p:cNvPr id="8" name="TextBox 7"/>
+          <p:cNvPr id="7" name="TextBox 6"/>
           <p:cNvSpPr txBox="1"/>
           <p:nvPr/>
         </p:nvSpPr>
@@ -14542,7 +13906,7 @@
       </p:sp>
       <p:sp>
         <p:nvSpPr>
-          <p:cNvPr id="9" name="TextBox 8"/>
+          <p:cNvPr id="8" name="TextBox 7"/>
           <p:cNvSpPr txBox="1"/>
           <p:nvPr/>
         </p:nvSpPr>
@@ -14584,7 +13948,7 @@
       </p:sp>
       <p:graphicFrame>
         <p:nvGraphicFramePr>
-          <p:cNvPr id="10" name="Table 9"/>
+          <p:cNvPr id="9" name="Table 8"/>
           <p:cNvGraphicFramePr>
             <a:graphicFrameLocks noGrp="1"/>
           </p:cNvGraphicFramePr>
@@ -14943,7 +14307,7 @@
       </p:graphicFrame>
       <p:sp>
         <p:nvSpPr>
-          <p:cNvPr id="11" name="Rectangle 10"/>
+          <p:cNvPr id="10" name="Rectangle 9"/>
           <p:cNvSpPr/>
           <p:nvPr/>
         </p:nvSpPr>
@@ -14992,7 +14356,7 @@
       </p:sp>
       <p:sp>
         <p:nvSpPr>
-          <p:cNvPr id="12" name="Rectangle 11"/>
+          <p:cNvPr id="11" name="Rectangle 10"/>
           <p:cNvSpPr/>
           <p:nvPr/>
         </p:nvSpPr>
@@ -15041,7 +14405,7 @@
       </p:sp>
       <p:sp>
         <p:nvSpPr>
-          <p:cNvPr id="13" name="TextBox 12"/>
+          <p:cNvPr id="12" name="TextBox 11"/>
           <p:cNvSpPr txBox="1"/>
           <p:nvPr/>
         </p:nvSpPr>
@@ -15083,7 +14447,7 @@
       </p:sp>
       <p:sp>
         <p:nvSpPr>
-          <p:cNvPr id="14" name="TextBox 13"/>
+          <p:cNvPr id="13" name="TextBox 12"/>
           <p:cNvSpPr txBox="1"/>
           <p:nvPr/>
         </p:nvSpPr>
@@ -15125,7 +14489,7 @@
       </p:sp>
       <p:sp>
         <p:nvSpPr>
-          <p:cNvPr id="15" name="TextBox 14"/>
+          <p:cNvPr id="14" name="TextBox 13"/>
           <p:cNvSpPr txBox="1"/>
           <p:nvPr/>
         </p:nvSpPr>
@@ -15167,7 +14531,7 @@
       </p:sp>
       <p:sp>
         <p:nvSpPr>
-          <p:cNvPr id="16" name="Rectangle 15"/>
+          <p:cNvPr id="15" name="Rectangle 14"/>
           <p:cNvSpPr/>
           <p:nvPr/>
         </p:nvSpPr>
@@ -15216,7 +14580,7 @@
       </p:sp>
       <p:sp>
         <p:nvSpPr>
-          <p:cNvPr id="17" name="TextBox 16"/>
+          <p:cNvPr id="16" name="TextBox 15"/>
           <p:cNvSpPr txBox="1"/>
           <p:nvPr/>
         </p:nvSpPr>
@@ -15258,7 +14622,7 @@
       </p:sp>
       <p:sp>
         <p:nvSpPr>
-          <p:cNvPr id="18" name="TextBox 17"/>
+          <p:cNvPr id="17" name="TextBox 16"/>
           <p:cNvSpPr txBox="1"/>
           <p:nvPr/>
         </p:nvSpPr>
@@ -15300,7 +14664,7 @@
       </p:sp>
       <p:sp>
         <p:nvSpPr>
-          <p:cNvPr id="19" name="TextBox 18"/>
+          <p:cNvPr id="18" name="TextBox 17"/>
           <p:cNvSpPr txBox="1"/>
           <p:nvPr/>
         </p:nvSpPr>
@@ -15415,48 +14779,6 @@
         </p:nvSpPr>
         <p:spPr>
           <a:xfrm>
-            <a:off x="5897880" y="310896"/>
-            <a:ext cx="4800600" cy="256032"/>
-          </a:xfrm>
-          <a:prstGeom prst="rect">
-            <a:avLst/>
-          </a:prstGeom>
-          <a:noFill/>
-        </p:spPr>
-        <p:txBody>
-          <a:bodyPr wrap="none" lIns="9144" rIns="9144" tIns="9144" bIns="9144" anchor="t">
-            <a:spAutoFit/>
-          </a:bodyPr>
-          <a:lstStyle/>
-          <a:p>
-            <a:pPr algn="r">
-              <a:spcAft>
-                <a:spcPts val="0"/>
-              </a:spcAft>
-              <a:defRPr sz="680" b="1">
-                <a:solidFill>
-                  <a:srgbClr val="4F6B00"/>
-                </a:solidFill>
-                <a:latin typeface="Inter"/>
-              </a:defRPr>
-            </a:pPr>
-            <a:r>
-              <a:rPr>
-                <a:latin typeface="Inter"/>
-              </a:rPr>
-              <a:t>Illustrative, Gradient Maintained — demo data, not the client's holdings or managers</a:t>
-            </a:r>
-          </a:p>
-        </p:txBody>
-      </p:sp>
-      <p:sp>
-        <p:nvSpPr>
-          <p:cNvPr id="4" name="TextBox 3"/>
-          <p:cNvSpPr txBox="1"/>
-          <p:nvPr/>
-        </p:nvSpPr>
-        <p:spPr>
-          <a:xfrm>
             <a:off x="640080" y="566928"/>
             <a:ext cx="10058400" cy="530352"/>
           </a:xfrm>
@@ -15493,7 +14815,7 @@
       </p:sp>
       <p:sp>
         <p:nvSpPr>
-          <p:cNvPr id="5" name="Rectangle 4"/>
+          <p:cNvPr id="4" name="Rectangle 3"/>
           <p:cNvSpPr/>
           <p:nvPr/>
         </p:nvSpPr>
@@ -15542,7 +14864,7 @@
       </p:sp>
       <p:sp>
         <p:nvSpPr>
-          <p:cNvPr id="6" name="Rectangle 5"/>
+          <p:cNvPr id="5" name="Rectangle 4"/>
           <p:cNvSpPr/>
           <p:nvPr/>
         </p:nvSpPr>
@@ -15591,7 +14913,7 @@
       </p:sp>
       <p:sp>
         <p:nvSpPr>
-          <p:cNvPr id="7" name="TextBox 6"/>
+          <p:cNvPr id="6" name="TextBox 5"/>
           <p:cNvSpPr txBox="1"/>
           <p:nvPr/>
         </p:nvSpPr>
@@ -15633,14 +14955,105 @@
       </p:sp>
       <p:sp>
         <p:nvSpPr>
-          <p:cNvPr id="8" name="Rectangle 7"/>
+          <p:cNvPr id="7" name="Rectangle 6"/>
           <p:cNvSpPr/>
           <p:nvPr/>
         </p:nvSpPr>
         <p:spPr>
           <a:xfrm>
-            <a:off x="640080" y="1325880"/>
-            <a:ext cx="10908792" cy="2263980"/>
+            <a:off x="640080" y="1399032"/>
+            <a:ext cx="73152" cy="1031503"/>
+          </a:xfrm>
+          <a:prstGeom prst="rect">
+            <a:avLst/>
+          </a:prstGeom>
+          <a:solidFill>
+            <a:srgbClr val="F2A93B"/>
+          </a:solidFill>
+          <a:ln>
+            <a:solidFill>
+              <a:srgbClr val="F2A93B"/>
+            </a:solidFill>
+          </a:ln>
+        </p:spPr>
+        <p:style>
+          <a:lnRef idx="1">
+            <a:schemeClr val="accent1"/>
+          </a:lnRef>
+          <a:fillRef idx="3">
+            <a:schemeClr val="accent1"/>
+          </a:fillRef>
+          <a:effectRef idx="2">
+            <a:schemeClr val="accent1"/>
+          </a:effectRef>
+          <a:fontRef idx="minor">
+            <a:schemeClr val="lt1"/>
+          </a:fontRef>
+        </p:style>
+        <p:txBody>
+          <a:bodyPr rtlCol="0" anchor="ctr"/>
+          <a:lstStyle/>
+          <a:p>
+            <a:pPr algn="ctr">
+              <a:defRPr>
+                <a:latin typeface="Inter"/>
+              </a:defRPr>
+            </a:pPr>
+          </a:p>
+        </p:txBody>
+      </p:sp>
+      <p:sp>
+        <p:nvSpPr>
+          <p:cNvPr id="8" name="TextBox 7"/>
+          <p:cNvSpPr txBox="1"/>
+          <p:nvPr/>
+        </p:nvSpPr>
+        <p:spPr>
+          <a:xfrm>
+            <a:off x="896112" y="1371600"/>
+            <a:ext cx="10588752" cy="683128"/>
+          </a:xfrm>
+          <a:prstGeom prst="rect">
+            <a:avLst/>
+          </a:prstGeom>
+          <a:noFill/>
+        </p:spPr>
+        <p:txBody>
+          <a:bodyPr wrap="none" lIns="9144" rIns="9144" tIns="9144" bIns="9144" anchor="t">
+            <a:spAutoFit/>
+          </a:bodyPr>
+          <a:lstStyle/>
+          <a:p>
+            <a:pPr algn="l">
+              <a:spcAft>
+                <a:spcPts val="0"/>
+              </a:spcAft>
+              <a:defRPr sz="1800" b="1">
+                <a:solidFill>
+                  <a:srgbClr val="0D1117"/>
+                </a:solidFill>
+                <a:latin typeface="Inter"/>
+              </a:defRPr>
+            </a:pPr>
+            <a:r>
+              <a:rPr>
+                <a:latin typeface="Inter"/>
+              </a:rPr>
+              <a:t>Manager and issuer concentration near limits</a:t>
+            </a:r>
+          </a:p>
+        </p:txBody>
+      </p:sp>
+      <p:sp>
+        <p:nvSpPr>
+          <p:cNvPr id="9" name="Rectangle 8"/>
+          <p:cNvSpPr/>
+          <p:nvPr/>
+        </p:nvSpPr>
+        <p:spPr>
+          <a:xfrm>
+            <a:off x="640080" y="2613415"/>
+            <a:ext cx="10908792" cy="1654451"/>
           </a:xfrm>
           <a:prstGeom prst="rect">
             <a:avLst/>
@@ -15682,14 +15095,14 @@
       </p:sp>
       <p:sp>
         <p:nvSpPr>
-          <p:cNvPr id="9" name="Rectangle 8"/>
+          <p:cNvPr id="10" name="Rectangle 9"/>
           <p:cNvSpPr/>
           <p:nvPr/>
         </p:nvSpPr>
         <p:spPr>
           <a:xfrm>
-            <a:off x="640080" y="1325880"/>
-            <a:ext cx="54864" cy="2263980"/>
+            <a:off x="640080" y="2613415"/>
+            <a:ext cx="54864" cy="1654451"/>
           </a:xfrm>
           <a:prstGeom prst="rect">
             <a:avLst/>
@@ -15731,13 +15144,13 @@
       </p:sp>
       <p:sp>
         <p:nvSpPr>
-          <p:cNvPr id="10" name="TextBox 9"/>
+          <p:cNvPr id="11" name="TextBox 10"/>
           <p:cNvSpPr txBox="1"/>
           <p:nvPr/>
         </p:nvSpPr>
         <p:spPr>
           <a:xfrm>
-            <a:off x="804671" y="1435607"/>
+            <a:off x="804671" y="2723143"/>
             <a:ext cx="10616184" cy="228600"/>
           </a:xfrm>
           <a:prstGeom prst="rect">
@@ -15773,14 +15186,14 @@
       </p:sp>
       <p:sp>
         <p:nvSpPr>
-          <p:cNvPr id="11" name="TextBox 10"/>
+          <p:cNvPr id="12" name="TextBox 11"/>
           <p:cNvSpPr txBox="1"/>
           <p:nvPr/>
         </p:nvSpPr>
         <p:spPr>
           <a:xfrm>
-            <a:off x="804671" y="1719072"/>
-            <a:ext cx="10616184" cy="1779348"/>
+            <a:off x="804671" y="3006607"/>
+            <a:ext cx="10616184" cy="1169819"/>
           </a:xfrm>
           <a:prstGeom prst="rect">
             <a:avLst/>
@@ -15815,14 +15228,14 @@
       </p:sp>
       <p:sp>
         <p:nvSpPr>
-          <p:cNvPr id="12" name="Rectangle 11"/>
+          <p:cNvPr id="13" name="Rectangle 12"/>
           <p:cNvSpPr/>
           <p:nvPr/>
         </p:nvSpPr>
         <p:spPr>
           <a:xfrm>
-            <a:off x="640080" y="3699588"/>
-            <a:ext cx="2644902" cy="2518331"/>
+            <a:off x="640080" y="4377595"/>
+            <a:ext cx="2644902" cy="1840324"/>
           </a:xfrm>
           <a:prstGeom prst="rect">
             <a:avLst/>
@@ -15864,13 +15277,13 @@
       </p:sp>
       <p:sp>
         <p:nvSpPr>
-          <p:cNvPr id="13" name="Rectangle 12"/>
+          <p:cNvPr id="14" name="Rectangle 13"/>
           <p:cNvSpPr/>
           <p:nvPr/>
         </p:nvSpPr>
         <p:spPr>
           <a:xfrm>
-            <a:off x="640080" y="3699588"/>
+            <a:off x="640080" y="4377595"/>
             <a:ext cx="2644902" cy="45720"/>
           </a:xfrm>
           <a:prstGeom prst="rect">
@@ -15913,13 +15326,13 @@
       </p:sp>
       <p:sp>
         <p:nvSpPr>
-          <p:cNvPr id="14" name="TextBox 13"/>
+          <p:cNvPr id="15" name="TextBox 14"/>
           <p:cNvSpPr txBox="1"/>
           <p:nvPr/>
         </p:nvSpPr>
         <p:spPr>
           <a:xfrm>
-            <a:off x="749808" y="3827604"/>
+            <a:off x="749808" y="4505611"/>
             <a:ext cx="2425446" cy="201168"/>
           </a:xfrm>
           <a:prstGeom prst="rect">
@@ -15955,13 +15368,13 @@
       </p:sp>
       <p:sp>
         <p:nvSpPr>
-          <p:cNvPr id="15" name="TextBox 14"/>
+          <p:cNvPr id="16" name="TextBox 15"/>
           <p:cNvSpPr txBox="1"/>
           <p:nvPr/>
         </p:nvSpPr>
         <p:spPr>
           <a:xfrm>
-            <a:off x="749808" y="4083636"/>
+            <a:off x="749808" y="4761643"/>
             <a:ext cx="2425446" cy="475488"/>
           </a:xfrm>
           <a:prstGeom prst="rect">
@@ -15997,13 +15410,13 @@
       </p:sp>
       <p:sp>
         <p:nvSpPr>
-          <p:cNvPr id="16" name="TextBox 15"/>
+          <p:cNvPr id="17" name="TextBox 16"/>
           <p:cNvSpPr txBox="1"/>
           <p:nvPr/>
         </p:nvSpPr>
         <p:spPr>
           <a:xfrm>
-            <a:off x="749808" y="5888736"/>
+            <a:off x="749808" y="5888735"/>
             <a:ext cx="2425446" cy="228600"/>
           </a:xfrm>
           <a:prstGeom prst="rect">
@@ -16039,14 +15452,14 @@
       </p:sp>
       <p:sp>
         <p:nvSpPr>
-          <p:cNvPr id="17" name="Rectangle 16"/>
+          <p:cNvPr id="18" name="Rectangle 17"/>
           <p:cNvSpPr/>
           <p:nvPr/>
         </p:nvSpPr>
         <p:spPr>
           <a:xfrm>
-            <a:off x="3394710" y="3699588"/>
-            <a:ext cx="2644902" cy="2518331"/>
+            <a:off x="3394710" y="4377595"/>
+            <a:ext cx="2644902" cy="1840324"/>
           </a:xfrm>
           <a:prstGeom prst="rect">
             <a:avLst/>
@@ -16088,13 +15501,13 @@
       </p:sp>
       <p:sp>
         <p:nvSpPr>
-          <p:cNvPr id="18" name="Rectangle 17"/>
+          <p:cNvPr id="19" name="Rectangle 18"/>
           <p:cNvSpPr/>
           <p:nvPr/>
         </p:nvSpPr>
         <p:spPr>
           <a:xfrm>
-            <a:off x="3394710" y="3699588"/>
+            <a:off x="3394710" y="4377595"/>
             <a:ext cx="2644902" cy="45720"/>
           </a:xfrm>
           <a:prstGeom prst="rect">
@@ -16137,13 +15550,13 @@
       </p:sp>
       <p:sp>
         <p:nvSpPr>
-          <p:cNvPr id="19" name="TextBox 18"/>
+          <p:cNvPr id="20" name="TextBox 19"/>
           <p:cNvSpPr txBox="1"/>
           <p:nvPr/>
         </p:nvSpPr>
         <p:spPr>
           <a:xfrm>
-            <a:off x="3504438" y="3827604"/>
+            <a:off x="3504438" y="4505611"/>
             <a:ext cx="2425446" cy="201168"/>
           </a:xfrm>
           <a:prstGeom prst="rect">
@@ -16179,13 +15592,13 @@
       </p:sp>
       <p:sp>
         <p:nvSpPr>
-          <p:cNvPr id="20" name="TextBox 19"/>
+          <p:cNvPr id="21" name="TextBox 20"/>
           <p:cNvSpPr txBox="1"/>
           <p:nvPr/>
         </p:nvSpPr>
         <p:spPr>
           <a:xfrm>
-            <a:off x="3504438" y="4083636"/>
+            <a:off x="3504438" y="4761643"/>
             <a:ext cx="2425446" cy="475488"/>
           </a:xfrm>
           <a:prstGeom prst="rect">
@@ -16221,13 +15634,13 @@
       </p:sp>
       <p:sp>
         <p:nvSpPr>
-          <p:cNvPr id="21" name="TextBox 20"/>
+          <p:cNvPr id="22" name="TextBox 21"/>
           <p:cNvSpPr txBox="1"/>
           <p:nvPr/>
         </p:nvSpPr>
         <p:spPr>
           <a:xfrm>
-            <a:off x="3504438" y="5888736"/>
+            <a:off x="3504438" y="5888735"/>
             <a:ext cx="2425446" cy="228600"/>
           </a:xfrm>
           <a:prstGeom prst="rect">
@@ -16263,14 +15676,14 @@
       </p:sp>
       <p:sp>
         <p:nvSpPr>
-          <p:cNvPr id="22" name="Rectangle 21"/>
+          <p:cNvPr id="23" name="Rectangle 22"/>
           <p:cNvSpPr/>
           <p:nvPr/>
         </p:nvSpPr>
         <p:spPr>
           <a:xfrm>
-            <a:off x="6149340" y="3699588"/>
-            <a:ext cx="2644902" cy="2518331"/>
+            <a:off x="6149340" y="4377595"/>
+            <a:ext cx="2644902" cy="1840324"/>
           </a:xfrm>
           <a:prstGeom prst="rect">
             <a:avLst/>
@@ -16312,13 +15725,13 @@
       </p:sp>
       <p:sp>
         <p:nvSpPr>
-          <p:cNvPr id="23" name="Rectangle 22"/>
+          <p:cNvPr id="24" name="Rectangle 23"/>
           <p:cNvSpPr/>
           <p:nvPr/>
         </p:nvSpPr>
         <p:spPr>
           <a:xfrm>
-            <a:off x="6149340" y="3699588"/>
+            <a:off x="6149340" y="4377595"/>
             <a:ext cx="2644902" cy="45720"/>
           </a:xfrm>
           <a:prstGeom prst="rect">
@@ -16361,13 +15774,13 @@
       </p:sp>
       <p:sp>
         <p:nvSpPr>
-          <p:cNvPr id="24" name="TextBox 23"/>
+          <p:cNvPr id="25" name="TextBox 24"/>
           <p:cNvSpPr txBox="1"/>
           <p:nvPr/>
         </p:nvSpPr>
         <p:spPr>
           <a:xfrm>
-            <a:off x="6259068" y="3827604"/>
+            <a:off x="6259068" y="4505611"/>
             <a:ext cx="2425446" cy="201168"/>
           </a:xfrm>
           <a:prstGeom prst="rect">
@@ -16403,13 +15816,13 @@
       </p:sp>
       <p:sp>
         <p:nvSpPr>
-          <p:cNvPr id="25" name="TextBox 24"/>
+          <p:cNvPr id="26" name="TextBox 25"/>
           <p:cNvSpPr txBox="1"/>
           <p:nvPr/>
         </p:nvSpPr>
         <p:spPr>
           <a:xfrm>
-            <a:off x="6259068" y="4083636"/>
+            <a:off x="6259068" y="4761643"/>
             <a:ext cx="2425446" cy="475488"/>
           </a:xfrm>
           <a:prstGeom prst="rect">
@@ -16445,13 +15858,13 @@
       </p:sp>
       <p:sp>
         <p:nvSpPr>
-          <p:cNvPr id="26" name="TextBox 25"/>
+          <p:cNvPr id="27" name="TextBox 26"/>
           <p:cNvSpPr txBox="1"/>
           <p:nvPr/>
         </p:nvSpPr>
         <p:spPr>
           <a:xfrm>
-            <a:off x="6259068" y="5888736"/>
+            <a:off x="6259068" y="5888735"/>
             <a:ext cx="2425446" cy="228600"/>
           </a:xfrm>
           <a:prstGeom prst="rect">
@@ -16487,14 +15900,14 @@
       </p:sp>
       <p:sp>
         <p:nvSpPr>
-          <p:cNvPr id="27" name="Rectangle 26"/>
+          <p:cNvPr id="28" name="Rectangle 27"/>
           <p:cNvSpPr/>
           <p:nvPr/>
         </p:nvSpPr>
         <p:spPr>
           <a:xfrm>
-            <a:off x="8903970" y="3699588"/>
-            <a:ext cx="2644902" cy="2518331"/>
+            <a:off x="8903970" y="4377595"/>
+            <a:ext cx="2644902" cy="1840324"/>
           </a:xfrm>
           <a:prstGeom prst="rect">
             <a:avLst/>
@@ -16536,13 +15949,13 @@
       </p:sp>
       <p:sp>
         <p:nvSpPr>
-          <p:cNvPr id="28" name="Rectangle 27"/>
+          <p:cNvPr id="29" name="Rectangle 28"/>
           <p:cNvSpPr/>
           <p:nvPr/>
         </p:nvSpPr>
         <p:spPr>
           <a:xfrm>
-            <a:off x="8903970" y="3699588"/>
+            <a:off x="8903970" y="4377595"/>
             <a:ext cx="2644902" cy="45720"/>
           </a:xfrm>
           <a:prstGeom prst="rect">
@@ -16585,13 +15998,13 @@
       </p:sp>
       <p:sp>
         <p:nvSpPr>
-          <p:cNvPr id="29" name="TextBox 28"/>
+          <p:cNvPr id="30" name="TextBox 29"/>
           <p:cNvSpPr txBox="1"/>
           <p:nvPr/>
         </p:nvSpPr>
         <p:spPr>
           <a:xfrm>
-            <a:off x="9013698" y="3827604"/>
+            <a:off x="9013698" y="4505611"/>
             <a:ext cx="2425446" cy="201168"/>
           </a:xfrm>
           <a:prstGeom prst="rect">
@@ -16627,13 +16040,13 @@
       </p:sp>
       <p:sp>
         <p:nvSpPr>
-          <p:cNvPr id="30" name="TextBox 29"/>
+          <p:cNvPr id="31" name="TextBox 30"/>
           <p:cNvSpPr txBox="1"/>
           <p:nvPr/>
         </p:nvSpPr>
         <p:spPr>
           <a:xfrm>
-            <a:off x="9013698" y="4083636"/>
+            <a:off x="9013698" y="4761643"/>
             <a:ext cx="2425446" cy="475488"/>
           </a:xfrm>
           <a:prstGeom prst="rect">
@@ -16669,13 +16082,13 @@
       </p:sp>
       <p:sp>
         <p:nvSpPr>
-          <p:cNvPr id="31" name="TextBox 30"/>
+          <p:cNvPr id="32" name="TextBox 31"/>
           <p:cNvSpPr txBox="1"/>
           <p:nvPr/>
         </p:nvSpPr>
         <p:spPr>
           <a:xfrm>
-            <a:off x="9013698" y="5888736"/>
+            <a:off x="9013698" y="5888735"/>
             <a:ext cx="2425446" cy="228600"/>
           </a:xfrm>
           <a:prstGeom prst="rect">
@@ -16711,7 +16124,7 @@
       </p:sp>
       <p:sp>
         <p:nvSpPr>
-          <p:cNvPr id="32" name="Rectangle 31"/>
+          <p:cNvPr id="33" name="Rectangle 32"/>
           <p:cNvSpPr/>
           <p:nvPr/>
         </p:nvSpPr>
@@ -16760,7 +16173,7 @@
       </p:sp>
       <p:sp>
         <p:nvSpPr>
-          <p:cNvPr id="33" name="TextBox 32"/>
+          <p:cNvPr id="34" name="TextBox 33"/>
           <p:cNvSpPr txBox="1"/>
           <p:nvPr/>
         </p:nvSpPr>
@@ -16802,7 +16215,7 @@
       </p:sp>
       <p:sp>
         <p:nvSpPr>
-          <p:cNvPr id="34" name="TextBox 33"/>
+          <p:cNvPr id="35" name="TextBox 34"/>
           <p:cNvSpPr txBox="1"/>
           <p:nvPr/>
         </p:nvSpPr>
@@ -16844,7 +16257,7 @@
       </p:sp>
       <p:sp>
         <p:nvSpPr>
-          <p:cNvPr id="35" name="TextBox 34"/>
+          <p:cNvPr id="36" name="TextBox 35"/>
           <p:cNvSpPr txBox="1"/>
           <p:nvPr/>
         </p:nvSpPr>
@@ -16960,7 +16373,7 @@
         <p:spPr>
           <a:xfrm>
             <a:off x="640080" y="329184"/>
-            <a:ext cx="5303520" cy="182880"/>
+            <a:ext cx="9875520" cy="182880"/>
           </a:xfrm>
           <a:prstGeom prst="rect">
             <a:avLst/>
@@ -17001,48 +16414,6 @@
         </p:nvSpPr>
         <p:spPr>
           <a:xfrm>
-            <a:off x="5897880" y="310896"/>
-            <a:ext cx="4800600" cy="256032"/>
-          </a:xfrm>
-          <a:prstGeom prst="rect">
-            <a:avLst/>
-          </a:prstGeom>
-          <a:noFill/>
-        </p:spPr>
-        <p:txBody>
-          <a:bodyPr wrap="none" lIns="9144" rIns="9144" tIns="9144" bIns="9144" anchor="t">
-            <a:spAutoFit/>
-          </a:bodyPr>
-          <a:lstStyle/>
-          <a:p>
-            <a:pPr algn="r">
-              <a:spcAft>
-                <a:spcPts val="0"/>
-              </a:spcAft>
-              <a:defRPr sz="680" b="1">
-                <a:solidFill>
-                  <a:srgbClr val="4F6B00"/>
-                </a:solidFill>
-                <a:latin typeface="Inter"/>
-              </a:defRPr>
-            </a:pPr>
-            <a:r>
-              <a:rPr>
-                <a:latin typeface="Inter"/>
-              </a:rPr>
-              <a:t>Illustrative, Gradient Maintained — demo data, not the client's holdings or managers</a:t>
-            </a:r>
-          </a:p>
-        </p:txBody>
-      </p:sp>
-      <p:sp>
-        <p:nvSpPr>
-          <p:cNvPr id="5" name="TextBox 4"/>
-          <p:cNvSpPr txBox="1"/>
-          <p:nvPr/>
-        </p:nvSpPr>
-        <p:spPr>
-          <a:xfrm>
             <a:off x="640080" y="566928"/>
             <a:ext cx="10058400" cy="530352"/>
           </a:xfrm>
@@ -17079,7 +16450,7 @@
       </p:sp>
       <p:sp>
         <p:nvSpPr>
-          <p:cNvPr id="6" name="Rectangle 5"/>
+          <p:cNvPr id="5" name="Rectangle 4"/>
           <p:cNvSpPr/>
           <p:nvPr/>
         </p:nvSpPr>
@@ -17128,7 +16499,7 @@
       </p:sp>
       <p:sp>
         <p:nvSpPr>
-          <p:cNvPr id="7" name="Rectangle 6"/>
+          <p:cNvPr id="6" name="Rectangle 5"/>
           <p:cNvSpPr/>
           <p:nvPr/>
         </p:nvSpPr>
@@ -17177,7 +16548,7 @@
       </p:sp>
       <p:sp>
         <p:nvSpPr>
-          <p:cNvPr id="8" name="TextBox 7"/>
+          <p:cNvPr id="7" name="TextBox 6"/>
           <p:cNvSpPr txBox="1"/>
           <p:nvPr/>
         </p:nvSpPr>
@@ -17219,7 +16590,7 @@
       </p:sp>
       <p:sp>
         <p:nvSpPr>
-          <p:cNvPr id="9" name="TextBox 8"/>
+          <p:cNvPr id="8" name="TextBox 7"/>
           <p:cNvSpPr txBox="1"/>
           <p:nvPr/>
         </p:nvSpPr>
@@ -17261,7 +16632,7 @@
       </p:sp>
       <p:graphicFrame>
         <p:nvGraphicFramePr>
-          <p:cNvPr id="10" name="Chart 9"/>
+          <p:cNvPr id="9" name="Chart 8"/>
           <p:cNvGraphicFramePr>
             <a:graphicFrameLocks noGrp="1"/>
           </p:cNvGraphicFramePr>
@@ -17279,7 +16650,7 @@
       </p:graphicFrame>
       <p:sp>
         <p:nvSpPr>
-          <p:cNvPr id="11" name="Rectangle 10"/>
+          <p:cNvPr id="10" name="Rectangle 9"/>
           <p:cNvSpPr/>
           <p:nvPr/>
         </p:nvSpPr>
@@ -17328,7 +16699,7 @@
       </p:sp>
       <p:sp>
         <p:nvSpPr>
-          <p:cNvPr id="12" name="TextBox 11"/>
+          <p:cNvPr id="11" name="TextBox 10"/>
           <p:cNvSpPr txBox="1"/>
           <p:nvPr/>
         </p:nvSpPr>
@@ -17370,7 +16741,7 @@
       </p:sp>
       <p:sp>
         <p:nvSpPr>
-          <p:cNvPr id="13" name="TextBox 12"/>
+          <p:cNvPr id="12" name="TextBox 11"/>
           <p:cNvSpPr txBox="1"/>
           <p:nvPr/>
         </p:nvSpPr>
@@ -17412,7 +16783,7 @@
       </p:sp>
       <p:sp>
         <p:nvSpPr>
-          <p:cNvPr id="14" name="TextBox 13"/>
+          <p:cNvPr id="13" name="TextBox 12"/>
           <p:cNvSpPr txBox="1"/>
           <p:nvPr/>
         </p:nvSpPr>
@@ -17528,7 +16899,7 @@
         <p:spPr>
           <a:xfrm>
             <a:off x="640080" y="329184"/>
-            <a:ext cx="5303520" cy="182880"/>
+            <a:ext cx="9875520" cy="182880"/>
           </a:xfrm>
           <a:prstGeom prst="rect">
             <a:avLst/>
@@ -17569,48 +16940,6 @@
         </p:nvSpPr>
         <p:spPr>
           <a:xfrm>
-            <a:off x="5897880" y="310896"/>
-            <a:ext cx="4800600" cy="256032"/>
-          </a:xfrm>
-          <a:prstGeom prst="rect">
-            <a:avLst/>
-          </a:prstGeom>
-          <a:noFill/>
-        </p:spPr>
-        <p:txBody>
-          <a:bodyPr wrap="none" lIns="9144" rIns="9144" tIns="9144" bIns="9144" anchor="t">
-            <a:spAutoFit/>
-          </a:bodyPr>
-          <a:lstStyle/>
-          <a:p>
-            <a:pPr algn="r">
-              <a:spcAft>
-                <a:spcPts val="0"/>
-              </a:spcAft>
-              <a:defRPr sz="680" b="1">
-                <a:solidFill>
-                  <a:srgbClr val="4F6B00"/>
-                </a:solidFill>
-                <a:latin typeface="Inter"/>
-              </a:defRPr>
-            </a:pPr>
-            <a:r>
-              <a:rPr>
-                <a:latin typeface="Inter"/>
-              </a:rPr>
-              <a:t>Illustrative, Gradient Maintained — demo data, not the client's holdings or managers</a:t>
-            </a:r>
-          </a:p>
-        </p:txBody>
-      </p:sp>
-      <p:sp>
-        <p:nvSpPr>
-          <p:cNvPr id="5" name="TextBox 4"/>
-          <p:cNvSpPr txBox="1"/>
-          <p:nvPr/>
-        </p:nvSpPr>
-        <p:spPr>
-          <a:xfrm>
             <a:off x="640080" y="566928"/>
             <a:ext cx="10058400" cy="530352"/>
           </a:xfrm>
@@ -17647,7 +16976,7 @@
       </p:sp>
       <p:sp>
         <p:nvSpPr>
-          <p:cNvPr id="6" name="Rectangle 5"/>
+          <p:cNvPr id="5" name="Rectangle 4"/>
           <p:cNvSpPr/>
           <p:nvPr/>
         </p:nvSpPr>
@@ -17696,7 +17025,7 @@
       </p:sp>
       <p:sp>
         <p:nvSpPr>
-          <p:cNvPr id="7" name="Rectangle 6"/>
+          <p:cNvPr id="6" name="Rectangle 5"/>
           <p:cNvSpPr/>
           <p:nvPr/>
         </p:nvSpPr>
@@ -17745,7 +17074,7 @@
       </p:sp>
       <p:sp>
         <p:nvSpPr>
-          <p:cNvPr id="8" name="TextBox 7"/>
+          <p:cNvPr id="7" name="TextBox 6"/>
           <p:cNvSpPr txBox="1"/>
           <p:nvPr/>
         </p:nvSpPr>
@@ -17787,7 +17116,7 @@
       </p:sp>
       <p:sp>
         <p:nvSpPr>
-          <p:cNvPr id="9" name="TextBox 8"/>
+          <p:cNvPr id="8" name="TextBox 7"/>
           <p:cNvSpPr txBox="1"/>
           <p:nvPr/>
         </p:nvSpPr>
@@ -17829,7 +17158,7 @@
       </p:sp>
       <p:graphicFrame>
         <p:nvGraphicFramePr>
-          <p:cNvPr id="10" name="Table 9"/>
+          <p:cNvPr id="9" name="Table 8"/>
           <p:cNvGraphicFramePr>
             <a:graphicFrameLocks noGrp="1"/>
           </p:cNvGraphicFramePr>
@@ -18515,7 +17844,7 @@
       </p:graphicFrame>
       <p:sp>
         <p:nvSpPr>
-          <p:cNvPr id="11" name="TextBox 10"/>
+          <p:cNvPr id="10" name="TextBox 9"/>
           <p:cNvSpPr txBox="1"/>
           <p:nvPr/>
         </p:nvSpPr>
@@ -18557,7 +17886,7 @@
       </p:sp>
       <p:graphicFrame>
         <p:nvGraphicFramePr>
-          <p:cNvPr id="12" name="Table 11"/>
+          <p:cNvPr id="11" name="Table 10"/>
           <p:cNvGraphicFramePr>
             <a:graphicFrameLocks noGrp="1"/>
           </p:cNvGraphicFramePr>
@@ -19079,7 +18408,7 @@
       </p:graphicFrame>
       <p:sp>
         <p:nvSpPr>
-          <p:cNvPr id="13" name="Rectangle 12"/>
+          <p:cNvPr id="12" name="Rectangle 11"/>
           <p:cNvSpPr/>
           <p:nvPr/>
         </p:nvSpPr>
@@ -19128,7 +18457,7 @@
       </p:sp>
       <p:sp>
         <p:nvSpPr>
-          <p:cNvPr id="14" name="Rectangle 13"/>
+          <p:cNvPr id="13" name="Rectangle 12"/>
           <p:cNvSpPr/>
           <p:nvPr/>
         </p:nvSpPr>
@@ -19177,7 +18506,7 @@
       </p:sp>
       <p:sp>
         <p:nvSpPr>
-          <p:cNvPr id="15" name="TextBox 14"/>
+          <p:cNvPr id="14" name="TextBox 13"/>
           <p:cNvSpPr txBox="1"/>
           <p:nvPr/>
         </p:nvSpPr>
@@ -19219,7 +18548,7 @@
       </p:sp>
       <p:sp>
         <p:nvSpPr>
-          <p:cNvPr id="16" name="TextBox 15"/>
+          <p:cNvPr id="15" name="TextBox 14"/>
           <p:cNvSpPr txBox="1"/>
           <p:nvPr/>
         </p:nvSpPr>
@@ -19261,7 +18590,7 @@
       </p:sp>
       <p:sp>
         <p:nvSpPr>
-          <p:cNvPr id="17" name="Rectangle 16"/>
+          <p:cNvPr id="16" name="Rectangle 15"/>
           <p:cNvSpPr/>
           <p:nvPr/>
         </p:nvSpPr>
@@ -19310,7 +18639,7 @@
       </p:sp>
       <p:sp>
         <p:nvSpPr>
-          <p:cNvPr id="18" name="Rectangle 17"/>
+          <p:cNvPr id="17" name="Rectangle 16"/>
           <p:cNvSpPr/>
           <p:nvPr/>
         </p:nvSpPr>
@@ -19359,7 +18688,7 @@
       </p:sp>
       <p:sp>
         <p:nvSpPr>
-          <p:cNvPr id="19" name="TextBox 18"/>
+          <p:cNvPr id="18" name="TextBox 17"/>
           <p:cNvSpPr txBox="1"/>
           <p:nvPr/>
         </p:nvSpPr>
@@ -19401,7 +18730,7 @@
       </p:sp>
       <p:sp>
         <p:nvSpPr>
-          <p:cNvPr id="20" name="TextBox 19"/>
+          <p:cNvPr id="19" name="TextBox 18"/>
           <p:cNvSpPr txBox="1"/>
           <p:nvPr/>
         </p:nvSpPr>
@@ -19443,7 +18772,7 @@
       </p:sp>
       <p:sp>
         <p:nvSpPr>
-          <p:cNvPr id="21" name="Rectangle 20"/>
+          <p:cNvPr id="20" name="Rectangle 19"/>
           <p:cNvSpPr/>
           <p:nvPr/>
         </p:nvSpPr>
@@ -19492,7 +18821,7 @@
       </p:sp>
       <p:sp>
         <p:nvSpPr>
-          <p:cNvPr id="22" name="TextBox 21"/>
+          <p:cNvPr id="21" name="TextBox 20"/>
           <p:cNvSpPr txBox="1"/>
           <p:nvPr/>
         </p:nvSpPr>
@@ -19534,7 +18863,7 @@
       </p:sp>
       <p:sp>
         <p:nvSpPr>
-          <p:cNvPr id="23" name="TextBox 22"/>
+          <p:cNvPr id="22" name="TextBox 21"/>
           <p:cNvSpPr txBox="1"/>
           <p:nvPr/>
         </p:nvSpPr>
@@ -19576,7 +18905,7 @@
       </p:sp>
       <p:sp>
         <p:nvSpPr>
-          <p:cNvPr id="24" name="TextBox 23"/>
+          <p:cNvPr id="23" name="TextBox 22"/>
           <p:cNvSpPr txBox="1"/>
           <p:nvPr/>
         </p:nvSpPr>
@@ -19691,48 +19020,6 @@
         </p:nvSpPr>
         <p:spPr>
           <a:xfrm>
-            <a:off x="5897880" y="310896"/>
-            <a:ext cx="4800600" cy="256032"/>
-          </a:xfrm>
-          <a:prstGeom prst="rect">
-            <a:avLst/>
-          </a:prstGeom>
-          <a:noFill/>
-        </p:spPr>
-        <p:txBody>
-          <a:bodyPr wrap="none" lIns="9144" rIns="9144" tIns="9144" bIns="9144" anchor="t">
-            <a:spAutoFit/>
-          </a:bodyPr>
-          <a:lstStyle/>
-          <a:p>
-            <a:pPr algn="r">
-              <a:spcAft>
-                <a:spcPts val="0"/>
-              </a:spcAft>
-              <a:defRPr sz="680" b="1">
-                <a:solidFill>
-                  <a:srgbClr val="4F6B00"/>
-                </a:solidFill>
-                <a:latin typeface="Inter"/>
-              </a:defRPr>
-            </a:pPr>
-            <a:r>
-              <a:rPr>
-                <a:latin typeface="Inter"/>
-              </a:rPr>
-              <a:t>Illustrative, Gradient Maintained — demo data, not the client's holdings or managers</a:t>
-            </a:r>
-          </a:p>
-        </p:txBody>
-      </p:sp>
-      <p:sp>
-        <p:nvSpPr>
-          <p:cNvPr id="4" name="TextBox 3"/>
-          <p:cNvSpPr txBox="1"/>
-          <p:nvPr/>
-        </p:nvSpPr>
-        <p:spPr>
-          <a:xfrm>
             <a:off x="640080" y="566928"/>
             <a:ext cx="10058400" cy="530352"/>
           </a:xfrm>
@@ -19769,7 +19056,7 @@
       </p:sp>
       <p:sp>
         <p:nvSpPr>
-          <p:cNvPr id="5" name="Rectangle 4"/>
+          <p:cNvPr id="4" name="Rectangle 3"/>
           <p:cNvSpPr/>
           <p:nvPr/>
         </p:nvSpPr>
@@ -19818,7 +19105,7 @@
       </p:sp>
       <p:sp>
         <p:nvSpPr>
-          <p:cNvPr id="6" name="Rectangle 5"/>
+          <p:cNvPr id="5" name="Rectangle 4"/>
           <p:cNvSpPr/>
           <p:nvPr/>
         </p:nvSpPr>
@@ -19867,7 +19154,7 @@
       </p:sp>
       <p:sp>
         <p:nvSpPr>
-          <p:cNvPr id="7" name="TextBox 6"/>
+          <p:cNvPr id="6" name="TextBox 5"/>
           <p:cNvSpPr txBox="1"/>
           <p:nvPr/>
         </p:nvSpPr>
@@ -19909,7 +19196,7 @@
       </p:sp>
       <p:sp>
         <p:nvSpPr>
-          <p:cNvPr id="8" name="TextBox 7"/>
+          <p:cNvPr id="7" name="TextBox 6"/>
           <p:cNvSpPr txBox="1"/>
           <p:nvPr/>
         </p:nvSpPr>
@@ -19951,7 +19238,7 @@
       </p:sp>
       <p:graphicFrame>
         <p:nvGraphicFramePr>
-          <p:cNvPr id="9" name="Chart 8"/>
+          <p:cNvPr id="8" name="Chart 7"/>
           <p:cNvGraphicFramePr>
             <a:graphicFrameLocks noGrp="1"/>
           </p:cNvGraphicFramePr>
@@ -19969,7 +19256,7 @@
       </p:graphicFrame>
       <p:sp>
         <p:nvSpPr>
-          <p:cNvPr id="10" name="Rectangle 9"/>
+          <p:cNvPr id="9" name="Rectangle 8"/>
           <p:cNvSpPr/>
           <p:nvPr/>
         </p:nvSpPr>
@@ -20018,7 +19305,7 @@
       </p:sp>
       <p:sp>
         <p:nvSpPr>
-          <p:cNvPr id="11" name="TextBox 10"/>
+          <p:cNvPr id="10" name="TextBox 9"/>
           <p:cNvSpPr txBox="1"/>
           <p:nvPr/>
         </p:nvSpPr>
@@ -20060,7 +19347,7 @@
       </p:sp>
       <p:sp>
         <p:nvSpPr>
-          <p:cNvPr id="12" name="TextBox 11"/>
+          <p:cNvPr id="11" name="TextBox 10"/>
           <p:cNvSpPr txBox="1"/>
           <p:nvPr/>
         </p:nvSpPr>
@@ -20102,7 +19389,7 @@
       </p:sp>
       <p:sp>
         <p:nvSpPr>
-          <p:cNvPr id="13" name="TextBox 12"/>
+          <p:cNvPr id="12" name="TextBox 11"/>
           <p:cNvSpPr txBox="1"/>
           <p:nvPr/>
         </p:nvSpPr>
@@ -20217,48 +19504,6 @@
         </p:nvSpPr>
         <p:spPr>
           <a:xfrm>
-            <a:off x="5897880" y="310896"/>
-            <a:ext cx="4800600" cy="256032"/>
-          </a:xfrm>
-          <a:prstGeom prst="rect">
-            <a:avLst/>
-          </a:prstGeom>
-          <a:noFill/>
-        </p:spPr>
-        <p:txBody>
-          <a:bodyPr wrap="none" lIns="9144" rIns="9144" tIns="9144" bIns="9144" anchor="t">
-            <a:spAutoFit/>
-          </a:bodyPr>
-          <a:lstStyle/>
-          <a:p>
-            <a:pPr algn="r">
-              <a:spcAft>
-                <a:spcPts val="0"/>
-              </a:spcAft>
-              <a:defRPr sz="680" b="1">
-                <a:solidFill>
-                  <a:srgbClr val="4F6B00"/>
-                </a:solidFill>
-                <a:latin typeface="Inter"/>
-              </a:defRPr>
-            </a:pPr>
-            <a:r>
-              <a:rPr>
-                <a:latin typeface="Inter"/>
-              </a:rPr>
-              <a:t>Illustrative, Gradient Maintained — demo data, not the client's holdings or managers</a:t>
-            </a:r>
-          </a:p>
-        </p:txBody>
-      </p:sp>
-      <p:sp>
-        <p:nvSpPr>
-          <p:cNvPr id="4" name="TextBox 3"/>
-          <p:cNvSpPr txBox="1"/>
-          <p:nvPr/>
-        </p:nvSpPr>
-        <p:spPr>
-          <a:xfrm>
             <a:off x="640080" y="566928"/>
             <a:ext cx="10058400" cy="530352"/>
           </a:xfrm>
@@ -20295,7 +19540,7 @@
       </p:sp>
       <p:sp>
         <p:nvSpPr>
-          <p:cNvPr id="5" name="Rectangle 4"/>
+          <p:cNvPr id="4" name="Rectangle 3"/>
           <p:cNvSpPr/>
           <p:nvPr/>
         </p:nvSpPr>
@@ -20344,7 +19589,7 @@
       </p:sp>
       <p:sp>
         <p:nvSpPr>
-          <p:cNvPr id="6" name="Rectangle 5"/>
+          <p:cNvPr id="5" name="Rectangle 4"/>
           <p:cNvSpPr/>
           <p:nvPr/>
         </p:nvSpPr>
@@ -20393,7 +19638,7 @@
       </p:sp>
       <p:sp>
         <p:nvSpPr>
-          <p:cNvPr id="7" name="TextBox 6"/>
+          <p:cNvPr id="6" name="TextBox 5"/>
           <p:cNvSpPr txBox="1"/>
           <p:nvPr/>
         </p:nvSpPr>
@@ -20435,7 +19680,7 @@
       </p:sp>
       <p:sp>
         <p:nvSpPr>
-          <p:cNvPr id="8" name="TextBox 7"/>
+          <p:cNvPr id="7" name="TextBox 6"/>
           <p:cNvSpPr txBox="1"/>
           <p:nvPr/>
         </p:nvSpPr>
@@ -20477,7 +19722,7 @@
       </p:sp>
       <p:graphicFrame>
         <p:nvGraphicFramePr>
-          <p:cNvPr id="9" name="Table 8"/>
+          <p:cNvPr id="8" name="Table 7"/>
           <p:cNvGraphicFramePr>
             <a:graphicFrameLocks noGrp="1"/>
           </p:cNvGraphicFramePr>
@@ -21054,7 +20299,7 @@
       </p:graphicFrame>
       <p:sp>
         <p:nvSpPr>
-          <p:cNvPr id="10" name="Rectangle 9"/>
+          <p:cNvPr id="9" name="Rectangle 8"/>
           <p:cNvSpPr/>
           <p:nvPr/>
         </p:nvSpPr>
@@ -21103,7 +20348,7 @@
       </p:sp>
       <p:sp>
         <p:nvSpPr>
-          <p:cNvPr id="11" name="Rectangle 10"/>
+          <p:cNvPr id="10" name="Rectangle 9"/>
           <p:cNvSpPr/>
           <p:nvPr/>
         </p:nvSpPr>
@@ -21152,7 +20397,7 @@
       </p:sp>
       <p:sp>
         <p:nvSpPr>
-          <p:cNvPr id="12" name="TextBox 11"/>
+          <p:cNvPr id="11" name="TextBox 10"/>
           <p:cNvSpPr txBox="1"/>
           <p:nvPr/>
         </p:nvSpPr>
@@ -21194,7 +20439,7 @@
       </p:sp>
       <p:sp>
         <p:nvSpPr>
-          <p:cNvPr id="13" name="TextBox 12"/>
+          <p:cNvPr id="12" name="TextBox 11"/>
           <p:cNvSpPr txBox="1"/>
           <p:nvPr/>
         </p:nvSpPr>
@@ -21236,7 +20481,7 @@
       </p:sp>
       <p:sp>
         <p:nvSpPr>
-          <p:cNvPr id="14" name="Rectangle 13"/>
+          <p:cNvPr id="13" name="Rectangle 12"/>
           <p:cNvSpPr/>
           <p:nvPr/>
         </p:nvSpPr>
@@ -21285,7 +20530,7 @@
       </p:sp>
       <p:sp>
         <p:nvSpPr>
-          <p:cNvPr id="15" name="TextBox 14"/>
+          <p:cNvPr id="14" name="TextBox 13"/>
           <p:cNvSpPr txBox="1"/>
           <p:nvPr/>
         </p:nvSpPr>
@@ -21327,7 +20572,7 @@
       </p:sp>
       <p:sp>
         <p:nvSpPr>
-          <p:cNvPr id="16" name="TextBox 15"/>
+          <p:cNvPr id="15" name="TextBox 14"/>
           <p:cNvSpPr txBox="1"/>
           <p:nvPr/>
         </p:nvSpPr>
@@ -21369,7 +20614,7 @@
       </p:sp>
       <p:sp>
         <p:nvSpPr>
-          <p:cNvPr id="17" name="TextBox 16"/>
+          <p:cNvPr id="16" name="TextBox 15"/>
           <p:cNvSpPr txBox="1"/>
           <p:nvPr/>
         </p:nvSpPr>
@@ -21484,48 +20729,6 @@
         </p:nvSpPr>
         <p:spPr>
           <a:xfrm>
-            <a:off x="5897880" y="310896"/>
-            <a:ext cx="4800600" cy="256032"/>
-          </a:xfrm>
-          <a:prstGeom prst="rect">
-            <a:avLst/>
-          </a:prstGeom>
-          <a:noFill/>
-        </p:spPr>
-        <p:txBody>
-          <a:bodyPr wrap="none" lIns="9144" rIns="9144" tIns="9144" bIns="9144" anchor="t">
-            <a:spAutoFit/>
-          </a:bodyPr>
-          <a:lstStyle/>
-          <a:p>
-            <a:pPr algn="r">
-              <a:spcAft>
-                <a:spcPts val="0"/>
-              </a:spcAft>
-              <a:defRPr sz="680" b="1">
-                <a:solidFill>
-                  <a:srgbClr val="4F6B00"/>
-                </a:solidFill>
-                <a:latin typeface="Inter"/>
-              </a:defRPr>
-            </a:pPr>
-            <a:r>
-              <a:rPr>
-                <a:latin typeface="Inter"/>
-              </a:rPr>
-              <a:t>Illustrative, Gradient Maintained — demo data, not the client's holdings or managers</a:t>
-            </a:r>
-          </a:p>
-        </p:txBody>
-      </p:sp>
-      <p:sp>
-        <p:nvSpPr>
-          <p:cNvPr id="4" name="TextBox 3"/>
-          <p:cNvSpPr txBox="1"/>
-          <p:nvPr/>
-        </p:nvSpPr>
-        <p:spPr>
-          <a:xfrm>
             <a:off x="640080" y="566928"/>
             <a:ext cx="10058400" cy="530352"/>
           </a:xfrm>
@@ -21562,7 +20765,7 @@
       </p:sp>
       <p:sp>
         <p:nvSpPr>
-          <p:cNvPr id="5" name="Rectangle 4"/>
+          <p:cNvPr id="4" name="Rectangle 3"/>
           <p:cNvSpPr/>
           <p:nvPr/>
         </p:nvSpPr>
@@ -21611,7 +20814,7 @@
       </p:sp>
       <p:sp>
         <p:nvSpPr>
-          <p:cNvPr id="6" name="Rectangle 5"/>
+          <p:cNvPr id="5" name="Rectangle 4"/>
           <p:cNvSpPr/>
           <p:nvPr/>
         </p:nvSpPr>
@@ -21660,7 +20863,7 @@
       </p:sp>
       <p:sp>
         <p:nvSpPr>
-          <p:cNvPr id="7" name="TextBox 6"/>
+          <p:cNvPr id="6" name="TextBox 5"/>
           <p:cNvSpPr txBox="1"/>
           <p:nvPr/>
         </p:nvSpPr>
@@ -21702,7 +20905,7 @@
       </p:sp>
       <p:sp>
         <p:nvSpPr>
-          <p:cNvPr id="8" name="TextBox 7"/>
+          <p:cNvPr id="7" name="TextBox 6"/>
           <p:cNvSpPr txBox="1"/>
           <p:nvPr/>
         </p:nvSpPr>
@@ -21744,7 +20947,7 @@
       </p:sp>
       <p:graphicFrame>
         <p:nvGraphicFramePr>
-          <p:cNvPr id="9" name="Table 8"/>
+          <p:cNvPr id="8" name="Table 7"/>
           <p:cNvGraphicFramePr>
             <a:graphicFrameLocks noGrp="1"/>
           </p:cNvGraphicFramePr>
@@ -22266,7 +21469,7 @@
       </p:graphicFrame>
       <p:sp>
         <p:nvSpPr>
-          <p:cNvPr id="10" name="TextBox 9"/>
+          <p:cNvPr id="9" name="TextBox 8"/>
           <p:cNvSpPr txBox="1"/>
           <p:nvPr/>
         </p:nvSpPr>
@@ -22308,7 +21511,7 @@
       </p:sp>
       <p:graphicFrame>
         <p:nvGraphicFramePr>
-          <p:cNvPr id="11" name="Table 10"/>
+          <p:cNvPr id="10" name="Table 9"/>
           <p:cNvGraphicFramePr>
             <a:graphicFrameLocks noGrp="1"/>
           </p:cNvGraphicFramePr>
@@ -22666,7 +21869,7 @@
       </p:graphicFrame>
       <p:sp>
         <p:nvSpPr>
-          <p:cNvPr id="12" name="TextBox 11"/>
+          <p:cNvPr id="11" name="TextBox 10"/>
           <p:cNvSpPr txBox="1"/>
           <p:nvPr/>
         </p:nvSpPr>
@@ -22746,7 +21949,7 @@
       </p:sp>
       <p:sp>
         <p:nvSpPr>
-          <p:cNvPr id="13" name="Rectangle 12"/>
+          <p:cNvPr id="12" name="Rectangle 11"/>
           <p:cNvSpPr/>
           <p:nvPr/>
         </p:nvSpPr>
@@ -22795,7 +21998,7 @@
       </p:sp>
       <p:sp>
         <p:nvSpPr>
-          <p:cNvPr id="14" name="TextBox 13"/>
+          <p:cNvPr id="13" name="TextBox 12"/>
           <p:cNvSpPr txBox="1"/>
           <p:nvPr/>
         </p:nvSpPr>
@@ -22837,7 +22040,7 @@
       </p:sp>
       <p:sp>
         <p:nvSpPr>
-          <p:cNvPr id="15" name="TextBox 14"/>
+          <p:cNvPr id="14" name="TextBox 13"/>
           <p:cNvSpPr txBox="1"/>
           <p:nvPr/>
         </p:nvSpPr>
@@ -22879,7 +22082,7 @@
       </p:sp>
       <p:sp>
         <p:nvSpPr>
-          <p:cNvPr id="16" name="TextBox 15"/>
+          <p:cNvPr id="15" name="TextBox 14"/>
           <p:cNvSpPr txBox="1"/>
           <p:nvPr/>
         </p:nvSpPr>
@@ -22994,48 +22197,6 @@
         </p:nvSpPr>
         <p:spPr>
           <a:xfrm>
-            <a:off x="5897880" y="310896"/>
-            <a:ext cx="4800600" cy="256032"/>
-          </a:xfrm>
-          <a:prstGeom prst="rect">
-            <a:avLst/>
-          </a:prstGeom>
-          <a:noFill/>
-        </p:spPr>
-        <p:txBody>
-          <a:bodyPr wrap="none" lIns="9144" rIns="9144" tIns="9144" bIns="9144" anchor="t">
-            <a:spAutoFit/>
-          </a:bodyPr>
-          <a:lstStyle/>
-          <a:p>
-            <a:pPr algn="r">
-              <a:spcAft>
-                <a:spcPts val="0"/>
-              </a:spcAft>
-              <a:defRPr sz="680" b="1">
-                <a:solidFill>
-                  <a:srgbClr val="4F6B00"/>
-                </a:solidFill>
-                <a:latin typeface="Inter"/>
-              </a:defRPr>
-            </a:pPr>
-            <a:r>
-              <a:rPr>
-                <a:latin typeface="Inter"/>
-              </a:rPr>
-              <a:t>Illustrative, Gradient Maintained — demo data, not the client's holdings or managers</a:t>
-            </a:r>
-          </a:p>
-        </p:txBody>
-      </p:sp>
-      <p:sp>
-        <p:nvSpPr>
-          <p:cNvPr id="4" name="TextBox 3"/>
-          <p:cNvSpPr txBox="1"/>
-          <p:nvPr/>
-        </p:nvSpPr>
-        <p:spPr>
-          <a:xfrm>
             <a:off x="640080" y="566928"/>
             <a:ext cx="10058400" cy="530352"/>
           </a:xfrm>
@@ -23072,7 +22233,7 @@
       </p:sp>
       <p:sp>
         <p:nvSpPr>
-          <p:cNvPr id="5" name="Rectangle 4"/>
+          <p:cNvPr id="4" name="Rectangle 3"/>
           <p:cNvSpPr/>
           <p:nvPr/>
         </p:nvSpPr>
@@ -23121,7 +22282,7 @@
       </p:sp>
       <p:sp>
         <p:nvSpPr>
-          <p:cNvPr id="6" name="Rectangle 5"/>
+          <p:cNvPr id="5" name="Rectangle 4"/>
           <p:cNvSpPr/>
           <p:nvPr/>
         </p:nvSpPr>
@@ -23170,7 +22331,7 @@
       </p:sp>
       <p:sp>
         <p:nvSpPr>
-          <p:cNvPr id="7" name="TextBox 6"/>
+          <p:cNvPr id="6" name="TextBox 5"/>
           <p:cNvSpPr txBox="1"/>
           <p:nvPr/>
         </p:nvSpPr>
@@ -23212,7 +22373,7 @@
       </p:sp>
       <p:sp>
         <p:nvSpPr>
-          <p:cNvPr id="8" name="TextBox 7"/>
+          <p:cNvPr id="7" name="TextBox 6"/>
           <p:cNvSpPr txBox="1"/>
           <p:nvPr/>
         </p:nvSpPr>
@@ -23254,7 +22415,7 @@
       </p:sp>
       <p:graphicFrame>
         <p:nvGraphicFramePr>
-          <p:cNvPr id="9" name="Table 8"/>
+          <p:cNvPr id="8" name="Table 7"/>
           <p:cNvGraphicFramePr>
             <a:graphicFrameLocks noGrp="1"/>
           </p:cNvGraphicFramePr>
@@ -23831,7 +22992,7 @@
       </p:graphicFrame>
       <p:sp>
         <p:nvSpPr>
-          <p:cNvPr id="10" name="TextBox 9"/>
+          <p:cNvPr id="9" name="TextBox 8"/>
           <p:cNvSpPr txBox="1"/>
           <p:nvPr/>
         </p:nvSpPr>
@@ -23873,7 +23034,7 @@
       </p:sp>
       <p:graphicFrame>
         <p:nvGraphicFramePr>
-          <p:cNvPr id="11" name="Table 10"/>
+          <p:cNvPr id="10" name="Table 9"/>
           <p:cNvGraphicFramePr>
             <a:graphicFrameLocks noGrp="1"/>
           </p:cNvGraphicFramePr>
@@ -24450,7 +23611,7 @@
       </p:graphicFrame>
       <p:sp>
         <p:nvSpPr>
-          <p:cNvPr id="12" name="Rectangle 11"/>
+          <p:cNvPr id="11" name="Rectangle 10"/>
           <p:cNvSpPr/>
           <p:nvPr/>
         </p:nvSpPr>
@@ -24499,7 +23660,7 @@
       </p:sp>
       <p:sp>
         <p:nvSpPr>
-          <p:cNvPr id="13" name="TextBox 12"/>
+          <p:cNvPr id="12" name="TextBox 11"/>
           <p:cNvSpPr txBox="1"/>
           <p:nvPr/>
         </p:nvSpPr>
@@ -24541,7 +23702,7 @@
       </p:sp>
       <p:sp>
         <p:nvSpPr>
-          <p:cNvPr id="14" name="TextBox 13"/>
+          <p:cNvPr id="13" name="TextBox 12"/>
           <p:cNvSpPr txBox="1"/>
           <p:nvPr/>
         </p:nvSpPr>
@@ -24583,7 +23744,7 @@
       </p:sp>
       <p:sp>
         <p:nvSpPr>
-          <p:cNvPr id="15" name="TextBox 14"/>
+          <p:cNvPr id="14" name="TextBox 13"/>
           <p:cNvSpPr txBox="1"/>
           <p:nvPr/>
         </p:nvSpPr>
@@ -24698,48 +23859,6 @@
         </p:nvSpPr>
         <p:spPr>
           <a:xfrm>
-            <a:off x="5897880" y="310896"/>
-            <a:ext cx="4800600" cy="256032"/>
-          </a:xfrm>
-          <a:prstGeom prst="rect">
-            <a:avLst/>
-          </a:prstGeom>
-          <a:noFill/>
-        </p:spPr>
-        <p:txBody>
-          <a:bodyPr wrap="none" lIns="9144" rIns="9144" tIns="9144" bIns="9144" anchor="t">
-            <a:spAutoFit/>
-          </a:bodyPr>
-          <a:lstStyle/>
-          <a:p>
-            <a:pPr algn="r">
-              <a:spcAft>
-                <a:spcPts val="0"/>
-              </a:spcAft>
-              <a:defRPr sz="680" b="1">
-                <a:solidFill>
-                  <a:srgbClr val="4F6B00"/>
-                </a:solidFill>
-                <a:latin typeface="Inter"/>
-              </a:defRPr>
-            </a:pPr>
-            <a:r>
-              <a:rPr>
-                <a:latin typeface="Inter"/>
-              </a:rPr>
-              <a:t>Illustrative, Gradient Maintained — demo data, not the client's holdings or managers</a:t>
-            </a:r>
-          </a:p>
-        </p:txBody>
-      </p:sp>
-      <p:sp>
-        <p:nvSpPr>
-          <p:cNvPr id="4" name="TextBox 3"/>
-          <p:cNvSpPr txBox="1"/>
-          <p:nvPr/>
-        </p:nvSpPr>
-        <p:spPr>
-          <a:xfrm>
             <a:off x="640080" y="566928"/>
             <a:ext cx="10058400" cy="530352"/>
           </a:xfrm>
@@ -24776,7 +23895,7 @@
       </p:sp>
       <p:sp>
         <p:nvSpPr>
-          <p:cNvPr id="5" name="Rectangle 4"/>
+          <p:cNvPr id="4" name="Rectangle 3"/>
           <p:cNvSpPr/>
           <p:nvPr/>
         </p:nvSpPr>
@@ -24825,7 +23944,7 @@
       </p:sp>
       <p:sp>
         <p:nvSpPr>
-          <p:cNvPr id="6" name="Rectangle 5"/>
+          <p:cNvPr id="5" name="Rectangle 4"/>
           <p:cNvSpPr/>
           <p:nvPr/>
         </p:nvSpPr>
@@ -24874,7 +23993,7 @@
       </p:sp>
       <p:sp>
         <p:nvSpPr>
-          <p:cNvPr id="7" name="TextBox 6"/>
+          <p:cNvPr id="6" name="TextBox 5"/>
           <p:cNvSpPr txBox="1"/>
           <p:nvPr/>
         </p:nvSpPr>
@@ -24916,7 +24035,7 @@
       </p:sp>
       <p:graphicFrame>
         <p:nvGraphicFramePr>
-          <p:cNvPr id="8" name="Table 7"/>
+          <p:cNvPr id="7" name="Table 6"/>
           <p:cNvGraphicFramePr>
             <a:graphicFrameLocks noGrp="1"/>
           </p:cNvGraphicFramePr>
@@ -25065,7 +24184,7 @@
                         <a:rPr>
                           <a:latin typeface="Inter"/>
                         </a:rPr>
-                        <a:t>● available</a:t>
+                        <a:t>● Available</a:t>
                       </a:r>
                     </a:p>
                   </a:txBody>
@@ -25148,7 +24267,7 @@
                         <a:rPr>
                           <a:latin typeface="Inter"/>
                         </a:rPr>
-                        <a:t>● available</a:t>
+                        <a:t>● Available</a:t>
                       </a:r>
                     </a:p>
                   </a:txBody>
@@ -25231,7 +24350,7 @@
                         <a:rPr>
                           <a:latin typeface="Inter"/>
                         </a:rPr>
-                        <a:t>● available</a:t>
+                        <a:t>● Available</a:t>
                       </a:r>
                     </a:p>
                   </a:txBody>
@@ -25314,7 +24433,7 @@
                         <a:rPr>
                           <a:latin typeface="Inter"/>
                         </a:rPr>
-                        <a:t>● degraded</a:t>
+                        <a:t>● Incomplete</a:t>
                       </a:r>
                     </a:p>
                   </a:txBody>
@@ -25397,7 +24516,7 @@
                         <a:rPr>
                           <a:latin typeface="Inter"/>
                         </a:rPr>
-                        <a:t>● available</a:t>
+                        <a:t>● Available</a:t>
                       </a:r>
                     </a:p>
                   </a:txBody>
@@ -25480,7 +24599,7 @@
                         <a:rPr>
                           <a:latin typeface="Inter"/>
                         </a:rPr>
-                        <a:t>● degraded</a:t>
+                        <a:t>● Incomplete</a:t>
                       </a:r>
                     </a:p>
                   </a:txBody>
@@ -25563,7 +24682,7 @@
                         <a:rPr>
                           <a:latin typeface="Inter"/>
                         </a:rPr>
-                        <a:t>● available</a:t>
+                        <a:t>● Available</a:t>
                       </a:r>
                     </a:p>
                   </a:txBody>
@@ -25646,7 +24765,7 @@
                         <a:rPr>
                           <a:latin typeface="Inter"/>
                         </a:rPr>
-                        <a:t>● unavailable</a:t>
+                        <a:t>● Not available</a:t>
                       </a:r>
                     </a:p>
                   </a:txBody>
@@ -25729,7 +24848,7 @@
                         <a:rPr>
                           <a:latin typeface="Inter"/>
                         </a:rPr>
-                        <a:t>● unavailable</a:t>
+                        <a:t>● Not available</a:t>
                       </a:r>
                     </a:p>
                   </a:txBody>
@@ -25812,7 +24931,7 @@
                         <a:rPr>
                           <a:latin typeface="Inter"/>
                         </a:rPr>
-                        <a:t>● unavailable</a:t>
+                        <a:t>● Not available</a:t>
                       </a:r>
                     </a:p>
                   </a:txBody>
@@ -25895,7 +25014,7 @@
                         <a:rPr>
                           <a:latin typeface="Inter"/>
                         </a:rPr>
-                        <a:t>● unavailable</a:t>
+                        <a:t>● Not available</a:t>
                       </a:r>
                     </a:p>
                   </a:txBody>
@@ -25978,7 +25097,7 @@
                         <a:rPr>
                           <a:latin typeface="Inter"/>
                         </a:rPr>
-                        <a:t>● unavailable</a:t>
+                        <a:t>● Not available</a:t>
                       </a:r>
                     </a:p>
                   </a:txBody>
@@ -26022,7 +25141,7 @@
       </p:graphicFrame>
       <p:sp>
         <p:nvSpPr>
-          <p:cNvPr id="9" name="Rectangle 8"/>
+          <p:cNvPr id="8" name="Rectangle 7"/>
           <p:cNvSpPr/>
           <p:nvPr/>
         </p:nvSpPr>
@@ -26071,7 +25190,7 @@
       </p:sp>
       <p:sp>
         <p:nvSpPr>
-          <p:cNvPr id="10" name="TextBox 9"/>
+          <p:cNvPr id="9" name="TextBox 8"/>
           <p:cNvSpPr txBox="1"/>
           <p:nvPr/>
         </p:nvSpPr>
@@ -26113,7 +25232,7 @@
       </p:sp>
       <p:sp>
         <p:nvSpPr>
-          <p:cNvPr id="11" name="TextBox 10"/>
+          <p:cNvPr id="10" name="TextBox 9"/>
           <p:cNvSpPr txBox="1"/>
           <p:nvPr/>
         </p:nvSpPr>
@@ -26155,7 +25274,7 @@
       </p:sp>
       <p:sp>
         <p:nvSpPr>
-          <p:cNvPr id="12" name="TextBox 11"/>
+          <p:cNvPr id="11" name="TextBox 10"/>
           <p:cNvSpPr txBox="1"/>
           <p:nvPr/>
         </p:nvSpPr>
@@ -26270,48 +25389,6 @@
         </p:nvSpPr>
         <p:spPr>
           <a:xfrm>
-            <a:off x="5897880" y="310896"/>
-            <a:ext cx="4800600" cy="256032"/>
-          </a:xfrm>
-          <a:prstGeom prst="rect">
-            <a:avLst/>
-          </a:prstGeom>
-          <a:noFill/>
-        </p:spPr>
-        <p:txBody>
-          <a:bodyPr wrap="none" lIns="9144" rIns="9144" tIns="9144" bIns="9144" anchor="t">
-            <a:spAutoFit/>
-          </a:bodyPr>
-          <a:lstStyle/>
-          <a:p>
-            <a:pPr algn="r">
-              <a:spcAft>
-                <a:spcPts val="0"/>
-              </a:spcAft>
-              <a:defRPr sz="680" b="1">
-                <a:solidFill>
-                  <a:srgbClr val="4F6B00"/>
-                </a:solidFill>
-                <a:latin typeface="Inter"/>
-              </a:defRPr>
-            </a:pPr>
-            <a:r>
-              <a:rPr>
-                <a:latin typeface="Inter"/>
-              </a:rPr>
-              <a:t>Illustrative, Gradient Maintained — demo data, not the client's holdings or managers</a:t>
-            </a:r>
-          </a:p>
-        </p:txBody>
-      </p:sp>
-      <p:sp>
-        <p:nvSpPr>
-          <p:cNvPr id="4" name="TextBox 3"/>
-          <p:cNvSpPr txBox="1"/>
-          <p:nvPr/>
-        </p:nvSpPr>
-        <p:spPr>
-          <a:xfrm>
             <a:off x="640080" y="566928"/>
             <a:ext cx="10058400" cy="530352"/>
           </a:xfrm>
@@ -26348,7 +25425,7 @@
       </p:sp>
       <p:sp>
         <p:nvSpPr>
-          <p:cNvPr id="5" name="Rectangle 4"/>
+          <p:cNvPr id="4" name="Rectangle 3"/>
           <p:cNvSpPr/>
           <p:nvPr/>
         </p:nvSpPr>
@@ -26397,7 +25474,7 @@
       </p:sp>
       <p:sp>
         <p:nvSpPr>
-          <p:cNvPr id="6" name="Rectangle 5"/>
+          <p:cNvPr id="5" name="Rectangle 4"/>
           <p:cNvSpPr/>
           <p:nvPr/>
         </p:nvSpPr>
@@ -26446,7 +25523,7 @@
       </p:sp>
       <p:sp>
         <p:nvSpPr>
-          <p:cNvPr id="7" name="TextBox 6"/>
+          <p:cNvPr id="6" name="TextBox 5"/>
           <p:cNvSpPr txBox="1"/>
           <p:nvPr/>
         </p:nvSpPr>
@@ -26488,7 +25565,7 @@
       </p:sp>
       <p:graphicFrame>
         <p:nvGraphicFramePr>
-          <p:cNvPr id="8" name="Table 7"/>
+          <p:cNvPr id="7" name="Table 6"/>
           <p:cNvGraphicFramePr>
             <a:graphicFrameLocks noGrp="1"/>
           </p:cNvGraphicFramePr>
@@ -26506,14 +25583,10 @@
               </a:tblPr>
               <a:tblGrid>
                 <a:gridCol w="2011680"/>
-                <a:gridCol w="1112139"/>
-                <a:gridCol w="1112139"/>
-                <a:gridCol w="1112139"/>
-                <a:gridCol w="1112139"/>
-                <a:gridCol w="1112139"/>
-                <a:gridCol w="1112139"/>
-                <a:gridCol w="1112139"/>
-                <a:gridCol w="1112139"/>
+                <a:gridCol w="2224278"/>
+                <a:gridCol w="2224278"/>
+                <a:gridCol w="2224278"/>
+                <a:gridCol w="2224278"/>
               </a:tblGrid>
               <a:tr h="469087">
                 <a:tc>
@@ -26587,7 +25660,7 @@
                         <a:rPr>
                           <a:latin typeface="Inter"/>
                         </a:rPr>
-                        <a:t>Basis</a:t>
+                        <a:t>Source</a:t>
                       </a:r>
                     </a:p>
                   </a:txBody>
@@ -26614,7 +25687,7 @@
                         <a:rPr>
                           <a:latin typeface="Inter"/>
                         </a:rPr>
-                        <a:t>Tool / view</a:t>
+                        <a:t>As of</a:t>
                       </a:r>
                     </a:p>
                   </a:txBody>
@@ -26641,115 +25714,7 @@
                         <a:rPr>
                           <a:latin typeface="Inter"/>
                         </a:rPr>
-                        <a:t>Key parameters</a:t>
-                      </a:r>
-                    </a:p>
-                  </a:txBody>
-                  <a:tcPr marL="54864" marR="54864" marT="27432" marB="27432" anchor="ctr">
-                    <a:solidFill>
-                      <a:srgbClr val="0D1117"/>
-                    </a:solidFill>
-                  </a:tcPr>
-                </a:tc>
-                <a:tc>
-                  <a:txBody>
-                    <a:bodyPr/>
-                    <a:lstStyle/>
-                    <a:p>
-                      <a:pPr>
-                        <a:defRPr sz="750" b="1">
-                          <a:solidFill>
-                            <a:srgbClr val="FFFFFF"/>
-                          </a:solidFill>
-                          <a:latin typeface="Inter"/>
-                        </a:defRPr>
-                      </a:pPr>
-                      <a:r>
-                        <a:rPr>
-                          <a:latin typeface="Inter"/>
-                        </a:rPr>
-                        <a:t>As of</a:t>
-                      </a:r>
-                    </a:p>
-                  </a:txBody>
-                  <a:tcPr marL="54864" marR="54864" marT="27432" marB="27432" anchor="ctr">
-                    <a:solidFill>
-                      <a:srgbClr val="0D1117"/>
-                    </a:solidFill>
-                  </a:tcPr>
-                </a:tc>
-                <a:tc>
-                  <a:txBody>
-                    <a:bodyPr/>
-                    <a:lstStyle/>
-                    <a:p>
-                      <a:pPr>
-                        <a:defRPr sz="750" b="1">
-                          <a:solidFill>
-                            <a:srgbClr val="FFFFFF"/>
-                          </a:solidFill>
-                          <a:latin typeface="Inter"/>
-                        </a:defRPr>
-                      </a:pPr>
-                      <a:r>
-                        <a:rPr>
-                          <a:latin typeface="Inter"/>
-                        </a:rPr>
-                        <a:t>Data scope</a:t>
-                      </a:r>
-                    </a:p>
-                  </a:txBody>
-                  <a:tcPr marL="54864" marR="54864" marT="27432" marB="27432" anchor="ctr">
-                    <a:solidFill>
-                      <a:srgbClr val="0D1117"/>
-                    </a:solidFill>
-                  </a:tcPr>
-                </a:tc>
-                <a:tc>
-                  <a:txBody>
-                    <a:bodyPr/>
-                    <a:lstStyle/>
-                    <a:p>
-                      <a:pPr>
-                        <a:defRPr sz="750" b="1">
-                          <a:solidFill>
-                            <a:srgbClr val="FFFFFF"/>
-                          </a:solidFill>
-                          <a:latin typeface="Inter"/>
-                        </a:defRPr>
-                      </a:pPr>
-                      <a:r>
-                        <a:rPr>
-                          <a:latin typeface="Inter"/>
-                        </a:rPr>
-                        <a:t>Validation</a:t>
-                      </a:r>
-                    </a:p>
-                  </a:txBody>
-                  <a:tcPr marL="54864" marR="54864" marT="27432" marB="27432" anchor="ctr">
-                    <a:solidFill>
-                      <a:srgbClr val="0D1117"/>
-                    </a:solidFill>
-                  </a:tcPr>
-                </a:tc>
-                <a:tc>
-                  <a:txBody>
-                    <a:bodyPr/>
-                    <a:lstStyle/>
-                    <a:p>
-                      <a:pPr>
-                        <a:defRPr sz="750" b="1">
-                          <a:solidFill>
-                            <a:srgbClr val="FFFFFF"/>
-                          </a:solidFill>
-                          <a:latin typeface="Inter"/>
-                        </a:defRPr>
-                      </a:pPr>
-                      <a:r>
-                        <a:rPr>
-                          <a:latin typeface="Inter"/>
-                        </a:rPr>
-                        <a:t>Digest</a:t>
+                        <a:t>Check</a:t>
                       </a:r>
                     </a:p>
                   </a:txBody>
@@ -26767,7 +25732,7 @@
                     <a:lstStyle/>
                     <a:p>
                       <a:pPr>
-                        <a:defRPr sz="650" b="1">
+                        <a:defRPr sz="720" b="1">
                           <a:solidFill>
                             <a:srgbClr val="0D1117"/>
                           </a:solidFill>
@@ -26794,7 +25759,7 @@
                     <a:lstStyle/>
                     <a:p>
                       <a:pPr>
-                        <a:defRPr sz="650" b="0">
+                        <a:defRPr sz="720" b="0">
                           <a:solidFill>
                             <a:srgbClr val="0D1117"/>
                           </a:solidFill>
@@ -26821,7 +25786,7 @@
                     <a:lstStyle/>
                     <a:p>
                       <a:pPr>
-                        <a:defRPr sz="650" b="0">
+                        <a:defRPr sz="720" b="0">
                           <a:solidFill>
                             <a:srgbClr val="0D1117"/>
                           </a:solidFill>
@@ -26832,7 +25797,7 @@
                         <a:rPr>
                           <a:latin typeface="Inter"/>
                         </a:rPr>
-                        <a:t>gradient_tool</a:t>
+                        <a:t>list_organizations; get_gradient_capabilities</a:t>
                       </a:r>
                     </a:p>
                   </a:txBody>
@@ -26848,7 +25813,7 @@
                     <a:lstStyle/>
                     <a:p>
                       <a:pPr>
-                        <a:defRPr sz="650" b="0">
+                        <a:defRPr sz="720" b="0">
                           <a:solidFill>
                             <a:srgbClr val="0D1117"/>
                           </a:solidFill>
@@ -26859,7 +25824,7 @@
                         <a:rPr>
                           <a:latin typeface="Inter"/>
                         </a:rPr>
-                        <a:t>list_organizations; get_gradient_capabilities</a:t>
+                        <a:t>2026-06-30</a:t>
                       </a:r>
                     </a:p>
                   </a:txBody>
@@ -26875,132 +25840,24 @@
                     <a:lstStyle/>
                     <a:p>
                       <a:pPr>
-                        <a:defRPr sz="650" b="0">
-                          <a:solidFill>
-                            <a:srgbClr val="0D1117"/>
-                          </a:solidFill>
-                          <a:latin typeface="Inter"/>
-                        </a:defRPr>
-                      </a:pPr>
-                      <a:r>
-                        <a:rPr>
-                          <a:latin typeface="Inter"/>
-                        </a:rPr>
-                        <a:t>organization=test</a:t>
-                      </a:r>
-                    </a:p>
-                  </a:txBody>
-                  <a:tcPr marL="54864" marR="54864" marT="27432" marB="27432" anchor="ctr">
-                    <a:solidFill>
-                      <a:srgbClr val="FFFFFF"/>
-                    </a:solidFill>
-                  </a:tcPr>
-                </a:tc>
-                <a:tc>
-                  <a:txBody>
-                    <a:bodyPr/>
-                    <a:lstStyle/>
-                    <a:p>
-                      <a:pPr>
-                        <a:defRPr sz="650" b="0">
-                          <a:solidFill>
-                            <a:srgbClr val="0D1117"/>
-                          </a:solidFill>
-                          <a:latin typeface="Inter"/>
-                        </a:defRPr>
-                      </a:pPr>
-                      <a:r>
-                        <a:rPr>
-                          <a:latin typeface="Inter"/>
-                        </a:rPr>
-                        <a:t>2026-06-30</a:t>
-                      </a:r>
-                    </a:p>
-                  </a:txBody>
-                  <a:tcPr marL="54864" marR="54864" marT="27432" marB="27432" anchor="ctr">
-                    <a:solidFill>
-                      <a:srgbClr val="FFFFFF"/>
-                    </a:solidFill>
-                  </a:tcPr>
-                </a:tc>
-                <a:tc>
-                  <a:txBody>
-                    <a:bodyPr/>
-                    <a:lstStyle/>
-                    <a:p>
-                      <a:pPr>
-                        <a:defRPr sz="650" b="0">
-                          <a:solidFill>
-                            <a:srgbClr val="0D1117"/>
-                          </a:solidFill>
-                          <a:latin typeface="Inter"/>
-                        </a:defRPr>
-                      </a:pPr>
-                      <a:r>
-                        <a:rPr>
-                          <a:latin typeface="Inter"/>
-                        </a:rPr>
-                        <a:t>Illustrative sample data</a:t>
-                      </a:r>
-                    </a:p>
-                  </a:txBody>
-                  <a:tcPr marL="54864" marR="54864" marT="27432" marB="27432" anchor="ctr">
-                    <a:solidFill>
-                      <a:srgbClr val="FFFFFF"/>
-                    </a:solidFill>
-                  </a:tcPr>
-                </a:tc>
-                <a:tc>
-                  <a:txBody>
-                    <a:bodyPr/>
-                    <a:lstStyle/>
-                    <a:p>
-                      <a:pPr>
-                        <a:defRPr sz="650" b="0">
-                          <a:solidFill>
-                            <a:srgbClr val="0D1117"/>
-                          </a:solidFill>
-                          <a:latin typeface="Inter"/>
-                        </a:defRPr>
-                      </a:pPr>
-                      <a:r>
-                        <a:rPr>
-                          <a:latin typeface="Inter"/>
-                        </a:rPr>
-                        <a:t>passed</a:t>
-                      </a:r>
-                    </a:p>
-                  </a:txBody>
-                  <a:tcPr marL="54864" marR="54864" marT="27432" marB="27432" anchor="ctr">
-                    <a:solidFill>
-                      <a:srgbClr val="FFFFFF"/>
-                    </a:solidFill>
-                  </a:tcPr>
-                </a:tc>
-                <a:tc>
-                  <a:txBody>
-                    <a:bodyPr/>
-                    <a:lstStyle/>
-                    <a:p>
-                      <a:pPr>
-                        <a:defRPr sz="650" b="0">
-                          <a:solidFill>
-                            <a:srgbClr val="0D1117"/>
-                          </a:solidFill>
-                          <a:latin typeface="Inter"/>
-                        </a:defRPr>
-                      </a:pPr>
-                      <a:r>
-                        <a:rPr>
-                          <a:latin typeface="Inter"/>
-                        </a:rPr>
-                        <a:t>sha256:aaaaaaaaaaaaaaaaaaaaaaaaaaaaaaaaaaaaaaaaaaaaaaaaaaaaaaaaaaaaaaaa</a:t>
-                      </a:r>
-                    </a:p>
-                  </a:txBody>
-                  <a:tcPr marL="54864" marR="54864" marT="27432" marB="27432" anchor="ctr">
-                    <a:solidFill>
-                      <a:srgbClr val="FFFFFF"/>
+                        <a:defRPr sz="720" b="1">
+                          <a:solidFill>
+                            <a:srgbClr val="C6F432"/>
+                          </a:solidFill>
+                          <a:latin typeface="Inter"/>
+                        </a:defRPr>
+                      </a:pPr>
+                      <a:r>
+                        <a:rPr>
+                          <a:latin typeface="Inter"/>
+                        </a:rPr>
+                        <a:t>● Passed</a:t>
+                      </a:r>
+                    </a:p>
+                  </a:txBody>
+                  <a:tcPr marL="54864" marR="54864" marT="27432" marB="27432" anchor="ctr">
+                    <a:solidFill>
+                      <a:srgbClr val="F5F7F9"/>
                     </a:solidFill>
                   </a:tcPr>
                 </a:tc>
@@ -27012,7 +25869,7 @@
                     <a:lstStyle/>
                     <a:p>
                       <a:pPr>
-                        <a:defRPr sz="650" b="1">
+                        <a:defRPr sz="720" b="1">
                           <a:solidFill>
                             <a:srgbClr val="0D1117"/>
                           </a:solidFill>
@@ -27039,7 +25896,7 @@
                     <a:lstStyle/>
                     <a:p>
                       <a:pPr>
-                        <a:defRPr sz="650" b="0">
+                        <a:defRPr sz="720" b="0">
                           <a:solidFill>
                             <a:srgbClr val="0D1117"/>
                           </a:solidFill>
@@ -27066,7 +25923,7 @@
                     <a:lstStyle/>
                     <a:p>
                       <a:pPr>
-                        <a:defRPr sz="650" b="0">
+                        <a:defRPr sz="720" b="0">
                           <a:solidFill>
                             <a:srgbClr val="0D1117"/>
                           </a:solidFill>
@@ -27077,7 +25934,7 @@
                         <a:rPr>
                           <a:latin typeface="Inter"/>
                         </a:rPr>
-                        <a:t>gradient_tool</a:t>
+                        <a:t>list_portfolios; get_portfolio_structure</a:t>
                       </a:r>
                     </a:p>
                   </a:txBody>
@@ -27093,7 +25950,7 @@
                     <a:lstStyle/>
                     <a:p>
                       <a:pPr>
-                        <a:defRPr sz="650" b="0">
+                        <a:defRPr sz="720" b="0">
                           <a:solidFill>
                             <a:srgbClr val="0D1117"/>
                           </a:solidFill>
@@ -27104,7 +25961,7 @@
                         <a:rPr>
                           <a:latin typeface="Inter"/>
                         </a:rPr>
-                        <a:t>list_portfolios; get_portfolio_structure</a:t>
+                        <a:t>2026-06-30</a:t>
                       </a:r>
                     </a:p>
                   </a:txBody>
@@ -27120,126 +25977,18 @@
                     <a:lstStyle/>
                     <a:p>
                       <a:pPr>
-                        <a:defRPr sz="650" b="0">
-                          <a:solidFill>
-                            <a:srgbClr val="0D1117"/>
-                          </a:solidFill>
-                          <a:latin typeface="Inter"/>
-                        </a:defRPr>
-                      </a:pPr>
-                      <a:r>
-                        <a:rPr>
-                          <a:latin typeface="Inter"/>
-                        </a:rPr>
-                        <a:t>allocation_tree</a:t>
-                      </a:r>
-                    </a:p>
-                  </a:txBody>
-                  <a:tcPr marL="54864" marR="54864" marT="27432" marB="27432" anchor="ctr">
-                    <a:solidFill>
-                      <a:srgbClr val="F5F7F9"/>
-                    </a:solidFill>
-                  </a:tcPr>
-                </a:tc>
-                <a:tc>
-                  <a:txBody>
-                    <a:bodyPr/>
-                    <a:lstStyle/>
-                    <a:p>
-                      <a:pPr>
-                        <a:defRPr sz="650" b="0">
-                          <a:solidFill>
-                            <a:srgbClr val="0D1117"/>
-                          </a:solidFill>
-                          <a:latin typeface="Inter"/>
-                        </a:defRPr>
-                      </a:pPr>
-                      <a:r>
-                        <a:rPr>
-                          <a:latin typeface="Inter"/>
-                        </a:rPr>
-                        <a:t>2026-06-30</a:t>
-                      </a:r>
-                    </a:p>
-                  </a:txBody>
-                  <a:tcPr marL="54864" marR="54864" marT="27432" marB="27432" anchor="ctr">
-                    <a:solidFill>
-                      <a:srgbClr val="F5F7F9"/>
-                    </a:solidFill>
-                  </a:tcPr>
-                </a:tc>
-                <a:tc>
-                  <a:txBody>
-                    <a:bodyPr/>
-                    <a:lstStyle/>
-                    <a:p>
-                      <a:pPr>
-                        <a:defRPr sz="650" b="0">
-                          <a:solidFill>
-                            <a:srgbClr val="0D1117"/>
-                          </a:solidFill>
-                          <a:latin typeface="Inter"/>
-                        </a:defRPr>
-                      </a:pPr>
-                      <a:r>
-                        <a:rPr>
-                          <a:latin typeface="Inter"/>
-                        </a:rPr>
-                        <a:t>Illustrative sample data</a:t>
-                      </a:r>
-                    </a:p>
-                  </a:txBody>
-                  <a:tcPr marL="54864" marR="54864" marT="27432" marB="27432" anchor="ctr">
-                    <a:solidFill>
-                      <a:srgbClr val="F5F7F9"/>
-                    </a:solidFill>
-                  </a:tcPr>
-                </a:tc>
-                <a:tc>
-                  <a:txBody>
-                    <a:bodyPr/>
-                    <a:lstStyle/>
-                    <a:p>
-                      <a:pPr>
-                        <a:defRPr sz="650" b="0">
-                          <a:solidFill>
-                            <a:srgbClr val="0D1117"/>
-                          </a:solidFill>
-                          <a:latin typeface="Inter"/>
-                        </a:defRPr>
-                      </a:pPr>
-                      <a:r>
-                        <a:rPr>
-                          <a:latin typeface="Inter"/>
-                        </a:rPr>
-                        <a:t>passed</a:t>
-                      </a:r>
-                    </a:p>
-                  </a:txBody>
-                  <a:tcPr marL="54864" marR="54864" marT="27432" marB="27432" anchor="ctr">
-                    <a:solidFill>
-                      <a:srgbClr val="F5F7F9"/>
-                    </a:solidFill>
-                  </a:tcPr>
-                </a:tc>
-                <a:tc>
-                  <a:txBody>
-                    <a:bodyPr/>
-                    <a:lstStyle/>
-                    <a:p>
-                      <a:pPr>
-                        <a:defRPr sz="650" b="0">
-                          <a:solidFill>
-                            <a:srgbClr val="0D1117"/>
-                          </a:solidFill>
-                          <a:latin typeface="Inter"/>
-                        </a:defRPr>
-                      </a:pPr>
-                      <a:r>
-                        <a:rPr>
-                          <a:latin typeface="Inter"/>
-                        </a:rPr>
-                        <a:t>sha256:aaaaaaaaaaaaaaaaaaaaaaaaaaaaaaaaaaaaaaaaaaaaaaaaaaaaaaaaaaaaaaaa</a:t>
+                        <a:defRPr sz="720" b="1">
+                          <a:solidFill>
+                            <a:srgbClr val="C6F432"/>
+                          </a:solidFill>
+                          <a:latin typeface="Inter"/>
+                        </a:defRPr>
+                      </a:pPr>
+                      <a:r>
+                        <a:rPr>
+                          <a:latin typeface="Inter"/>
+                        </a:rPr>
+                        <a:t>● Passed</a:t>
                       </a:r>
                     </a:p>
                   </a:txBody>
@@ -27257,7 +26006,7 @@
                     <a:lstStyle/>
                     <a:p>
                       <a:pPr>
-                        <a:defRPr sz="650" b="1">
+                        <a:defRPr sz="720" b="1">
                           <a:solidFill>
                             <a:srgbClr val="0D1117"/>
                           </a:solidFill>
@@ -27284,7 +26033,7 @@
                     <a:lstStyle/>
                     <a:p>
                       <a:pPr>
-                        <a:defRPr sz="650" b="0">
+                        <a:defRPr sz="720" b="0">
                           <a:solidFill>
                             <a:srgbClr val="0D1117"/>
                           </a:solidFill>
@@ -27311,7 +26060,7 @@
                     <a:lstStyle/>
                     <a:p>
                       <a:pPr>
-                        <a:defRPr sz="650" b="0">
+                        <a:defRPr sz="720" b="0">
                           <a:solidFill>
                             <a:srgbClr val="0D1117"/>
                           </a:solidFill>
@@ -27322,7 +26071,7 @@
                         <a:rPr>
                           <a:latin typeface="Inter"/>
                         </a:rPr>
-                        <a:t>gradient_tool</a:t>
+                        <a:t>check_portfolio_policy</a:t>
                       </a:r>
                     </a:p>
                   </a:txBody>
@@ -27338,7 +26087,7 @@
                     <a:lstStyle/>
                     <a:p>
                       <a:pPr>
-                        <a:defRPr sz="650" b="0">
+                        <a:defRPr sz="720" b="0">
                           <a:solidFill>
                             <a:srgbClr val="0D1117"/>
                           </a:solidFill>
@@ -27349,7 +26098,7 @@
                         <a:rPr>
                           <a:latin typeface="Inter"/>
                         </a:rPr>
-                        <a:t>check_portfolio_policy</a:t>
+                        <a:t>2026-06-30</a:t>
                       </a:r>
                     </a:p>
                   </a:txBody>
@@ -27365,132 +26114,24 @@
                     <a:lstStyle/>
                     <a:p>
                       <a:pPr>
-                        <a:defRPr sz="650" b="0">
-                          <a:solidFill>
-                            <a:srgbClr val="0D1117"/>
-                          </a:solidFill>
-                          <a:latin typeface="Inter"/>
-                        </a:defRPr>
-                      </a:pPr>
-                      <a:r>
-                        <a:rPr>
-                          <a:latin typeface="Inter"/>
-                        </a:rPr>
-                        <a:t>portfolio=test</a:t>
-                      </a:r>
-                    </a:p>
-                  </a:txBody>
-                  <a:tcPr marL="54864" marR="54864" marT="27432" marB="27432" anchor="ctr">
-                    <a:solidFill>
-                      <a:srgbClr val="FFFFFF"/>
-                    </a:solidFill>
-                  </a:tcPr>
-                </a:tc>
-                <a:tc>
-                  <a:txBody>
-                    <a:bodyPr/>
-                    <a:lstStyle/>
-                    <a:p>
-                      <a:pPr>
-                        <a:defRPr sz="650" b="0">
-                          <a:solidFill>
-                            <a:srgbClr val="0D1117"/>
-                          </a:solidFill>
-                          <a:latin typeface="Inter"/>
-                        </a:defRPr>
-                      </a:pPr>
-                      <a:r>
-                        <a:rPr>
-                          <a:latin typeface="Inter"/>
-                        </a:rPr>
-                        <a:t>2026-06-30</a:t>
-                      </a:r>
-                    </a:p>
-                  </a:txBody>
-                  <a:tcPr marL="54864" marR="54864" marT="27432" marB="27432" anchor="ctr">
-                    <a:solidFill>
-                      <a:srgbClr val="FFFFFF"/>
-                    </a:solidFill>
-                  </a:tcPr>
-                </a:tc>
-                <a:tc>
-                  <a:txBody>
-                    <a:bodyPr/>
-                    <a:lstStyle/>
-                    <a:p>
-                      <a:pPr>
-                        <a:defRPr sz="650" b="0">
-                          <a:solidFill>
-                            <a:srgbClr val="0D1117"/>
-                          </a:solidFill>
-                          <a:latin typeface="Inter"/>
-                        </a:defRPr>
-                      </a:pPr>
-                      <a:r>
-                        <a:rPr>
-                          <a:latin typeface="Inter"/>
-                        </a:rPr>
-                        <a:t>Illustrative sample data</a:t>
-                      </a:r>
-                    </a:p>
-                  </a:txBody>
-                  <a:tcPr marL="54864" marR="54864" marT="27432" marB="27432" anchor="ctr">
-                    <a:solidFill>
-                      <a:srgbClr val="FFFFFF"/>
-                    </a:solidFill>
-                  </a:tcPr>
-                </a:tc>
-                <a:tc>
-                  <a:txBody>
-                    <a:bodyPr/>
-                    <a:lstStyle/>
-                    <a:p>
-                      <a:pPr>
-                        <a:defRPr sz="650" b="0">
-                          <a:solidFill>
-                            <a:srgbClr val="0D1117"/>
-                          </a:solidFill>
-                          <a:latin typeface="Inter"/>
-                        </a:defRPr>
-                      </a:pPr>
-                      <a:r>
-                        <a:rPr>
-                          <a:latin typeface="Inter"/>
-                        </a:rPr>
-                        <a:t>passed</a:t>
-                      </a:r>
-                    </a:p>
-                  </a:txBody>
-                  <a:tcPr marL="54864" marR="54864" marT="27432" marB="27432" anchor="ctr">
-                    <a:solidFill>
-                      <a:srgbClr val="FFFFFF"/>
-                    </a:solidFill>
-                  </a:tcPr>
-                </a:tc>
-                <a:tc>
-                  <a:txBody>
-                    <a:bodyPr/>
-                    <a:lstStyle/>
-                    <a:p>
-                      <a:pPr>
-                        <a:defRPr sz="650" b="0">
-                          <a:solidFill>
-                            <a:srgbClr val="0D1117"/>
-                          </a:solidFill>
-                          <a:latin typeface="Inter"/>
-                        </a:defRPr>
-                      </a:pPr>
-                      <a:r>
-                        <a:rPr>
-                          <a:latin typeface="Inter"/>
-                        </a:rPr>
-                        <a:t>sha256:aaaaaaaaaaaaaaaaaaaaaaaaaaaaaaaaaaaaaaaaaaaaaaaaaaaaaaaaaaaaaaaa</a:t>
-                      </a:r>
-                    </a:p>
-                  </a:txBody>
-                  <a:tcPr marL="54864" marR="54864" marT="27432" marB="27432" anchor="ctr">
-                    <a:solidFill>
-                      <a:srgbClr val="FFFFFF"/>
+                        <a:defRPr sz="720" b="1">
+                          <a:solidFill>
+                            <a:srgbClr val="C6F432"/>
+                          </a:solidFill>
+                          <a:latin typeface="Inter"/>
+                        </a:defRPr>
+                      </a:pPr>
+                      <a:r>
+                        <a:rPr>
+                          <a:latin typeface="Inter"/>
+                        </a:rPr>
+                        <a:t>● Passed</a:t>
+                      </a:r>
+                    </a:p>
+                  </a:txBody>
+                  <a:tcPr marL="54864" marR="54864" marT="27432" marB="27432" anchor="ctr">
+                    <a:solidFill>
+                      <a:srgbClr val="F5F7F9"/>
                     </a:solidFill>
                   </a:tcPr>
                 </a:tc>
@@ -27502,7 +26143,7 @@
                     <a:lstStyle/>
                     <a:p>
                       <a:pPr>
-                        <a:defRPr sz="650" b="1">
+                        <a:defRPr sz="720" b="1">
                           <a:solidFill>
                             <a:srgbClr val="0D1117"/>
                           </a:solidFill>
@@ -27529,7 +26170,7 @@
                     <a:lstStyle/>
                     <a:p>
                       <a:pPr>
-                        <a:defRPr sz="650" b="0">
+                        <a:defRPr sz="720" b="0">
                           <a:solidFill>
                             <a:srgbClr val="0D1117"/>
                           </a:solidFill>
@@ -27556,7 +26197,7 @@
                     <a:lstStyle/>
                     <a:p>
                       <a:pPr>
-                        <a:defRPr sz="650" b="0">
+                        <a:defRPr sz="720" b="0">
                           <a:solidFill>
                             <a:srgbClr val="0D1117"/>
                           </a:solidFill>
@@ -27567,7 +26208,7 @@
                         <a:rPr>
                           <a:latin typeface="Inter"/>
                         </a:rPr>
-                        <a:t>gradient_tool</a:t>
+                        <a:t>get_portfolio_exposure</a:t>
                       </a:r>
                     </a:p>
                   </a:txBody>
@@ -27583,7 +26224,7 @@
                     <a:lstStyle/>
                     <a:p>
                       <a:pPr>
-                        <a:defRPr sz="650" b="0">
+                        <a:defRPr sz="720" b="0">
                           <a:solidFill>
                             <a:srgbClr val="0D1117"/>
                           </a:solidFill>
@@ -27594,7 +26235,7 @@
                         <a:rPr>
                           <a:latin typeface="Inter"/>
                         </a:rPr>
-                        <a:t>get_portfolio_exposure; get_portfolio_exposure</a:t>
+                        <a:t>2026-06-30</a:t>
                       </a:r>
                     </a:p>
                   </a:txBody>
@@ -27610,126 +26251,18 @@
                     <a:lstStyle/>
                     <a:p>
                       <a:pPr>
-                        <a:defRPr sz="650" b="0">
-                          <a:solidFill>
-                            <a:srgbClr val="0D1117"/>
-                          </a:solidFill>
-                          <a:latin typeface="Inter"/>
-                        </a:defRPr>
-                      </a:pPr>
-                      <a:r>
-                        <a:rPr>
-                          <a:latin typeface="Inter"/>
-                        </a:rPr>
-                        <a:t>public_equity; allocations</a:t>
-                      </a:r>
-                    </a:p>
-                  </a:txBody>
-                  <a:tcPr marL="54864" marR="54864" marT="27432" marB="27432" anchor="ctr">
-                    <a:solidFill>
-                      <a:srgbClr val="F5F7F9"/>
-                    </a:solidFill>
-                  </a:tcPr>
-                </a:tc>
-                <a:tc>
-                  <a:txBody>
-                    <a:bodyPr/>
-                    <a:lstStyle/>
-                    <a:p>
-                      <a:pPr>
-                        <a:defRPr sz="650" b="0">
-                          <a:solidFill>
-                            <a:srgbClr val="0D1117"/>
-                          </a:solidFill>
-                          <a:latin typeface="Inter"/>
-                        </a:defRPr>
-                      </a:pPr>
-                      <a:r>
-                        <a:rPr>
-                          <a:latin typeface="Inter"/>
-                        </a:rPr>
-                        <a:t>2026-06-30</a:t>
-                      </a:r>
-                    </a:p>
-                  </a:txBody>
-                  <a:tcPr marL="54864" marR="54864" marT="27432" marB="27432" anchor="ctr">
-                    <a:solidFill>
-                      <a:srgbClr val="F5F7F9"/>
-                    </a:solidFill>
-                  </a:tcPr>
-                </a:tc>
-                <a:tc>
-                  <a:txBody>
-                    <a:bodyPr/>
-                    <a:lstStyle/>
-                    <a:p>
-                      <a:pPr>
-                        <a:defRPr sz="650" b="0">
-                          <a:solidFill>
-                            <a:srgbClr val="0D1117"/>
-                          </a:solidFill>
-                          <a:latin typeface="Inter"/>
-                        </a:defRPr>
-                      </a:pPr>
-                      <a:r>
-                        <a:rPr>
-                          <a:latin typeface="Inter"/>
-                        </a:rPr>
-                        <a:t>Illustrative sample data</a:t>
-                      </a:r>
-                    </a:p>
-                  </a:txBody>
-                  <a:tcPr marL="54864" marR="54864" marT="27432" marB="27432" anchor="ctr">
-                    <a:solidFill>
-                      <a:srgbClr val="F5F7F9"/>
-                    </a:solidFill>
-                  </a:tcPr>
-                </a:tc>
-                <a:tc>
-                  <a:txBody>
-                    <a:bodyPr/>
-                    <a:lstStyle/>
-                    <a:p>
-                      <a:pPr>
-                        <a:defRPr sz="650" b="0">
-                          <a:solidFill>
-                            <a:srgbClr val="0D1117"/>
-                          </a:solidFill>
-                          <a:latin typeface="Inter"/>
-                        </a:defRPr>
-                      </a:pPr>
-                      <a:r>
-                        <a:rPr>
-                          <a:latin typeface="Inter"/>
-                        </a:rPr>
-                        <a:t>passed</a:t>
-                      </a:r>
-                    </a:p>
-                  </a:txBody>
-                  <a:tcPr marL="54864" marR="54864" marT="27432" marB="27432" anchor="ctr">
-                    <a:solidFill>
-                      <a:srgbClr val="F5F7F9"/>
-                    </a:solidFill>
-                  </a:tcPr>
-                </a:tc>
-                <a:tc>
-                  <a:txBody>
-                    <a:bodyPr/>
-                    <a:lstStyle/>
-                    <a:p>
-                      <a:pPr>
-                        <a:defRPr sz="650" b="0">
-                          <a:solidFill>
-                            <a:srgbClr val="0D1117"/>
-                          </a:solidFill>
-                          <a:latin typeface="Inter"/>
-                        </a:defRPr>
-                      </a:pPr>
-                      <a:r>
-                        <a:rPr>
-                          <a:latin typeface="Inter"/>
-                        </a:rPr>
-                        <a:t>sha256:aaaaaaaaaaaaaaaaaaaaaaaaaaaaaaaaaaaaaaaaaaaaaaaaaaaaaaaaaaaaaaaa</a:t>
+                        <a:defRPr sz="720" b="1">
+                          <a:solidFill>
+                            <a:srgbClr val="C6F432"/>
+                          </a:solidFill>
+                          <a:latin typeface="Inter"/>
+                        </a:defRPr>
+                      </a:pPr>
+                      <a:r>
+                        <a:rPr>
+                          <a:latin typeface="Inter"/>
+                        </a:rPr>
+                        <a:t>● Passed</a:t>
                       </a:r>
                     </a:p>
                   </a:txBody>
@@ -27747,7 +26280,7 @@
                     <a:lstStyle/>
                     <a:p>
                       <a:pPr>
-                        <a:defRPr sz="650" b="1">
+                        <a:defRPr sz="720" b="1">
                           <a:solidFill>
                             <a:srgbClr val="0D1117"/>
                           </a:solidFill>
@@ -27774,7 +26307,7 @@
                     <a:lstStyle/>
                     <a:p>
                       <a:pPr>
-                        <a:defRPr sz="650" b="0">
+                        <a:defRPr sz="720" b="0">
                           <a:solidFill>
                             <a:srgbClr val="0D1117"/>
                           </a:solidFill>
@@ -27801,7 +26334,7 @@
                     <a:lstStyle/>
                     <a:p>
                       <a:pPr>
-                        <a:defRPr sz="650" b="0">
+                        <a:defRPr sz="720" b="0">
                           <a:solidFill>
                             <a:srgbClr val="0D1117"/>
                           </a:solidFill>
@@ -27812,7 +26345,7 @@
                         <a:rPr>
                           <a:latin typeface="Inter"/>
                         </a:rPr>
-                        <a:t>gradient_tool</a:t>
+                        <a:t>get_portfolio_historical_returns; get_portfolio_attribution</a:t>
                       </a:r>
                     </a:p>
                   </a:txBody>
@@ -27828,7 +26361,7 @@
                     <a:lstStyle/>
                     <a:p>
                       <a:pPr>
-                        <a:defRPr sz="650" b="0">
+                        <a:defRPr sz="720" b="0">
                           <a:solidFill>
                             <a:srgbClr val="0D1117"/>
                           </a:solidFill>
@@ -27839,7 +26372,7 @@
                         <a:rPr>
                           <a:latin typeface="Inter"/>
                         </a:rPr>
-                        <a:t>get_portfolio_historical_returns; get_portfolio_attribution</a:t>
+                        <a:t>2026-06-30</a:t>
                       </a:r>
                     </a:p>
                   </a:txBody>
@@ -27855,132 +26388,24 @@
                     <a:lstStyle/>
                     <a:p>
                       <a:pPr>
-                        <a:defRPr sz="650" b="0">
-                          <a:solidFill>
-                            <a:srgbClr val="0D1117"/>
-                          </a:solidFill>
-                          <a:latin typeface="Inter"/>
-                        </a:defRPr>
-                      </a:pPr>
-                      <a:r>
-                        <a:rPr>
-                          <a:latin typeface="Inter"/>
-                        </a:rPr>
-                        <a:t>all sections</a:t>
-                      </a:r>
-                    </a:p>
-                  </a:txBody>
-                  <a:tcPr marL="54864" marR="54864" marT="27432" marB="27432" anchor="ctr">
-                    <a:solidFill>
-                      <a:srgbClr val="FFFFFF"/>
-                    </a:solidFill>
-                  </a:tcPr>
-                </a:tc>
-                <a:tc>
-                  <a:txBody>
-                    <a:bodyPr/>
-                    <a:lstStyle/>
-                    <a:p>
-                      <a:pPr>
-                        <a:defRPr sz="650" b="0">
-                          <a:solidFill>
-                            <a:srgbClr val="0D1117"/>
-                          </a:solidFill>
-                          <a:latin typeface="Inter"/>
-                        </a:defRPr>
-                      </a:pPr>
-                      <a:r>
-                        <a:rPr>
-                          <a:latin typeface="Inter"/>
-                        </a:rPr>
-                        <a:t>2026-06-30</a:t>
-                      </a:r>
-                    </a:p>
-                  </a:txBody>
-                  <a:tcPr marL="54864" marR="54864" marT="27432" marB="27432" anchor="ctr">
-                    <a:solidFill>
-                      <a:srgbClr val="FFFFFF"/>
-                    </a:solidFill>
-                  </a:tcPr>
-                </a:tc>
-                <a:tc>
-                  <a:txBody>
-                    <a:bodyPr/>
-                    <a:lstStyle/>
-                    <a:p>
-                      <a:pPr>
-                        <a:defRPr sz="650" b="0">
-                          <a:solidFill>
-                            <a:srgbClr val="0D1117"/>
-                          </a:solidFill>
-                          <a:latin typeface="Inter"/>
-                        </a:defRPr>
-                      </a:pPr>
-                      <a:r>
-                        <a:rPr>
-                          <a:latin typeface="Inter"/>
-                        </a:rPr>
-                        <a:t>Illustrative sample data</a:t>
-                      </a:r>
-                    </a:p>
-                  </a:txBody>
-                  <a:tcPr marL="54864" marR="54864" marT="27432" marB="27432" anchor="ctr">
-                    <a:solidFill>
-                      <a:srgbClr val="FFFFFF"/>
-                    </a:solidFill>
-                  </a:tcPr>
-                </a:tc>
-                <a:tc>
-                  <a:txBody>
-                    <a:bodyPr/>
-                    <a:lstStyle/>
-                    <a:p>
-                      <a:pPr>
-                        <a:defRPr sz="650" b="0">
-                          <a:solidFill>
-                            <a:srgbClr val="0D1117"/>
-                          </a:solidFill>
-                          <a:latin typeface="Inter"/>
-                        </a:defRPr>
-                      </a:pPr>
-                      <a:r>
-                        <a:rPr>
-                          <a:latin typeface="Inter"/>
-                        </a:rPr>
-                        <a:t>degraded</a:t>
-                      </a:r>
-                    </a:p>
-                  </a:txBody>
-                  <a:tcPr marL="54864" marR="54864" marT="27432" marB="27432" anchor="ctr">
-                    <a:solidFill>
-                      <a:srgbClr val="FFFFFF"/>
-                    </a:solidFill>
-                  </a:tcPr>
-                </a:tc>
-                <a:tc>
-                  <a:txBody>
-                    <a:bodyPr/>
-                    <a:lstStyle/>
-                    <a:p>
-                      <a:pPr>
-                        <a:defRPr sz="650" b="0">
-                          <a:solidFill>
-                            <a:srgbClr val="0D1117"/>
-                          </a:solidFill>
-                          <a:latin typeface="Inter"/>
-                        </a:defRPr>
-                      </a:pPr>
-                      <a:r>
-                        <a:rPr>
-                          <a:latin typeface="Inter"/>
-                        </a:rPr>
-                        <a:t>sha256:aaaaaaaaaaaaaaaaaaaaaaaaaaaaaaaaaaaaaaaaaaaaaaaaaaaaaaaaaaaaaaaa</a:t>
-                      </a:r>
-                    </a:p>
-                  </a:txBody>
-                  <a:tcPr marL="54864" marR="54864" marT="27432" marB="27432" anchor="ctr">
-                    <a:solidFill>
-                      <a:srgbClr val="FFFFFF"/>
+                        <a:defRPr sz="720" b="1">
+                          <a:solidFill>
+                            <a:srgbClr val="F2A93B"/>
+                          </a:solidFill>
+                          <a:latin typeface="Inter"/>
+                        </a:defRPr>
+                      </a:pPr>
+                      <a:r>
+                        <a:rPr>
+                          <a:latin typeface="Inter"/>
+                        </a:rPr>
+                        <a:t>● Incomplete</a:t>
+                      </a:r>
+                    </a:p>
+                  </a:txBody>
+                  <a:tcPr marL="54864" marR="54864" marT="27432" marB="27432" anchor="ctr">
+                    <a:solidFill>
+                      <a:srgbClr val="F5F7F9"/>
                     </a:solidFill>
                   </a:tcPr>
                 </a:tc>
@@ -27992,7 +26417,7 @@
                     <a:lstStyle/>
                     <a:p>
                       <a:pPr>
-                        <a:defRPr sz="650" b="1">
+                        <a:defRPr sz="720" b="1">
                           <a:solidFill>
                             <a:srgbClr val="0D1117"/>
                           </a:solidFill>
@@ -28019,7 +26444,7 @@
                     <a:lstStyle/>
                     <a:p>
                       <a:pPr>
-                        <a:defRPr sz="650" b="0">
+                        <a:defRPr sz="720" b="0">
                           <a:solidFill>
                             <a:srgbClr val="0D1117"/>
                           </a:solidFill>
@@ -28046,7 +26471,7 @@
                     <a:lstStyle/>
                     <a:p>
                       <a:pPr>
-                        <a:defRPr sz="650" b="0">
+                        <a:defRPr sz="720" b="0">
                           <a:solidFill>
                             <a:srgbClr val="0D1117"/>
                           </a:solidFill>
@@ -28057,7 +26482,7 @@
                         <a:rPr>
                           <a:latin typeface="Inter"/>
                         </a:rPr>
-                        <a:t>gradient_tool</a:t>
+                        <a:t>get_capital_market_assumptions</a:t>
                       </a:r>
                     </a:p>
                   </a:txBody>
@@ -28073,7 +26498,7 @@
                     <a:lstStyle/>
                     <a:p>
                       <a:pPr>
-                        <a:defRPr sz="650" b="0">
+                        <a:defRPr sz="720" b="0">
                           <a:solidFill>
                             <a:srgbClr val="0D1117"/>
                           </a:solidFill>
@@ -28084,7 +26509,7 @@
                         <a:rPr>
                           <a:latin typeface="Inter"/>
                         </a:rPr>
-                        <a:t>get_capital_market_assumptions</a:t>
+                        <a:t>2026-06-15</a:t>
                       </a:r>
                     </a:p>
                   </a:txBody>
@@ -28100,126 +26525,18 @@
                     <a:lstStyle/>
                     <a:p>
                       <a:pPr>
-                        <a:defRPr sz="650" b="0">
-                          <a:solidFill>
-                            <a:srgbClr val="0D1117"/>
-                          </a:solidFill>
-                          <a:latin typeface="Inter"/>
-                        </a:defRPr>
-                      </a:pPr>
-                      <a:r>
-                        <a:rPr>
-                          <a:latin typeface="Inter"/>
-                        </a:rPr>
-                        <a:t>baseline</a:t>
-                      </a:r>
-                    </a:p>
-                  </a:txBody>
-                  <a:tcPr marL="54864" marR="54864" marT="27432" marB="27432" anchor="ctr">
-                    <a:solidFill>
-                      <a:srgbClr val="F5F7F9"/>
-                    </a:solidFill>
-                  </a:tcPr>
-                </a:tc>
-                <a:tc>
-                  <a:txBody>
-                    <a:bodyPr/>
-                    <a:lstStyle/>
-                    <a:p>
-                      <a:pPr>
-                        <a:defRPr sz="650" b="0">
-                          <a:solidFill>
-                            <a:srgbClr val="0D1117"/>
-                          </a:solidFill>
-                          <a:latin typeface="Inter"/>
-                        </a:defRPr>
-                      </a:pPr>
-                      <a:r>
-                        <a:rPr>
-                          <a:latin typeface="Inter"/>
-                        </a:rPr>
-                        <a:t>2026-06-15</a:t>
-                      </a:r>
-                    </a:p>
-                  </a:txBody>
-                  <a:tcPr marL="54864" marR="54864" marT="27432" marB="27432" anchor="ctr">
-                    <a:solidFill>
-                      <a:srgbClr val="F5F7F9"/>
-                    </a:solidFill>
-                  </a:tcPr>
-                </a:tc>
-                <a:tc>
-                  <a:txBody>
-                    <a:bodyPr/>
-                    <a:lstStyle/>
-                    <a:p>
-                      <a:pPr>
-                        <a:defRPr sz="650" b="0">
-                          <a:solidFill>
-                            <a:srgbClr val="0D1117"/>
-                          </a:solidFill>
-                          <a:latin typeface="Inter"/>
-                        </a:defRPr>
-                      </a:pPr>
-                      <a:r>
-                        <a:rPr>
-                          <a:latin typeface="Inter"/>
-                        </a:rPr>
-                        <a:t>Illustrative sample data</a:t>
-                      </a:r>
-                    </a:p>
-                  </a:txBody>
-                  <a:tcPr marL="54864" marR="54864" marT="27432" marB="27432" anchor="ctr">
-                    <a:solidFill>
-                      <a:srgbClr val="F5F7F9"/>
-                    </a:solidFill>
-                  </a:tcPr>
-                </a:tc>
-                <a:tc>
-                  <a:txBody>
-                    <a:bodyPr/>
-                    <a:lstStyle/>
-                    <a:p>
-                      <a:pPr>
-                        <a:defRPr sz="650" b="0">
-                          <a:solidFill>
-                            <a:srgbClr val="0D1117"/>
-                          </a:solidFill>
-                          <a:latin typeface="Inter"/>
-                        </a:defRPr>
-                      </a:pPr>
-                      <a:r>
-                        <a:rPr>
-                          <a:latin typeface="Inter"/>
-                        </a:rPr>
-                        <a:t>passed</a:t>
-                      </a:r>
-                    </a:p>
-                  </a:txBody>
-                  <a:tcPr marL="54864" marR="54864" marT="27432" marB="27432" anchor="ctr">
-                    <a:solidFill>
-                      <a:srgbClr val="F5F7F9"/>
-                    </a:solidFill>
-                  </a:tcPr>
-                </a:tc>
-                <a:tc>
-                  <a:txBody>
-                    <a:bodyPr/>
-                    <a:lstStyle/>
-                    <a:p>
-                      <a:pPr>
-                        <a:defRPr sz="650" b="0">
-                          <a:solidFill>
-                            <a:srgbClr val="0D1117"/>
-                          </a:solidFill>
-                          <a:latin typeface="Inter"/>
-                        </a:defRPr>
-                      </a:pPr>
-                      <a:r>
-                        <a:rPr>
-                          <a:latin typeface="Inter"/>
-                        </a:rPr>
-                        <a:t>sha256:aaaaaaaaaaaaaaaaaaaaaaaaaaaaaaaaaaaaaaaaaaaaaaaaaaaaaaaaaaaaaaaa</a:t>
+                        <a:defRPr sz="720" b="1">
+                          <a:solidFill>
+                            <a:srgbClr val="C6F432"/>
+                          </a:solidFill>
+                          <a:latin typeface="Inter"/>
+                        </a:defRPr>
+                      </a:pPr>
+                      <a:r>
+                        <a:rPr>
+                          <a:latin typeface="Inter"/>
+                        </a:rPr>
+                        <a:t>● Passed</a:t>
                       </a:r>
                     </a:p>
                   </a:txBody>
@@ -28237,7 +26554,7 @@
                     <a:lstStyle/>
                     <a:p>
                       <a:pPr>
-                        <a:defRPr sz="650" b="1">
+                        <a:defRPr sz="720" b="1">
                           <a:solidFill>
                             <a:srgbClr val="0D1117"/>
                           </a:solidFill>
@@ -28264,7 +26581,7 @@
                     <a:lstStyle/>
                     <a:p>
                       <a:pPr>
-                        <a:defRPr sz="650" b="0">
+                        <a:defRPr sz="720" b="0">
                           <a:solidFill>
                             <a:srgbClr val="0D1117"/>
                           </a:solidFill>
@@ -28291,7 +26608,7 @@
                     <a:lstStyle/>
                     <a:p>
                       <a:pPr>
-                        <a:defRPr sz="650" b="0">
+                        <a:defRPr sz="720" b="0">
                           <a:solidFill>
                             <a:srgbClr val="0D1117"/>
                           </a:solidFill>
@@ -28302,7 +26619,7 @@
                         <a:rPr>
                           <a:latin typeface="Inter"/>
                         </a:rPr>
-                        <a:t>gradient_tool</a:t>
+                        <a:t>get_portfolio_exposure</a:t>
                       </a:r>
                     </a:p>
                   </a:txBody>
@@ -28318,7 +26635,7 @@
                     <a:lstStyle/>
                     <a:p>
                       <a:pPr>
-                        <a:defRPr sz="650" b="0">
+                        <a:defRPr sz="720" b="0">
                           <a:solidFill>
                             <a:srgbClr val="0D1117"/>
                           </a:solidFill>
@@ -28329,7 +26646,7 @@
                         <a:rPr>
                           <a:latin typeface="Inter"/>
                         </a:rPr>
-                        <a:t>get_portfolio_exposure</a:t>
+                        <a:t>2026-05-15</a:t>
                       </a:r>
                     </a:p>
                   </a:txBody>
@@ -28345,132 +26662,24 @@
                     <a:lstStyle/>
                     <a:p>
                       <a:pPr>
-                        <a:defRPr sz="650" b="0">
-                          <a:solidFill>
-                            <a:srgbClr val="0D1117"/>
-                          </a:solidFill>
-                          <a:latin typeface="Inter"/>
-                        </a:defRPr>
-                      </a:pPr>
-                      <a:r>
-                        <a:rPr>
-                          <a:latin typeface="Inter"/>
-                        </a:rPr>
-                        <a:t>include=lookthrough_13f</a:t>
-                      </a:r>
-                    </a:p>
-                  </a:txBody>
-                  <a:tcPr marL="54864" marR="54864" marT="27432" marB="27432" anchor="ctr">
-                    <a:solidFill>
-                      <a:srgbClr val="FFFFFF"/>
-                    </a:solidFill>
-                  </a:tcPr>
-                </a:tc>
-                <a:tc>
-                  <a:txBody>
-                    <a:bodyPr/>
-                    <a:lstStyle/>
-                    <a:p>
-                      <a:pPr>
-                        <a:defRPr sz="650" b="0">
-                          <a:solidFill>
-                            <a:srgbClr val="0D1117"/>
-                          </a:solidFill>
-                          <a:latin typeface="Inter"/>
-                        </a:defRPr>
-                      </a:pPr>
-                      <a:r>
-                        <a:rPr>
-                          <a:latin typeface="Inter"/>
-                        </a:rPr>
-                        <a:t>2026-05-15</a:t>
-                      </a:r>
-                    </a:p>
-                  </a:txBody>
-                  <a:tcPr marL="54864" marR="54864" marT="27432" marB="27432" anchor="ctr">
-                    <a:solidFill>
-                      <a:srgbClr val="FFFFFF"/>
-                    </a:solidFill>
-                  </a:tcPr>
-                </a:tc>
-                <a:tc>
-                  <a:txBody>
-                    <a:bodyPr/>
-                    <a:lstStyle/>
-                    <a:p>
-                      <a:pPr>
-                        <a:defRPr sz="650" b="0">
-                          <a:solidFill>
-                            <a:srgbClr val="0D1117"/>
-                          </a:solidFill>
-                          <a:latin typeface="Inter"/>
-                        </a:defRPr>
-                      </a:pPr>
-                      <a:r>
-                        <a:rPr>
-                          <a:latin typeface="Inter"/>
-                        </a:rPr>
-                        <a:t>Illustrative sample data</a:t>
-                      </a:r>
-                    </a:p>
-                  </a:txBody>
-                  <a:tcPr marL="54864" marR="54864" marT="27432" marB="27432" anchor="ctr">
-                    <a:solidFill>
-                      <a:srgbClr val="FFFFFF"/>
-                    </a:solidFill>
-                  </a:tcPr>
-                </a:tc>
-                <a:tc>
-                  <a:txBody>
-                    <a:bodyPr/>
-                    <a:lstStyle/>
-                    <a:p>
-                      <a:pPr>
-                        <a:defRPr sz="650" b="0">
-                          <a:solidFill>
-                            <a:srgbClr val="0D1117"/>
-                          </a:solidFill>
-                          <a:latin typeface="Inter"/>
-                        </a:defRPr>
-                      </a:pPr>
-                      <a:r>
-                        <a:rPr>
-                          <a:latin typeface="Inter"/>
-                        </a:rPr>
-                        <a:t>advisory</a:t>
-                      </a:r>
-                    </a:p>
-                  </a:txBody>
-                  <a:tcPr marL="54864" marR="54864" marT="27432" marB="27432" anchor="ctr">
-                    <a:solidFill>
-                      <a:srgbClr val="FFFFFF"/>
-                    </a:solidFill>
-                  </a:tcPr>
-                </a:tc>
-                <a:tc>
-                  <a:txBody>
-                    <a:bodyPr/>
-                    <a:lstStyle/>
-                    <a:p>
-                      <a:pPr>
-                        <a:defRPr sz="650" b="0">
-                          <a:solidFill>
-                            <a:srgbClr val="0D1117"/>
-                          </a:solidFill>
-                          <a:latin typeface="Inter"/>
-                        </a:defRPr>
-                      </a:pPr>
-                      <a:r>
-                        <a:rPr>
-                          <a:latin typeface="Inter"/>
-                        </a:rPr>
-                        <a:t>sha256:aaaaaaaaaaaaaaaaaaaaaaaaaaaaaaaaaaaaaaaaaaaaaaaaaaaaaaaaaaaaaaaa</a:t>
-                      </a:r>
-                    </a:p>
-                  </a:txBody>
-                  <a:tcPr marL="54864" marR="54864" marT="27432" marB="27432" anchor="ctr">
-                    <a:solidFill>
-                      <a:srgbClr val="FFFFFF"/>
+                        <a:defRPr sz="720" b="1">
+                          <a:solidFill>
+                            <a:srgbClr val="F2A93B"/>
+                          </a:solidFill>
+                          <a:latin typeface="Inter"/>
+                        </a:defRPr>
+                      </a:pPr>
+                      <a:r>
+                        <a:rPr>
+                          <a:latin typeface="Inter"/>
+                        </a:rPr>
+                        <a:t>● Advisory</a:t>
+                      </a:r>
+                    </a:p>
+                  </a:txBody>
+                  <a:tcPr marL="54864" marR="54864" marT="27432" marB="27432" anchor="ctr">
+                    <a:solidFill>
+                      <a:srgbClr val="F5F7F9"/>
                     </a:solidFill>
                   </a:tcPr>
                 </a:tc>
@@ -28482,7 +26691,7 @@
                     <a:lstStyle/>
                     <a:p>
                       <a:pPr>
-                        <a:defRPr sz="650" b="1">
+                        <a:defRPr sz="720" b="1">
                           <a:solidFill>
                             <a:srgbClr val="0D1117"/>
                           </a:solidFill>
@@ -28509,7 +26718,7 @@
                     <a:lstStyle/>
                     <a:p>
                       <a:pPr>
-                        <a:defRPr sz="650" b="0">
+                        <a:defRPr sz="720" b="0">
                           <a:solidFill>
                             <a:srgbClr val="0D1117"/>
                           </a:solidFill>
@@ -28536,7 +26745,7 @@
                     <a:lstStyle/>
                     <a:p>
                       <a:pPr>
-                        <a:defRPr sz="650" b="0">
+                        <a:defRPr sz="720" b="0">
                           <a:solidFill>
                             <a:srgbClr val="0D1117"/>
                           </a:solidFill>
@@ -28547,7 +26756,7 @@
                         <a:rPr>
                           <a:latin typeface="Inter"/>
                         </a:rPr>
-                        <a:t>gradient_tool</a:t>
+                        <a:t>get_gradient_capabilities</a:t>
                       </a:r>
                     </a:p>
                   </a:txBody>
@@ -28563,7 +26772,7 @@
                     <a:lstStyle/>
                     <a:p>
                       <a:pPr>
-                        <a:defRPr sz="650" b="0">
+                        <a:defRPr sz="720" b="0">
                           <a:solidFill>
                             <a:srgbClr val="0D1117"/>
                           </a:solidFill>
@@ -28574,7 +26783,7 @@
                         <a:rPr>
                           <a:latin typeface="Inter"/>
                         </a:rPr>
-                        <a:t>get_gradient_capabilities</a:t>
+                        <a:t>2026-06-30</a:t>
                       </a:r>
                     </a:p>
                   </a:txBody>
@@ -28590,126 +26799,18 @@
                     <a:lstStyle/>
                     <a:p>
                       <a:pPr>
-                        <a:defRPr sz="650" b="0">
-                          <a:solidFill>
-                            <a:srgbClr val="0D1117"/>
-                          </a:solidFill>
-                          <a:latin typeface="Inter"/>
-                        </a:defRPr>
-                      </a:pPr>
-                      <a:r>
-                        <a:rPr>
-                          <a:latin typeface="Inter"/>
-                        </a:rPr>
-                        <a:t>illustrative</a:t>
-                      </a:r>
-                    </a:p>
-                  </a:txBody>
-                  <a:tcPr marL="54864" marR="54864" marT="27432" marB="27432" anchor="ctr">
-                    <a:solidFill>
-                      <a:srgbClr val="F5F7F9"/>
-                    </a:solidFill>
-                  </a:tcPr>
-                </a:tc>
-                <a:tc>
-                  <a:txBody>
-                    <a:bodyPr/>
-                    <a:lstStyle/>
-                    <a:p>
-                      <a:pPr>
-                        <a:defRPr sz="650" b="0">
-                          <a:solidFill>
-                            <a:srgbClr val="0D1117"/>
-                          </a:solidFill>
-                          <a:latin typeface="Inter"/>
-                        </a:defRPr>
-                      </a:pPr>
-                      <a:r>
-                        <a:rPr>
-                          <a:latin typeface="Inter"/>
-                        </a:rPr>
-                        <a:t>2026-06-30</a:t>
-                      </a:r>
-                    </a:p>
-                  </a:txBody>
-                  <a:tcPr marL="54864" marR="54864" marT="27432" marB="27432" anchor="ctr">
-                    <a:solidFill>
-                      <a:srgbClr val="F5F7F9"/>
-                    </a:solidFill>
-                  </a:tcPr>
-                </a:tc>
-                <a:tc>
-                  <a:txBody>
-                    <a:bodyPr/>
-                    <a:lstStyle/>
-                    <a:p>
-                      <a:pPr>
-                        <a:defRPr sz="650" b="0">
-                          <a:solidFill>
-                            <a:srgbClr val="0D1117"/>
-                          </a:solidFill>
-                          <a:latin typeface="Inter"/>
-                        </a:defRPr>
-                      </a:pPr>
-                      <a:r>
-                        <a:rPr>
-                          <a:latin typeface="Inter"/>
-                        </a:rPr>
-                        <a:t>Illustrative sample data</a:t>
-                      </a:r>
-                    </a:p>
-                  </a:txBody>
-                  <a:tcPr marL="54864" marR="54864" marT="27432" marB="27432" anchor="ctr">
-                    <a:solidFill>
-                      <a:srgbClr val="F5F7F9"/>
-                    </a:solidFill>
-                  </a:tcPr>
-                </a:tc>
-                <a:tc>
-                  <a:txBody>
-                    <a:bodyPr/>
-                    <a:lstStyle/>
-                    <a:p>
-                      <a:pPr>
-                        <a:defRPr sz="650" b="0">
-                          <a:solidFill>
-                            <a:srgbClr val="0D1117"/>
-                          </a:solidFill>
-                          <a:latin typeface="Inter"/>
-                        </a:defRPr>
-                      </a:pPr>
-                      <a:r>
-                        <a:rPr>
-                          <a:latin typeface="Inter"/>
-                        </a:rPr>
-                        <a:t>passed</a:t>
-                      </a:r>
-                    </a:p>
-                  </a:txBody>
-                  <a:tcPr marL="54864" marR="54864" marT="27432" marB="27432" anchor="ctr">
-                    <a:solidFill>
-                      <a:srgbClr val="F5F7F9"/>
-                    </a:solidFill>
-                  </a:tcPr>
-                </a:tc>
-                <a:tc>
-                  <a:txBody>
-                    <a:bodyPr/>
-                    <a:lstStyle/>
-                    <a:p>
-                      <a:pPr>
-                        <a:defRPr sz="650" b="0">
-                          <a:solidFill>
-                            <a:srgbClr val="0D1117"/>
-                          </a:solidFill>
-                          <a:latin typeface="Inter"/>
-                        </a:defRPr>
-                      </a:pPr>
-                      <a:r>
-                        <a:rPr>
-                          <a:latin typeface="Inter"/>
-                        </a:rPr>
-                        <a:t>sha256:aaaaaaaaaaaaaaaaaaaaaaaaaaaaaaaaaaaaaaaaaaaaaaaaaaaaaaaaaaaaaaaa</a:t>
+                        <a:defRPr sz="720" b="1">
+                          <a:solidFill>
+                            <a:srgbClr val="C6F432"/>
+                          </a:solidFill>
+                          <a:latin typeface="Inter"/>
+                        </a:defRPr>
+                      </a:pPr>
+                      <a:r>
+                        <a:rPr>
+                          <a:latin typeface="Inter"/>
+                        </a:rPr>
+                        <a:t>● Passed</a:t>
                       </a:r>
                     </a:p>
                   </a:txBody>
@@ -28727,7 +26828,7 @@
                     <a:lstStyle/>
                     <a:p>
                       <a:pPr>
-                        <a:defRPr sz="650" b="1">
+                        <a:defRPr sz="720" b="1">
                           <a:solidFill>
                             <a:srgbClr val="0D1117"/>
                           </a:solidFill>
@@ -28754,7 +26855,7 @@
                     <a:lstStyle/>
                     <a:p>
                       <a:pPr>
-                        <a:defRPr sz="650" b="0">
+                        <a:defRPr sz="720" b="0">
                           <a:solidFill>
                             <a:srgbClr val="0D1117"/>
                           </a:solidFill>
@@ -28781,7 +26882,7 @@
                     <a:lstStyle/>
                     <a:p>
                       <a:pPr>
-                        <a:defRPr sz="650" b="0">
+                        <a:defRPr sz="720" b="0">
                           <a:solidFill>
                             <a:srgbClr val="0D1117"/>
                           </a:solidFill>
@@ -28792,7 +26893,7 @@
                         <a:rPr>
                           <a:latin typeface="Inter"/>
                         </a:rPr>
-                        <a:t>gradient_tool</a:t>
+                        <a:t>get_gradient_capabilities</a:t>
                       </a:r>
                     </a:p>
                   </a:txBody>
@@ -28808,7 +26909,7 @@
                     <a:lstStyle/>
                     <a:p>
                       <a:pPr>
-                        <a:defRPr sz="650" b="0">
+                        <a:defRPr sz="720" b="0">
                           <a:solidFill>
                             <a:srgbClr val="0D1117"/>
                           </a:solidFill>
@@ -28819,7 +26920,7 @@
                         <a:rPr>
                           <a:latin typeface="Inter"/>
                         </a:rPr>
-                        <a:t>get_gradient_capabilities</a:t>
+                        <a:t>2026-06-30</a:t>
                       </a:r>
                     </a:p>
                   </a:txBody>
@@ -28835,132 +26936,24 @@
                     <a:lstStyle/>
                     <a:p>
                       <a:pPr>
-                        <a:defRPr sz="650" b="0">
-                          <a:solidFill>
-                            <a:srgbClr val="0D1117"/>
-                          </a:solidFill>
-                          <a:latin typeface="Inter"/>
-                        </a:defRPr>
-                      </a:pPr>
-                      <a:r>
-                        <a:rPr>
-                          <a:latin typeface="Inter"/>
-                        </a:rPr>
-                        <a:t>illustrative</a:t>
-                      </a:r>
-                    </a:p>
-                  </a:txBody>
-                  <a:tcPr marL="54864" marR="54864" marT="27432" marB="27432" anchor="ctr">
-                    <a:solidFill>
-                      <a:srgbClr val="FFFFFF"/>
-                    </a:solidFill>
-                  </a:tcPr>
-                </a:tc>
-                <a:tc>
-                  <a:txBody>
-                    <a:bodyPr/>
-                    <a:lstStyle/>
-                    <a:p>
-                      <a:pPr>
-                        <a:defRPr sz="650" b="0">
-                          <a:solidFill>
-                            <a:srgbClr val="0D1117"/>
-                          </a:solidFill>
-                          <a:latin typeface="Inter"/>
-                        </a:defRPr>
-                      </a:pPr>
-                      <a:r>
-                        <a:rPr>
-                          <a:latin typeface="Inter"/>
-                        </a:rPr>
-                        <a:t>2026-06-30</a:t>
-                      </a:r>
-                    </a:p>
-                  </a:txBody>
-                  <a:tcPr marL="54864" marR="54864" marT="27432" marB="27432" anchor="ctr">
-                    <a:solidFill>
-                      <a:srgbClr val="FFFFFF"/>
-                    </a:solidFill>
-                  </a:tcPr>
-                </a:tc>
-                <a:tc>
-                  <a:txBody>
-                    <a:bodyPr/>
-                    <a:lstStyle/>
-                    <a:p>
-                      <a:pPr>
-                        <a:defRPr sz="650" b="0">
-                          <a:solidFill>
-                            <a:srgbClr val="0D1117"/>
-                          </a:solidFill>
-                          <a:latin typeface="Inter"/>
-                        </a:defRPr>
-                      </a:pPr>
-                      <a:r>
-                        <a:rPr>
-                          <a:latin typeface="Inter"/>
-                        </a:rPr>
-                        <a:t>Illustrative sample data</a:t>
-                      </a:r>
-                    </a:p>
-                  </a:txBody>
-                  <a:tcPr marL="54864" marR="54864" marT="27432" marB="27432" anchor="ctr">
-                    <a:solidFill>
-                      <a:srgbClr val="FFFFFF"/>
-                    </a:solidFill>
-                  </a:tcPr>
-                </a:tc>
-                <a:tc>
-                  <a:txBody>
-                    <a:bodyPr/>
-                    <a:lstStyle/>
-                    <a:p>
-                      <a:pPr>
-                        <a:defRPr sz="650" b="0">
-                          <a:solidFill>
-                            <a:srgbClr val="0D1117"/>
-                          </a:solidFill>
-                          <a:latin typeface="Inter"/>
-                        </a:defRPr>
-                      </a:pPr>
-                      <a:r>
-                        <a:rPr>
-                          <a:latin typeface="Inter"/>
-                        </a:rPr>
-                        <a:t>advisory</a:t>
-                      </a:r>
-                    </a:p>
-                  </a:txBody>
-                  <a:tcPr marL="54864" marR="54864" marT="27432" marB="27432" anchor="ctr">
-                    <a:solidFill>
-                      <a:srgbClr val="FFFFFF"/>
-                    </a:solidFill>
-                  </a:tcPr>
-                </a:tc>
-                <a:tc>
-                  <a:txBody>
-                    <a:bodyPr/>
-                    <a:lstStyle/>
-                    <a:p>
-                      <a:pPr>
-                        <a:defRPr sz="650" b="0">
-                          <a:solidFill>
-                            <a:srgbClr val="0D1117"/>
-                          </a:solidFill>
-                          <a:latin typeface="Inter"/>
-                        </a:defRPr>
-                      </a:pPr>
-                      <a:r>
-                        <a:rPr>
-                          <a:latin typeface="Inter"/>
-                        </a:rPr>
-                        <a:t>sha256:aaaaaaaaaaaaaaaaaaaaaaaaaaaaaaaaaaaaaaaaaaaaaaaaaaaaaaaaaaaaaaaa</a:t>
-                      </a:r>
-                    </a:p>
-                  </a:txBody>
-                  <a:tcPr marL="54864" marR="54864" marT="27432" marB="27432" anchor="ctr">
-                    <a:solidFill>
-                      <a:srgbClr val="FFFFFF"/>
+                        <a:defRPr sz="720" b="1">
+                          <a:solidFill>
+                            <a:srgbClr val="F2A93B"/>
+                          </a:solidFill>
+                          <a:latin typeface="Inter"/>
+                        </a:defRPr>
+                      </a:pPr>
+                      <a:r>
+                        <a:rPr>
+                          <a:latin typeface="Inter"/>
+                        </a:rPr>
+                        <a:t>● Advisory</a:t>
+                      </a:r>
+                    </a:p>
+                  </a:txBody>
+                  <a:tcPr marL="54864" marR="54864" marT="27432" marB="27432" anchor="ctr">
+                    <a:solidFill>
+                      <a:srgbClr val="F5F7F9"/>
                     </a:solidFill>
                   </a:tcPr>
                 </a:tc>
@@ -28971,7 +26964,7 @@
       </p:graphicFrame>
       <p:sp>
         <p:nvSpPr>
-          <p:cNvPr id="9" name="TextBox 8"/>
+          <p:cNvPr id="8" name="TextBox 7"/>
           <p:cNvSpPr txBox="1"/>
           <p:nvPr/>
         </p:nvSpPr>
@@ -29013,7 +27006,7 @@
       </p:sp>
       <p:sp>
         <p:nvSpPr>
-          <p:cNvPr id="10" name="Rectangle 9"/>
+          <p:cNvPr id="9" name="Rectangle 8"/>
           <p:cNvSpPr/>
           <p:nvPr/>
         </p:nvSpPr>
@@ -29062,7 +27055,7 @@
       </p:sp>
       <p:sp>
         <p:nvSpPr>
-          <p:cNvPr id="11" name="TextBox 10"/>
+          <p:cNvPr id="10" name="TextBox 9"/>
           <p:cNvSpPr txBox="1"/>
           <p:nvPr/>
         </p:nvSpPr>
@@ -29104,7 +27097,7 @@
       </p:sp>
       <p:sp>
         <p:nvSpPr>
-          <p:cNvPr id="12" name="TextBox 11"/>
+          <p:cNvPr id="11" name="TextBox 10"/>
           <p:cNvSpPr txBox="1"/>
           <p:nvPr/>
         </p:nvSpPr>
@@ -29146,7 +27139,7 @@
       </p:sp>
       <p:sp>
         <p:nvSpPr>
-          <p:cNvPr id="13" name="TextBox 12"/>
+          <p:cNvPr id="12" name="TextBox 11"/>
           <p:cNvSpPr txBox="1"/>
           <p:nvPr/>
         </p:nvSpPr>
@@ -29261,48 +27254,6 @@
         </p:nvSpPr>
         <p:spPr>
           <a:xfrm>
-            <a:off x="5897880" y="310896"/>
-            <a:ext cx="4800600" cy="256032"/>
-          </a:xfrm>
-          <a:prstGeom prst="rect">
-            <a:avLst/>
-          </a:prstGeom>
-          <a:noFill/>
-        </p:spPr>
-        <p:txBody>
-          <a:bodyPr wrap="none" lIns="9144" rIns="9144" tIns="9144" bIns="9144" anchor="t">
-            <a:spAutoFit/>
-          </a:bodyPr>
-          <a:lstStyle/>
-          <a:p>
-            <a:pPr algn="r">
-              <a:spcAft>
-                <a:spcPts val="0"/>
-              </a:spcAft>
-              <a:defRPr sz="680" b="1">
-                <a:solidFill>
-                  <a:srgbClr val="4F6B00"/>
-                </a:solidFill>
-                <a:latin typeface="Inter"/>
-              </a:defRPr>
-            </a:pPr>
-            <a:r>
-              <a:rPr>
-                <a:latin typeface="Inter"/>
-              </a:rPr>
-              <a:t>Illustrative, Gradient Maintained — demo data, not the client's holdings or managers</a:t>
-            </a:r>
-          </a:p>
-        </p:txBody>
-      </p:sp>
-      <p:sp>
-        <p:nvSpPr>
-          <p:cNvPr id="4" name="TextBox 3"/>
-          <p:cNvSpPr txBox="1"/>
-          <p:nvPr/>
-        </p:nvSpPr>
-        <p:spPr>
-          <a:xfrm>
             <a:off x="640080" y="566928"/>
             <a:ext cx="10058400" cy="530352"/>
           </a:xfrm>
@@ -29332,14 +27283,14 @@
               <a:rPr>
                 <a:latin typeface="Inter"/>
               </a:rPr>
-              <a:t>Appendix — Server Metric Methods and Disclosures</a:t>
+              <a:t>Appendix — Sources and methods — continued</a:t>
             </a:r>
           </a:p>
         </p:txBody>
       </p:sp>
       <p:sp>
         <p:nvSpPr>
-          <p:cNvPr id="5" name="Rectangle 4"/>
+          <p:cNvPr id="4" name="Rectangle 3"/>
           <p:cNvSpPr/>
           <p:nvPr/>
         </p:nvSpPr>
@@ -29388,7 +27339,7 @@
       </p:sp>
       <p:sp>
         <p:nvSpPr>
-          <p:cNvPr id="6" name="Rectangle 5"/>
+          <p:cNvPr id="5" name="Rectangle 4"/>
           <p:cNvSpPr/>
           <p:nvPr/>
         </p:nvSpPr>
@@ -29437,7 +27388,7 @@
       </p:sp>
       <p:sp>
         <p:nvSpPr>
-          <p:cNvPr id="7" name="TextBox 6"/>
+          <p:cNvPr id="6" name="TextBox 5"/>
           <p:cNvSpPr txBox="1"/>
           <p:nvPr/>
         </p:nvSpPr>
@@ -29472,14 +27423,14 @@
               <a:rPr>
                 <a:latin typeface="Inter"/>
               </a:rPr>
-              <a:t>B</a:t>
+              <a:t>A</a:t>
             </a:r>
           </a:p>
         </p:txBody>
       </p:sp>
       <p:sp>
         <p:nvSpPr>
-          <p:cNvPr id="8" name="TextBox 7"/>
+          <p:cNvPr id="7" name="TextBox 6"/>
           <p:cNvSpPr txBox="1"/>
           <p:nvPr/>
         </p:nvSpPr>
@@ -29514,14 +27465,14 @@
               <a:rPr>
                 <a:latin typeface="Inter"/>
               </a:rPr>
-              <a:t>SERVER METRIC METHODS</a:t>
+              <a:t>SOURCE AUDIT TRAIL</a:t>
             </a:r>
           </a:p>
         </p:txBody>
       </p:sp>
       <p:graphicFrame>
         <p:nvGraphicFramePr>
-          <p:cNvPr id="9" name="Table 8"/>
+          <p:cNvPr id="8" name="Table 7"/>
           <p:cNvGraphicFramePr>
             <a:graphicFrameLocks noGrp="1"/>
           </p:cNvGraphicFramePr>
@@ -29529,7 +27480,1372 @@
         </p:nvGraphicFramePr>
         <p:xfrm>
           <a:off x="640080" y="1600200"/>
-          <a:ext cx="10908792" cy="2212448"/>
+          <a:ext cx="10908792" cy="4416552"/>
+        </p:xfrm>
+        <a:graphic>
+          <a:graphicData uri="http://schemas.openxmlformats.org/drawingml/2006/table">
+            <a:tbl>
+              <a:tblPr firstRow="1" bandRow="1">
+                <a:tableStyleId>{5C22544A-7EE6-4342-B048-85BDC9FD1C3A}</a:tableStyleId>
+              </a:tblPr>
+              <a:tblGrid>
+                <a:gridCol w="2011680"/>
+                <a:gridCol w="4448556"/>
+                <a:gridCol w="4448556"/>
+              </a:tblGrid>
+              <a:tr h="441655">
+                <a:tc>
+                  <a:txBody>
+                    <a:bodyPr/>
+                    <a:lstStyle/>
+                    <a:p>
+                      <a:pPr>
+                        <a:defRPr sz="750" b="1">
+                          <a:solidFill>
+                            <a:srgbClr val="FFFFFF"/>
+                          </a:solidFill>
+                          <a:latin typeface="Inter"/>
+                        </a:defRPr>
+                      </a:pPr>
+                      <a:r>
+                        <a:rPr>
+                          <a:latin typeface="Inter"/>
+                        </a:rPr>
+                        <a:t>Tag</a:t>
+                      </a:r>
+                    </a:p>
+                  </a:txBody>
+                  <a:tcPr marL="54864" marR="54864" marT="27432" marB="27432" anchor="ctr">
+                    <a:solidFill>
+                      <a:srgbClr val="0D1117"/>
+                    </a:solidFill>
+                  </a:tcPr>
+                </a:tc>
+                <a:tc>
+                  <a:txBody>
+                    <a:bodyPr/>
+                    <a:lstStyle/>
+                    <a:p>
+                      <a:pPr>
+                        <a:defRPr sz="750" b="1">
+                          <a:solidFill>
+                            <a:srgbClr val="FFFFFF"/>
+                          </a:solidFill>
+                          <a:latin typeface="Inter"/>
+                        </a:defRPr>
+                      </a:pPr>
+                      <a:r>
+                        <a:rPr>
+                          <a:latin typeface="Inter"/>
+                        </a:rPr>
+                        <a:t>Key parameters</a:t>
+                      </a:r>
+                    </a:p>
+                  </a:txBody>
+                  <a:tcPr marL="54864" marR="54864" marT="27432" marB="27432" anchor="ctr">
+                    <a:solidFill>
+                      <a:srgbClr val="0D1117"/>
+                    </a:solidFill>
+                  </a:tcPr>
+                </a:tc>
+                <a:tc>
+                  <a:txBody>
+                    <a:bodyPr/>
+                    <a:lstStyle/>
+                    <a:p>
+                      <a:pPr>
+                        <a:defRPr sz="750" b="1">
+                          <a:solidFill>
+                            <a:srgbClr val="FFFFFF"/>
+                          </a:solidFill>
+                          <a:latin typeface="Inter"/>
+                        </a:defRPr>
+                      </a:pPr>
+                      <a:r>
+                        <a:rPr>
+                          <a:latin typeface="Inter"/>
+                        </a:rPr>
+                        <a:t>Digest</a:t>
+                      </a:r>
+                    </a:p>
+                  </a:txBody>
+                  <a:tcPr marL="54864" marR="54864" marT="27432" marB="27432" anchor="ctr">
+                    <a:solidFill>
+                      <a:srgbClr val="0D1117"/>
+                    </a:solidFill>
+                  </a:tcPr>
+                </a:tc>
+              </a:tr>
+              <a:tr h="441655">
+                <a:tc>
+                  <a:txBody>
+                    <a:bodyPr/>
+                    <a:lstStyle/>
+                    <a:p>
+                      <a:pPr>
+                        <a:defRPr sz="800" b="1">
+                          <a:solidFill>
+                            <a:srgbClr val="0D1117"/>
+                          </a:solidFill>
+                          <a:latin typeface="Inter"/>
+                        </a:defRPr>
+                      </a:pPr>
+                      <a:r>
+                        <a:rPr>
+                          <a:latin typeface="Inter"/>
+                        </a:rPr>
+                        <a:t>S1</a:t>
+                      </a:r>
+                    </a:p>
+                  </a:txBody>
+                  <a:tcPr marL="54864" marR="54864" marT="27432" marB="27432" anchor="ctr">
+                    <a:solidFill>
+                      <a:srgbClr val="FFFFFF"/>
+                    </a:solidFill>
+                  </a:tcPr>
+                </a:tc>
+                <a:tc>
+                  <a:txBody>
+                    <a:bodyPr/>
+                    <a:lstStyle/>
+                    <a:p>
+                      <a:pPr>
+                        <a:defRPr sz="800" b="0">
+                          <a:solidFill>
+                            <a:srgbClr val="0D1117"/>
+                          </a:solidFill>
+                          <a:latin typeface="Inter"/>
+                        </a:defRPr>
+                      </a:pPr>
+                      <a:r>
+                        <a:rPr>
+                          <a:latin typeface="Inter"/>
+                        </a:rPr>
+                        <a:t>organization=test</a:t>
+                      </a:r>
+                    </a:p>
+                  </a:txBody>
+                  <a:tcPr marL="54864" marR="54864" marT="27432" marB="27432" anchor="ctr">
+                    <a:solidFill>
+                      <a:srgbClr val="FFFFFF"/>
+                    </a:solidFill>
+                  </a:tcPr>
+                </a:tc>
+                <a:tc>
+                  <a:txBody>
+                    <a:bodyPr/>
+                    <a:lstStyle/>
+                    <a:p>
+                      <a:pPr>
+                        <a:defRPr sz="800" b="0">
+                          <a:solidFill>
+                            <a:srgbClr val="0D1117"/>
+                          </a:solidFill>
+                          <a:latin typeface="Inter"/>
+                        </a:defRPr>
+                      </a:pPr>
+                      <a:r>
+                        <a:rPr>
+                          <a:latin typeface="Inter"/>
+                        </a:rPr>
+                        <a:t>sha256:aaaaaaaaaaaaaaaaaaaaaaaaaaaaaaaaaaaaaaaaaaaaaaaaaaaaaaaaaaaaaaaa</a:t>
+                      </a:r>
+                    </a:p>
+                  </a:txBody>
+                  <a:tcPr marL="54864" marR="54864" marT="27432" marB="27432" anchor="ctr">
+                    <a:solidFill>
+                      <a:srgbClr val="FFFFFF"/>
+                    </a:solidFill>
+                  </a:tcPr>
+                </a:tc>
+              </a:tr>
+              <a:tr h="441655">
+                <a:tc>
+                  <a:txBody>
+                    <a:bodyPr/>
+                    <a:lstStyle/>
+                    <a:p>
+                      <a:pPr>
+                        <a:defRPr sz="800" b="1">
+                          <a:solidFill>
+                            <a:srgbClr val="0D1117"/>
+                          </a:solidFill>
+                          <a:latin typeface="Inter"/>
+                        </a:defRPr>
+                      </a:pPr>
+                      <a:r>
+                        <a:rPr>
+                          <a:latin typeface="Inter"/>
+                        </a:rPr>
+                        <a:t>S2</a:t>
+                      </a:r>
+                    </a:p>
+                  </a:txBody>
+                  <a:tcPr marL="54864" marR="54864" marT="27432" marB="27432" anchor="ctr">
+                    <a:solidFill>
+                      <a:srgbClr val="F5F7F9"/>
+                    </a:solidFill>
+                  </a:tcPr>
+                </a:tc>
+                <a:tc>
+                  <a:txBody>
+                    <a:bodyPr/>
+                    <a:lstStyle/>
+                    <a:p>
+                      <a:pPr>
+                        <a:defRPr sz="800" b="0">
+                          <a:solidFill>
+                            <a:srgbClr val="0D1117"/>
+                          </a:solidFill>
+                          <a:latin typeface="Inter"/>
+                        </a:defRPr>
+                      </a:pPr>
+                      <a:r>
+                        <a:rPr>
+                          <a:latin typeface="Inter"/>
+                        </a:rPr>
+                        <a:t>allocation_tree</a:t>
+                      </a:r>
+                    </a:p>
+                  </a:txBody>
+                  <a:tcPr marL="54864" marR="54864" marT="27432" marB="27432" anchor="ctr">
+                    <a:solidFill>
+                      <a:srgbClr val="F5F7F9"/>
+                    </a:solidFill>
+                  </a:tcPr>
+                </a:tc>
+                <a:tc>
+                  <a:txBody>
+                    <a:bodyPr/>
+                    <a:lstStyle/>
+                    <a:p>
+                      <a:pPr>
+                        <a:defRPr sz="800" b="0">
+                          <a:solidFill>
+                            <a:srgbClr val="0D1117"/>
+                          </a:solidFill>
+                          <a:latin typeface="Inter"/>
+                        </a:defRPr>
+                      </a:pPr>
+                      <a:r>
+                        <a:rPr>
+                          <a:latin typeface="Inter"/>
+                        </a:rPr>
+                        <a:t>sha256:aaaaaaaaaaaaaaaaaaaaaaaaaaaaaaaaaaaaaaaaaaaaaaaaaaaaaaaaaaaaaaaa</a:t>
+                      </a:r>
+                    </a:p>
+                  </a:txBody>
+                  <a:tcPr marL="54864" marR="54864" marT="27432" marB="27432" anchor="ctr">
+                    <a:solidFill>
+                      <a:srgbClr val="F5F7F9"/>
+                    </a:solidFill>
+                  </a:tcPr>
+                </a:tc>
+              </a:tr>
+              <a:tr h="441655">
+                <a:tc>
+                  <a:txBody>
+                    <a:bodyPr/>
+                    <a:lstStyle/>
+                    <a:p>
+                      <a:pPr>
+                        <a:defRPr sz="800" b="1">
+                          <a:solidFill>
+                            <a:srgbClr val="0D1117"/>
+                          </a:solidFill>
+                          <a:latin typeface="Inter"/>
+                        </a:defRPr>
+                      </a:pPr>
+                      <a:r>
+                        <a:rPr>
+                          <a:latin typeface="Inter"/>
+                        </a:rPr>
+                        <a:t>S3</a:t>
+                      </a:r>
+                    </a:p>
+                  </a:txBody>
+                  <a:tcPr marL="54864" marR="54864" marT="27432" marB="27432" anchor="ctr">
+                    <a:solidFill>
+                      <a:srgbClr val="FFFFFF"/>
+                    </a:solidFill>
+                  </a:tcPr>
+                </a:tc>
+                <a:tc>
+                  <a:txBody>
+                    <a:bodyPr/>
+                    <a:lstStyle/>
+                    <a:p>
+                      <a:pPr>
+                        <a:defRPr sz="800" b="0">
+                          <a:solidFill>
+                            <a:srgbClr val="0D1117"/>
+                          </a:solidFill>
+                          <a:latin typeface="Inter"/>
+                        </a:defRPr>
+                      </a:pPr>
+                      <a:r>
+                        <a:rPr>
+                          <a:latin typeface="Inter"/>
+                        </a:rPr>
+                        <a:t>portfolio=test</a:t>
+                      </a:r>
+                    </a:p>
+                  </a:txBody>
+                  <a:tcPr marL="54864" marR="54864" marT="27432" marB="27432" anchor="ctr">
+                    <a:solidFill>
+                      <a:srgbClr val="FFFFFF"/>
+                    </a:solidFill>
+                  </a:tcPr>
+                </a:tc>
+                <a:tc>
+                  <a:txBody>
+                    <a:bodyPr/>
+                    <a:lstStyle/>
+                    <a:p>
+                      <a:pPr>
+                        <a:defRPr sz="800" b="0">
+                          <a:solidFill>
+                            <a:srgbClr val="0D1117"/>
+                          </a:solidFill>
+                          <a:latin typeface="Inter"/>
+                        </a:defRPr>
+                      </a:pPr>
+                      <a:r>
+                        <a:rPr>
+                          <a:latin typeface="Inter"/>
+                        </a:rPr>
+                        <a:t>sha256:aaaaaaaaaaaaaaaaaaaaaaaaaaaaaaaaaaaaaaaaaaaaaaaaaaaaaaaaaaaaaaaa</a:t>
+                      </a:r>
+                    </a:p>
+                  </a:txBody>
+                  <a:tcPr marL="54864" marR="54864" marT="27432" marB="27432" anchor="ctr">
+                    <a:solidFill>
+                      <a:srgbClr val="FFFFFF"/>
+                    </a:solidFill>
+                  </a:tcPr>
+                </a:tc>
+              </a:tr>
+              <a:tr h="441655">
+                <a:tc>
+                  <a:txBody>
+                    <a:bodyPr/>
+                    <a:lstStyle/>
+                    <a:p>
+                      <a:pPr>
+                        <a:defRPr sz="800" b="1">
+                          <a:solidFill>
+                            <a:srgbClr val="0D1117"/>
+                          </a:solidFill>
+                          <a:latin typeface="Inter"/>
+                        </a:defRPr>
+                      </a:pPr>
+                      <a:r>
+                        <a:rPr>
+                          <a:latin typeface="Inter"/>
+                        </a:rPr>
+                        <a:t>S4</a:t>
+                      </a:r>
+                    </a:p>
+                  </a:txBody>
+                  <a:tcPr marL="54864" marR="54864" marT="27432" marB="27432" anchor="ctr">
+                    <a:solidFill>
+                      <a:srgbClr val="F5F7F9"/>
+                    </a:solidFill>
+                  </a:tcPr>
+                </a:tc>
+                <a:tc>
+                  <a:txBody>
+                    <a:bodyPr/>
+                    <a:lstStyle/>
+                    <a:p>
+                      <a:pPr>
+                        <a:defRPr sz="800" b="0">
+                          <a:solidFill>
+                            <a:srgbClr val="0D1117"/>
+                          </a:solidFill>
+                          <a:latin typeface="Inter"/>
+                        </a:defRPr>
+                      </a:pPr>
+                      <a:r>
+                        <a:rPr>
+                          <a:latin typeface="Inter"/>
+                        </a:rPr>
+                        <a:t>public_equity; allocations</a:t>
+                      </a:r>
+                    </a:p>
+                  </a:txBody>
+                  <a:tcPr marL="54864" marR="54864" marT="27432" marB="27432" anchor="ctr">
+                    <a:solidFill>
+                      <a:srgbClr val="F5F7F9"/>
+                    </a:solidFill>
+                  </a:tcPr>
+                </a:tc>
+                <a:tc>
+                  <a:txBody>
+                    <a:bodyPr/>
+                    <a:lstStyle/>
+                    <a:p>
+                      <a:pPr>
+                        <a:defRPr sz="800" b="0">
+                          <a:solidFill>
+                            <a:srgbClr val="0D1117"/>
+                          </a:solidFill>
+                          <a:latin typeface="Inter"/>
+                        </a:defRPr>
+                      </a:pPr>
+                      <a:r>
+                        <a:rPr>
+                          <a:latin typeface="Inter"/>
+                        </a:rPr>
+                        <a:t>sha256:aaaaaaaaaaaaaaaaaaaaaaaaaaaaaaaaaaaaaaaaaaaaaaaaaaaaaaaaaaaaaaaa</a:t>
+                      </a:r>
+                    </a:p>
+                  </a:txBody>
+                  <a:tcPr marL="54864" marR="54864" marT="27432" marB="27432" anchor="ctr">
+                    <a:solidFill>
+                      <a:srgbClr val="F5F7F9"/>
+                    </a:solidFill>
+                  </a:tcPr>
+                </a:tc>
+              </a:tr>
+              <a:tr h="441655">
+                <a:tc>
+                  <a:txBody>
+                    <a:bodyPr/>
+                    <a:lstStyle/>
+                    <a:p>
+                      <a:pPr>
+                        <a:defRPr sz="800" b="1">
+                          <a:solidFill>
+                            <a:srgbClr val="0D1117"/>
+                          </a:solidFill>
+                          <a:latin typeface="Inter"/>
+                        </a:defRPr>
+                      </a:pPr>
+                      <a:r>
+                        <a:rPr>
+                          <a:latin typeface="Inter"/>
+                        </a:rPr>
+                        <a:t>S5</a:t>
+                      </a:r>
+                    </a:p>
+                  </a:txBody>
+                  <a:tcPr marL="54864" marR="54864" marT="27432" marB="27432" anchor="ctr">
+                    <a:solidFill>
+                      <a:srgbClr val="FFFFFF"/>
+                    </a:solidFill>
+                  </a:tcPr>
+                </a:tc>
+                <a:tc>
+                  <a:txBody>
+                    <a:bodyPr/>
+                    <a:lstStyle/>
+                    <a:p>
+                      <a:pPr>
+                        <a:defRPr sz="800" b="0">
+                          <a:solidFill>
+                            <a:srgbClr val="0D1117"/>
+                          </a:solidFill>
+                          <a:latin typeface="Inter"/>
+                        </a:defRPr>
+                      </a:pPr>
+                      <a:r>
+                        <a:rPr>
+                          <a:latin typeface="Inter"/>
+                        </a:rPr>
+                        <a:t>all sections</a:t>
+                      </a:r>
+                    </a:p>
+                  </a:txBody>
+                  <a:tcPr marL="54864" marR="54864" marT="27432" marB="27432" anchor="ctr">
+                    <a:solidFill>
+                      <a:srgbClr val="FFFFFF"/>
+                    </a:solidFill>
+                  </a:tcPr>
+                </a:tc>
+                <a:tc>
+                  <a:txBody>
+                    <a:bodyPr/>
+                    <a:lstStyle/>
+                    <a:p>
+                      <a:pPr>
+                        <a:defRPr sz="800" b="0">
+                          <a:solidFill>
+                            <a:srgbClr val="0D1117"/>
+                          </a:solidFill>
+                          <a:latin typeface="Inter"/>
+                        </a:defRPr>
+                      </a:pPr>
+                      <a:r>
+                        <a:rPr>
+                          <a:latin typeface="Inter"/>
+                        </a:rPr>
+                        <a:t>sha256:aaaaaaaaaaaaaaaaaaaaaaaaaaaaaaaaaaaaaaaaaaaaaaaaaaaaaaaaaaaaaaaa</a:t>
+                      </a:r>
+                    </a:p>
+                  </a:txBody>
+                  <a:tcPr marL="54864" marR="54864" marT="27432" marB="27432" anchor="ctr">
+                    <a:solidFill>
+                      <a:srgbClr val="FFFFFF"/>
+                    </a:solidFill>
+                  </a:tcPr>
+                </a:tc>
+              </a:tr>
+              <a:tr h="441655">
+                <a:tc>
+                  <a:txBody>
+                    <a:bodyPr/>
+                    <a:lstStyle/>
+                    <a:p>
+                      <a:pPr>
+                        <a:defRPr sz="800" b="1">
+                          <a:solidFill>
+                            <a:srgbClr val="0D1117"/>
+                          </a:solidFill>
+                          <a:latin typeface="Inter"/>
+                        </a:defRPr>
+                      </a:pPr>
+                      <a:r>
+                        <a:rPr>
+                          <a:latin typeface="Inter"/>
+                        </a:rPr>
+                        <a:t>S6</a:t>
+                      </a:r>
+                    </a:p>
+                  </a:txBody>
+                  <a:tcPr marL="54864" marR="54864" marT="27432" marB="27432" anchor="ctr">
+                    <a:solidFill>
+                      <a:srgbClr val="F5F7F9"/>
+                    </a:solidFill>
+                  </a:tcPr>
+                </a:tc>
+                <a:tc>
+                  <a:txBody>
+                    <a:bodyPr/>
+                    <a:lstStyle/>
+                    <a:p>
+                      <a:pPr>
+                        <a:defRPr sz="800" b="0">
+                          <a:solidFill>
+                            <a:srgbClr val="0D1117"/>
+                          </a:solidFill>
+                          <a:latin typeface="Inter"/>
+                        </a:defRPr>
+                      </a:pPr>
+                      <a:r>
+                        <a:rPr>
+                          <a:latin typeface="Inter"/>
+                        </a:rPr>
+                        <a:t>baseline</a:t>
+                      </a:r>
+                    </a:p>
+                  </a:txBody>
+                  <a:tcPr marL="54864" marR="54864" marT="27432" marB="27432" anchor="ctr">
+                    <a:solidFill>
+                      <a:srgbClr val="F5F7F9"/>
+                    </a:solidFill>
+                  </a:tcPr>
+                </a:tc>
+                <a:tc>
+                  <a:txBody>
+                    <a:bodyPr/>
+                    <a:lstStyle/>
+                    <a:p>
+                      <a:pPr>
+                        <a:defRPr sz="800" b="0">
+                          <a:solidFill>
+                            <a:srgbClr val="0D1117"/>
+                          </a:solidFill>
+                          <a:latin typeface="Inter"/>
+                        </a:defRPr>
+                      </a:pPr>
+                      <a:r>
+                        <a:rPr>
+                          <a:latin typeface="Inter"/>
+                        </a:rPr>
+                        <a:t>sha256:aaaaaaaaaaaaaaaaaaaaaaaaaaaaaaaaaaaaaaaaaaaaaaaaaaaaaaaaaaaaaaaa</a:t>
+                      </a:r>
+                    </a:p>
+                  </a:txBody>
+                  <a:tcPr marL="54864" marR="54864" marT="27432" marB="27432" anchor="ctr">
+                    <a:solidFill>
+                      <a:srgbClr val="F5F7F9"/>
+                    </a:solidFill>
+                  </a:tcPr>
+                </a:tc>
+              </a:tr>
+              <a:tr h="441655">
+                <a:tc>
+                  <a:txBody>
+                    <a:bodyPr/>
+                    <a:lstStyle/>
+                    <a:p>
+                      <a:pPr>
+                        <a:defRPr sz="800" b="1">
+                          <a:solidFill>
+                            <a:srgbClr val="0D1117"/>
+                          </a:solidFill>
+                          <a:latin typeface="Inter"/>
+                        </a:defRPr>
+                      </a:pPr>
+                      <a:r>
+                        <a:rPr>
+                          <a:latin typeface="Inter"/>
+                        </a:rPr>
+                        <a:t>S7</a:t>
+                      </a:r>
+                    </a:p>
+                  </a:txBody>
+                  <a:tcPr marL="54864" marR="54864" marT="27432" marB="27432" anchor="ctr">
+                    <a:solidFill>
+                      <a:srgbClr val="FFFFFF"/>
+                    </a:solidFill>
+                  </a:tcPr>
+                </a:tc>
+                <a:tc>
+                  <a:txBody>
+                    <a:bodyPr/>
+                    <a:lstStyle/>
+                    <a:p>
+                      <a:pPr>
+                        <a:defRPr sz="800" b="0">
+                          <a:solidFill>
+                            <a:srgbClr val="0D1117"/>
+                          </a:solidFill>
+                          <a:latin typeface="Inter"/>
+                        </a:defRPr>
+                      </a:pPr>
+                      <a:r>
+                        <a:rPr>
+                          <a:latin typeface="Inter"/>
+                        </a:rPr>
+                        <a:t>include=lookthrough_13f</a:t>
+                      </a:r>
+                    </a:p>
+                  </a:txBody>
+                  <a:tcPr marL="54864" marR="54864" marT="27432" marB="27432" anchor="ctr">
+                    <a:solidFill>
+                      <a:srgbClr val="FFFFFF"/>
+                    </a:solidFill>
+                  </a:tcPr>
+                </a:tc>
+                <a:tc>
+                  <a:txBody>
+                    <a:bodyPr/>
+                    <a:lstStyle/>
+                    <a:p>
+                      <a:pPr>
+                        <a:defRPr sz="800" b="0">
+                          <a:solidFill>
+                            <a:srgbClr val="0D1117"/>
+                          </a:solidFill>
+                          <a:latin typeface="Inter"/>
+                        </a:defRPr>
+                      </a:pPr>
+                      <a:r>
+                        <a:rPr>
+                          <a:latin typeface="Inter"/>
+                        </a:rPr>
+                        <a:t>sha256:aaaaaaaaaaaaaaaaaaaaaaaaaaaaaaaaaaaaaaaaaaaaaaaaaaaaaaaaaaaaaaaa</a:t>
+                      </a:r>
+                    </a:p>
+                  </a:txBody>
+                  <a:tcPr marL="54864" marR="54864" marT="27432" marB="27432" anchor="ctr">
+                    <a:solidFill>
+                      <a:srgbClr val="FFFFFF"/>
+                    </a:solidFill>
+                  </a:tcPr>
+                </a:tc>
+              </a:tr>
+              <a:tr h="441655">
+                <a:tc>
+                  <a:txBody>
+                    <a:bodyPr/>
+                    <a:lstStyle/>
+                    <a:p>
+                      <a:pPr>
+                        <a:defRPr sz="800" b="1">
+                          <a:solidFill>
+                            <a:srgbClr val="0D1117"/>
+                          </a:solidFill>
+                          <a:latin typeface="Inter"/>
+                        </a:defRPr>
+                      </a:pPr>
+                      <a:r>
+                        <a:rPr>
+                          <a:latin typeface="Inter"/>
+                        </a:rPr>
+                        <a:t>S8</a:t>
+                      </a:r>
+                    </a:p>
+                  </a:txBody>
+                  <a:tcPr marL="54864" marR="54864" marT="27432" marB="27432" anchor="ctr">
+                    <a:solidFill>
+                      <a:srgbClr val="F5F7F9"/>
+                    </a:solidFill>
+                  </a:tcPr>
+                </a:tc>
+                <a:tc>
+                  <a:txBody>
+                    <a:bodyPr/>
+                    <a:lstStyle/>
+                    <a:p>
+                      <a:pPr>
+                        <a:defRPr sz="800" b="0">
+                          <a:solidFill>
+                            <a:srgbClr val="0D1117"/>
+                          </a:solidFill>
+                          <a:latin typeface="Inter"/>
+                        </a:defRPr>
+                      </a:pPr>
+                      <a:r>
+                        <a:rPr>
+                          <a:latin typeface="Inter"/>
+                        </a:rPr>
+                        <a:t>illustrative</a:t>
+                      </a:r>
+                    </a:p>
+                  </a:txBody>
+                  <a:tcPr marL="54864" marR="54864" marT="27432" marB="27432" anchor="ctr">
+                    <a:solidFill>
+                      <a:srgbClr val="F5F7F9"/>
+                    </a:solidFill>
+                  </a:tcPr>
+                </a:tc>
+                <a:tc>
+                  <a:txBody>
+                    <a:bodyPr/>
+                    <a:lstStyle/>
+                    <a:p>
+                      <a:pPr>
+                        <a:defRPr sz="800" b="0">
+                          <a:solidFill>
+                            <a:srgbClr val="0D1117"/>
+                          </a:solidFill>
+                          <a:latin typeface="Inter"/>
+                        </a:defRPr>
+                      </a:pPr>
+                      <a:r>
+                        <a:rPr>
+                          <a:latin typeface="Inter"/>
+                        </a:rPr>
+                        <a:t>sha256:aaaaaaaaaaaaaaaaaaaaaaaaaaaaaaaaaaaaaaaaaaaaaaaaaaaaaaaaaaaaaaaa</a:t>
+                      </a:r>
+                    </a:p>
+                  </a:txBody>
+                  <a:tcPr marL="54864" marR="54864" marT="27432" marB="27432" anchor="ctr">
+                    <a:solidFill>
+                      <a:srgbClr val="F5F7F9"/>
+                    </a:solidFill>
+                  </a:tcPr>
+                </a:tc>
+              </a:tr>
+              <a:tr h="441657">
+                <a:tc>
+                  <a:txBody>
+                    <a:bodyPr/>
+                    <a:lstStyle/>
+                    <a:p>
+                      <a:pPr>
+                        <a:defRPr sz="800" b="1">
+                          <a:solidFill>
+                            <a:srgbClr val="0D1117"/>
+                          </a:solidFill>
+                          <a:latin typeface="Inter"/>
+                        </a:defRPr>
+                      </a:pPr>
+                      <a:r>
+                        <a:rPr>
+                          <a:latin typeface="Inter"/>
+                        </a:rPr>
+                        <a:t>S9</a:t>
+                      </a:r>
+                    </a:p>
+                  </a:txBody>
+                  <a:tcPr marL="54864" marR="54864" marT="27432" marB="27432" anchor="ctr">
+                    <a:solidFill>
+                      <a:srgbClr val="FFFFFF"/>
+                    </a:solidFill>
+                  </a:tcPr>
+                </a:tc>
+                <a:tc>
+                  <a:txBody>
+                    <a:bodyPr/>
+                    <a:lstStyle/>
+                    <a:p>
+                      <a:pPr>
+                        <a:defRPr sz="800" b="0">
+                          <a:solidFill>
+                            <a:srgbClr val="0D1117"/>
+                          </a:solidFill>
+                          <a:latin typeface="Inter"/>
+                        </a:defRPr>
+                      </a:pPr>
+                      <a:r>
+                        <a:rPr>
+                          <a:latin typeface="Inter"/>
+                        </a:rPr>
+                        <a:t>illustrative</a:t>
+                      </a:r>
+                    </a:p>
+                  </a:txBody>
+                  <a:tcPr marL="54864" marR="54864" marT="27432" marB="27432" anchor="ctr">
+                    <a:solidFill>
+                      <a:srgbClr val="FFFFFF"/>
+                    </a:solidFill>
+                  </a:tcPr>
+                </a:tc>
+                <a:tc>
+                  <a:txBody>
+                    <a:bodyPr/>
+                    <a:lstStyle/>
+                    <a:p>
+                      <a:pPr>
+                        <a:defRPr sz="800" b="0">
+                          <a:solidFill>
+                            <a:srgbClr val="0D1117"/>
+                          </a:solidFill>
+                          <a:latin typeface="Inter"/>
+                        </a:defRPr>
+                      </a:pPr>
+                      <a:r>
+                        <a:rPr>
+                          <a:latin typeface="Inter"/>
+                        </a:rPr>
+                        <a:t>sha256:aaaaaaaaaaaaaaaaaaaaaaaaaaaaaaaaaaaaaaaaaaaaaaaaaaaaaaaaaaaaaaaa</a:t>
+                      </a:r>
+                    </a:p>
+                  </a:txBody>
+                  <a:tcPr marL="54864" marR="54864" marT="27432" marB="27432" anchor="ctr">
+                    <a:solidFill>
+                      <a:srgbClr val="FFFFFF"/>
+                    </a:solidFill>
+                  </a:tcPr>
+                </a:tc>
+              </a:tr>
+            </a:tbl>
+          </a:graphicData>
+        </a:graphic>
+      </p:graphicFrame>
+      <p:sp>
+        <p:nvSpPr>
+          <p:cNvPr id="9" name="TextBox 8"/>
+          <p:cNvSpPr txBox="1"/>
+          <p:nvPr/>
+        </p:nvSpPr>
+        <p:spPr>
+          <a:xfrm>
+            <a:off x="640080" y="6035040"/>
+            <a:ext cx="10908792" cy="164592"/>
+          </a:xfrm>
+          <a:prstGeom prst="rect">
+            <a:avLst/>
+          </a:prstGeom>
+          <a:noFill/>
+        </p:spPr>
+        <p:txBody>
+          <a:bodyPr wrap="none" lIns="9144" rIns="9144" tIns="9144" bIns="9144" anchor="t">
+            <a:spAutoFit/>
+          </a:bodyPr>
+          <a:lstStyle/>
+          <a:p>
+            <a:pPr algn="l">
+              <a:spcAft>
+                <a:spcPts val="0"/>
+              </a:spcAft>
+              <a:defRPr sz="680" b="0">
+                <a:solidFill>
+                  <a:srgbClr val="8A94A1"/>
+                </a:solidFill>
+                <a:latin typeface="Inter"/>
+              </a:defRPr>
+            </a:pPr>
+            <a:r>
+              <a:rPr>
+                <a:latin typeface="Inter"/>
+              </a:rPr>
+              <a:t>Data scope for every source: Illustrative sample data. Each digest is the SHA-256 fingerprint of the exact data the report used.</a:t>
+            </a:r>
+          </a:p>
+        </p:txBody>
+      </p:sp>
+      <p:sp>
+        <p:nvSpPr>
+          <p:cNvPr id="10" name="Rectangle 9"/>
+          <p:cNvSpPr/>
+          <p:nvPr/>
+        </p:nvSpPr>
+        <p:spPr>
+          <a:xfrm>
+            <a:off x="640080" y="6446520"/>
+            <a:ext cx="10908792" cy="9144"/>
+          </a:xfrm>
+          <a:prstGeom prst="rect">
+            <a:avLst/>
+          </a:prstGeom>
+          <a:solidFill>
+            <a:srgbClr val="E3E7EC"/>
+          </a:solidFill>
+          <a:ln>
+            <a:solidFill>
+              <a:srgbClr val="E3E7EC"/>
+            </a:solidFill>
+          </a:ln>
+        </p:spPr>
+        <p:style>
+          <a:lnRef idx="1">
+            <a:schemeClr val="accent1"/>
+          </a:lnRef>
+          <a:fillRef idx="3">
+            <a:schemeClr val="accent1"/>
+          </a:fillRef>
+          <a:effectRef idx="2">
+            <a:schemeClr val="accent1"/>
+          </a:effectRef>
+          <a:fontRef idx="minor">
+            <a:schemeClr val="lt1"/>
+          </a:fontRef>
+        </p:style>
+        <p:txBody>
+          <a:bodyPr rtlCol="0" anchor="ctr"/>
+          <a:lstStyle/>
+          <a:p>
+            <a:pPr algn="ctr">
+              <a:defRPr>
+                <a:latin typeface="Inter"/>
+              </a:defRPr>
+            </a:pPr>
+          </a:p>
+        </p:txBody>
+      </p:sp>
+      <p:sp>
+        <p:nvSpPr>
+          <p:cNvPr id="11" name="TextBox 10"/>
+          <p:cNvSpPr txBox="1"/>
+          <p:nvPr/>
+        </p:nvSpPr>
+        <p:spPr>
+          <a:xfrm>
+            <a:off x="640080" y="6501384"/>
+            <a:ext cx="4297680" cy="146304"/>
+          </a:xfrm>
+          <a:prstGeom prst="rect">
+            <a:avLst/>
+          </a:prstGeom>
+          <a:noFill/>
+        </p:spPr>
+        <p:txBody>
+          <a:bodyPr wrap="none" lIns="9144" rIns="9144" tIns="9144" bIns="9144" anchor="t">
+            <a:spAutoFit/>
+          </a:bodyPr>
+          <a:lstStyle/>
+          <a:p>
+            <a:pPr algn="l">
+              <a:spcAft>
+                <a:spcPts val="0"/>
+              </a:spcAft>
+              <a:defRPr sz="650" b="0">
+                <a:solidFill>
+                  <a:srgbClr val="8A94A1"/>
+                </a:solidFill>
+                <a:latin typeface="Inter"/>
+              </a:defRPr>
+            </a:pPr>
+            <a:r>
+              <a:rPr>
+                <a:latin typeface="Inter"/>
+              </a:rPr>
+              <a:t>Sources: S1 · S2 · S3 · S4 · S5 · S6 · S7 · S8 · S9</a:t>
+            </a:r>
+          </a:p>
+        </p:txBody>
+      </p:sp>
+      <p:sp>
+        <p:nvSpPr>
+          <p:cNvPr id="12" name="TextBox 11"/>
+          <p:cNvSpPr txBox="1"/>
+          <p:nvPr/>
+        </p:nvSpPr>
+        <p:spPr>
+          <a:xfrm>
+            <a:off x="4480560" y="6501384"/>
+            <a:ext cx="5303520" cy="146304"/>
+          </a:xfrm>
+          <a:prstGeom prst="rect">
+            <a:avLst/>
+          </a:prstGeom>
+          <a:noFill/>
+        </p:spPr>
+        <p:txBody>
+          <a:bodyPr wrap="none" lIns="9144" rIns="9144" tIns="9144" bIns="9144" anchor="t">
+            <a:spAutoFit/>
+          </a:bodyPr>
+          <a:lstStyle/>
+          <a:p>
+            <a:pPr algn="ctr">
+              <a:spcAft>
+                <a:spcPts val="0"/>
+              </a:spcAft>
+              <a:defRPr sz="650" b="0">
+                <a:solidFill>
+                  <a:srgbClr val="8A94A1"/>
+                </a:solidFill>
+                <a:latin typeface="Inter"/>
+              </a:defRPr>
+            </a:pPr>
+            <a:r>
+              <a:rPr>
+                <a:latin typeface="Inter"/>
+              </a:rPr>
+              <a:t>Confidential — Investment Committee · Data as of 2026-06-30</a:t>
+            </a:r>
+          </a:p>
+        </p:txBody>
+      </p:sp>
+      <p:sp>
+        <p:nvSpPr>
+          <p:cNvPr id="13" name="TextBox 12"/>
+          <p:cNvSpPr txBox="1"/>
+          <p:nvPr/>
+        </p:nvSpPr>
+        <p:spPr>
+          <a:xfrm>
+            <a:off x="10287000" y="6501384"/>
+            <a:ext cx="1261872" cy="146304"/>
+          </a:xfrm>
+          <a:prstGeom prst="rect">
+            <a:avLst/>
+          </a:prstGeom>
+          <a:noFill/>
+        </p:spPr>
+        <p:txBody>
+          <a:bodyPr wrap="none" lIns="9144" rIns="9144" tIns="9144" bIns="9144" anchor="t">
+            <a:spAutoFit/>
+          </a:bodyPr>
+          <a:lstStyle/>
+          <a:p>
+            <a:pPr algn="r">
+              <a:spcAft>
+                <a:spcPts val="0"/>
+              </a:spcAft>
+              <a:defRPr sz="650" b="0">
+                <a:solidFill>
+                  <a:srgbClr val="8A94A1"/>
+                </a:solidFill>
+                <a:latin typeface="Inter"/>
+              </a:defRPr>
+            </a:pPr>
+            <a:r>
+              <a:rPr>
+                <a:latin typeface="Inter"/>
+              </a:rPr>
+              <a:t>28</a:t>
+            </a:r>
+          </a:p>
+        </p:txBody>
+      </p:sp>
+    </p:spTree>
+  </p:cSld>
+  <p:clrMapOvr>
+    <a:masterClrMapping/>
+  </p:clrMapOvr>
+</p:sld>
+</file>
+
+<file path=ppt/slides/slide29.xml><?xml version="1.0" encoding="utf-8"?>
+<p:sld xmlns:a="http://schemas.openxmlformats.org/drawingml/2006/main" xmlns:p="http://schemas.openxmlformats.org/presentationml/2006/main" xmlns:r="http://schemas.openxmlformats.org/officeDocument/2006/relationships">
+  <p:cSld>
+    <p:spTree>
+      <p:nvGrpSpPr>
+        <p:cNvPr id="1" name=""/>
+        <p:cNvGrpSpPr/>
+        <p:nvPr/>
+      </p:nvGrpSpPr>
+      <p:grpSpPr/>
+      <p:sp>
+        <p:nvSpPr>
+          <p:cNvPr id="2" name="Rectangle 1"/>
+          <p:cNvSpPr/>
+          <p:nvPr/>
+        </p:nvSpPr>
+        <p:spPr>
+          <a:xfrm>
+            <a:off x="0" y="0"/>
+            <a:ext cx="12191695" cy="6858000"/>
+          </a:xfrm>
+          <a:prstGeom prst="rect">
+            <a:avLst/>
+          </a:prstGeom>
+          <a:solidFill>
+            <a:srgbClr val="FFFFFF"/>
+          </a:solidFill>
+          <a:ln>
+            <a:solidFill>
+              <a:srgbClr val="FFFFFF"/>
+            </a:solidFill>
+          </a:ln>
+        </p:spPr>
+        <p:style>
+          <a:lnRef idx="1">
+            <a:schemeClr val="accent1"/>
+          </a:lnRef>
+          <a:fillRef idx="3">
+            <a:schemeClr val="accent1"/>
+          </a:fillRef>
+          <a:effectRef idx="2">
+            <a:schemeClr val="accent1"/>
+          </a:effectRef>
+          <a:fontRef idx="minor">
+            <a:schemeClr val="lt1"/>
+          </a:fontRef>
+        </p:style>
+        <p:txBody>
+          <a:bodyPr rtlCol="0" anchor="ctr"/>
+          <a:lstStyle/>
+          <a:p>
+            <a:pPr algn="ctr">
+              <a:defRPr>
+                <a:latin typeface="Inter"/>
+              </a:defRPr>
+            </a:pPr>
+          </a:p>
+        </p:txBody>
+      </p:sp>
+      <p:sp>
+        <p:nvSpPr>
+          <p:cNvPr id="3" name="TextBox 2"/>
+          <p:cNvSpPr txBox="1"/>
+          <p:nvPr/>
+        </p:nvSpPr>
+        <p:spPr>
+          <a:xfrm>
+            <a:off x="640080" y="566928"/>
+            <a:ext cx="10058400" cy="530352"/>
+          </a:xfrm>
+          <a:prstGeom prst="rect">
+            <a:avLst/>
+          </a:prstGeom>
+          <a:noFill/>
+        </p:spPr>
+        <p:txBody>
+          <a:bodyPr wrap="none" lIns="9144" rIns="9144" tIns="9144" bIns="9144" anchor="t">
+            <a:spAutoFit/>
+          </a:bodyPr>
+          <a:lstStyle/>
+          <a:p>
+            <a:pPr algn="l">
+              <a:spcAft>
+                <a:spcPts val="0"/>
+              </a:spcAft>
+              <a:defRPr sz="2300" b="1">
+                <a:solidFill>
+                  <a:srgbClr val="0D1117"/>
+                </a:solidFill>
+                <a:latin typeface="Inter"/>
+              </a:defRPr>
+            </a:pPr>
+            <a:r>
+              <a:rPr>
+                <a:latin typeface="Inter"/>
+              </a:rPr>
+              <a:t>Appendix — Server Metric Methods and Disclosures</a:t>
+            </a:r>
+          </a:p>
+        </p:txBody>
+      </p:sp>
+      <p:sp>
+        <p:nvSpPr>
+          <p:cNvPr id="4" name="Rectangle 3"/>
+          <p:cNvSpPr/>
+          <p:nvPr/>
+        </p:nvSpPr>
+        <p:spPr>
+          <a:xfrm>
+            <a:off x="640080" y="1115568"/>
+            <a:ext cx="10908792" cy="18288"/>
+          </a:xfrm>
+          <a:prstGeom prst="rect">
+            <a:avLst/>
+          </a:prstGeom>
+          <a:solidFill>
+            <a:srgbClr val="0D1117"/>
+          </a:solidFill>
+          <a:ln>
+            <a:solidFill>
+              <a:srgbClr val="0D1117"/>
+            </a:solidFill>
+          </a:ln>
+        </p:spPr>
+        <p:style>
+          <a:lnRef idx="1">
+            <a:schemeClr val="accent1"/>
+          </a:lnRef>
+          <a:fillRef idx="3">
+            <a:schemeClr val="accent1"/>
+          </a:fillRef>
+          <a:effectRef idx="2">
+            <a:schemeClr val="accent1"/>
+          </a:effectRef>
+          <a:fontRef idx="minor">
+            <a:schemeClr val="lt1"/>
+          </a:fontRef>
+        </p:style>
+        <p:txBody>
+          <a:bodyPr rtlCol="0" anchor="ctr"/>
+          <a:lstStyle/>
+          <a:p>
+            <a:pPr algn="ctr">
+              <a:defRPr>
+                <a:latin typeface="Inter"/>
+              </a:defRPr>
+            </a:pPr>
+          </a:p>
+        </p:txBody>
+      </p:sp>
+      <p:sp>
+        <p:nvSpPr>
+          <p:cNvPr id="5" name="Rectangle 4"/>
+          <p:cNvSpPr/>
+          <p:nvPr/>
+        </p:nvSpPr>
+        <p:spPr>
+          <a:xfrm>
+            <a:off x="11018520" y="502920"/>
+            <a:ext cx="530352" cy="393192"/>
+          </a:xfrm>
+          <a:prstGeom prst="rect">
+            <a:avLst/>
+          </a:prstGeom>
+          <a:solidFill>
+            <a:srgbClr val="9AA5B1"/>
+          </a:solidFill>
+          <a:ln>
+            <a:solidFill>
+              <a:srgbClr val="9AA5B1"/>
+            </a:solidFill>
+          </a:ln>
+        </p:spPr>
+        <p:style>
+          <a:lnRef idx="1">
+            <a:schemeClr val="accent1"/>
+          </a:lnRef>
+          <a:fillRef idx="3">
+            <a:schemeClr val="accent1"/>
+          </a:fillRef>
+          <a:effectRef idx="2">
+            <a:schemeClr val="accent1"/>
+          </a:effectRef>
+          <a:fontRef idx="minor">
+            <a:schemeClr val="lt1"/>
+          </a:fontRef>
+        </p:style>
+        <p:txBody>
+          <a:bodyPr rtlCol="0" anchor="ctr"/>
+          <a:lstStyle/>
+          <a:p>
+            <a:pPr algn="ctr">
+              <a:defRPr>
+                <a:latin typeface="Inter"/>
+              </a:defRPr>
+            </a:pPr>
+          </a:p>
+        </p:txBody>
+      </p:sp>
+      <p:sp>
+        <p:nvSpPr>
+          <p:cNvPr id="6" name="TextBox 5"/>
+          <p:cNvSpPr txBox="1"/>
+          <p:nvPr/>
+        </p:nvSpPr>
+        <p:spPr>
+          <a:xfrm>
+            <a:off x="11045952" y="557784"/>
+            <a:ext cx="475488" cy="182880"/>
+          </a:xfrm>
+          <a:prstGeom prst="rect">
+            <a:avLst/>
+          </a:prstGeom>
+          <a:noFill/>
+        </p:spPr>
+        <p:txBody>
+          <a:bodyPr wrap="none" lIns="9144" rIns="9144" tIns="9144" bIns="9144" anchor="t">
+            <a:spAutoFit/>
+          </a:bodyPr>
+          <a:lstStyle/>
+          <a:p>
+            <a:pPr algn="ctr">
+              <a:spcAft>
+                <a:spcPts val="0"/>
+              </a:spcAft>
+              <a:defRPr sz="1000" b="1">
+                <a:solidFill>
+                  <a:srgbClr val="0D1117"/>
+                </a:solidFill>
+                <a:latin typeface="Inter"/>
+              </a:defRPr>
+            </a:pPr>
+            <a:r>
+              <a:rPr>
+                <a:latin typeface="Inter"/>
+              </a:rPr>
+              <a:t>B</a:t>
+            </a:r>
+          </a:p>
+        </p:txBody>
+      </p:sp>
+      <p:sp>
+        <p:nvSpPr>
+          <p:cNvPr id="7" name="TextBox 6"/>
+          <p:cNvSpPr txBox="1"/>
+          <p:nvPr/>
+        </p:nvSpPr>
+        <p:spPr>
+          <a:xfrm>
+            <a:off x="640080" y="1325880"/>
+            <a:ext cx="10908792" cy="201168"/>
+          </a:xfrm>
+          <a:prstGeom prst="rect">
+            <a:avLst/>
+          </a:prstGeom>
+          <a:noFill/>
+        </p:spPr>
+        <p:txBody>
+          <a:bodyPr wrap="none" lIns="9144" rIns="9144" tIns="9144" bIns="9144" anchor="t">
+            <a:spAutoFit/>
+          </a:bodyPr>
+          <a:lstStyle/>
+          <a:p>
+            <a:pPr algn="l">
+              <a:spcAft>
+                <a:spcPts val="0"/>
+              </a:spcAft>
+              <a:defRPr sz="720" b="1">
+                <a:solidFill>
+                  <a:srgbClr val="4A5563"/>
+                </a:solidFill>
+                <a:latin typeface="Inter"/>
+              </a:defRPr>
+            </a:pPr>
+            <a:r>
+              <a:rPr>
+                <a:latin typeface="Inter"/>
+              </a:rPr>
+              <a:t>SERVER METRIC METHODS</a:t>
+            </a:r>
+          </a:p>
+        </p:txBody>
+      </p:sp>
+      <p:graphicFrame>
+        <p:nvGraphicFramePr>
+          <p:cNvPr id="8" name="Table 7"/>
+          <p:cNvGraphicFramePr>
+            <a:graphicFrameLocks noGrp="1"/>
+          </p:cNvGraphicFramePr>
+          <p:nvPr/>
+        </p:nvGraphicFramePr>
+        <p:xfrm>
+          <a:off x="640080" y="1600200"/>
+          <a:ext cx="10908792" cy="3078712"/>
         </p:xfrm>
         <a:graphic>
           <a:graphicData uri="http://schemas.openxmlformats.org/drawingml/2006/table">
@@ -29544,7 +28860,7 @@
                 <a:gridCol w="2224278"/>
                 <a:gridCol w="2224278"/>
               </a:tblGrid>
-              <a:tr h="737482">
+              <a:tr h="1026237">
                 <a:tc>
                   <a:txBody>
                     <a:bodyPr/>
@@ -29681,7 +28997,7 @@
                   </a:tcPr>
                 </a:tc>
               </a:tr>
-              <a:tr h="737482">
+              <a:tr h="1026237">
                 <a:tc>
                   <a:txBody>
                     <a:bodyPr/>
@@ -29818,7 +29134,7 @@
                   </a:tcPr>
                 </a:tc>
               </a:tr>
-              <a:tr h="737484">
+              <a:tr h="1026238">
                 <a:tc>
                   <a:txBody>
                     <a:bodyPr/>
@@ -29961,14 +29277,14 @@
       </p:graphicFrame>
       <p:sp>
         <p:nvSpPr>
-          <p:cNvPr id="10" name="TextBox 9"/>
+          <p:cNvPr id="9" name="TextBox 8"/>
           <p:cNvSpPr txBox="1"/>
           <p:nvPr/>
         </p:nvSpPr>
         <p:spPr>
           <a:xfrm>
-            <a:off x="640080" y="3922376"/>
-            <a:ext cx="10908792" cy="2295543"/>
+            <a:off x="640080" y="4788640"/>
+            <a:ext cx="10908792" cy="1429279"/>
           </a:xfrm>
           <a:prstGeom prst="rect">
             <a:avLst/>
@@ -29996,7 +29312,7 @@
               <a:rPr>
                 <a:latin typeface="Inter"/>
               </a:rPr>
-              <a:t>•  Forward values are assumptions, not forecasts or guarantees [S6].</a:t>
+              <a:t>•  Forward values are assumptions, not forecasts [S6]; Form 13F limits are set out in the caveat above [S7].</a:t>
             </a:r>
           </a:p>
           <a:p>
@@ -30015,52 +29331,14 @@
               <a:rPr>
                 <a:latin typeface="Inter"/>
               </a:rPr>
-              <a:t>•  Form 13F evidence has the stated lag, coverage and FX limitations [S7].</a:t>
+              <a:t>•  Strategy Lab results are calculated separately. AI-assisted; not investment, legal or compliance advice.</a:t>
             </a:r>
           </a:p>
-          <a:p>
-            <a:pPr algn="l">
-              <a:spcAft>
-                <a:spcPts val="500"/>
-              </a:spcAft>
-              <a:defRPr sz="1050" b="0">
-                <a:solidFill>
-                  <a:srgbClr val="0D1117"/>
-                </a:solidFill>
-                <a:latin typeface="Inter"/>
-              </a:defRPr>
-            </a:pPr>
-            <a:r>
-              <a:rPr>
-                <a:latin typeface="Inter"/>
-              </a:rPr>
-              <a:t>•  Portfolio Analytics and Strategy Lab are separate analytical scopes.</a:t>
-            </a:r>
-          </a:p>
-          <a:p>
-            <a:pPr algn="l">
-              <a:spcAft>
-                <a:spcPts val="500"/>
-              </a:spcAft>
-              <a:defRPr sz="1050" b="0">
-                <a:solidFill>
-                  <a:srgbClr val="0D1117"/>
-                </a:solidFill>
-                <a:latin typeface="Inter"/>
-              </a:defRPr>
-            </a:pPr>
-            <a:r>
-              <a:rPr>
-                <a:latin typeface="Inter"/>
-              </a:rPr>
-              <a:t>•  This AI-assisted construction analysis is not investment, legal or compliance advice.</a:t>
-            </a:r>
-          </a:p>
-        </p:txBody>
-      </p:sp>
-      <p:sp>
-        <p:nvSpPr>
-          <p:cNvPr id="11" name="Rectangle 10"/>
+        </p:txBody>
+      </p:sp>
+      <p:sp>
+        <p:nvSpPr>
+          <p:cNvPr id="10" name="Rectangle 9"/>
           <p:cNvSpPr/>
           <p:nvPr/>
         </p:nvSpPr>
@@ -30109,7 +29387,7 @@
       </p:sp>
       <p:sp>
         <p:nvSpPr>
-          <p:cNvPr id="12" name="TextBox 11"/>
+          <p:cNvPr id="11" name="TextBox 10"/>
           <p:cNvSpPr txBox="1"/>
           <p:nvPr/>
         </p:nvSpPr>
@@ -30151,7 +29429,7 @@
       </p:sp>
       <p:sp>
         <p:nvSpPr>
-          <p:cNvPr id="13" name="TextBox 12"/>
+          <p:cNvPr id="12" name="TextBox 11"/>
           <p:cNvSpPr txBox="1"/>
           <p:nvPr/>
         </p:nvSpPr>
@@ -30193,7 +29471,7 @@
       </p:sp>
       <p:sp>
         <p:nvSpPr>
-          <p:cNvPr id="14" name="TextBox 13"/>
+          <p:cNvPr id="13" name="TextBox 12"/>
           <p:cNvSpPr txBox="1"/>
           <p:nvPr/>
         </p:nvSpPr>
@@ -30228,7 +29506,7 @@
               <a:rPr>
                 <a:latin typeface="Inter"/>
               </a:rPr>
-              <a:t>28</a:t>
+              <a:t>29</a:t>
             </a:r>
           </a:p>
         </p:txBody>
@@ -30308,48 +29586,6 @@
         </p:nvSpPr>
         <p:spPr>
           <a:xfrm>
-            <a:off x="5897880" y="310896"/>
-            <a:ext cx="4800600" cy="256032"/>
-          </a:xfrm>
-          <a:prstGeom prst="rect">
-            <a:avLst/>
-          </a:prstGeom>
-          <a:noFill/>
-        </p:spPr>
-        <p:txBody>
-          <a:bodyPr wrap="none" lIns="9144" rIns="9144" tIns="9144" bIns="9144" anchor="t">
-            <a:spAutoFit/>
-          </a:bodyPr>
-          <a:lstStyle/>
-          <a:p>
-            <a:pPr algn="r">
-              <a:spcAft>
-                <a:spcPts val="0"/>
-              </a:spcAft>
-              <a:defRPr sz="680" b="1">
-                <a:solidFill>
-                  <a:srgbClr val="4F6B00"/>
-                </a:solidFill>
-                <a:latin typeface="Inter"/>
-              </a:defRPr>
-            </a:pPr>
-            <a:r>
-              <a:rPr>
-                <a:latin typeface="Inter"/>
-              </a:rPr>
-              <a:t>Illustrative, Gradient Maintained — demo data, not the client's holdings or managers</a:t>
-            </a:r>
-          </a:p>
-        </p:txBody>
-      </p:sp>
-      <p:sp>
-        <p:nvSpPr>
-          <p:cNvPr id="4" name="TextBox 3"/>
-          <p:cNvSpPr txBox="1"/>
-          <p:nvPr/>
-        </p:nvSpPr>
-        <p:spPr>
-          <a:xfrm>
             <a:off x="640080" y="566928"/>
             <a:ext cx="10058400" cy="530352"/>
           </a:xfrm>
@@ -30386,7 +29622,7 @@
       </p:sp>
       <p:sp>
         <p:nvSpPr>
-          <p:cNvPr id="5" name="Rectangle 4"/>
+          <p:cNvPr id="4" name="Rectangle 3"/>
           <p:cNvSpPr/>
           <p:nvPr/>
         </p:nvSpPr>
@@ -30435,7 +29671,7 @@
       </p:sp>
       <p:sp>
         <p:nvSpPr>
-          <p:cNvPr id="6" name="Rectangle 5"/>
+          <p:cNvPr id="5" name="Rectangle 4"/>
           <p:cNvSpPr/>
           <p:nvPr/>
         </p:nvSpPr>
@@ -30484,7 +29720,7 @@
       </p:sp>
       <p:sp>
         <p:nvSpPr>
-          <p:cNvPr id="7" name="TextBox 6"/>
+          <p:cNvPr id="6" name="TextBox 5"/>
           <p:cNvSpPr txBox="1"/>
           <p:nvPr/>
         </p:nvSpPr>
@@ -30526,14 +29762,14 @@
       </p:sp>
       <p:sp>
         <p:nvSpPr>
-          <p:cNvPr id="8" name="Rectangle 7"/>
+          <p:cNvPr id="7" name="Rectangle 6"/>
           <p:cNvSpPr/>
           <p:nvPr/>
         </p:nvSpPr>
         <p:spPr>
           <a:xfrm>
             <a:off x="640080" y="1325880"/>
-            <a:ext cx="10908792" cy="966784"/>
+            <a:ext cx="10908792" cy="808799"/>
           </a:xfrm>
           <a:prstGeom prst="rect">
             <a:avLst/>
@@ -30575,14 +29811,14 @@
       </p:sp>
       <p:sp>
         <p:nvSpPr>
-          <p:cNvPr id="9" name="Rectangle 8"/>
+          <p:cNvPr id="8" name="Rectangle 7"/>
           <p:cNvSpPr/>
           <p:nvPr/>
         </p:nvSpPr>
         <p:spPr>
           <a:xfrm>
             <a:off x="640080" y="1325880"/>
-            <a:ext cx="54864" cy="966784"/>
+            <a:ext cx="54864" cy="808799"/>
           </a:xfrm>
           <a:prstGeom prst="rect">
             <a:avLst/>
@@ -30624,7 +29860,7 @@
       </p:sp>
       <p:sp>
         <p:nvSpPr>
-          <p:cNvPr id="10" name="TextBox 9"/>
+          <p:cNvPr id="9" name="TextBox 8"/>
           <p:cNvSpPr txBox="1"/>
           <p:nvPr/>
         </p:nvSpPr>
@@ -30666,14 +29902,14 @@
       </p:sp>
       <p:sp>
         <p:nvSpPr>
-          <p:cNvPr id="11" name="TextBox 10"/>
+          <p:cNvPr id="10" name="TextBox 9"/>
           <p:cNvSpPr txBox="1"/>
           <p:nvPr/>
         </p:nvSpPr>
         <p:spPr>
           <a:xfrm>
             <a:off x="804671" y="1719072"/>
-            <a:ext cx="10616184" cy="482152"/>
+            <a:ext cx="10616184" cy="324167"/>
           </a:xfrm>
           <a:prstGeom prst="rect">
             <a:avLst/>
@@ -30708,13 +29944,13 @@
       </p:sp>
       <p:sp>
         <p:nvSpPr>
-          <p:cNvPr id="12" name="TextBox 11"/>
+          <p:cNvPr id="11" name="TextBox 10"/>
           <p:cNvSpPr txBox="1"/>
           <p:nvPr/>
         </p:nvSpPr>
         <p:spPr>
           <a:xfrm>
-            <a:off x="640080" y="2402392"/>
+            <a:off x="640080" y="2244407"/>
             <a:ext cx="10908792" cy="201168"/>
           </a:xfrm>
           <a:prstGeom prst="rect">
@@ -30750,15 +29986,15 @@
       </p:sp>
       <p:graphicFrame>
         <p:nvGraphicFramePr>
-          <p:cNvPr id="13" name="Table 12"/>
+          <p:cNvPr id="12" name="Table 11"/>
           <p:cNvGraphicFramePr>
             <a:graphicFrameLocks noGrp="1"/>
           </p:cNvGraphicFramePr>
           <p:nvPr/>
         </p:nvGraphicFramePr>
         <p:xfrm>
-          <a:off x="640080" y="2676712"/>
-          <a:ext cx="10908792" cy="1365123"/>
+          <a:off x="640080" y="2518727"/>
+          <a:ext cx="10908792" cy="1097217"/>
         </p:xfrm>
         <a:graphic>
           <a:graphicData uri="http://schemas.openxmlformats.org/drawingml/2006/table">
@@ -30772,7 +30008,7 @@
                 <a:gridCol w="2965704"/>
                 <a:gridCol w="2965704"/>
               </a:tblGrid>
-              <a:tr h="341280">
+              <a:tr h="274304">
                 <a:tc>
                   <a:txBody>
                     <a:bodyPr/>
@@ -30882,7 +30118,7 @@
                   </a:tcPr>
                 </a:tc>
               </a:tr>
-              <a:tr h="341280">
+              <a:tr h="274304">
                 <a:tc>
                   <a:txBody>
                     <a:bodyPr/>
@@ -30992,7 +30228,7 @@
                   </a:tcPr>
                 </a:tc>
               </a:tr>
-              <a:tr h="341280">
+              <a:tr h="274304">
                 <a:tc>
                   <a:txBody>
                     <a:bodyPr/>
@@ -31102,7 +30338,7 @@
                   </a:tcPr>
                 </a:tc>
               </a:tr>
-              <a:tr h="341283">
+              <a:tr h="274305">
                 <a:tc>
                   <a:txBody>
                     <a:bodyPr/>
@@ -31218,14 +30454,14 @@
       </p:graphicFrame>
       <p:sp>
         <p:nvSpPr>
-          <p:cNvPr id="14" name="Rectangle 13"/>
+          <p:cNvPr id="13" name="Rectangle 12"/>
           <p:cNvSpPr/>
           <p:nvPr/>
         </p:nvSpPr>
         <p:spPr>
           <a:xfrm>
-            <a:off x="640080" y="4151563"/>
-            <a:ext cx="10908792" cy="783173"/>
+            <a:off x="640080" y="3725672"/>
+            <a:ext cx="10908792" cy="655192"/>
           </a:xfrm>
           <a:prstGeom prst="rect">
             <a:avLst/>
@@ -31267,14 +30503,14 @@
       </p:sp>
       <p:sp>
         <p:nvSpPr>
-          <p:cNvPr id="15" name="Rectangle 14"/>
+          <p:cNvPr id="14" name="Rectangle 13"/>
           <p:cNvSpPr/>
           <p:nvPr/>
         </p:nvSpPr>
         <p:spPr>
           <a:xfrm>
-            <a:off x="640080" y="4151563"/>
-            <a:ext cx="54864" cy="783173"/>
+            <a:off x="640080" y="3725672"/>
+            <a:ext cx="54864" cy="655192"/>
           </a:xfrm>
           <a:prstGeom prst="rect">
             <a:avLst/>
@@ -31316,13 +30552,13 @@
       </p:sp>
       <p:sp>
         <p:nvSpPr>
-          <p:cNvPr id="16" name="TextBox 15"/>
+          <p:cNvPr id="15" name="TextBox 14"/>
           <p:cNvSpPr txBox="1"/>
           <p:nvPr/>
         </p:nvSpPr>
         <p:spPr>
           <a:xfrm>
-            <a:off x="804671" y="4261291"/>
+            <a:off x="804671" y="3835400"/>
             <a:ext cx="10616184" cy="228600"/>
           </a:xfrm>
           <a:prstGeom prst="rect">
@@ -31358,14 +30594,14 @@
       </p:sp>
       <p:sp>
         <p:nvSpPr>
-          <p:cNvPr id="17" name="TextBox 16"/>
+          <p:cNvPr id="16" name="TextBox 15"/>
           <p:cNvSpPr txBox="1"/>
           <p:nvPr/>
         </p:nvSpPr>
         <p:spPr>
           <a:xfrm>
-            <a:off x="804671" y="4544755"/>
-            <a:ext cx="10616184" cy="298541"/>
+            <a:off x="804671" y="4118864"/>
+            <a:ext cx="10616184" cy="228600"/>
           </a:xfrm>
           <a:prstGeom prst="rect">
             <a:avLst/>
@@ -31400,14 +30636,14 @@
       </p:sp>
       <p:sp>
         <p:nvSpPr>
-          <p:cNvPr id="18" name="Rectangle 17"/>
+          <p:cNvPr id="17" name="Rectangle 16"/>
           <p:cNvSpPr/>
           <p:nvPr/>
         </p:nvSpPr>
         <p:spPr>
           <a:xfrm>
-            <a:off x="640080" y="5044464"/>
-            <a:ext cx="10908792" cy="1173455"/>
+            <a:off x="640080" y="4490593"/>
+            <a:ext cx="10908792" cy="808799"/>
           </a:xfrm>
           <a:prstGeom prst="rect">
             <a:avLst/>
@@ -31449,14 +30685,14 @@
       </p:sp>
       <p:sp>
         <p:nvSpPr>
-          <p:cNvPr id="19" name="Rectangle 18"/>
+          <p:cNvPr id="18" name="Rectangle 17"/>
           <p:cNvSpPr/>
           <p:nvPr/>
         </p:nvSpPr>
         <p:spPr>
           <a:xfrm>
-            <a:off x="640080" y="5044464"/>
-            <a:ext cx="54864" cy="1173455"/>
+            <a:off x="640080" y="4490593"/>
+            <a:ext cx="54864" cy="808799"/>
           </a:xfrm>
           <a:prstGeom prst="rect">
             <a:avLst/>
@@ -31498,13 +30734,13 @@
       </p:sp>
       <p:sp>
         <p:nvSpPr>
-          <p:cNvPr id="20" name="TextBox 19"/>
+          <p:cNvPr id="19" name="TextBox 18"/>
           <p:cNvSpPr txBox="1"/>
           <p:nvPr/>
         </p:nvSpPr>
         <p:spPr>
           <a:xfrm>
-            <a:off x="804671" y="5154192"/>
+            <a:off x="804671" y="4600321"/>
             <a:ext cx="10616184" cy="228600"/>
           </a:xfrm>
           <a:prstGeom prst="rect">
@@ -31533,21 +30769,21 @@
               <a:rPr>
                 <a:latin typeface="Inter"/>
               </a:rPr>
-              <a:t>Key judgment — headline signal</a:t>
+              <a:t>Key judgment — Concentration</a:t>
             </a:r>
           </a:p>
         </p:txBody>
       </p:sp>
       <p:sp>
         <p:nvSpPr>
-          <p:cNvPr id="21" name="TextBox 20"/>
+          <p:cNvPr id="20" name="TextBox 19"/>
           <p:cNvSpPr txBox="1"/>
           <p:nvPr/>
         </p:nvSpPr>
         <p:spPr>
           <a:xfrm>
-            <a:off x="804671" y="5437656"/>
-            <a:ext cx="10616184" cy="688823"/>
+            <a:off x="804671" y="4883785"/>
+            <a:ext cx="10616184" cy="324167"/>
           </a:xfrm>
           <a:prstGeom prst="rect">
             <a:avLst/>
@@ -31575,14 +30811,196 @@
               <a:rPr>
                 <a:latin typeface="Inter"/>
               </a:rPr>
-              <a:t>Observation: The sample report carries a manager-and-issuer concentration signal above the clear threshold [S1]. Why it matters: This signal focuses oversight on the report's most decision-relevant condition. Uncertainty: Evidence coverage may exclude newer or more detailed observations. What would change the view: A governed refresh showing a different signal or breached threshold.</a:t>
+              <a:t>Observation: Manager and issuer concentration sit near their limits [S1]. Why it matters: Moving 4.0pp to a passive completion mandate reduces both. Uncertainty: Transition costs are not yet confirmed. What would change the view: Costs that outweigh the concentration benefit.</a:t>
             </a:r>
           </a:p>
         </p:txBody>
       </p:sp>
       <p:sp>
         <p:nvSpPr>
+          <p:cNvPr id="21" name="Rectangle 20"/>
+          <p:cNvSpPr/>
+          <p:nvPr/>
+        </p:nvSpPr>
+        <p:spPr>
+          <a:xfrm>
+            <a:off x="640080" y="5409120"/>
+            <a:ext cx="10908792" cy="808799"/>
+          </a:xfrm>
+          <a:prstGeom prst="rect">
+            <a:avLst/>
+          </a:prstGeom>
+          <a:solidFill>
+            <a:srgbClr val="F5F7F9"/>
+          </a:solidFill>
+          <a:ln>
+            <a:solidFill>
+              <a:srgbClr val="E3E7EC"/>
+            </a:solidFill>
+          </a:ln>
+        </p:spPr>
+        <p:style>
+          <a:lnRef idx="1">
+            <a:schemeClr val="accent1"/>
+          </a:lnRef>
+          <a:fillRef idx="3">
+            <a:schemeClr val="accent1"/>
+          </a:fillRef>
+          <a:effectRef idx="2">
+            <a:schemeClr val="accent1"/>
+          </a:effectRef>
+          <a:fontRef idx="minor">
+            <a:schemeClr val="lt1"/>
+          </a:fontRef>
+        </p:style>
+        <p:txBody>
+          <a:bodyPr rtlCol="0" anchor="ctr"/>
+          <a:lstStyle/>
+          <a:p>
+            <a:pPr algn="ctr">
+              <a:defRPr>
+                <a:latin typeface="Inter"/>
+              </a:defRPr>
+            </a:pPr>
+          </a:p>
+        </p:txBody>
+      </p:sp>
+      <p:sp>
+        <p:nvSpPr>
           <p:cNvPr id="22" name="Rectangle 21"/>
+          <p:cNvSpPr/>
+          <p:nvPr/>
+        </p:nvSpPr>
+        <p:spPr>
+          <a:xfrm>
+            <a:off x="640080" y="5409120"/>
+            <a:ext cx="54864" cy="808799"/>
+          </a:xfrm>
+          <a:prstGeom prst="rect">
+            <a:avLst/>
+          </a:prstGeom>
+          <a:solidFill>
+            <a:srgbClr val="0D1117"/>
+          </a:solidFill>
+          <a:ln>
+            <a:solidFill>
+              <a:srgbClr val="0D1117"/>
+            </a:solidFill>
+          </a:ln>
+        </p:spPr>
+        <p:style>
+          <a:lnRef idx="1">
+            <a:schemeClr val="accent1"/>
+          </a:lnRef>
+          <a:fillRef idx="3">
+            <a:schemeClr val="accent1"/>
+          </a:fillRef>
+          <a:effectRef idx="2">
+            <a:schemeClr val="accent1"/>
+          </a:effectRef>
+          <a:fontRef idx="minor">
+            <a:schemeClr val="lt1"/>
+          </a:fontRef>
+        </p:style>
+        <p:txBody>
+          <a:bodyPr rtlCol="0" anchor="ctr"/>
+          <a:lstStyle/>
+          <a:p>
+            <a:pPr algn="ctr">
+              <a:defRPr>
+                <a:latin typeface="Inter"/>
+              </a:defRPr>
+            </a:pPr>
+          </a:p>
+        </p:txBody>
+      </p:sp>
+      <p:sp>
+        <p:nvSpPr>
+          <p:cNvPr id="23" name="TextBox 22"/>
+          <p:cNvSpPr txBox="1"/>
+          <p:nvPr/>
+        </p:nvSpPr>
+        <p:spPr>
+          <a:xfrm>
+            <a:off x="804671" y="5518848"/>
+            <a:ext cx="10616184" cy="228600"/>
+          </a:xfrm>
+          <a:prstGeom prst="rect">
+            <a:avLst/>
+          </a:prstGeom>
+          <a:noFill/>
+        </p:spPr>
+        <p:txBody>
+          <a:bodyPr wrap="none" lIns="9144" rIns="9144" tIns="9144" bIns="9144" anchor="t">
+            <a:spAutoFit/>
+          </a:bodyPr>
+          <a:lstStyle/>
+          <a:p>
+            <a:pPr algn="l">
+              <a:spcAft>
+                <a:spcPts val="0"/>
+              </a:spcAft>
+              <a:defRPr sz="1000" b="1">
+                <a:solidFill>
+                  <a:srgbClr val="0D1117"/>
+                </a:solidFill>
+                <a:latin typeface="Inter"/>
+              </a:defRPr>
+            </a:pPr>
+            <a:r>
+              <a:rPr>
+                <a:latin typeface="Inter"/>
+              </a:rPr>
+              <a:t>Key judgment — Sleeve size</a:t>
+            </a:r>
+          </a:p>
+        </p:txBody>
+      </p:sp>
+      <p:sp>
+        <p:nvSpPr>
+          <p:cNvPr id="24" name="TextBox 23"/>
+          <p:cNvSpPr txBox="1"/>
+          <p:nvPr/>
+        </p:nvSpPr>
+        <p:spPr>
+          <a:xfrm>
+            <a:off x="804671" y="5802312"/>
+            <a:ext cx="10616184" cy="324167"/>
+          </a:xfrm>
+          <a:prstGeom prst="rect">
+            <a:avLst/>
+          </a:prstGeom>
+          <a:noFill/>
+        </p:spPr>
+        <p:txBody>
+          <a:bodyPr wrap="none" lIns="9144" rIns="9144" tIns="9144" bIns="9144" anchor="t">
+            <a:spAutoFit/>
+          </a:bodyPr>
+          <a:lstStyle/>
+          <a:p>
+            <a:pPr algn="l">
+              <a:spcAft>
+                <a:spcPts val="0"/>
+              </a:spcAft>
+              <a:defRPr sz="950" b="0">
+                <a:solidFill>
+                  <a:srgbClr val="4A5563"/>
+                </a:solidFill>
+                <a:latin typeface="Inter"/>
+              </a:defRPr>
+            </a:pPr>
+            <a:r>
+              <a:rPr>
+                <a:latin typeface="Inter"/>
+              </a:rPr>
+              <a:t>Observation: Public equity is 42.0% of total NAV [S2]. Why it matters: The 4.0pp shift stays inside the sleeve and leaves the total weight unchanged. Uncertainty: The weight moves with equity markets before funding. What would change the view: A drift of more than 2pp before implementation.</a:t>
+            </a:r>
+          </a:p>
+        </p:txBody>
+      </p:sp>
+      <p:sp>
+        <p:nvSpPr>
+          <p:cNvPr id="25" name="Rectangle 24"/>
           <p:cNvSpPr/>
           <p:nvPr/>
         </p:nvSpPr>
@@ -31631,7 +31049,7 @@
       </p:sp>
       <p:sp>
         <p:nvSpPr>
-          <p:cNvPr id="23" name="TextBox 22"/>
+          <p:cNvPr id="26" name="TextBox 25"/>
           <p:cNvSpPr txBox="1"/>
           <p:nvPr/>
         </p:nvSpPr>
@@ -31666,14 +31084,14 @@
               <a:rPr>
                 <a:latin typeface="Inter"/>
               </a:rPr>
-              <a:t>Sources: S1 · S3 · S4 · S7 · S8</a:t>
+              <a:t>Sources: S1 · S2 · S3 · S4 · S7 · S8</a:t>
             </a:r>
           </a:p>
         </p:txBody>
       </p:sp>
       <p:sp>
         <p:nvSpPr>
-          <p:cNvPr id="24" name="TextBox 23"/>
+          <p:cNvPr id="27" name="TextBox 26"/>
           <p:cNvSpPr txBox="1"/>
           <p:nvPr/>
         </p:nvSpPr>
@@ -31715,7 +31133,7 @@
       </p:sp>
       <p:sp>
         <p:nvSpPr>
-          <p:cNvPr id="25" name="TextBox 24"/>
+          <p:cNvPr id="28" name="TextBox 27"/>
           <p:cNvSpPr txBox="1"/>
           <p:nvPr/>
         </p:nvSpPr>
@@ -31830,48 +31248,6 @@
         </p:nvSpPr>
         <p:spPr>
           <a:xfrm>
-            <a:off x="5897880" y="310896"/>
-            <a:ext cx="4800600" cy="256032"/>
-          </a:xfrm>
-          <a:prstGeom prst="rect">
-            <a:avLst/>
-          </a:prstGeom>
-          <a:noFill/>
-        </p:spPr>
-        <p:txBody>
-          <a:bodyPr wrap="none" lIns="9144" rIns="9144" tIns="9144" bIns="9144" anchor="t">
-            <a:spAutoFit/>
-          </a:bodyPr>
-          <a:lstStyle/>
-          <a:p>
-            <a:pPr algn="r">
-              <a:spcAft>
-                <a:spcPts val="0"/>
-              </a:spcAft>
-              <a:defRPr sz="680" b="1">
-                <a:solidFill>
-                  <a:srgbClr val="4F6B00"/>
-                </a:solidFill>
-                <a:latin typeface="Inter"/>
-              </a:defRPr>
-            </a:pPr>
-            <a:r>
-              <a:rPr>
-                <a:latin typeface="Inter"/>
-              </a:rPr>
-              <a:t>Illustrative, Gradient Maintained — demo data, not the client's holdings or managers</a:t>
-            </a:r>
-          </a:p>
-        </p:txBody>
-      </p:sp>
-      <p:sp>
-        <p:nvSpPr>
-          <p:cNvPr id="4" name="TextBox 3"/>
-          <p:cNvSpPr txBox="1"/>
-          <p:nvPr/>
-        </p:nvSpPr>
-        <p:spPr>
-          <a:xfrm>
             <a:off x="640080" y="566928"/>
             <a:ext cx="10058400" cy="530352"/>
           </a:xfrm>
@@ -31908,7 +31284,7 @@
       </p:sp>
       <p:sp>
         <p:nvSpPr>
-          <p:cNvPr id="5" name="Rectangle 4"/>
+          <p:cNvPr id="4" name="Rectangle 3"/>
           <p:cNvSpPr/>
           <p:nvPr/>
         </p:nvSpPr>
@@ -31957,7 +31333,7 @@
       </p:sp>
       <p:sp>
         <p:nvSpPr>
-          <p:cNvPr id="6" name="Rectangle 5"/>
+          <p:cNvPr id="5" name="Rectangle 4"/>
           <p:cNvSpPr/>
           <p:nvPr/>
         </p:nvSpPr>
@@ -32006,7 +31382,7 @@
       </p:sp>
       <p:sp>
         <p:nvSpPr>
-          <p:cNvPr id="7" name="TextBox 6"/>
+          <p:cNvPr id="6" name="TextBox 5"/>
           <p:cNvSpPr txBox="1"/>
           <p:nvPr/>
         </p:nvSpPr>
@@ -32048,14 +31424,14 @@
       </p:sp>
       <p:sp>
         <p:nvSpPr>
-          <p:cNvPr id="8" name="Rectangle 7"/>
+          <p:cNvPr id="7" name="Rectangle 6"/>
           <p:cNvSpPr/>
           <p:nvPr/>
         </p:nvSpPr>
         <p:spPr>
           <a:xfrm>
             <a:off x="640080" y="1325880"/>
-            <a:ext cx="10908792" cy="2160255"/>
+            <a:ext cx="10908792" cy="4892040"/>
           </a:xfrm>
           <a:prstGeom prst="rect">
             <a:avLst/>
@@ -32097,14 +31473,14 @@
       </p:sp>
       <p:sp>
         <p:nvSpPr>
-          <p:cNvPr id="9" name="Rectangle 8"/>
+          <p:cNvPr id="8" name="Rectangle 7"/>
           <p:cNvSpPr/>
           <p:nvPr/>
         </p:nvSpPr>
         <p:spPr>
           <a:xfrm>
             <a:off x="640080" y="1325880"/>
-            <a:ext cx="54864" cy="2160255"/>
+            <a:ext cx="54864" cy="4892040"/>
           </a:xfrm>
           <a:prstGeom prst="rect">
             <a:avLst/>
@@ -32146,7 +31522,7 @@
       </p:sp>
       <p:sp>
         <p:nvSpPr>
-          <p:cNvPr id="10" name="TextBox 9"/>
+          <p:cNvPr id="9" name="TextBox 8"/>
           <p:cNvSpPr txBox="1"/>
           <p:nvPr/>
         </p:nvSpPr>
@@ -32181,21 +31557,21 @@
               <a:rPr>
                 <a:latin typeface="Inter"/>
               </a:rPr>
-              <a:t>Key judgment — primary measure</a:t>
+              <a:t>Key judgment — Largest issuer</a:t>
             </a:r>
           </a:p>
         </p:txBody>
       </p:sp>
       <p:sp>
         <p:nvSpPr>
-          <p:cNvPr id="11" name="TextBox 10"/>
+          <p:cNvPr id="10" name="TextBox 9"/>
           <p:cNvSpPr txBox="1"/>
           <p:nvPr/>
         </p:nvSpPr>
         <p:spPr>
           <a:xfrm>
             <a:off x="804671" y="1719072"/>
-            <a:ext cx="10616184" cy="1675623"/>
+            <a:ext cx="10616184" cy="4407408"/>
           </a:xfrm>
           <a:prstGeom prst="rect">
             <a:avLst/>
@@ -32223,196 +31599,14 @@
               <a:rPr>
                 <a:latin typeface="Inter"/>
               </a:rPr>
-              <a:t>Observation: Public-equity weight is 42.0% in the review evidence [S2]. Why it matters: This measure establishes the baseline for comparing later governed results. Uncertainty: The source basis may omit newer observations outside the reviewed evidence. What would change the view: A refreshed source report showing a change above 1%.</a:t>
+              <a:t>Observation: The largest single-issuer exposure is 2.3% of NAV [S3]. Why it matters: It is the position closest to the concentration limit. Uncertainty: Look-through holdings are as of the last 13F filing. What would change the view: A newer filing that changes the top position.</a:t>
             </a:r>
           </a:p>
         </p:txBody>
       </p:sp>
       <p:sp>
         <p:nvSpPr>
-          <p:cNvPr id="12" name="Rectangle 11"/>
-          <p:cNvSpPr/>
-          <p:nvPr/>
-        </p:nvSpPr>
-        <p:spPr>
-          <a:xfrm>
-            <a:off x="640080" y="3595863"/>
-            <a:ext cx="10908792" cy="2622056"/>
-          </a:xfrm>
-          <a:prstGeom prst="rect">
-            <a:avLst/>
-          </a:prstGeom>
-          <a:solidFill>
-            <a:srgbClr val="F5F7F9"/>
-          </a:solidFill>
-          <a:ln>
-            <a:solidFill>
-              <a:srgbClr val="E3E7EC"/>
-            </a:solidFill>
-          </a:ln>
-        </p:spPr>
-        <p:style>
-          <a:lnRef idx="1">
-            <a:schemeClr val="accent1"/>
-          </a:lnRef>
-          <a:fillRef idx="3">
-            <a:schemeClr val="accent1"/>
-          </a:fillRef>
-          <a:effectRef idx="2">
-            <a:schemeClr val="accent1"/>
-          </a:effectRef>
-          <a:fontRef idx="minor">
-            <a:schemeClr val="lt1"/>
-          </a:fontRef>
-        </p:style>
-        <p:txBody>
-          <a:bodyPr rtlCol="0" anchor="ctr"/>
-          <a:lstStyle/>
-          <a:p>
-            <a:pPr algn="ctr">
-              <a:defRPr>
-                <a:latin typeface="Inter"/>
-              </a:defRPr>
-            </a:pPr>
-          </a:p>
-        </p:txBody>
-      </p:sp>
-      <p:sp>
-        <p:nvSpPr>
-          <p:cNvPr id="13" name="Rectangle 12"/>
-          <p:cNvSpPr/>
-          <p:nvPr/>
-        </p:nvSpPr>
-        <p:spPr>
-          <a:xfrm>
-            <a:off x="640080" y="3595863"/>
-            <a:ext cx="54864" cy="2622056"/>
-          </a:xfrm>
-          <a:prstGeom prst="rect">
-            <a:avLst/>
-          </a:prstGeom>
-          <a:solidFill>
-            <a:srgbClr val="0D1117"/>
-          </a:solidFill>
-          <a:ln>
-            <a:solidFill>
-              <a:srgbClr val="0D1117"/>
-            </a:solidFill>
-          </a:ln>
-        </p:spPr>
-        <p:style>
-          <a:lnRef idx="1">
-            <a:schemeClr val="accent1"/>
-          </a:lnRef>
-          <a:fillRef idx="3">
-            <a:schemeClr val="accent1"/>
-          </a:fillRef>
-          <a:effectRef idx="2">
-            <a:schemeClr val="accent1"/>
-          </a:effectRef>
-          <a:fontRef idx="minor">
-            <a:schemeClr val="lt1"/>
-          </a:fontRef>
-        </p:style>
-        <p:txBody>
-          <a:bodyPr rtlCol="0" anchor="ctr"/>
-          <a:lstStyle/>
-          <a:p>
-            <a:pPr algn="ctr">
-              <a:defRPr>
-                <a:latin typeface="Inter"/>
-              </a:defRPr>
-            </a:pPr>
-          </a:p>
-        </p:txBody>
-      </p:sp>
-      <p:sp>
-        <p:nvSpPr>
-          <p:cNvPr id="14" name="TextBox 13"/>
-          <p:cNvSpPr txBox="1"/>
-          <p:nvPr/>
-        </p:nvSpPr>
-        <p:spPr>
-          <a:xfrm>
-            <a:off x="804671" y="3705591"/>
-            <a:ext cx="10616184" cy="228600"/>
-          </a:xfrm>
-          <a:prstGeom prst="rect">
-            <a:avLst/>
-          </a:prstGeom>
-          <a:noFill/>
-        </p:spPr>
-        <p:txBody>
-          <a:bodyPr wrap="none" lIns="9144" rIns="9144" tIns="9144" bIns="9144" anchor="t">
-            <a:spAutoFit/>
-          </a:bodyPr>
-          <a:lstStyle/>
-          <a:p>
-            <a:pPr algn="l">
-              <a:spcAft>
-                <a:spcPts val="0"/>
-              </a:spcAft>
-              <a:defRPr sz="1000" b="1">
-                <a:solidFill>
-                  <a:srgbClr val="0D1117"/>
-                </a:solidFill>
-                <a:latin typeface="Inter"/>
-              </a:defRPr>
-            </a:pPr>
-            <a:r>
-              <a:rPr>
-                <a:latin typeface="Inter"/>
-              </a:rPr>
-              <a:t>Key judgment — monitoring priority</a:t>
-            </a:r>
-          </a:p>
-        </p:txBody>
-      </p:sp>
-      <p:sp>
-        <p:nvSpPr>
-          <p:cNvPr id="15" name="TextBox 14"/>
-          <p:cNvSpPr txBox="1"/>
-          <p:nvPr/>
-        </p:nvSpPr>
-        <p:spPr>
-          <a:xfrm>
-            <a:off x="804671" y="3989055"/>
-            <a:ext cx="10616184" cy="2137424"/>
-          </a:xfrm>
-          <a:prstGeom prst="rect">
-            <a:avLst/>
-          </a:prstGeom>
-          <a:noFill/>
-        </p:spPr>
-        <p:txBody>
-          <a:bodyPr wrap="none" lIns="9144" rIns="9144" tIns="9144" bIns="9144" anchor="t">
-            <a:spAutoFit/>
-          </a:bodyPr>
-          <a:lstStyle/>
-          <a:p>
-            <a:pPr algn="l">
-              <a:spcAft>
-                <a:spcPts val="0"/>
-              </a:spcAft>
-              <a:defRPr sz="950" b="0">
-                <a:solidFill>
-                  <a:srgbClr val="4A5563"/>
-                </a:solidFill>
-                <a:latin typeface="Inter"/>
-              </a:defRPr>
-            </a:pPr>
-            <a:r>
-              <a:rPr>
-                <a:latin typeface="Inter"/>
-              </a:rPr>
-              <a:t>Observation: Largest concentration is 2.3% NAV in the review evidence [S3]. Why it matters: This result determines which item receives priority in the next monitoring cycle. Uncertainty: Supporting coverage may omit later filings or corroborating detail. What would change the view: A new filing or report that resolves the item or changes it by 1%.</a:t>
-            </a:r>
-          </a:p>
-        </p:txBody>
-      </p:sp>
-      <p:sp>
-        <p:nvSpPr>
-          <p:cNvPr id="16" name="Rectangle 15"/>
+          <p:cNvPr id="11" name="Rectangle 10"/>
           <p:cNvSpPr/>
           <p:nvPr/>
         </p:nvSpPr>
@@ -32461,7 +31655,7 @@
       </p:sp>
       <p:sp>
         <p:nvSpPr>
-          <p:cNvPr id="17" name="TextBox 16"/>
+          <p:cNvPr id="12" name="TextBox 11"/>
           <p:cNvSpPr txBox="1"/>
           <p:nvPr/>
         </p:nvSpPr>
@@ -32496,14 +31690,14 @@
               <a:rPr>
                 <a:latin typeface="Inter"/>
               </a:rPr>
-              <a:t>Sources: S2 · S3</a:t>
+              <a:t>Sources: S3</a:t>
             </a:r>
           </a:p>
         </p:txBody>
       </p:sp>
       <p:sp>
         <p:nvSpPr>
-          <p:cNvPr id="18" name="TextBox 17"/>
+          <p:cNvPr id="13" name="TextBox 12"/>
           <p:cNvSpPr txBox="1"/>
           <p:nvPr/>
         </p:nvSpPr>
@@ -32545,7 +31739,7 @@
       </p:sp>
       <p:sp>
         <p:nvSpPr>
-          <p:cNvPr id="19" name="TextBox 18"/>
+          <p:cNvPr id="14" name="TextBox 13"/>
           <p:cNvSpPr txBox="1"/>
           <p:nvPr/>
         </p:nvSpPr>
@@ -32660,48 +31854,6 @@
         </p:nvSpPr>
         <p:spPr>
           <a:xfrm>
-            <a:off x="5897880" y="310896"/>
-            <a:ext cx="4800600" cy="256032"/>
-          </a:xfrm>
-          <a:prstGeom prst="rect">
-            <a:avLst/>
-          </a:prstGeom>
-          <a:noFill/>
-        </p:spPr>
-        <p:txBody>
-          <a:bodyPr wrap="none" lIns="9144" rIns="9144" tIns="9144" bIns="9144" anchor="t">
-            <a:spAutoFit/>
-          </a:bodyPr>
-          <a:lstStyle/>
-          <a:p>
-            <a:pPr algn="r">
-              <a:spcAft>
-                <a:spcPts val="0"/>
-              </a:spcAft>
-              <a:defRPr sz="680" b="1">
-                <a:solidFill>
-                  <a:srgbClr val="4F6B00"/>
-                </a:solidFill>
-                <a:latin typeface="Inter"/>
-              </a:defRPr>
-            </a:pPr>
-            <a:r>
-              <a:rPr>
-                <a:latin typeface="Inter"/>
-              </a:rPr>
-              <a:t>Illustrative, Gradient Maintained — demo data, not the client's holdings or managers</a:t>
-            </a:r>
-          </a:p>
-        </p:txBody>
-      </p:sp>
-      <p:sp>
-        <p:nvSpPr>
-          <p:cNvPr id="4" name="TextBox 3"/>
-          <p:cNvSpPr txBox="1"/>
-          <p:nvPr/>
-        </p:nvSpPr>
-        <p:spPr>
-          <a:xfrm>
             <a:off x="640080" y="566928"/>
             <a:ext cx="10058400" cy="530352"/>
           </a:xfrm>
@@ -32738,7 +31890,7 @@
       </p:sp>
       <p:sp>
         <p:nvSpPr>
-          <p:cNvPr id="5" name="Rectangle 4"/>
+          <p:cNvPr id="4" name="Rectangle 3"/>
           <p:cNvSpPr/>
           <p:nvPr/>
         </p:nvSpPr>
@@ -32787,7 +31939,7 @@
       </p:sp>
       <p:sp>
         <p:nvSpPr>
-          <p:cNvPr id="6" name="Rectangle 5"/>
+          <p:cNvPr id="5" name="Rectangle 4"/>
           <p:cNvSpPr/>
           <p:nvPr/>
         </p:nvSpPr>
@@ -32836,7 +31988,7 @@
       </p:sp>
       <p:sp>
         <p:nvSpPr>
-          <p:cNvPr id="7" name="TextBox 6"/>
+          <p:cNvPr id="6" name="TextBox 5"/>
           <p:cNvSpPr txBox="1"/>
           <p:nvPr/>
         </p:nvSpPr>
@@ -32878,7 +32030,7 @@
       </p:sp>
       <p:graphicFrame>
         <p:nvGraphicFramePr>
-          <p:cNvPr id="8" name="Table 7"/>
+          <p:cNvPr id="7" name="Table 6"/>
           <p:cNvGraphicFramePr>
             <a:graphicFrameLocks noGrp="1"/>
           </p:cNvGraphicFramePr>
@@ -33240,7 +32392,7 @@
       </p:graphicFrame>
       <p:sp>
         <p:nvSpPr>
-          <p:cNvPr id="9" name="TextBox 8"/>
+          <p:cNvPr id="8" name="TextBox 7"/>
           <p:cNvSpPr txBox="1"/>
           <p:nvPr/>
         </p:nvSpPr>
@@ -33282,7 +32434,7 @@
       </p:sp>
       <p:graphicFrame>
         <p:nvGraphicFramePr>
-          <p:cNvPr id="10" name="Table 9"/>
+          <p:cNvPr id="9" name="Table 8"/>
           <p:cNvGraphicFramePr>
             <a:graphicFrameLocks noGrp="1"/>
           </p:cNvGraphicFramePr>
@@ -33678,7 +32830,7 @@
                         <a:rPr>
                           <a:latin typeface="Inter"/>
                         </a:rPr>
-                        <a:t>● Watch</a:t>
+                        <a:t>● Near limit</a:t>
                       </a:r>
                     </a:p>
                   </a:txBody>
@@ -33815,7 +32967,7 @@
                         <a:rPr>
                           <a:latin typeface="Inter"/>
                         </a:rPr>
-                        <a:t>● Watch</a:t>
+                        <a:t>● Near limit</a:t>
                       </a:r>
                     </a:p>
                   </a:txBody>
@@ -33859,7 +33011,7 @@
       </p:graphicFrame>
       <p:sp>
         <p:nvSpPr>
-          <p:cNvPr id="11" name="Rectangle 10"/>
+          <p:cNvPr id="10" name="Rectangle 9"/>
           <p:cNvSpPr/>
           <p:nvPr/>
         </p:nvSpPr>
@@ -33908,7 +33060,7 @@
       </p:sp>
       <p:sp>
         <p:nvSpPr>
-          <p:cNvPr id="12" name="TextBox 11"/>
+          <p:cNvPr id="11" name="TextBox 10"/>
           <p:cNvSpPr txBox="1"/>
           <p:nvPr/>
         </p:nvSpPr>
@@ -33950,7 +33102,7 @@
       </p:sp>
       <p:sp>
         <p:nvSpPr>
-          <p:cNvPr id="13" name="TextBox 12"/>
+          <p:cNvPr id="12" name="TextBox 11"/>
           <p:cNvSpPr txBox="1"/>
           <p:nvPr/>
         </p:nvSpPr>
@@ -33992,7 +33144,7 @@
       </p:sp>
       <p:sp>
         <p:nvSpPr>
-          <p:cNvPr id="14" name="TextBox 13"/>
+          <p:cNvPr id="13" name="TextBox 12"/>
           <p:cNvSpPr txBox="1"/>
           <p:nvPr/>
         </p:nvSpPr>
@@ -34107,48 +33259,6 @@
         </p:nvSpPr>
         <p:spPr>
           <a:xfrm>
-            <a:off x="5897880" y="310896"/>
-            <a:ext cx="4800600" cy="256032"/>
-          </a:xfrm>
-          <a:prstGeom prst="rect">
-            <a:avLst/>
-          </a:prstGeom>
-          <a:noFill/>
-        </p:spPr>
-        <p:txBody>
-          <a:bodyPr wrap="none" lIns="9144" rIns="9144" tIns="9144" bIns="9144" anchor="t">
-            <a:spAutoFit/>
-          </a:bodyPr>
-          <a:lstStyle/>
-          <a:p>
-            <a:pPr algn="r">
-              <a:spcAft>
-                <a:spcPts val="0"/>
-              </a:spcAft>
-              <a:defRPr sz="680" b="1">
-                <a:solidFill>
-                  <a:srgbClr val="4F6B00"/>
-                </a:solidFill>
-                <a:latin typeface="Inter"/>
-              </a:defRPr>
-            </a:pPr>
-            <a:r>
-              <a:rPr>
-                <a:latin typeface="Inter"/>
-              </a:rPr>
-              <a:t>Illustrative, Gradient Maintained — demo data, not the client's holdings or managers</a:t>
-            </a:r>
-          </a:p>
-        </p:txBody>
-      </p:sp>
-      <p:sp>
-        <p:nvSpPr>
-          <p:cNvPr id="4" name="TextBox 3"/>
-          <p:cNvSpPr txBox="1"/>
-          <p:nvPr/>
-        </p:nvSpPr>
-        <p:spPr>
-          <a:xfrm>
             <a:off x="640080" y="566928"/>
             <a:ext cx="10058400" cy="530352"/>
           </a:xfrm>
@@ -34185,7 +33295,7 @@
       </p:sp>
       <p:sp>
         <p:nvSpPr>
-          <p:cNvPr id="5" name="Rectangle 4"/>
+          <p:cNvPr id="4" name="Rectangle 3"/>
           <p:cNvSpPr/>
           <p:nvPr/>
         </p:nvSpPr>
@@ -34234,7 +33344,7 @@
       </p:sp>
       <p:sp>
         <p:nvSpPr>
-          <p:cNvPr id="6" name="Rectangle 5"/>
+          <p:cNvPr id="5" name="Rectangle 4"/>
           <p:cNvSpPr/>
           <p:nvPr/>
         </p:nvSpPr>
@@ -34283,7 +33393,7 @@
       </p:sp>
       <p:sp>
         <p:nvSpPr>
-          <p:cNvPr id="7" name="TextBox 6"/>
+          <p:cNvPr id="6" name="TextBox 5"/>
           <p:cNvSpPr txBox="1"/>
           <p:nvPr/>
         </p:nvSpPr>
@@ -34325,7 +33435,7 @@
       </p:sp>
       <p:sp>
         <p:nvSpPr>
-          <p:cNvPr id="8" name="TextBox 7"/>
+          <p:cNvPr id="7" name="TextBox 6"/>
           <p:cNvSpPr txBox="1"/>
           <p:nvPr/>
         </p:nvSpPr>
@@ -34367,7 +33477,7 @@
       </p:sp>
       <p:graphicFrame>
         <p:nvGraphicFramePr>
-          <p:cNvPr id="9" name="Chart 8"/>
+          <p:cNvPr id="8" name="Chart 7"/>
           <p:cNvGraphicFramePr>
             <a:graphicFrameLocks noGrp="1"/>
           </p:cNvGraphicFramePr>
@@ -34385,7 +33495,7 @@
       </p:graphicFrame>
       <p:sp>
         <p:nvSpPr>
-          <p:cNvPr id="10" name="Rectangle 9"/>
+          <p:cNvPr id="9" name="Rectangle 8"/>
           <p:cNvSpPr/>
           <p:nvPr/>
         </p:nvSpPr>
@@ -34434,7 +33544,7 @@
       </p:sp>
       <p:sp>
         <p:nvSpPr>
-          <p:cNvPr id="11" name="TextBox 10"/>
+          <p:cNvPr id="10" name="TextBox 9"/>
           <p:cNvSpPr txBox="1"/>
           <p:nvPr/>
         </p:nvSpPr>
@@ -34476,7 +33586,7 @@
       </p:sp>
       <p:sp>
         <p:nvSpPr>
-          <p:cNvPr id="12" name="TextBox 11"/>
+          <p:cNvPr id="11" name="TextBox 10"/>
           <p:cNvSpPr txBox="1"/>
           <p:nvPr/>
         </p:nvSpPr>
@@ -34518,7 +33628,7 @@
       </p:sp>
       <p:sp>
         <p:nvSpPr>
-          <p:cNvPr id="13" name="TextBox 12"/>
+          <p:cNvPr id="12" name="TextBox 11"/>
           <p:cNvSpPr txBox="1"/>
           <p:nvPr/>
         </p:nvSpPr>
@@ -34633,48 +33743,6 @@
         </p:nvSpPr>
         <p:spPr>
           <a:xfrm>
-            <a:off x="5897880" y="310896"/>
-            <a:ext cx="4800600" cy="256032"/>
-          </a:xfrm>
-          <a:prstGeom prst="rect">
-            <a:avLst/>
-          </a:prstGeom>
-          <a:noFill/>
-        </p:spPr>
-        <p:txBody>
-          <a:bodyPr wrap="none" lIns="9144" rIns="9144" tIns="9144" bIns="9144" anchor="t">
-            <a:spAutoFit/>
-          </a:bodyPr>
-          <a:lstStyle/>
-          <a:p>
-            <a:pPr algn="r">
-              <a:spcAft>
-                <a:spcPts val="0"/>
-              </a:spcAft>
-              <a:defRPr sz="680" b="1">
-                <a:solidFill>
-                  <a:srgbClr val="4F6B00"/>
-                </a:solidFill>
-                <a:latin typeface="Inter"/>
-              </a:defRPr>
-            </a:pPr>
-            <a:r>
-              <a:rPr>
-                <a:latin typeface="Inter"/>
-              </a:rPr>
-              <a:t>Illustrative, Gradient Maintained — demo data, not the client's holdings or managers</a:t>
-            </a:r>
-          </a:p>
-        </p:txBody>
-      </p:sp>
-      <p:sp>
-        <p:nvSpPr>
-          <p:cNvPr id="4" name="TextBox 3"/>
-          <p:cNvSpPr txBox="1"/>
-          <p:nvPr/>
-        </p:nvSpPr>
-        <p:spPr>
-          <a:xfrm>
             <a:off x="640080" y="566928"/>
             <a:ext cx="10058400" cy="530352"/>
           </a:xfrm>
@@ -34711,7 +33779,7 @@
       </p:sp>
       <p:sp>
         <p:nvSpPr>
-          <p:cNvPr id="5" name="Rectangle 4"/>
+          <p:cNvPr id="4" name="Rectangle 3"/>
           <p:cNvSpPr/>
           <p:nvPr/>
         </p:nvSpPr>
@@ -34760,7 +33828,7 @@
       </p:sp>
       <p:sp>
         <p:nvSpPr>
-          <p:cNvPr id="6" name="Rectangle 5"/>
+          <p:cNvPr id="5" name="Rectangle 4"/>
           <p:cNvSpPr/>
           <p:nvPr/>
         </p:nvSpPr>
@@ -34809,7 +33877,7 @@
       </p:sp>
       <p:sp>
         <p:nvSpPr>
-          <p:cNvPr id="7" name="TextBox 6"/>
+          <p:cNvPr id="6" name="TextBox 5"/>
           <p:cNvSpPr txBox="1"/>
           <p:nvPr/>
         </p:nvSpPr>
@@ -34851,7 +33919,7 @@
       </p:sp>
       <p:sp>
         <p:nvSpPr>
-          <p:cNvPr id="8" name="TextBox 7"/>
+          <p:cNvPr id="7" name="TextBox 6"/>
           <p:cNvSpPr txBox="1"/>
           <p:nvPr/>
         </p:nvSpPr>
@@ -34893,7 +33961,7 @@
       </p:sp>
       <p:graphicFrame>
         <p:nvGraphicFramePr>
-          <p:cNvPr id="9" name="Table 8"/>
+          <p:cNvPr id="8" name="Table 7"/>
           <p:cNvGraphicFramePr>
             <a:graphicFrameLocks noGrp="1"/>
           </p:cNvGraphicFramePr>
@@ -35743,7 +34811,7 @@
       </p:graphicFrame>
       <p:sp>
         <p:nvSpPr>
-          <p:cNvPr id="10" name="TextBox 9"/>
+          <p:cNvPr id="9" name="TextBox 8"/>
           <p:cNvSpPr txBox="1"/>
           <p:nvPr/>
         </p:nvSpPr>
@@ -35785,7 +34853,7 @@
       </p:sp>
       <p:sp>
         <p:nvSpPr>
-          <p:cNvPr id="11" name="Rectangle 10"/>
+          <p:cNvPr id="10" name="Rectangle 9"/>
           <p:cNvSpPr/>
           <p:nvPr/>
         </p:nvSpPr>
@@ -35834,7 +34902,7 @@
       </p:sp>
       <p:sp>
         <p:nvSpPr>
-          <p:cNvPr id="12" name="TextBox 11"/>
+          <p:cNvPr id="11" name="TextBox 10"/>
           <p:cNvSpPr txBox="1"/>
           <p:nvPr/>
         </p:nvSpPr>
@@ -35876,7 +34944,7 @@
       </p:sp>
       <p:sp>
         <p:nvSpPr>
-          <p:cNvPr id="13" name="TextBox 12"/>
+          <p:cNvPr id="12" name="TextBox 11"/>
           <p:cNvSpPr txBox="1"/>
           <p:nvPr/>
         </p:nvSpPr>
@@ -35918,7 +34986,7 @@
       </p:sp>
       <p:sp>
         <p:nvSpPr>
-          <p:cNvPr id="14" name="TextBox 13"/>
+          <p:cNvPr id="13" name="TextBox 12"/>
           <p:cNvSpPr txBox="1"/>
           <p:nvPr/>
         </p:nvSpPr>
@@ -36034,7 +35102,7 @@
         <p:spPr>
           <a:xfrm>
             <a:off x="640080" y="329184"/>
-            <a:ext cx="5303520" cy="182880"/>
+            <a:ext cx="9875520" cy="182880"/>
           </a:xfrm>
           <a:prstGeom prst="rect">
             <a:avLst/>
@@ -36075,48 +35143,6 @@
         </p:nvSpPr>
         <p:spPr>
           <a:xfrm>
-            <a:off x="5897880" y="310896"/>
-            <a:ext cx="4800600" cy="256032"/>
-          </a:xfrm>
-          <a:prstGeom prst="rect">
-            <a:avLst/>
-          </a:prstGeom>
-          <a:noFill/>
-        </p:spPr>
-        <p:txBody>
-          <a:bodyPr wrap="none" lIns="9144" rIns="9144" tIns="9144" bIns="9144" anchor="t">
-            <a:spAutoFit/>
-          </a:bodyPr>
-          <a:lstStyle/>
-          <a:p>
-            <a:pPr algn="r">
-              <a:spcAft>
-                <a:spcPts val="0"/>
-              </a:spcAft>
-              <a:defRPr sz="680" b="1">
-                <a:solidFill>
-                  <a:srgbClr val="4F6B00"/>
-                </a:solidFill>
-                <a:latin typeface="Inter"/>
-              </a:defRPr>
-            </a:pPr>
-            <a:r>
-              <a:rPr>
-                <a:latin typeface="Inter"/>
-              </a:rPr>
-              <a:t>Illustrative, Gradient Maintained — demo data, not the client's holdings or managers</a:t>
-            </a:r>
-          </a:p>
-        </p:txBody>
-      </p:sp>
-      <p:sp>
-        <p:nvSpPr>
-          <p:cNvPr id="5" name="TextBox 4"/>
-          <p:cNvSpPr txBox="1"/>
-          <p:nvPr/>
-        </p:nvSpPr>
-        <p:spPr>
-          <a:xfrm>
             <a:off x="640080" y="566928"/>
             <a:ext cx="10058400" cy="530352"/>
           </a:xfrm>
@@ -36153,7 +35179,7 @@
       </p:sp>
       <p:sp>
         <p:nvSpPr>
-          <p:cNvPr id="6" name="Rectangle 5"/>
+          <p:cNvPr id="5" name="Rectangle 4"/>
           <p:cNvSpPr/>
           <p:nvPr/>
         </p:nvSpPr>
@@ -36202,7 +35228,7 @@
       </p:sp>
       <p:sp>
         <p:nvSpPr>
-          <p:cNvPr id="7" name="Rectangle 6"/>
+          <p:cNvPr id="6" name="Rectangle 5"/>
           <p:cNvSpPr/>
           <p:nvPr/>
         </p:nvSpPr>
@@ -36251,7 +35277,7 @@
       </p:sp>
       <p:sp>
         <p:nvSpPr>
-          <p:cNvPr id="8" name="TextBox 7"/>
+          <p:cNvPr id="7" name="TextBox 6"/>
           <p:cNvSpPr txBox="1"/>
           <p:nvPr/>
         </p:nvSpPr>
@@ -36293,7 +35319,7 @@
       </p:sp>
       <p:sp>
         <p:nvSpPr>
-          <p:cNvPr id="9" name="TextBox 8"/>
+          <p:cNvPr id="8" name="TextBox 7"/>
           <p:cNvSpPr txBox="1"/>
           <p:nvPr/>
         </p:nvSpPr>
@@ -36335,7 +35361,7 @@
       </p:sp>
       <p:sp>
         <p:nvSpPr>
-          <p:cNvPr id="10" name="TextBox 9"/>
+          <p:cNvPr id="9" name="TextBox 8"/>
           <p:cNvSpPr txBox="1"/>
           <p:nvPr/>
         </p:nvSpPr>
@@ -36377,7 +35403,7 @@
       </p:sp>
       <p:sp>
         <p:nvSpPr>
-          <p:cNvPr id="11" name="Rectangle 10"/>
+          <p:cNvPr id="10" name="Rectangle 9"/>
           <p:cNvSpPr/>
           <p:nvPr/>
         </p:nvSpPr>
@@ -36426,7 +35452,7 @@
       </p:sp>
       <p:sp>
         <p:nvSpPr>
-          <p:cNvPr id="12" name="Oval 11"/>
+          <p:cNvPr id="11" name="Oval 10"/>
           <p:cNvSpPr/>
           <p:nvPr/>
         </p:nvSpPr>
@@ -36475,7 +35501,7 @@
       </p:sp>
       <p:sp>
         <p:nvSpPr>
-          <p:cNvPr id="13" name="Rectangle 12"/>
+          <p:cNvPr id="12" name="Rectangle 11"/>
           <p:cNvSpPr/>
           <p:nvPr/>
         </p:nvSpPr>
@@ -36524,7 +35550,7 @@
       </p:sp>
       <p:sp>
         <p:nvSpPr>
-          <p:cNvPr id="14" name="TextBox 13"/>
+          <p:cNvPr id="13" name="TextBox 12"/>
           <p:cNvSpPr txBox="1"/>
           <p:nvPr/>
         </p:nvSpPr>
@@ -36566,7 +35592,7 @@
       </p:sp>
       <p:sp>
         <p:nvSpPr>
-          <p:cNvPr id="15" name="Rectangle 14"/>
+          <p:cNvPr id="14" name="Rectangle 13"/>
           <p:cNvSpPr/>
           <p:nvPr/>
         </p:nvSpPr>
@@ -36615,7 +35641,7 @@
       </p:sp>
       <p:sp>
         <p:nvSpPr>
-          <p:cNvPr id="16" name="Oval 15"/>
+          <p:cNvPr id="15" name="Oval 14"/>
           <p:cNvSpPr/>
           <p:nvPr/>
         </p:nvSpPr>
@@ -36664,7 +35690,7 @@
       </p:sp>
       <p:sp>
         <p:nvSpPr>
-          <p:cNvPr id="17" name="Rectangle 16"/>
+          <p:cNvPr id="16" name="Rectangle 15"/>
           <p:cNvSpPr/>
           <p:nvPr/>
         </p:nvSpPr>
@@ -36713,7 +35739,7 @@
       </p:sp>
       <p:sp>
         <p:nvSpPr>
-          <p:cNvPr id="18" name="TextBox 17"/>
+          <p:cNvPr id="17" name="TextBox 16"/>
           <p:cNvSpPr txBox="1"/>
           <p:nvPr/>
         </p:nvSpPr>
@@ -36755,7 +35781,7 @@
       </p:sp>
       <p:sp>
         <p:nvSpPr>
-          <p:cNvPr id="19" name="Rectangle 18"/>
+          <p:cNvPr id="18" name="Rectangle 17"/>
           <p:cNvSpPr/>
           <p:nvPr/>
         </p:nvSpPr>
@@ -36804,7 +35830,7 @@
       </p:sp>
       <p:sp>
         <p:nvSpPr>
-          <p:cNvPr id="20" name="Oval 19"/>
+          <p:cNvPr id="19" name="Oval 18"/>
           <p:cNvSpPr/>
           <p:nvPr/>
         </p:nvSpPr>
@@ -36853,7 +35879,7 @@
       </p:sp>
       <p:sp>
         <p:nvSpPr>
-          <p:cNvPr id="21" name="Rectangle 20"/>
+          <p:cNvPr id="20" name="Rectangle 19"/>
           <p:cNvSpPr/>
           <p:nvPr/>
         </p:nvSpPr>
@@ -36902,7 +35928,7 @@
       </p:sp>
       <p:sp>
         <p:nvSpPr>
-          <p:cNvPr id="22" name="Rectangle 21"/>
+          <p:cNvPr id="21" name="Rectangle 20"/>
           <p:cNvSpPr/>
           <p:nvPr/>
         </p:nvSpPr>
@@ -36951,7 +35977,7 @@
       </p:sp>
       <p:sp>
         <p:nvSpPr>
-          <p:cNvPr id="23" name="TextBox 22"/>
+          <p:cNvPr id="22" name="TextBox 21"/>
           <p:cNvSpPr txBox="1"/>
           <p:nvPr/>
         </p:nvSpPr>
@@ -36993,7 +36019,7 @@
       </p:sp>
       <p:graphicFrame>
         <p:nvGraphicFramePr>
-          <p:cNvPr id="24" name="Chart 23"/>
+          <p:cNvPr id="23" name="Chart 22"/>
           <p:cNvGraphicFramePr>
             <a:graphicFrameLocks noGrp="1"/>
           </p:cNvGraphicFramePr>
@@ -37011,7 +36037,7 @@
       </p:graphicFrame>
       <p:sp>
         <p:nvSpPr>
-          <p:cNvPr id="25" name="Rectangle 24"/>
+          <p:cNvPr id="24" name="Rectangle 23"/>
           <p:cNvSpPr/>
           <p:nvPr/>
         </p:nvSpPr>
@@ -37060,7 +36086,7 @@
       </p:sp>
       <p:sp>
         <p:nvSpPr>
-          <p:cNvPr id="26" name="TextBox 25"/>
+          <p:cNvPr id="25" name="TextBox 24"/>
           <p:cNvSpPr txBox="1"/>
           <p:nvPr/>
         </p:nvSpPr>
@@ -37102,7 +36128,7 @@
       </p:sp>
       <p:sp>
         <p:nvSpPr>
-          <p:cNvPr id="27" name="TextBox 26"/>
+          <p:cNvPr id="26" name="TextBox 25"/>
           <p:cNvSpPr txBox="1"/>
           <p:nvPr/>
         </p:nvSpPr>
@@ -37144,7 +36170,7 @@
       </p:sp>
       <p:sp>
         <p:nvSpPr>
-          <p:cNvPr id="28" name="TextBox 27"/>
+          <p:cNvPr id="27" name="TextBox 26"/>
           <p:cNvSpPr txBox="1"/>
           <p:nvPr/>
         </p:nvSpPr>
@@ -37260,7 +36286,7 @@
         <p:spPr>
           <a:xfrm>
             <a:off x="640080" y="329184"/>
-            <a:ext cx="5303520" cy="182880"/>
+            <a:ext cx="9875520" cy="182880"/>
           </a:xfrm>
           <a:prstGeom prst="rect">
             <a:avLst/>
@@ -37301,48 +36327,6 @@
         </p:nvSpPr>
         <p:spPr>
           <a:xfrm>
-            <a:off x="5897880" y="310896"/>
-            <a:ext cx="4800600" cy="256032"/>
-          </a:xfrm>
-          <a:prstGeom prst="rect">
-            <a:avLst/>
-          </a:prstGeom>
-          <a:noFill/>
-        </p:spPr>
-        <p:txBody>
-          <a:bodyPr wrap="none" lIns="9144" rIns="9144" tIns="9144" bIns="9144" anchor="t">
-            <a:spAutoFit/>
-          </a:bodyPr>
-          <a:lstStyle/>
-          <a:p>
-            <a:pPr algn="r">
-              <a:spcAft>
-                <a:spcPts val="0"/>
-              </a:spcAft>
-              <a:defRPr sz="680" b="1">
-                <a:solidFill>
-                  <a:srgbClr val="4F6B00"/>
-                </a:solidFill>
-                <a:latin typeface="Inter"/>
-              </a:defRPr>
-            </a:pPr>
-            <a:r>
-              <a:rPr>
-                <a:latin typeface="Inter"/>
-              </a:rPr>
-              <a:t>Illustrative, Gradient Maintained — demo data, not the client's holdings or managers</a:t>
-            </a:r>
-          </a:p>
-        </p:txBody>
-      </p:sp>
-      <p:sp>
-        <p:nvSpPr>
-          <p:cNvPr id="5" name="TextBox 4"/>
-          <p:cNvSpPr txBox="1"/>
-          <p:nvPr/>
-        </p:nvSpPr>
-        <p:spPr>
-          <a:xfrm>
             <a:off x="640080" y="566928"/>
             <a:ext cx="10058400" cy="530352"/>
           </a:xfrm>
@@ -37379,7 +36363,7 @@
       </p:sp>
       <p:sp>
         <p:nvSpPr>
-          <p:cNvPr id="6" name="Rectangle 5"/>
+          <p:cNvPr id="5" name="Rectangle 4"/>
           <p:cNvSpPr/>
           <p:nvPr/>
         </p:nvSpPr>
@@ -37428,7 +36412,7 @@
       </p:sp>
       <p:sp>
         <p:nvSpPr>
-          <p:cNvPr id="7" name="Rectangle 6"/>
+          <p:cNvPr id="6" name="Rectangle 5"/>
           <p:cNvSpPr/>
           <p:nvPr/>
         </p:nvSpPr>
@@ -37477,7 +36461,7 @@
       </p:sp>
       <p:sp>
         <p:nvSpPr>
-          <p:cNvPr id="8" name="TextBox 7"/>
+          <p:cNvPr id="7" name="TextBox 6"/>
           <p:cNvSpPr txBox="1"/>
           <p:nvPr/>
         </p:nvSpPr>
@@ -37519,7 +36503,7 @@
       </p:sp>
       <p:sp>
         <p:nvSpPr>
-          <p:cNvPr id="9" name="TextBox 8"/>
+          <p:cNvPr id="8" name="TextBox 7"/>
           <p:cNvSpPr txBox="1"/>
           <p:nvPr/>
         </p:nvSpPr>
@@ -37561,7 +36545,7 @@
       </p:sp>
       <p:graphicFrame>
         <p:nvGraphicFramePr>
-          <p:cNvPr id="10" name="Chart 9"/>
+          <p:cNvPr id="9" name="Chart 8"/>
           <p:cNvGraphicFramePr>
             <a:graphicFrameLocks noGrp="1"/>
           </p:cNvGraphicFramePr>
@@ -37579,7 +36563,7 @@
       </p:graphicFrame>
       <p:sp>
         <p:nvSpPr>
-          <p:cNvPr id="11" name="Rectangle 10"/>
+          <p:cNvPr id="10" name="Rectangle 9"/>
           <p:cNvSpPr/>
           <p:nvPr/>
         </p:nvSpPr>
@@ -37628,7 +36612,7 @@
       </p:sp>
       <p:sp>
         <p:nvSpPr>
-          <p:cNvPr id="12" name="TextBox 11"/>
+          <p:cNvPr id="11" name="TextBox 10"/>
           <p:cNvSpPr txBox="1"/>
           <p:nvPr/>
         </p:nvSpPr>
@@ -37670,7 +36654,7 @@
       </p:sp>
       <p:sp>
         <p:nvSpPr>
-          <p:cNvPr id="13" name="TextBox 12"/>
+          <p:cNvPr id="12" name="TextBox 11"/>
           <p:cNvSpPr txBox="1"/>
           <p:nvPr/>
         </p:nvSpPr>
@@ -37712,7 +36696,7 @@
       </p:sp>
       <p:sp>
         <p:nvSpPr>
-          <p:cNvPr id="14" name="TextBox 13"/>
+          <p:cNvPr id="13" name="TextBox 12"/>
           <p:cNvSpPr txBox="1"/>
           <p:nvPr/>
         </p:nvSpPr>
